--- a/day2-deck/decks/Warranty & Internal - House Style.pptx
+++ b/day2-deck/decks/Warranty & Internal - House Style.pptx
@@ -124,9 +124,7 @@
     <c:autoTitleDeleted val="1"/>
     <c:plotArea>
       <c:layout/>
-      <c:barChart>
-        <c:barDir val="col"/>
-        <c:grouping val="clustered"/>
+      <c:lineChart>
         <c:varyColors val="0"/>
         <c:ser>
           <c:idx val="0"/>
@@ -137,15 +135,22 @@
               <c:strCache>
                 <c:ptCount val="1"/>
                 <c:pt idx="0">
-                  <c:v>2025</c:v>
+                  <c:v>2026</c:v>
                 </c:pt>
               </c:strCache>
             </c:strRef>
           </c:tx>
           <c:spPr>
             <a:solidFill>
-              <a:srgbClr val="9AA3AD"/>
+              <a:srgbClr val="2587C5"/>
             </a:solidFill>
+            <a:ln w="38100" cap="flat">
+              <a:solidFill>
+                <a:srgbClr val="2587C5"/>
+              </a:solidFill>
+              <a:prstDash val="solid"/>
+              <a:round/>
+            </a:ln>
             <a:effectLst/>
           </c:spPr>
           <c:invertIfNegative val="0"/>
@@ -166,13 +171,30 @@
               </a:p>
             </c:txPr>
             <c:showLegendKey val="0"/>
-            <c:showVal val="1"/>
+            <c:showVal val="0"/>
             <c:showCatName val="0"/>
             <c:showSerName val="0"/>
             <c:showPercent val="0"/>
             <c:showBubbleSize val="0"/>
             <c:showLeaderLines val="0"/>
           </c:dLbls>
+          <c:marker>
+            <c:symbol val="circle"/>
+            <c:size val="8"/>
+            <c:spPr>
+              <a:solidFill>
+                <a:srgbClr val="2587C5"/>
+              </a:solidFill>
+              <a:ln w="9525" cap="flat">
+                <a:solidFill>
+                  <a:srgbClr val="2587C5"/>
+                </a:solidFill>
+                <a:prstDash val="solid"/>
+                <a:round/>
+              </a:ln>
+              <a:effectLst/>
+            </c:spPr>
+          </c:marker>
           <c:cat>
             <c:multiLvlStrRef>
               <c:f>Sheet1!$A$2:$A$10</c:f>
@@ -217,59 +239,209 @@
                 <c:formatCode>General</c:formatCode>
                 <c:ptCount val="9"/>
                 <c:pt idx="0">
-                  <c:v>16565</c:v>
+                  <c:v>14264</c:v>
                 </c:pt>
                 <c:pt idx="1">
-                  <c:v>15707</c:v>
+                  <c:v>12746</c:v>
                 </c:pt>
                 <c:pt idx="2">
-                  <c:v>15981</c:v>
+                  <c:v>13940</c:v>
                 </c:pt>
                 <c:pt idx="3">
-                  <c:v>14990</c:v>
+                  <c:v>13710</c:v>
                 </c:pt>
                 <c:pt idx="4">
-                  <c:v>14527</c:v>
+                  <c:v>13121</c:v>
                 </c:pt>
                 <c:pt idx="5">
-                  <c:v>14882</c:v>
+                  <c:v>14168</c:v>
                 </c:pt>
                 <c:pt idx="6">
-                  <c:v>15408</c:v>
+                  <c:v>14663</c:v>
                 </c:pt>
                 <c:pt idx="7">
-                  <c:v>14622</c:v>
+                  <c:v>15204</c:v>
                 </c:pt>
                 <c:pt idx="8">
-                  <c:v>13082</c:v>
+                  <c:v>15075</c:v>
                 </c:pt>
               </c:numCache>
             </c:numRef>
           </c:val>
+          <c:smooth val="0"/>
         </c:ser>
+        <c:dLbls>
+          <c:numFmt formatCode="#,##0.0,&quot;K&quot;" sourceLinked="0"/>
+          <c:txPr>
+            <a:bodyPr/>
+            <a:lstStyle/>
+            <a:p>
+              <a:pPr>
+                <a:defRPr b="0" i="0" strike="noStrike" sz="1400" u="none">
+                  <a:solidFill>
+                    <a:srgbClr val="1A1A1A"/>
+                  </a:solidFill>
+                  <a:latin typeface="+mn-lt"/>
+                </a:defRPr>
+              </a:pPr>
+            </a:p>
+          </c:txPr>
+          <c:showLegendKey val="0"/>
+          <c:showVal val="0"/>
+          <c:showCatName val="0"/>
+          <c:showSerName val="0"/>
+          <c:showPercent val="0"/>
+          <c:showBubbleSize val="0"/>
+          <c:showLeaderLines val="0"/>
+        </c:dLbls>
+        <c:marker val="1"/>
+        <c:axId val="2094734554"/>
+        <c:axId val="2094734552"/>
+        <c:axId val="2094734556"/>
+      </c:lineChart>
+      <c:catAx>
+        <c:axId val="2094734554"/>
+        <c:scaling>
+          <c:orientation val="minMax"/>
+        </c:scaling>
+        <c:delete val="0"/>
+        <c:axPos val="b"/>
+        <c:numFmt formatCode="General" sourceLinked="1"/>
+        <c:majorTickMark val="out"/>
+        <c:minorTickMark val="none"/>
+        <c:tickLblPos val="low"/>
+        <c:spPr>
+          <a:ln w="12700" cap="flat">
+            <a:noFill/>
+            <a:prstDash val="solid"/>
+            <a:round/>
+          </a:ln>
+        </c:spPr>
+        <c:txPr>
+          <a:bodyPr/>
+          <a:lstStyle/>
+          <a:p>
+            <a:pPr>
+              <a:defRPr sz="1400" b="0" i="0" u="none" strike="noStrike">
+                <a:solidFill>
+                  <a:srgbClr val="FFFFFF"/>
+                </a:solidFill>
+                <a:latin typeface="+mn-lt"/>
+              </a:defRPr>
+            </a:pPr>
+            <a:endParaRPr lang="en-US"/>
+          </a:p>
+        </c:txPr>
+        <c:crossAx val="2094734552"/>
+        <c:crosses val="min"/>
+        <c:auto val="1"/>
+        <c:lblAlgn val="ctr"/>
+        <c:noMultiLvlLbl val="1"/>
+      </c:catAx>
+      <c:valAx>
+        <c:axId val="2094734552"/>
+        <c:scaling>
+          <c:orientation val="minMax"/>
+          <c:max val="18000"/>
+          <c:min val="10000"/>
+        </c:scaling>
+        <c:delete val="0"/>
+        <c:axPos val="l"/>
+        <c:numFmt formatCode="#,##0" sourceLinked="0"/>
+        <c:majorTickMark val="out"/>
+        <c:minorTickMark val="none"/>
+        <c:tickLblPos val="nextTo"/>
+        <c:spPr>
+          <a:ln w="12700" cap="flat">
+            <a:noFill/>
+            <a:prstDash val="solid"/>
+            <a:round/>
+          </a:ln>
+        </c:spPr>
+        <c:txPr>
+          <a:bodyPr/>
+          <a:lstStyle/>
+          <a:p>
+            <a:pPr>
+              <a:defRPr sz="1400" b="0" i="0" u="none" strike="noStrike">
+                <a:solidFill>
+                  <a:srgbClr val="FFFFFF"/>
+                </a:solidFill>
+                <a:latin typeface="+mn-lt"/>
+              </a:defRPr>
+            </a:pPr>
+            <a:endParaRPr lang="en-US"/>
+          </a:p>
+        </c:txPr>
+        <c:crossAx val="2094734554"/>
+        <c:crosses val="autoZero"/>
+        <c:crossBetween val="between"/>
+        <c:majorUnit val="2000"/>
+      </c:valAx>
+      <c:spPr>
+        <a:noFill/>
+        <a:ln>
+          <a:noFill/>
+        </a:ln>
+        <a:effectLst/>
+      </c:spPr>
+    </c:plotArea>
+    <c:plotVisOnly val="1"/>
+    <c:dispBlanksAs val="span"/>
+  </c:chart>
+  <c:spPr>
+    <a:noFill/>
+    <a:ln>
+      <a:noFill/>
+    </a:ln>
+    <a:effectLst/>
+  </c:spPr>
+  <c:externalData r:id="rId1">
+    <c:autoUpdate val="0"/>
+  </c:externalData>
+</c:chartSpace>
+</file>
+
+<file path=ppt/charts/chart10.xml><?xml version="1.0" encoding="utf-8"?>
+<c:chartSpace xmlns:c="http://schemas.openxmlformats.org/drawingml/2006/chart" xmlns:a="http://schemas.openxmlformats.org/drawingml/2006/main" xmlns:r="http://schemas.openxmlformats.org/officeDocument/2006/relationships">
+  <c:date1904 val="0"/>
+  <c:roundedCorners val="1"/>
+  <c:chart>
+    <c:autoTitleDeleted val="1"/>
+    <c:plotArea>
+      <c:layout/>
+      <c:lineChart>
+        <c:varyColors val="0"/>
         <c:ser>
-          <c:idx val="1"/>
-          <c:order val="1"/>
+          <c:idx val="0"/>
+          <c:order val="0"/>
           <c:tx>
             <c:strRef>
-              <c:f>Sheet1!$C$1</c:f>
+              <c:f>Sheet1!$B$1</c:f>
               <c:strCache>
                 <c:ptCount val="1"/>
                 <c:pt idx="0">
-                  <c:v>2026</c:v>
+                  <c:v>2025</c:v>
                 </c:pt>
               </c:strCache>
             </c:strRef>
           </c:tx>
           <c:spPr>
             <a:solidFill>
-              <a:srgbClr val="2587C5"/>
+              <a:srgbClr val="9AA3AD"/>
             </a:solidFill>
+            <a:ln w="38100" cap="flat">
+              <a:solidFill>
+                <a:srgbClr val="9AA3AD"/>
+              </a:solidFill>
+              <a:prstDash val="solid"/>
+              <a:round/>
+            </a:ln>
             <a:effectLst/>
           </c:spPr>
           <c:invertIfNegative val="0"/>
           <c:dLbls>
-            <c:numFmt formatCode="#,##0.0,&quot;K&quot;" sourceLinked="0"/>
+            <c:numFmt formatCode="&quot;$&quot;#,##0.00" sourceLinked="0"/>
             <c:txPr>
               <a:bodyPr/>
               <a:lstStyle/>
@@ -285,13 +457,30 @@
               </a:p>
             </c:txPr>
             <c:showLegendKey val="0"/>
-            <c:showVal val="1"/>
+            <c:showVal val="0"/>
             <c:showCatName val="0"/>
             <c:showSerName val="0"/>
             <c:showPercent val="0"/>
             <c:showBubbleSize val="0"/>
             <c:showLeaderLines val="0"/>
           </c:dLbls>
+          <c:marker>
+            <c:symbol val="circle"/>
+            <c:size val="8"/>
+            <c:spPr>
+              <a:solidFill>
+                <a:srgbClr val="9AA3AD"/>
+              </a:solidFill>
+              <a:ln w="9525" cap="flat">
+                <a:solidFill>
+                  <a:srgbClr val="9AA3AD"/>
+                </a:solidFill>
+                <a:prstDash val="solid"/>
+                <a:round/>
+              </a:ln>
+              <a:effectLst/>
+            </c:spPr>
+          </c:marker>
           <c:cat>
             <c:multiLvlStrRef>
               <c:f>Sheet1!$A$2:$A$10</c:f>
@@ -331,43 +520,44 @@
           </c:cat>
           <c:val>
             <c:numRef>
-              <c:f>Sheet1!$C$2:$C$10</c:f>
+              <c:f>Sheet1!$B$2:$B$10</c:f>
               <c:numCache>
                 <c:formatCode>General</c:formatCode>
                 <c:ptCount val="9"/>
                 <c:pt idx="0">
-                  <c:v>14264</c:v>
+                  <c:v>175</c:v>
                 </c:pt>
                 <c:pt idx="1">
-                  <c:v>12746</c:v>
+                  <c:v>175</c:v>
                 </c:pt>
                 <c:pt idx="2">
-                  <c:v>13940</c:v>
+                  <c:v>173</c:v>
                 </c:pt>
                 <c:pt idx="3">
-                  <c:v>13710</c:v>
+                  <c:v>176</c:v>
                 </c:pt>
                 <c:pt idx="4">
-                  <c:v>13121</c:v>
+                  <c:v>182</c:v>
                 </c:pt>
                 <c:pt idx="5">
-                  <c:v>14168</c:v>
+                  <c:v>185</c:v>
                 </c:pt>
                 <c:pt idx="6">
-                  <c:v>14663</c:v>
+                  <c:v>187</c:v>
                 </c:pt>
                 <c:pt idx="7">
-                  <c:v>15204</c:v>
+                  <c:v>186</c:v>
                 </c:pt>
                 <c:pt idx="8">
-                  <c:v>15075</c:v>
+                  <c:v>187</c:v>
                 </c:pt>
               </c:numCache>
             </c:numRef>
           </c:val>
+          <c:smooth val="0"/>
         </c:ser>
         <c:dLbls>
-          <c:numFmt formatCode="#,##0.0,&quot;K&quot;" sourceLinked="0"/>
+          <c:numFmt formatCode="&quot;$&quot;#,##0.00" sourceLinked="0"/>
           <c:txPr>
             <a:bodyPr/>
             <a:lstStyle/>
@@ -383,19 +573,18 @@
             </a:p>
           </c:txPr>
           <c:showLegendKey val="0"/>
-          <c:showVal val="1"/>
+          <c:showVal val="0"/>
           <c:showCatName val="0"/>
           <c:showSerName val="0"/>
           <c:showPercent val="0"/>
           <c:showBubbleSize val="0"/>
           <c:showLeaderLines val="0"/>
         </c:dLbls>
-        <c:gapWidth val="35"/>
-        <c:overlap val="-35"/>
+        <c:marker val="1"/>
         <c:axId val="2094734554"/>
         <c:axId val="2094734552"/>
         <c:axId val="2094734556"/>
-      </c:barChart>
+      </c:lineChart>
       <c:catAx>
         <c:axId val="2094734554"/>
         <c:scaling>
@@ -441,8 +630,8 @@
         <c:axId val="2094734552"/>
         <c:scaling>
           <c:orientation val="minMax"/>
-          <c:max val="20000"/>
-          <c:min val="0"/>
+          <c:max val="210"/>
+          <c:min val="160"/>
         </c:scaling>
         <c:delete val="0"/>
         <c:axPos val="l"/>
@@ -457,7 +646,7 @@
             </a:ln>
           </c:spPr>
         </c:majorGridlines>
-        <c:numFmt formatCode="#,##0" sourceLinked="0"/>
+        <c:numFmt formatCode="&quot;$&quot;#,##0" sourceLinked="0"/>
         <c:majorTickMark val="out"/>
         <c:minorTickMark val="none"/>
         <c:tickLblPos val="nextTo"/>
@@ -486,7 +675,301 @@
         <c:crossAx val="2094734554"/>
         <c:crosses val="autoZero"/>
         <c:crossBetween val="between"/>
-        <c:majorUnit val="5000"/>
+        <c:majorUnit val="10"/>
+      </c:valAx>
+      <c:spPr>
+        <a:solidFill>
+          <a:srgbClr val="FFFFFF">
+            <a:alpha val="0"/>
+          </a:srgbClr>
+        </a:solidFill>
+        <a:ln>
+          <a:noFill/>
+        </a:ln>
+        <a:effectLst/>
+      </c:spPr>
+    </c:plotArea>
+    <c:plotVisOnly val="1"/>
+    <c:dispBlanksAs val="span"/>
+  </c:chart>
+  <c:spPr>
+    <a:solidFill>
+      <a:srgbClr val="FFFFFF">
+        <a:alpha val="0"/>
+      </a:srgbClr>
+    </a:solidFill>
+    <a:ln>
+      <a:noFill/>
+    </a:ln>
+    <a:effectLst/>
+  </c:spPr>
+  <c:externalData r:id="rId1">
+    <c:autoUpdate val="0"/>
+  </c:externalData>
+</c:chartSpace>
+</file>
+
+<file path=ppt/charts/chart11.xml><?xml version="1.0" encoding="utf-8"?>
+<c:chartSpace xmlns:c="http://schemas.openxmlformats.org/drawingml/2006/chart" xmlns:a="http://schemas.openxmlformats.org/drawingml/2006/main" xmlns:r="http://schemas.openxmlformats.org/officeDocument/2006/relationships">
+  <c:date1904 val="0"/>
+  <c:roundedCorners val="1"/>
+  <c:chart>
+    <c:autoTitleDeleted val="1"/>
+    <c:plotArea>
+      <c:layout/>
+      <c:lineChart>
+        <c:varyColors val="0"/>
+        <c:ser>
+          <c:idx val="0"/>
+          <c:order val="0"/>
+          <c:tx>
+            <c:strRef>
+              <c:f>Sheet1!$B$1</c:f>
+              <c:strCache>
+                <c:ptCount val="1"/>
+                <c:pt idx="0">
+                  <c:v>2026</c:v>
+                </c:pt>
+              </c:strCache>
+            </c:strRef>
+          </c:tx>
+          <c:spPr>
+            <a:solidFill>
+              <a:srgbClr val="2587C5"/>
+            </a:solidFill>
+            <a:ln w="38100" cap="flat">
+              <a:solidFill>
+                <a:srgbClr val="2587C5"/>
+              </a:solidFill>
+              <a:prstDash val="solid"/>
+              <a:round/>
+            </a:ln>
+            <a:effectLst/>
+          </c:spPr>
+          <c:invertIfNegative val="0"/>
+          <c:dLbls>
+            <c:numFmt formatCode="&quot;$&quot;#,##0.00" sourceLinked="0"/>
+            <c:txPr>
+              <a:bodyPr/>
+              <a:lstStyle/>
+              <a:p>
+                <a:pPr>
+                  <a:defRPr b="0" i="0" strike="noStrike" sz="1400" u="none">
+                    <a:solidFill>
+                      <a:srgbClr val="1A1A1A"/>
+                    </a:solidFill>
+                    <a:latin typeface="+mn-lt"/>
+                  </a:defRPr>
+                </a:pPr>
+              </a:p>
+            </c:txPr>
+            <c:showLegendKey val="0"/>
+            <c:showVal val="0"/>
+            <c:showCatName val="0"/>
+            <c:showSerName val="0"/>
+            <c:showPercent val="0"/>
+            <c:showBubbleSize val="0"/>
+            <c:showLeaderLines val="0"/>
+          </c:dLbls>
+          <c:marker>
+            <c:symbol val="circle"/>
+            <c:size val="8"/>
+            <c:spPr>
+              <a:solidFill>
+                <a:srgbClr val="2587C5"/>
+              </a:solidFill>
+              <a:ln w="9525" cap="flat">
+                <a:solidFill>
+                  <a:srgbClr val="2587C5"/>
+                </a:solidFill>
+                <a:prstDash val="solid"/>
+                <a:round/>
+              </a:ln>
+              <a:effectLst/>
+            </c:spPr>
+          </c:marker>
+          <c:cat>
+            <c:multiLvlStrRef>
+              <c:f>Sheet1!$A$2:$A$10</c:f>
+              <c:multiLvlStrCache>
+                <c:ptCount val="9"/>
+                <c:lvl>
+                  <c:pt idx="0">
+                    <c:v>Jan</c:v>
+                  </c:pt>
+                  <c:pt idx="1">
+                    <c:v>Feb</c:v>
+                  </c:pt>
+                  <c:pt idx="2">
+                    <c:v>Mar</c:v>
+                  </c:pt>
+                  <c:pt idx="3">
+                    <c:v>Apr</c:v>
+                  </c:pt>
+                  <c:pt idx="4">
+                    <c:v>May</c:v>
+                  </c:pt>
+                  <c:pt idx="5">
+                    <c:v>Jun</c:v>
+                  </c:pt>
+                  <c:pt idx="6">
+                    <c:v>Jul</c:v>
+                  </c:pt>
+                  <c:pt idx="7">
+                    <c:v>Aug</c:v>
+                  </c:pt>
+                  <c:pt idx="8">
+                    <c:v>Sep</c:v>
+                  </c:pt>
+                </c:lvl>
+              </c:multiLvlStrCache>
+            </c:multiLvlStrRef>
+          </c:cat>
+          <c:val>
+            <c:numRef>
+              <c:f>Sheet1!$B$2:$B$10</c:f>
+              <c:numCache>
+                <c:formatCode>General</c:formatCode>
+                <c:ptCount val="9"/>
+                <c:pt idx="0">
+                  <c:v>126</c:v>
+                </c:pt>
+                <c:pt idx="1">
+                  <c:v>124</c:v>
+                </c:pt>
+                <c:pt idx="2">
+                  <c:v>131</c:v>
+                </c:pt>
+                <c:pt idx="3">
+                  <c:v>131</c:v>
+                </c:pt>
+                <c:pt idx="4">
+                  <c:v>132</c:v>
+                </c:pt>
+                <c:pt idx="5">
+                  <c:v>128</c:v>
+                </c:pt>
+                <c:pt idx="6">
+                  <c:v>133</c:v>
+                </c:pt>
+                <c:pt idx="7">
+                  <c:v>130</c:v>
+                </c:pt>
+                <c:pt idx="8">
+                  <c:v>134</c:v>
+                </c:pt>
+              </c:numCache>
+            </c:numRef>
+          </c:val>
+          <c:smooth val="0"/>
+        </c:ser>
+        <c:dLbls>
+          <c:numFmt formatCode="&quot;$&quot;#,##0.00" sourceLinked="0"/>
+          <c:txPr>
+            <a:bodyPr/>
+            <a:lstStyle/>
+            <a:p>
+              <a:pPr>
+                <a:defRPr b="0" i="0" strike="noStrike" sz="1400" u="none">
+                  <a:solidFill>
+                    <a:srgbClr val="1A1A1A"/>
+                  </a:solidFill>
+                  <a:latin typeface="+mn-lt"/>
+                </a:defRPr>
+              </a:pPr>
+            </a:p>
+          </c:txPr>
+          <c:showLegendKey val="0"/>
+          <c:showVal val="0"/>
+          <c:showCatName val="0"/>
+          <c:showSerName val="0"/>
+          <c:showPercent val="0"/>
+          <c:showBubbleSize val="0"/>
+          <c:showLeaderLines val="0"/>
+        </c:dLbls>
+        <c:marker val="1"/>
+        <c:axId val="2094734554"/>
+        <c:axId val="2094734552"/>
+        <c:axId val="2094734556"/>
+      </c:lineChart>
+      <c:catAx>
+        <c:axId val="2094734554"/>
+        <c:scaling>
+          <c:orientation val="minMax"/>
+        </c:scaling>
+        <c:delete val="0"/>
+        <c:axPos val="b"/>
+        <c:numFmt formatCode="General" sourceLinked="1"/>
+        <c:majorTickMark val="out"/>
+        <c:minorTickMark val="none"/>
+        <c:tickLblPos val="low"/>
+        <c:spPr>
+          <a:ln w="12700" cap="flat">
+            <a:noFill/>
+            <a:prstDash val="solid"/>
+            <a:round/>
+          </a:ln>
+        </c:spPr>
+        <c:txPr>
+          <a:bodyPr/>
+          <a:lstStyle/>
+          <a:p>
+            <a:pPr>
+              <a:defRPr sz="1400" b="0" i="0" u="none" strike="noStrike">
+                <a:solidFill>
+                  <a:srgbClr val="FFFFFF"/>
+                </a:solidFill>
+                <a:latin typeface="+mn-lt"/>
+              </a:defRPr>
+            </a:pPr>
+            <a:endParaRPr lang="en-US"/>
+          </a:p>
+        </c:txPr>
+        <c:crossAx val="2094734552"/>
+        <c:crosses val="min"/>
+        <c:auto val="1"/>
+        <c:lblAlgn val="ctr"/>
+        <c:noMultiLvlLbl val="1"/>
+      </c:catAx>
+      <c:valAx>
+        <c:axId val="2094734552"/>
+        <c:scaling>
+          <c:orientation val="minMax"/>
+          <c:max val="140"/>
+          <c:min val="120"/>
+        </c:scaling>
+        <c:delete val="0"/>
+        <c:axPos val="l"/>
+        <c:numFmt formatCode="&quot;$&quot;#,##0" sourceLinked="0"/>
+        <c:majorTickMark val="out"/>
+        <c:minorTickMark val="none"/>
+        <c:tickLblPos val="nextTo"/>
+        <c:spPr>
+          <a:ln w="12700" cap="flat">
+            <a:noFill/>
+            <a:prstDash val="solid"/>
+            <a:round/>
+          </a:ln>
+        </c:spPr>
+        <c:txPr>
+          <a:bodyPr/>
+          <a:lstStyle/>
+          <a:p>
+            <a:pPr>
+              <a:defRPr sz="1400" b="0" i="0" u="none" strike="noStrike">
+                <a:solidFill>
+                  <a:srgbClr val="FFFFFF"/>
+                </a:solidFill>
+                <a:latin typeface="+mn-lt"/>
+              </a:defRPr>
+            </a:pPr>
+            <a:endParaRPr lang="en-US"/>
+          </a:p>
+        </c:txPr>
+        <c:crossAx val="2094734554"/>
+        <c:crosses val="autoZero"/>
+        <c:crossBetween val="between"/>
+        <c:majorUnit val="5"/>
       </c:valAx>
       <c:spPr>
         <a:noFill/>
@@ -496,26 +979,6 @@
         <a:effectLst/>
       </c:spPr>
     </c:plotArea>
-    <c:legend>
-      <c:legendPos val="t"/>
-      <c:overlay val="0"/>
-      <c:txPr>
-        <a:bodyPr/>
-        <a:lstStyle/>
-        <a:p>
-          <a:pPr>
-            <a:defRPr sz="1400">
-              <a:solidFill>
-                <a:srgbClr val="1A1A1A"/>
-              </a:solidFill>
-              <a:latin typeface="+mn-lt"/>
-              <a:cs typeface="+mn-lt"/>
-            </a:defRPr>
-          </a:pPr>
-          <a:endParaRPr lang="en-US"/>
-        </a:p>
-      </c:txPr>
-    </c:legend>
     <c:plotVisOnly val="1"/>
     <c:dispBlanksAs val="span"/>
   </c:chart>
@@ -532,7 +995,883 @@
 </c:chartSpace>
 </file>
 
-<file path=ppt/charts/chart10.xml><?xml version="1.0" encoding="utf-8"?>
+<file path=ppt/charts/chart12.xml><?xml version="1.0" encoding="utf-8"?>
+<c:chartSpace xmlns:c="http://schemas.openxmlformats.org/drawingml/2006/chart" xmlns:a="http://schemas.openxmlformats.org/drawingml/2006/main" xmlns:r="http://schemas.openxmlformats.org/officeDocument/2006/relationships">
+  <c:date1904 val="0"/>
+  <c:roundedCorners val="1"/>
+  <c:chart>
+    <c:autoTitleDeleted val="1"/>
+    <c:plotArea>
+      <c:layout/>
+      <c:lineChart>
+        <c:varyColors val="0"/>
+        <c:ser>
+          <c:idx val="0"/>
+          <c:order val="0"/>
+          <c:tx>
+            <c:strRef>
+              <c:f>Sheet1!$B$1</c:f>
+              <c:strCache>
+                <c:ptCount val="1"/>
+                <c:pt idx="0">
+                  <c:v>2026</c:v>
+                </c:pt>
+              </c:strCache>
+            </c:strRef>
+          </c:tx>
+          <c:spPr>
+            <a:solidFill>
+              <a:srgbClr val="2587C5"/>
+            </a:solidFill>
+            <a:ln>
+              <a:noFill/>
+            </a:ln>
+            <a:effectLst/>
+          </c:spPr>
+          <c:invertIfNegative val="0"/>
+          <c:dLbls>
+            <c:numFmt formatCode="&quot;$&quot;#,##0.00" sourceLinked="0"/>
+            <c:txPr>
+              <a:bodyPr/>
+              <a:lstStyle/>
+              <a:p>
+                <a:pPr>
+                  <a:defRPr b="0" i="0" strike="noStrike" sz="1400" u="none">
+                    <a:solidFill>
+                      <a:srgbClr val="1A1A1A"/>
+                    </a:solidFill>
+                    <a:latin typeface="+mn-lt"/>
+                  </a:defRPr>
+                </a:pPr>
+              </a:p>
+            </c:txPr>
+            <c:dLblPos val="t"/>
+            <c:showLegendKey val="0"/>
+            <c:showVal val="1"/>
+            <c:showCatName val="0"/>
+            <c:showSerName val="0"/>
+            <c:showPercent val="0"/>
+            <c:showBubbleSize val="0"/>
+            <c:showLeaderLines val="0"/>
+          </c:dLbls>
+          <c:marker>
+            <c:symbol val="none"/>
+            <c:size val="8"/>
+            <c:spPr>
+              <a:solidFill>
+                <a:srgbClr val="2587C5"/>
+              </a:solidFill>
+              <a:ln w="9525" cap="flat">
+                <a:solidFill>
+                  <a:srgbClr val="2587C5"/>
+                </a:solidFill>
+                <a:prstDash val="solid"/>
+                <a:round/>
+              </a:ln>
+              <a:effectLst/>
+            </c:spPr>
+          </c:marker>
+          <c:cat>
+            <c:multiLvlStrRef>
+              <c:f>Sheet1!$A$2:$A$10</c:f>
+              <c:multiLvlStrCache>
+                <c:ptCount val="9"/>
+                <c:lvl>
+                  <c:pt idx="0">
+                    <c:v>Jan</c:v>
+                  </c:pt>
+                  <c:pt idx="1">
+                    <c:v>Feb</c:v>
+                  </c:pt>
+                  <c:pt idx="2">
+                    <c:v>Mar</c:v>
+                  </c:pt>
+                  <c:pt idx="3">
+                    <c:v>Apr</c:v>
+                  </c:pt>
+                  <c:pt idx="4">
+                    <c:v>May</c:v>
+                  </c:pt>
+                  <c:pt idx="5">
+                    <c:v>Jun</c:v>
+                  </c:pt>
+                  <c:pt idx="6">
+                    <c:v>Jul</c:v>
+                  </c:pt>
+                  <c:pt idx="7">
+                    <c:v>Aug</c:v>
+                  </c:pt>
+                  <c:pt idx="8">
+                    <c:v>Sep</c:v>
+                  </c:pt>
+                </c:lvl>
+              </c:multiLvlStrCache>
+            </c:multiLvlStrRef>
+          </c:cat>
+          <c:val>
+            <c:numRef>
+              <c:f>Sheet1!$B$2:$B$10</c:f>
+              <c:numCache>
+                <c:formatCode>General</c:formatCode>
+                <c:ptCount val="9"/>
+                <c:pt idx="0">
+                  <c:v>126</c:v>
+                </c:pt>
+                <c:pt idx="1">
+                  <c:v/>
+                </c:pt>
+                <c:pt idx="2">
+                  <c:v>131</c:v>
+                </c:pt>
+                <c:pt idx="3">
+                  <c:v>131</c:v>
+                </c:pt>
+                <c:pt idx="4">
+                  <c:v>132</c:v>
+                </c:pt>
+                <c:pt idx="5">
+                  <c:v/>
+                </c:pt>
+                <c:pt idx="6">
+                  <c:v>133</c:v>
+                </c:pt>
+                <c:pt idx="7">
+                  <c:v>130</c:v>
+                </c:pt>
+                <c:pt idx="8">
+                  <c:v>134</c:v>
+                </c:pt>
+              </c:numCache>
+            </c:numRef>
+          </c:val>
+          <c:smooth val="0"/>
+        </c:ser>
+        <c:dLbls>
+          <c:numFmt formatCode="&quot;$&quot;#,##0.00" sourceLinked="0"/>
+          <c:txPr>
+            <a:bodyPr/>
+            <a:lstStyle/>
+            <a:p>
+              <a:pPr>
+                <a:defRPr b="0" i="0" strike="noStrike" sz="1400" u="none">
+                  <a:solidFill>
+                    <a:srgbClr val="1A1A1A"/>
+                  </a:solidFill>
+                  <a:latin typeface="+mn-lt"/>
+                </a:defRPr>
+              </a:pPr>
+            </a:p>
+          </c:txPr>
+          <c:dLblPos val="t"/>
+          <c:showLegendKey val="0"/>
+          <c:showVal val="1"/>
+          <c:showCatName val="0"/>
+          <c:showSerName val="0"/>
+          <c:showPercent val="0"/>
+          <c:showBubbleSize val="0"/>
+          <c:showLeaderLines val="0"/>
+        </c:dLbls>
+        <c:marker val="1"/>
+        <c:axId val="2094734554"/>
+        <c:axId val="2094734552"/>
+        <c:axId val="2094734556"/>
+      </c:lineChart>
+      <c:catAx>
+        <c:axId val="2094734554"/>
+        <c:scaling>
+          <c:orientation val="minMax"/>
+        </c:scaling>
+        <c:delete val="0"/>
+        <c:axPos val="b"/>
+        <c:numFmt formatCode="General" sourceLinked="1"/>
+        <c:majorTickMark val="out"/>
+        <c:minorTickMark val="none"/>
+        <c:tickLblPos val="low"/>
+        <c:spPr>
+          <a:ln w="12700" cap="flat">
+            <a:noFill/>
+            <a:prstDash val="solid"/>
+            <a:round/>
+          </a:ln>
+        </c:spPr>
+        <c:txPr>
+          <a:bodyPr/>
+          <a:lstStyle/>
+          <a:p>
+            <a:pPr>
+              <a:defRPr sz="1400" b="0" i="0" u="none" strike="noStrike">
+                <a:solidFill>
+                  <a:srgbClr val="FFFFFF"/>
+                </a:solidFill>
+                <a:latin typeface="+mn-lt"/>
+              </a:defRPr>
+            </a:pPr>
+            <a:endParaRPr lang="en-US"/>
+          </a:p>
+        </c:txPr>
+        <c:crossAx val="2094734552"/>
+        <c:crosses val="min"/>
+        <c:auto val="1"/>
+        <c:lblAlgn val="ctr"/>
+        <c:noMultiLvlLbl val="1"/>
+      </c:catAx>
+      <c:valAx>
+        <c:axId val="2094734552"/>
+        <c:scaling>
+          <c:orientation val="minMax"/>
+          <c:max val="140"/>
+          <c:min val="120"/>
+        </c:scaling>
+        <c:delete val="0"/>
+        <c:axPos val="l"/>
+        <c:numFmt formatCode="&quot;$&quot;#,##0" sourceLinked="0"/>
+        <c:majorTickMark val="out"/>
+        <c:minorTickMark val="none"/>
+        <c:tickLblPos val="nextTo"/>
+        <c:spPr>
+          <a:ln w="12700" cap="flat">
+            <a:noFill/>
+            <a:prstDash val="solid"/>
+            <a:round/>
+          </a:ln>
+        </c:spPr>
+        <c:txPr>
+          <a:bodyPr/>
+          <a:lstStyle/>
+          <a:p>
+            <a:pPr>
+              <a:defRPr sz="1400" b="0" i="0" u="none" strike="noStrike">
+                <a:solidFill>
+                  <a:srgbClr val="FFFFFF"/>
+                </a:solidFill>
+                <a:latin typeface="+mn-lt"/>
+              </a:defRPr>
+            </a:pPr>
+            <a:endParaRPr lang="en-US"/>
+          </a:p>
+        </c:txPr>
+        <c:crossAx val="2094734554"/>
+        <c:crosses val="autoZero"/>
+        <c:crossBetween val="between"/>
+        <c:majorUnit val="5"/>
+      </c:valAx>
+      <c:spPr>
+        <a:solidFill>
+          <a:srgbClr val="FFFFFF">
+            <a:alpha val="0"/>
+          </a:srgbClr>
+        </a:solidFill>
+        <a:ln>
+          <a:noFill/>
+        </a:ln>
+        <a:effectLst/>
+      </c:spPr>
+    </c:plotArea>
+    <c:plotVisOnly val="1"/>
+    <c:dispBlanksAs val="span"/>
+  </c:chart>
+  <c:spPr>
+    <a:solidFill>
+      <a:srgbClr val="FFFFFF">
+        <a:alpha val="0"/>
+      </a:srgbClr>
+    </a:solidFill>
+    <a:ln>
+      <a:noFill/>
+    </a:ln>
+    <a:effectLst/>
+  </c:spPr>
+  <c:externalData r:id="rId1">
+    <c:autoUpdate val="0"/>
+  </c:externalData>
+</c:chartSpace>
+</file>
+
+<file path=ppt/charts/chart13.xml><?xml version="1.0" encoding="utf-8"?>
+<c:chartSpace xmlns:c="http://schemas.openxmlformats.org/drawingml/2006/chart" xmlns:a="http://schemas.openxmlformats.org/drawingml/2006/main" xmlns:r="http://schemas.openxmlformats.org/officeDocument/2006/relationships">
+  <c:date1904 val="0"/>
+  <c:roundedCorners val="1"/>
+  <c:chart>
+    <c:autoTitleDeleted val="1"/>
+    <c:plotArea>
+      <c:layout/>
+      <c:lineChart>
+        <c:varyColors val="0"/>
+        <c:ser>
+          <c:idx val="0"/>
+          <c:order val="0"/>
+          <c:tx>
+            <c:strRef>
+              <c:f>Sheet1!$B$1</c:f>
+              <c:strCache>
+                <c:ptCount val="1"/>
+                <c:pt idx="0">
+                  <c:v>2026</c:v>
+                </c:pt>
+              </c:strCache>
+            </c:strRef>
+          </c:tx>
+          <c:spPr>
+            <a:solidFill>
+              <a:srgbClr val="2587C5"/>
+            </a:solidFill>
+            <a:ln>
+              <a:noFill/>
+            </a:ln>
+            <a:effectLst/>
+          </c:spPr>
+          <c:invertIfNegative val="0"/>
+          <c:dLbls>
+            <c:numFmt formatCode="&quot;$&quot;#,##0.00" sourceLinked="0"/>
+            <c:txPr>
+              <a:bodyPr/>
+              <a:lstStyle/>
+              <a:p>
+                <a:pPr>
+                  <a:defRPr b="0" i="0" strike="noStrike" sz="1400" u="none">
+                    <a:solidFill>
+                      <a:srgbClr val="1A1A1A"/>
+                    </a:solidFill>
+                    <a:latin typeface="+mn-lt"/>
+                  </a:defRPr>
+                </a:pPr>
+              </a:p>
+            </c:txPr>
+            <c:dLblPos val="b"/>
+            <c:showLegendKey val="0"/>
+            <c:showVal val="1"/>
+            <c:showCatName val="0"/>
+            <c:showSerName val="0"/>
+            <c:showPercent val="0"/>
+            <c:showBubbleSize val="0"/>
+            <c:showLeaderLines val="0"/>
+          </c:dLbls>
+          <c:marker>
+            <c:symbol val="none"/>
+            <c:size val="8"/>
+            <c:spPr>
+              <a:solidFill>
+                <a:srgbClr val="2587C5"/>
+              </a:solidFill>
+              <a:ln w="9525" cap="flat">
+                <a:solidFill>
+                  <a:srgbClr val="2587C5"/>
+                </a:solidFill>
+                <a:prstDash val="solid"/>
+                <a:round/>
+              </a:ln>
+              <a:effectLst/>
+            </c:spPr>
+          </c:marker>
+          <c:cat>
+            <c:multiLvlStrRef>
+              <c:f>Sheet1!$A$2:$A$10</c:f>
+              <c:multiLvlStrCache>
+                <c:ptCount val="9"/>
+                <c:lvl>
+                  <c:pt idx="0">
+                    <c:v>Jan</c:v>
+                  </c:pt>
+                  <c:pt idx="1">
+                    <c:v>Feb</c:v>
+                  </c:pt>
+                  <c:pt idx="2">
+                    <c:v>Mar</c:v>
+                  </c:pt>
+                  <c:pt idx="3">
+                    <c:v>Apr</c:v>
+                  </c:pt>
+                  <c:pt idx="4">
+                    <c:v>May</c:v>
+                  </c:pt>
+                  <c:pt idx="5">
+                    <c:v>Jun</c:v>
+                  </c:pt>
+                  <c:pt idx="6">
+                    <c:v>Jul</c:v>
+                  </c:pt>
+                  <c:pt idx="7">
+                    <c:v>Aug</c:v>
+                  </c:pt>
+                  <c:pt idx="8">
+                    <c:v>Sep</c:v>
+                  </c:pt>
+                </c:lvl>
+              </c:multiLvlStrCache>
+            </c:multiLvlStrRef>
+          </c:cat>
+          <c:val>
+            <c:numRef>
+              <c:f>Sheet1!$B$2:$B$10</c:f>
+              <c:numCache>
+                <c:formatCode>General</c:formatCode>
+                <c:ptCount val="9"/>
+                <c:pt idx="0">
+                  <c:v/>
+                </c:pt>
+                <c:pt idx="1">
+                  <c:v>124</c:v>
+                </c:pt>
+                <c:pt idx="2">
+                  <c:v/>
+                </c:pt>
+                <c:pt idx="3">
+                  <c:v/>
+                </c:pt>
+                <c:pt idx="4">
+                  <c:v/>
+                </c:pt>
+                <c:pt idx="5">
+                  <c:v>128</c:v>
+                </c:pt>
+                <c:pt idx="6">
+                  <c:v/>
+                </c:pt>
+                <c:pt idx="7">
+                  <c:v/>
+                </c:pt>
+                <c:pt idx="8">
+                  <c:v/>
+                </c:pt>
+              </c:numCache>
+            </c:numRef>
+          </c:val>
+          <c:smooth val="0"/>
+        </c:ser>
+        <c:dLbls>
+          <c:numFmt formatCode="&quot;$&quot;#,##0.00" sourceLinked="0"/>
+          <c:txPr>
+            <a:bodyPr/>
+            <a:lstStyle/>
+            <a:p>
+              <a:pPr>
+                <a:defRPr b="0" i="0" strike="noStrike" sz="1400" u="none">
+                  <a:solidFill>
+                    <a:srgbClr val="1A1A1A"/>
+                  </a:solidFill>
+                  <a:latin typeface="+mn-lt"/>
+                </a:defRPr>
+              </a:pPr>
+            </a:p>
+          </c:txPr>
+          <c:dLblPos val="b"/>
+          <c:showLegendKey val="0"/>
+          <c:showVal val="1"/>
+          <c:showCatName val="0"/>
+          <c:showSerName val="0"/>
+          <c:showPercent val="0"/>
+          <c:showBubbleSize val="0"/>
+          <c:showLeaderLines val="0"/>
+        </c:dLbls>
+        <c:marker val="1"/>
+        <c:axId val="2094734554"/>
+        <c:axId val="2094734552"/>
+        <c:axId val="2094734556"/>
+      </c:lineChart>
+      <c:catAx>
+        <c:axId val="2094734554"/>
+        <c:scaling>
+          <c:orientation val="minMax"/>
+        </c:scaling>
+        <c:delete val="0"/>
+        <c:axPos val="b"/>
+        <c:numFmt formatCode="General" sourceLinked="1"/>
+        <c:majorTickMark val="out"/>
+        <c:minorTickMark val="none"/>
+        <c:tickLblPos val="low"/>
+        <c:spPr>
+          <a:ln w="12700" cap="flat">
+            <a:noFill/>
+            <a:prstDash val="solid"/>
+            <a:round/>
+          </a:ln>
+        </c:spPr>
+        <c:txPr>
+          <a:bodyPr/>
+          <a:lstStyle/>
+          <a:p>
+            <a:pPr>
+              <a:defRPr sz="1400" b="0" i="0" u="none" strike="noStrike">
+                <a:solidFill>
+                  <a:srgbClr val="FFFFFF"/>
+                </a:solidFill>
+                <a:latin typeface="+mn-lt"/>
+              </a:defRPr>
+            </a:pPr>
+            <a:endParaRPr lang="en-US"/>
+          </a:p>
+        </c:txPr>
+        <c:crossAx val="2094734552"/>
+        <c:crosses val="min"/>
+        <c:auto val="1"/>
+        <c:lblAlgn val="ctr"/>
+        <c:noMultiLvlLbl val="1"/>
+      </c:catAx>
+      <c:valAx>
+        <c:axId val="2094734552"/>
+        <c:scaling>
+          <c:orientation val="minMax"/>
+          <c:max val="140"/>
+          <c:min val="120"/>
+        </c:scaling>
+        <c:delete val="0"/>
+        <c:axPos val="l"/>
+        <c:numFmt formatCode="&quot;$&quot;#,##0" sourceLinked="0"/>
+        <c:majorTickMark val="out"/>
+        <c:minorTickMark val="none"/>
+        <c:tickLblPos val="nextTo"/>
+        <c:spPr>
+          <a:ln w="12700" cap="flat">
+            <a:noFill/>
+            <a:prstDash val="solid"/>
+            <a:round/>
+          </a:ln>
+        </c:spPr>
+        <c:txPr>
+          <a:bodyPr/>
+          <a:lstStyle/>
+          <a:p>
+            <a:pPr>
+              <a:defRPr sz="1400" b="0" i="0" u="none" strike="noStrike">
+                <a:solidFill>
+                  <a:srgbClr val="FFFFFF"/>
+                </a:solidFill>
+                <a:latin typeface="+mn-lt"/>
+              </a:defRPr>
+            </a:pPr>
+            <a:endParaRPr lang="en-US"/>
+          </a:p>
+        </c:txPr>
+        <c:crossAx val="2094734554"/>
+        <c:crosses val="autoZero"/>
+        <c:crossBetween val="between"/>
+        <c:majorUnit val="5"/>
+      </c:valAx>
+      <c:spPr>
+        <a:solidFill>
+          <a:srgbClr val="FFFFFF">
+            <a:alpha val="0"/>
+          </a:srgbClr>
+        </a:solidFill>
+        <a:ln>
+          <a:noFill/>
+        </a:ln>
+        <a:effectLst/>
+      </c:spPr>
+    </c:plotArea>
+    <c:plotVisOnly val="1"/>
+    <c:dispBlanksAs val="span"/>
+  </c:chart>
+  <c:spPr>
+    <a:solidFill>
+      <a:srgbClr val="FFFFFF">
+        <a:alpha val="0"/>
+      </a:srgbClr>
+    </a:solidFill>
+    <a:ln>
+      <a:noFill/>
+    </a:ln>
+    <a:effectLst/>
+  </c:spPr>
+  <c:externalData r:id="rId1">
+    <c:autoUpdate val="0"/>
+  </c:externalData>
+</c:chartSpace>
+</file>
+
+<file path=ppt/charts/chart14.xml><?xml version="1.0" encoding="utf-8"?>
+<c:chartSpace xmlns:c="http://schemas.openxmlformats.org/drawingml/2006/chart" xmlns:a="http://schemas.openxmlformats.org/drawingml/2006/main" xmlns:r="http://schemas.openxmlformats.org/officeDocument/2006/relationships">
+  <c:date1904 val="0"/>
+  <c:roundedCorners val="1"/>
+  <c:chart>
+    <c:autoTitleDeleted val="1"/>
+    <c:plotArea>
+      <c:layout/>
+      <c:lineChart>
+        <c:varyColors val="0"/>
+        <c:ser>
+          <c:idx val="0"/>
+          <c:order val="0"/>
+          <c:tx>
+            <c:strRef>
+              <c:f>Sheet1!$B$1</c:f>
+              <c:strCache>
+                <c:ptCount val="1"/>
+                <c:pt idx="0">
+                  <c:v>2025</c:v>
+                </c:pt>
+              </c:strCache>
+            </c:strRef>
+          </c:tx>
+          <c:spPr>
+            <a:solidFill>
+              <a:srgbClr val="9AA3AD"/>
+            </a:solidFill>
+            <a:ln>
+              <a:noFill/>
+            </a:ln>
+            <a:effectLst/>
+          </c:spPr>
+          <c:invertIfNegative val="0"/>
+          <c:dLbls>
+            <c:numFmt formatCode="&quot;$&quot;#,##0.00" sourceLinked="0"/>
+            <c:txPr>
+              <a:bodyPr/>
+              <a:lstStyle/>
+              <a:p>
+                <a:pPr>
+                  <a:defRPr b="0" i="0" strike="noStrike" sz="1400" u="none">
+                    <a:solidFill>
+                      <a:srgbClr val="1A1A1A"/>
+                    </a:solidFill>
+                    <a:latin typeface="+mn-lt"/>
+                  </a:defRPr>
+                </a:pPr>
+              </a:p>
+            </c:txPr>
+            <c:dLblPos val="t"/>
+            <c:showLegendKey val="0"/>
+            <c:showVal val="1"/>
+            <c:showCatName val="0"/>
+            <c:showSerName val="0"/>
+            <c:showPercent val="0"/>
+            <c:showBubbleSize val="0"/>
+            <c:showLeaderLines val="0"/>
+          </c:dLbls>
+          <c:marker>
+            <c:symbol val="none"/>
+            <c:size val="8"/>
+            <c:spPr>
+              <a:solidFill>
+                <a:srgbClr val="9AA3AD"/>
+              </a:solidFill>
+              <a:ln w="9525" cap="flat">
+                <a:solidFill>
+                  <a:srgbClr val="9AA3AD"/>
+                </a:solidFill>
+                <a:prstDash val="solid"/>
+                <a:round/>
+              </a:ln>
+              <a:effectLst/>
+            </c:spPr>
+          </c:marker>
+          <c:cat>
+            <c:multiLvlStrRef>
+              <c:f>Sheet1!$A$2:$A$10</c:f>
+              <c:multiLvlStrCache>
+                <c:ptCount val="9"/>
+                <c:lvl>
+                  <c:pt idx="0">
+                    <c:v>Jan</c:v>
+                  </c:pt>
+                  <c:pt idx="1">
+                    <c:v>Feb</c:v>
+                  </c:pt>
+                  <c:pt idx="2">
+                    <c:v>Mar</c:v>
+                  </c:pt>
+                  <c:pt idx="3">
+                    <c:v>Apr</c:v>
+                  </c:pt>
+                  <c:pt idx="4">
+                    <c:v>May</c:v>
+                  </c:pt>
+                  <c:pt idx="5">
+                    <c:v>Jun</c:v>
+                  </c:pt>
+                  <c:pt idx="6">
+                    <c:v>Jul</c:v>
+                  </c:pt>
+                  <c:pt idx="7">
+                    <c:v>Aug</c:v>
+                  </c:pt>
+                  <c:pt idx="8">
+                    <c:v>Sep</c:v>
+                  </c:pt>
+                </c:lvl>
+              </c:multiLvlStrCache>
+            </c:multiLvlStrRef>
+          </c:cat>
+          <c:val>
+            <c:numRef>
+              <c:f>Sheet1!$B$2:$B$10</c:f>
+              <c:numCache>
+                <c:formatCode>General</c:formatCode>
+                <c:ptCount val="9"/>
+                <c:pt idx="0">
+                  <c:v/>
+                </c:pt>
+                <c:pt idx="1">
+                  <c:v>125</c:v>
+                </c:pt>
+                <c:pt idx="2">
+                  <c:v/>
+                </c:pt>
+                <c:pt idx="3">
+                  <c:v/>
+                </c:pt>
+                <c:pt idx="4">
+                  <c:v/>
+                </c:pt>
+                <c:pt idx="5">
+                  <c:v>129</c:v>
+                </c:pt>
+                <c:pt idx="6">
+                  <c:v/>
+                </c:pt>
+                <c:pt idx="7">
+                  <c:v/>
+                </c:pt>
+                <c:pt idx="8">
+                  <c:v/>
+                </c:pt>
+              </c:numCache>
+            </c:numRef>
+          </c:val>
+          <c:smooth val="0"/>
+        </c:ser>
+        <c:dLbls>
+          <c:numFmt formatCode="&quot;$&quot;#,##0.00" sourceLinked="0"/>
+          <c:txPr>
+            <a:bodyPr/>
+            <a:lstStyle/>
+            <a:p>
+              <a:pPr>
+                <a:defRPr b="0" i="0" strike="noStrike" sz="1400" u="none">
+                  <a:solidFill>
+                    <a:srgbClr val="1A1A1A"/>
+                  </a:solidFill>
+                  <a:latin typeface="+mn-lt"/>
+                </a:defRPr>
+              </a:pPr>
+            </a:p>
+          </c:txPr>
+          <c:dLblPos val="t"/>
+          <c:showLegendKey val="0"/>
+          <c:showVal val="1"/>
+          <c:showCatName val="0"/>
+          <c:showSerName val="0"/>
+          <c:showPercent val="0"/>
+          <c:showBubbleSize val="0"/>
+          <c:showLeaderLines val="0"/>
+        </c:dLbls>
+        <c:marker val="1"/>
+        <c:axId val="2094734554"/>
+        <c:axId val="2094734552"/>
+        <c:axId val="2094734556"/>
+      </c:lineChart>
+      <c:catAx>
+        <c:axId val="2094734554"/>
+        <c:scaling>
+          <c:orientation val="minMax"/>
+        </c:scaling>
+        <c:delete val="0"/>
+        <c:axPos val="b"/>
+        <c:numFmt formatCode="General" sourceLinked="1"/>
+        <c:majorTickMark val="out"/>
+        <c:minorTickMark val="none"/>
+        <c:tickLblPos val="low"/>
+        <c:spPr>
+          <a:ln w="12700" cap="flat">
+            <a:noFill/>
+            <a:prstDash val="solid"/>
+            <a:round/>
+          </a:ln>
+        </c:spPr>
+        <c:txPr>
+          <a:bodyPr/>
+          <a:lstStyle/>
+          <a:p>
+            <a:pPr>
+              <a:defRPr sz="1400" b="0" i="0" u="none" strike="noStrike">
+                <a:solidFill>
+                  <a:srgbClr val="FFFFFF"/>
+                </a:solidFill>
+                <a:latin typeface="+mn-lt"/>
+              </a:defRPr>
+            </a:pPr>
+            <a:endParaRPr lang="en-US"/>
+          </a:p>
+        </c:txPr>
+        <c:crossAx val="2094734552"/>
+        <c:crosses val="min"/>
+        <c:auto val="1"/>
+        <c:lblAlgn val="ctr"/>
+        <c:noMultiLvlLbl val="1"/>
+      </c:catAx>
+      <c:valAx>
+        <c:axId val="2094734552"/>
+        <c:scaling>
+          <c:orientation val="minMax"/>
+          <c:max val="140"/>
+          <c:min val="120"/>
+        </c:scaling>
+        <c:delete val="0"/>
+        <c:axPos val="l"/>
+        <c:numFmt formatCode="&quot;$&quot;#,##0" sourceLinked="0"/>
+        <c:majorTickMark val="out"/>
+        <c:minorTickMark val="none"/>
+        <c:tickLblPos val="nextTo"/>
+        <c:spPr>
+          <a:ln w="12700" cap="flat">
+            <a:noFill/>
+            <a:prstDash val="solid"/>
+            <a:round/>
+          </a:ln>
+        </c:spPr>
+        <c:txPr>
+          <a:bodyPr/>
+          <a:lstStyle/>
+          <a:p>
+            <a:pPr>
+              <a:defRPr sz="1400" b="0" i="0" u="none" strike="noStrike">
+                <a:solidFill>
+                  <a:srgbClr val="FFFFFF"/>
+                </a:solidFill>
+                <a:latin typeface="+mn-lt"/>
+              </a:defRPr>
+            </a:pPr>
+            <a:endParaRPr lang="en-US"/>
+          </a:p>
+        </c:txPr>
+        <c:crossAx val="2094734554"/>
+        <c:crosses val="autoZero"/>
+        <c:crossBetween val="between"/>
+        <c:majorUnit val="5"/>
+      </c:valAx>
+      <c:spPr>
+        <a:solidFill>
+          <a:srgbClr val="FFFFFF">
+            <a:alpha val="0"/>
+          </a:srgbClr>
+        </a:solidFill>
+        <a:ln>
+          <a:noFill/>
+        </a:ln>
+        <a:effectLst/>
+      </c:spPr>
+    </c:plotArea>
+    <c:plotVisOnly val="1"/>
+    <c:dispBlanksAs val="span"/>
+  </c:chart>
+  <c:spPr>
+    <a:solidFill>
+      <a:srgbClr val="FFFFFF">
+        <a:alpha val="0"/>
+      </a:srgbClr>
+    </a:solidFill>
+    <a:ln>
+      <a:noFill/>
+    </a:ln>
+    <a:effectLst/>
+  </c:spPr>
+  <c:externalData r:id="rId1">
+    <c:autoUpdate val="0"/>
+  </c:externalData>
+</c:chartSpace>
+</file>
+
+<file path=ppt/charts/chart15.xml><?xml version="1.0" encoding="utf-8"?>
 <c:chartSpace xmlns:c="http://schemas.openxmlformats.org/drawingml/2006/chart" xmlns:a="http://schemas.openxmlformats.org/drawingml/2006/main" xmlns:r="http://schemas.openxmlformats.org/officeDocument/2006/relationships">
   <c:date1904 val="0"/>
   <c:roundedCorners val="1"/>
@@ -824,7 +2163,7 @@
 </c:chartSpace>
 </file>
 
-<file path=ppt/charts/chart11.xml><?xml version="1.0" encoding="utf-8"?>
+<file path=ppt/charts/chart16.xml><?xml version="1.0" encoding="utf-8"?>
 <c:chartSpace xmlns:c="http://schemas.openxmlformats.org/drawingml/2006/chart" xmlns:a="http://schemas.openxmlformats.org/drawingml/2006/main" xmlns:r="http://schemas.openxmlformats.org/officeDocument/2006/relationships">
   <c:date1904 val="0"/>
   <c:roundedCorners val="1"/>
@@ -1159,6 +2498,1481 @@
             <a:solidFill>
               <a:srgbClr val="2587C5"/>
             </a:solidFill>
+            <a:ln>
+              <a:noFill/>
+            </a:ln>
+            <a:effectLst/>
+          </c:spPr>
+          <c:invertIfNegative val="0"/>
+          <c:dLbls>
+            <c:numFmt formatCode="#,##0.0,&quot;K&quot;" sourceLinked="0"/>
+            <c:txPr>
+              <a:bodyPr/>
+              <a:lstStyle/>
+              <a:p>
+                <a:pPr>
+                  <a:defRPr b="0" i="0" strike="noStrike" sz="1400" u="none">
+                    <a:solidFill>
+                      <a:srgbClr val="1A1A1A"/>
+                    </a:solidFill>
+                    <a:latin typeface="+mn-lt"/>
+                  </a:defRPr>
+                </a:pPr>
+              </a:p>
+            </c:txPr>
+            <c:dLblPos val="t"/>
+            <c:showLegendKey val="0"/>
+            <c:showVal val="1"/>
+            <c:showCatName val="0"/>
+            <c:showSerName val="0"/>
+            <c:showPercent val="0"/>
+            <c:showBubbleSize val="0"/>
+            <c:showLeaderLines val="0"/>
+          </c:dLbls>
+          <c:marker>
+            <c:symbol val="none"/>
+            <c:size val="8"/>
+            <c:spPr>
+              <a:solidFill>
+                <a:srgbClr val="2587C5"/>
+              </a:solidFill>
+              <a:ln w="9525" cap="flat">
+                <a:solidFill>
+                  <a:srgbClr val="2587C5"/>
+                </a:solidFill>
+                <a:prstDash val="solid"/>
+                <a:round/>
+              </a:ln>
+              <a:effectLst/>
+            </c:spPr>
+          </c:marker>
+          <c:cat>
+            <c:multiLvlStrRef>
+              <c:f>Sheet1!$A$2:$A$10</c:f>
+              <c:multiLvlStrCache>
+                <c:ptCount val="9"/>
+                <c:lvl>
+                  <c:pt idx="0">
+                    <c:v>Jan</c:v>
+                  </c:pt>
+                  <c:pt idx="1">
+                    <c:v>Feb</c:v>
+                  </c:pt>
+                  <c:pt idx="2">
+                    <c:v>Mar</c:v>
+                  </c:pt>
+                  <c:pt idx="3">
+                    <c:v>Apr</c:v>
+                  </c:pt>
+                  <c:pt idx="4">
+                    <c:v>May</c:v>
+                  </c:pt>
+                  <c:pt idx="5">
+                    <c:v>Jun</c:v>
+                  </c:pt>
+                  <c:pt idx="6">
+                    <c:v>Jul</c:v>
+                  </c:pt>
+                  <c:pt idx="7">
+                    <c:v>Aug</c:v>
+                  </c:pt>
+                  <c:pt idx="8">
+                    <c:v>Sep</c:v>
+                  </c:pt>
+                </c:lvl>
+              </c:multiLvlStrCache>
+            </c:multiLvlStrRef>
+          </c:cat>
+          <c:val>
+            <c:numRef>
+              <c:f>Sheet1!$B$2:$B$10</c:f>
+              <c:numCache>
+                <c:formatCode>General</c:formatCode>
+                <c:ptCount val="9"/>
+                <c:pt idx="0">
+                  <c:v/>
+                </c:pt>
+                <c:pt idx="1">
+                  <c:v/>
+                </c:pt>
+                <c:pt idx="2">
+                  <c:v/>
+                </c:pt>
+                <c:pt idx="3">
+                  <c:v/>
+                </c:pt>
+                <c:pt idx="4">
+                  <c:v/>
+                </c:pt>
+                <c:pt idx="5">
+                  <c:v/>
+                </c:pt>
+                <c:pt idx="6">
+                  <c:v/>
+                </c:pt>
+                <c:pt idx="7">
+                  <c:v>15204</c:v>
+                </c:pt>
+                <c:pt idx="8">
+                  <c:v>15075</c:v>
+                </c:pt>
+              </c:numCache>
+            </c:numRef>
+          </c:val>
+          <c:smooth val="0"/>
+        </c:ser>
+        <c:dLbls>
+          <c:numFmt formatCode="#,##0.0,&quot;K&quot;" sourceLinked="0"/>
+          <c:txPr>
+            <a:bodyPr/>
+            <a:lstStyle/>
+            <a:p>
+              <a:pPr>
+                <a:defRPr b="0" i="0" strike="noStrike" sz="1400" u="none">
+                  <a:solidFill>
+                    <a:srgbClr val="1A1A1A"/>
+                  </a:solidFill>
+                  <a:latin typeface="+mn-lt"/>
+                </a:defRPr>
+              </a:pPr>
+            </a:p>
+          </c:txPr>
+          <c:dLblPos val="t"/>
+          <c:showLegendKey val="0"/>
+          <c:showVal val="1"/>
+          <c:showCatName val="0"/>
+          <c:showSerName val="0"/>
+          <c:showPercent val="0"/>
+          <c:showBubbleSize val="0"/>
+          <c:showLeaderLines val="0"/>
+        </c:dLbls>
+        <c:marker val="1"/>
+        <c:axId val="2094734554"/>
+        <c:axId val="2094734552"/>
+        <c:axId val="2094734556"/>
+      </c:lineChart>
+      <c:catAx>
+        <c:axId val="2094734554"/>
+        <c:scaling>
+          <c:orientation val="minMax"/>
+        </c:scaling>
+        <c:delete val="0"/>
+        <c:axPos val="b"/>
+        <c:numFmt formatCode="General" sourceLinked="1"/>
+        <c:majorTickMark val="out"/>
+        <c:minorTickMark val="none"/>
+        <c:tickLblPos val="low"/>
+        <c:spPr>
+          <a:ln w="12700" cap="flat">
+            <a:noFill/>
+            <a:prstDash val="solid"/>
+            <a:round/>
+          </a:ln>
+        </c:spPr>
+        <c:txPr>
+          <a:bodyPr/>
+          <a:lstStyle/>
+          <a:p>
+            <a:pPr>
+              <a:defRPr sz="1400" b="0" i="0" u="none" strike="noStrike">
+                <a:solidFill>
+                  <a:srgbClr val="FFFFFF"/>
+                </a:solidFill>
+                <a:latin typeface="+mn-lt"/>
+              </a:defRPr>
+            </a:pPr>
+            <a:endParaRPr lang="en-US"/>
+          </a:p>
+        </c:txPr>
+        <c:crossAx val="2094734552"/>
+        <c:crosses val="min"/>
+        <c:auto val="1"/>
+        <c:lblAlgn val="ctr"/>
+        <c:noMultiLvlLbl val="1"/>
+      </c:catAx>
+      <c:valAx>
+        <c:axId val="2094734552"/>
+        <c:scaling>
+          <c:orientation val="minMax"/>
+          <c:max val="18000"/>
+          <c:min val="10000"/>
+        </c:scaling>
+        <c:delete val="0"/>
+        <c:axPos val="l"/>
+        <c:numFmt formatCode="#,##0" sourceLinked="0"/>
+        <c:majorTickMark val="out"/>
+        <c:minorTickMark val="none"/>
+        <c:tickLblPos val="nextTo"/>
+        <c:spPr>
+          <a:ln w="12700" cap="flat">
+            <a:noFill/>
+            <a:prstDash val="solid"/>
+            <a:round/>
+          </a:ln>
+        </c:spPr>
+        <c:txPr>
+          <a:bodyPr/>
+          <a:lstStyle/>
+          <a:p>
+            <a:pPr>
+              <a:defRPr sz="1400" b="0" i="0" u="none" strike="noStrike">
+                <a:solidFill>
+                  <a:srgbClr val="FFFFFF"/>
+                </a:solidFill>
+                <a:latin typeface="+mn-lt"/>
+              </a:defRPr>
+            </a:pPr>
+            <a:endParaRPr lang="en-US"/>
+          </a:p>
+        </c:txPr>
+        <c:crossAx val="2094734554"/>
+        <c:crosses val="autoZero"/>
+        <c:crossBetween val="between"/>
+        <c:majorUnit val="2000"/>
+      </c:valAx>
+      <c:spPr>
+        <a:solidFill>
+          <a:srgbClr val="FFFFFF">
+            <a:alpha val="0"/>
+          </a:srgbClr>
+        </a:solidFill>
+        <a:ln>
+          <a:noFill/>
+        </a:ln>
+        <a:effectLst/>
+      </c:spPr>
+    </c:plotArea>
+    <c:plotVisOnly val="1"/>
+    <c:dispBlanksAs val="span"/>
+  </c:chart>
+  <c:spPr>
+    <a:solidFill>
+      <a:srgbClr val="FFFFFF">
+        <a:alpha val="0"/>
+      </a:srgbClr>
+    </a:solidFill>
+    <a:ln>
+      <a:noFill/>
+    </a:ln>
+    <a:effectLst/>
+  </c:spPr>
+  <c:externalData r:id="rId1">
+    <c:autoUpdate val="0"/>
+  </c:externalData>
+</c:chartSpace>
+</file>
+
+<file path=ppt/charts/chart3.xml><?xml version="1.0" encoding="utf-8"?>
+<c:chartSpace xmlns:c="http://schemas.openxmlformats.org/drawingml/2006/chart" xmlns:a="http://schemas.openxmlformats.org/drawingml/2006/main" xmlns:r="http://schemas.openxmlformats.org/officeDocument/2006/relationships">
+  <c:date1904 val="0"/>
+  <c:roundedCorners val="1"/>
+  <c:chart>
+    <c:autoTitleDeleted val="1"/>
+    <c:plotArea>
+      <c:layout/>
+      <c:lineChart>
+        <c:varyColors val="0"/>
+        <c:ser>
+          <c:idx val="0"/>
+          <c:order val="0"/>
+          <c:tx>
+            <c:strRef>
+              <c:f>Sheet1!$B$1</c:f>
+              <c:strCache>
+                <c:ptCount val="1"/>
+                <c:pt idx="0">
+                  <c:v>2026</c:v>
+                </c:pt>
+              </c:strCache>
+            </c:strRef>
+          </c:tx>
+          <c:spPr>
+            <a:solidFill>
+              <a:srgbClr val="2587C5"/>
+            </a:solidFill>
+            <a:ln>
+              <a:noFill/>
+            </a:ln>
+            <a:effectLst/>
+          </c:spPr>
+          <c:invertIfNegative val="0"/>
+          <c:dLbls>
+            <c:numFmt formatCode="#,##0.0,&quot;K&quot;" sourceLinked="0"/>
+            <c:txPr>
+              <a:bodyPr/>
+              <a:lstStyle/>
+              <a:p>
+                <a:pPr>
+                  <a:defRPr b="0" i="0" strike="noStrike" sz="1400" u="none">
+                    <a:solidFill>
+                      <a:srgbClr val="1A1A1A"/>
+                    </a:solidFill>
+                    <a:latin typeface="+mn-lt"/>
+                  </a:defRPr>
+                </a:pPr>
+              </a:p>
+            </c:txPr>
+            <c:dLblPos val="b"/>
+            <c:showLegendKey val="0"/>
+            <c:showVal val="1"/>
+            <c:showCatName val="0"/>
+            <c:showSerName val="0"/>
+            <c:showPercent val="0"/>
+            <c:showBubbleSize val="0"/>
+            <c:showLeaderLines val="0"/>
+          </c:dLbls>
+          <c:marker>
+            <c:symbol val="none"/>
+            <c:size val="8"/>
+            <c:spPr>
+              <a:solidFill>
+                <a:srgbClr val="2587C5"/>
+              </a:solidFill>
+              <a:ln w="9525" cap="flat">
+                <a:solidFill>
+                  <a:srgbClr val="2587C5"/>
+                </a:solidFill>
+                <a:prstDash val="solid"/>
+                <a:round/>
+              </a:ln>
+              <a:effectLst/>
+            </c:spPr>
+          </c:marker>
+          <c:cat>
+            <c:multiLvlStrRef>
+              <c:f>Sheet1!$A$2:$A$10</c:f>
+              <c:multiLvlStrCache>
+                <c:ptCount val="9"/>
+                <c:lvl>
+                  <c:pt idx="0">
+                    <c:v>Jan</c:v>
+                  </c:pt>
+                  <c:pt idx="1">
+                    <c:v>Feb</c:v>
+                  </c:pt>
+                  <c:pt idx="2">
+                    <c:v>Mar</c:v>
+                  </c:pt>
+                  <c:pt idx="3">
+                    <c:v>Apr</c:v>
+                  </c:pt>
+                  <c:pt idx="4">
+                    <c:v>May</c:v>
+                  </c:pt>
+                  <c:pt idx="5">
+                    <c:v>Jun</c:v>
+                  </c:pt>
+                  <c:pt idx="6">
+                    <c:v>Jul</c:v>
+                  </c:pt>
+                  <c:pt idx="7">
+                    <c:v>Aug</c:v>
+                  </c:pt>
+                  <c:pt idx="8">
+                    <c:v>Sep</c:v>
+                  </c:pt>
+                </c:lvl>
+              </c:multiLvlStrCache>
+            </c:multiLvlStrRef>
+          </c:cat>
+          <c:val>
+            <c:numRef>
+              <c:f>Sheet1!$B$2:$B$10</c:f>
+              <c:numCache>
+                <c:formatCode>General</c:formatCode>
+                <c:ptCount val="9"/>
+                <c:pt idx="0">
+                  <c:v>14264</c:v>
+                </c:pt>
+                <c:pt idx="1">
+                  <c:v>12746</c:v>
+                </c:pt>
+                <c:pt idx="2">
+                  <c:v>13940</c:v>
+                </c:pt>
+                <c:pt idx="3">
+                  <c:v>13710</c:v>
+                </c:pt>
+                <c:pt idx="4">
+                  <c:v>13121</c:v>
+                </c:pt>
+                <c:pt idx="5">
+                  <c:v>14168</c:v>
+                </c:pt>
+                <c:pt idx="6">
+                  <c:v>14663</c:v>
+                </c:pt>
+                <c:pt idx="7">
+                  <c:v/>
+                </c:pt>
+                <c:pt idx="8">
+                  <c:v/>
+                </c:pt>
+              </c:numCache>
+            </c:numRef>
+          </c:val>
+          <c:smooth val="0"/>
+        </c:ser>
+        <c:dLbls>
+          <c:numFmt formatCode="#,##0.0,&quot;K&quot;" sourceLinked="0"/>
+          <c:txPr>
+            <a:bodyPr/>
+            <a:lstStyle/>
+            <a:p>
+              <a:pPr>
+                <a:defRPr b="0" i="0" strike="noStrike" sz="1400" u="none">
+                  <a:solidFill>
+                    <a:srgbClr val="1A1A1A"/>
+                  </a:solidFill>
+                  <a:latin typeface="+mn-lt"/>
+                </a:defRPr>
+              </a:pPr>
+            </a:p>
+          </c:txPr>
+          <c:dLblPos val="b"/>
+          <c:showLegendKey val="0"/>
+          <c:showVal val="1"/>
+          <c:showCatName val="0"/>
+          <c:showSerName val="0"/>
+          <c:showPercent val="0"/>
+          <c:showBubbleSize val="0"/>
+          <c:showLeaderLines val="0"/>
+        </c:dLbls>
+        <c:marker val="1"/>
+        <c:axId val="2094734554"/>
+        <c:axId val="2094734552"/>
+        <c:axId val="2094734556"/>
+      </c:lineChart>
+      <c:catAx>
+        <c:axId val="2094734554"/>
+        <c:scaling>
+          <c:orientation val="minMax"/>
+        </c:scaling>
+        <c:delete val="0"/>
+        <c:axPos val="b"/>
+        <c:numFmt formatCode="General" sourceLinked="1"/>
+        <c:majorTickMark val="out"/>
+        <c:minorTickMark val="none"/>
+        <c:tickLblPos val="low"/>
+        <c:spPr>
+          <a:ln w="12700" cap="flat">
+            <a:noFill/>
+            <a:prstDash val="solid"/>
+            <a:round/>
+          </a:ln>
+        </c:spPr>
+        <c:txPr>
+          <a:bodyPr/>
+          <a:lstStyle/>
+          <a:p>
+            <a:pPr>
+              <a:defRPr sz="1400" b="0" i="0" u="none" strike="noStrike">
+                <a:solidFill>
+                  <a:srgbClr val="FFFFFF"/>
+                </a:solidFill>
+                <a:latin typeface="+mn-lt"/>
+              </a:defRPr>
+            </a:pPr>
+            <a:endParaRPr lang="en-US"/>
+          </a:p>
+        </c:txPr>
+        <c:crossAx val="2094734552"/>
+        <c:crosses val="min"/>
+        <c:auto val="1"/>
+        <c:lblAlgn val="ctr"/>
+        <c:noMultiLvlLbl val="1"/>
+      </c:catAx>
+      <c:valAx>
+        <c:axId val="2094734552"/>
+        <c:scaling>
+          <c:orientation val="minMax"/>
+          <c:max val="18000"/>
+          <c:min val="10000"/>
+        </c:scaling>
+        <c:delete val="0"/>
+        <c:axPos val="l"/>
+        <c:numFmt formatCode="#,##0" sourceLinked="0"/>
+        <c:majorTickMark val="out"/>
+        <c:minorTickMark val="none"/>
+        <c:tickLblPos val="nextTo"/>
+        <c:spPr>
+          <a:ln w="12700" cap="flat">
+            <a:noFill/>
+            <a:prstDash val="solid"/>
+            <a:round/>
+          </a:ln>
+        </c:spPr>
+        <c:txPr>
+          <a:bodyPr/>
+          <a:lstStyle/>
+          <a:p>
+            <a:pPr>
+              <a:defRPr sz="1400" b="0" i="0" u="none" strike="noStrike">
+                <a:solidFill>
+                  <a:srgbClr val="FFFFFF"/>
+                </a:solidFill>
+                <a:latin typeface="+mn-lt"/>
+              </a:defRPr>
+            </a:pPr>
+            <a:endParaRPr lang="en-US"/>
+          </a:p>
+        </c:txPr>
+        <c:crossAx val="2094734554"/>
+        <c:crosses val="autoZero"/>
+        <c:crossBetween val="between"/>
+        <c:majorUnit val="2000"/>
+      </c:valAx>
+      <c:spPr>
+        <a:solidFill>
+          <a:srgbClr val="FFFFFF">
+            <a:alpha val="0"/>
+          </a:srgbClr>
+        </a:solidFill>
+        <a:ln>
+          <a:noFill/>
+        </a:ln>
+        <a:effectLst/>
+      </c:spPr>
+    </c:plotArea>
+    <c:plotVisOnly val="1"/>
+    <c:dispBlanksAs val="span"/>
+  </c:chart>
+  <c:spPr>
+    <a:solidFill>
+      <a:srgbClr val="FFFFFF">
+        <a:alpha val="0"/>
+      </a:srgbClr>
+    </a:solidFill>
+    <a:ln>
+      <a:noFill/>
+    </a:ln>
+    <a:effectLst/>
+  </c:spPr>
+  <c:externalData r:id="rId1">
+    <c:autoUpdate val="0"/>
+  </c:externalData>
+</c:chartSpace>
+</file>
+
+<file path=ppt/charts/chart4.xml><?xml version="1.0" encoding="utf-8"?>
+<c:chartSpace xmlns:c="http://schemas.openxmlformats.org/drawingml/2006/chart" xmlns:a="http://schemas.openxmlformats.org/drawingml/2006/main" xmlns:r="http://schemas.openxmlformats.org/officeDocument/2006/relationships">
+  <c:date1904 val="0"/>
+  <c:roundedCorners val="1"/>
+  <c:chart>
+    <c:autoTitleDeleted val="1"/>
+    <c:plotArea>
+      <c:layout/>
+      <c:lineChart>
+        <c:varyColors val="0"/>
+        <c:ser>
+          <c:idx val="0"/>
+          <c:order val="0"/>
+          <c:tx>
+            <c:strRef>
+              <c:f>Sheet1!$B$1</c:f>
+              <c:strCache>
+                <c:ptCount val="1"/>
+                <c:pt idx="0">
+                  <c:v>2025</c:v>
+                </c:pt>
+              </c:strCache>
+            </c:strRef>
+          </c:tx>
+          <c:spPr>
+            <a:solidFill>
+              <a:srgbClr val="9AA3AD"/>
+            </a:solidFill>
+            <a:ln>
+              <a:noFill/>
+            </a:ln>
+            <a:effectLst/>
+          </c:spPr>
+          <c:invertIfNegative val="0"/>
+          <c:dLbls>
+            <c:numFmt formatCode="#,##0.0,&quot;K&quot;" sourceLinked="0"/>
+            <c:txPr>
+              <a:bodyPr/>
+              <a:lstStyle/>
+              <a:p>
+                <a:pPr>
+                  <a:defRPr b="0" i="0" strike="noStrike" sz="1400" u="none">
+                    <a:solidFill>
+                      <a:srgbClr val="1A1A1A"/>
+                    </a:solidFill>
+                    <a:latin typeface="+mn-lt"/>
+                  </a:defRPr>
+                </a:pPr>
+              </a:p>
+            </c:txPr>
+            <c:dLblPos val="t"/>
+            <c:showLegendKey val="0"/>
+            <c:showVal val="1"/>
+            <c:showCatName val="0"/>
+            <c:showSerName val="0"/>
+            <c:showPercent val="0"/>
+            <c:showBubbleSize val="0"/>
+            <c:showLeaderLines val="0"/>
+          </c:dLbls>
+          <c:marker>
+            <c:symbol val="none"/>
+            <c:size val="8"/>
+            <c:spPr>
+              <a:solidFill>
+                <a:srgbClr val="9AA3AD"/>
+              </a:solidFill>
+              <a:ln w="9525" cap="flat">
+                <a:solidFill>
+                  <a:srgbClr val="9AA3AD"/>
+                </a:solidFill>
+                <a:prstDash val="solid"/>
+                <a:round/>
+              </a:ln>
+              <a:effectLst/>
+            </c:spPr>
+          </c:marker>
+          <c:cat>
+            <c:multiLvlStrRef>
+              <c:f>Sheet1!$A$2:$A$10</c:f>
+              <c:multiLvlStrCache>
+                <c:ptCount val="9"/>
+                <c:lvl>
+                  <c:pt idx="0">
+                    <c:v>Jan</c:v>
+                  </c:pt>
+                  <c:pt idx="1">
+                    <c:v>Feb</c:v>
+                  </c:pt>
+                  <c:pt idx="2">
+                    <c:v>Mar</c:v>
+                  </c:pt>
+                  <c:pt idx="3">
+                    <c:v>Apr</c:v>
+                  </c:pt>
+                  <c:pt idx="4">
+                    <c:v>May</c:v>
+                  </c:pt>
+                  <c:pt idx="5">
+                    <c:v>Jun</c:v>
+                  </c:pt>
+                  <c:pt idx="6">
+                    <c:v>Jul</c:v>
+                  </c:pt>
+                  <c:pt idx="7">
+                    <c:v>Aug</c:v>
+                  </c:pt>
+                  <c:pt idx="8">
+                    <c:v>Sep</c:v>
+                  </c:pt>
+                </c:lvl>
+              </c:multiLvlStrCache>
+            </c:multiLvlStrRef>
+          </c:cat>
+          <c:val>
+            <c:numRef>
+              <c:f>Sheet1!$B$2:$B$10</c:f>
+              <c:numCache>
+                <c:formatCode>General</c:formatCode>
+                <c:ptCount val="9"/>
+                <c:pt idx="0">
+                  <c:v>16565</c:v>
+                </c:pt>
+                <c:pt idx="1">
+                  <c:v>15707</c:v>
+                </c:pt>
+                <c:pt idx="2">
+                  <c:v>15981</c:v>
+                </c:pt>
+                <c:pt idx="3">
+                  <c:v>14990</c:v>
+                </c:pt>
+                <c:pt idx="4">
+                  <c:v>14527</c:v>
+                </c:pt>
+                <c:pt idx="5">
+                  <c:v>14882</c:v>
+                </c:pt>
+                <c:pt idx="6">
+                  <c:v>15408</c:v>
+                </c:pt>
+                <c:pt idx="7">
+                  <c:v/>
+                </c:pt>
+                <c:pt idx="8">
+                  <c:v/>
+                </c:pt>
+              </c:numCache>
+            </c:numRef>
+          </c:val>
+          <c:smooth val="0"/>
+        </c:ser>
+        <c:dLbls>
+          <c:numFmt formatCode="#,##0.0,&quot;K&quot;" sourceLinked="0"/>
+          <c:txPr>
+            <a:bodyPr/>
+            <a:lstStyle/>
+            <a:p>
+              <a:pPr>
+                <a:defRPr b="0" i="0" strike="noStrike" sz="1400" u="none">
+                  <a:solidFill>
+                    <a:srgbClr val="1A1A1A"/>
+                  </a:solidFill>
+                  <a:latin typeface="+mn-lt"/>
+                </a:defRPr>
+              </a:pPr>
+            </a:p>
+          </c:txPr>
+          <c:dLblPos val="t"/>
+          <c:showLegendKey val="0"/>
+          <c:showVal val="1"/>
+          <c:showCatName val="0"/>
+          <c:showSerName val="0"/>
+          <c:showPercent val="0"/>
+          <c:showBubbleSize val="0"/>
+          <c:showLeaderLines val="0"/>
+        </c:dLbls>
+        <c:marker val="1"/>
+        <c:axId val="2094734554"/>
+        <c:axId val="2094734552"/>
+        <c:axId val="2094734556"/>
+      </c:lineChart>
+      <c:catAx>
+        <c:axId val="2094734554"/>
+        <c:scaling>
+          <c:orientation val="minMax"/>
+        </c:scaling>
+        <c:delete val="0"/>
+        <c:axPos val="b"/>
+        <c:numFmt formatCode="General" sourceLinked="1"/>
+        <c:majorTickMark val="out"/>
+        <c:minorTickMark val="none"/>
+        <c:tickLblPos val="low"/>
+        <c:spPr>
+          <a:ln w="12700" cap="flat">
+            <a:noFill/>
+            <a:prstDash val="solid"/>
+            <a:round/>
+          </a:ln>
+        </c:spPr>
+        <c:txPr>
+          <a:bodyPr/>
+          <a:lstStyle/>
+          <a:p>
+            <a:pPr>
+              <a:defRPr sz="1400" b="0" i="0" u="none" strike="noStrike">
+                <a:solidFill>
+                  <a:srgbClr val="FFFFFF"/>
+                </a:solidFill>
+                <a:latin typeface="+mn-lt"/>
+              </a:defRPr>
+            </a:pPr>
+            <a:endParaRPr lang="en-US"/>
+          </a:p>
+        </c:txPr>
+        <c:crossAx val="2094734552"/>
+        <c:crosses val="min"/>
+        <c:auto val="1"/>
+        <c:lblAlgn val="ctr"/>
+        <c:noMultiLvlLbl val="1"/>
+      </c:catAx>
+      <c:valAx>
+        <c:axId val="2094734552"/>
+        <c:scaling>
+          <c:orientation val="minMax"/>
+          <c:max val="18000"/>
+          <c:min val="10000"/>
+        </c:scaling>
+        <c:delete val="0"/>
+        <c:axPos val="l"/>
+        <c:numFmt formatCode="#,##0" sourceLinked="0"/>
+        <c:majorTickMark val="out"/>
+        <c:minorTickMark val="none"/>
+        <c:tickLblPos val="nextTo"/>
+        <c:spPr>
+          <a:ln w="12700" cap="flat">
+            <a:noFill/>
+            <a:prstDash val="solid"/>
+            <a:round/>
+          </a:ln>
+        </c:spPr>
+        <c:txPr>
+          <a:bodyPr/>
+          <a:lstStyle/>
+          <a:p>
+            <a:pPr>
+              <a:defRPr sz="1400" b="0" i="0" u="none" strike="noStrike">
+                <a:solidFill>
+                  <a:srgbClr val="FFFFFF"/>
+                </a:solidFill>
+                <a:latin typeface="+mn-lt"/>
+              </a:defRPr>
+            </a:pPr>
+            <a:endParaRPr lang="en-US"/>
+          </a:p>
+        </c:txPr>
+        <c:crossAx val="2094734554"/>
+        <c:crosses val="autoZero"/>
+        <c:crossBetween val="between"/>
+        <c:majorUnit val="2000"/>
+      </c:valAx>
+      <c:spPr>
+        <a:solidFill>
+          <a:srgbClr val="FFFFFF">
+            <a:alpha val="0"/>
+          </a:srgbClr>
+        </a:solidFill>
+        <a:ln>
+          <a:noFill/>
+        </a:ln>
+        <a:effectLst/>
+      </c:spPr>
+    </c:plotArea>
+    <c:plotVisOnly val="1"/>
+    <c:dispBlanksAs val="span"/>
+  </c:chart>
+  <c:spPr>
+    <a:solidFill>
+      <a:srgbClr val="FFFFFF">
+        <a:alpha val="0"/>
+      </a:srgbClr>
+    </a:solidFill>
+    <a:ln>
+      <a:noFill/>
+    </a:ln>
+    <a:effectLst/>
+  </c:spPr>
+  <c:externalData r:id="rId1">
+    <c:autoUpdate val="0"/>
+  </c:externalData>
+</c:chartSpace>
+</file>
+
+<file path=ppt/charts/chart5.xml><?xml version="1.0" encoding="utf-8"?>
+<c:chartSpace xmlns:c="http://schemas.openxmlformats.org/drawingml/2006/chart" xmlns:a="http://schemas.openxmlformats.org/drawingml/2006/main" xmlns:r="http://schemas.openxmlformats.org/officeDocument/2006/relationships">
+  <c:date1904 val="0"/>
+  <c:roundedCorners val="1"/>
+  <c:chart>
+    <c:autoTitleDeleted val="1"/>
+    <c:plotArea>
+      <c:layout/>
+      <c:lineChart>
+        <c:varyColors val="0"/>
+        <c:ser>
+          <c:idx val="0"/>
+          <c:order val="0"/>
+          <c:tx>
+            <c:strRef>
+              <c:f>Sheet1!$B$1</c:f>
+              <c:strCache>
+                <c:ptCount val="1"/>
+                <c:pt idx="0">
+                  <c:v>2025</c:v>
+                </c:pt>
+              </c:strCache>
+            </c:strRef>
+          </c:tx>
+          <c:spPr>
+            <a:solidFill>
+              <a:srgbClr val="9AA3AD"/>
+            </a:solidFill>
+            <a:ln>
+              <a:noFill/>
+            </a:ln>
+            <a:effectLst/>
+          </c:spPr>
+          <c:invertIfNegative val="0"/>
+          <c:dLbls>
+            <c:numFmt formatCode="#,##0.0,&quot;K&quot;" sourceLinked="0"/>
+            <c:txPr>
+              <a:bodyPr/>
+              <a:lstStyle/>
+              <a:p>
+                <a:pPr>
+                  <a:defRPr b="0" i="0" strike="noStrike" sz="1400" u="none">
+                    <a:solidFill>
+                      <a:srgbClr val="1A1A1A"/>
+                    </a:solidFill>
+                    <a:latin typeface="+mn-lt"/>
+                  </a:defRPr>
+                </a:pPr>
+              </a:p>
+            </c:txPr>
+            <c:dLblPos val="b"/>
+            <c:showLegendKey val="0"/>
+            <c:showVal val="1"/>
+            <c:showCatName val="0"/>
+            <c:showSerName val="0"/>
+            <c:showPercent val="0"/>
+            <c:showBubbleSize val="0"/>
+            <c:showLeaderLines val="0"/>
+          </c:dLbls>
+          <c:marker>
+            <c:symbol val="none"/>
+            <c:size val="8"/>
+            <c:spPr>
+              <a:solidFill>
+                <a:srgbClr val="9AA3AD"/>
+              </a:solidFill>
+              <a:ln w="9525" cap="flat">
+                <a:solidFill>
+                  <a:srgbClr val="9AA3AD"/>
+                </a:solidFill>
+                <a:prstDash val="solid"/>
+                <a:round/>
+              </a:ln>
+              <a:effectLst/>
+            </c:spPr>
+          </c:marker>
+          <c:cat>
+            <c:multiLvlStrRef>
+              <c:f>Sheet1!$A$2:$A$10</c:f>
+              <c:multiLvlStrCache>
+                <c:ptCount val="9"/>
+                <c:lvl>
+                  <c:pt idx="0">
+                    <c:v>Jan</c:v>
+                  </c:pt>
+                  <c:pt idx="1">
+                    <c:v>Feb</c:v>
+                  </c:pt>
+                  <c:pt idx="2">
+                    <c:v>Mar</c:v>
+                  </c:pt>
+                  <c:pt idx="3">
+                    <c:v>Apr</c:v>
+                  </c:pt>
+                  <c:pt idx="4">
+                    <c:v>May</c:v>
+                  </c:pt>
+                  <c:pt idx="5">
+                    <c:v>Jun</c:v>
+                  </c:pt>
+                  <c:pt idx="6">
+                    <c:v>Jul</c:v>
+                  </c:pt>
+                  <c:pt idx="7">
+                    <c:v>Aug</c:v>
+                  </c:pt>
+                  <c:pt idx="8">
+                    <c:v>Sep</c:v>
+                  </c:pt>
+                </c:lvl>
+              </c:multiLvlStrCache>
+            </c:multiLvlStrRef>
+          </c:cat>
+          <c:val>
+            <c:numRef>
+              <c:f>Sheet1!$B$2:$B$10</c:f>
+              <c:numCache>
+                <c:formatCode>General</c:formatCode>
+                <c:ptCount val="9"/>
+                <c:pt idx="0">
+                  <c:v/>
+                </c:pt>
+                <c:pt idx="1">
+                  <c:v/>
+                </c:pt>
+                <c:pt idx="2">
+                  <c:v/>
+                </c:pt>
+                <c:pt idx="3">
+                  <c:v/>
+                </c:pt>
+                <c:pt idx="4">
+                  <c:v/>
+                </c:pt>
+                <c:pt idx="5">
+                  <c:v/>
+                </c:pt>
+                <c:pt idx="6">
+                  <c:v/>
+                </c:pt>
+                <c:pt idx="7">
+                  <c:v>14622</c:v>
+                </c:pt>
+                <c:pt idx="8">
+                  <c:v>13082</c:v>
+                </c:pt>
+              </c:numCache>
+            </c:numRef>
+          </c:val>
+          <c:smooth val="0"/>
+        </c:ser>
+        <c:dLbls>
+          <c:numFmt formatCode="#,##0.0,&quot;K&quot;" sourceLinked="0"/>
+          <c:txPr>
+            <a:bodyPr/>
+            <a:lstStyle/>
+            <a:p>
+              <a:pPr>
+                <a:defRPr b="0" i="0" strike="noStrike" sz="1400" u="none">
+                  <a:solidFill>
+                    <a:srgbClr val="1A1A1A"/>
+                  </a:solidFill>
+                  <a:latin typeface="+mn-lt"/>
+                </a:defRPr>
+              </a:pPr>
+            </a:p>
+          </c:txPr>
+          <c:dLblPos val="b"/>
+          <c:showLegendKey val="0"/>
+          <c:showVal val="1"/>
+          <c:showCatName val="0"/>
+          <c:showSerName val="0"/>
+          <c:showPercent val="0"/>
+          <c:showBubbleSize val="0"/>
+          <c:showLeaderLines val="0"/>
+        </c:dLbls>
+        <c:marker val="1"/>
+        <c:axId val="2094734554"/>
+        <c:axId val="2094734552"/>
+        <c:axId val="2094734556"/>
+      </c:lineChart>
+      <c:catAx>
+        <c:axId val="2094734554"/>
+        <c:scaling>
+          <c:orientation val="minMax"/>
+        </c:scaling>
+        <c:delete val="0"/>
+        <c:axPos val="b"/>
+        <c:numFmt formatCode="General" sourceLinked="1"/>
+        <c:majorTickMark val="out"/>
+        <c:minorTickMark val="none"/>
+        <c:tickLblPos val="low"/>
+        <c:spPr>
+          <a:ln w="12700" cap="flat">
+            <a:noFill/>
+            <a:prstDash val="solid"/>
+            <a:round/>
+          </a:ln>
+        </c:spPr>
+        <c:txPr>
+          <a:bodyPr/>
+          <a:lstStyle/>
+          <a:p>
+            <a:pPr>
+              <a:defRPr sz="1400" b="0" i="0" u="none" strike="noStrike">
+                <a:solidFill>
+                  <a:srgbClr val="FFFFFF"/>
+                </a:solidFill>
+                <a:latin typeface="+mn-lt"/>
+              </a:defRPr>
+            </a:pPr>
+            <a:endParaRPr lang="en-US"/>
+          </a:p>
+        </c:txPr>
+        <c:crossAx val="2094734552"/>
+        <c:crosses val="min"/>
+        <c:auto val="1"/>
+        <c:lblAlgn val="ctr"/>
+        <c:noMultiLvlLbl val="1"/>
+      </c:catAx>
+      <c:valAx>
+        <c:axId val="2094734552"/>
+        <c:scaling>
+          <c:orientation val="minMax"/>
+          <c:max val="18000"/>
+          <c:min val="10000"/>
+        </c:scaling>
+        <c:delete val="0"/>
+        <c:axPos val="l"/>
+        <c:numFmt formatCode="#,##0" sourceLinked="0"/>
+        <c:majorTickMark val="out"/>
+        <c:minorTickMark val="none"/>
+        <c:tickLblPos val="nextTo"/>
+        <c:spPr>
+          <a:ln w="12700" cap="flat">
+            <a:noFill/>
+            <a:prstDash val="solid"/>
+            <a:round/>
+          </a:ln>
+        </c:spPr>
+        <c:txPr>
+          <a:bodyPr/>
+          <a:lstStyle/>
+          <a:p>
+            <a:pPr>
+              <a:defRPr sz="1400" b="0" i="0" u="none" strike="noStrike">
+                <a:solidFill>
+                  <a:srgbClr val="FFFFFF"/>
+                </a:solidFill>
+                <a:latin typeface="+mn-lt"/>
+              </a:defRPr>
+            </a:pPr>
+            <a:endParaRPr lang="en-US"/>
+          </a:p>
+        </c:txPr>
+        <c:crossAx val="2094734554"/>
+        <c:crosses val="autoZero"/>
+        <c:crossBetween val="between"/>
+        <c:majorUnit val="2000"/>
+      </c:valAx>
+      <c:spPr>
+        <a:solidFill>
+          <a:srgbClr val="FFFFFF">
+            <a:alpha val="0"/>
+          </a:srgbClr>
+        </a:solidFill>
+        <a:ln>
+          <a:noFill/>
+        </a:ln>
+        <a:effectLst/>
+      </c:spPr>
+    </c:plotArea>
+    <c:plotVisOnly val="1"/>
+    <c:dispBlanksAs val="span"/>
+  </c:chart>
+  <c:spPr>
+    <a:solidFill>
+      <a:srgbClr val="FFFFFF">
+        <a:alpha val="0"/>
+      </a:srgbClr>
+    </a:solidFill>
+    <a:ln>
+      <a:noFill/>
+    </a:ln>
+    <a:effectLst/>
+  </c:spPr>
+  <c:externalData r:id="rId1">
+    <c:autoUpdate val="0"/>
+  </c:externalData>
+</c:chartSpace>
+</file>
+
+<file path=ppt/charts/chart6.xml><?xml version="1.0" encoding="utf-8"?>
+<c:chartSpace xmlns:c="http://schemas.openxmlformats.org/drawingml/2006/chart" xmlns:a="http://schemas.openxmlformats.org/drawingml/2006/main" xmlns:r="http://schemas.openxmlformats.org/officeDocument/2006/relationships">
+  <c:date1904 val="0"/>
+  <c:roundedCorners val="1"/>
+  <c:chart>
+    <c:autoTitleDeleted val="1"/>
+    <c:plotArea>
+      <c:layout/>
+      <c:lineChart>
+        <c:varyColors val="0"/>
+        <c:ser>
+          <c:idx val="0"/>
+          <c:order val="0"/>
+          <c:tx>
+            <c:strRef>
+              <c:f>Sheet1!$B$1</c:f>
+              <c:strCache>
+                <c:ptCount val="1"/>
+                <c:pt idx="0">
+                  <c:v>2025</c:v>
+                </c:pt>
+              </c:strCache>
+            </c:strRef>
+          </c:tx>
+          <c:spPr>
+            <a:solidFill>
+              <a:srgbClr val="9AA3AD"/>
+            </a:solidFill>
+            <a:ln w="38100" cap="flat">
+              <a:solidFill>
+                <a:srgbClr val="9AA3AD"/>
+              </a:solidFill>
+              <a:prstDash val="solid"/>
+              <a:round/>
+            </a:ln>
+            <a:effectLst/>
+          </c:spPr>
+          <c:invertIfNegative val="0"/>
+          <c:dLbls>
+            <c:numFmt formatCode="#,##0.0,&quot;K&quot;" sourceLinked="0"/>
+            <c:txPr>
+              <a:bodyPr/>
+              <a:lstStyle/>
+              <a:p>
+                <a:pPr>
+                  <a:defRPr b="0" i="0" strike="noStrike" sz="1400" u="none">
+                    <a:solidFill>
+                      <a:srgbClr val="1A1A1A"/>
+                    </a:solidFill>
+                    <a:latin typeface="+mn-lt"/>
+                  </a:defRPr>
+                </a:pPr>
+              </a:p>
+            </c:txPr>
+            <c:showLegendKey val="0"/>
+            <c:showVal val="0"/>
+            <c:showCatName val="0"/>
+            <c:showSerName val="0"/>
+            <c:showPercent val="0"/>
+            <c:showBubbleSize val="0"/>
+            <c:showLeaderLines val="0"/>
+          </c:dLbls>
+          <c:marker>
+            <c:symbol val="circle"/>
+            <c:size val="8"/>
+            <c:spPr>
+              <a:solidFill>
+                <a:srgbClr val="9AA3AD"/>
+              </a:solidFill>
+              <a:ln w="9525" cap="flat">
+                <a:solidFill>
+                  <a:srgbClr val="9AA3AD"/>
+                </a:solidFill>
+                <a:prstDash val="solid"/>
+                <a:round/>
+              </a:ln>
+              <a:effectLst/>
+            </c:spPr>
+          </c:marker>
+          <c:cat>
+            <c:multiLvlStrRef>
+              <c:f>Sheet1!$A$2:$A$10</c:f>
+              <c:multiLvlStrCache>
+                <c:ptCount val="9"/>
+                <c:lvl>
+                  <c:pt idx="0">
+                    <c:v>Jan</c:v>
+                  </c:pt>
+                  <c:pt idx="1">
+                    <c:v>Feb</c:v>
+                  </c:pt>
+                  <c:pt idx="2">
+                    <c:v>Mar</c:v>
+                  </c:pt>
+                  <c:pt idx="3">
+                    <c:v>Apr</c:v>
+                  </c:pt>
+                  <c:pt idx="4">
+                    <c:v>May</c:v>
+                  </c:pt>
+                  <c:pt idx="5">
+                    <c:v>Jun</c:v>
+                  </c:pt>
+                  <c:pt idx="6">
+                    <c:v>Jul</c:v>
+                  </c:pt>
+                  <c:pt idx="7">
+                    <c:v>Aug</c:v>
+                  </c:pt>
+                  <c:pt idx="8">
+                    <c:v>Sep</c:v>
+                  </c:pt>
+                </c:lvl>
+              </c:multiLvlStrCache>
+            </c:multiLvlStrRef>
+          </c:cat>
+          <c:val>
+            <c:numRef>
+              <c:f>Sheet1!$B$2:$B$10</c:f>
+              <c:numCache>
+                <c:formatCode>General</c:formatCode>
+                <c:ptCount val="9"/>
+                <c:pt idx="0">
+                  <c:v>16565</c:v>
+                </c:pt>
+                <c:pt idx="1">
+                  <c:v>15707</c:v>
+                </c:pt>
+                <c:pt idx="2">
+                  <c:v>15981</c:v>
+                </c:pt>
+                <c:pt idx="3">
+                  <c:v>14990</c:v>
+                </c:pt>
+                <c:pt idx="4">
+                  <c:v>14527</c:v>
+                </c:pt>
+                <c:pt idx="5">
+                  <c:v>14882</c:v>
+                </c:pt>
+                <c:pt idx="6">
+                  <c:v>15408</c:v>
+                </c:pt>
+                <c:pt idx="7">
+                  <c:v>14622</c:v>
+                </c:pt>
+                <c:pt idx="8">
+                  <c:v>13082</c:v>
+                </c:pt>
+              </c:numCache>
+            </c:numRef>
+          </c:val>
+          <c:smooth val="0"/>
+        </c:ser>
+        <c:dLbls>
+          <c:numFmt formatCode="#,##0.0,&quot;K&quot;" sourceLinked="0"/>
+          <c:txPr>
+            <a:bodyPr/>
+            <a:lstStyle/>
+            <a:p>
+              <a:pPr>
+                <a:defRPr b="0" i="0" strike="noStrike" sz="1400" u="none">
+                  <a:solidFill>
+                    <a:srgbClr val="1A1A1A"/>
+                  </a:solidFill>
+                  <a:latin typeface="+mn-lt"/>
+                </a:defRPr>
+              </a:pPr>
+            </a:p>
+          </c:txPr>
+          <c:showLegendKey val="0"/>
+          <c:showVal val="0"/>
+          <c:showCatName val="0"/>
+          <c:showSerName val="0"/>
+          <c:showPercent val="0"/>
+          <c:showBubbleSize val="0"/>
+          <c:showLeaderLines val="0"/>
+        </c:dLbls>
+        <c:marker val="1"/>
+        <c:axId val="2094734554"/>
+        <c:axId val="2094734552"/>
+        <c:axId val="2094734556"/>
+      </c:lineChart>
+      <c:catAx>
+        <c:axId val="2094734554"/>
+        <c:scaling>
+          <c:orientation val="minMax"/>
+        </c:scaling>
+        <c:delete val="0"/>
+        <c:axPos val="b"/>
+        <c:numFmt formatCode="General" sourceLinked="1"/>
+        <c:majorTickMark val="out"/>
+        <c:minorTickMark val="none"/>
+        <c:tickLblPos val="low"/>
+        <c:spPr>
+          <a:ln w="12700" cap="flat">
+            <a:solidFill>
+              <a:srgbClr val="888888"/>
+            </a:solidFill>
+            <a:prstDash val="solid"/>
+            <a:round/>
+          </a:ln>
+        </c:spPr>
+        <c:txPr>
+          <a:bodyPr/>
+          <a:lstStyle/>
+          <a:p>
+            <a:pPr>
+              <a:defRPr sz="1400" b="0" i="0" u="none" strike="noStrike">
+                <a:solidFill>
+                  <a:srgbClr val="1A1A1A"/>
+                </a:solidFill>
+                <a:latin typeface="+mn-lt"/>
+              </a:defRPr>
+            </a:pPr>
+            <a:endParaRPr lang="en-US"/>
+          </a:p>
+        </c:txPr>
+        <c:crossAx val="2094734552"/>
+        <c:crosses val="min"/>
+        <c:auto val="1"/>
+        <c:lblAlgn val="ctr"/>
+        <c:noMultiLvlLbl val="1"/>
+      </c:catAx>
+      <c:valAx>
+        <c:axId val="2094734552"/>
+        <c:scaling>
+          <c:orientation val="minMax"/>
+          <c:max val="18000"/>
+          <c:min val="10000"/>
+        </c:scaling>
+        <c:delete val="0"/>
+        <c:axPos val="l"/>
+        <c:majorGridlines>
+          <c:spPr>
+            <a:ln w="9525" cap="flat">
+              <a:solidFill>
+                <a:srgbClr val="D9D9D9"/>
+              </a:solidFill>
+              <a:prstDash val="solid"/>
+              <a:round/>
+            </a:ln>
+          </c:spPr>
+        </c:majorGridlines>
+        <c:numFmt formatCode="#,##0" sourceLinked="0"/>
+        <c:majorTickMark val="out"/>
+        <c:minorTickMark val="none"/>
+        <c:tickLblPos val="nextTo"/>
+        <c:spPr>
+          <a:ln w="12700" cap="flat">
+            <a:noFill/>
+            <a:prstDash val="solid"/>
+            <a:round/>
+          </a:ln>
+        </c:spPr>
+        <c:txPr>
+          <a:bodyPr/>
+          <a:lstStyle/>
+          <a:p>
+            <a:pPr>
+              <a:defRPr sz="1400" b="0" i="0" u="none" strike="noStrike">
+                <a:solidFill>
+                  <a:srgbClr val="595959"/>
+                </a:solidFill>
+                <a:latin typeface="+mn-lt"/>
+              </a:defRPr>
+            </a:pPr>
+            <a:endParaRPr lang="en-US"/>
+          </a:p>
+        </c:txPr>
+        <c:crossAx val="2094734554"/>
+        <c:crosses val="autoZero"/>
+        <c:crossBetween val="between"/>
+        <c:majorUnit val="2000"/>
+      </c:valAx>
+      <c:spPr>
+        <a:solidFill>
+          <a:srgbClr val="FFFFFF">
+            <a:alpha val="0"/>
+          </a:srgbClr>
+        </a:solidFill>
+        <a:ln>
+          <a:noFill/>
+        </a:ln>
+        <a:effectLst/>
+      </c:spPr>
+    </c:plotArea>
+    <c:plotVisOnly val="1"/>
+    <c:dispBlanksAs val="span"/>
+  </c:chart>
+  <c:spPr>
+    <a:solidFill>
+      <a:srgbClr val="FFFFFF">
+        <a:alpha val="0"/>
+      </a:srgbClr>
+    </a:solidFill>
+    <a:ln>
+      <a:noFill/>
+    </a:ln>
+    <a:effectLst/>
+  </c:spPr>
+  <c:externalData r:id="rId1">
+    <c:autoUpdate val="0"/>
+  </c:externalData>
+</c:chartSpace>
+</file>
+
+<file path=ppt/charts/chart7.xml><?xml version="1.0" encoding="utf-8"?>
+<c:chartSpace xmlns:c="http://schemas.openxmlformats.org/drawingml/2006/chart" xmlns:a="http://schemas.openxmlformats.org/drawingml/2006/main" xmlns:r="http://schemas.openxmlformats.org/officeDocument/2006/relationships">
+  <c:date1904 val="0"/>
+  <c:roundedCorners val="1"/>
+  <c:chart>
+    <c:autoTitleDeleted val="1"/>
+    <c:plotArea>
+      <c:layout/>
+      <c:lineChart>
+        <c:varyColors val="0"/>
+        <c:ser>
+          <c:idx val="0"/>
+          <c:order val="0"/>
+          <c:tx>
+            <c:strRef>
+              <c:f>Sheet1!$B$1</c:f>
+              <c:strCache>
+                <c:ptCount val="1"/>
+                <c:pt idx="0">
+                  <c:v>2026</c:v>
+                </c:pt>
+              </c:strCache>
+            </c:strRef>
+          </c:tx>
+          <c:spPr>
+            <a:solidFill>
+              <a:srgbClr val="2587C5"/>
+            </a:solidFill>
             <a:ln w="38100" cap="flat">
               <a:solidFill>
                 <a:srgbClr val="2587C5"/>
@@ -1417,7 +4231,7 @@
 </c:chartSpace>
 </file>
 
-<file path=ppt/charts/chart3.xml><?xml version="1.0" encoding="utf-8"?>
+<file path=ppt/charts/chart8.xml><?xml version="1.0" encoding="utf-8"?>
 <c:chartSpace xmlns:c="http://schemas.openxmlformats.org/drawingml/2006/chart" xmlns:a="http://schemas.openxmlformats.org/drawingml/2006/main" xmlns:r="http://schemas.openxmlformats.org/officeDocument/2006/relationships">
   <c:date1904 val="0"/>
   <c:roundedCorners val="1"/>
@@ -1709,7 +4523,7 @@
 </c:chartSpace>
 </file>
 
-<file path=ppt/charts/chart4.xml><?xml version="1.0" encoding="utf-8"?>
+<file path=ppt/charts/chart9.xml><?xml version="1.0" encoding="utf-8"?>
 <c:chartSpace xmlns:c="http://schemas.openxmlformats.org/drawingml/2006/chart" xmlns:a="http://schemas.openxmlformats.org/drawingml/2006/main" xmlns:r="http://schemas.openxmlformats.org/officeDocument/2006/relationships">
   <c:date1904 val="0"/>
   <c:roundedCorners val="1"/>
@@ -1968,1475 +4782,6 @@
         <c:crosses val="autoZero"/>
         <c:crossBetween val="between"/>
         <c:majorUnit val="10"/>
-      </c:valAx>
-      <c:spPr>
-        <a:solidFill>
-          <a:srgbClr val="FFFFFF">
-            <a:alpha val="0"/>
-          </a:srgbClr>
-        </a:solidFill>
-        <a:ln>
-          <a:noFill/>
-        </a:ln>
-        <a:effectLst/>
-      </c:spPr>
-    </c:plotArea>
-    <c:plotVisOnly val="1"/>
-    <c:dispBlanksAs val="span"/>
-  </c:chart>
-  <c:spPr>
-    <a:solidFill>
-      <a:srgbClr val="FFFFFF">
-        <a:alpha val="0"/>
-      </a:srgbClr>
-    </a:solidFill>
-    <a:ln>
-      <a:noFill/>
-    </a:ln>
-    <a:effectLst/>
-  </c:spPr>
-  <c:externalData r:id="rId1">
-    <c:autoUpdate val="0"/>
-  </c:externalData>
-</c:chartSpace>
-</file>
-
-<file path=ppt/charts/chart5.xml><?xml version="1.0" encoding="utf-8"?>
-<c:chartSpace xmlns:c="http://schemas.openxmlformats.org/drawingml/2006/chart" xmlns:a="http://schemas.openxmlformats.org/drawingml/2006/main" xmlns:r="http://schemas.openxmlformats.org/officeDocument/2006/relationships">
-  <c:date1904 val="0"/>
-  <c:roundedCorners val="1"/>
-  <c:chart>
-    <c:autoTitleDeleted val="1"/>
-    <c:plotArea>
-      <c:layout/>
-      <c:lineChart>
-        <c:varyColors val="0"/>
-        <c:ser>
-          <c:idx val="0"/>
-          <c:order val="0"/>
-          <c:tx>
-            <c:strRef>
-              <c:f>Sheet1!$B$1</c:f>
-              <c:strCache>
-                <c:ptCount val="1"/>
-                <c:pt idx="0">
-                  <c:v>2025</c:v>
-                </c:pt>
-              </c:strCache>
-            </c:strRef>
-          </c:tx>
-          <c:spPr>
-            <a:solidFill>
-              <a:srgbClr val="9AA3AD"/>
-            </a:solidFill>
-            <a:ln w="38100" cap="flat">
-              <a:solidFill>
-                <a:srgbClr val="9AA3AD"/>
-              </a:solidFill>
-              <a:prstDash val="solid"/>
-              <a:round/>
-            </a:ln>
-            <a:effectLst/>
-          </c:spPr>
-          <c:invertIfNegative val="0"/>
-          <c:dLbls>
-            <c:numFmt formatCode="&quot;$&quot;#,##0.00" sourceLinked="0"/>
-            <c:txPr>
-              <a:bodyPr/>
-              <a:lstStyle/>
-              <a:p>
-                <a:pPr>
-                  <a:defRPr b="0" i="0" strike="noStrike" sz="1400" u="none">
-                    <a:solidFill>
-                      <a:srgbClr val="1A1A1A"/>
-                    </a:solidFill>
-                    <a:latin typeface="+mn-lt"/>
-                  </a:defRPr>
-                </a:pPr>
-              </a:p>
-            </c:txPr>
-            <c:showLegendKey val="0"/>
-            <c:showVal val="0"/>
-            <c:showCatName val="0"/>
-            <c:showSerName val="0"/>
-            <c:showPercent val="0"/>
-            <c:showBubbleSize val="0"/>
-            <c:showLeaderLines val="0"/>
-          </c:dLbls>
-          <c:marker>
-            <c:symbol val="circle"/>
-            <c:size val="8"/>
-            <c:spPr>
-              <a:solidFill>
-                <a:srgbClr val="9AA3AD"/>
-              </a:solidFill>
-              <a:ln w="9525" cap="flat">
-                <a:solidFill>
-                  <a:srgbClr val="9AA3AD"/>
-                </a:solidFill>
-                <a:prstDash val="solid"/>
-                <a:round/>
-              </a:ln>
-              <a:effectLst/>
-            </c:spPr>
-          </c:marker>
-          <c:cat>
-            <c:multiLvlStrRef>
-              <c:f>Sheet1!$A$2:$A$10</c:f>
-              <c:multiLvlStrCache>
-                <c:ptCount val="9"/>
-                <c:lvl>
-                  <c:pt idx="0">
-                    <c:v>Jan</c:v>
-                  </c:pt>
-                  <c:pt idx="1">
-                    <c:v>Feb</c:v>
-                  </c:pt>
-                  <c:pt idx="2">
-                    <c:v>Mar</c:v>
-                  </c:pt>
-                  <c:pt idx="3">
-                    <c:v>Apr</c:v>
-                  </c:pt>
-                  <c:pt idx="4">
-                    <c:v>May</c:v>
-                  </c:pt>
-                  <c:pt idx="5">
-                    <c:v>Jun</c:v>
-                  </c:pt>
-                  <c:pt idx="6">
-                    <c:v>Jul</c:v>
-                  </c:pt>
-                  <c:pt idx="7">
-                    <c:v>Aug</c:v>
-                  </c:pt>
-                  <c:pt idx="8">
-                    <c:v>Sep</c:v>
-                  </c:pt>
-                </c:lvl>
-              </c:multiLvlStrCache>
-            </c:multiLvlStrRef>
-          </c:cat>
-          <c:val>
-            <c:numRef>
-              <c:f>Sheet1!$B$2:$B$10</c:f>
-              <c:numCache>
-                <c:formatCode>General</c:formatCode>
-                <c:ptCount val="9"/>
-                <c:pt idx="0">
-                  <c:v>175</c:v>
-                </c:pt>
-                <c:pt idx="1">
-                  <c:v>175</c:v>
-                </c:pt>
-                <c:pt idx="2">
-                  <c:v>173</c:v>
-                </c:pt>
-                <c:pt idx="3">
-                  <c:v>176</c:v>
-                </c:pt>
-                <c:pt idx="4">
-                  <c:v>182</c:v>
-                </c:pt>
-                <c:pt idx="5">
-                  <c:v>185</c:v>
-                </c:pt>
-                <c:pt idx="6">
-                  <c:v>187</c:v>
-                </c:pt>
-                <c:pt idx="7">
-                  <c:v>186</c:v>
-                </c:pt>
-                <c:pt idx="8">
-                  <c:v>187</c:v>
-                </c:pt>
-              </c:numCache>
-            </c:numRef>
-          </c:val>
-          <c:smooth val="0"/>
-        </c:ser>
-        <c:dLbls>
-          <c:numFmt formatCode="&quot;$&quot;#,##0.00" sourceLinked="0"/>
-          <c:txPr>
-            <a:bodyPr/>
-            <a:lstStyle/>
-            <a:p>
-              <a:pPr>
-                <a:defRPr b="0" i="0" strike="noStrike" sz="1400" u="none">
-                  <a:solidFill>
-                    <a:srgbClr val="1A1A1A"/>
-                  </a:solidFill>
-                  <a:latin typeface="+mn-lt"/>
-                </a:defRPr>
-              </a:pPr>
-            </a:p>
-          </c:txPr>
-          <c:showLegendKey val="0"/>
-          <c:showVal val="0"/>
-          <c:showCatName val="0"/>
-          <c:showSerName val="0"/>
-          <c:showPercent val="0"/>
-          <c:showBubbleSize val="0"/>
-          <c:showLeaderLines val="0"/>
-        </c:dLbls>
-        <c:marker val="1"/>
-        <c:axId val="2094734554"/>
-        <c:axId val="2094734552"/>
-        <c:axId val="2094734556"/>
-      </c:lineChart>
-      <c:catAx>
-        <c:axId val="2094734554"/>
-        <c:scaling>
-          <c:orientation val="minMax"/>
-        </c:scaling>
-        <c:delete val="0"/>
-        <c:axPos val="b"/>
-        <c:numFmt formatCode="General" sourceLinked="1"/>
-        <c:majorTickMark val="out"/>
-        <c:minorTickMark val="none"/>
-        <c:tickLblPos val="low"/>
-        <c:spPr>
-          <a:ln w="12700" cap="flat">
-            <a:solidFill>
-              <a:srgbClr val="888888"/>
-            </a:solidFill>
-            <a:prstDash val="solid"/>
-            <a:round/>
-          </a:ln>
-        </c:spPr>
-        <c:txPr>
-          <a:bodyPr/>
-          <a:lstStyle/>
-          <a:p>
-            <a:pPr>
-              <a:defRPr sz="1400" b="0" i="0" u="none" strike="noStrike">
-                <a:solidFill>
-                  <a:srgbClr val="1A1A1A"/>
-                </a:solidFill>
-                <a:latin typeface="+mn-lt"/>
-              </a:defRPr>
-            </a:pPr>
-            <a:endParaRPr lang="en-US"/>
-          </a:p>
-        </c:txPr>
-        <c:crossAx val="2094734552"/>
-        <c:crosses val="min"/>
-        <c:auto val="1"/>
-        <c:lblAlgn val="ctr"/>
-        <c:noMultiLvlLbl val="1"/>
-      </c:catAx>
-      <c:valAx>
-        <c:axId val="2094734552"/>
-        <c:scaling>
-          <c:orientation val="minMax"/>
-          <c:max val="210"/>
-          <c:min val="160"/>
-        </c:scaling>
-        <c:delete val="0"/>
-        <c:axPos val="l"/>
-        <c:majorGridlines>
-          <c:spPr>
-            <a:ln w="9525" cap="flat">
-              <a:solidFill>
-                <a:srgbClr val="D9D9D9"/>
-              </a:solidFill>
-              <a:prstDash val="solid"/>
-              <a:round/>
-            </a:ln>
-          </c:spPr>
-        </c:majorGridlines>
-        <c:numFmt formatCode="&quot;$&quot;#,##0" sourceLinked="0"/>
-        <c:majorTickMark val="out"/>
-        <c:minorTickMark val="none"/>
-        <c:tickLblPos val="nextTo"/>
-        <c:spPr>
-          <a:ln w="12700" cap="flat">
-            <a:noFill/>
-            <a:prstDash val="solid"/>
-            <a:round/>
-          </a:ln>
-        </c:spPr>
-        <c:txPr>
-          <a:bodyPr/>
-          <a:lstStyle/>
-          <a:p>
-            <a:pPr>
-              <a:defRPr sz="1400" b="0" i="0" u="none" strike="noStrike">
-                <a:solidFill>
-                  <a:srgbClr val="595959"/>
-                </a:solidFill>
-                <a:latin typeface="+mn-lt"/>
-              </a:defRPr>
-            </a:pPr>
-            <a:endParaRPr lang="en-US"/>
-          </a:p>
-        </c:txPr>
-        <c:crossAx val="2094734554"/>
-        <c:crosses val="autoZero"/>
-        <c:crossBetween val="between"/>
-        <c:majorUnit val="10"/>
-      </c:valAx>
-      <c:spPr>
-        <a:solidFill>
-          <a:srgbClr val="FFFFFF">
-            <a:alpha val="0"/>
-          </a:srgbClr>
-        </a:solidFill>
-        <a:ln>
-          <a:noFill/>
-        </a:ln>
-        <a:effectLst/>
-      </c:spPr>
-    </c:plotArea>
-    <c:plotVisOnly val="1"/>
-    <c:dispBlanksAs val="span"/>
-  </c:chart>
-  <c:spPr>
-    <a:solidFill>
-      <a:srgbClr val="FFFFFF">
-        <a:alpha val="0"/>
-      </a:srgbClr>
-    </a:solidFill>
-    <a:ln>
-      <a:noFill/>
-    </a:ln>
-    <a:effectLst/>
-  </c:spPr>
-  <c:externalData r:id="rId1">
-    <c:autoUpdate val="0"/>
-  </c:externalData>
-</c:chartSpace>
-</file>
-
-<file path=ppt/charts/chart6.xml><?xml version="1.0" encoding="utf-8"?>
-<c:chartSpace xmlns:c="http://schemas.openxmlformats.org/drawingml/2006/chart" xmlns:a="http://schemas.openxmlformats.org/drawingml/2006/main" xmlns:r="http://schemas.openxmlformats.org/officeDocument/2006/relationships">
-  <c:date1904 val="0"/>
-  <c:roundedCorners val="1"/>
-  <c:chart>
-    <c:autoTitleDeleted val="1"/>
-    <c:plotArea>
-      <c:layout/>
-      <c:lineChart>
-        <c:varyColors val="0"/>
-        <c:ser>
-          <c:idx val="0"/>
-          <c:order val="0"/>
-          <c:tx>
-            <c:strRef>
-              <c:f>Sheet1!$B$1</c:f>
-              <c:strCache>
-                <c:ptCount val="1"/>
-                <c:pt idx="0">
-                  <c:v>2026</c:v>
-                </c:pt>
-              </c:strCache>
-            </c:strRef>
-          </c:tx>
-          <c:spPr>
-            <a:solidFill>
-              <a:srgbClr val="2587C5"/>
-            </a:solidFill>
-            <a:ln w="38100" cap="flat">
-              <a:solidFill>
-                <a:srgbClr val="2587C5"/>
-              </a:solidFill>
-              <a:prstDash val="solid"/>
-              <a:round/>
-            </a:ln>
-            <a:effectLst/>
-          </c:spPr>
-          <c:invertIfNegative val="0"/>
-          <c:dLbls>
-            <c:numFmt formatCode="&quot;$&quot;#,##0.00" sourceLinked="0"/>
-            <c:txPr>
-              <a:bodyPr/>
-              <a:lstStyle/>
-              <a:p>
-                <a:pPr>
-                  <a:defRPr b="0" i="0" strike="noStrike" sz="1400" u="none">
-                    <a:solidFill>
-                      <a:srgbClr val="1A1A1A"/>
-                    </a:solidFill>
-                    <a:latin typeface="+mn-lt"/>
-                  </a:defRPr>
-                </a:pPr>
-              </a:p>
-            </c:txPr>
-            <c:showLegendKey val="0"/>
-            <c:showVal val="0"/>
-            <c:showCatName val="0"/>
-            <c:showSerName val="0"/>
-            <c:showPercent val="0"/>
-            <c:showBubbleSize val="0"/>
-            <c:showLeaderLines val="0"/>
-          </c:dLbls>
-          <c:marker>
-            <c:symbol val="circle"/>
-            <c:size val="8"/>
-            <c:spPr>
-              <a:solidFill>
-                <a:srgbClr val="2587C5"/>
-              </a:solidFill>
-              <a:ln w="9525" cap="flat">
-                <a:solidFill>
-                  <a:srgbClr val="2587C5"/>
-                </a:solidFill>
-                <a:prstDash val="solid"/>
-                <a:round/>
-              </a:ln>
-              <a:effectLst/>
-            </c:spPr>
-          </c:marker>
-          <c:cat>
-            <c:multiLvlStrRef>
-              <c:f>Sheet1!$A$2:$A$10</c:f>
-              <c:multiLvlStrCache>
-                <c:ptCount val="9"/>
-                <c:lvl>
-                  <c:pt idx="0">
-                    <c:v>Jan</c:v>
-                  </c:pt>
-                  <c:pt idx="1">
-                    <c:v>Feb</c:v>
-                  </c:pt>
-                  <c:pt idx="2">
-                    <c:v>Mar</c:v>
-                  </c:pt>
-                  <c:pt idx="3">
-                    <c:v>Apr</c:v>
-                  </c:pt>
-                  <c:pt idx="4">
-                    <c:v>May</c:v>
-                  </c:pt>
-                  <c:pt idx="5">
-                    <c:v>Jun</c:v>
-                  </c:pt>
-                  <c:pt idx="6">
-                    <c:v>Jul</c:v>
-                  </c:pt>
-                  <c:pt idx="7">
-                    <c:v>Aug</c:v>
-                  </c:pt>
-                  <c:pt idx="8">
-                    <c:v>Sep</c:v>
-                  </c:pt>
-                </c:lvl>
-              </c:multiLvlStrCache>
-            </c:multiLvlStrRef>
-          </c:cat>
-          <c:val>
-            <c:numRef>
-              <c:f>Sheet1!$B$2:$B$10</c:f>
-              <c:numCache>
-                <c:formatCode>General</c:formatCode>
-                <c:ptCount val="9"/>
-                <c:pt idx="0">
-                  <c:v>126</c:v>
-                </c:pt>
-                <c:pt idx="1">
-                  <c:v>124</c:v>
-                </c:pt>
-                <c:pt idx="2">
-                  <c:v>131</c:v>
-                </c:pt>
-                <c:pt idx="3">
-                  <c:v>131</c:v>
-                </c:pt>
-                <c:pt idx="4">
-                  <c:v>132</c:v>
-                </c:pt>
-                <c:pt idx="5">
-                  <c:v>128</c:v>
-                </c:pt>
-                <c:pt idx="6">
-                  <c:v>133</c:v>
-                </c:pt>
-                <c:pt idx="7">
-                  <c:v>130</c:v>
-                </c:pt>
-                <c:pt idx="8">
-                  <c:v>134</c:v>
-                </c:pt>
-              </c:numCache>
-            </c:numRef>
-          </c:val>
-          <c:smooth val="0"/>
-        </c:ser>
-        <c:dLbls>
-          <c:numFmt formatCode="&quot;$&quot;#,##0.00" sourceLinked="0"/>
-          <c:txPr>
-            <a:bodyPr/>
-            <a:lstStyle/>
-            <a:p>
-              <a:pPr>
-                <a:defRPr b="0" i="0" strike="noStrike" sz="1400" u="none">
-                  <a:solidFill>
-                    <a:srgbClr val="1A1A1A"/>
-                  </a:solidFill>
-                  <a:latin typeface="+mn-lt"/>
-                </a:defRPr>
-              </a:pPr>
-            </a:p>
-          </c:txPr>
-          <c:showLegendKey val="0"/>
-          <c:showVal val="0"/>
-          <c:showCatName val="0"/>
-          <c:showSerName val="0"/>
-          <c:showPercent val="0"/>
-          <c:showBubbleSize val="0"/>
-          <c:showLeaderLines val="0"/>
-        </c:dLbls>
-        <c:marker val="1"/>
-        <c:axId val="2094734554"/>
-        <c:axId val="2094734552"/>
-        <c:axId val="2094734556"/>
-      </c:lineChart>
-      <c:catAx>
-        <c:axId val="2094734554"/>
-        <c:scaling>
-          <c:orientation val="minMax"/>
-        </c:scaling>
-        <c:delete val="0"/>
-        <c:axPos val="b"/>
-        <c:numFmt formatCode="General" sourceLinked="1"/>
-        <c:majorTickMark val="out"/>
-        <c:minorTickMark val="none"/>
-        <c:tickLblPos val="low"/>
-        <c:spPr>
-          <a:ln w="12700" cap="flat">
-            <a:noFill/>
-            <a:prstDash val="solid"/>
-            <a:round/>
-          </a:ln>
-        </c:spPr>
-        <c:txPr>
-          <a:bodyPr/>
-          <a:lstStyle/>
-          <a:p>
-            <a:pPr>
-              <a:defRPr sz="1400" b="0" i="0" u="none" strike="noStrike">
-                <a:solidFill>
-                  <a:srgbClr val="FFFFFF"/>
-                </a:solidFill>
-                <a:latin typeface="+mn-lt"/>
-              </a:defRPr>
-            </a:pPr>
-            <a:endParaRPr lang="en-US"/>
-          </a:p>
-        </c:txPr>
-        <c:crossAx val="2094734552"/>
-        <c:crosses val="min"/>
-        <c:auto val="1"/>
-        <c:lblAlgn val="ctr"/>
-        <c:noMultiLvlLbl val="1"/>
-      </c:catAx>
-      <c:valAx>
-        <c:axId val="2094734552"/>
-        <c:scaling>
-          <c:orientation val="minMax"/>
-          <c:max val="140"/>
-          <c:min val="120"/>
-        </c:scaling>
-        <c:delete val="0"/>
-        <c:axPos val="l"/>
-        <c:numFmt formatCode="&quot;$&quot;#,##0" sourceLinked="0"/>
-        <c:majorTickMark val="out"/>
-        <c:minorTickMark val="none"/>
-        <c:tickLblPos val="nextTo"/>
-        <c:spPr>
-          <a:ln w="12700" cap="flat">
-            <a:noFill/>
-            <a:prstDash val="solid"/>
-            <a:round/>
-          </a:ln>
-        </c:spPr>
-        <c:txPr>
-          <a:bodyPr/>
-          <a:lstStyle/>
-          <a:p>
-            <a:pPr>
-              <a:defRPr sz="1400" b="0" i="0" u="none" strike="noStrike">
-                <a:solidFill>
-                  <a:srgbClr val="FFFFFF"/>
-                </a:solidFill>
-                <a:latin typeface="+mn-lt"/>
-              </a:defRPr>
-            </a:pPr>
-            <a:endParaRPr lang="en-US"/>
-          </a:p>
-        </c:txPr>
-        <c:crossAx val="2094734554"/>
-        <c:crosses val="autoZero"/>
-        <c:crossBetween val="between"/>
-        <c:majorUnit val="5"/>
-      </c:valAx>
-      <c:spPr>
-        <a:noFill/>
-        <a:ln>
-          <a:noFill/>
-        </a:ln>
-        <a:effectLst/>
-      </c:spPr>
-    </c:plotArea>
-    <c:plotVisOnly val="1"/>
-    <c:dispBlanksAs val="span"/>
-  </c:chart>
-  <c:spPr>
-    <a:noFill/>
-    <a:ln>
-      <a:noFill/>
-    </a:ln>
-    <a:effectLst/>
-  </c:spPr>
-  <c:externalData r:id="rId1">
-    <c:autoUpdate val="0"/>
-  </c:externalData>
-</c:chartSpace>
-</file>
-
-<file path=ppt/charts/chart7.xml><?xml version="1.0" encoding="utf-8"?>
-<c:chartSpace xmlns:c="http://schemas.openxmlformats.org/drawingml/2006/chart" xmlns:a="http://schemas.openxmlformats.org/drawingml/2006/main" xmlns:r="http://schemas.openxmlformats.org/officeDocument/2006/relationships">
-  <c:date1904 val="0"/>
-  <c:roundedCorners val="1"/>
-  <c:chart>
-    <c:autoTitleDeleted val="1"/>
-    <c:plotArea>
-      <c:layout/>
-      <c:lineChart>
-        <c:varyColors val="0"/>
-        <c:ser>
-          <c:idx val="0"/>
-          <c:order val="0"/>
-          <c:tx>
-            <c:strRef>
-              <c:f>Sheet1!$B$1</c:f>
-              <c:strCache>
-                <c:ptCount val="1"/>
-                <c:pt idx="0">
-                  <c:v>2026</c:v>
-                </c:pt>
-              </c:strCache>
-            </c:strRef>
-          </c:tx>
-          <c:spPr>
-            <a:solidFill>
-              <a:srgbClr val="2587C5"/>
-            </a:solidFill>
-            <a:ln>
-              <a:noFill/>
-            </a:ln>
-            <a:effectLst/>
-          </c:spPr>
-          <c:invertIfNegative val="0"/>
-          <c:dLbls>
-            <c:numFmt formatCode="&quot;$&quot;#,##0.00" sourceLinked="0"/>
-            <c:txPr>
-              <a:bodyPr/>
-              <a:lstStyle/>
-              <a:p>
-                <a:pPr>
-                  <a:defRPr b="0" i="0" strike="noStrike" sz="1400" u="none">
-                    <a:solidFill>
-                      <a:srgbClr val="1A1A1A"/>
-                    </a:solidFill>
-                    <a:latin typeface="+mn-lt"/>
-                  </a:defRPr>
-                </a:pPr>
-              </a:p>
-            </c:txPr>
-            <c:dLblPos val="t"/>
-            <c:showLegendKey val="0"/>
-            <c:showVal val="1"/>
-            <c:showCatName val="0"/>
-            <c:showSerName val="0"/>
-            <c:showPercent val="0"/>
-            <c:showBubbleSize val="0"/>
-            <c:showLeaderLines val="0"/>
-          </c:dLbls>
-          <c:marker>
-            <c:symbol val="none"/>
-            <c:size val="8"/>
-            <c:spPr>
-              <a:solidFill>
-                <a:srgbClr val="2587C5"/>
-              </a:solidFill>
-              <a:ln w="9525" cap="flat">
-                <a:solidFill>
-                  <a:srgbClr val="2587C5"/>
-                </a:solidFill>
-                <a:prstDash val="solid"/>
-                <a:round/>
-              </a:ln>
-              <a:effectLst/>
-            </c:spPr>
-          </c:marker>
-          <c:cat>
-            <c:multiLvlStrRef>
-              <c:f>Sheet1!$A$2:$A$10</c:f>
-              <c:multiLvlStrCache>
-                <c:ptCount val="9"/>
-                <c:lvl>
-                  <c:pt idx="0">
-                    <c:v>Jan</c:v>
-                  </c:pt>
-                  <c:pt idx="1">
-                    <c:v>Feb</c:v>
-                  </c:pt>
-                  <c:pt idx="2">
-                    <c:v>Mar</c:v>
-                  </c:pt>
-                  <c:pt idx="3">
-                    <c:v>Apr</c:v>
-                  </c:pt>
-                  <c:pt idx="4">
-                    <c:v>May</c:v>
-                  </c:pt>
-                  <c:pt idx="5">
-                    <c:v>Jun</c:v>
-                  </c:pt>
-                  <c:pt idx="6">
-                    <c:v>Jul</c:v>
-                  </c:pt>
-                  <c:pt idx="7">
-                    <c:v>Aug</c:v>
-                  </c:pt>
-                  <c:pt idx="8">
-                    <c:v>Sep</c:v>
-                  </c:pt>
-                </c:lvl>
-              </c:multiLvlStrCache>
-            </c:multiLvlStrRef>
-          </c:cat>
-          <c:val>
-            <c:numRef>
-              <c:f>Sheet1!$B$2:$B$10</c:f>
-              <c:numCache>
-                <c:formatCode>General</c:formatCode>
-                <c:ptCount val="9"/>
-                <c:pt idx="0">
-                  <c:v>126</c:v>
-                </c:pt>
-                <c:pt idx="1">
-                  <c:v/>
-                </c:pt>
-                <c:pt idx="2">
-                  <c:v>131</c:v>
-                </c:pt>
-                <c:pt idx="3">
-                  <c:v>131</c:v>
-                </c:pt>
-                <c:pt idx="4">
-                  <c:v>132</c:v>
-                </c:pt>
-                <c:pt idx="5">
-                  <c:v/>
-                </c:pt>
-                <c:pt idx="6">
-                  <c:v>133</c:v>
-                </c:pt>
-                <c:pt idx="7">
-                  <c:v>130</c:v>
-                </c:pt>
-                <c:pt idx="8">
-                  <c:v>134</c:v>
-                </c:pt>
-              </c:numCache>
-            </c:numRef>
-          </c:val>
-          <c:smooth val="0"/>
-        </c:ser>
-        <c:dLbls>
-          <c:numFmt formatCode="&quot;$&quot;#,##0.00" sourceLinked="0"/>
-          <c:txPr>
-            <a:bodyPr/>
-            <a:lstStyle/>
-            <a:p>
-              <a:pPr>
-                <a:defRPr b="0" i="0" strike="noStrike" sz="1400" u="none">
-                  <a:solidFill>
-                    <a:srgbClr val="1A1A1A"/>
-                  </a:solidFill>
-                  <a:latin typeface="+mn-lt"/>
-                </a:defRPr>
-              </a:pPr>
-            </a:p>
-          </c:txPr>
-          <c:dLblPos val="t"/>
-          <c:showLegendKey val="0"/>
-          <c:showVal val="1"/>
-          <c:showCatName val="0"/>
-          <c:showSerName val="0"/>
-          <c:showPercent val="0"/>
-          <c:showBubbleSize val="0"/>
-          <c:showLeaderLines val="0"/>
-        </c:dLbls>
-        <c:marker val="1"/>
-        <c:axId val="2094734554"/>
-        <c:axId val="2094734552"/>
-        <c:axId val="2094734556"/>
-      </c:lineChart>
-      <c:catAx>
-        <c:axId val="2094734554"/>
-        <c:scaling>
-          <c:orientation val="minMax"/>
-        </c:scaling>
-        <c:delete val="0"/>
-        <c:axPos val="b"/>
-        <c:numFmt formatCode="General" sourceLinked="1"/>
-        <c:majorTickMark val="out"/>
-        <c:minorTickMark val="none"/>
-        <c:tickLblPos val="low"/>
-        <c:spPr>
-          <a:ln w="12700" cap="flat">
-            <a:noFill/>
-            <a:prstDash val="solid"/>
-            <a:round/>
-          </a:ln>
-        </c:spPr>
-        <c:txPr>
-          <a:bodyPr/>
-          <a:lstStyle/>
-          <a:p>
-            <a:pPr>
-              <a:defRPr sz="1400" b="0" i="0" u="none" strike="noStrike">
-                <a:solidFill>
-                  <a:srgbClr val="FFFFFF"/>
-                </a:solidFill>
-                <a:latin typeface="+mn-lt"/>
-              </a:defRPr>
-            </a:pPr>
-            <a:endParaRPr lang="en-US"/>
-          </a:p>
-        </c:txPr>
-        <c:crossAx val="2094734552"/>
-        <c:crosses val="min"/>
-        <c:auto val="1"/>
-        <c:lblAlgn val="ctr"/>
-        <c:noMultiLvlLbl val="1"/>
-      </c:catAx>
-      <c:valAx>
-        <c:axId val="2094734552"/>
-        <c:scaling>
-          <c:orientation val="minMax"/>
-          <c:max val="140"/>
-          <c:min val="120"/>
-        </c:scaling>
-        <c:delete val="0"/>
-        <c:axPos val="l"/>
-        <c:numFmt formatCode="&quot;$&quot;#,##0" sourceLinked="0"/>
-        <c:majorTickMark val="out"/>
-        <c:minorTickMark val="none"/>
-        <c:tickLblPos val="nextTo"/>
-        <c:spPr>
-          <a:ln w="12700" cap="flat">
-            <a:noFill/>
-            <a:prstDash val="solid"/>
-            <a:round/>
-          </a:ln>
-        </c:spPr>
-        <c:txPr>
-          <a:bodyPr/>
-          <a:lstStyle/>
-          <a:p>
-            <a:pPr>
-              <a:defRPr sz="1400" b="0" i="0" u="none" strike="noStrike">
-                <a:solidFill>
-                  <a:srgbClr val="FFFFFF"/>
-                </a:solidFill>
-                <a:latin typeface="+mn-lt"/>
-              </a:defRPr>
-            </a:pPr>
-            <a:endParaRPr lang="en-US"/>
-          </a:p>
-        </c:txPr>
-        <c:crossAx val="2094734554"/>
-        <c:crosses val="autoZero"/>
-        <c:crossBetween val="between"/>
-        <c:majorUnit val="5"/>
-      </c:valAx>
-      <c:spPr>
-        <a:solidFill>
-          <a:srgbClr val="FFFFFF">
-            <a:alpha val="0"/>
-          </a:srgbClr>
-        </a:solidFill>
-        <a:ln>
-          <a:noFill/>
-        </a:ln>
-        <a:effectLst/>
-      </c:spPr>
-    </c:plotArea>
-    <c:plotVisOnly val="1"/>
-    <c:dispBlanksAs val="span"/>
-  </c:chart>
-  <c:spPr>
-    <a:solidFill>
-      <a:srgbClr val="FFFFFF">
-        <a:alpha val="0"/>
-      </a:srgbClr>
-    </a:solidFill>
-    <a:ln>
-      <a:noFill/>
-    </a:ln>
-    <a:effectLst/>
-  </c:spPr>
-  <c:externalData r:id="rId1">
-    <c:autoUpdate val="0"/>
-  </c:externalData>
-</c:chartSpace>
-</file>
-
-<file path=ppt/charts/chart8.xml><?xml version="1.0" encoding="utf-8"?>
-<c:chartSpace xmlns:c="http://schemas.openxmlformats.org/drawingml/2006/chart" xmlns:a="http://schemas.openxmlformats.org/drawingml/2006/main" xmlns:r="http://schemas.openxmlformats.org/officeDocument/2006/relationships">
-  <c:date1904 val="0"/>
-  <c:roundedCorners val="1"/>
-  <c:chart>
-    <c:autoTitleDeleted val="1"/>
-    <c:plotArea>
-      <c:layout/>
-      <c:lineChart>
-        <c:varyColors val="0"/>
-        <c:ser>
-          <c:idx val="0"/>
-          <c:order val="0"/>
-          <c:tx>
-            <c:strRef>
-              <c:f>Sheet1!$B$1</c:f>
-              <c:strCache>
-                <c:ptCount val="1"/>
-                <c:pt idx="0">
-                  <c:v>2026</c:v>
-                </c:pt>
-              </c:strCache>
-            </c:strRef>
-          </c:tx>
-          <c:spPr>
-            <a:solidFill>
-              <a:srgbClr val="2587C5"/>
-            </a:solidFill>
-            <a:ln>
-              <a:noFill/>
-            </a:ln>
-            <a:effectLst/>
-          </c:spPr>
-          <c:invertIfNegative val="0"/>
-          <c:dLbls>
-            <c:numFmt formatCode="&quot;$&quot;#,##0.00" sourceLinked="0"/>
-            <c:txPr>
-              <a:bodyPr/>
-              <a:lstStyle/>
-              <a:p>
-                <a:pPr>
-                  <a:defRPr b="0" i="0" strike="noStrike" sz="1400" u="none">
-                    <a:solidFill>
-                      <a:srgbClr val="1A1A1A"/>
-                    </a:solidFill>
-                    <a:latin typeface="+mn-lt"/>
-                  </a:defRPr>
-                </a:pPr>
-              </a:p>
-            </c:txPr>
-            <c:dLblPos val="b"/>
-            <c:showLegendKey val="0"/>
-            <c:showVal val="1"/>
-            <c:showCatName val="0"/>
-            <c:showSerName val="0"/>
-            <c:showPercent val="0"/>
-            <c:showBubbleSize val="0"/>
-            <c:showLeaderLines val="0"/>
-          </c:dLbls>
-          <c:marker>
-            <c:symbol val="none"/>
-            <c:size val="8"/>
-            <c:spPr>
-              <a:solidFill>
-                <a:srgbClr val="2587C5"/>
-              </a:solidFill>
-              <a:ln w="9525" cap="flat">
-                <a:solidFill>
-                  <a:srgbClr val="2587C5"/>
-                </a:solidFill>
-                <a:prstDash val="solid"/>
-                <a:round/>
-              </a:ln>
-              <a:effectLst/>
-            </c:spPr>
-          </c:marker>
-          <c:cat>
-            <c:multiLvlStrRef>
-              <c:f>Sheet1!$A$2:$A$10</c:f>
-              <c:multiLvlStrCache>
-                <c:ptCount val="9"/>
-                <c:lvl>
-                  <c:pt idx="0">
-                    <c:v>Jan</c:v>
-                  </c:pt>
-                  <c:pt idx="1">
-                    <c:v>Feb</c:v>
-                  </c:pt>
-                  <c:pt idx="2">
-                    <c:v>Mar</c:v>
-                  </c:pt>
-                  <c:pt idx="3">
-                    <c:v>Apr</c:v>
-                  </c:pt>
-                  <c:pt idx="4">
-                    <c:v>May</c:v>
-                  </c:pt>
-                  <c:pt idx="5">
-                    <c:v>Jun</c:v>
-                  </c:pt>
-                  <c:pt idx="6">
-                    <c:v>Jul</c:v>
-                  </c:pt>
-                  <c:pt idx="7">
-                    <c:v>Aug</c:v>
-                  </c:pt>
-                  <c:pt idx="8">
-                    <c:v>Sep</c:v>
-                  </c:pt>
-                </c:lvl>
-              </c:multiLvlStrCache>
-            </c:multiLvlStrRef>
-          </c:cat>
-          <c:val>
-            <c:numRef>
-              <c:f>Sheet1!$B$2:$B$10</c:f>
-              <c:numCache>
-                <c:formatCode>General</c:formatCode>
-                <c:ptCount val="9"/>
-                <c:pt idx="0">
-                  <c:v/>
-                </c:pt>
-                <c:pt idx="1">
-                  <c:v>124</c:v>
-                </c:pt>
-                <c:pt idx="2">
-                  <c:v/>
-                </c:pt>
-                <c:pt idx="3">
-                  <c:v/>
-                </c:pt>
-                <c:pt idx="4">
-                  <c:v/>
-                </c:pt>
-                <c:pt idx="5">
-                  <c:v>128</c:v>
-                </c:pt>
-                <c:pt idx="6">
-                  <c:v/>
-                </c:pt>
-                <c:pt idx="7">
-                  <c:v/>
-                </c:pt>
-                <c:pt idx="8">
-                  <c:v/>
-                </c:pt>
-              </c:numCache>
-            </c:numRef>
-          </c:val>
-          <c:smooth val="0"/>
-        </c:ser>
-        <c:dLbls>
-          <c:numFmt formatCode="&quot;$&quot;#,##0.00" sourceLinked="0"/>
-          <c:txPr>
-            <a:bodyPr/>
-            <a:lstStyle/>
-            <a:p>
-              <a:pPr>
-                <a:defRPr b="0" i="0" strike="noStrike" sz="1400" u="none">
-                  <a:solidFill>
-                    <a:srgbClr val="1A1A1A"/>
-                  </a:solidFill>
-                  <a:latin typeface="+mn-lt"/>
-                </a:defRPr>
-              </a:pPr>
-            </a:p>
-          </c:txPr>
-          <c:dLblPos val="b"/>
-          <c:showLegendKey val="0"/>
-          <c:showVal val="1"/>
-          <c:showCatName val="0"/>
-          <c:showSerName val="0"/>
-          <c:showPercent val="0"/>
-          <c:showBubbleSize val="0"/>
-          <c:showLeaderLines val="0"/>
-        </c:dLbls>
-        <c:marker val="1"/>
-        <c:axId val="2094734554"/>
-        <c:axId val="2094734552"/>
-        <c:axId val="2094734556"/>
-      </c:lineChart>
-      <c:catAx>
-        <c:axId val="2094734554"/>
-        <c:scaling>
-          <c:orientation val="minMax"/>
-        </c:scaling>
-        <c:delete val="0"/>
-        <c:axPos val="b"/>
-        <c:numFmt formatCode="General" sourceLinked="1"/>
-        <c:majorTickMark val="out"/>
-        <c:minorTickMark val="none"/>
-        <c:tickLblPos val="low"/>
-        <c:spPr>
-          <a:ln w="12700" cap="flat">
-            <a:noFill/>
-            <a:prstDash val="solid"/>
-            <a:round/>
-          </a:ln>
-        </c:spPr>
-        <c:txPr>
-          <a:bodyPr/>
-          <a:lstStyle/>
-          <a:p>
-            <a:pPr>
-              <a:defRPr sz="1400" b="0" i="0" u="none" strike="noStrike">
-                <a:solidFill>
-                  <a:srgbClr val="FFFFFF"/>
-                </a:solidFill>
-                <a:latin typeface="+mn-lt"/>
-              </a:defRPr>
-            </a:pPr>
-            <a:endParaRPr lang="en-US"/>
-          </a:p>
-        </c:txPr>
-        <c:crossAx val="2094734552"/>
-        <c:crosses val="min"/>
-        <c:auto val="1"/>
-        <c:lblAlgn val="ctr"/>
-        <c:noMultiLvlLbl val="1"/>
-      </c:catAx>
-      <c:valAx>
-        <c:axId val="2094734552"/>
-        <c:scaling>
-          <c:orientation val="minMax"/>
-          <c:max val="140"/>
-          <c:min val="120"/>
-        </c:scaling>
-        <c:delete val="0"/>
-        <c:axPos val="l"/>
-        <c:numFmt formatCode="&quot;$&quot;#,##0" sourceLinked="0"/>
-        <c:majorTickMark val="out"/>
-        <c:minorTickMark val="none"/>
-        <c:tickLblPos val="nextTo"/>
-        <c:spPr>
-          <a:ln w="12700" cap="flat">
-            <a:noFill/>
-            <a:prstDash val="solid"/>
-            <a:round/>
-          </a:ln>
-        </c:spPr>
-        <c:txPr>
-          <a:bodyPr/>
-          <a:lstStyle/>
-          <a:p>
-            <a:pPr>
-              <a:defRPr sz="1400" b="0" i="0" u="none" strike="noStrike">
-                <a:solidFill>
-                  <a:srgbClr val="FFFFFF"/>
-                </a:solidFill>
-                <a:latin typeface="+mn-lt"/>
-              </a:defRPr>
-            </a:pPr>
-            <a:endParaRPr lang="en-US"/>
-          </a:p>
-        </c:txPr>
-        <c:crossAx val="2094734554"/>
-        <c:crosses val="autoZero"/>
-        <c:crossBetween val="between"/>
-        <c:majorUnit val="5"/>
-      </c:valAx>
-      <c:spPr>
-        <a:solidFill>
-          <a:srgbClr val="FFFFFF">
-            <a:alpha val="0"/>
-          </a:srgbClr>
-        </a:solidFill>
-        <a:ln>
-          <a:noFill/>
-        </a:ln>
-        <a:effectLst/>
-      </c:spPr>
-    </c:plotArea>
-    <c:plotVisOnly val="1"/>
-    <c:dispBlanksAs val="span"/>
-  </c:chart>
-  <c:spPr>
-    <a:solidFill>
-      <a:srgbClr val="FFFFFF">
-        <a:alpha val="0"/>
-      </a:srgbClr>
-    </a:solidFill>
-    <a:ln>
-      <a:noFill/>
-    </a:ln>
-    <a:effectLst/>
-  </c:spPr>
-  <c:externalData r:id="rId1">
-    <c:autoUpdate val="0"/>
-  </c:externalData>
-</c:chartSpace>
-</file>
-
-<file path=ppt/charts/chart9.xml><?xml version="1.0" encoding="utf-8"?>
-<c:chartSpace xmlns:c="http://schemas.openxmlformats.org/drawingml/2006/chart" xmlns:a="http://schemas.openxmlformats.org/drawingml/2006/main" xmlns:r="http://schemas.openxmlformats.org/officeDocument/2006/relationships">
-  <c:date1904 val="0"/>
-  <c:roundedCorners val="1"/>
-  <c:chart>
-    <c:autoTitleDeleted val="1"/>
-    <c:plotArea>
-      <c:layout/>
-      <c:lineChart>
-        <c:varyColors val="0"/>
-        <c:ser>
-          <c:idx val="0"/>
-          <c:order val="0"/>
-          <c:tx>
-            <c:strRef>
-              <c:f>Sheet1!$B$1</c:f>
-              <c:strCache>
-                <c:ptCount val="1"/>
-                <c:pt idx="0">
-                  <c:v>2025</c:v>
-                </c:pt>
-              </c:strCache>
-            </c:strRef>
-          </c:tx>
-          <c:spPr>
-            <a:solidFill>
-              <a:srgbClr val="9AA3AD"/>
-            </a:solidFill>
-            <a:ln>
-              <a:noFill/>
-            </a:ln>
-            <a:effectLst/>
-          </c:spPr>
-          <c:invertIfNegative val="0"/>
-          <c:dLbls>
-            <c:numFmt formatCode="&quot;$&quot;#,##0.00" sourceLinked="0"/>
-            <c:txPr>
-              <a:bodyPr/>
-              <a:lstStyle/>
-              <a:p>
-                <a:pPr>
-                  <a:defRPr b="0" i="0" strike="noStrike" sz="1400" u="none">
-                    <a:solidFill>
-                      <a:srgbClr val="1A1A1A"/>
-                    </a:solidFill>
-                    <a:latin typeface="+mn-lt"/>
-                  </a:defRPr>
-                </a:pPr>
-              </a:p>
-            </c:txPr>
-            <c:dLblPos val="t"/>
-            <c:showLegendKey val="0"/>
-            <c:showVal val="1"/>
-            <c:showCatName val="0"/>
-            <c:showSerName val="0"/>
-            <c:showPercent val="0"/>
-            <c:showBubbleSize val="0"/>
-            <c:showLeaderLines val="0"/>
-          </c:dLbls>
-          <c:marker>
-            <c:symbol val="none"/>
-            <c:size val="8"/>
-            <c:spPr>
-              <a:solidFill>
-                <a:srgbClr val="9AA3AD"/>
-              </a:solidFill>
-              <a:ln w="9525" cap="flat">
-                <a:solidFill>
-                  <a:srgbClr val="9AA3AD"/>
-                </a:solidFill>
-                <a:prstDash val="solid"/>
-                <a:round/>
-              </a:ln>
-              <a:effectLst/>
-            </c:spPr>
-          </c:marker>
-          <c:cat>
-            <c:multiLvlStrRef>
-              <c:f>Sheet1!$A$2:$A$10</c:f>
-              <c:multiLvlStrCache>
-                <c:ptCount val="9"/>
-                <c:lvl>
-                  <c:pt idx="0">
-                    <c:v>Jan</c:v>
-                  </c:pt>
-                  <c:pt idx="1">
-                    <c:v>Feb</c:v>
-                  </c:pt>
-                  <c:pt idx="2">
-                    <c:v>Mar</c:v>
-                  </c:pt>
-                  <c:pt idx="3">
-                    <c:v>Apr</c:v>
-                  </c:pt>
-                  <c:pt idx="4">
-                    <c:v>May</c:v>
-                  </c:pt>
-                  <c:pt idx="5">
-                    <c:v>Jun</c:v>
-                  </c:pt>
-                  <c:pt idx="6">
-                    <c:v>Jul</c:v>
-                  </c:pt>
-                  <c:pt idx="7">
-                    <c:v>Aug</c:v>
-                  </c:pt>
-                  <c:pt idx="8">
-                    <c:v>Sep</c:v>
-                  </c:pt>
-                </c:lvl>
-              </c:multiLvlStrCache>
-            </c:multiLvlStrRef>
-          </c:cat>
-          <c:val>
-            <c:numRef>
-              <c:f>Sheet1!$B$2:$B$10</c:f>
-              <c:numCache>
-                <c:formatCode>General</c:formatCode>
-                <c:ptCount val="9"/>
-                <c:pt idx="0">
-                  <c:v/>
-                </c:pt>
-                <c:pt idx="1">
-                  <c:v>125</c:v>
-                </c:pt>
-                <c:pt idx="2">
-                  <c:v/>
-                </c:pt>
-                <c:pt idx="3">
-                  <c:v/>
-                </c:pt>
-                <c:pt idx="4">
-                  <c:v/>
-                </c:pt>
-                <c:pt idx="5">
-                  <c:v>129</c:v>
-                </c:pt>
-                <c:pt idx="6">
-                  <c:v/>
-                </c:pt>
-                <c:pt idx="7">
-                  <c:v/>
-                </c:pt>
-                <c:pt idx="8">
-                  <c:v/>
-                </c:pt>
-              </c:numCache>
-            </c:numRef>
-          </c:val>
-          <c:smooth val="0"/>
-        </c:ser>
-        <c:dLbls>
-          <c:numFmt formatCode="&quot;$&quot;#,##0.00" sourceLinked="0"/>
-          <c:txPr>
-            <a:bodyPr/>
-            <a:lstStyle/>
-            <a:p>
-              <a:pPr>
-                <a:defRPr b="0" i="0" strike="noStrike" sz="1400" u="none">
-                  <a:solidFill>
-                    <a:srgbClr val="1A1A1A"/>
-                  </a:solidFill>
-                  <a:latin typeface="+mn-lt"/>
-                </a:defRPr>
-              </a:pPr>
-            </a:p>
-          </c:txPr>
-          <c:dLblPos val="t"/>
-          <c:showLegendKey val="0"/>
-          <c:showVal val="1"/>
-          <c:showCatName val="0"/>
-          <c:showSerName val="0"/>
-          <c:showPercent val="0"/>
-          <c:showBubbleSize val="0"/>
-          <c:showLeaderLines val="0"/>
-        </c:dLbls>
-        <c:marker val="1"/>
-        <c:axId val="2094734554"/>
-        <c:axId val="2094734552"/>
-        <c:axId val="2094734556"/>
-      </c:lineChart>
-      <c:catAx>
-        <c:axId val="2094734554"/>
-        <c:scaling>
-          <c:orientation val="minMax"/>
-        </c:scaling>
-        <c:delete val="0"/>
-        <c:axPos val="b"/>
-        <c:numFmt formatCode="General" sourceLinked="1"/>
-        <c:majorTickMark val="out"/>
-        <c:minorTickMark val="none"/>
-        <c:tickLblPos val="low"/>
-        <c:spPr>
-          <a:ln w="12700" cap="flat">
-            <a:noFill/>
-            <a:prstDash val="solid"/>
-            <a:round/>
-          </a:ln>
-        </c:spPr>
-        <c:txPr>
-          <a:bodyPr/>
-          <a:lstStyle/>
-          <a:p>
-            <a:pPr>
-              <a:defRPr sz="1400" b="0" i="0" u="none" strike="noStrike">
-                <a:solidFill>
-                  <a:srgbClr val="FFFFFF"/>
-                </a:solidFill>
-                <a:latin typeface="+mn-lt"/>
-              </a:defRPr>
-            </a:pPr>
-            <a:endParaRPr lang="en-US"/>
-          </a:p>
-        </c:txPr>
-        <c:crossAx val="2094734552"/>
-        <c:crosses val="min"/>
-        <c:auto val="1"/>
-        <c:lblAlgn val="ctr"/>
-        <c:noMultiLvlLbl val="1"/>
-      </c:catAx>
-      <c:valAx>
-        <c:axId val="2094734552"/>
-        <c:scaling>
-          <c:orientation val="minMax"/>
-          <c:max val="140"/>
-          <c:min val="120"/>
-        </c:scaling>
-        <c:delete val="0"/>
-        <c:axPos val="l"/>
-        <c:numFmt formatCode="&quot;$&quot;#,##0" sourceLinked="0"/>
-        <c:majorTickMark val="out"/>
-        <c:minorTickMark val="none"/>
-        <c:tickLblPos val="nextTo"/>
-        <c:spPr>
-          <a:ln w="12700" cap="flat">
-            <a:noFill/>
-            <a:prstDash val="solid"/>
-            <a:round/>
-          </a:ln>
-        </c:spPr>
-        <c:txPr>
-          <a:bodyPr/>
-          <a:lstStyle/>
-          <a:p>
-            <a:pPr>
-              <a:defRPr sz="1400" b="0" i="0" u="none" strike="noStrike">
-                <a:solidFill>
-                  <a:srgbClr val="FFFFFF"/>
-                </a:solidFill>
-                <a:latin typeface="+mn-lt"/>
-              </a:defRPr>
-            </a:pPr>
-            <a:endParaRPr lang="en-US"/>
-          </a:p>
-        </c:txPr>
-        <c:crossAx val="2094734554"/>
-        <c:crosses val="autoZero"/>
-        <c:crossBetween val="between"/>
-        <c:majorUnit val="5"/>
       </c:valAx>
       <c:spPr>
         <a:solidFill>
@@ -10642,8 +11987,8 @@
           <p:nvPr/>
         </p:nvGraphicFramePr>
         <p:xfrm>
-          <a:off x="621792" y="2889504"/>
-          <a:ext cx="10945368" cy="3008376"/>
+          <a:off x="621792" y="3218688"/>
+          <a:ext cx="10945368" cy="2679192"/>
         </p:xfrm>
         <a:graphic xmlns:a="http://schemas.openxmlformats.org/drawingml/2006/main">
           <a:graphicData uri="http://schemas.openxmlformats.org/drawingml/2006/chart">
@@ -10651,9 +11996,247 @@
           </a:graphicData>
         </a:graphic>
       </p:graphicFrame>
-      <p:sp>
-        <p:nvSpPr>
-          <p:cNvPr id="18" name="Shape 15"/>
+      <p:graphicFrame>
+        <p:nvGraphicFramePr>
+          <p:cNvPr id="18" name="Chart 1" descr=""/>
+          <p:cNvGraphicFramePr/>
+          <p:nvPr/>
+        </p:nvGraphicFramePr>
+        <p:xfrm>
+          <a:off x="621792" y="3218688"/>
+          <a:ext cx="10945368" cy="2679192"/>
+        </p:xfrm>
+        <a:graphic xmlns:a="http://schemas.openxmlformats.org/drawingml/2006/main">
+          <a:graphicData uri="http://schemas.openxmlformats.org/drawingml/2006/chart">
+            <c:chart xmlns:c="http://schemas.openxmlformats.org/drawingml/2006/chart" r:id="rId2"/>
+          </a:graphicData>
+        </a:graphic>
+      </p:graphicFrame>
+      <p:graphicFrame>
+        <p:nvGraphicFramePr>
+          <p:cNvPr id="19" name="Chart 2" descr=""/>
+          <p:cNvGraphicFramePr/>
+          <p:nvPr/>
+        </p:nvGraphicFramePr>
+        <p:xfrm>
+          <a:off x="621792" y="3218688"/>
+          <a:ext cx="10945368" cy="2679192"/>
+        </p:xfrm>
+        <a:graphic xmlns:a="http://schemas.openxmlformats.org/drawingml/2006/main">
+          <a:graphicData uri="http://schemas.openxmlformats.org/drawingml/2006/chart">
+            <c:chart xmlns:c="http://schemas.openxmlformats.org/drawingml/2006/chart" r:id="rId3"/>
+          </a:graphicData>
+        </a:graphic>
+      </p:graphicFrame>
+      <p:graphicFrame>
+        <p:nvGraphicFramePr>
+          <p:cNvPr id="20" name="Chart 3" descr=""/>
+          <p:cNvGraphicFramePr/>
+          <p:nvPr/>
+        </p:nvGraphicFramePr>
+        <p:xfrm>
+          <a:off x="621792" y="3218688"/>
+          <a:ext cx="10945368" cy="2679192"/>
+        </p:xfrm>
+        <a:graphic xmlns:a="http://schemas.openxmlformats.org/drawingml/2006/main">
+          <a:graphicData uri="http://schemas.openxmlformats.org/drawingml/2006/chart">
+            <c:chart xmlns:c="http://schemas.openxmlformats.org/drawingml/2006/chart" r:id="rId4"/>
+          </a:graphicData>
+        </a:graphic>
+      </p:graphicFrame>
+      <p:graphicFrame>
+        <p:nvGraphicFramePr>
+          <p:cNvPr id="21" name="Chart 4" descr=""/>
+          <p:cNvGraphicFramePr/>
+          <p:nvPr/>
+        </p:nvGraphicFramePr>
+        <p:xfrm>
+          <a:off x="621792" y="3218688"/>
+          <a:ext cx="10945368" cy="2679192"/>
+        </p:xfrm>
+        <a:graphic xmlns:a="http://schemas.openxmlformats.org/drawingml/2006/main">
+          <a:graphicData uri="http://schemas.openxmlformats.org/drawingml/2006/chart">
+            <c:chart xmlns:c="http://schemas.openxmlformats.org/drawingml/2006/chart" r:id="rId5"/>
+          </a:graphicData>
+        </a:graphic>
+      </p:graphicFrame>
+      <p:graphicFrame>
+        <p:nvGraphicFramePr>
+          <p:cNvPr id="22" name="Chart 5" descr=""/>
+          <p:cNvGraphicFramePr/>
+          <p:nvPr/>
+        </p:nvGraphicFramePr>
+        <p:xfrm>
+          <a:off x="621792" y="3218688"/>
+          <a:ext cx="10945368" cy="2679192"/>
+        </p:xfrm>
+        <a:graphic xmlns:a="http://schemas.openxmlformats.org/drawingml/2006/main">
+          <a:graphicData uri="http://schemas.openxmlformats.org/drawingml/2006/chart">
+            <c:chart xmlns:c="http://schemas.openxmlformats.org/drawingml/2006/chart" r:id="rId6"/>
+          </a:graphicData>
+        </a:graphic>
+      </p:graphicFrame>
+      <p:sp>
+        <p:nvSpPr>
+          <p:cNvPr id="23" name="Shape 15"/>
+          <p:cNvSpPr/>
+          <p:nvPr/>
+        </p:nvSpPr>
+        <p:spPr>
+          <a:xfrm>
+            <a:off x="4951476" y="3049524"/>
+            <a:ext cx="310896" cy="45720"/>
+          </a:xfrm>
+          <a:prstGeom prst="rect">
+            <a:avLst/>
+          </a:prstGeom>
+          <a:solidFill>
+            <a:srgbClr val="9AA3AD"/>
+          </a:solidFill>
+          <a:ln/>
+        </p:spPr>
+      </p:sp>
+      <p:sp>
+        <p:nvSpPr>
+          <p:cNvPr id="24" name="Shape 16"/>
+          <p:cNvSpPr/>
+          <p:nvPr/>
+        </p:nvSpPr>
+        <p:spPr>
+          <a:xfrm>
+            <a:off x="5052060" y="3017520"/>
+            <a:ext cx="109728" cy="109728"/>
+          </a:xfrm>
+          <a:prstGeom prst="ellipse">
+            <a:avLst/>
+          </a:prstGeom>
+          <a:solidFill>
+            <a:srgbClr val="9AA3AD"/>
+          </a:solidFill>
+          <a:ln/>
+        </p:spPr>
+      </p:sp>
+      <p:sp>
+        <p:nvSpPr>
+          <p:cNvPr id="25" name="Text 17"/>
+          <p:cNvSpPr txBox="1"/>
+          <p:nvPr/>
+        </p:nvSpPr>
+        <p:spPr>
+          <a:xfrm>
+            <a:off x="5335524" y="2926080"/>
+            <a:ext cx="777240" cy="292608"/>
+          </a:xfrm>
+          <a:prstGeom prst="rect">
+            <a:avLst/>
+          </a:prstGeom>
+          <a:noFill/>
+          <a:ln/>
+        </p:spPr>
+        <p:txBody>
+          <a:bodyPr wrap="square" lIns="0" tIns="0" rIns="0" bIns="0" rtlCol="0" anchor="ctr"/>
+          <a:lstStyle/>
+          <a:p>
+            <a:pPr indent="0" marL="0">
+              <a:buNone/>
+            </a:pPr>
+            <a:r>
+              <a:rPr lang="en-US" sz="1400" dirty="0">
+                <a:solidFill>
+                  <a:srgbClr val="1A1A1A"/>
+                </a:solidFill>
+                <a:latin typeface="Inter" pitchFamily="34" charset="0"/>
+                <a:ea typeface="Inter" pitchFamily="34" charset="-122"/>
+                <a:cs typeface="Inter" pitchFamily="34" charset="-120"/>
+              </a:rPr>
+              <a:t>2025</a:t>
+            </a:r>
+            <a:endParaRPr lang="en-US" sz="1400" dirty="0"/>
+          </a:p>
+        </p:txBody>
+      </p:sp>
+      <p:sp>
+        <p:nvSpPr>
+          <p:cNvPr id="26" name="Shape 18"/>
+          <p:cNvSpPr/>
+          <p:nvPr/>
+        </p:nvSpPr>
+        <p:spPr>
+          <a:xfrm>
+            <a:off x="6185916" y="3049524"/>
+            <a:ext cx="310896" cy="45720"/>
+          </a:xfrm>
+          <a:prstGeom prst="rect">
+            <a:avLst/>
+          </a:prstGeom>
+          <a:solidFill>
+            <a:srgbClr val="2587C5"/>
+          </a:solidFill>
+          <a:ln/>
+        </p:spPr>
+      </p:sp>
+      <p:sp>
+        <p:nvSpPr>
+          <p:cNvPr id="27" name="Shape 19"/>
+          <p:cNvSpPr/>
+          <p:nvPr/>
+        </p:nvSpPr>
+        <p:spPr>
+          <a:xfrm>
+            <a:off x="6286500" y="3017520"/>
+            <a:ext cx="109728" cy="109728"/>
+          </a:xfrm>
+          <a:prstGeom prst="ellipse">
+            <a:avLst/>
+          </a:prstGeom>
+          <a:solidFill>
+            <a:srgbClr val="2587C5"/>
+          </a:solidFill>
+          <a:ln/>
+        </p:spPr>
+      </p:sp>
+      <p:sp>
+        <p:nvSpPr>
+          <p:cNvPr id="28" name="Text 20"/>
+          <p:cNvSpPr txBox="1"/>
+          <p:nvPr/>
+        </p:nvSpPr>
+        <p:spPr>
+          <a:xfrm>
+            <a:off x="6569964" y="2926080"/>
+            <a:ext cx="777240" cy="292608"/>
+          </a:xfrm>
+          <a:prstGeom prst="rect">
+            <a:avLst/>
+          </a:prstGeom>
+          <a:noFill/>
+          <a:ln/>
+        </p:spPr>
+        <p:txBody>
+          <a:bodyPr wrap="square" lIns="0" tIns="0" rIns="0" bIns="0" rtlCol="0" anchor="ctr"/>
+          <a:lstStyle/>
+          <a:p>
+            <a:pPr indent="0" marL="0">
+              <a:buNone/>
+            </a:pPr>
+            <a:r>
+              <a:rPr lang="en-US" sz="1400" dirty="0">
+                <a:solidFill>
+                  <a:srgbClr val="1A1A1A"/>
+                </a:solidFill>
+                <a:latin typeface="Inter" pitchFamily="34" charset="0"/>
+                <a:ea typeface="Inter" pitchFamily="34" charset="-122"/>
+                <a:cs typeface="Inter" pitchFamily="34" charset="-120"/>
+              </a:rPr>
+              <a:t>2026</a:t>
+            </a:r>
+            <a:endParaRPr lang="en-US" sz="1400" dirty="0"/>
+          </a:p>
+        </p:txBody>
+      </p:sp>
+      <p:sp>
+        <p:nvSpPr>
+          <p:cNvPr id="29" name="Shape 21"/>
           <p:cNvSpPr/>
           <p:nvPr/>
         </p:nvSpPr>
@@ -10673,7 +12256,7 @@
       </p:sp>
       <p:sp>
         <p:nvSpPr>
-          <p:cNvPr id="19" name="Text 16"/>
+          <p:cNvPr id="30" name="Text 22"/>
           <p:cNvSpPr txBox="1"/>
           <p:nvPr/>
         </p:nvSpPr>

--- a/day2-deck/decks/Warranty & Internal - House Style.pptx
+++ b/day2-deck/decks/Warranty & Internal - House Style.pptx
@@ -197,9 +197,9 @@
           </c:marker>
           <c:cat>
             <c:multiLvlStrRef>
-              <c:f>Sheet1!$A$2:$A$10</c:f>
+              <c:f>Sheet1!$A$2:$A$13</c:f>
               <c:multiLvlStrCache>
-                <c:ptCount val="9"/>
+                <c:ptCount val="12"/>
                 <c:lvl>
                   <c:pt idx="0">
                     <c:v>Jan</c:v>
@@ -228,16 +228,25 @@
                   <c:pt idx="8">
                     <c:v>Sep</c:v>
                   </c:pt>
+                  <c:pt idx="9">
+                    <c:v>Oct</c:v>
+                  </c:pt>
+                  <c:pt idx="10">
+                    <c:v>Nov</c:v>
+                  </c:pt>
+                  <c:pt idx="11">
+                    <c:v>Dec</c:v>
+                  </c:pt>
                 </c:lvl>
               </c:multiLvlStrCache>
             </c:multiLvlStrRef>
           </c:cat>
           <c:val>
             <c:numRef>
-              <c:f>Sheet1!$B$2:$B$10</c:f>
+              <c:f>Sheet1!$B$2:$B$13</c:f>
               <c:numCache>
                 <c:formatCode>General</c:formatCode>
-                <c:ptCount val="9"/>
+                <c:ptCount val="12"/>
                 <c:pt idx="0">
                   <c:v>14264</c:v>
                 </c:pt>
@@ -264,6 +273,15 @@
                 </c:pt>
                 <c:pt idx="8">
                   <c:v>15075</c:v>
+                </c:pt>
+                <c:pt idx="9">
+                  <c:v/>
+                </c:pt>
+                <c:pt idx="10">
+                  <c:v/>
+                </c:pt>
+                <c:pt idx="11">
+                  <c:v/>
                 </c:pt>
               </c:numCache>
             </c:numRef>
@@ -483,9 +501,9 @@
           </c:marker>
           <c:cat>
             <c:multiLvlStrRef>
-              <c:f>Sheet1!$A$2:$A$10</c:f>
+              <c:f>Sheet1!$A$2:$A$13</c:f>
               <c:multiLvlStrCache>
-                <c:ptCount val="9"/>
+                <c:ptCount val="12"/>
                 <c:lvl>
                   <c:pt idx="0">
                     <c:v>Jan</c:v>
@@ -514,16 +532,25 @@
                   <c:pt idx="8">
                     <c:v>Sep</c:v>
                   </c:pt>
+                  <c:pt idx="9">
+                    <c:v>Oct</c:v>
+                  </c:pt>
+                  <c:pt idx="10">
+                    <c:v>Nov</c:v>
+                  </c:pt>
+                  <c:pt idx="11">
+                    <c:v>Dec</c:v>
+                  </c:pt>
                 </c:lvl>
               </c:multiLvlStrCache>
             </c:multiLvlStrRef>
           </c:cat>
           <c:val>
             <c:numRef>
-              <c:f>Sheet1!$B$2:$B$10</c:f>
+              <c:f>Sheet1!$B$2:$B$13</c:f>
               <c:numCache>
                 <c:formatCode>General</c:formatCode>
-                <c:ptCount val="9"/>
+                <c:ptCount val="12"/>
                 <c:pt idx="0">
                   <c:v>175</c:v>
                 </c:pt>
@@ -550,6 +577,15 @@
                 </c:pt>
                 <c:pt idx="8">
                   <c:v>187</c:v>
+                </c:pt>
+                <c:pt idx="9">
+                  <c:v>188</c:v>
+                </c:pt>
+                <c:pt idx="10">
+                  <c:v>189</c:v>
+                </c:pt>
+                <c:pt idx="11">
+                  <c:v>193</c:v>
                 </c:pt>
               </c:numCache>
             </c:numRef>
@@ -790,9 +826,9 @@
           </c:marker>
           <c:cat>
             <c:multiLvlStrRef>
-              <c:f>Sheet1!$A$2:$A$10</c:f>
+              <c:f>Sheet1!$A$2:$A$13</c:f>
               <c:multiLvlStrCache>
-                <c:ptCount val="9"/>
+                <c:ptCount val="12"/>
                 <c:lvl>
                   <c:pt idx="0">
                     <c:v>Jan</c:v>
@@ -821,16 +857,25 @@
                   <c:pt idx="8">
                     <c:v>Sep</c:v>
                   </c:pt>
+                  <c:pt idx="9">
+                    <c:v>Oct</c:v>
+                  </c:pt>
+                  <c:pt idx="10">
+                    <c:v>Nov</c:v>
+                  </c:pt>
+                  <c:pt idx="11">
+                    <c:v>Dec</c:v>
+                  </c:pt>
                 </c:lvl>
               </c:multiLvlStrCache>
             </c:multiLvlStrRef>
           </c:cat>
           <c:val>
             <c:numRef>
-              <c:f>Sheet1!$B$2:$B$10</c:f>
+              <c:f>Sheet1!$B$2:$B$13</c:f>
               <c:numCache>
                 <c:formatCode>General</c:formatCode>
-                <c:ptCount val="9"/>
+                <c:ptCount val="12"/>
                 <c:pt idx="0">
                   <c:v>126</c:v>
                 </c:pt>
@@ -857,6 +902,15 @@
                 </c:pt>
                 <c:pt idx="8">
                   <c:v>134</c:v>
+                </c:pt>
+                <c:pt idx="9">
+                  <c:v/>
+                </c:pt>
+                <c:pt idx="10">
+                  <c:v/>
+                </c:pt>
+                <c:pt idx="11">
+                  <c:v/>
                 </c:pt>
               </c:numCache>
             </c:numRef>
@@ -1073,9 +1127,9 @@
           </c:marker>
           <c:cat>
             <c:multiLvlStrRef>
-              <c:f>Sheet1!$A$2:$A$10</c:f>
+              <c:f>Sheet1!$A$2:$A$13</c:f>
               <c:multiLvlStrCache>
-                <c:ptCount val="9"/>
+                <c:ptCount val="12"/>
                 <c:lvl>
                   <c:pt idx="0">
                     <c:v>Jan</c:v>
@@ -1104,16 +1158,25 @@
                   <c:pt idx="8">
                     <c:v>Sep</c:v>
                   </c:pt>
+                  <c:pt idx="9">
+                    <c:v>Oct</c:v>
+                  </c:pt>
+                  <c:pt idx="10">
+                    <c:v>Nov</c:v>
+                  </c:pt>
+                  <c:pt idx="11">
+                    <c:v>Dec</c:v>
+                  </c:pt>
                 </c:lvl>
               </c:multiLvlStrCache>
             </c:multiLvlStrRef>
           </c:cat>
           <c:val>
             <c:numRef>
-              <c:f>Sheet1!$B$2:$B$10</c:f>
+              <c:f>Sheet1!$B$2:$B$13</c:f>
               <c:numCache>
                 <c:formatCode>General</c:formatCode>
-                <c:ptCount val="9"/>
+                <c:ptCount val="12"/>
                 <c:pt idx="0">
                   <c:v>126</c:v>
                 </c:pt>
@@ -1140,6 +1203,15 @@
                 </c:pt>
                 <c:pt idx="8">
                   <c:v>134</c:v>
+                </c:pt>
+                <c:pt idx="9">
+                  <c:v/>
+                </c:pt>
+                <c:pt idx="10">
+                  <c:v/>
+                </c:pt>
+                <c:pt idx="11">
+                  <c:v/>
                 </c:pt>
               </c:numCache>
             </c:numRef>
@@ -1365,9 +1437,9 @@
           </c:marker>
           <c:cat>
             <c:multiLvlStrRef>
-              <c:f>Sheet1!$A$2:$A$10</c:f>
+              <c:f>Sheet1!$A$2:$A$13</c:f>
               <c:multiLvlStrCache>
-                <c:ptCount val="9"/>
+                <c:ptCount val="12"/>
                 <c:lvl>
                   <c:pt idx="0">
                     <c:v>Jan</c:v>
@@ -1396,16 +1468,25 @@
                   <c:pt idx="8">
                     <c:v>Sep</c:v>
                   </c:pt>
+                  <c:pt idx="9">
+                    <c:v>Oct</c:v>
+                  </c:pt>
+                  <c:pt idx="10">
+                    <c:v>Nov</c:v>
+                  </c:pt>
+                  <c:pt idx="11">
+                    <c:v>Dec</c:v>
+                  </c:pt>
                 </c:lvl>
               </c:multiLvlStrCache>
             </c:multiLvlStrRef>
           </c:cat>
           <c:val>
             <c:numRef>
-              <c:f>Sheet1!$B$2:$B$10</c:f>
+              <c:f>Sheet1!$B$2:$B$13</c:f>
               <c:numCache>
                 <c:formatCode>General</c:formatCode>
-                <c:ptCount val="9"/>
+                <c:ptCount val="12"/>
                 <c:pt idx="0">
                   <c:v/>
                 </c:pt>
@@ -1431,6 +1512,15 @@
                   <c:v/>
                 </c:pt>
                 <c:pt idx="8">
+                  <c:v/>
+                </c:pt>
+                <c:pt idx="9">
+                  <c:v/>
+                </c:pt>
+                <c:pt idx="10">
+                  <c:v/>
+                </c:pt>
+                <c:pt idx="11">
                   <c:v/>
                 </c:pt>
               </c:numCache>
@@ -1657,9 +1747,9 @@
           </c:marker>
           <c:cat>
             <c:multiLvlStrRef>
-              <c:f>Sheet1!$A$2:$A$10</c:f>
+              <c:f>Sheet1!$A$2:$A$13</c:f>
               <c:multiLvlStrCache>
-                <c:ptCount val="9"/>
+                <c:ptCount val="12"/>
                 <c:lvl>
                   <c:pt idx="0">
                     <c:v>Jan</c:v>
@@ -1688,16 +1778,25 @@
                   <c:pt idx="8">
                     <c:v>Sep</c:v>
                   </c:pt>
+                  <c:pt idx="9">
+                    <c:v>Oct</c:v>
+                  </c:pt>
+                  <c:pt idx="10">
+                    <c:v>Nov</c:v>
+                  </c:pt>
+                  <c:pt idx="11">
+                    <c:v>Dec</c:v>
+                  </c:pt>
                 </c:lvl>
               </c:multiLvlStrCache>
             </c:multiLvlStrRef>
           </c:cat>
           <c:val>
             <c:numRef>
-              <c:f>Sheet1!$B$2:$B$10</c:f>
+              <c:f>Sheet1!$B$2:$B$13</c:f>
               <c:numCache>
                 <c:formatCode>General</c:formatCode>
-                <c:ptCount val="9"/>
+                <c:ptCount val="12"/>
                 <c:pt idx="0">
                   <c:v/>
                 </c:pt>
@@ -1723,6 +1822,15 @@
                   <c:v/>
                 </c:pt>
                 <c:pt idx="8">
+                  <c:v/>
+                </c:pt>
+                <c:pt idx="9">
+                  <c:v/>
+                </c:pt>
+                <c:pt idx="10">
+                  <c:v/>
+                </c:pt>
+                <c:pt idx="11">
                   <c:v/>
                 </c:pt>
               </c:numCache>
@@ -1949,9 +2057,9 @@
           </c:marker>
           <c:cat>
             <c:multiLvlStrRef>
-              <c:f>Sheet1!$A$2:$A$10</c:f>
+              <c:f>Sheet1!$A$2:$A$13</c:f>
               <c:multiLvlStrCache>
-                <c:ptCount val="9"/>
+                <c:ptCount val="12"/>
                 <c:lvl>
                   <c:pt idx="0">
                     <c:v>Jan</c:v>
@@ -1980,16 +2088,25 @@
                   <c:pt idx="8">
                     <c:v>Sep</c:v>
                   </c:pt>
+                  <c:pt idx="9">
+                    <c:v>Oct</c:v>
+                  </c:pt>
+                  <c:pt idx="10">
+                    <c:v>Nov</c:v>
+                  </c:pt>
+                  <c:pt idx="11">
+                    <c:v>Dec</c:v>
+                  </c:pt>
                 </c:lvl>
               </c:multiLvlStrCache>
             </c:multiLvlStrRef>
           </c:cat>
           <c:val>
             <c:numRef>
-              <c:f>Sheet1!$B$2:$B$10</c:f>
+              <c:f>Sheet1!$B$2:$B$13</c:f>
               <c:numCache>
                 <c:formatCode>General</c:formatCode>
-                <c:ptCount val="9"/>
+                <c:ptCount val="12"/>
                 <c:pt idx="0">
                   <c:v>124</c:v>
                 </c:pt>
@@ -2016,6 +2133,15 @@
                 </c:pt>
                 <c:pt idx="8">
                   <c:v>124</c:v>
+                </c:pt>
+                <c:pt idx="9">
+                  <c:v>126</c:v>
+                </c:pt>
+                <c:pt idx="10">
+                  <c:v>126</c:v>
+                </c:pt>
+                <c:pt idx="11">
+                  <c:v>130</c:v>
                 </c:pt>
               </c:numCache>
             </c:numRef>
@@ -2244,9 +2370,9 @@
           </c:marker>
           <c:cat>
             <c:multiLvlStrRef>
-              <c:f>Sheet1!$A$2:$A$10</c:f>
+              <c:f>Sheet1!$A$2:$A$13</c:f>
               <c:multiLvlStrCache>
-                <c:ptCount val="9"/>
+                <c:ptCount val="12"/>
                 <c:lvl>
                   <c:pt idx="0">
                     <c:v>Jan</c:v>
@@ -2275,16 +2401,25 @@
                   <c:pt idx="8">
                     <c:v>Sep</c:v>
                   </c:pt>
+                  <c:pt idx="9">
+                    <c:v>Oct</c:v>
+                  </c:pt>
+                  <c:pt idx="10">
+                    <c:v>Nov</c:v>
+                  </c:pt>
+                  <c:pt idx="11">
+                    <c:v>Dec</c:v>
+                  </c:pt>
                 </c:lvl>
               </c:multiLvlStrCache>
             </c:multiLvlStrRef>
           </c:cat>
           <c:val>
             <c:numRef>
-              <c:f>Sheet1!$B$2:$B$10</c:f>
+              <c:f>Sheet1!$B$2:$B$13</c:f>
               <c:numCache>
                 <c:formatCode>General</c:formatCode>
-                <c:ptCount val="9"/>
+                <c:ptCount val="12"/>
                 <c:pt idx="0">
                   <c:v>124</c:v>
                 </c:pt>
@@ -2311,6 +2446,15 @@
                 </c:pt>
                 <c:pt idx="8">
                   <c:v>124</c:v>
+                </c:pt>
+                <c:pt idx="9">
+                  <c:v>126</c:v>
+                </c:pt>
+                <c:pt idx="10">
+                  <c:v>126</c:v>
+                </c:pt>
+                <c:pt idx="11">
+                  <c:v>130</c:v>
                 </c:pt>
               </c:numCache>
             </c:numRef>
@@ -2548,9 +2692,9 @@
           </c:marker>
           <c:cat>
             <c:multiLvlStrRef>
-              <c:f>Sheet1!$A$2:$A$10</c:f>
+              <c:f>Sheet1!$A$2:$A$13</c:f>
               <c:multiLvlStrCache>
-                <c:ptCount val="9"/>
+                <c:ptCount val="12"/>
                 <c:lvl>
                   <c:pt idx="0">
                     <c:v>Jan</c:v>
@@ -2579,16 +2723,25 @@
                   <c:pt idx="8">
                     <c:v>Sep</c:v>
                   </c:pt>
+                  <c:pt idx="9">
+                    <c:v>Oct</c:v>
+                  </c:pt>
+                  <c:pt idx="10">
+                    <c:v>Nov</c:v>
+                  </c:pt>
+                  <c:pt idx="11">
+                    <c:v>Dec</c:v>
+                  </c:pt>
                 </c:lvl>
               </c:multiLvlStrCache>
             </c:multiLvlStrRef>
           </c:cat>
           <c:val>
             <c:numRef>
-              <c:f>Sheet1!$B$2:$B$10</c:f>
+              <c:f>Sheet1!$B$2:$B$13</c:f>
               <c:numCache>
                 <c:formatCode>General</c:formatCode>
-                <c:ptCount val="9"/>
+                <c:ptCount val="12"/>
                 <c:pt idx="0">
                   <c:v/>
                 </c:pt>
@@ -2615,6 +2768,15 @@
                 </c:pt>
                 <c:pt idx="8">
                   <c:v>15075</c:v>
+                </c:pt>
+                <c:pt idx="9">
+                  <c:v/>
+                </c:pt>
+                <c:pt idx="10">
+                  <c:v/>
+                </c:pt>
+                <c:pt idx="11">
+                  <c:v/>
                 </c:pt>
               </c:numCache>
             </c:numRef>
@@ -2840,9 +3002,9 @@
           </c:marker>
           <c:cat>
             <c:multiLvlStrRef>
-              <c:f>Sheet1!$A$2:$A$10</c:f>
+              <c:f>Sheet1!$A$2:$A$13</c:f>
               <c:multiLvlStrCache>
-                <c:ptCount val="9"/>
+                <c:ptCount val="12"/>
                 <c:lvl>
                   <c:pt idx="0">
                     <c:v>Jan</c:v>
@@ -2871,16 +3033,25 @@
                   <c:pt idx="8">
                     <c:v>Sep</c:v>
                   </c:pt>
+                  <c:pt idx="9">
+                    <c:v>Oct</c:v>
+                  </c:pt>
+                  <c:pt idx="10">
+                    <c:v>Nov</c:v>
+                  </c:pt>
+                  <c:pt idx="11">
+                    <c:v>Dec</c:v>
+                  </c:pt>
                 </c:lvl>
               </c:multiLvlStrCache>
             </c:multiLvlStrRef>
           </c:cat>
           <c:val>
             <c:numRef>
-              <c:f>Sheet1!$B$2:$B$10</c:f>
+              <c:f>Sheet1!$B$2:$B$13</c:f>
               <c:numCache>
                 <c:formatCode>General</c:formatCode>
-                <c:ptCount val="9"/>
+                <c:ptCount val="12"/>
                 <c:pt idx="0">
                   <c:v>14264</c:v>
                 </c:pt>
@@ -2906,6 +3077,15 @@
                   <c:v/>
                 </c:pt>
                 <c:pt idx="8">
+                  <c:v/>
+                </c:pt>
+                <c:pt idx="9">
+                  <c:v/>
+                </c:pt>
+                <c:pt idx="10">
+                  <c:v/>
+                </c:pt>
+                <c:pt idx="11">
                   <c:v/>
                 </c:pt>
               </c:numCache>
@@ -3132,9 +3312,9 @@
           </c:marker>
           <c:cat>
             <c:multiLvlStrRef>
-              <c:f>Sheet1!$A$2:$A$10</c:f>
+              <c:f>Sheet1!$A$2:$A$13</c:f>
               <c:multiLvlStrCache>
-                <c:ptCount val="9"/>
+                <c:ptCount val="12"/>
                 <c:lvl>
                   <c:pt idx="0">
                     <c:v>Jan</c:v>
@@ -3163,16 +3343,25 @@
                   <c:pt idx="8">
                     <c:v>Sep</c:v>
                   </c:pt>
+                  <c:pt idx="9">
+                    <c:v>Oct</c:v>
+                  </c:pt>
+                  <c:pt idx="10">
+                    <c:v>Nov</c:v>
+                  </c:pt>
+                  <c:pt idx="11">
+                    <c:v>Dec</c:v>
+                  </c:pt>
                 </c:lvl>
               </c:multiLvlStrCache>
             </c:multiLvlStrRef>
           </c:cat>
           <c:val>
             <c:numRef>
-              <c:f>Sheet1!$B$2:$B$10</c:f>
+              <c:f>Sheet1!$B$2:$B$13</c:f>
               <c:numCache>
                 <c:formatCode>General</c:formatCode>
-                <c:ptCount val="9"/>
+                <c:ptCount val="12"/>
                 <c:pt idx="0">
                   <c:v>16565</c:v>
                 </c:pt>
@@ -3199,6 +3388,15 @@
                 </c:pt>
                 <c:pt idx="8">
                   <c:v/>
+                </c:pt>
+                <c:pt idx="9">
+                  <c:v>14227</c:v>
+                </c:pt>
+                <c:pt idx="10">
+                  <c:v>12951</c:v>
+                </c:pt>
+                <c:pt idx="11">
+                  <c:v>14223</c:v>
                 </c:pt>
               </c:numCache>
             </c:numRef>
@@ -3424,9 +3622,9 @@
           </c:marker>
           <c:cat>
             <c:multiLvlStrRef>
-              <c:f>Sheet1!$A$2:$A$10</c:f>
+              <c:f>Sheet1!$A$2:$A$13</c:f>
               <c:multiLvlStrCache>
-                <c:ptCount val="9"/>
+                <c:ptCount val="12"/>
                 <c:lvl>
                   <c:pt idx="0">
                     <c:v>Jan</c:v>
@@ -3455,16 +3653,25 @@
                   <c:pt idx="8">
                     <c:v>Sep</c:v>
                   </c:pt>
+                  <c:pt idx="9">
+                    <c:v>Oct</c:v>
+                  </c:pt>
+                  <c:pt idx="10">
+                    <c:v>Nov</c:v>
+                  </c:pt>
+                  <c:pt idx="11">
+                    <c:v>Dec</c:v>
+                  </c:pt>
                 </c:lvl>
               </c:multiLvlStrCache>
             </c:multiLvlStrRef>
           </c:cat>
           <c:val>
             <c:numRef>
-              <c:f>Sheet1!$B$2:$B$10</c:f>
+              <c:f>Sheet1!$B$2:$B$13</c:f>
               <c:numCache>
                 <c:formatCode>General</c:formatCode>
-                <c:ptCount val="9"/>
+                <c:ptCount val="12"/>
                 <c:pt idx="0">
                   <c:v/>
                 </c:pt>
@@ -3491,6 +3698,15 @@
                 </c:pt>
                 <c:pt idx="8">
                   <c:v>13082</c:v>
+                </c:pt>
+                <c:pt idx="9">
+                  <c:v/>
+                </c:pt>
+                <c:pt idx="10">
+                  <c:v/>
+                </c:pt>
+                <c:pt idx="11">
+                  <c:v/>
                 </c:pt>
               </c:numCache>
             </c:numRef>
@@ -3719,9 +3935,9 @@
           </c:marker>
           <c:cat>
             <c:multiLvlStrRef>
-              <c:f>Sheet1!$A$2:$A$10</c:f>
+              <c:f>Sheet1!$A$2:$A$13</c:f>
               <c:multiLvlStrCache>
-                <c:ptCount val="9"/>
+                <c:ptCount val="12"/>
                 <c:lvl>
                   <c:pt idx="0">
                     <c:v>Jan</c:v>
@@ -3750,16 +3966,25 @@
                   <c:pt idx="8">
                     <c:v>Sep</c:v>
                   </c:pt>
+                  <c:pt idx="9">
+                    <c:v>Oct</c:v>
+                  </c:pt>
+                  <c:pt idx="10">
+                    <c:v>Nov</c:v>
+                  </c:pt>
+                  <c:pt idx="11">
+                    <c:v>Dec</c:v>
+                  </c:pt>
                 </c:lvl>
               </c:multiLvlStrCache>
             </c:multiLvlStrRef>
           </c:cat>
           <c:val>
             <c:numRef>
-              <c:f>Sheet1!$B$2:$B$10</c:f>
+              <c:f>Sheet1!$B$2:$B$13</c:f>
               <c:numCache>
                 <c:formatCode>General</c:formatCode>
-                <c:ptCount val="9"/>
+                <c:ptCount val="12"/>
                 <c:pt idx="0">
                   <c:v>16565</c:v>
                 </c:pt>
@@ -3786,6 +4011,15 @@
                 </c:pt>
                 <c:pt idx="8">
                   <c:v>13082</c:v>
+                </c:pt>
+                <c:pt idx="9">
+                  <c:v>14227</c:v>
+                </c:pt>
+                <c:pt idx="10">
+                  <c:v>12951</c:v>
+                </c:pt>
+                <c:pt idx="11">
+                  <c:v>14223</c:v>
                 </c:pt>
               </c:numCache>
             </c:numRef>
@@ -4026,9 +4260,9 @@
           </c:marker>
           <c:cat>
             <c:multiLvlStrRef>
-              <c:f>Sheet1!$A$2:$A$10</c:f>
+              <c:f>Sheet1!$A$2:$A$13</c:f>
               <c:multiLvlStrCache>
-                <c:ptCount val="9"/>
+                <c:ptCount val="12"/>
                 <c:lvl>
                   <c:pt idx="0">
                     <c:v>Jan</c:v>
@@ -4057,16 +4291,25 @@
                   <c:pt idx="8">
                     <c:v>Sep</c:v>
                   </c:pt>
+                  <c:pt idx="9">
+                    <c:v>Oct</c:v>
+                  </c:pt>
+                  <c:pt idx="10">
+                    <c:v>Nov</c:v>
+                  </c:pt>
+                  <c:pt idx="11">
+                    <c:v>Dec</c:v>
+                  </c:pt>
                 </c:lvl>
               </c:multiLvlStrCache>
             </c:multiLvlStrRef>
           </c:cat>
           <c:val>
             <c:numRef>
-              <c:f>Sheet1!$B$2:$B$10</c:f>
+              <c:f>Sheet1!$B$2:$B$13</c:f>
               <c:numCache>
                 <c:formatCode>General</c:formatCode>
-                <c:ptCount val="9"/>
+                <c:ptCount val="12"/>
                 <c:pt idx="0">
                   <c:v>196</c:v>
                 </c:pt>
@@ -4093,6 +4336,15 @@
                 </c:pt>
                 <c:pt idx="8">
                   <c:v>199</c:v>
+                </c:pt>
+                <c:pt idx="9">
+                  <c:v/>
+                </c:pt>
+                <c:pt idx="10">
+                  <c:v/>
+                </c:pt>
+                <c:pt idx="11">
+                  <c:v/>
                 </c:pt>
               </c:numCache>
             </c:numRef>
@@ -4309,9 +4561,9 @@
           </c:marker>
           <c:cat>
             <c:multiLvlStrRef>
-              <c:f>Sheet1!$A$2:$A$10</c:f>
+              <c:f>Sheet1!$A$2:$A$13</c:f>
               <c:multiLvlStrCache>
-                <c:ptCount val="9"/>
+                <c:ptCount val="12"/>
                 <c:lvl>
                   <c:pt idx="0">
                     <c:v>Jan</c:v>
@@ -4340,16 +4592,25 @@
                   <c:pt idx="8">
                     <c:v>Sep</c:v>
                   </c:pt>
+                  <c:pt idx="9">
+                    <c:v>Oct</c:v>
+                  </c:pt>
+                  <c:pt idx="10">
+                    <c:v>Nov</c:v>
+                  </c:pt>
+                  <c:pt idx="11">
+                    <c:v>Dec</c:v>
+                  </c:pt>
                 </c:lvl>
               </c:multiLvlStrCache>
             </c:multiLvlStrRef>
           </c:cat>
           <c:val>
             <c:numRef>
-              <c:f>Sheet1!$B$2:$B$10</c:f>
+              <c:f>Sheet1!$B$2:$B$13</c:f>
               <c:numCache>
                 <c:formatCode>General</c:formatCode>
-                <c:ptCount val="9"/>
+                <c:ptCount val="12"/>
                 <c:pt idx="0">
                   <c:v>196</c:v>
                 </c:pt>
@@ -4376,6 +4637,15 @@
                 </c:pt>
                 <c:pt idx="8">
                   <c:v>199</c:v>
+                </c:pt>
+                <c:pt idx="9">
+                  <c:v/>
+                </c:pt>
+                <c:pt idx="10">
+                  <c:v/>
+                </c:pt>
+                <c:pt idx="11">
+                  <c:v/>
                 </c:pt>
               </c:numCache>
             </c:numRef>
@@ -4601,9 +4871,9 @@
           </c:marker>
           <c:cat>
             <c:multiLvlStrRef>
-              <c:f>Sheet1!$A$2:$A$10</c:f>
+              <c:f>Sheet1!$A$2:$A$13</c:f>
               <c:multiLvlStrCache>
-                <c:ptCount val="9"/>
+                <c:ptCount val="12"/>
                 <c:lvl>
                   <c:pt idx="0">
                     <c:v>Jan</c:v>
@@ -4632,16 +4902,25 @@
                   <c:pt idx="8">
                     <c:v>Sep</c:v>
                   </c:pt>
+                  <c:pt idx="9">
+                    <c:v>Oct</c:v>
+                  </c:pt>
+                  <c:pt idx="10">
+                    <c:v>Nov</c:v>
+                  </c:pt>
+                  <c:pt idx="11">
+                    <c:v>Dec</c:v>
+                  </c:pt>
                 </c:lvl>
               </c:multiLvlStrCache>
             </c:multiLvlStrRef>
           </c:cat>
           <c:val>
             <c:numRef>
-              <c:f>Sheet1!$B$2:$B$10</c:f>
+              <c:f>Sheet1!$B$2:$B$13</c:f>
               <c:numCache>
                 <c:formatCode>General</c:formatCode>
-                <c:ptCount val="9"/>
+                <c:ptCount val="12"/>
                 <c:pt idx="0">
                   <c:v>175</c:v>
                 </c:pt>
@@ -4668,6 +4947,15 @@
                 </c:pt>
                 <c:pt idx="8">
                   <c:v>187</c:v>
+                </c:pt>
+                <c:pt idx="9">
+                  <c:v>188</c:v>
+                </c:pt>
+                <c:pt idx="10">
+                  <c:v>189</c:v>
+                </c:pt>
+                <c:pt idx="11">
+                  <c:v>193</c:v>
                 </c:pt>
               </c:numCache>
             </c:numRef>
@@ -5386,7 +5674,7 @@
           <a:p>
             <a:r>
               <a:rPr lang="en-US" dirty="0"/>
-              <a:t>Source: Qlik - Closed Repair Orders. Jan-Sep by close month. Same-store, INEOS excluded (opened 2026). GMC Prescott body shop labor types excluded. Distinct warranty ROs: every RO with a warranty line. YTD from YTD totals, not the mean of months. Store rows reconcile to the group on every input, both years.</a:t>
+              <a:t>Source: Qlik - Closed Repair Orders. Jan-Sep by close month. Same-store, INEOS excluded (opened 2026). GMC Prescott body shop labor types excluded. Distinct warranty ROs: every RO with a warranty line. YTD from YTD totals, not the mean of months. Store rows reconcile to the group on every input, both years. 2025 shown January-December; October-December pulled Oct 22 on the same basis (chart only).</a:t>
             </a:r>
             <a:endParaRPr lang="en-US" dirty="0"/>
           </a:p>
@@ -5650,7 +5938,7 @@
           <a:p>
             <a:r>
               <a:rPr lang="en-US" dirty="0"/>
-              <a:t>Source: Qlik - Closed Repair Orders. Jan-Sep by close month. Same-store, INEOS excluded (opened 2026). GMC Prescott body shop labor types excluded. Warranty labor sale / warranty sold hours. YTD from YTD totals, not the mean of months. Store rows reconcile to the group on every input, both years.</a:t>
+              <a:t>Source: Qlik - Closed Repair Orders. Jan-Sep by close month. Same-store, INEOS excluded (opened 2026). GMC Prescott body shop labor types excluded. Warranty labor sale / warranty sold hours. YTD from YTD totals, not the mean of months. Store rows reconcile to the group on every input, both years. 2025 shown January-December; October-December pulled Oct 22 on the same basis (chart only).</a:t>
             </a:r>
             <a:endParaRPr lang="en-US" dirty="0"/>
           </a:p>
@@ -5914,7 +6202,7 @@
           <a:p>
             <a:r>
               <a:rPr lang="en-US" dirty="0"/>
-              <a:t>Source: Qlik - Closed Repair Orders. Jan-Sep by close month. Same-store, INEOS excluded (opened 2026). GMC Prescott body shop labor types excluded. Internal labor sale / internal sold hours. A higher internal rate adds service gross but is a cost to used cars. YTD from YTD totals, not the mean of months. Store rows reconcile to the group on every input, both years.</a:t>
+              <a:t>Source: Qlik - Closed Repair Orders. Jan-Sep by close month. Same-store, INEOS excluded (opened 2026). GMC Prescott body shop labor types excluded. Internal labor sale / internal sold hours. A higher internal rate adds service gross but is a cost to used cars. YTD from YTD totals, not the mean of months. Store rows reconcile to the group on every input, both years. 2025 shown January-December; October-December pulled Oct 22 on the same basis (chart only).</a:t>
             </a:r>
             <a:endParaRPr lang="en-US" dirty="0"/>
           </a:p>

--- a/day2-deck/decks/Warranty & Internal - House Style.pptx
+++ b/day2-deck/decks/Warranty & Internal - House Style.pptx
@@ -6727,7 +6727,7 @@
               <a:buNone/>
             </a:pPr>
             <a:r>
-              <a:rPr lang="en-US" sz="7200" b="1" dirty="0">
+              <a:rPr lang="en-US" sz="7600" b="1" dirty="0">
                 <a:solidFill>
                   <a:srgbClr val="1A1A1A"/>
                 </a:solidFill>
@@ -6735,9 +6735,9 @@
                 <a:ea typeface="Inter" pitchFamily="34" charset="-122"/>
                 <a:cs typeface="Inter" pitchFamily="34" charset="-120"/>
               </a:rPr>
-              <a:t>Warranty &amp; Internal</a:t>
-            </a:r>
-            <a:endParaRPr lang="en-US" sz="7200" dirty="0"/>
+              <a:t>Warranty</a:t>
+            </a:r>
+            <a:endParaRPr lang="en-US" sz="7600" dirty="0"/>
           </a:p>
         </p:txBody>
       </p:sp>
@@ -6865,7 +6865,7 @@
                 <a:ea typeface="Inter" pitchFamily="34" charset="-122"/>
                 <a:cs typeface="Inter" pitchFamily="34" charset="-120"/>
               </a:rPr>
-              <a:t>WARRANTY &amp; INTERNAL</a:t>
+              <a:t>LABOR MIX</a:t>
             </a:r>
             <a:endParaRPr lang="en-US" sz="1400" dirty="0"/>
           </a:p>
@@ -11812,7 +11812,7 @@
                 <a:ea typeface="Inter" pitchFamily="34" charset="-122"/>
                 <a:cs typeface="Inter" pitchFamily="34" charset="-120"/>
               </a:rPr>
-              <a:t>WARRANTY &amp; INTERNAL</a:t>
+              <a:t>WARRANTY</a:t>
             </a:r>
             <a:endParaRPr lang="en-US" sz="1400" dirty="0"/>
           </a:p>
@@ -12666,7 +12666,7 @@
                 <a:ea typeface="Inter" pitchFamily="34" charset="-122"/>
                 <a:cs typeface="Inter" pitchFamily="34" charset="-120"/>
               </a:rPr>
-              <a:t>WARRANTY &amp; INTERNAL</a:t>
+              <a:t>WARRANTY</a:t>
             </a:r>
             <a:endParaRPr lang="en-US" sz="1400" dirty="0"/>
           </a:p>
@@ -17573,7 +17573,7 @@
                 <a:ea typeface="Inter" pitchFamily="34" charset="-122"/>
                 <a:cs typeface="Inter" pitchFamily="34" charset="-120"/>
               </a:rPr>
-              <a:t>WARRANTY &amp; INTERNAL</a:t>
+              <a:t>WARRANTY</a:t>
             </a:r>
             <a:endParaRPr lang="en-US" sz="1400" dirty="0"/>
           </a:p>
@@ -22520,7 +22520,7 @@
                 <a:ea typeface="Inter" pitchFamily="34" charset="-122"/>
                 <a:cs typeface="Inter" pitchFamily="34" charset="-120"/>
               </a:rPr>
-              <a:t>WARRANTY &amp; INTERNAL</a:t>
+              <a:t>WARRANTY</a:t>
             </a:r>
             <a:endParaRPr lang="en-US" sz="1400" dirty="0"/>
           </a:p>
@@ -23342,7 +23342,7 @@
                 <a:ea typeface="Inter" pitchFamily="34" charset="-122"/>
                 <a:cs typeface="Inter" pitchFamily="34" charset="-120"/>
               </a:rPr>
-              <a:t>WARRANTY &amp; INTERNAL</a:t>
+              <a:t>WARRANTY</a:t>
             </a:r>
             <a:endParaRPr lang="en-US" sz="1400" dirty="0"/>
           </a:p>
@@ -28289,7 +28289,7 @@
                 <a:ea typeface="Inter" pitchFamily="34" charset="-122"/>
                 <a:cs typeface="Inter" pitchFamily="34" charset="-120"/>
               </a:rPr>
-              <a:t>WARRANTY &amp; INTERNAL</a:t>
+              <a:t>WARRANTY</a:t>
             </a:r>
             <a:endParaRPr lang="en-US" sz="1400" dirty="0"/>
           </a:p>
@@ -33236,7 +33236,7 @@
                 <a:ea typeface="Inter" pitchFamily="34" charset="-122"/>
                 <a:cs typeface="Inter" pitchFamily="34" charset="-120"/>
               </a:rPr>
-              <a:t>WARRANTY &amp; INTERNAL</a:t>
+              <a:t>LABOR MIX</a:t>
             </a:r>
             <a:endParaRPr lang="en-US" sz="1400" dirty="0"/>
           </a:p>
@@ -34090,7 +34090,7 @@
                 <a:ea typeface="Inter" pitchFamily="34" charset="-122"/>
                 <a:cs typeface="Inter" pitchFamily="34" charset="-120"/>
               </a:rPr>
-              <a:t>WARRANTY &amp; INTERNAL</a:t>
+              <a:t>LABOR MIX</a:t>
             </a:r>
             <a:endParaRPr lang="en-US" sz="1400" dirty="0"/>
           </a:p>

--- a/day2-deck/decks/Warranty & Internal - House Style.pptx
+++ b/day2-deck/decks/Warranty & Internal - House Style.pptx
@@ -555,40 +555,40 @@
                 <c:formatCode>General</c:formatCode>
                 <c:ptCount val="12"/>
                 <c:pt idx="0">
-                  <c:v>175</c:v>
+                  <c:v>175.24</c:v>
                 </c:pt>
                 <c:pt idx="1">
-                  <c:v>175</c:v>
+                  <c:v>174.7</c:v>
                 </c:pt>
                 <c:pt idx="2">
-                  <c:v>173</c:v>
+                  <c:v>172.93</c:v>
                 </c:pt>
                 <c:pt idx="3">
-                  <c:v>176</c:v>
+                  <c:v>175.61</c:v>
                 </c:pt>
                 <c:pt idx="4">
-                  <c:v>182</c:v>
+                  <c:v>181.76</c:v>
                 </c:pt>
                 <c:pt idx="5">
-                  <c:v>185</c:v>
+                  <c:v>185.29</c:v>
                 </c:pt>
                 <c:pt idx="6">
-                  <c:v>187</c:v>
+                  <c:v>186.84</c:v>
                 </c:pt>
                 <c:pt idx="7">
-                  <c:v>186</c:v>
+                  <c:v>186.04</c:v>
                 </c:pt>
                 <c:pt idx="8">
-                  <c:v>187</c:v>
+                  <c:v>186.63</c:v>
                 </c:pt>
                 <c:pt idx="9">
-                  <c:v>188</c:v>
+                  <c:v>187.82</c:v>
                 </c:pt>
                 <c:pt idx="10">
-                  <c:v>189</c:v>
+                  <c:v>188.55</c:v>
                 </c:pt>
                 <c:pt idx="11">
-                  <c:v>193</c:v>
+                  <c:v>193.03</c:v>
                 </c:pt>
               </c:numCache>
             </c:numRef>
@@ -880,31 +880,31 @@
                 <c:formatCode>General</c:formatCode>
                 <c:ptCount val="12"/>
                 <c:pt idx="0">
-                  <c:v>126</c:v>
+                  <c:v>125.77</c:v>
                 </c:pt>
                 <c:pt idx="1">
-                  <c:v>124</c:v>
+                  <c:v>124.08</c:v>
                 </c:pt>
                 <c:pt idx="2">
-                  <c:v>131</c:v>
+                  <c:v>130.61</c:v>
                 </c:pt>
                 <c:pt idx="3">
-                  <c:v>131</c:v>
+                  <c:v>130.85</c:v>
                 </c:pt>
                 <c:pt idx="4">
-                  <c:v>132</c:v>
+                  <c:v>131.64</c:v>
                 </c:pt>
                 <c:pt idx="5">
-                  <c:v>128</c:v>
+                  <c:v>128.34</c:v>
                 </c:pt>
                 <c:pt idx="6">
-                  <c:v>133</c:v>
+                  <c:v>132.55</c:v>
                 </c:pt>
                 <c:pt idx="7">
-                  <c:v>130</c:v>
+                  <c:v>129.87</c:v>
                 </c:pt>
                 <c:pt idx="8">
-                  <c:v>134</c:v>
+                  <c:v>133.77</c:v>
                 </c:pt>
                 <c:pt idx="9">
                   <c:v/>
@@ -1181,31 +1181,31 @@
                 <c:formatCode>General</c:formatCode>
                 <c:ptCount val="12"/>
                 <c:pt idx="0">
-                  <c:v>126</c:v>
+                  <c:v>125.77</c:v>
                 </c:pt>
                 <c:pt idx="1">
                   <c:v/>
                 </c:pt>
                 <c:pt idx="2">
-                  <c:v>131</c:v>
+                  <c:v>130.61</c:v>
                 </c:pt>
                 <c:pt idx="3">
-                  <c:v>131</c:v>
+                  <c:v>130.85</c:v>
                 </c:pt>
                 <c:pt idx="4">
-                  <c:v>132</c:v>
+                  <c:v>131.64</c:v>
                 </c:pt>
                 <c:pt idx="5">
                   <c:v/>
                 </c:pt>
                 <c:pt idx="6">
-                  <c:v>133</c:v>
+                  <c:v>132.55</c:v>
                 </c:pt>
                 <c:pt idx="7">
-                  <c:v>130</c:v>
+                  <c:v>129.87</c:v>
                 </c:pt>
                 <c:pt idx="8">
-                  <c:v>134</c:v>
+                  <c:v>133.77</c:v>
                 </c:pt>
                 <c:pt idx="9">
                   <c:v/>
@@ -1494,7 +1494,7 @@
                   <c:v/>
                 </c:pt>
                 <c:pt idx="1">
-                  <c:v>124</c:v>
+                  <c:v>124.08</c:v>
                 </c:pt>
                 <c:pt idx="2">
                   <c:v/>
@@ -1506,7 +1506,7 @@
                   <c:v/>
                 </c:pt>
                 <c:pt idx="5">
-                  <c:v>128</c:v>
+                  <c:v>128.34</c:v>
                 </c:pt>
                 <c:pt idx="6">
                   <c:v/>
@@ -1804,7 +1804,7 @@
                   <c:v/>
                 </c:pt>
                 <c:pt idx="1">
-                  <c:v>125</c:v>
+                  <c:v>125.41</c:v>
                 </c:pt>
                 <c:pt idx="2">
                   <c:v/>
@@ -1816,7 +1816,7 @@
                   <c:v/>
                 </c:pt>
                 <c:pt idx="5">
-                  <c:v>129</c:v>
+                  <c:v>128.94</c:v>
                 </c:pt>
                 <c:pt idx="6">
                   <c:v/>
@@ -2111,40 +2111,40 @@
                 <c:formatCode>General</c:formatCode>
                 <c:ptCount val="12"/>
                 <c:pt idx="0">
-                  <c:v>124</c:v>
+                  <c:v>123.77</c:v>
                 </c:pt>
                 <c:pt idx="1">
                   <c:v/>
                 </c:pt>
                 <c:pt idx="2">
-                  <c:v>125</c:v>
+                  <c:v>124.77</c:v>
                 </c:pt>
                 <c:pt idx="3">
-                  <c:v>126</c:v>
+                  <c:v>125.94</c:v>
                 </c:pt>
                 <c:pt idx="4">
-                  <c:v>130</c:v>
+                  <c:v>130.19</c:v>
                 </c:pt>
                 <c:pt idx="5">
                   <c:v/>
                 </c:pt>
                 <c:pt idx="6">
-                  <c:v>126</c:v>
+                  <c:v>125.78</c:v>
                 </c:pt>
                 <c:pt idx="7">
-                  <c:v>126</c:v>
+                  <c:v>125.81</c:v>
                 </c:pt>
                 <c:pt idx="8">
-                  <c:v>124</c:v>
+                  <c:v>124.46</c:v>
                 </c:pt>
                 <c:pt idx="9">
-                  <c:v>126</c:v>
+                  <c:v>125.52</c:v>
                 </c:pt>
                 <c:pt idx="10">
-                  <c:v>126</c:v>
+                  <c:v>125.56</c:v>
                 </c:pt>
                 <c:pt idx="11">
-                  <c:v>130</c:v>
+                  <c:v>130.39</c:v>
                 </c:pt>
               </c:numCache>
             </c:numRef>
@@ -2424,40 +2424,40 @@
                 <c:formatCode>General</c:formatCode>
                 <c:ptCount val="12"/>
                 <c:pt idx="0">
-                  <c:v>124</c:v>
+                  <c:v>123.77</c:v>
                 </c:pt>
                 <c:pt idx="1">
-                  <c:v>125</c:v>
+                  <c:v>125.41</c:v>
                 </c:pt>
                 <c:pt idx="2">
-                  <c:v>125</c:v>
+                  <c:v>124.77</c:v>
                 </c:pt>
                 <c:pt idx="3">
-                  <c:v>126</c:v>
+                  <c:v>125.94</c:v>
                 </c:pt>
                 <c:pt idx="4">
-                  <c:v>130</c:v>
+                  <c:v>130.19</c:v>
                 </c:pt>
                 <c:pt idx="5">
-                  <c:v>129</c:v>
+                  <c:v>128.94</c:v>
                 </c:pt>
                 <c:pt idx="6">
-                  <c:v>126</c:v>
+                  <c:v>125.78</c:v>
                 </c:pt>
                 <c:pt idx="7">
-                  <c:v>126</c:v>
+                  <c:v>125.81</c:v>
                 </c:pt>
                 <c:pt idx="8">
-                  <c:v>124</c:v>
+                  <c:v>124.46</c:v>
                 </c:pt>
                 <c:pt idx="9">
-                  <c:v>126</c:v>
+                  <c:v>125.52</c:v>
                 </c:pt>
                 <c:pt idx="10">
-                  <c:v>126</c:v>
+                  <c:v>125.56</c:v>
                 </c:pt>
                 <c:pt idx="11">
-                  <c:v>130</c:v>
+                  <c:v>130.39</c:v>
                 </c:pt>
               </c:numCache>
             </c:numRef>
@@ -4314,31 +4314,31 @@
                 <c:formatCode>General</c:formatCode>
                 <c:ptCount val="12"/>
                 <c:pt idx="0">
-                  <c:v>196</c:v>
+                  <c:v>196.34</c:v>
                 </c:pt>
                 <c:pt idx="1">
-                  <c:v>198</c:v>
+                  <c:v>197.6</c:v>
                 </c:pt>
                 <c:pt idx="2">
-                  <c:v>197</c:v>
+                  <c:v>196.73</c:v>
                 </c:pt>
                 <c:pt idx="3">
-                  <c:v>199</c:v>
+                  <c:v>199.07</c:v>
                 </c:pt>
                 <c:pt idx="4">
-                  <c:v>194</c:v>
+                  <c:v>194.28</c:v>
                 </c:pt>
                 <c:pt idx="5">
-                  <c:v>194</c:v>
+                  <c:v>194.35</c:v>
                 </c:pt>
                 <c:pt idx="6">
-                  <c:v>199</c:v>
+                  <c:v>198.7</c:v>
                 </c:pt>
                 <c:pt idx="7">
-                  <c:v>198</c:v>
+                  <c:v>198.48</c:v>
                 </c:pt>
                 <c:pt idx="8">
-                  <c:v>199</c:v>
+                  <c:v>198.65</c:v>
                 </c:pt>
                 <c:pt idx="9">
                   <c:v/>
@@ -4615,31 +4615,31 @@
                 <c:formatCode>General</c:formatCode>
                 <c:ptCount val="12"/>
                 <c:pt idx="0">
-                  <c:v>196</c:v>
+                  <c:v>196.34</c:v>
                 </c:pt>
                 <c:pt idx="1">
-                  <c:v>198</c:v>
+                  <c:v>197.6</c:v>
                 </c:pt>
                 <c:pt idx="2">
-                  <c:v>197</c:v>
+                  <c:v>196.73</c:v>
                 </c:pt>
                 <c:pt idx="3">
-                  <c:v>199</c:v>
+                  <c:v>199.07</c:v>
                 </c:pt>
                 <c:pt idx="4">
-                  <c:v>194</c:v>
+                  <c:v>194.28</c:v>
                 </c:pt>
                 <c:pt idx="5">
-                  <c:v>194</c:v>
+                  <c:v>194.35</c:v>
                 </c:pt>
                 <c:pt idx="6">
-                  <c:v>199</c:v>
+                  <c:v>198.7</c:v>
                 </c:pt>
                 <c:pt idx="7">
-                  <c:v>198</c:v>
+                  <c:v>198.48</c:v>
                 </c:pt>
                 <c:pt idx="8">
-                  <c:v>199</c:v>
+                  <c:v>198.65</c:v>
                 </c:pt>
                 <c:pt idx="9">
                   <c:v/>
@@ -4925,40 +4925,40 @@
                 <c:formatCode>General</c:formatCode>
                 <c:ptCount val="12"/>
                 <c:pt idx="0">
-                  <c:v>175</c:v>
+                  <c:v>175.24</c:v>
                 </c:pt>
                 <c:pt idx="1">
-                  <c:v>175</c:v>
+                  <c:v>174.7</c:v>
                 </c:pt>
                 <c:pt idx="2">
-                  <c:v>173</c:v>
+                  <c:v>172.93</c:v>
                 </c:pt>
                 <c:pt idx="3">
-                  <c:v>176</c:v>
+                  <c:v>175.61</c:v>
                 </c:pt>
                 <c:pt idx="4">
-                  <c:v>182</c:v>
+                  <c:v>181.76</c:v>
                 </c:pt>
                 <c:pt idx="5">
-                  <c:v>185</c:v>
+                  <c:v>185.29</c:v>
                 </c:pt>
                 <c:pt idx="6">
-                  <c:v>187</c:v>
+                  <c:v>186.84</c:v>
                 </c:pt>
                 <c:pt idx="7">
-                  <c:v>186</c:v>
+                  <c:v>186.04</c:v>
                 </c:pt>
                 <c:pt idx="8">
-                  <c:v>187</c:v>
+                  <c:v>186.63</c:v>
                 </c:pt>
                 <c:pt idx="9">
-                  <c:v>188</c:v>
+                  <c:v>187.82</c:v>
                 </c:pt>
                 <c:pt idx="10">
-                  <c:v>189</c:v>
+                  <c:v>188.55</c:v>
                 </c:pt>
                 <c:pt idx="11">
-                  <c:v>193</c:v>
+                  <c:v>193.03</c:v>
                 </c:pt>
               </c:numCache>
             </c:numRef>

--- a/day2-deck/decks/Warranty & Internal - House Style.pptx
+++ b/day2-deck/decks/Warranty & Internal - House Style.pptx
@@ -21531,7 +21531,7 @@
             <a:avLst/>
           </a:prstGeom>
           <a:solidFill>
-            <a:srgbClr val="12A566"/>
+            <a:srgbClr val="2587C5"/>
           </a:solidFill>
           <a:ln/>
         </p:spPr>
@@ -21668,7 +21668,7 @@
             <a:avLst/>
           </a:prstGeom>
           <a:solidFill>
-            <a:srgbClr val="12A566"/>
+            <a:srgbClr val="2587C5"/>
           </a:solidFill>
           <a:ln/>
         </p:spPr>
@@ -21805,7 +21805,7 @@
             <a:avLst/>
           </a:prstGeom>
           <a:solidFill>
-            <a:srgbClr val="12A566"/>
+            <a:srgbClr val="2587C5"/>
           </a:solidFill>
           <a:ln/>
         </p:spPr>
@@ -21942,7 +21942,7 @@
             <a:avLst/>
           </a:prstGeom>
           <a:solidFill>
-            <a:srgbClr val="12A566"/>
+            <a:srgbClr val="2587C5"/>
           </a:solidFill>
           <a:ln/>
         </p:spPr>
@@ -22079,7 +22079,7 @@
             <a:avLst/>
           </a:prstGeom>
           <a:solidFill>
-            <a:srgbClr val="12A566"/>
+            <a:srgbClr val="2587C5"/>
           </a:solidFill>
           <a:ln/>
         </p:spPr>
@@ -22216,7 +22216,7 @@
             <a:avLst/>
           </a:prstGeom>
           <a:solidFill>
-            <a:srgbClr val="12A566"/>
+            <a:srgbClr val="2587C5"/>
           </a:solidFill>
           <a:ln/>
         </p:spPr>
@@ -22353,7 +22353,7 @@
             <a:avLst/>
           </a:prstGeom>
           <a:solidFill>
-            <a:srgbClr val="12A566"/>
+            <a:srgbClr val="2587C5"/>
           </a:solidFill>
           <a:ln/>
         </p:spPr>
@@ -22490,7 +22490,7 @@
             <a:avLst/>
           </a:prstGeom>
           <a:solidFill>
-            <a:srgbClr val="12A566"/>
+            <a:srgbClr val="2587C5"/>
           </a:solidFill>
           <a:ln/>
         </p:spPr>
@@ -22627,7 +22627,7 @@
             <a:avLst/>
           </a:prstGeom>
           <a:solidFill>
-            <a:srgbClr val="12A566"/>
+            <a:srgbClr val="2587C5"/>
           </a:solidFill>
           <a:ln/>
         </p:spPr>
@@ -22764,7 +22764,7 @@
             <a:avLst/>
           </a:prstGeom>
           <a:solidFill>
-            <a:srgbClr val="12A566"/>
+            <a:srgbClr val="2587C5"/>
           </a:solidFill>
           <a:ln/>
         </p:spPr>
@@ -22901,7 +22901,7 @@
             <a:avLst/>
           </a:prstGeom>
           <a:solidFill>
-            <a:srgbClr val="12A566"/>
+            <a:srgbClr val="2587C5"/>
           </a:solidFill>
           <a:ln/>
         </p:spPr>
@@ -23038,7 +23038,7 @@
             <a:avLst/>
           </a:prstGeom>
           <a:solidFill>
-            <a:srgbClr val="12A566"/>
+            <a:srgbClr val="2587C5"/>
           </a:solidFill>
           <a:ln/>
         </p:spPr>
@@ -23175,7 +23175,7 @@
             <a:avLst/>
           </a:prstGeom>
           <a:solidFill>
-            <a:srgbClr val="12A566"/>
+            <a:srgbClr val="2587C5"/>
           </a:solidFill>
           <a:ln/>
         </p:spPr>
@@ -23312,7 +23312,7 @@
             <a:avLst/>
           </a:prstGeom>
           <a:solidFill>
-            <a:srgbClr val="12A566"/>
+            <a:srgbClr val="2587C5"/>
           </a:solidFill>
           <a:ln/>
         </p:spPr>
@@ -23449,7 +23449,7 @@
             <a:avLst/>
           </a:prstGeom>
           <a:solidFill>
-            <a:srgbClr val="12A566"/>
+            <a:srgbClr val="2587C5"/>
           </a:solidFill>
           <a:ln/>
         </p:spPr>
@@ -23586,7 +23586,7 @@
             <a:avLst/>
           </a:prstGeom>
           <a:solidFill>
-            <a:srgbClr val="12A566"/>
+            <a:srgbClr val="2587C5"/>
           </a:solidFill>
           <a:ln/>
         </p:spPr>
@@ -23723,7 +23723,7 @@
             <a:avLst/>
           </a:prstGeom>
           <a:solidFill>
-            <a:srgbClr val="12A566"/>
+            <a:srgbClr val="2587C5"/>
           </a:solidFill>
           <a:ln/>
         </p:spPr>
@@ -23860,7 +23860,7 @@
             <a:avLst/>
           </a:prstGeom>
           <a:solidFill>
-            <a:srgbClr val="12A566"/>
+            <a:srgbClr val="2587C5"/>
           </a:solidFill>
           <a:ln/>
         </p:spPr>
@@ -23997,7 +23997,7 @@
             <a:avLst/>
           </a:prstGeom>
           <a:solidFill>
-            <a:srgbClr val="12A566"/>
+            <a:srgbClr val="2587C5"/>
           </a:solidFill>
           <a:ln/>
         </p:spPr>
@@ -24134,7 +24134,7 @@
             <a:avLst/>
           </a:prstGeom>
           <a:solidFill>
-            <a:srgbClr val="12A566"/>
+            <a:srgbClr val="2587C5"/>
           </a:solidFill>
           <a:ln/>
         </p:spPr>
@@ -24271,7 +24271,7 @@
             <a:avLst/>
           </a:prstGeom>
           <a:solidFill>
-            <a:srgbClr val="12A566"/>
+            <a:srgbClr val="2587C5"/>
           </a:solidFill>
           <a:ln/>
         </p:spPr>
@@ -24408,7 +24408,7 @@
             <a:avLst/>
           </a:prstGeom>
           <a:solidFill>
-            <a:srgbClr val="12A566"/>
+            <a:srgbClr val="2587C5"/>
           </a:solidFill>
           <a:ln/>
         </p:spPr>
@@ -24545,7 +24545,7 @@
             <a:avLst/>
           </a:prstGeom>
           <a:solidFill>
-            <a:srgbClr val="12A566"/>
+            <a:srgbClr val="2587C5"/>
           </a:solidFill>
           <a:ln/>
         </p:spPr>
@@ -24682,7 +24682,7 @@
             <a:avLst/>
           </a:prstGeom>
           <a:solidFill>
-            <a:srgbClr val="12A566"/>
+            <a:srgbClr val="2587C5"/>
           </a:solidFill>
           <a:ln/>
         </p:spPr>
@@ -24819,7 +24819,7 @@
             <a:avLst/>
           </a:prstGeom>
           <a:solidFill>
-            <a:srgbClr val="12A566"/>
+            <a:srgbClr val="2587C5"/>
           </a:solidFill>
           <a:ln/>
         </p:spPr>
@@ -24956,7 +24956,7 @@
             <a:avLst/>
           </a:prstGeom>
           <a:solidFill>
-            <a:srgbClr val="12A566"/>
+            <a:srgbClr val="2587C5"/>
           </a:solidFill>
           <a:ln/>
         </p:spPr>
@@ -25093,7 +25093,7 @@
             <a:avLst/>
           </a:prstGeom>
           <a:solidFill>
-            <a:srgbClr val="12A566"/>
+            <a:srgbClr val="2587C5"/>
           </a:solidFill>
           <a:ln/>
         </p:spPr>
@@ -25230,7 +25230,7 @@
             <a:avLst/>
           </a:prstGeom>
           <a:solidFill>
-            <a:srgbClr val="12A566"/>
+            <a:srgbClr val="2587C5"/>
           </a:solidFill>
           <a:ln/>
         </p:spPr>
@@ -25367,7 +25367,7 @@
             <a:avLst/>
           </a:prstGeom>
           <a:solidFill>
-            <a:srgbClr val="12A566"/>
+            <a:srgbClr val="2587C5"/>
           </a:solidFill>
           <a:ln/>
         </p:spPr>
@@ -25504,7 +25504,7 @@
             <a:avLst/>
           </a:prstGeom>
           <a:solidFill>
-            <a:srgbClr val="12A566"/>
+            <a:srgbClr val="2587C5"/>
           </a:solidFill>
           <a:ln/>
         </p:spPr>
@@ -25641,7 +25641,7 @@
             <a:avLst/>
           </a:prstGeom>
           <a:solidFill>
-            <a:srgbClr val="12A566"/>
+            <a:srgbClr val="2587C5"/>
           </a:solidFill>
           <a:ln/>
         </p:spPr>
@@ -25778,7 +25778,7 @@
             <a:avLst/>
           </a:prstGeom>
           <a:solidFill>
-            <a:srgbClr val="12A566"/>
+            <a:srgbClr val="2587C5"/>
           </a:solidFill>
           <a:ln/>
         </p:spPr>
@@ -25915,7 +25915,7 @@
             <a:avLst/>
           </a:prstGeom>
           <a:solidFill>
-            <a:srgbClr val="12A566"/>
+            <a:srgbClr val="2587C5"/>
           </a:solidFill>
           <a:ln/>
         </p:spPr>

--- a/day2-deck/decks/Warranty & Internal - House Style.pptx
+++ b/day2-deck/decks/Warranty & Internal - House Style.pptx
@@ -7132,7 +7132,7 @@
                 <a:ea typeface="Inter" pitchFamily="34" charset="-122"/>
                 <a:cs typeface="Inter" pitchFamily="34" charset="-120"/>
               </a:rPr>
-              <a:t>LABOR MIX</a:t>
+              <a:t>INTERNAL</a:t>
             </a:r>
             <a:endParaRPr lang="en-US" sz="1400" dirty="0"/>
           </a:p>
@@ -7986,7 +7986,7 @@
                 <a:ea typeface="Inter" pitchFamily="34" charset="-122"/>
                 <a:cs typeface="Inter" pitchFamily="34" charset="-120"/>
               </a:rPr>
-              <a:t>LABOR MIX</a:t>
+              <a:t>INTERNAL</a:t>
             </a:r>
             <a:endParaRPr lang="en-US" sz="1400" dirty="0"/>
           </a:p>
@@ -12933,7 +12933,7 @@
                 <a:ea typeface="Inter" pitchFamily="34" charset="-122"/>
                 <a:cs typeface="Inter" pitchFamily="34" charset="-120"/>
               </a:rPr>
-              <a:t>LABOR MIX</a:t>
+              <a:t>INTERNAL</a:t>
             </a:r>
             <a:endParaRPr lang="en-US" sz="1400" dirty="0"/>
           </a:p>
@@ -17880,7 +17880,7 @@
                 <a:ea typeface="Inter" pitchFamily="34" charset="-122"/>
                 <a:cs typeface="Inter" pitchFamily="34" charset="-120"/>
               </a:rPr>
-              <a:t>LABOR MIX</a:t>
+              <a:t>INTERNAL</a:t>
             </a:r>
             <a:endParaRPr lang="en-US" sz="1400" dirty="0"/>
           </a:p>

--- a/day2-deck/decks/Warranty & Internal - House Style.pptx
+++ b/day2-deck/decks/Warranty & Internal - House Style.pptx
@@ -368,6 +368,17 @@
         </c:scaling>
         <c:delete val="0"/>
         <c:axPos val="l"/>
+        <c:majorGridlines>
+          <c:spPr>
+            <a:ln w="9525" cap="flat">
+              <a:solidFill>
+                <a:srgbClr val="D9D9D9"/>
+              </a:solidFill>
+              <a:prstDash val="solid"/>
+              <a:round/>
+            </a:ln>
+          </c:spPr>
+        </c:majorGridlines>
         <c:numFmt formatCode="#,##0" sourceLinked="0"/>
         <c:majorTickMark val="out"/>
         <c:minorTickMark val="none"/>
@@ -424,6 +435,316 @@
 </file>
 
 <file path=ppt/charts/chart10.xml><?xml version="1.0" encoding="utf-8"?>
+<c:chartSpace xmlns:c="http://schemas.openxmlformats.org/drawingml/2006/chart" xmlns:a="http://schemas.openxmlformats.org/drawingml/2006/main" xmlns:r="http://schemas.openxmlformats.org/officeDocument/2006/relationships">
+  <c:date1904 val="0"/>
+  <c:roundedCorners val="1"/>
+  <c:chart>
+    <c:autoTitleDeleted val="1"/>
+    <c:plotArea>
+      <c:layout/>
+      <c:lineChart>
+        <c:varyColors val="0"/>
+        <c:ser>
+          <c:idx val="0"/>
+          <c:order val="0"/>
+          <c:tx>
+            <c:strRef>
+              <c:f>Sheet1!$B$1</c:f>
+              <c:strCache>
+                <c:ptCount val="1"/>
+                <c:pt idx="0">
+                  <c:v>2025</c:v>
+                </c:pt>
+              </c:strCache>
+            </c:strRef>
+          </c:tx>
+          <c:spPr>
+            <a:solidFill>
+              <a:srgbClr val="9AA3AD"/>
+            </a:solidFill>
+            <a:ln>
+              <a:noFill/>
+            </a:ln>
+            <a:effectLst/>
+          </c:spPr>
+          <c:invertIfNegative val="0"/>
+          <c:dLbls>
+            <c:numFmt formatCode="&quot;$&quot;#,##0.00" sourceLinked="0"/>
+            <c:txPr>
+              <a:bodyPr/>
+              <a:lstStyle/>
+              <a:p>
+                <a:pPr>
+                  <a:defRPr b="0" i="0" strike="noStrike" sz="1400" u="none">
+                    <a:solidFill>
+                      <a:srgbClr val="1A1A1A"/>
+                    </a:solidFill>
+                    <a:latin typeface="+mn-lt"/>
+                  </a:defRPr>
+                </a:pPr>
+              </a:p>
+            </c:txPr>
+            <c:dLblPos val="b"/>
+            <c:showLegendKey val="0"/>
+            <c:showVal val="1"/>
+            <c:showCatName val="0"/>
+            <c:showSerName val="0"/>
+            <c:showPercent val="0"/>
+            <c:showBubbleSize val="0"/>
+            <c:showLeaderLines val="0"/>
+          </c:dLbls>
+          <c:marker>
+            <c:symbol val="none"/>
+            <c:size val="8"/>
+            <c:spPr>
+              <a:solidFill>
+                <a:srgbClr val="9AA3AD"/>
+              </a:solidFill>
+              <a:ln w="9525" cap="flat">
+                <a:solidFill>
+                  <a:srgbClr val="9AA3AD"/>
+                </a:solidFill>
+                <a:prstDash val="solid"/>
+                <a:round/>
+              </a:ln>
+              <a:effectLst/>
+            </c:spPr>
+          </c:marker>
+          <c:cat>
+            <c:multiLvlStrRef>
+              <c:f>Sheet1!$A$2:$A$13</c:f>
+              <c:multiLvlStrCache>
+                <c:ptCount val="12"/>
+                <c:lvl>
+                  <c:pt idx="0">
+                    <c:v>Jan</c:v>
+                  </c:pt>
+                  <c:pt idx="1">
+                    <c:v>Feb</c:v>
+                  </c:pt>
+                  <c:pt idx="2">
+                    <c:v>Mar</c:v>
+                  </c:pt>
+                  <c:pt idx="3">
+                    <c:v>Apr</c:v>
+                  </c:pt>
+                  <c:pt idx="4">
+                    <c:v>May</c:v>
+                  </c:pt>
+                  <c:pt idx="5">
+                    <c:v>Jun</c:v>
+                  </c:pt>
+                  <c:pt idx="6">
+                    <c:v>Jul</c:v>
+                  </c:pt>
+                  <c:pt idx="7">
+                    <c:v>Aug</c:v>
+                  </c:pt>
+                  <c:pt idx="8">
+                    <c:v>Sep</c:v>
+                  </c:pt>
+                  <c:pt idx="9">
+                    <c:v>Oct</c:v>
+                  </c:pt>
+                  <c:pt idx="10">
+                    <c:v>Nov</c:v>
+                  </c:pt>
+                  <c:pt idx="11">
+                    <c:v>Dec</c:v>
+                  </c:pt>
+                </c:lvl>
+              </c:multiLvlStrCache>
+            </c:multiLvlStrRef>
+          </c:cat>
+          <c:val>
+            <c:numRef>
+              <c:f>Sheet1!$B$2:$B$13</c:f>
+              <c:numCache>
+                <c:formatCode>General</c:formatCode>
+                <c:ptCount val="12"/>
+                <c:pt idx="0">
+                  <c:v>175.24</c:v>
+                </c:pt>
+                <c:pt idx="1">
+                  <c:v>174.7</c:v>
+                </c:pt>
+                <c:pt idx="2">
+                  <c:v>172.93</c:v>
+                </c:pt>
+                <c:pt idx="3">
+                  <c:v>175.61</c:v>
+                </c:pt>
+                <c:pt idx="4">
+                  <c:v>181.76</c:v>
+                </c:pt>
+                <c:pt idx="5">
+                  <c:v>185.29</c:v>
+                </c:pt>
+                <c:pt idx="6">
+                  <c:v>186.84</c:v>
+                </c:pt>
+                <c:pt idx="7">
+                  <c:v>186.04</c:v>
+                </c:pt>
+                <c:pt idx="8">
+                  <c:v>186.63</c:v>
+                </c:pt>
+                <c:pt idx="9">
+                  <c:v/>
+                </c:pt>
+                <c:pt idx="10">
+                  <c:v>188.55</c:v>
+                </c:pt>
+                <c:pt idx="11">
+                  <c:v/>
+                </c:pt>
+              </c:numCache>
+            </c:numRef>
+          </c:val>
+          <c:smooth val="0"/>
+        </c:ser>
+        <c:dLbls>
+          <c:numFmt formatCode="&quot;$&quot;#,##0.00" sourceLinked="0"/>
+          <c:txPr>
+            <a:bodyPr/>
+            <a:lstStyle/>
+            <a:p>
+              <a:pPr>
+                <a:defRPr b="0" i="0" strike="noStrike" sz="1400" u="none">
+                  <a:solidFill>
+                    <a:srgbClr val="1A1A1A"/>
+                  </a:solidFill>
+                  <a:latin typeface="+mn-lt"/>
+                </a:defRPr>
+              </a:pPr>
+            </a:p>
+          </c:txPr>
+          <c:dLblPos val="b"/>
+          <c:showLegendKey val="0"/>
+          <c:showVal val="1"/>
+          <c:showCatName val="0"/>
+          <c:showSerName val="0"/>
+          <c:showPercent val="0"/>
+          <c:showBubbleSize val="0"/>
+          <c:showLeaderLines val="0"/>
+        </c:dLbls>
+        <c:marker val="1"/>
+        <c:axId val="2094734554"/>
+        <c:axId val="2094734552"/>
+        <c:axId val="2094734556"/>
+      </c:lineChart>
+      <c:catAx>
+        <c:axId val="2094734554"/>
+        <c:scaling>
+          <c:orientation val="minMax"/>
+        </c:scaling>
+        <c:delete val="0"/>
+        <c:axPos val="b"/>
+        <c:numFmt formatCode="General" sourceLinked="1"/>
+        <c:majorTickMark val="out"/>
+        <c:minorTickMark val="none"/>
+        <c:tickLblPos val="low"/>
+        <c:spPr>
+          <a:ln w="12700" cap="flat">
+            <a:noFill/>
+            <a:prstDash val="solid"/>
+            <a:round/>
+          </a:ln>
+        </c:spPr>
+        <c:txPr>
+          <a:bodyPr/>
+          <a:lstStyle/>
+          <a:p>
+            <a:pPr>
+              <a:defRPr sz="1400" b="0" i="0" u="none" strike="noStrike">
+                <a:solidFill>
+                  <a:srgbClr val="FFFFFF"/>
+                </a:solidFill>
+                <a:latin typeface="+mn-lt"/>
+              </a:defRPr>
+            </a:pPr>
+            <a:endParaRPr lang="en-US"/>
+          </a:p>
+        </c:txPr>
+        <c:crossAx val="2094734552"/>
+        <c:crosses val="min"/>
+        <c:auto val="1"/>
+        <c:lblAlgn val="ctr"/>
+        <c:noMultiLvlLbl val="1"/>
+      </c:catAx>
+      <c:valAx>
+        <c:axId val="2094734552"/>
+        <c:scaling>
+          <c:orientation val="minMax"/>
+          <c:max val="210"/>
+          <c:min val="160"/>
+        </c:scaling>
+        <c:delete val="0"/>
+        <c:axPos val="l"/>
+        <c:numFmt formatCode="&quot;$&quot;#,##0" sourceLinked="0"/>
+        <c:majorTickMark val="out"/>
+        <c:minorTickMark val="none"/>
+        <c:tickLblPos val="nextTo"/>
+        <c:spPr>
+          <a:ln w="12700" cap="flat">
+            <a:noFill/>
+            <a:prstDash val="solid"/>
+            <a:round/>
+          </a:ln>
+        </c:spPr>
+        <c:txPr>
+          <a:bodyPr/>
+          <a:lstStyle/>
+          <a:p>
+            <a:pPr>
+              <a:defRPr sz="1400" b="0" i="0" u="none" strike="noStrike">
+                <a:solidFill>
+                  <a:srgbClr val="FFFFFF"/>
+                </a:solidFill>
+                <a:latin typeface="+mn-lt"/>
+              </a:defRPr>
+            </a:pPr>
+            <a:endParaRPr lang="en-US"/>
+          </a:p>
+        </c:txPr>
+        <c:crossAx val="2094734554"/>
+        <c:crosses val="autoZero"/>
+        <c:crossBetween val="between"/>
+        <c:majorUnit val="10"/>
+      </c:valAx>
+      <c:spPr>
+        <a:solidFill>
+          <a:srgbClr val="FFFFFF">
+            <a:alpha val="0"/>
+          </a:srgbClr>
+        </a:solidFill>
+        <a:ln>
+          <a:noFill/>
+        </a:ln>
+        <a:effectLst/>
+      </c:spPr>
+    </c:plotArea>
+    <c:plotVisOnly val="1"/>
+    <c:dispBlanksAs val="span"/>
+  </c:chart>
+  <c:spPr>
+    <a:solidFill>
+      <a:srgbClr val="FFFFFF">
+        <a:alpha val="0"/>
+      </a:srgbClr>
+    </a:solidFill>
+    <a:ln>
+      <a:noFill/>
+    </a:ln>
+    <a:effectLst/>
+  </c:spPr>
+  <c:externalData r:id="rId1">
+    <c:autoUpdate val="0"/>
+  </c:externalData>
+</c:chartSpace>
+</file>
+
+<file path=ppt/charts/chart11.xml><?xml version="1.0" encoding="utf-8"?>
 <c:chartSpace xmlns:c="http://schemas.openxmlformats.org/drawingml/2006/chart" xmlns:a="http://schemas.openxmlformats.org/drawingml/2006/main" xmlns:r="http://schemas.openxmlformats.org/officeDocument/2006/relationships">
   <c:date1904 val="0"/>
   <c:roundedCorners val="1"/>
@@ -674,17 +995,6 @@
         </c:scaling>
         <c:delete val="0"/>
         <c:axPos val="l"/>
-        <c:majorGridlines>
-          <c:spPr>
-            <a:ln w="9525" cap="flat">
-              <a:solidFill>
-                <a:srgbClr val="D9D9D9"/>
-              </a:solidFill>
-              <a:prstDash val="solid"/>
-              <a:round/>
-            </a:ln>
-          </c:spPr>
-        </c:majorGridlines>
         <c:numFmt formatCode="&quot;$&quot;#,##0" sourceLinked="0"/>
         <c:majorTickMark val="out"/>
         <c:minorTickMark val="none"/>
@@ -748,7 +1058,7 @@
 </c:chartSpace>
 </file>
 
-<file path=ppt/charts/chart11.xml><?xml version="1.0" encoding="utf-8"?>
+<file path=ppt/charts/chart12.xml><?xml version="1.0" encoding="utf-8"?>
 <c:chartSpace xmlns:c="http://schemas.openxmlformats.org/drawingml/2006/chart" xmlns:a="http://schemas.openxmlformats.org/drawingml/2006/main" xmlns:r="http://schemas.openxmlformats.org/officeDocument/2006/relationships">
   <c:date1904 val="0"/>
   <c:roundedCorners val="1"/>
@@ -997,6 +1307,17 @@
         </c:scaling>
         <c:delete val="0"/>
         <c:axPos val="l"/>
+        <c:majorGridlines>
+          <c:spPr>
+            <a:ln w="9525" cap="flat">
+              <a:solidFill>
+                <a:srgbClr val="D9D9D9"/>
+              </a:solidFill>
+              <a:prstDash val="solid"/>
+              <a:round/>
+            </a:ln>
+          </c:spPr>
+        </c:majorGridlines>
         <c:numFmt formatCode="&quot;$&quot;#,##0" sourceLinked="0"/>
         <c:majorTickMark val="out"/>
         <c:minorTickMark val="none"/>
@@ -1052,7 +1373,7 @@
 </c:chartSpace>
 </file>
 
-<file path=ppt/charts/chart12.xml><?xml version="1.0" encoding="utf-8"?>
+<file path=ppt/charts/chart13.xml><?xml version="1.0" encoding="utf-8"?>
 <c:chartSpace xmlns:c="http://schemas.openxmlformats.org/drawingml/2006/chart" xmlns:a="http://schemas.openxmlformats.org/drawingml/2006/main" xmlns:r="http://schemas.openxmlformats.org/officeDocument/2006/relationships">
   <c:date1904 val="0"/>
   <c:roundedCorners val="1"/>
@@ -1362,7 +1683,7 @@
 </c:chartSpace>
 </file>
 
-<file path=ppt/charts/chart13.xml><?xml version="1.0" encoding="utf-8"?>
+<file path=ppt/charts/chart14.xml><?xml version="1.0" encoding="utf-8"?>
 <c:chartSpace xmlns:c="http://schemas.openxmlformats.org/drawingml/2006/chart" xmlns:a="http://schemas.openxmlformats.org/drawingml/2006/main" xmlns:r="http://schemas.openxmlformats.org/officeDocument/2006/relationships">
   <c:date1904 val="0"/>
   <c:roundedCorners val="1"/>
@@ -1672,7 +1993,7 @@
 </c:chartSpace>
 </file>
 
-<file path=ppt/charts/chart14.xml><?xml version="1.0" encoding="utf-8"?>
+<file path=ppt/charts/chart15.xml><?xml version="1.0" encoding="utf-8"?>
 <c:chartSpace xmlns:c="http://schemas.openxmlformats.org/drawingml/2006/chart" xmlns:a="http://schemas.openxmlformats.org/drawingml/2006/main" xmlns:r="http://schemas.openxmlformats.org/officeDocument/2006/relationships">
   <c:date1904 val="0"/>
   <c:roundedCorners val="1"/>
@@ -1828,13 +2149,13 @@
                   <c:v/>
                 </c:pt>
                 <c:pt idx="9">
-                  <c:v/>
+                  <c:v>125.52</c:v>
                 </c:pt>
                 <c:pt idx="10">
                   <c:v/>
                 </c:pt>
                 <c:pt idx="11">
-                  <c:v/>
+                  <c:v>130.39</c:v>
                 </c:pt>
               </c:numCache>
             </c:numRef>
@@ -1982,7 +2303,7 @@
 </c:chartSpace>
 </file>
 
-<file path=ppt/charts/chart15.xml><?xml version="1.0" encoding="utf-8"?>
+<file path=ppt/charts/chart16.xml><?xml version="1.0" encoding="utf-8"?>
 <c:chartSpace xmlns:c="http://schemas.openxmlformats.org/drawingml/2006/chart" xmlns:a="http://schemas.openxmlformats.org/drawingml/2006/main" xmlns:r="http://schemas.openxmlformats.org/officeDocument/2006/relationships">
   <c:date1904 val="0"/>
   <c:roundedCorners val="1"/>
@@ -2138,13 +2459,13 @@
                   <c:v>124.46</c:v>
                 </c:pt>
                 <c:pt idx="9">
-                  <c:v>125.52</c:v>
+                  <c:v/>
                 </c:pt>
                 <c:pt idx="10">
                   <c:v>125.56</c:v>
                 </c:pt>
                 <c:pt idx="11">
-                  <c:v>130.39</c:v>
+                  <c:v/>
                 </c:pt>
               </c:numCache>
             </c:numRef>
@@ -2292,7 +2613,7 @@
 </c:chartSpace>
 </file>
 
-<file path=ppt/charts/chart16.xml><?xml version="1.0" encoding="utf-8"?>
+<file path=ppt/charts/chart17.xml><?xml version="1.0" encoding="utf-8"?>
 <c:chartSpace xmlns:c="http://schemas.openxmlformats.org/drawingml/2006/chart" xmlns:a="http://schemas.openxmlformats.org/drawingml/2006/main" xmlns:r="http://schemas.openxmlformats.org/officeDocument/2006/relationships">
   <c:date1904 val="0"/>
   <c:roundedCorners val="1"/>
@@ -2543,17 +2864,6 @@
         </c:scaling>
         <c:delete val="0"/>
         <c:axPos val="l"/>
-        <c:majorGridlines>
-          <c:spPr>
-            <a:ln w="9525" cap="flat">
-              <a:solidFill>
-                <a:srgbClr val="D9D9D9"/>
-              </a:solidFill>
-              <a:prstDash val="solid"/>
-              <a:round/>
-            </a:ln>
-          </c:spPr>
-        </c:majorGridlines>
         <c:numFmt formatCode="&quot;$&quot;#,##0" sourceLinked="0"/>
         <c:majorTickMark val="out"/>
         <c:minorTickMark val="none"/>
@@ -3396,7 +3706,7 @@
                   <c:v>14227</c:v>
                 </c:pt>
                 <c:pt idx="10">
-                  <c:v>12951</c:v>
+                  <c:v/>
                 </c:pt>
                 <c:pt idx="11">
                   <c:v>14223</c:v>
@@ -3706,7 +4016,7 @@
                   <c:v/>
                 </c:pt>
                 <c:pt idx="10">
-                  <c:v/>
+                  <c:v>12951</c:v>
                 </c:pt>
                 <c:pt idx="11">
                   <c:v/>
@@ -4108,17 +4418,6 @@
         </c:scaling>
         <c:delete val="0"/>
         <c:axPos val="l"/>
-        <c:majorGridlines>
-          <c:spPr>
-            <a:ln w="9525" cap="flat">
-              <a:solidFill>
-                <a:srgbClr val="D9D9D9"/>
-              </a:solidFill>
-              <a:prstDash val="solid"/>
-              <a:round/>
-            </a:ln>
-          </c:spPr>
-        </c:majorGridlines>
         <c:numFmt formatCode="#,##0" sourceLinked="0"/>
         <c:majorTickMark val="out"/>
         <c:minorTickMark val="none"/>
@@ -4431,6 +4730,17 @@
         </c:scaling>
         <c:delete val="0"/>
         <c:axPos val="l"/>
+        <c:majorGridlines>
+          <c:spPr>
+            <a:ln w="9525" cap="flat">
+              <a:solidFill>
+                <a:srgbClr val="D9D9D9"/>
+              </a:solidFill>
+              <a:prstDash val="solid"/>
+              <a:round/>
+            </a:ln>
+          </c:spPr>
+        </c:majorGridlines>
         <c:numFmt formatCode="&quot;$&quot;#,##0" sourceLinked="0"/>
         <c:majorTickMark val="out"/>
         <c:minorTickMark val="none"/>
@@ -4846,7 +5156,7 @@
                 </a:pPr>
               </a:p>
             </c:txPr>
-            <c:dLblPos val="b"/>
+            <c:dLblPos val="t"/>
             <c:showLegendKey val="0"/>
             <c:showVal val="1"/>
             <c:showCatName val="0"/>
@@ -4925,37 +5235,37 @@
                 <c:formatCode>General</c:formatCode>
                 <c:ptCount val="12"/>
                 <c:pt idx="0">
-                  <c:v>175.24</c:v>
+                  <c:v/>
                 </c:pt>
                 <c:pt idx="1">
-                  <c:v>174.7</c:v>
+                  <c:v/>
                 </c:pt>
                 <c:pt idx="2">
-                  <c:v>172.93</c:v>
+                  <c:v/>
                 </c:pt>
                 <c:pt idx="3">
-                  <c:v>175.61</c:v>
+                  <c:v/>
                 </c:pt>
                 <c:pt idx="4">
-                  <c:v>181.76</c:v>
+                  <c:v/>
                 </c:pt>
                 <c:pt idx="5">
-                  <c:v>185.29</c:v>
+                  <c:v/>
                 </c:pt>
                 <c:pt idx="6">
-                  <c:v>186.84</c:v>
+                  <c:v/>
                 </c:pt>
                 <c:pt idx="7">
-                  <c:v>186.04</c:v>
+                  <c:v/>
                 </c:pt>
                 <c:pt idx="8">
-                  <c:v>186.63</c:v>
+                  <c:v/>
                 </c:pt>
                 <c:pt idx="9">
                   <c:v>187.82</c:v>
                 </c:pt>
                 <c:pt idx="10">
-                  <c:v>188.55</c:v>
+                  <c:v/>
                 </c:pt>
                 <c:pt idx="11">
                   <c:v>193.03</c:v>
@@ -4981,7 +5291,7 @@
               </a:pPr>
             </a:p>
           </c:txPr>
-          <c:dLblPos val="b"/>
+          <c:dLblPos val="t"/>
           <c:showLegendKey val="0"/>
           <c:showVal val="1"/>
           <c:showCatName val="0"/>
@@ -5765,7 +6075,7 @@
           <a:p>
             <a:r>
               <a:rPr lang="en-US" dirty="0"/>
-              <a:t>Source: Qlik - Closed Repair Orders. Jan-Sep by close month. Same-store, INEOS excluded (opened 2026). GMC Prescott body shop labor types excluded. Change in Internal ELR, Jan-Sep 2026 vs 2025, best first.</a:t>
+              <a:t>Source: Qlik - Closed Repair Orders. Jan-Sep by close month. Same-store, INEOS excluded (opened 2026). GMC Prescott body shop labor types excluded. Change in Internal ELR, Jan-Sep 2026 vs 2025, best first. Ranked by percent change; the change in the measure's own unit alongside.</a:t>
             </a:r>
             <a:endParaRPr lang="en-US" dirty="0"/>
           </a:p>
@@ -5853,7 +6163,7 @@
           <a:p>
             <a:r>
               <a:rPr lang="en-US" dirty="0"/>
-              <a:t>Source: Qlik - Closed Repair Orders. Jan-Sep by close month. Same-store, INEOS excluded (opened 2026). GMC Prescott body shop labor types excluded. Internal labor sale / internal sold hours. A higher internal rate adds service gross but is a cost to used cars. Top and bottom five stores by change in Internal ELR, Jan-Sep 2026 vs 2025. Moving now: Jul-Sep 2026 vs Jan-Mar 2026, each store against itself; the group moved +$5.20 on the same basis, so part of every store's change is seasonal.Conversation starter: each top store says one thing they started doing; each bottom store says what got in the way and what they would try. The room trades ideas. Moving now: ask the top three what they started this year.</a:t>
+              <a:t>Source: Qlik - Closed Repair Orders. Jan-Sep by close month. Same-store, INEOS excluded (opened 2026). GMC Prescott body shop labor types excluded. Internal labor sale / internal sold hours. A higher internal rate adds service gross but is a cost to used cars. Top and bottom five stores by change in Internal ELR, Jan-Sep 2026 vs 2025. Moving now: Jul-Sep 2026 vs Jan-Mar 2026, each store against itself; the group moved +4.1% on the same basis, so part of every store's change is seasonal.Conversation starter: each top store says one thing they started doing; each bottom store says what got in the way and what they would try. The room trades ideas. Moving now: ask the top three what they started this year.</a:t>
             </a:r>
             <a:endParaRPr lang="en-US" dirty="0"/>
           </a:p>
@@ -8202,7 +8512,7 @@
                 <a:ea typeface="Inter" pitchFamily="34" charset="-122"/>
                 <a:cs typeface="Inter" pitchFamily="34" charset="-120"/>
               </a:rPr>
-              <a:t>$129.84</a:t>
+              <a:t>$130</a:t>
             </a:r>
             <a:endParaRPr lang="en-US" sz="2000" dirty="0"/>
           </a:p>
@@ -8339,7 +8649,7 @@
                 <a:ea typeface="Inter" pitchFamily="34" charset="-122"/>
                 <a:cs typeface="Inter" pitchFamily="34" charset="-120"/>
               </a:rPr>
-              <a:t>$207.05</a:t>
+              <a:t>$207</a:t>
             </a:r>
             <a:endParaRPr lang="en-US" sz="1200" dirty="0"/>
           </a:p>
@@ -8476,7 +8786,7 @@
                 <a:ea typeface="Inter" pitchFamily="34" charset="-122"/>
                 <a:cs typeface="Inter" pitchFamily="34" charset="-120"/>
               </a:rPr>
-              <a:t>$205.15</a:t>
+              <a:t>$205</a:t>
             </a:r>
             <a:endParaRPr lang="en-US" sz="1200" dirty="0"/>
           </a:p>
@@ -8613,7 +8923,7 @@
                 <a:ea typeface="Inter" pitchFamily="34" charset="-122"/>
                 <a:cs typeface="Inter" pitchFamily="34" charset="-120"/>
               </a:rPr>
-              <a:t>$187.89</a:t>
+              <a:t>$188</a:t>
             </a:r>
             <a:endParaRPr lang="en-US" sz="1200" dirty="0"/>
           </a:p>
@@ -8750,7 +9060,7 @@
                 <a:ea typeface="Inter" pitchFamily="34" charset="-122"/>
                 <a:cs typeface="Inter" pitchFamily="34" charset="-120"/>
               </a:rPr>
-              <a:t>$176.36</a:t>
+              <a:t>$176</a:t>
             </a:r>
             <a:endParaRPr lang="en-US" sz="1200" dirty="0"/>
           </a:p>
@@ -8887,7 +9197,7 @@
                 <a:ea typeface="Inter" pitchFamily="34" charset="-122"/>
                 <a:cs typeface="Inter" pitchFamily="34" charset="-120"/>
               </a:rPr>
-              <a:t>$173.41</a:t>
+              <a:t>$173</a:t>
             </a:r>
             <a:endParaRPr lang="en-US" sz="1200" dirty="0"/>
           </a:p>
@@ -9024,7 +9334,7 @@
                 <a:ea typeface="Inter" pitchFamily="34" charset="-122"/>
                 <a:cs typeface="Inter" pitchFamily="34" charset="-120"/>
               </a:rPr>
-              <a:t>$166.97</a:t>
+              <a:t>$167</a:t>
             </a:r>
             <a:endParaRPr lang="en-US" sz="1200" dirty="0"/>
           </a:p>
@@ -9161,7 +9471,7 @@
                 <a:ea typeface="Inter" pitchFamily="34" charset="-122"/>
                 <a:cs typeface="Inter" pitchFamily="34" charset="-120"/>
               </a:rPr>
-              <a:t>$165.81</a:t>
+              <a:t>$166</a:t>
             </a:r>
             <a:endParaRPr lang="en-US" sz="1200" dirty="0"/>
           </a:p>
@@ -9298,7 +9608,7 @@
                 <a:ea typeface="Inter" pitchFamily="34" charset="-122"/>
                 <a:cs typeface="Inter" pitchFamily="34" charset="-120"/>
               </a:rPr>
-              <a:t>$163.35</a:t>
+              <a:t>$163</a:t>
             </a:r>
             <a:endParaRPr lang="en-US" sz="1200" dirty="0"/>
           </a:p>
@@ -9435,7 +9745,7 @@
                 <a:ea typeface="Inter" pitchFamily="34" charset="-122"/>
                 <a:cs typeface="Inter" pitchFamily="34" charset="-120"/>
               </a:rPr>
-              <a:t>$162.33</a:t>
+              <a:t>$162</a:t>
             </a:r>
             <a:endParaRPr lang="en-US" sz="1200" dirty="0"/>
           </a:p>
@@ -9572,7 +9882,7 @@
                 <a:ea typeface="Inter" pitchFamily="34" charset="-122"/>
                 <a:cs typeface="Inter" pitchFamily="34" charset="-120"/>
               </a:rPr>
-              <a:t>$158.93</a:t>
+              <a:t>$159</a:t>
             </a:r>
             <a:endParaRPr lang="en-US" sz="1200" dirty="0"/>
           </a:p>
@@ -9709,7 +10019,7 @@
                 <a:ea typeface="Inter" pitchFamily="34" charset="-122"/>
                 <a:cs typeface="Inter" pitchFamily="34" charset="-120"/>
               </a:rPr>
-              <a:t>$154.86</a:t>
+              <a:t>$155</a:t>
             </a:r>
             <a:endParaRPr lang="en-US" sz="1200" dirty="0"/>
           </a:p>
@@ -9846,7 +10156,7 @@
                 <a:ea typeface="Inter" pitchFamily="34" charset="-122"/>
                 <a:cs typeface="Inter" pitchFamily="34" charset="-120"/>
               </a:rPr>
-              <a:t>$151.53</a:t>
+              <a:t>$152</a:t>
             </a:r>
             <a:endParaRPr lang="en-US" sz="1200" dirty="0"/>
           </a:p>
@@ -9983,7 +10293,7 @@
                 <a:ea typeface="Inter" pitchFamily="34" charset="-122"/>
                 <a:cs typeface="Inter" pitchFamily="34" charset="-120"/>
               </a:rPr>
-              <a:t>$146.85</a:t>
+              <a:t>$147</a:t>
             </a:r>
             <a:endParaRPr lang="en-US" sz="1200" dirty="0"/>
           </a:p>
@@ -10120,7 +10430,7 @@
                 <a:ea typeface="Inter" pitchFamily="34" charset="-122"/>
                 <a:cs typeface="Inter" pitchFamily="34" charset="-120"/>
               </a:rPr>
-              <a:t>$146.82</a:t>
+              <a:t>$147</a:t>
             </a:r>
             <a:endParaRPr lang="en-US" sz="1200" dirty="0"/>
           </a:p>
@@ -10257,7 +10567,7 @@
                 <a:ea typeface="Inter" pitchFamily="34" charset="-122"/>
                 <a:cs typeface="Inter" pitchFamily="34" charset="-120"/>
               </a:rPr>
-              <a:t>$141.76</a:t>
+              <a:t>$142</a:t>
             </a:r>
             <a:endParaRPr lang="en-US" sz="1200" dirty="0"/>
           </a:p>
@@ -10394,7 +10704,7 @@
                 <a:ea typeface="Inter" pitchFamily="34" charset="-122"/>
                 <a:cs typeface="Inter" pitchFamily="34" charset="-120"/>
               </a:rPr>
-              <a:t>$139.36</a:t>
+              <a:t>$139</a:t>
             </a:r>
             <a:endParaRPr lang="en-US" sz="1200" dirty="0"/>
           </a:p>
@@ -10531,7 +10841,7 @@
                 <a:ea typeface="Inter" pitchFamily="34" charset="-122"/>
                 <a:cs typeface="Inter" pitchFamily="34" charset="-120"/>
               </a:rPr>
-              <a:t>$137.40</a:t>
+              <a:t>$137</a:t>
             </a:r>
             <a:endParaRPr lang="en-US" sz="1200" dirty="0"/>
           </a:p>
@@ -10668,7 +10978,7 @@
                 <a:ea typeface="Inter" pitchFamily="34" charset="-122"/>
                 <a:cs typeface="Inter" pitchFamily="34" charset="-120"/>
               </a:rPr>
-              <a:t>$137.21</a:t>
+              <a:t>$137</a:t>
             </a:r>
             <a:endParaRPr lang="en-US" sz="1200" dirty="0"/>
           </a:p>
@@ -10805,7 +11115,7 @@
                 <a:ea typeface="Inter" pitchFamily="34" charset="-122"/>
                 <a:cs typeface="Inter" pitchFamily="34" charset="-120"/>
               </a:rPr>
-              <a:t>$136.90</a:t>
+              <a:t>$137</a:t>
             </a:r>
             <a:endParaRPr lang="en-US" sz="1200" dirty="0"/>
           </a:p>
@@ -10942,7 +11252,7 @@
                 <a:ea typeface="Inter" pitchFamily="34" charset="-122"/>
                 <a:cs typeface="Inter" pitchFamily="34" charset="-120"/>
               </a:rPr>
-              <a:t>$134.49</a:t>
+              <a:t>$134</a:t>
             </a:r>
             <a:endParaRPr lang="en-US" sz="1200" dirty="0"/>
           </a:p>
@@ -11079,7 +11389,7 @@
                 <a:ea typeface="Inter" pitchFamily="34" charset="-122"/>
                 <a:cs typeface="Inter" pitchFamily="34" charset="-120"/>
               </a:rPr>
-              <a:t>$134.46</a:t>
+              <a:t>$134</a:t>
             </a:r>
             <a:endParaRPr lang="en-US" sz="1200" dirty="0"/>
           </a:p>
@@ -11216,7 +11526,7 @@
                 <a:ea typeface="Inter" pitchFamily="34" charset="-122"/>
                 <a:cs typeface="Inter" pitchFamily="34" charset="-120"/>
               </a:rPr>
-              <a:t>$128.21</a:t>
+              <a:t>$128</a:t>
             </a:r>
             <a:endParaRPr lang="en-US" sz="1200" dirty="0"/>
           </a:p>
@@ -11353,7 +11663,7 @@
                 <a:ea typeface="Inter" pitchFamily="34" charset="-122"/>
                 <a:cs typeface="Inter" pitchFamily="34" charset="-120"/>
               </a:rPr>
-              <a:t>$127.41</a:t>
+              <a:t>$127</a:t>
             </a:r>
             <a:endParaRPr lang="en-US" sz="1200" dirty="0"/>
           </a:p>
@@ -11490,7 +11800,7 @@
                 <a:ea typeface="Inter" pitchFamily="34" charset="-122"/>
                 <a:cs typeface="Inter" pitchFamily="34" charset="-120"/>
               </a:rPr>
-              <a:t>$124.45</a:t>
+              <a:t>$124</a:t>
             </a:r>
             <a:endParaRPr lang="en-US" sz="1200" dirty="0"/>
           </a:p>
@@ -11627,7 +11937,7 @@
                 <a:ea typeface="Inter" pitchFamily="34" charset="-122"/>
                 <a:cs typeface="Inter" pitchFamily="34" charset="-120"/>
               </a:rPr>
-              <a:t>$122.68</a:t>
+              <a:t>$123</a:t>
             </a:r>
             <a:endParaRPr lang="en-US" sz="1200" dirty="0"/>
           </a:p>
@@ -11764,7 +12074,7 @@
                 <a:ea typeface="Inter" pitchFamily="34" charset="-122"/>
                 <a:cs typeface="Inter" pitchFamily="34" charset="-120"/>
               </a:rPr>
-              <a:t>$119.37</a:t>
+              <a:t>$119</a:t>
             </a:r>
             <a:endParaRPr lang="en-US" sz="1200" dirty="0"/>
           </a:p>
@@ -11901,7 +12211,7 @@
                 <a:ea typeface="Inter" pitchFamily="34" charset="-122"/>
                 <a:cs typeface="Inter" pitchFamily="34" charset="-120"/>
               </a:rPr>
-              <a:t>$117.18</a:t>
+              <a:t>$117</a:t>
             </a:r>
             <a:endParaRPr lang="en-US" sz="1200" dirty="0"/>
           </a:p>
@@ -12038,7 +12348,7 @@
                 <a:ea typeface="Inter" pitchFamily="34" charset="-122"/>
                 <a:cs typeface="Inter" pitchFamily="34" charset="-120"/>
               </a:rPr>
-              <a:t>$114.97</a:t>
+              <a:t>$115</a:t>
             </a:r>
             <a:endParaRPr lang="en-US" sz="1200" dirty="0"/>
           </a:p>
@@ -12175,7 +12485,7 @@
                 <a:ea typeface="Inter" pitchFamily="34" charset="-122"/>
                 <a:cs typeface="Inter" pitchFamily="34" charset="-120"/>
               </a:rPr>
-              <a:t>$109.22</a:t>
+              <a:t>$109</a:t>
             </a:r>
             <a:endParaRPr lang="en-US" sz="1200" dirty="0"/>
           </a:p>
@@ -12312,7 +12622,7 @@
                 <a:ea typeface="Inter" pitchFamily="34" charset="-122"/>
                 <a:cs typeface="Inter" pitchFamily="34" charset="-120"/>
               </a:rPr>
-              <a:t>$104.89</a:t>
+              <a:t>$105</a:t>
             </a:r>
             <a:endParaRPr lang="en-US" sz="1200" dirty="0"/>
           </a:p>
@@ -12449,7 +12759,7 @@
                 <a:ea typeface="Inter" pitchFamily="34" charset="-122"/>
                 <a:cs typeface="Inter" pitchFamily="34" charset="-120"/>
               </a:rPr>
-              <a:t>$102.65</a:t>
+              <a:t>$103</a:t>
             </a:r>
             <a:endParaRPr lang="en-US" sz="1200" dirty="0"/>
           </a:p>
@@ -12586,7 +12896,7 @@
                 <a:ea typeface="Inter" pitchFamily="34" charset="-122"/>
                 <a:cs typeface="Inter" pitchFamily="34" charset="-120"/>
               </a:rPr>
-              <a:t>$99.78</a:t>
+              <a:t>$100</a:t>
             </a:r>
             <a:endParaRPr lang="en-US" sz="1200" dirty="0"/>
           </a:p>
@@ -12723,7 +13033,7 @@
                 <a:ea typeface="Inter" pitchFamily="34" charset="-122"/>
                 <a:cs typeface="Inter" pitchFamily="34" charset="-120"/>
               </a:rPr>
-              <a:t>$87.21</a:t>
+              <a:t>$87</a:t>
             </a:r>
             <a:endParaRPr lang="en-US" sz="1200" dirty="0"/>
           </a:p>
@@ -12798,7 +13108,7 @@
         <p:spPr>
           <a:xfrm>
             <a:off x="457200" y="6126480"/>
-            <a:ext cx="11274552" cy="364236"/>
+            <a:ext cx="11274552" cy="371856"/>
           </a:xfrm>
           <a:prstGeom prst="rect">
             <a:avLst/>
@@ -12818,7 +13128,7 @@
         <p:spPr>
           <a:xfrm>
             <a:off x="658368" y="6144768"/>
-            <a:ext cx="10927080" cy="327660"/>
+            <a:ext cx="10927080" cy="335280"/>
           </a:xfrm>
           <a:prstGeom prst="rect">
             <a:avLst/>
@@ -12834,7 +13144,7 @@
               <a:buNone/>
             </a:pPr>
             <a:r>
-              <a:rPr lang="en-US" sz="1550" b="1" dirty="0">
+              <a:rPr lang="en-US" sz="1600" b="1" dirty="0">
                 <a:solidFill>
                   <a:srgbClr val="0B2C4A"/>
                 </a:solidFill>
@@ -12842,9 +13152,9 @@
                 <a:ea typeface="Inter" pitchFamily="34" charset="-122"/>
                 <a:cs typeface="Inter" pitchFamily="34" charset="-120"/>
               </a:rPr>
-              <a:t>21 of 33 stores at or above the $129.84 group, led by LR Reno at $207.05. Nissan is lowest at $87.21.</a:t>
-            </a:r>
-            <a:endParaRPr lang="en-US" sz="1550" dirty="0"/>
+              <a:t>21 of 33 stores at or above the $130 group, led by LR Reno at $207. Nissan is lowest at $87.</a:t>
+            </a:r>
+            <a:endParaRPr lang="en-US" sz="1600" dirty="0"/>
           </a:p>
         </p:txBody>
       </p:sp>
@@ -13149,7 +13459,7 @@
                 <a:ea typeface="Inter" pitchFamily="34" charset="-122"/>
                 <a:cs typeface="Inter" pitchFamily="34" charset="-120"/>
               </a:rPr>
-              <a:t>+$3.75</a:t>
+              <a:t>+3.0%  ·  +$4</a:t>
             </a:r>
             <a:endParaRPr lang="en-US" sz="2000" dirty="0"/>
           </a:p>
@@ -13163,8 +13473,8 @@
         </p:nvSpPr>
         <p:spPr>
           <a:xfrm>
-            <a:off x="658368" y="1847088"/>
-            <a:ext cx="310896" cy="239896"/>
+            <a:off x="4206240" y="1828800"/>
+            <a:ext cx="777240" cy="256032"/>
           </a:xfrm>
           <a:prstGeom prst="rect">
             <a:avLst/>
@@ -13180,6 +13490,162 @@
               <a:buNone/>
             </a:pPr>
             <a:r>
+              <a:rPr lang="en-US" sz="1400" b="1" dirty="0">
+                <a:solidFill>
+                  <a:srgbClr val="595959"/>
+                </a:solidFill>
+                <a:latin typeface="Inter" pitchFamily="34" charset="0"/>
+                <a:ea typeface="Inter" pitchFamily="34" charset="-122"/>
+                <a:cs typeface="Inter" pitchFamily="34" charset="-120"/>
+              </a:rPr>
+              <a:t>Change</a:t>
+            </a:r>
+            <a:endParaRPr lang="en-US" sz="1400" dirty="0"/>
+          </a:p>
+        </p:txBody>
+      </p:sp>
+      <p:sp>
+        <p:nvSpPr>
+          <p:cNvPr id="12" name="Text 10"/>
+          <p:cNvSpPr txBox="1"/>
+          <p:nvPr/>
+        </p:nvSpPr>
+        <p:spPr>
+          <a:xfrm>
+            <a:off x="4983480" y="1828800"/>
+            <a:ext cx="868680" cy="256032"/>
+          </a:xfrm>
+          <a:prstGeom prst="rect">
+            <a:avLst/>
+          </a:prstGeom>
+          <a:noFill/>
+          <a:ln/>
+        </p:spPr>
+        <p:txBody>
+          <a:bodyPr wrap="square" lIns="0" tIns="0" rIns="0" bIns="0" rtlCol="0" anchor="ctr"/>
+          <a:lstStyle/>
+          <a:p>
+            <a:pPr algn="r" indent="0" marL="0">
+              <a:buNone/>
+            </a:pPr>
+            <a:r>
+              <a:rPr lang="en-US" sz="1400" b="1" dirty="0">
+                <a:solidFill>
+                  <a:srgbClr val="595959"/>
+                </a:solidFill>
+                <a:latin typeface="Inter" pitchFamily="34" charset="0"/>
+                <a:ea typeface="Inter" pitchFamily="34" charset="-122"/>
+                <a:cs typeface="Inter" pitchFamily="34" charset="-120"/>
+              </a:rPr>
+              <a:t>$</a:t>
+            </a:r>
+            <a:endParaRPr lang="en-US" sz="1400" dirty="0"/>
+          </a:p>
+        </p:txBody>
+      </p:sp>
+      <p:sp>
+        <p:nvSpPr>
+          <p:cNvPr id="13" name="Text 11"/>
+          <p:cNvSpPr txBox="1"/>
+          <p:nvPr/>
+        </p:nvSpPr>
+        <p:spPr>
+          <a:xfrm>
+            <a:off x="9756648" y="1828800"/>
+            <a:ext cx="777240" cy="256032"/>
+          </a:xfrm>
+          <a:prstGeom prst="rect">
+            <a:avLst/>
+          </a:prstGeom>
+          <a:noFill/>
+          <a:ln/>
+        </p:spPr>
+        <p:txBody>
+          <a:bodyPr wrap="square" lIns="0" tIns="0" rIns="0" bIns="0" rtlCol="0" anchor="ctr"/>
+          <a:lstStyle/>
+          <a:p>
+            <a:pPr algn="r" indent="0" marL="0">
+              <a:buNone/>
+            </a:pPr>
+            <a:r>
+              <a:rPr lang="en-US" sz="1400" b="1" dirty="0">
+                <a:solidFill>
+                  <a:srgbClr val="595959"/>
+                </a:solidFill>
+                <a:latin typeface="Inter" pitchFamily="34" charset="0"/>
+                <a:ea typeface="Inter" pitchFamily="34" charset="-122"/>
+                <a:cs typeface="Inter" pitchFamily="34" charset="-120"/>
+              </a:rPr>
+              <a:t>Change</a:t>
+            </a:r>
+            <a:endParaRPr lang="en-US" sz="1400" dirty="0"/>
+          </a:p>
+        </p:txBody>
+      </p:sp>
+      <p:sp>
+        <p:nvSpPr>
+          <p:cNvPr id="14" name="Text 12"/>
+          <p:cNvSpPr txBox="1"/>
+          <p:nvPr/>
+        </p:nvSpPr>
+        <p:spPr>
+          <a:xfrm>
+            <a:off x="10533888" y="1828800"/>
+            <a:ext cx="868680" cy="256032"/>
+          </a:xfrm>
+          <a:prstGeom prst="rect">
+            <a:avLst/>
+          </a:prstGeom>
+          <a:noFill/>
+          <a:ln/>
+        </p:spPr>
+        <p:txBody>
+          <a:bodyPr wrap="square" lIns="0" tIns="0" rIns="0" bIns="0" rtlCol="0" anchor="ctr"/>
+          <a:lstStyle/>
+          <a:p>
+            <a:pPr algn="r" indent="0" marL="0">
+              <a:buNone/>
+            </a:pPr>
+            <a:r>
+              <a:rPr lang="en-US" sz="1400" b="1" dirty="0">
+                <a:solidFill>
+                  <a:srgbClr val="595959"/>
+                </a:solidFill>
+                <a:latin typeface="Inter" pitchFamily="34" charset="0"/>
+                <a:ea typeface="Inter" pitchFamily="34" charset="-122"/>
+                <a:cs typeface="Inter" pitchFamily="34" charset="-120"/>
+              </a:rPr>
+              <a:t>$</a:t>
+            </a:r>
+            <a:endParaRPr lang="en-US" sz="1400" dirty="0"/>
+          </a:p>
+        </p:txBody>
+      </p:sp>
+      <p:sp>
+        <p:nvSpPr>
+          <p:cNvPr id="15" name="Text 13"/>
+          <p:cNvSpPr txBox="1"/>
+          <p:nvPr/>
+        </p:nvSpPr>
+        <p:spPr>
+          <a:xfrm>
+            <a:off x="658368" y="2121408"/>
+            <a:ext cx="310896" cy="223759"/>
+          </a:xfrm>
+          <a:prstGeom prst="rect">
+            <a:avLst/>
+          </a:prstGeom>
+          <a:noFill/>
+          <a:ln/>
+        </p:spPr>
+        <p:txBody>
+          <a:bodyPr wrap="square" lIns="0" tIns="0" rIns="0" bIns="0" rtlCol="0" anchor="ctr"/>
+          <a:lstStyle/>
+          <a:p>
+            <a:pPr algn="r" indent="0" marL="0">
+              <a:buNone/>
+            </a:pPr>
+            <a:r>
               <a:rPr lang="en-US" sz="1200" dirty="0">
                 <a:solidFill>
                   <a:srgbClr val="9AA3AD"/>
@@ -13196,14 +13662,14 @@
       </p:sp>
       <p:sp>
         <p:nvSpPr>
-          <p:cNvPr id="12" name="Text 10"/>
-          <p:cNvSpPr txBox="1"/>
-          <p:nvPr/>
-        </p:nvSpPr>
-        <p:spPr>
-          <a:xfrm>
-            <a:off x="1014984" y="1847088"/>
-            <a:ext cx="1920240" cy="239896"/>
+          <p:cNvPr id="16" name="Text 14"/>
+          <p:cNvSpPr txBox="1"/>
+          <p:nvPr/>
+        </p:nvSpPr>
+        <p:spPr>
+          <a:xfrm>
+            <a:off x="1014984" y="2121408"/>
+            <a:ext cx="1920240" cy="223759"/>
           </a:xfrm>
           <a:prstGeom prst="rect">
             <a:avLst/>
@@ -13235,14 +13701,14 @@
       </p:sp>
       <p:sp>
         <p:nvSpPr>
-          <p:cNvPr id="13" name="Shape 11"/>
+          <p:cNvPr id="17" name="Shape 15"/>
           <p:cNvSpPr/>
           <p:nvPr/>
         </p:nvSpPr>
         <p:spPr>
           <a:xfrm>
-            <a:off x="3785616" y="1911860"/>
-            <a:ext cx="600830" cy="110352"/>
+            <a:off x="3579876" y="2181823"/>
+            <a:ext cx="571500" cy="102929"/>
           </a:xfrm>
           <a:prstGeom prst="rect">
             <a:avLst/>
@@ -13255,14 +13721,14 @@
       </p:sp>
       <p:sp>
         <p:nvSpPr>
-          <p:cNvPr id="14" name="Text 12"/>
-          <p:cNvSpPr txBox="1"/>
-          <p:nvPr/>
-        </p:nvSpPr>
-        <p:spPr>
-          <a:xfrm>
-            <a:off x="4617720" y="1847088"/>
-            <a:ext cx="1234440" cy="239896"/>
+          <p:cNvPr id="18" name="Text 16"/>
+          <p:cNvSpPr txBox="1"/>
+          <p:nvPr/>
+        </p:nvSpPr>
+        <p:spPr>
+          <a:xfrm>
+            <a:off x="4206240" y="2121408"/>
+            <a:ext cx="777240" cy="223759"/>
           </a:xfrm>
           <a:prstGeom prst="rect">
             <a:avLst/>
@@ -13286,22 +13752,22 @@
                 <a:ea typeface="Inter" pitchFamily="34" charset="-122"/>
                 <a:cs typeface="Inter" pitchFamily="34" charset="-120"/>
               </a:rPr>
-              <a:t>+$46.71</a:t>
-            </a:r>
-            <a:endParaRPr lang="en-US" sz="1200" dirty="0"/>
-          </a:p>
-        </p:txBody>
-      </p:sp>
-      <p:sp>
-        <p:nvSpPr>
-          <p:cNvPr id="15" name="Text 13"/>
-          <p:cNvSpPr txBox="1"/>
-          <p:nvPr/>
-        </p:nvSpPr>
-        <p:spPr>
-          <a:xfrm>
-            <a:off x="658368" y="2086984"/>
-            <a:ext cx="310896" cy="239896"/>
+              <a:t>+29.5%</a:t>
+            </a:r>
+            <a:endParaRPr lang="en-US" sz="1200" dirty="0"/>
+          </a:p>
+        </p:txBody>
+      </p:sp>
+      <p:sp>
+        <p:nvSpPr>
+          <p:cNvPr id="19" name="Text 17"/>
+          <p:cNvSpPr txBox="1"/>
+          <p:nvPr/>
+        </p:nvSpPr>
+        <p:spPr>
+          <a:xfrm>
+            <a:off x="4983480" y="2121408"/>
+            <a:ext cx="868680" cy="223759"/>
           </a:xfrm>
           <a:prstGeom prst="rect">
             <a:avLst/>
@@ -13319,6 +13785,45 @@
             <a:r>
               <a:rPr lang="en-US" sz="1200" dirty="0">
                 <a:solidFill>
+                  <a:srgbClr val="0B7A4A"/>
+                </a:solidFill>
+                <a:latin typeface="Inter" pitchFamily="34" charset="0"/>
+                <a:ea typeface="Inter" pitchFamily="34" charset="-122"/>
+                <a:cs typeface="Inter" pitchFamily="34" charset="-120"/>
+              </a:rPr>
+              <a:t>+$47</a:t>
+            </a:r>
+            <a:endParaRPr lang="en-US" sz="1200" dirty="0"/>
+          </a:p>
+        </p:txBody>
+      </p:sp>
+      <p:sp>
+        <p:nvSpPr>
+          <p:cNvPr id="20" name="Text 18"/>
+          <p:cNvSpPr txBox="1"/>
+          <p:nvPr/>
+        </p:nvSpPr>
+        <p:spPr>
+          <a:xfrm>
+            <a:off x="658368" y="2345167"/>
+            <a:ext cx="310896" cy="223759"/>
+          </a:xfrm>
+          <a:prstGeom prst="rect">
+            <a:avLst/>
+          </a:prstGeom>
+          <a:noFill/>
+          <a:ln/>
+        </p:spPr>
+        <p:txBody>
+          <a:bodyPr wrap="square" lIns="0" tIns="0" rIns="0" bIns="0" rtlCol="0" anchor="ctr"/>
+          <a:lstStyle/>
+          <a:p>
+            <a:pPr algn="r" indent="0" marL="0">
+              <a:buNone/>
+            </a:pPr>
+            <a:r>
+              <a:rPr lang="en-US" sz="1200" dirty="0">
+                <a:solidFill>
                   <a:srgbClr val="9AA3AD"/>
                 </a:solidFill>
                 <a:latin typeface="Inter" pitchFamily="34" charset="0"/>
@@ -13333,14 +13838,14 @@
       </p:sp>
       <p:sp>
         <p:nvSpPr>
-          <p:cNvPr id="16" name="Text 14"/>
-          <p:cNvSpPr txBox="1"/>
-          <p:nvPr/>
-        </p:nvSpPr>
-        <p:spPr>
-          <a:xfrm>
-            <a:off x="1014984" y="2086984"/>
-            <a:ext cx="1920240" cy="239896"/>
+          <p:cNvPr id="21" name="Text 19"/>
+          <p:cNvSpPr txBox="1"/>
+          <p:nvPr/>
+        </p:nvSpPr>
+        <p:spPr>
+          <a:xfrm>
+            <a:off x="1014984" y="2345167"/>
+            <a:ext cx="1920240" cy="223759"/>
           </a:xfrm>
           <a:prstGeom prst="rect">
             <a:avLst/>
@@ -13372,14 +13877,14 @@
       </p:sp>
       <p:sp>
         <p:nvSpPr>
-          <p:cNvPr id="17" name="Shape 15"/>
+          <p:cNvPr id="22" name="Shape 20"/>
           <p:cNvSpPr/>
           <p:nvPr/>
         </p:nvSpPr>
         <p:spPr>
           <a:xfrm>
-            <a:off x="3785616" y="2151755"/>
-            <a:ext cx="509224" cy="110352"/>
+            <a:off x="3579876" y="2405582"/>
+            <a:ext cx="458290" cy="102929"/>
           </a:xfrm>
           <a:prstGeom prst="rect">
             <a:avLst/>
@@ -13392,14 +13897,14 @@
       </p:sp>
       <p:sp>
         <p:nvSpPr>
-          <p:cNvPr id="18" name="Text 16"/>
-          <p:cNvSpPr txBox="1"/>
-          <p:nvPr/>
-        </p:nvSpPr>
-        <p:spPr>
-          <a:xfrm>
-            <a:off x="4617720" y="2086984"/>
-            <a:ext cx="1234440" cy="239896"/>
+          <p:cNvPr id="23" name="Text 21"/>
+          <p:cNvSpPr txBox="1"/>
+          <p:nvPr/>
+        </p:nvSpPr>
+        <p:spPr>
+          <a:xfrm>
+            <a:off x="4206240" y="2345167"/>
+            <a:ext cx="777240" cy="223759"/>
           </a:xfrm>
           <a:prstGeom prst="rect">
             <a:avLst/>
@@ -13423,22 +13928,22 @@
                 <a:ea typeface="Inter" pitchFamily="34" charset="-122"/>
                 <a:cs typeface="Inter" pitchFamily="34" charset="-120"/>
               </a:rPr>
-              <a:t>+$39.59</a:t>
-            </a:r>
-            <a:endParaRPr lang="en-US" sz="1200" dirty="0"/>
-          </a:p>
-        </p:txBody>
-      </p:sp>
-      <p:sp>
-        <p:nvSpPr>
-          <p:cNvPr id="19" name="Text 17"/>
-          <p:cNvSpPr txBox="1"/>
-          <p:nvPr/>
-        </p:nvSpPr>
-        <p:spPr>
-          <a:xfrm>
-            <a:off x="658368" y="2326879"/>
-            <a:ext cx="310896" cy="239896"/>
+              <a:t>+23.6%</a:t>
+            </a:r>
+            <a:endParaRPr lang="en-US" sz="1200" dirty="0"/>
+          </a:p>
+        </p:txBody>
+      </p:sp>
+      <p:sp>
+        <p:nvSpPr>
+          <p:cNvPr id="24" name="Text 22"/>
+          <p:cNvSpPr txBox="1"/>
+          <p:nvPr/>
+        </p:nvSpPr>
+        <p:spPr>
+          <a:xfrm>
+            <a:off x="4983480" y="2345167"/>
+            <a:ext cx="868680" cy="223759"/>
           </a:xfrm>
           <a:prstGeom prst="rect">
             <a:avLst/>
@@ -13456,6 +13961,45 @@
             <a:r>
               <a:rPr lang="en-US" sz="1200" dirty="0">
                 <a:solidFill>
+                  <a:srgbClr val="0B7A4A"/>
+                </a:solidFill>
+                <a:latin typeface="Inter" pitchFamily="34" charset="0"/>
+                <a:ea typeface="Inter" pitchFamily="34" charset="-122"/>
+                <a:cs typeface="Inter" pitchFamily="34" charset="-120"/>
+              </a:rPr>
+              <a:t>+$40</a:t>
+            </a:r>
+            <a:endParaRPr lang="en-US" sz="1200" dirty="0"/>
+          </a:p>
+        </p:txBody>
+      </p:sp>
+      <p:sp>
+        <p:nvSpPr>
+          <p:cNvPr id="25" name="Text 23"/>
+          <p:cNvSpPr txBox="1"/>
+          <p:nvPr/>
+        </p:nvSpPr>
+        <p:spPr>
+          <a:xfrm>
+            <a:off x="658368" y="2568926"/>
+            <a:ext cx="310896" cy="223759"/>
+          </a:xfrm>
+          <a:prstGeom prst="rect">
+            <a:avLst/>
+          </a:prstGeom>
+          <a:noFill/>
+          <a:ln/>
+        </p:spPr>
+        <p:txBody>
+          <a:bodyPr wrap="square" lIns="0" tIns="0" rIns="0" bIns="0" rtlCol="0" anchor="ctr"/>
+          <a:lstStyle/>
+          <a:p>
+            <a:pPr algn="r" indent="0" marL="0">
+              <a:buNone/>
+            </a:pPr>
+            <a:r>
+              <a:rPr lang="en-US" sz="1200" dirty="0">
+                <a:solidFill>
                   <a:srgbClr val="9AA3AD"/>
                 </a:solidFill>
                 <a:latin typeface="Inter" pitchFamily="34" charset="0"/>
@@ -13470,14 +14014,14 @@
       </p:sp>
       <p:sp>
         <p:nvSpPr>
-          <p:cNvPr id="20" name="Text 18"/>
-          <p:cNvSpPr txBox="1"/>
-          <p:nvPr/>
-        </p:nvSpPr>
-        <p:spPr>
-          <a:xfrm>
-            <a:off x="1014984" y="2326879"/>
-            <a:ext cx="1920240" cy="239896"/>
+          <p:cNvPr id="26" name="Text 24"/>
+          <p:cNvSpPr txBox="1"/>
+          <p:nvPr/>
+        </p:nvSpPr>
+        <p:spPr>
+          <a:xfrm>
+            <a:off x="1014984" y="2568926"/>
+            <a:ext cx="1920240" cy="223759"/>
           </a:xfrm>
           <a:prstGeom prst="rect">
             <a:avLst/>
@@ -13509,14 +14053,14 @@
       </p:sp>
       <p:sp>
         <p:nvSpPr>
-          <p:cNvPr id="21" name="Shape 19"/>
+          <p:cNvPr id="27" name="Shape 25"/>
           <p:cNvSpPr/>
           <p:nvPr/>
         </p:nvSpPr>
         <p:spPr>
           <a:xfrm>
-            <a:off x="3785616" y="2391651"/>
-            <a:ext cx="348786" cy="110352"/>
+            <a:off x="3579876" y="2629341"/>
+            <a:ext cx="378989" cy="102929"/>
           </a:xfrm>
           <a:prstGeom prst="rect">
             <a:avLst/>
@@ -13529,14 +14073,14 @@
       </p:sp>
       <p:sp>
         <p:nvSpPr>
-          <p:cNvPr id="22" name="Text 20"/>
-          <p:cNvSpPr txBox="1"/>
-          <p:nvPr/>
-        </p:nvSpPr>
-        <p:spPr>
-          <a:xfrm>
-            <a:off x="4617720" y="2326879"/>
-            <a:ext cx="1234440" cy="239896"/>
+          <p:cNvPr id="28" name="Text 26"/>
+          <p:cNvSpPr txBox="1"/>
+          <p:nvPr/>
+        </p:nvSpPr>
+        <p:spPr>
+          <a:xfrm>
+            <a:off x="4206240" y="2568926"/>
+            <a:ext cx="777240" cy="223759"/>
           </a:xfrm>
           <a:prstGeom prst="rect">
             <a:avLst/>
@@ -13560,22 +14104,22 @@
                 <a:ea typeface="Inter" pitchFamily="34" charset="-122"/>
                 <a:cs typeface="Inter" pitchFamily="34" charset="-120"/>
               </a:rPr>
-              <a:t>+$27.12</a:t>
-            </a:r>
-            <a:endParaRPr lang="en-US" sz="1200" dirty="0"/>
-          </a:p>
-        </p:txBody>
-      </p:sp>
-      <p:sp>
-        <p:nvSpPr>
-          <p:cNvPr id="23" name="Text 21"/>
-          <p:cNvSpPr txBox="1"/>
-          <p:nvPr/>
-        </p:nvSpPr>
-        <p:spPr>
-          <a:xfrm>
-            <a:off x="658368" y="2566775"/>
-            <a:ext cx="310896" cy="239896"/>
+              <a:t>+19.6%</a:t>
+            </a:r>
+            <a:endParaRPr lang="en-US" sz="1200" dirty="0"/>
+          </a:p>
+        </p:txBody>
+      </p:sp>
+      <p:sp>
+        <p:nvSpPr>
+          <p:cNvPr id="29" name="Text 27"/>
+          <p:cNvSpPr txBox="1"/>
+          <p:nvPr/>
+        </p:nvSpPr>
+        <p:spPr>
+          <a:xfrm>
+            <a:off x="4983480" y="2568926"/>
+            <a:ext cx="868680" cy="223759"/>
           </a:xfrm>
           <a:prstGeom prst="rect">
             <a:avLst/>
@@ -13593,6 +14137,45 @@
             <a:r>
               <a:rPr lang="en-US" sz="1200" dirty="0">
                 <a:solidFill>
+                  <a:srgbClr val="0B7A4A"/>
+                </a:solidFill>
+                <a:latin typeface="Inter" pitchFamily="34" charset="0"/>
+                <a:ea typeface="Inter" pitchFamily="34" charset="-122"/>
+                <a:cs typeface="Inter" pitchFamily="34" charset="-120"/>
+              </a:rPr>
+              <a:t>+$27</a:t>
+            </a:r>
+            <a:endParaRPr lang="en-US" sz="1200" dirty="0"/>
+          </a:p>
+        </p:txBody>
+      </p:sp>
+      <p:sp>
+        <p:nvSpPr>
+          <p:cNvPr id="30" name="Text 28"/>
+          <p:cNvSpPr txBox="1"/>
+          <p:nvPr/>
+        </p:nvSpPr>
+        <p:spPr>
+          <a:xfrm>
+            <a:off x="658368" y="2792685"/>
+            <a:ext cx="310896" cy="223759"/>
+          </a:xfrm>
+          <a:prstGeom prst="rect">
+            <a:avLst/>
+          </a:prstGeom>
+          <a:noFill/>
+          <a:ln/>
+        </p:spPr>
+        <p:txBody>
+          <a:bodyPr wrap="square" lIns="0" tIns="0" rIns="0" bIns="0" rtlCol="0" anchor="ctr"/>
+          <a:lstStyle/>
+          <a:p>
+            <a:pPr algn="r" indent="0" marL="0">
+              <a:buNone/>
+            </a:pPr>
+            <a:r>
+              <a:rPr lang="en-US" sz="1200" dirty="0">
+                <a:solidFill>
                   <a:srgbClr val="9AA3AD"/>
                 </a:solidFill>
                 <a:latin typeface="Inter" pitchFamily="34" charset="0"/>
@@ -13607,14 +14190,14 @@
       </p:sp>
       <p:sp>
         <p:nvSpPr>
-          <p:cNvPr id="24" name="Text 22"/>
-          <p:cNvSpPr txBox="1"/>
-          <p:nvPr/>
-        </p:nvSpPr>
-        <p:spPr>
-          <a:xfrm>
-            <a:off x="1014984" y="2566775"/>
-            <a:ext cx="1920240" cy="239896"/>
+          <p:cNvPr id="31" name="Text 29"/>
+          <p:cNvSpPr txBox="1"/>
+          <p:nvPr/>
+        </p:nvSpPr>
+        <p:spPr>
+          <a:xfrm>
+            <a:off x="1014984" y="2792685"/>
+            <a:ext cx="1920240" cy="223759"/>
           </a:xfrm>
           <a:prstGeom prst="rect">
             <a:avLst/>
@@ -13646,14 +14229,14 @@
       </p:sp>
       <p:sp>
         <p:nvSpPr>
-          <p:cNvPr id="25" name="Shape 23"/>
+          <p:cNvPr id="32" name="Shape 30"/>
           <p:cNvSpPr/>
           <p:nvPr/>
         </p:nvSpPr>
         <p:spPr>
           <a:xfrm>
-            <a:off x="3785616" y="2631546"/>
-            <a:ext cx="267706" cy="110352"/>
+            <a:off x="3579876" y="2853100"/>
+            <a:ext cx="355006" cy="102929"/>
           </a:xfrm>
           <a:prstGeom prst="rect">
             <a:avLst/>
@@ -13666,14 +14249,14 @@
       </p:sp>
       <p:sp>
         <p:nvSpPr>
-          <p:cNvPr id="26" name="Text 24"/>
-          <p:cNvSpPr txBox="1"/>
-          <p:nvPr/>
-        </p:nvSpPr>
-        <p:spPr>
-          <a:xfrm>
-            <a:off x="4617720" y="2566775"/>
-            <a:ext cx="1234440" cy="239896"/>
+          <p:cNvPr id="33" name="Text 31"/>
+          <p:cNvSpPr txBox="1"/>
+          <p:nvPr/>
+        </p:nvSpPr>
+        <p:spPr>
+          <a:xfrm>
+            <a:off x="4206240" y="2792685"/>
+            <a:ext cx="777240" cy="223759"/>
           </a:xfrm>
           <a:prstGeom prst="rect">
             <a:avLst/>
@@ -13697,22 +14280,22 @@
                 <a:ea typeface="Inter" pitchFamily="34" charset="-122"/>
                 <a:cs typeface="Inter" pitchFamily="34" charset="-120"/>
               </a:rPr>
-              <a:t>+$20.81</a:t>
-            </a:r>
-            <a:endParaRPr lang="en-US" sz="1200" dirty="0"/>
-          </a:p>
-        </p:txBody>
-      </p:sp>
-      <p:sp>
-        <p:nvSpPr>
-          <p:cNvPr id="27" name="Text 25"/>
-          <p:cNvSpPr txBox="1"/>
-          <p:nvPr/>
-        </p:nvSpPr>
-        <p:spPr>
-          <a:xfrm>
-            <a:off x="658368" y="2806670"/>
-            <a:ext cx="310896" cy="239896"/>
+              <a:t>+18.3%</a:t>
+            </a:r>
+            <a:endParaRPr lang="en-US" sz="1200" dirty="0"/>
+          </a:p>
+        </p:txBody>
+      </p:sp>
+      <p:sp>
+        <p:nvSpPr>
+          <p:cNvPr id="34" name="Text 32"/>
+          <p:cNvSpPr txBox="1"/>
+          <p:nvPr/>
+        </p:nvSpPr>
+        <p:spPr>
+          <a:xfrm>
+            <a:off x="4983480" y="2792685"/>
+            <a:ext cx="868680" cy="223759"/>
           </a:xfrm>
           <a:prstGeom prst="rect">
             <a:avLst/>
@@ -13730,6 +14313,45 @@
             <a:r>
               <a:rPr lang="en-US" sz="1200" dirty="0">
                 <a:solidFill>
+                  <a:srgbClr val="0B7A4A"/>
+                </a:solidFill>
+                <a:latin typeface="Inter" pitchFamily="34" charset="0"/>
+                <a:ea typeface="Inter" pitchFamily="34" charset="-122"/>
+                <a:cs typeface="Inter" pitchFamily="34" charset="-120"/>
+              </a:rPr>
+              <a:t>+$21</a:t>
+            </a:r>
+            <a:endParaRPr lang="en-US" sz="1200" dirty="0"/>
+          </a:p>
+        </p:txBody>
+      </p:sp>
+      <p:sp>
+        <p:nvSpPr>
+          <p:cNvPr id="35" name="Text 33"/>
+          <p:cNvSpPr txBox="1"/>
+          <p:nvPr/>
+        </p:nvSpPr>
+        <p:spPr>
+          <a:xfrm>
+            <a:off x="658368" y="3016444"/>
+            <a:ext cx="310896" cy="223759"/>
+          </a:xfrm>
+          <a:prstGeom prst="rect">
+            <a:avLst/>
+          </a:prstGeom>
+          <a:noFill/>
+          <a:ln/>
+        </p:spPr>
+        <p:txBody>
+          <a:bodyPr wrap="square" lIns="0" tIns="0" rIns="0" bIns="0" rtlCol="0" anchor="ctr"/>
+          <a:lstStyle/>
+          <a:p>
+            <a:pPr algn="r" indent="0" marL="0">
+              <a:buNone/>
+            </a:pPr>
+            <a:r>
+              <a:rPr lang="en-US" sz="1200" dirty="0">
+                <a:solidFill>
                   <a:srgbClr val="9AA3AD"/>
                 </a:solidFill>
                 <a:latin typeface="Inter" pitchFamily="34" charset="0"/>
@@ -13744,14 +14366,14 @@
       </p:sp>
       <p:sp>
         <p:nvSpPr>
-          <p:cNvPr id="28" name="Text 26"/>
-          <p:cNvSpPr txBox="1"/>
-          <p:nvPr/>
-        </p:nvSpPr>
-        <p:spPr>
-          <a:xfrm>
-            <a:off x="1014984" y="2806670"/>
-            <a:ext cx="1920240" cy="239896"/>
+          <p:cNvPr id="36" name="Text 34"/>
+          <p:cNvSpPr txBox="1"/>
+          <p:nvPr/>
+        </p:nvSpPr>
+        <p:spPr>
+          <a:xfrm>
+            <a:off x="1014984" y="3016444"/>
+            <a:ext cx="1920240" cy="223759"/>
           </a:xfrm>
           <a:prstGeom prst="rect">
             <a:avLst/>
@@ -13783,14 +14405,14 @@
       </p:sp>
       <p:sp>
         <p:nvSpPr>
-          <p:cNvPr id="29" name="Shape 27"/>
+          <p:cNvPr id="37" name="Shape 35"/>
           <p:cNvSpPr/>
           <p:nvPr/>
         </p:nvSpPr>
         <p:spPr>
           <a:xfrm>
-            <a:off x="3785616" y="2871442"/>
-            <a:ext cx="224364" cy="110352"/>
+            <a:off x="3579876" y="3076859"/>
+            <a:ext cx="346724" cy="102929"/>
           </a:xfrm>
           <a:prstGeom prst="rect">
             <a:avLst/>
@@ -13803,14 +14425,14 @@
       </p:sp>
       <p:sp>
         <p:nvSpPr>
-          <p:cNvPr id="30" name="Text 28"/>
-          <p:cNvSpPr txBox="1"/>
-          <p:nvPr/>
-        </p:nvSpPr>
-        <p:spPr>
-          <a:xfrm>
-            <a:off x="4617720" y="2806670"/>
-            <a:ext cx="1234440" cy="239896"/>
+          <p:cNvPr id="38" name="Text 36"/>
+          <p:cNvSpPr txBox="1"/>
+          <p:nvPr/>
+        </p:nvSpPr>
+        <p:spPr>
+          <a:xfrm>
+            <a:off x="4206240" y="3016444"/>
+            <a:ext cx="777240" cy="223759"/>
           </a:xfrm>
           <a:prstGeom prst="rect">
             <a:avLst/>
@@ -13834,22 +14456,22 @@
                 <a:ea typeface="Inter" pitchFamily="34" charset="-122"/>
                 <a:cs typeface="Inter" pitchFamily="34" charset="-120"/>
               </a:rPr>
-              <a:t>+$17.44</a:t>
-            </a:r>
-            <a:endParaRPr lang="en-US" sz="1200" dirty="0"/>
-          </a:p>
-        </p:txBody>
-      </p:sp>
-      <p:sp>
-        <p:nvSpPr>
-          <p:cNvPr id="31" name="Text 29"/>
-          <p:cNvSpPr txBox="1"/>
-          <p:nvPr/>
-        </p:nvSpPr>
-        <p:spPr>
-          <a:xfrm>
-            <a:off x="658368" y="3046566"/>
-            <a:ext cx="310896" cy="239896"/>
+              <a:t>+17.9%</a:t>
+            </a:r>
+            <a:endParaRPr lang="en-US" sz="1200" dirty="0"/>
+          </a:p>
+        </p:txBody>
+      </p:sp>
+      <p:sp>
+        <p:nvSpPr>
+          <p:cNvPr id="39" name="Text 37"/>
+          <p:cNvSpPr txBox="1"/>
+          <p:nvPr/>
+        </p:nvSpPr>
+        <p:spPr>
+          <a:xfrm>
+            <a:off x="4983480" y="3016444"/>
+            <a:ext cx="868680" cy="223759"/>
           </a:xfrm>
           <a:prstGeom prst="rect">
             <a:avLst/>
@@ -13867,6 +14489,45 @@
             <a:r>
               <a:rPr lang="en-US" sz="1200" dirty="0">
                 <a:solidFill>
+                  <a:srgbClr val="0B7A4A"/>
+                </a:solidFill>
+                <a:latin typeface="Inter" pitchFamily="34" charset="0"/>
+                <a:ea typeface="Inter" pitchFamily="34" charset="-122"/>
+                <a:cs typeface="Inter" pitchFamily="34" charset="-120"/>
+              </a:rPr>
+              <a:t>+$17</a:t>
+            </a:r>
+            <a:endParaRPr lang="en-US" sz="1200" dirty="0"/>
+          </a:p>
+        </p:txBody>
+      </p:sp>
+      <p:sp>
+        <p:nvSpPr>
+          <p:cNvPr id="40" name="Text 38"/>
+          <p:cNvSpPr txBox="1"/>
+          <p:nvPr/>
+        </p:nvSpPr>
+        <p:spPr>
+          <a:xfrm>
+            <a:off x="658368" y="3240203"/>
+            <a:ext cx="310896" cy="223759"/>
+          </a:xfrm>
+          <a:prstGeom prst="rect">
+            <a:avLst/>
+          </a:prstGeom>
+          <a:noFill/>
+          <a:ln/>
+        </p:spPr>
+        <p:txBody>
+          <a:bodyPr wrap="square" lIns="0" tIns="0" rIns="0" bIns="0" rtlCol="0" anchor="ctr"/>
+          <a:lstStyle/>
+          <a:p>
+            <a:pPr algn="r" indent="0" marL="0">
+              <a:buNone/>
+            </a:pPr>
+            <a:r>
+              <a:rPr lang="en-US" sz="1200" dirty="0">
+                <a:solidFill>
                   <a:srgbClr val="9AA3AD"/>
                 </a:solidFill>
                 <a:latin typeface="Inter" pitchFamily="34" charset="0"/>
@@ -13881,14 +14542,14 @@
       </p:sp>
       <p:sp>
         <p:nvSpPr>
-          <p:cNvPr id="32" name="Text 30"/>
-          <p:cNvSpPr txBox="1"/>
-          <p:nvPr/>
-        </p:nvSpPr>
-        <p:spPr>
-          <a:xfrm>
-            <a:off x="1014984" y="3046566"/>
-            <a:ext cx="1920240" cy="239896"/>
+          <p:cNvPr id="41" name="Text 39"/>
+          <p:cNvSpPr txBox="1"/>
+          <p:nvPr/>
+        </p:nvSpPr>
+        <p:spPr>
+          <a:xfrm>
+            <a:off x="1014984" y="3240203"/>
+            <a:ext cx="1920240" cy="223759"/>
           </a:xfrm>
           <a:prstGeom prst="rect">
             <a:avLst/>
@@ -13920,14 +14581,14 @@
       </p:sp>
       <p:sp>
         <p:nvSpPr>
-          <p:cNvPr id="33" name="Shape 31"/>
+          <p:cNvPr id="42" name="Shape 40"/>
           <p:cNvSpPr/>
           <p:nvPr/>
         </p:nvSpPr>
         <p:spPr>
           <a:xfrm>
-            <a:off x="3785616" y="3111337"/>
-            <a:ext cx="163138" cy="110352"/>
+            <a:off x="3579876" y="3300618"/>
+            <a:ext cx="266633" cy="102929"/>
           </a:xfrm>
           <a:prstGeom prst="rect">
             <a:avLst/>
@@ -13940,14 +14601,14 @@
       </p:sp>
       <p:sp>
         <p:nvSpPr>
-          <p:cNvPr id="34" name="Text 32"/>
-          <p:cNvSpPr txBox="1"/>
-          <p:nvPr/>
-        </p:nvSpPr>
-        <p:spPr>
-          <a:xfrm>
-            <a:off x="4617720" y="3046566"/>
-            <a:ext cx="1234440" cy="239896"/>
+          <p:cNvPr id="43" name="Text 41"/>
+          <p:cNvSpPr txBox="1"/>
+          <p:nvPr/>
+        </p:nvSpPr>
+        <p:spPr>
+          <a:xfrm>
+            <a:off x="4206240" y="3240203"/>
+            <a:ext cx="777240" cy="223759"/>
           </a:xfrm>
           <a:prstGeom prst="rect">
             <a:avLst/>
@@ -13971,22 +14632,22 @@
                 <a:ea typeface="Inter" pitchFamily="34" charset="-122"/>
                 <a:cs typeface="Inter" pitchFamily="34" charset="-120"/>
               </a:rPr>
-              <a:t>+$12.68</a:t>
-            </a:r>
-            <a:endParaRPr lang="en-US" sz="1200" dirty="0"/>
-          </a:p>
-        </p:txBody>
-      </p:sp>
-      <p:sp>
-        <p:nvSpPr>
-          <p:cNvPr id="35" name="Text 33"/>
-          <p:cNvSpPr txBox="1"/>
-          <p:nvPr/>
-        </p:nvSpPr>
-        <p:spPr>
-          <a:xfrm>
-            <a:off x="658368" y="3286461"/>
-            <a:ext cx="310896" cy="239896"/>
+              <a:t>+13.8%</a:t>
+            </a:r>
+            <a:endParaRPr lang="en-US" sz="1200" dirty="0"/>
+          </a:p>
+        </p:txBody>
+      </p:sp>
+      <p:sp>
+        <p:nvSpPr>
+          <p:cNvPr id="44" name="Text 42"/>
+          <p:cNvSpPr txBox="1"/>
+          <p:nvPr/>
+        </p:nvSpPr>
+        <p:spPr>
+          <a:xfrm>
+            <a:off x="4983480" y="3240203"/>
+            <a:ext cx="868680" cy="223759"/>
           </a:xfrm>
           <a:prstGeom prst="rect">
             <a:avLst/>
@@ -14004,6 +14665,45 @@
             <a:r>
               <a:rPr lang="en-US" sz="1200" dirty="0">
                 <a:solidFill>
+                  <a:srgbClr val="0B7A4A"/>
+                </a:solidFill>
+                <a:latin typeface="Inter" pitchFamily="34" charset="0"/>
+                <a:ea typeface="Inter" pitchFamily="34" charset="-122"/>
+                <a:cs typeface="Inter" pitchFamily="34" charset="-120"/>
+              </a:rPr>
+              <a:t>+$13</a:t>
+            </a:r>
+            <a:endParaRPr lang="en-US" sz="1200" dirty="0"/>
+          </a:p>
+        </p:txBody>
+      </p:sp>
+      <p:sp>
+        <p:nvSpPr>
+          <p:cNvPr id="45" name="Text 43"/>
+          <p:cNvSpPr txBox="1"/>
+          <p:nvPr/>
+        </p:nvSpPr>
+        <p:spPr>
+          <a:xfrm>
+            <a:off x="658368" y="3463962"/>
+            <a:ext cx="310896" cy="223759"/>
+          </a:xfrm>
+          <a:prstGeom prst="rect">
+            <a:avLst/>
+          </a:prstGeom>
+          <a:noFill/>
+          <a:ln/>
+        </p:spPr>
+        <p:txBody>
+          <a:bodyPr wrap="square" lIns="0" tIns="0" rIns="0" bIns="0" rtlCol="0" anchor="ctr"/>
+          <a:lstStyle/>
+          <a:p>
+            <a:pPr algn="r" indent="0" marL="0">
+              <a:buNone/>
+            </a:pPr>
+            <a:r>
+              <a:rPr lang="en-US" sz="1200" dirty="0">
+                <a:solidFill>
                   <a:srgbClr val="9AA3AD"/>
                 </a:solidFill>
                 <a:latin typeface="Inter" pitchFamily="34" charset="0"/>
@@ -14018,14 +14718,14 @@
       </p:sp>
       <p:sp>
         <p:nvSpPr>
-          <p:cNvPr id="36" name="Text 34"/>
-          <p:cNvSpPr txBox="1"/>
-          <p:nvPr/>
-        </p:nvSpPr>
-        <p:spPr>
-          <a:xfrm>
-            <a:off x="1014984" y="3286461"/>
-            <a:ext cx="1920240" cy="239896"/>
+          <p:cNvPr id="46" name="Text 44"/>
+          <p:cNvSpPr txBox="1"/>
+          <p:nvPr/>
+        </p:nvSpPr>
+        <p:spPr>
+          <a:xfrm>
+            <a:off x="1014984" y="3463962"/>
+            <a:ext cx="1920240" cy="223759"/>
           </a:xfrm>
           <a:prstGeom prst="rect">
             <a:avLst/>
@@ -14057,14 +14757,14 @@
       </p:sp>
       <p:sp>
         <p:nvSpPr>
-          <p:cNvPr id="37" name="Shape 35"/>
+          <p:cNvPr id="47" name="Shape 45"/>
           <p:cNvSpPr/>
           <p:nvPr/>
         </p:nvSpPr>
         <p:spPr>
           <a:xfrm>
-            <a:off x="3785616" y="3351233"/>
-            <a:ext cx="159860" cy="110352"/>
+            <a:off x="3579876" y="3524377"/>
+            <a:ext cx="215058" cy="102929"/>
           </a:xfrm>
           <a:prstGeom prst="rect">
             <a:avLst/>
@@ -14077,14 +14777,14 @@
       </p:sp>
       <p:sp>
         <p:nvSpPr>
-          <p:cNvPr id="38" name="Text 36"/>
-          <p:cNvSpPr txBox="1"/>
-          <p:nvPr/>
-        </p:nvSpPr>
-        <p:spPr>
-          <a:xfrm>
-            <a:off x="4617720" y="3286461"/>
-            <a:ext cx="1234440" cy="239896"/>
+          <p:cNvPr id="48" name="Text 46"/>
+          <p:cNvSpPr txBox="1"/>
+          <p:nvPr/>
+        </p:nvSpPr>
+        <p:spPr>
+          <a:xfrm>
+            <a:off x="4206240" y="3463962"/>
+            <a:ext cx="777240" cy="223759"/>
           </a:xfrm>
           <a:prstGeom prst="rect">
             <a:avLst/>
@@ -14108,22 +14808,22 @@
                 <a:ea typeface="Inter" pitchFamily="34" charset="-122"/>
                 <a:cs typeface="Inter" pitchFamily="34" charset="-120"/>
               </a:rPr>
-              <a:t>+$12.43</a:t>
-            </a:r>
-            <a:endParaRPr lang="en-US" sz="1200" dirty="0"/>
-          </a:p>
-        </p:txBody>
-      </p:sp>
-      <p:sp>
-        <p:nvSpPr>
-          <p:cNvPr id="39" name="Text 37"/>
-          <p:cNvSpPr txBox="1"/>
-          <p:nvPr/>
-        </p:nvSpPr>
-        <p:spPr>
-          <a:xfrm>
-            <a:off x="658368" y="3526357"/>
-            <a:ext cx="310896" cy="239896"/>
+              <a:t>+11.1%</a:t>
+            </a:r>
+            <a:endParaRPr lang="en-US" sz="1200" dirty="0"/>
+          </a:p>
+        </p:txBody>
+      </p:sp>
+      <p:sp>
+        <p:nvSpPr>
+          <p:cNvPr id="49" name="Text 47"/>
+          <p:cNvSpPr txBox="1"/>
+          <p:nvPr/>
+        </p:nvSpPr>
+        <p:spPr>
+          <a:xfrm>
+            <a:off x="4983480" y="3463962"/>
+            <a:ext cx="868680" cy="223759"/>
           </a:xfrm>
           <a:prstGeom prst="rect">
             <a:avLst/>
@@ -14141,6 +14841,45 @@
             <a:r>
               <a:rPr lang="en-US" sz="1200" dirty="0">
                 <a:solidFill>
+                  <a:srgbClr val="0B7A4A"/>
+                </a:solidFill>
+                <a:latin typeface="Inter" pitchFamily="34" charset="0"/>
+                <a:ea typeface="Inter" pitchFamily="34" charset="-122"/>
+                <a:cs typeface="Inter" pitchFamily="34" charset="-120"/>
+              </a:rPr>
+              <a:t>+$12</a:t>
+            </a:r>
+            <a:endParaRPr lang="en-US" sz="1200" dirty="0"/>
+          </a:p>
+        </p:txBody>
+      </p:sp>
+      <p:sp>
+        <p:nvSpPr>
+          <p:cNvPr id="50" name="Text 48"/>
+          <p:cNvSpPr txBox="1"/>
+          <p:nvPr/>
+        </p:nvSpPr>
+        <p:spPr>
+          <a:xfrm>
+            <a:off x="658368" y="3687721"/>
+            <a:ext cx="310896" cy="223759"/>
+          </a:xfrm>
+          <a:prstGeom prst="rect">
+            <a:avLst/>
+          </a:prstGeom>
+          <a:noFill/>
+          <a:ln/>
+        </p:spPr>
+        <p:txBody>
+          <a:bodyPr wrap="square" lIns="0" tIns="0" rIns="0" bIns="0" rtlCol="0" anchor="ctr"/>
+          <a:lstStyle/>
+          <a:p>
+            <a:pPr algn="r" indent="0" marL="0">
+              <a:buNone/>
+            </a:pPr>
+            <a:r>
+              <a:rPr lang="en-US" sz="1200" dirty="0">
+                <a:solidFill>
                   <a:srgbClr val="9AA3AD"/>
                 </a:solidFill>
                 <a:latin typeface="Inter" pitchFamily="34" charset="0"/>
@@ -14155,14 +14894,14 @@
       </p:sp>
       <p:sp>
         <p:nvSpPr>
-          <p:cNvPr id="40" name="Text 38"/>
-          <p:cNvSpPr txBox="1"/>
-          <p:nvPr/>
-        </p:nvSpPr>
-        <p:spPr>
-          <a:xfrm>
-            <a:off x="1014984" y="3526357"/>
-            <a:ext cx="1920240" cy="239896"/>
+          <p:cNvPr id="51" name="Text 49"/>
+          <p:cNvSpPr txBox="1"/>
+          <p:nvPr/>
+        </p:nvSpPr>
+        <p:spPr>
+          <a:xfrm>
+            <a:off x="1014984" y="3687721"/>
+            <a:ext cx="1920240" cy="223759"/>
           </a:xfrm>
           <a:prstGeom prst="rect">
             <a:avLst/>
@@ -14186,22 +14925,22 @@
                 <a:ea typeface="Inter" pitchFamily="34" charset="-122"/>
                 <a:cs typeface="Inter" pitchFamily="34" charset="-120"/>
               </a:rPr>
-              <a:t>HONDA HENDERSON</a:t>
-            </a:r>
-            <a:endParaRPr lang="en-US" sz="1200" dirty="0"/>
-          </a:p>
-        </p:txBody>
-      </p:sp>
-      <p:sp>
-        <p:nvSpPr>
-          <p:cNvPr id="41" name="Shape 39"/>
+              <a:t>GMC PRESCOTT</a:t>
+            </a:r>
+            <a:endParaRPr lang="en-US" sz="1200" dirty="0"/>
+          </a:p>
+        </p:txBody>
+      </p:sp>
+      <p:sp>
+        <p:nvSpPr>
+          <p:cNvPr id="52" name="Shape 50"/>
           <p:cNvSpPr/>
           <p:nvPr/>
         </p:nvSpPr>
         <p:spPr>
           <a:xfrm>
-            <a:off x="3785616" y="3591128"/>
-            <a:ext cx="154838" cy="110352"/>
+            <a:off x="3579876" y="3748136"/>
+            <a:ext cx="185543" cy="102929"/>
           </a:xfrm>
           <a:prstGeom prst="rect">
             <a:avLst/>
@@ -14214,14 +14953,14 @@
       </p:sp>
       <p:sp>
         <p:nvSpPr>
-          <p:cNvPr id="42" name="Text 40"/>
-          <p:cNvSpPr txBox="1"/>
-          <p:nvPr/>
-        </p:nvSpPr>
-        <p:spPr>
-          <a:xfrm>
-            <a:off x="4617720" y="3526357"/>
-            <a:ext cx="1234440" cy="239896"/>
+          <p:cNvPr id="53" name="Text 51"/>
+          <p:cNvSpPr txBox="1"/>
+          <p:nvPr/>
+        </p:nvSpPr>
+        <p:spPr>
+          <a:xfrm>
+            <a:off x="4206240" y="3687721"/>
+            <a:ext cx="777240" cy="223759"/>
           </a:xfrm>
           <a:prstGeom prst="rect">
             <a:avLst/>
@@ -14245,22 +14984,22 @@
                 <a:ea typeface="Inter" pitchFamily="34" charset="-122"/>
                 <a:cs typeface="Inter" pitchFamily="34" charset="-120"/>
               </a:rPr>
-              <a:t>+$12.04</a:t>
-            </a:r>
-            <a:endParaRPr lang="en-US" sz="1200" dirty="0"/>
-          </a:p>
-        </p:txBody>
-      </p:sp>
-      <p:sp>
-        <p:nvSpPr>
-          <p:cNvPr id="43" name="Text 41"/>
-          <p:cNvSpPr txBox="1"/>
-          <p:nvPr/>
-        </p:nvSpPr>
-        <p:spPr>
-          <a:xfrm>
-            <a:off x="658368" y="3766252"/>
-            <a:ext cx="310896" cy="239896"/>
+              <a:t>+9.6%</a:t>
+            </a:r>
+            <a:endParaRPr lang="en-US" sz="1200" dirty="0"/>
+          </a:p>
+        </p:txBody>
+      </p:sp>
+      <p:sp>
+        <p:nvSpPr>
+          <p:cNvPr id="54" name="Text 52"/>
+          <p:cNvSpPr txBox="1"/>
+          <p:nvPr/>
+        </p:nvSpPr>
+        <p:spPr>
+          <a:xfrm>
+            <a:off x="4983480" y="3687721"/>
+            <a:ext cx="868680" cy="223759"/>
           </a:xfrm>
           <a:prstGeom prst="rect">
             <a:avLst/>
@@ -14278,6 +15017,45 @@
             <a:r>
               <a:rPr lang="en-US" sz="1200" dirty="0">
                 <a:solidFill>
+                  <a:srgbClr val="0B7A4A"/>
+                </a:solidFill>
+                <a:latin typeface="Inter" pitchFamily="34" charset="0"/>
+                <a:ea typeface="Inter" pitchFamily="34" charset="-122"/>
+                <a:cs typeface="Inter" pitchFamily="34" charset="-120"/>
+              </a:rPr>
+              <a:t>+$11</a:t>
+            </a:r>
+            <a:endParaRPr lang="en-US" sz="1200" dirty="0"/>
+          </a:p>
+        </p:txBody>
+      </p:sp>
+      <p:sp>
+        <p:nvSpPr>
+          <p:cNvPr id="55" name="Text 53"/>
+          <p:cNvSpPr txBox="1"/>
+          <p:nvPr/>
+        </p:nvSpPr>
+        <p:spPr>
+          <a:xfrm>
+            <a:off x="658368" y="3911480"/>
+            <a:ext cx="310896" cy="223759"/>
+          </a:xfrm>
+          <a:prstGeom prst="rect">
+            <a:avLst/>
+          </a:prstGeom>
+          <a:noFill/>
+          <a:ln/>
+        </p:spPr>
+        <p:txBody>
+          <a:bodyPr wrap="square" lIns="0" tIns="0" rIns="0" bIns="0" rtlCol="0" anchor="ctr"/>
+          <a:lstStyle/>
+          <a:p>
+            <a:pPr algn="r" indent="0" marL="0">
+              <a:buNone/>
+            </a:pPr>
+            <a:r>
+              <a:rPr lang="en-US" sz="1200" dirty="0">
+                <a:solidFill>
                   <a:srgbClr val="9AA3AD"/>
                 </a:solidFill>
                 <a:latin typeface="Inter" pitchFamily="34" charset="0"/>
@@ -14292,14 +15070,14 @@
       </p:sp>
       <p:sp>
         <p:nvSpPr>
-          <p:cNvPr id="44" name="Text 42"/>
-          <p:cNvSpPr txBox="1"/>
-          <p:nvPr/>
-        </p:nvSpPr>
-        <p:spPr>
-          <a:xfrm>
-            <a:off x="1014984" y="3766252"/>
-            <a:ext cx="1920240" cy="239896"/>
+          <p:cNvPr id="56" name="Text 54"/>
+          <p:cNvSpPr txBox="1"/>
+          <p:nvPr/>
+        </p:nvSpPr>
+        <p:spPr>
+          <a:xfrm>
+            <a:off x="1014984" y="3911480"/>
+            <a:ext cx="1920240" cy="223759"/>
           </a:xfrm>
           <a:prstGeom prst="rect">
             <a:avLst/>
@@ -14323,22 +15101,22 @@
                 <a:ea typeface="Inter" pitchFamily="34" charset="-122"/>
                 <a:cs typeface="Inter" pitchFamily="34" charset="-120"/>
               </a:rPr>
-              <a:t>GMC PRESCOTT</a:t>
-            </a:r>
-            <a:endParaRPr lang="en-US" sz="1200" dirty="0"/>
-          </a:p>
-        </p:txBody>
-      </p:sp>
-      <p:sp>
-        <p:nvSpPr>
-          <p:cNvPr id="45" name="Shape 43"/>
+              <a:t>HONDA HENDERSON</a:t>
+            </a:r>
+            <a:endParaRPr lang="en-US" sz="1200" dirty="0"/>
+          </a:p>
+        </p:txBody>
+      </p:sp>
+      <p:sp>
+        <p:nvSpPr>
+          <p:cNvPr id="57" name="Shape 55"/>
           <p:cNvSpPr/>
           <p:nvPr/>
         </p:nvSpPr>
         <p:spPr>
           <a:xfrm>
-            <a:off x="3785616" y="3831024"/>
-            <a:ext cx="143159" cy="110352"/>
+            <a:off x="3579876" y="3971895"/>
+            <a:ext cx="173131" cy="102929"/>
           </a:xfrm>
           <a:prstGeom prst="rect">
             <a:avLst/>
@@ -14351,14 +15129,14 @@
       </p:sp>
       <p:sp>
         <p:nvSpPr>
-          <p:cNvPr id="46" name="Text 44"/>
-          <p:cNvSpPr txBox="1"/>
-          <p:nvPr/>
-        </p:nvSpPr>
-        <p:spPr>
-          <a:xfrm>
-            <a:off x="4617720" y="3766252"/>
-            <a:ext cx="1234440" cy="239896"/>
+          <p:cNvPr id="58" name="Text 56"/>
+          <p:cNvSpPr txBox="1"/>
+          <p:nvPr/>
+        </p:nvSpPr>
+        <p:spPr>
+          <a:xfrm>
+            <a:off x="4206240" y="3911480"/>
+            <a:ext cx="777240" cy="223759"/>
           </a:xfrm>
           <a:prstGeom prst="rect">
             <a:avLst/>
@@ -14382,22 +15160,22 @@
                 <a:ea typeface="Inter" pitchFamily="34" charset="-122"/>
                 <a:cs typeface="Inter" pitchFamily="34" charset="-120"/>
               </a:rPr>
-              <a:t>+$11.13</a:t>
-            </a:r>
-            <a:endParaRPr lang="en-US" sz="1200" dirty="0"/>
-          </a:p>
-        </p:txBody>
-      </p:sp>
-      <p:sp>
-        <p:nvSpPr>
-          <p:cNvPr id="47" name="Text 45"/>
-          <p:cNvSpPr txBox="1"/>
-          <p:nvPr/>
-        </p:nvSpPr>
-        <p:spPr>
-          <a:xfrm>
-            <a:off x="658368" y="4006148"/>
-            <a:ext cx="310896" cy="239896"/>
+              <a:t>+8.9%</a:t>
+            </a:r>
+            <a:endParaRPr lang="en-US" sz="1200" dirty="0"/>
+          </a:p>
+        </p:txBody>
+      </p:sp>
+      <p:sp>
+        <p:nvSpPr>
+          <p:cNvPr id="59" name="Text 57"/>
+          <p:cNvSpPr txBox="1"/>
+          <p:nvPr/>
+        </p:nvSpPr>
+        <p:spPr>
+          <a:xfrm>
+            <a:off x="4983480" y="3911480"/>
+            <a:ext cx="868680" cy="223759"/>
           </a:xfrm>
           <a:prstGeom prst="rect">
             <a:avLst/>
@@ -14415,6 +15193,45 @@
             <a:r>
               <a:rPr lang="en-US" sz="1200" dirty="0">
                 <a:solidFill>
+                  <a:srgbClr val="0B7A4A"/>
+                </a:solidFill>
+                <a:latin typeface="Inter" pitchFamily="34" charset="0"/>
+                <a:ea typeface="Inter" pitchFamily="34" charset="-122"/>
+                <a:cs typeface="Inter" pitchFamily="34" charset="-120"/>
+              </a:rPr>
+              <a:t>+$12</a:t>
+            </a:r>
+            <a:endParaRPr lang="en-US" sz="1200" dirty="0"/>
+          </a:p>
+        </p:txBody>
+      </p:sp>
+      <p:sp>
+        <p:nvSpPr>
+          <p:cNvPr id="60" name="Text 58"/>
+          <p:cNvSpPr txBox="1"/>
+          <p:nvPr/>
+        </p:nvSpPr>
+        <p:spPr>
+          <a:xfrm>
+            <a:off x="658368" y="4135240"/>
+            <a:ext cx="310896" cy="223759"/>
+          </a:xfrm>
+          <a:prstGeom prst="rect">
+            <a:avLst/>
+          </a:prstGeom>
+          <a:noFill/>
+          <a:ln/>
+        </p:spPr>
+        <p:txBody>
+          <a:bodyPr wrap="square" lIns="0" tIns="0" rIns="0" bIns="0" rtlCol="0" anchor="ctr"/>
+          <a:lstStyle/>
+          <a:p>
+            <a:pPr algn="r" indent="0" marL="0">
+              <a:buNone/>
+            </a:pPr>
+            <a:r>
+              <a:rPr lang="en-US" sz="1200" dirty="0">
+                <a:solidFill>
                   <a:srgbClr val="9AA3AD"/>
                 </a:solidFill>
                 <a:latin typeface="Inter" pitchFamily="34" charset="0"/>
@@ -14429,14 +15246,14 @@
       </p:sp>
       <p:sp>
         <p:nvSpPr>
-          <p:cNvPr id="48" name="Text 46"/>
-          <p:cNvSpPr txBox="1"/>
-          <p:nvPr/>
-        </p:nvSpPr>
-        <p:spPr>
-          <a:xfrm>
-            <a:off x="1014984" y="4006148"/>
-            <a:ext cx="1920240" cy="239896"/>
+          <p:cNvPr id="61" name="Text 59"/>
+          <p:cNvSpPr txBox="1"/>
+          <p:nvPr/>
+        </p:nvSpPr>
+        <p:spPr>
+          <a:xfrm>
+            <a:off x="1014984" y="4135240"/>
+            <a:ext cx="1920240" cy="223759"/>
           </a:xfrm>
           <a:prstGeom prst="rect">
             <a:avLst/>
@@ -14460,22 +15277,22 @@
                 <a:ea typeface="Inter" pitchFamily="34" charset="-122"/>
                 <a:cs typeface="Inter" pitchFamily="34" charset="-120"/>
               </a:rPr>
-              <a:t>TOYOTA PRESCOTT</a:t>
-            </a:r>
-            <a:endParaRPr lang="en-US" sz="1200" dirty="0"/>
-          </a:p>
-        </p:txBody>
-      </p:sp>
-      <p:sp>
-        <p:nvSpPr>
-          <p:cNvPr id="49" name="Shape 47"/>
+              <a:t>SUBARU PRESCOTT</a:t>
+            </a:r>
+            <a:endParaRPr lang="en-US" sz="1200" dirty="0"/>
+          </a:p>
+        </p:txBody>
+      </p:sp>
+      <p:sp>
+        <p:nvSpPr>
+          <p:cNvPr id="62" name="Shape 60"/>
           <p:cNvSpPr/>
           <p:nvPr/>
         </p:nvSpPr>
         <p:spPr>
           <a:xfrm>
-            <a:off x="3785616" y="4070920"/>
-            <a:ext cx="82257" cy="110352"/>
+            <a:off x="3579876" y="4195654"/>
+            <a:ext cx="84555" cy="102929"/>
           </a:xfrm>
           <a:prstGeom prst="rect">
             <a:avLst/>
@@ -14488,14 +15305,14 @@
       </p:sp>
       <p:sp>
         <p:nvSpPr>
-          <p:cNvPr id="50" name="Text 48"/>
-          <p:cNvSpPr txBox="1"/>
-          <p:nvPr/>
-        </p:nvSpPr>
-        <p:spPr>
-          <a:xfrm>
-            <a:off x="4617720" y="4006148"/>
-            <a:ext cx="1234440" cy="239896"/>
+          <p:cNvPr id="63" name="Text 61"/>
+          <p:cNvSpPr txBox="1"/>
+          <p:nvPr/>
+        </p:nvSpPr>
+        <p:spPr>
+          <a:xfrm>
+            <a:off x="4206240" y="4135240"/>
+            <a:ext cx="777240" cy="223759"/>
           </a:xfrm>
           <a:prstGeom prst="rect">
             <a:avLst/>
@@ -14519,22 +15336,22 @@
                 <a:ea typeface="Inter" pitchFamily="34" charset="-122"/>
                 <a:cs typeface="Inter" pitchFamily="34" charset="-120"/>
               </a:rPr>
-              <a:t>+$6.39</a:t>
-            </a:r>
-            <a:endParaRPr lang="en-US" sz="1200" dirty="0"/>
-          </a:p>
-        </p:txBody>
-      </p:sp>
-      <p:sp>
-        <p:nvSpPr>
-          <p:cNvPr id="51" name="Text 49"/>
-          <p:cNvSpPr txBox="1"/>
-          <p:nvPr/>
-        </p:nvSpPr>
-        <p:spPr>
-          <a:xfrm>
-            <a:off x="658368" y="4246043"/>
-            <a:ext cx="310896" cy="239896"/>
+              <a:t>+4.4%</a:t>
+            </a:r>
+            <a:endParaRPr lang="en-US" sz="1200" dirty="0"/>
+          </a:p>
+        </p:txBody>
+      </p:sp>
+      <p:sp>
+        <p:nvSpPr>
+          <p:cNvPr id="64" name="Text 62"/>
+          <p:cNvSpPr txBox="1"/>
+          <p:nvPr/>
+        </p:nvSpPr>
+        <p:spPr>
+          <a:xfrm>
+            <a:off x="4983480" y="4135240"/>
+            <a:ext cx="868680" cy="223759"/>
           </a:xfrm>
           <a:prstGeom prst="rect">
             <a:avLst/>
@@ -14552,6 +15369,45 @@
             <a:r>
               <a:rPr lang="en-US" sz="1200" dirty="0">
                 <a:solidFill>
+                  <a:srgbClr val="0B7A4A"/>
+                </a:solidFill>
+                <a:latin typeface="Inter" pitchFamily="34" charset="0"/>
+                <a:ea typeface="Inter" pitchFamily="34" charset="-122"/>
+                <a:cs typeface="Inter" pitchFamily="34" charset="-120"/>
+              </a:rPr>
+              <a:t>+$6</a:t>
+            </a:r>
+            <a:endParaRPr lang="en-US" sz="1200" dirty="0"/>
+          </a:p>
+        </p:txBody>
+      </p:sp>
+      <p:sp>
+        <p:nvSpPr>
+          <p:cNvPr id="65" name="Text 63"/>
+          <p:cNvSpPr txBox="1"/>
+          <p:nvPr/>
+        </p:nvSpPr>
+        <p:spPr>
+          <a:xfrm>
+            <a:off x="658368" y="4358999"/>
+            <a:ext cx="310896" cy="223759"/>
+          </a:xfrm>
+          <a:prstGeom prst="rect">
+            <a:avLst/>
+          </a:prstGeom>
+          <a:noFill/>
+          <a:ln/>
+        </p:spPr>
+        <p:txBody>
+          <a:bodyPr wrap="square" lIns="0" tIns="0" rIns="0" bIns="0" rtlCol="0" anchor="ctr"/>
+          <a:lstStyle/>
+          <a:p>
+            <a:pPr algn="r" indent="0" marL="0">
+              <a:buNone/>
+            </a:pPr>
+            <a:r>
+              <a:rPr lang="en-US" sz="1200" dirty="0">
+                <a:solidFill>
                   <a:srgbClr val="9AA3AD"/>
                 </a:solidFill>
                 <a:latin typeface="Inter" pitchFamily="34" charset="0"/>
@@ -14566,14 +15422,14 @@
       </p:sp>
       <p:sp>
         <p:nvSpPr>
-          <p:cNvPr id="52" name="Text 50"/>
-          <p:cNvSpPr txBox="1"/>
-          <p:nvPr/>
-        </p:nvSpPr>
-        <p:spPr>
-          <a:xfrm>
-            <a:off x="1014984" y="4246043"/>
-            <a:ext cx="1920240" cy="239896"/>
+          <p:cNvPr id="66" name="Text 64"/>
+          <p:cNvSpPr txBox="1"/>
+          <p:nvPr/>
+        </p:nvSpPr>
+        <p:spPr>
+          <a:xfrm>
+            <a:off x="1014984" y="4358999"/>
+            <a:ext cx="1920240" cy="223759"/>
           </a:xfrm>
           <a:prstGeom prst="rect">
             <a:avLst/>
@@ -14605,14 +15461,14 @@
       </p:sp>
       <p:sp>
         <p:nvSpPr>
-          <p:cNvPr id="53" name="Shape 51"/>
+          <p:cNvPr id="67" name="Shape 65"/>
           <p:cNvSpPr/>
           <p:nvPr/>
         </p:nvSpPr>
         <p:spPr>
           <a:xfrm>
-            <a:off x="3785616" y="4310815"/>
-            <a:ext cx="80763" cy="110352"/>
+            <a:off x="3579876" y="4419414"/>
+            <a:ext cx="79737" cy="102929"/>
           </a:xfrm>
           <a:prstGeom prst="rect">
             <a:avLst/>
@@ -14625,14 +15481,14 @@
       </p:sp>
       <p:sp>
         <p:nvSpPr>
-          <p:cNvPr id="54" name="Text 52"/>
-          <p:cNvSpPr txBox="1"/>
-          <p:nvPr/>
-        </p:nvSpPr>
-        <p:spPr>
-          <a:xfrm>
-            <a:off x="4617720" y="4246043"/>
-            <a:ext cx="1234440" cy="239896"/>
+          <p:cNvPr id="68" name="Text 66"/>
+          <p:cNvSpPr txBox="1"/>
+          <p:nvPr/>
+        </p:nvSpPr>
+        <p:spPr>
+          <a:xfrm>
+            <a:off x="4206240" y="4358999"/>
+            <a:ext cx="777240" cy="223759"/>
           </a:xfrm>
           <a:prstGeom prst="rect">
             <a:avLst/>
@@ -14656,22 +15512,22 @@
                 <a:ea typeface="Inter" pitchFamily="34" charset="-122"/>
                 <a:cs typeface="Inter" pitchFamily="34" charset="-120"/>
               </a:rPr>
-              <a:t>+$6.28</a:t>
-            </a:r>
-            <a:endParaRPr lang="en-US" sz="1200" dirty="0"/>
-          </a:p>
-        </p:txBody>
-      </p:sp>
-      <p:sp>
-        <p:nvSpPr>
-          <p:cNvPr id="55" name="Text 53"/>
-          <p:cNvSpPr txBox="1"/>
-          <p:nvPr/>
-        </p:nvSpPr>
-        <p:spPr>
-          <a:xfrm>
-            <a:off x="658368" y="4485939"/>
-            <a:ext cx="310896" cy="239896"/>
+              <a:t>+4.1%</a:t>
+            </a:r>
+            <a:endParaRPr lang="en-US" sz="1200" dirty="0"/>
+          </a:p>
+        </p:txBody>
+      </p:sp>
+      <p:sp>
+        <p:nvSpPr>
+          <p:cNvPr id="69" name="Text 67"/>
+          <p:cNvSpPr txBox="1"/>
+          <p:nvPr/>
+        </p:nvSpPr>
+        <p:spPr>
+          <a:xfrm>
+            <a:off x="4983480" y="4358999"/>
+            <a:ext cx="868680" cy="223759"/>
           </a:xfrm>
           <a:prstGeom prst="rect">
             <a:avLst/>
@@ -14689,6 +15545,45 @@
             <a:r>
               <a:rPr lang="en-US" sz="1200" dirty="0">
                 <a:solidFill>
+                  <a:srgbClr val="0B7A4A"/>
+                </a:solidFill>
+                <a:latin typeface="Inter" pitchFamily="34" charset="0"/>
+                <a:ea typeface="Inter" pitchFamily="34" charset="-122"/>
+                <a:cs typeface="Inter" pitchFamily="34" charset="-120"/>
+              </a:rPr>
+              <a:t>+$6</a:t>
+            </a:r>
+            <a:endParaRPr lang="en-US" sz="1200" dirty="0"/>
+          </a:p>
+        </p:txBody>
+      </p:sp>
+      <p:sp>
+        <p:nvSpPr>
+          <p:cNvPr id="70" name="Text 68"/>
+          <p:cNvSpPr txBox="1"/>
+          <p:nvPr/>
+        </p:nvSpPr>
+        <p:spPr>
+          <a:xfrm>
+            <a:off x="658368" y="4582758"/>
+            <a:ext cx="310896" cy="223759"/>
+          </a:xfrm>
+          <a:prstGeom prst="rect">
+            <a:avLst/>
+          </a:prstGeom>
+          <a:noFill/>
+          <a:ln/>
+        </p:spPr>
+        <p:txBody>
+          <a:bodyPr wrap="square" lIns="0" tIns="0" rIns="0" bIns="0" rtlCol="0" anchor="ctr"/>
+          <a:lstStyle/>
+          <a:p>
+            <a:pPr algn="r" indent="0" marL="0">
+              <a:buNone/>
+            </a:pPr>
+            <a:r>
+              <a:rPr lang="en-US" sz="1200" dirty="0">
+                <a:solidFill>
                   <a:srgbClr val="9AA3AD"/>
                 </a:solidFill>
                 <a:latin typeface="Inter" pitchFamily="34" charset="0"/>
@@ -14703,14 +15598,14 @@
       </p:sp>
       <p:sp>
         <p:nvSpPr>
-          <p:cNvPr id="56" name="Text 54"/>
-          <p:cNvSpPr txBox="1"/>
-          <p:nvPr/>
-        </p:nvSpPr>
-        <p:spPr>
-          <a:xfrm>
-            <a:off x="1014984" y="4485939"/>
-            <a:ext cx="1920240" cy="239896"/>
+          <p:cNvPr id="71" name="Text 69"/>
+          <p:cNvSpPr txBox="1"/>
+          <p:nvPr/>
+        </p:nvSpPr>
+        <p:spPr>
+          <a:xfrm>
+            <a:off x="1014984" y="4582758"/>
+            <a:ext cx="1920240" cy="223759"/>
           </a:xfrm>
           <a:prstGeom prst="rect">
             <a:avLst/>
@@ -14734,22 +15629,22 @@
                 <a:ea typeface="Inter" pitchFamily="34" charset="-122"/>
                 <a:cs typeface="Inter" pitchFamily="34" charset="-120"/>
               </a:rPr>
-              <a:t>SUBARU PRESCOTT</a:t>
-            </a:r>
-            <a:endParaRPr lang="en-US" sz="1200" dirty="0"/>
-          </a:p>
-        </p:txBody>
-      </p:sp>
-      <p:sp>
-        <p:nvSpPr>
-          <p:cNvPr id="57" name="Shape 55"/>
+              <a:t>TOYOTA PRESCOTT</a:t>
+            </a:r>
+            <a:endParaRPr lang="en-US" sz="1200" dirty="0"/>
+          </a:p>
+        </p:txBody>
+      </p:sp>
+      <p:sp>
+        <p:nvSpPr>
+          <p:cNvPr id="72" name="Shape 70"/>
           <p:cNvSpPr/>
           <p:nvPr/>
         </p:nvSpPr>
         <p:spPr>
           <a:xfrm>
-            <a:off x="3785616" y="4550711"/>
-            <a:ext cx="73598" cy="110352"/>
+            <a:off x="3579876" y="4643173"/>
+            <a:ext cx="78983" cy="102929"/>
           </a:xfrm>
           <a:prstGeom prst="rect">
             <a:avLst/>
@@ -14762,14 +15657,14 @@
       </p:sp>
       <p:sp>
         <p:nvSpPr>
-          <p:cNvPr id="58" name="Text 56"/>
-          <p:cNvSpPr txBox="1"/>
-          <p:nvPr/>
-        </p:nvSpPr>
-        <p:spPr>
-          <a:xfrm>
-            <a:off x="4617720" y="4485939"/>
-            <a:ext cx="1234440" cy="239896"/>
+          <p:cNvPr id="73" name="Text 71"/>
+          <p:cNvSpPr txBox="1"/>
+          <p:nvPr/>
+        </p:nvSpPr>
+        <p:spPr>
+          <a:xfrm>
+            <a:off x="4206240" y="4582758"/>
+            <a:ext cx="777240" cy="223759"/>
           </a:xfrm>
           <a:prstGeom prst="rect">
             <a:avLst/>
@@ -14793,22 +15688,22 @@
                 <a:ea typeface="Inter" pitchFamily="34" charset="-122"/>
                 <a:cs typeface="Inter" pitchFamily="34" charset="-120"/>
               </a:rPr>
-              <a:t>+$5.72</a:t>
-            </a:r>
-            <a:endParaRPr lang="en-US" sz="1200" dirty="0"/>
-          </a:p>
-        </p:txBody>
-      </p:sp>
-      <p:sp>
-        <p:nvSpPr>
-          <p:cNvPr id="59" name="Text 57"/>
-          <p:cNvSpPr txBox="1"/>
-          <p:nvPr/>
-        </p:nvSpPr>
-        <p:spPr>
-          <a:xfrm>
-            <a:off x="658368" y="4725834"/>
-            <a:ext cx="310896" cy="239896"/>
+              <a:t>+4.1%</a:t>
+            </a:r>
+            <a:endParaRPr lang="en-US" sz="1200" dirty="0"/>
+          </a:p>
+        </p:txBody>
+      </p:sp>
+      <p:sp>
+        <p:nvSpPr>
+          <p:cNvPr id="74" name="Text 72"/>
+          <p:cNvSpPr txBox="1"/>
+          <p:nvPr/>
+        </p:nvSpPr>
+        <p:spPr>
+          <a:xfrm>
+            <a:off x="4983480" y="4582758"/>
+            <a:ext cx="868680" cy="223759"/>
           </a:xfrm>
           <a:prstGeom prst="rect">
             <a:avLst/>
@@ -14826,6 +15721,45 @@
             <a:r>
               <a:rPr lang="en-US" sz="1200" dirty="0">
                 <a:solidFill>
+                  <a:srgbClr val="0B7A4A"/>
+                </a:solidFill>
+                <a:latin typeface="Inter" pitchFamily="34" charset="0"/>
+                <a:ea typeface="Inter" pitchFamily="34" charset="-122"/>
+                <a:cs typeface="Inter" pitchFamily="34" charset="-120"/>
+              </a:rPr>
+              <a:t>+$6</a:t>
+            </a:r>
+            <a:endParaRPr lang="en-US" sz="1200" dirty="0"/>
+          </a:p>
+        </p:txBody>
+      </p:sp>
+      <p:sp>
+        <p:nvSpPr>
+          <p:cNvPr id="75" name="Text 73"/>
+          <p:cNvSpPr txBox="1"/>
+          <p:nvPr/>
+        </p:nvSpPr>
+        <p:spPr>
+          <a:xfrm>
+            <a:off x="658368" y="4806517"/>
+            <a:ext cx="310896" cy="223759"/>
+          </a:xfrm>
+          <a:prstGeom prst="rect">
+            <a:avLst/>
+          </a:prstGeom>
+          <a:noFill/>
+          <a:ln/>
+        </p:spPr>
+        <p:txBody>
+          <a:bodyPr wrap="square" lIns="0" tIns="0" rIns="0" bIns="0" rtlCol="0" anchor="ctr"/>
+          <a:lstStyle/>
+          <a:p>
+            <a:pPr algn="r" indent="0" marL="0">
+              <a:buNone/>
+            </a:pPr>
+            <a:r>
+              <a:rPr lang="en-US" sz="1200" dirty="0">
+                <a:solidFill>
                   <a:srgbClr val="9AA3AD"/>
                 </a:solidFill>
                 <a:latin typeface="Inter" pitchFamily="34" charset="0"/>
@@ -14840,14 +15774,14 @@
       </p:sp>
       <p:sp>
         <p:nvSpPr>
-          <p:cNvPr id="60" name="Text 58"/>
-          <p:cNvSpPr txBox="1"/>
-          <p:nvPr/>
-        </p:nvSpPr>
-        <p:spPr>
-          <a:xfrm>
-            <a:off x="1014984" y="4725834"/>
-            <a:ext cx="1920240" cy="239896"/>
+          <p:cNvPr id="76" name="Text 74"/>
+          <p:cNvSpPr txBox="1"/>
+          <p:nvPr/>
+        </p:nvSpPr>
+        <p:spPr>
+          <a:xfrm>
+            <a:off x="1014984" y="4806517"/>
+            <a:ext cx="1920240" cy="223759"/>
           </a:xfrm>
           <a:prstGeom prst="rect">
             <a:avLst/>
@@ -14871,22 +15805,22 @@
                 <a:ea typeface="Inter" pitchFamily="34" charset="-122"/>
                 <a:cs typeface="Inter" pitchFamily="34" charset="-120"/>
               </a:rPr>
-              <a:t>CHEVY GMC BULLHEAD</a:t>
-            </a:r>
-            <a:endParaRPr lang="en-US" sz="1200" dirty="0"/>
-          </a:p>
-        </p:txBody>
-      </p:sp>
-      <p:sp>
-        <p:nvSpPr>
-          <p:cNvPr id="61" name="Shape 59"/>
+              <a:t>TOYOTA SPOKANE</a:t>
+            </a:r>
+            <a:endParaRPr lang="en-US" sz="1200" dirty="0"/>
+          </a:p>
+        </p:txBody>
+      </p:sp>
+      <p:sp>
+        <p:nvSpPr>
+          <p:cNvPr id="77" name="Shape 75"/>
           <p:cNvSpPr/>
           <p:nvPr/>
         </p:nvSpPr>
         <p:spPr>
           <a:xfrm>
-            <a:off x="3785616" y="4790606"/>
-            <a:ext cx="70341" cy="110352"/>
+            <a:off x="3579876" y="4866932"/>
+            <a:ext cx="77026" cy="102929"/>
           </a:xfrm>
           <a:prstGeom prst="rect">
             <a:avLst/>
@@ -14899,14 +15833,14 @@
       </p:sp>
       <p:sp>
         <p:nvSpPr>
-          <p:cNvPr id="62" name="Text 60"/>
-          <p:cNvSpPr txBox="1"/>
-          <p:nvPr/>
-        </p:nvSpPr>
-        <p:spPr>
-          <a:xfrm>
-            <a:off x="4617720" y="4725834"/>
-            <a:ext cx="1234440" cy="239896"/>
+          <p:cNvPr id="78" name="Text 76"/>
+          <p:cNvSpPr txBox="1"/>
+          <p:nvPr/>
+        </p:nvSpPr>
+        <p:spPr>
+          <a:xfrm>
+            <a:off x="4206240" y="4806517"/>
+            <a:ext cx="777240" cy="223759"/>
           </a:xfrm>
           <a:prstGeom prst="rect">
             <a:avLst/>
@@ -14930,22 +15864,22 @@
                 <a:ea typeface="Inter" pitchFamily="34" charset="-122"/>
                 <a:cs typeface="Inter" pitchFamily="34" charset="-120"/>
               </a:rPr>
-              <a:t>+$5.47</a:t>
-            </a:r>
-            <a:endParaRPr lang="en-US" sz="1200" dirty="0"/>
-          </a:p>
-        </p:txBody>
-      </p:sp>
-      <p:sp>
-        <p:nvSpPr>
-          <p:cNvPr id="63" name="Text 61"/>
-          <p:cNvSpPr txBox="1"/>
-          <p:nvPr/>
-        </p:nvSpPr>
-        <p:spPr>
-          <a:xfrm>
-            <a:off x="658368" y="4965730"/>
-            <a:ext cx="310896" cy="239896"/>
+              <a:t>+4.0%</a:t>
+            </a:r>
+            <a:endParaRPr lang="en-US" sz="1200" dirty="0"/>
+          </a:p>
+        </p:txBody>
+      </p:sp>
+      <p:sp>
+        <p:nvSpPr>
+          <p:cNvPr id="79" name="Text 77"/>
+          <p:cNvSpPr txBox="1"/>
+          <p:nvPr/>
+        </p:nvSpPr>
+        <p:spPr>
+          <a:xfrm>
+            <a:off x="4983480" y="4806517"/>
+            <a:ext cx="868680" cy="223759"/>
           </a:xfrm>
           <a:prstGeom prst="rect">
             <a:avLst/>
@@ -14963,6 +15897,45 @@
             <a:r>
               <a:rPr lang="en-US" sz="1200" dirty="0">
                 <a:solidFill>
+                  <a:srgbClr val="0B7A4A"/>
+                </a:solidFill>
+                <a:latin typeface="Inter" pitchFamily="34" charset="0"/>
+                <a:ea typeface="Inter" pitchFamily="34" charset="-122"/>
+                <a:cs typeface="Inter" pitchFamily="34" charset="-120"/>
+              </a:rPr>
+              <a:t>+$5</a:t>
+            </a:r>
+            <a:endParaRPr lang="en-US" sz="1200" dirty="0"/>
+          </a:p>
+        </p:txBody>
+      </p:sp>
+      <p:sp>
+        <p:nvSpPr>
+          <p:cNvPr id="80" name="Text 78"/>
+          <p:cNvSpPr txBox="1"/>
+          <p:nvPr/>
+        </p:nvSpPr>
+        <p:spPr>
+          <a:xfrm>
+            <a:off x="658368" y="5030276"/>
+            <a:ext cx="310896" cy="223759"/>
+          </a:xfrm>
+          <a:prstGeom prst="rect">
+            <a:avLst/>
+          </a:prstGeom>
+          <a:noFill/>
+          <a:ln/>
+        </p:spPr>
+        <p:txBody>
+          <a:bodyPr wrap="square" lIns="0" tIns="0" rIns="0" bIns="0" rtlCol="0" anchor="ctr"/>
+          <a:lstStyle/>
+          <a:p>
+            <a:pPr algn="r" indent="0" marL="0">
+              <a:buNone/>
+            </a:pPr>
+            <a:r>
+              <a:rPr lang="en-US" sz="1200" dirty="0">
+                <a:solidFill>
                   <a:srgbClr val="9AA3AD"/>
                 </a:solidFill>
                 <a:latin typeface="Inter" pitchFamily="34" charset="0"/>
@@ -14977,14 +15950,14 @@
       </p:sp>
       <p:sp>
         <p:nvSpPr>
-          <p:cNvPr id="64" name="Text 62"/>
-          <p:cNvSpPr txBox="1"/>
-          <p:nvPr/>
-        </p:nvSpPr>
-        <p:spPr>
-          <a:xfrm>
-            <a:off x="1014984" y="4965730"/>
-            <a:ext cx="1920240" cy="239896"/>
+          <p:cNvPr id="81" name="Text 79"/>
+          <p:cNvSpPr txBox="1"/>
+          <p:nvPr/>
+        </p:nvSpPr>
+        <p:spPr>
+          <a:xfrm>
+            <a:off x="1014984" y="5030276"/>
+            <a:ext cx="1920240" cy="223759"/>
           </a:xfrm>
           <a:prstGeom prst="rect">
             <a:avLst/>
@@ -15008,22 +15981,22 @@
                 <a:ea typeface="Inter" pitchFamily="34" charset="-122"/>
                 <a:cs typeface="Inter" pitchFamily="34" charset="-120"/>
               </a:rPr>
-              <a:t>TOYOTA SPOKANE</a:t>
-            </a:r>
-            <a:endParaRPr lang="en-US" sz="1200" dirty="0"/>
-          </a:p>
-        </p:txBody>
-      </p:sp>
-      <p:sp>
-        <p:nvSpPr>
-          <p:cNvPr id="65" name="Shape 63"/>
+              <a:t>CHEVY GMC BULLHEAD</a:t>
+            </a:r>
+            <a:endParaRPr lang="en-US" sz="1200" dirty="0"/>
+          </a:p>
+        </p:txBody>
+      </p:sp>
+      <p:sp>
+        <p:nvSpPr>
+          <p:cNvPr id="82" name="Shape 80"/>
           <p:cNvSpPr/>
           <p:nvPr/>
         </p:nvSpPr>
         <p:spPr>
           <a:xfrm>
-            <a:off x="3785616" y="5030502"/>
-            <a:ext cx="66109" cy="110352"/>
+            <a:off x="3579876" y="5090691"/>
+            <a:ext cx="63122" cy="102929"/>
           </a:xfrm>
           <a:prstGeom prst="rect">
             <a:avLst/>
@@ -15036,14 +16009,14 @@
       </p:sp>
       <p:sp>
         <p:nvSpPr>
-          <p:cNvPr id="66" name="Text 64"/>
-          <p:cNvSpPr txBox="1"/>
-          <p:nvPr/>
-        </p:nvSpPr>
-        <p:spPr>
-          <a:xfrm>
-            <a:off x="4617720" y="4965730"/>
-            <a:ext cx="1234440" cy="239896"/>
+          <p:cNvPr id="83" name="Text 81"/>
+          <p:cNvSpPr txBox="1"/>
+          <p:nvPr/>
+        </p:nvSpPr>
+        <p:spPr>
+          <a:xfrm>
+            <a:off x="4206240" y="5030276"/>
+            <a:ext cx="777240" cy="223759"/>
           </a:xfrm>
           <a:prstGeom prst="rect">
             <a:avLst/>
@@ -15067,22 +16040,22 @@
                 <a:ea typeface="Inter" pitchFamily="34" charset="-122"/>
                 <a:cs typeface="Inter" pitchFamily="34" charset="-120"/>
               </a:rPr>
-              <a:t>+$5.14</a:t>
-            </a:r>
-            <a:endParaRPr lang="en-US" sz="1200" dirty="0"/>
-          </a:p>
-        </p:txBody>
-      </p:sp>
-      <p:sp>
-        <p:nvSpPr>
-          <p:cNvPr id="67" name="Text 65"/>
-          <p:cNvSpPr txBox="1"/>
-          <p:nvPr/>
-        </p:nvSpPr>
-        <p:spPr>
-          <a:xfrm>
-            <a:off x="658368" y="5205625"/>
-            <a:ext cx="310896" cy="239896"/>
+              <a:t>+3.3%</a:t>
+            </a:r>
+            <a:endParaRPr lang="en-US" sz="1200" dirty="0"/>
+          </a:p>
+        </p:txBody>
+      </p:sp>
+      <p:sp>
+        <p:nvSpPr>
+          <p:cNvPr id="84" name="Text 82"/>
+          <p:cNvSpPr txBox="1"/>
+          <p:nvPr/>
+        </p:nvSpPr>
+        <p:spPr>
+          <a:xfrm>
+            <a:off x="4983480" y="5030276"/>
+            <a:ext cx="868680" cy="223759"/>
           </a:xfrm>
           <a:prstGeom prst="rect">
             <a:avLst/>
@@ -15100,6 +16073,45 @@
             <a:r>
               <a:rPr lang="en-US" sz="1200" dirty="0">
                 <a:solidFill>
+                  <a:srgbClr val="0B7A4A"/>
+                </a:solidFill>
+                <a:latin typeface="Inter" pitchFamily="34" charset="0"/>
+                <a:ea typeface="Inter" pitchFamily="34" charset="-122"/>
+                <a:cs typeface="Inter" pitchFamily="34" charset="-120"/>
+              </a:rPr>
+              <a:t>+$5</a:t>
+            </a:r>
+            <a:endParaRPr lang="en-US" sz="1200" dirty="0"/>
+          </a:p>
+        </p:txBody>
+      </p:sp>
+      <p:sp>
+        <p:nvSpPr>
+          <p:cNvPr id="85" name="Text 83"/>
+          <p:cNvSpPr txBox="1"/>
+          <p:nvPr/>
+        </p:nvSpPr>
+        <p:spPr>
+          <a:xfrm>
+            <a:off x="658368" y="5254035"/>
+            <a:ext cx="310896" cy="223759"/>
+          </a:xfrm>
+          <a:prstGeom prst="rect">
+            <a:avLst/>
+          </a:prstGeom>
+          <a:noFill/>
+          <a:ln/>
+        </p:spPr>
+        <p:txBody>
+          <a:bodyPr wrap="square" lIns="0" tIns="0" rIns="0" bIns="0" rtlCol="0" anchor="ctr"/>
+          <a:lstStyle/>
+          <a:p>
+            <a:pPr algn="r" indent="0" marL="0">
+              <a:buNone/>
+            </a:pPr>
+            <a:r>
+              <a:rPr lang="en-US" sz="1200" dirty="0">
+                <a:solidFill>
                   <a:srgbClr val="9AA3AD"/>
                 </a:solidFill>
                 <a:latin typeface="Inter" pitchFamily="34" charset="0"/>
@@ -15114,14 +16126,14 @@
       </p:sp>
       <p:sp>
         <p:nvSpPr>
-          <p:cNvPr id="68" name="Text 66"/>
-          <p:cNvSpPr txBox="1"/>
-          <p:nvPr/>
-        </p:nvSpPr>
-        <p:spPr>
-          <a:xfrm>
-            <a:off x="1014984" y="5205625"/>
-            <a:ext cx="1920240" cy="239896"/>
+          <p:cNvPr id="86" name="Text 84"/>
+          <p:cNvSpPr txBox="1"/>
+          <p:nvPr/>
+        </p:nvSpPr>
+        <p:spPr>
+          <a:xfrm>
+            <a:off x="1014984" y="5254035"/>
+            <a:ext cx="1920240" cy="223759"/>
           </a:xfrm>
           <a:prstGeom prst="rect">
             <a:avLst/>
@@ -15145,22 +16157,22 @@
                 <a:ea typeface="Inter" pitchFamily="34" charset="-122"/>
                 <a:cs typeface="Inter" pitchFamily="34" charset="-120"/>
               </a:rPr>
-              <a:t>AUDI RENO</a:t>
-            </a:r>
-            <a:endParaRPr lang="en-US" sz="1200" dirty="0"/>
-          </a:p>
-        </p:txBody>
-      </p:sp>
-      <p:sp>
-        <p:nvSpPr>
-          <p:cNvPr id="69" name="Shape 67"/>
+              <a:t>TOYOTA FLAGSTAFF</a:t>
+            </a:r>
+            <a:endParaRPr lang="en-US" sz="1200" dirty="0"/>
+          </a:p>
+        </p:txBody>
+      </p:sp>
+      <p:sp>
+        <p:nvSpPr>
+          <p:cNvPr id="87" name="Shape 85"/>
           <p:cNvSpPr/>
           <p:nvPr/>
         </p:nvSpPr>
         <p:spPr>
           <a:xfrm>
-            <a:off x="3785616" y="5270397"/>
-            <a:ext cx="58016" cy="110352"/>
+            <a:off x="3579876" y="5314450"/>
+            <a:ext cx="59886" cy="102929"/>
           </a:xfrm>
           <a:prstGeom prst="rect">
             <a:avLst/>
@@ -15173,14 +16185,14 @@
       </p:sp>
       <p:sp>
         <p:nvSpPr>
-          <p:cNvPr id="70" name="Text 68"/>
-          <p:cNvSpPr txBox="1"/>
-          <p:nvPr/>
-        </p:nvSpPr>
-        <p:spPr>
-          <a:xfrm>
-            <a:off x="4617720" y="5205625"/>
-            <a:ext cx="1234440" cy="239896"/>
+          <p:cNvPr id="88" name="Text 86"/>
+          <p:cNvSpPr txBox="1"/>
+          <p:nvPr/>
+        </p:nvSpPr>
+        <p:spPr>
+          <a:xfrm>
+            <a:off x="4206240" y="5254035"/>
+            <a:ext cx="777240" cy="223759"/>
           </a:xfrm>
           <a:prstGeom prst="rect">
             <a:avLst/>
@@ -15204,22 +16216,22 @@
                 <a:ea typeface="Inter" pitchFamily="34" charset="-122"/>
                 <a:cs typeface="Inter" pitchFamily="34" charset="-120"/>
               </a:rPr>
-              <a:t>+$4.51</a:t>
-            </a:r>
-            <a:endParaRPr lang="en-US" sz="1200" dirty="0"/>
-          </a:p>
-        </p:txBody>
-      </p:sp>
-      <p:sp>
-        <p:nvSpPr>
-          <p:cNvPr id="71" name="Text 69"/>
-          <p:cNvSpPr txBox="1"/>
-          <p:nvPr/>
-        </p:nvSpPr>
-        <p:spPr>
-          <a:xfrm>
-            <a:off x="658368" y="5445521"/>
-            <a:ext cx="310896" cy="239896"/>
+              <a:t>+3.1%</a:t>
+            </a:r>
+            <a:endParaRPr lang="en-US" sz="1200" dirty="0"/>
+          </a:p>
+        </p:txBody>
+      </p:sp>
+      <p:sp>
+        <p:nvSpPr>
+          <p:cNvPr id="89" name="Text 87"/>
+          <p:cNvSpPr txBox="1"/>
+          <p:nvPr/>
+        </p:nvSpPr>
+        <p:spPr>
+          <a:xfrm>
+            <a:off x="4983480" y="5254035"/>
+            <a:ext cx="868680" cy="223759"/>
           </a:xfrm>
           <a:prstGeom prst="rect">
             <a:avLst/>
@@ -15237,6 +16249,45 @@
             <a:r>
               <a:rPr lang="en-US" sz="1200" dirty="0">
                 <a:solidFill>
+                  <a:srgbClr val="0B7A4A"/>
+                </a:solidFill>
+                <a:latin typeface="Inter" pitchFamily="34" charset="0"/>
+                <a:ea typeface="Inter" pitchFamily="34" charset="-122"/>
+                <a:cs typeface="Inter" pitchFamily="34" charset="-120"/>
+              </a:rPr>
+              <a:t>+$4</a:t>
+            </a:r>
+            <a:endParaRPr lang="en-US" sz="1200" dirty="0"/>
+          </a:p>
+        </p:txBody>
+      </p:sp>
+      <p:sp>
+        <p:nvSpPr>
+          <p:cNvPr id="90" name="Text 88"/>
+          <p:cNvSpPr txBox="1"/>
+          <p:nvPr/>
+        </p:nvSpPr>
+        <p:spPr>
+          <a:xfrm>
+            <a:off x="658368" y="5477794"/>
+            <a:ext cx="310896" cy="223759"/>
+          </a:xfrm>
+          <a:prstGeom prst="rect">
+            <a:avLst/>
+          </a:prstGeom>
+          <a:noFill/>
+          <a:ln/>
+        </p:spPr>
+        <p:txBody>
+          <a:bodyPr wrap="square" lIns="0" tIns="0" rIns="0" bIns="0" rtlCol="0" anchor="ctr"/>
+          <a:lstStyle/>
+          <a:p>
+            <a:pPr algn="r" indent="0" marL="0">
+              <a:buNone/>
+            </a:pPr>
+            <a:r>
+              <a:rPr lang="en-US" sz="1200" dirty="0">
+                <a:solidFill>
                   <a:srgbClr val="9AA3AD"/>
                 </a:solidFill>
                 <a:latin typeface="Inter" pitchFamily="34" charset="0"/>
@@ -15251,14 +16302,14 @@
       </p:sp>
       <p:sp>
         <p:nvSpPr>
-          <p:cNvPr id="72" name="Text 70"/>
-          <p:cNvSpPr txBox="1"/>
-          <p:nvPr/>
-        </p:nvSpPr>
-        <p:spPr>
-          <a:xfrm>
-            <a:off x="1014984" y="5445521"/>
-            <a:ext cx="1920240" cy="239896"/>
+          <p:cNvPr id="91" name="Text 89"/>
+          <p:cNvSpPr txBox="1"/>
+          <p:nvPr/>
+        </p:nvSpPr>
+        <p:spPr>
+          <a:xfrm>
+            <a:off x="1014984" y="5477794"/>
+            <a:ext cx="1920240" cy="223759"/>
           </a:xfrm>
           <a:prstGeom prst="rect">
             <a:avLst/>
@@ -15282,22 +16333,22 @@
                 <a:ea typeface="Inter" pitchFamily="34" charset="-122"/>
                 <a:cs typeface="Inter" pitchFamily="34" charset="-120"/>
               </a:rPr>
-              <a:t>VOLVO</a:t>
-            </a:r>
-            <a:endParaRPr lang="en-US" sz="1200" dirty="0"/>
-          </a:p>
-        </p:txBody>
-      </p:sp>
-      <p:sp>
-        <p:nvSpPr>
-          <p:cNvPr id="73" name="Shape 71"/>
+              <a:t>AUDI RENO</a:t>
+            </a:r>
+            <a:endParaRPr lang="en-US" sz="1200" dirty="0"/>
+          </a:p>
+        </p:txBody>
+      </p:sp>
+      <p:sp>
+        <p:nvSpPr>
+          <p:cNvPr id="92" name="Shape 90"/>
           <p:cNvSpPr/>
           <p:nvPr/>
         </p:nvSpPr>
         <p:spPr>
           <a:xfrm>
-            <a:off x="3785616" y="5510293"/>
-            <a:ext cx="49142" cy="110352"/>
+            <a:off x="3579876" y="5538209"/>
+            <a:ext cx="50878" cy="102929"/>
           </a:xfrm>
           <a:prstGeom prst="rect">
             <a:avLst/>
@@ -15310,14 +16361,14 @@
       </p:sp>
       <p:sp>
         <p:nvSpPr>
-          <p:cNvPr id="74" name="Text 72"/>
-          <p:cNvSpPr txBox="1"/>
-          <p:nvPr/>
-        </p:nvSpPr>
-        <p:spPr>
-          <a:xfrm>
-            <a:off x="4617720" y="5445521"/>
-            <a:ext cx="1234440" cy="239896"/>
+          <p:cNvPr id="93" name="Text 91"/>
+          <p:cNvSpPr txBox="1"/>
+          <p:nvPr/>
+        </p:nvSpPr>
+        <p:spPr>
+          <a:xfrm>
+            <a:off x="4206240" y="5477794"/>
+            <a:ext cx="777240" cy="223759"/>
           </a:xfrm>
           <a:prstGeom prst="rect">
             <a:avLst/>
@@ -15341,22 +16392,22 @@
                 <a:ea typeface="Inter" pitchFamily="34" charset="-122"/>
                 <a:cs typeface="Inter" pitchFamily="34" charset="-120"/>
               </a:rPr>
-              <a:t>+$3.82</a:t>
-            </a:r>
-            <a:endParaRPr lang="en-US" sz="1200" dirty="0"/>
-          </a:p>
-        </p:txBody>
-      </p:sp>
-      <p:sp>
-        <p:nvSpPr>
-          <p:cNvPr id="75" name="Text 73"/>
-          <p:cNvSpPr txBox="1"/>
-          <p:nvPr/>
-        </p:nvSpPr>
-        <p:spPr>
-          <a:xfrm>
-            <a:off x="658368" y="5685416"/>
-            <a:ext cx="310896" cy="239896"/>
+              <a:t>+2.6%</a:t>
+            </a:r>
+            <a:endParaRPr lang="en-US" sz="1200" dirty="0"/>
+          </a:p>
+        </p:txBody>
+      </p:sp>
+      <p:sp>
+        <p:nvSpPr>
+          <p:cNvPr id="94" name="Text 92"/>
+          <p:cNvSpPr txBox="1"/>
+          <p:nvPr/>
+        </p:nvSpPr>
+        <p:spPr>
+          <a:xfrm>
+            <a:off x="4983480" y="5477794"/>
+            <a:ext cx="868680" cy="223759"/>
           </a:xfrm>
           <a:prstGeom prst="rect">
             <a:avLst/>
@@ -15374,6 +16425,45 @@
             <a:r>
               <a:rPr lang="en-US" sz="1200" dirty="0">
                 <a:solidFill>
+                  <a:srgbClr val="0B7A4A"/>
+                </a:solidFill>
+                <a:latin typeface="Inter" pitchFamily="34" charset="0"/>
+                <a:ea typeface="Inter" pitchFamily="34" charset="-122"/>
+                <a:cs typeface="Inter" pitchFamily="34" charset="-120"/>
+              </a:rPr>
+              <a:t>+$5</a:t>
+            </a:r>
+            <a:endParaRPr lang="en-US" sz="1200" dirty="0"/>
+          </a:p>
+        </p:txBody>
+      </p:sp>
+      <p:sp>
+        <p:nvSpPr>
+          <p:cNvPr id="95" name="Text 93"/>
+          <p:cNvSpPr txBox="1"/>
+          <p:nvPr/>
+        </p:nvSpPr>
+        <p:spPr>
+          <a:xfrm>
+            <a:off x="658368" y="5701553"/>
+            <a:ext cx="310896" cy="223759"/>
+          </a:xfrm>
+          <a:prstGeom prst="rect">
+            <a:avLst/>
+          </a:prstGeom>
+          <a:noFill/>
+          <a:ln/>
+        </p:spPr>
+        <p:txBody>
+          <a:bodyPr wrap="square" lIns="0" tIns="0" rIns="0" bIns="0" rtlCol="0" anchor="ctr"/>
+          <a:lstStyle/>
+          <a:p>
+            <a:pPr algn="r" indent="0" marL="0">
+              <a:buNone/>
+            </a:pPr>
+            <a:r>
+              <a:rPr lang="en-US" sz="1200" dirty="0">
+                <a:solidFill>
                   <a:srgbClr val="9AA3AD"/>
                 </a:solidFill>
                 <a:latin typeface="Inter" pitchFamily="34" charset="0"/>
@@ -15388,14 +16478,14 @@
       </p:sp>
       <p:sp>
         <p:nvSpPr>
-          <p:cNvPr id="76" name="Text 74"/>
-          <p:cNvSpPr txBox="1"/>
-          <p:nvPr/>
-        </p:nvSpPr>
-        <p:spPr>
-          <a:xfrm>
-            <a:off x="1014984" y="5685416"/>
-            <a:ext cx="1920240" cy="239896"/>
+          <p:cNvPr id="96" name="Text 94"/>
+          <p:cNvSpPr txBox="1"/>
+          <p:nvPr/>
+        </p:nvSpPr>
+        <p:spPr>
+          <a:xfrm>
+            <a:off x="1014984" y="5701553"/>
+            <a:ext cx="1920240" cy="223759"/>
           </a:xfrm>
           <a:prstGeom prst="rect">
             <a:avLst/>
@@ -15427,14 +16517,14 @@
       </p:sp>
       <p:sp>
         <p:nvSpPr>
-          <p:cNvPr id="77" name="Shape 75"/>
+          <p:cNvPr id="97" name="Shape 95"/>
           <p:cNvSpPr/>
           <p:nvPr/>
         </p:nvSpPr>
         <p:spPr>
           <a:xfrm>
-            <a:off x="3785616" y="5750188"/>
-            <a:ext cx="48226" cy="110352"/>
+            <a:off x="3579876" y="5761968"/>
+            <a:ext cx="48098" cy="102929"/>
           </a:xfrm>
           <a:prstGeom prst="rect">
             <a:avLst/>
@@ -15447,14 +16537,14 @@
       </p:sp>
       <p:sp>
         <p:nvSpPr>
-          <p:cNvPr id="78" name="Text 76"/>
-          <p:cNvSpPr txBox="1"/>
-          <p:nvPr/>
-        </p:nvSpPr>
-        <p:spPr>
-          <a:xfrm>
-            <a:off x="4617720" y="5685416"/>
-            <a:ext cx="1234440" cy="239896"/>
+          <p:cNvPr id="98" name="Text 96"/>
+          <p:cNvSpPr txBox="1"/>
+          <p:nvPr/>
+        </p:nvSpPr>
+        <p:spPr>
+          <a:xfrm>
+            <a:off x="4206240" y="5701553"/>
+            <a:ext cx="777240" cy="223759"/>
           </a:xfrm>
           <a:prstGeom prst="rect">
             <a:avLst/>
@@ -15478,22 +16568,22 @@
                 <a:ea typeface="Inter" pitchFamily="34" charset="-122"/>
                 <a:cs typeface="Inter" pitchFamily="34" charset="-120"/>
               </a:rPr>
-              <a:t>+$3.75</a:t>
-            </a:r>
-            <a:endParaRPr lang="en-US" sz="1200" dirty="0"/>
-          </a:p>
-        </p:txBody>
-      </p:sp>
-      <p:sp>
-        <p:nvSpPr>
-          <p:cNvPr id="79" name="Text 77"/>
-          <p:cNvSpPr txBox="1"/>
-          <p:nvPr/>
-        </p:nvSpPr>
-        <p:spPr>
-          <a:xfrm>
-            <a:off x="6208776" y="1847088"/>
-            <a:ext cx="310896" cy="239896"/>
+              <a:t>+2.5%</a:t>
+            </a:r>
+            <a:endParaRPr lang="en-US" sz="1200" dirty="0"/>
+          </a:p>
+        </p:txBody>
+      </p:sp>
+      <p:sp>
+        <p:nvSpPr>
+          <p:cNvPr id="99" name="Text 97"/>
+          <p:cNvSpPr txBox="1"/>
+          <p:nvPr/>
+        </p:nvSpPr>
+        <p:spPr>
+          <a:xfrm>
+            <a:off x="4983480" y="5701553"/>
+            <a:ext cx="868680" cy="223759"/>
           </a:xfrm>
           <a:prstGeom prst="rect">
             <a:avLst/>
@@ -15511,6 +16601,45 @@
             <a:r>
               <a:rPr lang="en-US" sz="1200" dirty="0">
                 <a:solidFill>
+                  <a:srgbClr val="0B7A4A"/>
+                </a:solidFill>
+                <a:latin typeface="Inter" pitchFamily="34" charset="0"/>
+                <a:ea typeface="Inter" pitchFamily="34" charset="-122"/>
+                <a:cs typeface="Inter" pitchFamily="34" charset="-120"/>
+              </a:rPr>
+              <a:t>+$4</a:t>
+            </a:r>
+            <a:endParaRPr lang="en-US" sz="1200" dirty="0"/>
+          </a:p>
+        </p:txBody>
+      </p:sp>
+      <p:sp>
+        <p:nvSpPr>
+          <p:cNvPr id="100" name="Text 98"/>
+          <p:cNvSpPr txBox="1"/>
+          <p:nvPr/>
+        </p:nvSpPr>
+        <p:spPr>
+          <a:xfrm>
+            <a:off x="6208776" y="2121408"/>
+            <a:ext cx="310896" cy="223759"/>
+          </a:xfrm>
+          <a:prstGeom prst="rect">
+            <a:avLst/>
+          </a:prstGeom>
+          <a:noFill/>
+          <a:ln/>
+        </p:spPr>
+        <p:txBody>
+          <a:bodyPr wrap="square" lIns="0" tIns="0" rIns="0" bIns="0" rtlCol="0" anchor="ctr"/>
+          <a:lstStyle/>
+          <a:p>
+            <a:pPr algn="r" indent="0" marL="0">
+              <a:buNone/>
+            </a:pPr>
+            <a:r>
+              <a:rPr lang="en-US" sz="1200" dirty="0">
+                <a:solidFill>
                   <a:srgbClr val="9AA3AD"/>
                 </a:solidFill>
                 <a:latin typeface="Inter" pitchFamily="34" charset="0"/>
@@ -15525,14 +16654,14 @@
       </p:sp>
       <p:sp>
         <p:nvSpPr>
-          <p:cNvPr id="80" name="Text 78"/>
-          <p:cNvSpPr txBox="1"/>
-          <p:nvPr/>
-        </p:nvSpPr>
-        <p:spPr>
-          <a:xfrm>
-            <a:off x="6565392" y="1847088"/>
-            <a:ext cx="1920240" cy="239896"/>
+          <p:cNvPr id="101" name="Text 99"/>
+          <p:cNvSpPr txBox="1"/>
+          <p:nvPr/>
+        </p:nvSpPr>
+        <p:spPr>
+          <a:xfrm>
+            <a:off x="6565392" y="2121408"/>
+            <a:ext cx="1920240" cy="223759"/>
           </a:xfrm>
           <a:prstGeom prst="rect">
             <a:avLst/>
@@ -15556,22 +16685,22 @@
                 <a:ea typeface="Inter" pitchFamily="34" charset="-122"/>
                 <a:cs typeface="Inter" pitchFamily="34" charset="-120"/>
               </a:rPr>
-              <a:t>TOYOTA FLAGSTAFF</a:t>
-            </a:r>
-            <a:endParaRPr lang="en-US" sz="1200" dirty="0"/>
-          </a:p>
-        </p:txBody>
-      </p:sp>
-      <p:sp>
-        <p:nvSpPr>
-          <p:cNvPr id="81" name="Shape 79"/>
+              <a:t>VOLVO</a:t>
+            </a:r>
+            <a:endParaRPr lang="en-US" sz="1200" dirty="0"/>
+          </a:p>
+        </p:txBody>
+      </p:sp>
+      <p:sp>
+        <p:nvSpPr>
+          <p:cNvPr id="102" name="Shape 100"/>
           <p:cNvSpPr/>
           <p:nvPr/>
         </p:nvSpPr>
         <p:spPr>
           <a:xfrm>
-            <a:off x="9336024" y="1911860"/>
-            <a:ext cx="46014" cy="110352"/>
+            <a:off x="9130284" y="2181823"/>
+            <a:ext cx="40236" cy="102929"/>
           </a:xfrm>
           <a:prstGeom prst="rect">
             <a:avLst/>
@@ -15584,14 +16713,14 @@
       </p:sp>
       <p:sp>
         <p:nvSpPr>
-          <p:cNvPr id="82" name="Text 80"/>
-          <p:cNvSpPr txBox="1"/>
-          <p:nvPr/>
-        </p:nvSpPr>
-        <p:spPr>
-          <a:xfrm>
-            <a:off x="10168128" y="1847088"/>
-            <a:ext cx="1234440" cy="239896"/>
+          <p:cNvPr id="103" name="Text 101"/>
+          <p:cNvSpPr txBox="1"/>
+          <p:nvPr/>
+        </p:nvSpPr>
+        <p:spPr>
+          <a:xfrm>
+            <a:off x="9756648" y="2121408"/>
+            <a:ext cx="777240" cy="223759"/>
           </a:xfrm>
           <a:prstGeom prst="rect">
             <a:avLst/>
@@ -15615,22 +16744,22 @@
                 <a:ea typeface="Inter" pitchFamily="34" charset="-122"/>
                 <a:cs typeface="Inter" pitchFamily="34" charset="-120"/>
               </a:rPr>
-              <a:t>+$3.58</a:t>
-            </a:r>
-            <a:endParaRPr lang="en-US" sz="1200" dirty="0"/>
-          </a:p>
-        </p:txBody>
-      </p:sp>
-      <p:sp>
-        <p:nvSpPr>
-          <p:cNvPr id="83" name="Text 81"/>
-          <p:cNvSpPr txBox="1"/>
-          <p:nvPr/>
-        </p:nvSpPr>
-        <p:spPr>
-          <a:xfrm>
-            <a:off x="6208776" y="2086984"/>
-            <a:ext cx="310896" cy="239896"/>
+              <a:t>+2.1%</a:t>
+            </a:r>
+            <a:endParaRPr lang="en-US" sz="1200" dirty="0"/>
+          </a:p>
+        </p:txBody>
+      </p:sp>
+      <p:sp>
+        <p:nvSpPr>
+          <p:cNvPr id="104" name="Text 102"/>
+          <p:cNvSpPr txBox="1"/>
+          <p:nvPr/>
+        </p:nvSpPr>
+        <p:spPr>
+          <a:xfrm>
+            <a:off x="10533888" y="2121408"/>
+            <a:ext cx="868680" cy="223759"/>
           </a:xfrm>
           <a:prstGeom prst="rect">
             <a:avLst/>
@@ -15648,6 +16777,45 @@
             <a:r>
               <a:rPr lang="en-US" sz="1200" dirty="0">
                 <a:solidFill>
+                  <a:srgbClr val="0B7A4A"/>
+                </a:solidFill>
+                <a:latin typeface="Inter" pitchFamily="34" charset="0"/>
+                <a:ea typeface="Inter" pitchFamily="34" charset="-122"/>
+                <a:cs typeface="Inter" pitchFamily="34" charset="-120"/>
+              </a:rPr>
+              <a:t>+$4</a:t>
+            </a:r>
+            <a:endParaRPr lang="en-US" sz="1200" dirty="0"/>
+          </a:p>
+        </p:txBody>
+      </p:sp>
+      <p:sp>
+        <p:nvSpPr>
+          <p:cNvPr id="105" name="Text 103"/>
+          <p:cNvSpPr txBox="1"/>
+          <p:nvPr/>
+        </p:nvSpPr>
+        <p:spPr>
+          <a:xfrm>
+            <a:off x="6208776" y="2345167"/>
+            <a:ext cx="310896" cy="223759"/>
+          </a:xfrm>
+          <a:prstGeom prst="rect">
+            <a:avLst/>
+          </a:prstGeom>
+          <a:noFill/>
+          <a:ln/>
+        </p:spPr>
+        <p:txBody>
+          <a:bodyPr wrap="square" lIns="0" tIns="0" rIns="0" bIns="0" rtlCol="0" anchor="ctr"/>
+          <a:lstStyle/>
+          <a:p>
+            <a:pPr algn="r" indent="0" marL="0">
+              <a:buNone/>
+            </a:pPr>
+            <a:r>
+              <a:rPr lang="en-US" sz="1200" dirty="0">
+                <a:solidFill>
                   <a:srgbClr val="9AA3AD"/>
                 </a:solidFill>
                 <a:latin typeface="Inter" pitchFamily="34" charset="0"/>
@@ -15662,14 +16830,14 @@
       </p:sp>
       <p:sp>
         <p:nvSpPr>
-          <p:cNvPr id="84" name="Text 82"/>
-          <p:cNvSpPr txBox="1"/>
-          <p:nvPr/>
-        </p:nvSpPr>
-        <p:spPr>
-          <a:xfrm>
-            <a:off x="6565392" y="2086984"/>
-            <a:ext cx="1920240" cy="239896"/>
+          <p:cNvPr id="106" name="Text 104"/>
+          <p:cNvSpPr txBox="1"/>
+          <p:nvPr/>
+        </p:nvSpPr>
+        <p:spPr>
+          <a:xfrm>
+            <a:off x="6565392" y="2345167"/>
+            <a:ext cx="1920240" cy="223759"/>
           </a:xfrm>
           <a:prstGeom prst="rect">
             <a:avLst/>
@@ -15701,14 +16869,14 @@
       </p:sp>
       <p:sp>
         <p:nvSpPr>
-          <p:cNvPr id="85" name="Shape 83"/>
+          <p:cNvPr id="107" name="Shape 105"/>
           <p:cNvSpPr/>
           <p:nvPr/>
         </p:nvSpPr>
         <p:spPr>
           <a:xfrm>
-            <a:off x="9336024" y="2151755"/>
-            <a:ext cx="24966" cy="110352"/>
+            <a:off x="9130284" y="2405582"/>
+            <a:ext cx="27776" cy="102929"/>
           </a:xfrm>
           <a:prstGeom prst="rect">
             <a:avLst/>
@@ -15721,14 +16889,14 @@
       </p:sp>
       <p:sp>
         <p:nvSpPr>
-          <p:cNvPr id="86" name="Text 84"/>
-          <p:cNvSpPr txBox="1"/>
-          <p:nvPr/>
-        </p:nvSpPr>
-        <p:spPr>
-          <a:xfrm>
-            <a:off x="10168128" y="2086984"/>
-            <a:ext cx="1234440" cy="239896"/>
+          <p:cNvPr id="108" name="Text 106"/>
+          <p:cNvSpPr txBox="1"/>
+          <p:nvPr/>
+        </p:nvSpPr>
+        <p:spPr>
+          <a:xfrm>
+            <a:off x="9756648" y="2345167"/>
+            <a:ext cx="777240" cy="223759"/>
           </a:xfrm>
           <a:prstGeom prst="rect">
             <a:avLst/>
@@ -15752,22 +16920,22 @@
                 <a:ea typeface="Inter" pitchFamily="34" charset="-122"/>
                 <a:cs typeface="Inter" pitchFamily="34" charset="-120"/>
               </a:rPr>
-              <a:t>+$1.94</a:t>
-            </a:r>
-            <a:endParaRPr lang="en-US" sz="1200" dirty="0"/>
-          </a:p>
-        </p:txBody>
-      </p:sp>
-      <p:sp>
-        <p:nvSpPr>
-          <p:cNvPr id="87" name="Text 85"/>
-          <p:cNvSpPr txBox="1"/>
-          <p:nvPr/>
-        </p:nvSpPr>
-        <p:spPr>
-          <a:xfrm>
-            <a:off x="6208776" y="2326879"/>
-            <a:ext cx="310896" cy="239896"/>
+              <a:t>+1.4%</a:t>
+            </a:r>
+            <a:endParaRPr lang="en-US" sz="1200" dirty="0"/>
+          </a:p>
+        </p:txBody>
+      </p:sp>
+      <p:sp>
+        <p:nvSpPr>
+          <p:cNvPr id="109" name="Text 107"/>
+          <p:cNvSpPr txBox="1"/>
+          <p:nvPr/>
+        </p:nvSpPr>
+        <p:spPr>
+          <a:xfrm>
+            <a:off x="10533888" y="2345167"/>
+            <a:ext cx="868680" cy="223759"/>
           </a:xfrm>
           <a:prstGeom prst="rect">
             <a:avLst/>
@@ -15785,6 +16953,45 @@
             <a:r>
               <a:rPr lang="en-US" sz="1200" dirty="0">
                 <a:solidFill>
+                  <a:srgbClr val="0B7A4A"/>
+                </a:solidFill>
+                <a:latin typeface="Inter" pitchFamily="34" charset="0"/>
+                <a:ea typeface="Inter" pitchFamily="34" charset="-122"/>
+                <a:cs typeface="Inter" pitchFamily="34" charset="-120"/>
+              </a:rPr>
+              <a:t>+$2</a:t>
+            </a:r>
+            <a:endParaRPr lang="en-US" sz="1200" dirty="0"/>
+          </a:p>
+        </p:txBody>
+      </p:sp>
+      <p:sp>
+        <p:nvSpPr>
+          <p:cNvPr id="110" name="Text 108"/>
+          <p:cNvSpPr txBox="1"/>
+          <p:nvPr/>
+        </p:nvSpPr>
+        <p:spPr>
+          <a:xfrm>
+            <a:off x="6208776" y="2568926"/>
+            <a:ext cx="310896" cy="223759"/>
+          </a:xfrm>
+          <a:prstGeom prst="rect">
+            <a:avLst/>
+          </a:prstGeom>
+          <a:noFill/>
+          <a:ln/>
+        </p:spPr>
+        <p:txBody>
+          <a:bodyPr wrap="square" lIns="0" tIns="0" rIns="0" bIns="0" rtlCol="0" anchor="ctr"/>
+          <a:lstStyle/>
+          <a:p>
+            <a:pPr algn="r" indent="0" marL="0">
+              <a:buNone/>
+            </a:pPr>
+            <a:r>
+              <a:rPr lang="en-US" sz="1200" dirty="0">
+                <a:solidFill>
                   <a:srgbClr val="9AA3AD"/>
                 </a:solidFill>
                 <a:latin typeface="Inter" pitchFamily="34" charset="0"/>
@@ -15799,14 +17006,14 @@
       </p:sp>
       <p:sp>
         <p:nvSpPr>
-          <p:cNvPr id="88" name="Text 86"/>
-          <p:cNvSpPr txBox="1"/>
-          <p:nvPr/>
-        </p:nvSpPr>
-        <p:spPr>
-          <a:xfrm>
-            <a:off x="6565392" y="2326879"/>
-            <a:ext cx="1920240" cy="239896"/>
+          <p:cNvPr id="111" name="Text 109"/>
+          <p:cNvSpPr txBox="1"/>
+          <p:nvPr/>
+        </p:nvSpPr>
+        <p:spPr>
+          <a:xfrm>
+            <a:off x="6565392" y="2568926"/>
+            <a:ext cx="1920240" cy="223759"/>
           </a:xfrm>
           <a:prstGeom prst="rect">
             <a:avLst/>
@@ -15838,14 +17045,14 @@
       </p:sp>
       <p:sp>
         <p:nvSpPr>
-          <p:cNvPr id="89" name="Shape 87"/>
+          <p:cNvPr id="112" name="Shape 110"/>
           <p:cNvSpPr/>
           <p:nvPr/>
         </p:nvSpPr>
         <p:spPr>
           <a:xfrm>
-            <a:off x="9336024" y="2391651"/>
-            <a:ext cx="12802" cy="110352"/>
+            <a:off x="9130284" y="2629341"/>
+            <a:ext cx="12802" cy="102929"/>
           </a:xfrm>
           <a:prstGeom prst="rect">
             <a:avLst/>
@@ -15858,14 +17065,14 @@
       </p:sp>
       <p:sp>
         <p:nvSpPr>
-          <p:cNvPr id="90" name="Text 88"/>
-          <p:cNvSpPr txBox="1"/>
-          <p:nvPr/>
-        </p:nvSpPr>
-        <p:spPr>
-          <a:xfrm>
-            <a:off x="10168128" y="2326879"/>
-            <a:ext cx="1234440" cy="239896"/>
+          <p:cNvPr id="113" name="Text 111"/>
+          <p:cNvSpPr txBox="1"/>
+          <p:nvPr/>
+        </p:nvSpPr>
+        <p:spPr>
+          <a:xfrm>
+            <a:off x="9756648" y="2568926"/>
+            <a:ext cx="777240" cy="223759"/>
           </a:xfrm>
           <a:prstGeom prst="rect">
             <a:avLst/>
@@ -15889,22 +17096,22 @@
                 <a:ea typeface="Inter" pitchFamily="34" charset="-122"/>
                 <a:cs typeface="Inter" pitchFamily="34" charset="-120"/>
               </a:rPr>
-              <a:t>+$0.34</a:t>
-            </a:r>
-            <a:endParaRPr lang="en-US" sz="1200" dirty="0"/>
-          </a:p>
-        </p:txBody>
-      </p:sp>
-      <p:sp>
-        <p:nvSpPr>
-          <p:cNvPr id="91" name="Text 89"/>
-          <p:cNvSpPr txBox="1"/>
-          <p:nvPr/>
-        </p:nvSpPr>
-        <p:spPr>
-          <a:xfrm>
-            <a:off x="6208776" y="2566775"/>
-            <a:ext cx="310896" cy="239896"/>
+              <a:t>+0.3%</a:t>
+            </a:r>
+            <a:endParaRPr lang="en-US" sz="1200" dirty="0"/>
+          </a:p>
+        </p:txBody>
+      </p:sp>
+      <p:sp>
+        <p:nvSpPr>
+          <p:cNvPr id="114" name="Text 112"/>
+          <p:cNvSpPr txBox="1"/>
+          <p:nvPr/>
+        </p:nvSpPr>
+        <p:spPr>
+          <a:xfrm>
+            <a:off x="10533888" y="2568926"/>
+            <a:ext cx="868680" cy="223759"/>
           </a:xfrm>
           <a:prstGeom prst="rect">
             <a:avLst/>
@@ -15922,6 +17129,45 @@
             <a:r>
               <a:rPr lang="en-US" sz="1200" dirty="0">
                 <a:solidFill>
+                  <a:srgbClr val="0B7A4A"/>
+                </a:solidFill>
+                <a:latin typeface="Inter" pitchFamily="34" charset="0"/>
+                <a:ea typeface="Inter" pitchFamily="34" charset="-122"/>
+                <a:cs typeface="Inter" pitchFamily="34" charset="-120"/>
+              </a:rPr>
+              <a:t>+$0</a:t>
+            </a:r>
+            <a:endParaRPr lang="en-US" sz="1200" dirty="0"/>
+          </a:p>
+        </p:txBody>
+      </p:sp>
+      <p:sp>
+        <p:nvSpPr>
+          <p:cNvPr id="115" name="Text 113"/>
+          <p:cNvSpPr txBox="1"/>
+          <p:nvPr/>
+        </p:nvSpPr>
+        <p:spPr>
+          <a:xfrm>
+            <a:off x="6208776" y="2792685"/>
+            <a:ext cx="310896" cy="223759"/>
+          </a:xfrm>
+          <a:prstGeom prst="rect">
+            <a:avLst/>
+          </a:prstGeom>
+          <a:noFill/>
+          <a:ln/>
+        </p:spPr>
+        <p:txBody>
+          <a:bodyPr wrap="square" lIns="0" tIns="0" rIns="0" bIns="0" rtlCol="0" anchor="ctr"/>
+          <a:lstStyle/>
+          <a:p>
+            <a:pPr algn="r" indent="0" marL="0">
+              <a:buNone/>
+            </a:pPr>
+            <a:r>
+              <a:rPr lang="en-US" sz="1200" dirty="0">
+                <a:solidFill>
                   <a:srgbClr val="9AA3AD"/>
                 </a:solidFill>
                 <a:latin typeface="Inter" pitchFamily="34" charset="0"/>
@@ -15936,14 +17182,14 @@
       </p:sp>
       <p:sp>
         <p:nvSpPr>
-          <p:cNvPr id="92" name="Text 90"/>
-          <p:cNvSpPr txBox="1"/>
-          <p:nvPr/>
-        </p:nvSpPr>
-        <p:spPr>
-          <a:xfrm>
-            <a:off x="6565392" y="2566775"/>
-            <a:ext cx="1920240" cy="239896"/>
+          <p:cNvPr id="116" name="Text 114"/>
+          <p:cNvSpPr txBox="1"/>
+          <p:nvPr/>
+        </p:nvSpPr>
+        <p:spPr>
+          <a:xfrm>
+            <a:off x="6565392" y="2792685"/>
+            <a:ext cx="1920240" cy="223759"/>
           </a:xfrm>
           <a:prstGeom prst="rect">
             <a:avLst/>
@@ -15975,14 +17221,14 @@
       </p:sp>
       <p:sp>
         <p:nvSpPr>
-          <p:cNvPr id="93" name="Shape 91"/>
+          <p:cNvPr id="117" name="Shape 115"/>
           <p:cNvSpPr/>
           <p:nvPr/>
         </p:nvSpPr>
         <p:spPr>
           <a:xfrm>
-            <a:off x="9324019" y="2631546"/>
-            <a:ext cx="12802" cy="110352"/>
+            <a:off x="9116275" y="2853100"/>
+            <a:ext cx="14009" cy="102929"/>
           </a:xfrm>
           <a:prstGeom prst="rect">
             <a:avLst/>
@@ -15995,14 +17241,14 @@
       </p:sp>
       <p:sp>
         <p:nvSpPr>
-          <p:cNvPr id="94" name="Text 92"/>
-          <p:cNvSpPr txBox="1"/>
-          <p:nvPr/>
-        </p:nvSpPr>
-        <p:spPr>
-          <a:xfrm>
-            <a:off x="10168128" y="2566775"/>
-            <a:ext cx="1234440" cy="239896"/>
+          <p:cNvPr id="118" name="Text 116"/>
+          <p:cNvSpPr txBox="1"/>
+          <p:nvPr/>
+        </p:nvSpPr>
+        <p:spPr>
+          <a:xfrm>
+            <a:off x="9756648" y="2792685"/>
+            <a:ext cx="777240" cy="223759"/>
           </a:xfrm>
           <a:prstGeom prst="rect">
             <a:avLst/>
@@ -16026,22 +17272,22 @@
                 <a:ea typeface="Inter" pitchFamily="34" charset="-122"/>
                 <a:cs typeface="Inter" pitchFamily="34" charset="-120"/>
               </a:rPr>
-              <a:t>−$0.93</a:t>
-            </a:r>
-            <a:endParaRPr lang="en-US" sz="1200" dirty="0"/>
-          </a:p>
-        </p:txBody>
-      </p:sp>
-      <p:sp>
-        <p:nvSpPr>
-          <p:cNvPr id="95" name="Text 93"/>
-          <p:cNvSpPr txBox="1"/>
-          <p:nvPr/>
-        </p:nvSpPr>
-        <p:spPr>
-          <a:xfrm>
-            <a:off x="6208776" y="2806670"/>
-            <a:ext cx="310896" cy="239896"/>
+              <a:t>−0.7%</a:t>
+            </a:r>
+            <a:endParaRPr lang="en-US" sz="1200" dirty="0"/>
+          </a:p>
+        </p:txBody>
+      </p:sp>
+      <p:sp>
+        <p:nvSpPr>
+          <p:cNvPr id="119" name="Text 117"/>
+          <p:cNvSpPr txBox="1"/>
+          <p:nvPr/>
+        </p:nvSpPr>
+        <p:spPr>
+          <a:xfrm>
+            <a:off x="10533888" y="2792685"/>
+            <a:ext cx="868680" cy="223759"/>
           </a:xfrm>
           <a:prstGeom prst="rect">
             <a:avLst/>
@@ -16059,6 +17305,45 @@
             <a:r>
               <a:rPr lang="en-US" sz="1200" dirty="0">
                 <a:solidFill>
+                  <a:srgbClr val="A82B26"/>
+                </a:solidFill>
+                <a:latin typeface="Inter" pitchFamily="34" charset="0"/>
+                <a:ea typeface="Inter" pitchFamily="34" charset="-122"/>
+                <a:cs typeface="Inter" pitchFamily="34" charset="-120"/>
+              </a:rPr>
+              <a:t>−$1</a:t>
+            </a:r>
+            <a:endParaRPr lang="en-US" sz="1200" dirty="0"/>
+          </a:p>
+        </p:txBody>
+      </p:sp>
+      <p:sp>
+        <p:nvSpPr>
+          <p:cNvPr id="120" name="Text 118"/>
+          <p:cNvSpPr txBox="1"/>
+          <p:nvPr/>
+        </p:nvSpPr>
+        <p:spPr>
+          <a:xfrm>
+            <a:off x="6208776" y="3016444"/>
+            <a:ext cx="310896" cy="223759"/>
+          </a:xfrm>
+          <a:prstGeom prst="rect">
+            <a:avLst/>
+          </a:prstGeom>
+          <a:noFill/>
+          <a:ln/>
+        </p:spPr>
+        <p:txBody>
+          <a:bodyPr wrap="square" lIns="0" tIns="0" rIns="0" bIns="0" rtlCol="0" anchor="ctr"/>
+          <a:lstStyle/>
+          <a:p>
+            <a:pPr algn="r" indent="0" marL="0">
+              <a:buNone/>
+            </a:pPr>
+            <a:r>
+              <a:rPr lang="en-US" sz="1200" dirty="0">
+                <a:solidFill>
                   <a:srgbClr val="9AA3AD"/>
                 </a:solidFill>
                 <a:latin typeface="Inter" pitchFamily="34" charset="0"/>
@@ -16073,14 +17358,14 @@
       </p:sp>
       <p:sp>
         <p:nvSpPr>
-          <p:cNvPr id="96" name="Text 94"/>
-          <p:cNvSpPr txBox="1"/>
-          <p:nvPr/>
-        </p:nvSpPr>
-        <p:spPr>
-          <a:xfrm>
-            <a:off x="6565392" y="2806670"/>
-            <a:ext cx="1920240" cy="239896"/>
+          <p:cNvPr id="121" name="Text 119"/>
+          <p:cNvSpPr txBox="1"/>
+          <p:nvPr/>
+        </p:nvSpPr>
+        <p:spPr>
+          <a:xfrm>
+            <a:off x="6565392" y="3016444"/>
+            <a:ext cx="1920240" cy="223759"/>
           </a:xfrm>
           <a:prstGeom prst="rect">
             <a:avLst/>
@@ -16104,22 +17389,22 @@
                 <a:ea typeface="Inter" pitchFamily="34" charset="-122"/>
                 <a:cs typeface="Inter" pitchFamily="34" charset="-120"/>
               </a:rPr>
-              <a:t>CHEVY LV</a:t>
-            </a:r>
-            <a:endParaRPr lang="en-US" sz="1200" dirty="0"/>
-          </a:p>
-        </p:txBody>
-      </p:sp>
-      <p:sp>
-        <p:nvSpPr>
-          <p:cNvPr id="97" name="Shape 95"/>
+              <a:t>HYUNDAI PRESCOTT</a:t>
+            </a:r>
+            <a:endParaRPr lang="en-US" sz="1200" dirty="0"/>
+          </a:p>
+        </p:txBody>
+      </p:sp>
+      <p:sp>
+        <p:nvSpPr>
+          <p:cNvPr id="122" name="Shape 120"/>
           <p:cNvSpPr/>
           <p:nvPr/>
         </p:nvSpPr>
         <p:spPr>
           <a:xfrm>
-            <a:off x="9317348" y="2871442"/>
-            <a:ext cx="18676" cy="110352"/>
+            <a:off x="9109610" y="3076859"/>
+            <a:ext cx="20674" cy="102929"/>
           </a:xfrm>
           <a:prstGeom prst="rect">
             <a:avLst/>
@@ -16132,14 +17417,14 @@
       </p:sp>
       <p:sp>
         <p:nvSpPr>
-          <p:cNvPr id="98" name="Text 96"/>
-          <p:cNvSpPr txBox="1"/>
-          <p:nvPr/>
-        </p:nvSpPr>
-        <p:spPr>
-          <a:xfrm>
-            <a:off x="10168128" y="2806670"/>
-            <a:ext cx="1234440" cy="239896"/>
+          <p:cNvPr id="123" name="Text 121"/>
+          <p:cNvSpPr txBox="1"/>
+          <p:nvPr/>
+        </p:nvSpPr>
+        <p:spPr>
+          <a:xfrm>
+            <a:off x="9756648" y="3016444"/>
+            <a:ext cx="777240" cy="223759"/>
           </a:xfrm>
           <a:prstGeom prst="rect">
             <a:avLst/>
@@ -16163,22 +17448,22 @@
                 <a:ea typeface="Inter" pitchFamily="34" charset="-122"/>
                 <a:cs typeface="Inter" pitchFamily="34" charset="-120"/>
               </a:rPr>
-              <a:t>−$1.45</a:t>
-            </a:r>
-            <a:endParaRPr lang="en-US" sz="1200" dirty="0"/>
-          </a:p>
-        </p:txBody>
-      </p:sp>
-      <p:sp>
-        <p:nvSpPr>
-          <p:cNvPr id="99" name="Text 97"/>
-          <p:cNvSpPr txBox="1"/>
-          <p:nvPr/>
-        </p:nvSpPr>
-        <p:spPr>
-          <a:xfrm>
-            <a:off x="6208776" y="3046566"/>
-            <a:ext cx="310896" cy="239896"/>
+              <a:t>−1.1%</a:t>
+            </a:r>
+            <a:endParaRPr lang="en-US" sz="1200" dirty="0"/>
+          </a:p>
+        </p:txBody>
+      </p:sp>
+      <p:sp>
+        <p:nvSpPr>
+          <p:cNvPr id="124" name="Text 122"/>
+          <p:cNvSpPr txBox="1"/>
+          <p:nvPr/>
+        </p:nvSpPr>
+        <p:spPr>
+          <a:xfrm>
+            <a:off x="10533888" y="3016444"/>
+            <a:ext cx="868680" cy="223759"/>
           </a:xfrm>
           <a:prstGeom prst="rect">
             <a:avLst/>
@@ -16196,6 +17481,45 @@
             <a:r>
               <a:rPr lang="en-US" sz="1200" dirty="0">
                 <a:solidFill>
+                  <a:srgbClr val="A82B26"/>
+                </a:solidFill>
+                <a:latin typeface="Inter" pitchFamily="34" charset="0"/>
+                <a:ea typeface="Inter" pitchFamily="34" charset="-122"/>
+                <a:cs typeface="Inter" pitchFamily="34" charset="-120"/>
+              </a:rPr>
+              <a:t>−$2</a:t>
+            </a:r>
+            <a:endParaRPr lang="en-US" sz="1200" dirty="0"/>
+          </a:p>
+        </p:txBody>
+      </p:sp>
+      <p:sp>
+        <p:nvSpPr>
+          <p:cNvPr id="125" name="Text 123"/>
+          <p:cNvSpPr txBox="1"/>
+          <p:nvPr/>
+        </p:nvSpPr>
+        <p:spPr>
+          <a:xfrm>
+            <a:off x="6208776" y="3240203"/>
+            <a:ext cx="310896" cy="223759"/>
+          </a:xfrm>
+          <a:prstGeom prst="rect">
+            <a:avLst/>
+          </a:prstGeom>
+          <a:noFill/>
+          <a:ln/>
+        </p:spPr>
+        <p:txBody>
+          <a:bodyPr wrap="square" lIns="0" tIns="0" rIns="0" bIns="0" rtlCol="0" anchor="ctr"/>
+          <a:lstStyle/>
+          <a:p>
+            <a:pPr algn="r" indent="0" marL="0">
+              <a:buNone/>
+            </a:pPr>
+            <a:r>
+              <a:rPr lang="en-US" sz="1200" dirty="0">
+                <a:solidFill>
                   <a:srgbClr val="9AA3AD"/>
                 </a:solidFill>
                 <a:latin typeface="Inter" pitchFamily="34" charset="0"/>
@@ -16210,14 +17534,14 @@
       </p:sp>
       <p:sp>
         <p:nvSpPr>
-          <p:cNvPr id="100" name="Text 98"/>
-          <p:cNvSpPr txBox="1"/>
-          <p:nvPr/>
-        </p:nvSpPr>
-        <p:spPr>
-          <a:xfrm>
-            <a:off x="6565392" y="3046566"/>
-            <a:ext cx="1920240" cy="239896"/>
+          <p:cNvPr id="126" name="Text 124"/>
+          <p:cNvSpPr txBox="1"/>
+          <p:nvPr/>
+        </p:nvSpPr>
+        <p:spPr>
+          <a:xfrm>
+            <a:off x="6565392" y="3240203"/>
+            <a:ext cx="1920240" cy="223759"/>
           </a:xfrm>
           <a:prstGeom prst="rect">
             <a:avLst/>
@@ -16241,22 +17565,22 @@
                 <a:ea typeface="Inter" pitchFamily="34" charset="-122"/>
                 <a:cs typeface="Inter" pitchFamily="34" charset="-120"/>
               </a:rPr>
-              <a:t>HYUNDAI PRESCOTT</a:t>
-            </a:r>
-            <a:endParaRPr lang="en-US" sz="1200" dirty="0"/>
-          </a:p>
-        </p:txBody>
-      </p:sp>
-      <p:sp>
-        <p:nvSpPr>
-          <p:cNvPr id="101" name="Shape 99"/>
+              <a:t>CHEVY LV</a:t>
+            </a:r>
+            <a:endParaRPr lang="en-US" sz="1200" dirty="0"/>
+          </a:p>
+        </p:txBody>
+      </p:sp>
+      <p:sp>
+        <p:nvSpPr>
+          <p:cNvPr id="127" name="Shape 125"/>
           <p:cNvSpPr/>
           <p:nvPr/>
         </p:nvSpPr>
         <p:spPr>
           <a:xfrm>
-            <a:off x="9313515" y="3111337"/>
-            <a:ext cx="22509" cy="110352"/>
+            <a:off x="9102480" y="3300618"/>
+            <a:ext cx="27804" cy="102929"/>
           </a:xfrm>
           <a:prstGeom prst="rect">
             <a:avLst/>
@@ -16269,14 +17593,14 @@
       </p:sp>
       <p:sp>
         <p:nvSpPr>
-          <p:cNvPr id="102" name="Text 100"/>
-          <p:cNvSpPr txBox="1"/>
-          <p:nvPr/>
-        </p:nvSpPr>
-        <p:spPr>
-          <a:xfrm>
-            <a:off x="10168128" y="3046566"/>
-            <a:ext cx="1234440" cy="239896"/>
+          <p:cNvPr id="128" name="Text 126"/>
+          <p:cNvSpPr txBox="1"/>
+          <p:nvPr/>
+        </p:nvSpPr>
+        <p:spPr>
+          <a:xfrm>
+            <a:off x="9756648" y="3240203"/>
+            <a:ext cx="777240" cy="223759"/>
           </a:xfrm>
           <a:prstGeom prst="rect">
             <a:avLst/>
@@ -16300,22 +17624,22 @@
                 <a:ea typeface="Inter" pitchFamily="34" charset="-122"/>
                 <a:cs typeface="Inter" pitchFamily="34" charset="-120"/>
               </a:rPr>
-              <a:t>−$1.75</a:t>
-            </a:r>
-            <a:endParaRPr lang="en-US" sz="1200" dirty="0"/>
-          </a:p>
-        </p:txBody>
-      </p:sp>
-      <p:sp>
-        <p:nvSpPr>
-          <p:cNvPr id="103" name="Text 101"/>
-          <p:cNvSpPr txBox="1"/>
-          <p:nvPr/>
-        </p:nvSpPr>
-        <p:spPr>
-          <a:xfrm>
-            <a:off x="6208776" y="3286461"/>
-            <a:ext cx="310896" cy="239896"/>
+              <a:t>−1.4%</a:t>
+            </a:r>
+            <a:endParaRPr lang="en-US" sz="1200" dirty="0"/>
+          </a:p>
+        </p:txBody>
+      </p:sp>
+      <p:sp>
+        <p:nvSpPr>
+          <p:cNvPr id="129" name="Text 127"/>
+          <p:cNvSpPr txBox="1"/>
+          <p:nvPr/>
+        </p:nvSpPr>
+        <p:spPr>
+          <a:xfrm>
+            <a:off x="10533888" y="3240203"/>
+            <a:ext cx="868680" cy="223759"/>
           </a:xfrm>
           <a:prstGeom prst="rect">
             <a:avLst/>
@@ -16333,6 +17657,45 @@
             <a:r>
               <a:rPr lang="en-US" sz="1200" dirty="0">
                 <a:solidFill>
+                  <a:srgbClr val="A82B26"/>
+                </a:solidFill>
+                <a:latin typeface="Inter" pitchFamily="34" charset="0"/>
+                <a:ea typeface="Inter" pitchFamily="34" charset="-122"/>
+                <a:cs typeface="Inter" pitchFamily="34" charset="-120"/>
+              </a:rPr>
+              <a:t>−$1</a:t>
+            </a:r>
+            <a:endParaRPr lang="en-US" sz="1200" dirty="0"/>
+          </a:p>
+        </p:txBody>
+      </p:sp>
+      <p:sp>
+        <p:nvSpPr>
+          <p:cNvPr id="130" name="Text 128"/>
+          <p:cNvSpPr txBox="1"/>
+          <p:nvPr/>
+        </p:nvSpPr>
+        <p:spPr>
+          <a:xfrm>
+            <a:off x="6208776" y="3463962"/>
+            <a:ext cx="310896" cy="223759"/>
+          </a:xfrm>
+          <a:prstGeom prst="rect">
+            <a:avLst/>
+          </a:prstGeom>
+          <a:noFill/>
+          <a:ln/>
+        </p:spPr>
+        <p:txBody>
+          <a:bodyPr wrap="square" lIns="0" tIns="0" rIns="0" bIns="0" rtlCol="0" anchor="ctr"/>
+          <a:lstStyle/>
+          <a:p>
+            <a:pPr algn="r" indent="0" marL="0">
+              <a:buNone/>
+            </a:pPr>
+            <a:r>
+              <a:rPr lang="en-US" sz="1200" dirty="0">
+                <a:solidFill>
                   <a:srgbClr val="9AA3AD"/>
                 </a:solidFill>
                 <a:latin typeface="Inter" pitchFamily="34" charset="0"/>
@@ -16347,14 +17710,14 @@
       </p:sp>
       <p:sp>
         <p:nvSpPr>
-          <p:cNvPr id="104" name="Text 102"/>
-          <p:cNvSpPr txBox="1"/>
-          <p:nvPr/>
-        </p:nvSpPr>
-        <p:spPr>
-          <a:xfrm>
-            <a:off x="6565392" y="3286461"/>
-            <a:ext cx="1920240" cy="239896"/>
+          <p:cNvPr id="131" name="Text 129"/>
+          <p:cNvSpPr txBox="1"/>
+          <p:nvPr/>
+        </p:nvSpPr>
+        <p:spPr>
+          <a:xfrm>
+            <a:off x="6565392" y="3463962"/>
+            <a:ext cx="1920240" cy="223759"/>
           </a:xfrm>
           <a:prstGeom prst="rect">
             <a:avLst/>
@@ -16386,14 +17749,14 @@
       </p:sp>
       <p:sp>
         <p:nvSpPr>
-          <p:cNvPr id="105" name="Shape 103"/>
+          <p:cNvPr id="132" name="Shape 130"/>
           <p:cNvSpPr/>
           <p:nvPr/>
         </p:nvSpPr>
         <p:spPr>
           <a:xfrm>
-            <a:off x="9278246" y="3351233"/>
-            <a:ext cx="57778" cy="110352"/>
+            <a:off x="9068832" y="3524377"/>
+            <a:ext cx="61452" cy="102929"/>
           </a:xfrm>
           <a:prstGeom prst="rect">
             <a:avLst/>
@@ -16406,14 +17769,14 @@
       </p:sp>
       <p:sp>
         <p:nvSpPr>
-          <p:cNvPr id="106" name="Text 104"/>
-          <p:cNvSpPr txBox="1"/>
-          <p:nvPr/>
-        </p:nvSpPr>
-        <p:spPr>
-          <a:xfrm>
-            <a:off x="10168128" y="3286461"/>
-            <a:ext cx="1234440" cy="239896"/>
+          <p:cNvPr id="133" name="Text 131"/>
+          <p:cNvSpPr txBox="1"/>
+          <p:nvPr/>
+        </p:nvSpPr>
+        <p:spPr>
+          <a:xfrm>
+            <a:off x="9756648" y="3463962"/>
+            <a:ext cx="777240" cy="223759"/>
           </a:xfrm>
           <a:prstGeom prst="rect">
             <a:avLst/>
@@ -16437,22 +17800,22 @@
                 <a:ea typeface="Inter" pitchFamily="34" charset="-122"/>
                 <a:cs typeface="Inter" pitchFamily="34" charset="-120"/>
               </a:rPr>
-              <a:t>−$4.49</a:t>
-            </a:r>
-            <a:endParaRPr lang="en-US" sz="1200" dirty="0"/>
-          </a:p>
-        </p:txBody>
-      </p:sp>
-      <p:sp>
-        <p:nvSpPr>
-          <p:cNvPr id="107" name="Text 105"/>
-          <p:cNvSpPr txBox="1"/>
-          <p:nvPr/>
-        </p:nvSpPr>
-        <p:spPr>
-          <a:xfrm>
-            <a:off x="6208776" y="3526357"/>
-            <a:ext cx="310896" cy="239896"/>
+              <a:t>−3.2%</a:t>
+            </a:r>
+            <a:endParaRPr lang="en-US" sz="1200" dirty="0"/>
+          </a:p>
+        </p:txBody>
+      </p:sp>
+      <p:sp>
+        <p:nvSpPr>
+          <p:cNvPr id="134" name="Text 132"/>
+          <p:cNvSpPr txBox="1"/>
+          <p:nvPr/>
+        </p:nvSpPr>
+        <p:spPr>
+          <a:xfrm>
+            <a:off x="10533888" y="3463962"/>
+            <a:ext cx="868680" cy="223759"/>
           </a:xfrm>
           <a:prstGeom prst="rect">
             <a:avLst/>
@@ -16470,6 +17833,45 @@
             <a:r>
               <a:rPr lang="en-US" sz="1200" dirty="0">
                 <a:solidFill>
+                  <a:srgbClr val="A82B26"/>
+                </a:solidFill>
+                <a:latin typeface="Inter" pitchFamily="34" charset="0"/>
+                <a:ea typeface="Inter" pitchFamily="34" charset="-122"/>
+                <a:cs typeface="Inter" pitchFamily="34" charset="-120"/>
+              </a:rPr>
+              <a:t>−$4</a:t>
+            </a:r>
+            <a:endParaRPr lang="en-US" sz="1200" dirty="0"/>
+          </a:p>
+        </p:txBody>
+      </p:sp>
+      <p:sp>
+        <p:nvSpPr>
+          <p:cNvPr id="135" name="Text 133"/>
+          <p:cNvSpPr txBox="1"/>
+          <p:nvPr/>
+        </p:nvSpPr>
+        <p:spPr>
+          <a:xfrm>
+            <a:off x="6208776" y="3687721"/>
+            <a:ext cx="310896" cy="223759"/>
+          </a:xfrm>
+          <a:prstGeom prst="rect">
+            <a:avLst/>
+          </a:prstGeom>
+          <a:noFill/>
+          <a:ln/>
+        </p:spPr>
+        <p:txBody>
+          <a:bodyPr wrap="square" lIns="0" tIns="0" rIns="0" bIns="0" rtlCol="0" anchor="ctr"/>
+          <a:lstStyle/>
+          <a:p>
+            <a:pPr algn="r" indent="0" marL="0">
+              <a:buNone/>
+            </a:pPr>
+            <a:r>
+              <a:rPr lang="en-US" sz="1200" dirty="0">
+                <a:solidFill>
                   <a:srgbClr val="9AA3AD"/>
                 </a:solidFill>
                 <a:latin typeface="Inter" pitchFamily="34" charset="0"/>
@@ -16484,14 +17886,14 @@
       </p:sp>
       <p:sp>
         <p:nvSpPr>
-          <p:cNvPr id="108" name="Text 106"/>
-          <p:cNvSpPr txBox="1"/>
-          <p:nvPr/>
-        </p:nvSpPr>
-        <p:spPr>
-          <a:xfrm>
-            <a:off x="6565392" y="3526357"/>
-            <a:ext cx="1920240" cy="239896"/>
+          <p:cNvPr id="136" name="Text 134"/>
+          <p:cNvSpPr txBox="1"/>
+          <p:nvPr/>
+        </p:nvSpPr>
+        <p:spPr>
+          <a:xfrm>
+            <a:off x="6565392" y="3687721"/>
+            <a:ext cx="1920240" cy="223759"/>
           </a:xfrm>
           <a:prstGeom prst="rect">
             <a:avLst/>
@@ -16523,14 +17925,14 @@
       </p:sp>
       <p:sp>
         <p:nvSpPr>
-          <p:cNvPr id="109" name="Shape 107"/>
+          <p:cNvPr id="137" name="Shape 135"/>
           <p:cNvSpPr/>
           <p:nvPr/>
         </p:nvSpPr>
         <p:spPr>
           <a:xfrm>
-            <a:off x="9273152" y="3591128"/>
-            <a:ext cx="62872" cy="110352"/>
+            <a:off x="9047246" y="3748136"/>
+            <a:ext cx="83038" cy="102929"/>
           </a:xfrm>
           <a:prstGeom prst="rect">
             <a:avLst/>
@@ -16543,14 +17945,14 @@
       </p:sp>
       <p:sp>
         <p:nvSpPr>
-          <p:cNvPr id="110" name="Text 108"/>
-          <p:cNvSpPr txBox="1"/>
-          <p:nvPr/>
-        </p:nvSpPr>
-        <p:spPr>
-          <a:xfrm>
-            <a:off x="10168128" y="3526357"/>
-            <a:ext cx="1234440" cy="239896"/>
+          <p:cNvPr id="138" name="Text 136"/>
+          <p:cNvSpPr txBox="1"/>
+          <p:nvPr/>
+        </p:nvSpPr>
+        <p:spPr>
+          <a:xfrm>
+            <a:off x="9756648" y="3687721"/>
+            <a:ext cx="777240" cy="223759"/>
           </a:xfrm>
           <a:prstGeom prst="rect">
             <a:avLst/>
@@ -16574,22 +17976,22 @@
                 <a:ea typeface="Inter" pitchFamily="34" charset="-122"/>
                 <a:cs typeface="Inter" pitchFamily="34" charset="-120"/>
               </a:rPr>
-              <a:t>−$4.89</a:t>
-            </a:r>
-            <a:endParaRPr lang="en-US" sz="1200" dirty="0"/>
-          </a:p>
-        </p:txBody>
-      </p:sp>
-      <p:sp>
-        <p:nvSpPr>
-          <p:cNvPr id="111" name="Text 109"/>
-          <p:cNvSpPr txBox="1"/>
-          <p:nvPr/>
-        </p:nvSpPr>
-        <p:spPr>
-          <a:xfrm>
-            <a:off x="6208776" y="3766252"/>
-            <a:ext cx="310896" cy="239896"/>
+              <a:t>−4.3%</a:t>
+            </a:r>
+            <a:endParaRPr lang="en-US" sz="1200" dirty="0"/>
+          </a:p>
+        </p:txBody>
+      </p:sp>
+      <p:sp>
+        <p:nvSpPr>
+          <p:cNvPr id="139" name="Text 137"/>
+          <p:cNvSpPr txBox="1"/>
+          <p:nvPr/>
+        </p:nvSpPr>
+        <p:spPr>
+          <a:xfrm>
+            <a:off x="10533888" y="3687721"/>
+            <a:ext cx="868680" cy="223759"/>
           </a:xfrm>
           <a:prstGeom prst="rect">
             <a:avLst/>
@@ -16607,6 +18009,45 @@
             <a:r>
               <a:rPr lang="en-US" sz="1200" dirty="0">
                 <a:solidFill>
+                  <a:srgbClr val="A82B26"/>
+                </a:solidFill>
+                <a:latin typeface="Inter" pitchFamily="34" charset="0"/>
+                <a:ea typeface="Inter" pitchFamily="34" charset="-122"/>
+                <a:cs typeface="Inter" pitchFamily="34" charset="-120"/>
+              </a:rPr>
+              <a:t>−$5</a:t>
+            </a:r>
+            <a:endParaRPr lang="en-US" sz="1200" dirty="0"/>
+          </a:p>
+        </p:txBody>
+      </p:sp>
+      <p:sp>
+        <p:nvSpPr>
+          <p:cNvPr id="140" name="Text 138"/>
+          <p:cNvSpPr txBox="1"/>
+          <p:nvPr/>
+        </p:nvSpPr>
+        <p:spPr>
+          <a:xfrm>
+            <a:off x="6208776" y="3911480"/>
+            <a:ext cx="310896" cy="223759"/>
+          </a:xfrm>
+          <a:prstGeom prst="rect">
+            <a:avLst/>
+          </a:prstGeom>
+          <a:noFill/>
+          <a:ln/>
+        </p:spPr>
+        <p:txBody>
+          <a:bodyPr wrap="square" lIns="0" tIns="0" rIns="0" bIns="0" rtlCol="0" anchor="ctr"/>
+          <a:lstStyle/>
+          <a:p>
+            <a:pPr algn="r" indent="0" marL="0">
+              <a:buNone/>
+            </a:pPr>
+            <a:r>
+              <a:rPr lang="en-US" sz="1200" dirty="0">
+                <a:solidFill>
                   <a:srgbClr val="9AA3AD"/>
                 </a:solidFill>
                 <a:latin typeface="Inter" pitchFamily="34" charset="0"/>
@@ -16621,14 +18062,14 @@
       </p:sp>
       <p:sp>
         <p:nvSpPr>
-          <p:cNvPr id="112" name="Text 110"/>
-          <p:cNvSpPr txBox="1"/>
-          <p:nvPr/>
-        </p:nvSpPr>
-        <p:spPr>
-          <a:xfrm>
-            <a:off x="6565392" y="3766252"/>
-            <a:ext cx="1920240" cy="239896"/>
+          <p:cNvPr id="141" name="Text 139"/>
+          <p:cNvSpPr txBox="1"/>
+          <p:nvPr/>
+        </p:nvSpPr>
+        <p:spPr>
+          <a:xfrm>
+            <a:off x="6565392" y="3911480"/>
+            <a:ext cx="1920240" cy="223759"/>
           </a:xfrm>
           <a:prstGeom prst="rect">
             <a:avLst/>
@@ -16660,14 +18101,14 @@
       </p:sp>
       <p:sp>
         <p:nvSpPr>
-          <p:cNvPr id="113" name="Shape 111"/>
+          <p:cNvPr id="142" name="Shape 140"/>
           <p:cNvSpPr/>
           <p:nvPr/>
         </p:nvSpPr>
         <p:spPr>
           <a:xfrm>
-            <a:off x="9257842" y="3831024"/>
-            <a:ext cx="78182" cy="110352"/>
+            <a:off x="9034692" y="3971895"/>
+            <a:ext cx="95592" cy="102929"/>
           </a:xfrm>
           <a:prstGeom prst="rect">
             <a:avLst/>
@@ -16680,14 +18121,14 @@
       </p:sp>
       <p:sp>
         <p:nvSpPr>
-          <p:cNvPr id="114" name="Text 112"/>
-          <p:cNvSpPr txBox="1"/>
-          <p:nvPr/>
-        </p:nvSpPr>
-        <p:spPr>
-          <a:xfrm>
-            <a:off x="10168128" y="3766252"/>
-            <a:ext cx="1234440" cy="239896"/>
+          <p:cNvPr id="143" name="Text 141"/>
+          <p:cNvSpPr txBox="1"/>
+          <p:nvPr/>
+        </p:nvSpPr>
+        <p:spPr>
+          <a:xfrm>
+            <a:off x="9756648" y="3911480"/>
+            <a:ext cx="777240" cy="223759"/>
           </a:xfrm>
           <a:prstGeom prst="rect">
             <a:avLst/>
@@ -16711,22 +18152,22 @@
                 <a:ea typeface="Inter" pitchFamily="34" charset="-122"/>
                 <a:cs typeface="Inter" pitchFamily="34" charset="-120"/>
               </a:rPr>
-              <a:t>−$6.08</a:t>
-            </a:r>
-            <a:endParaRPr lang="en-US" sz="1200" dirty="0"/>
-          </a:p>
-        </p:txBody>
-      </p:sp>
-      <p:sp>
-        <p:nvSpPr>
-          <p:cNvPr id="115" name="Text 113"/>
-          <p:cNvSpPr txBox="1"/>
-          <p:nvPr/>
-        </p:nvSpPr>
-        <p:spPr>
-          <a:xfrm>
-            <a:off x="6208776" y="4006148"/>
-            <a:ext cx="310896" cy="239896"/>
+              <a:t>−4.9%</a:t>
+            </a:r>
+            <a:endParaRPr lang="en-US" sz="1200" dirty="0"/>
+          </a:p>
+        </p:txBody>
+      </p:sp>
+      <p:sp>
+        <p:nvSpPr>
+          <p:cNvPr id="144" name="Text 142"/>
+          <p:cNvSpPr txBox="1"/>
+          <p:nvPr/>
+        </p:nvSpPr>
+        <p:spPr>
+          <a:xfrm>
+            <a:off x="10533888" y="3911480"/>
+            <a:ext cx="868680" cy="223759"/>
           </a:xfrm>
           <a:prstGeom prst="rect">
             <a:avLst/>
@@ -16744,6 +18185,45 @@
             <a:r>
               <a:rPr lang="en-US" sz="1200" dirty="0">
                 <a:solidFill>
+                  <a:srgbClr val="A82B26"/>
+                </a:solidFill>
+                <a:latin typeface="Inter" pitchFamily="34" charset="0"/>
+                <a:ea typeface="Inter" pitchFamily="34" charset="-122"/>
+                <a:cs typeface="Inter" pitchFamily="34" charset="-120"/>
+              </a:rPr>
+              <a:t>−$6</a:t>
+            </a:r>
+            <a:endParaRPr lang="en-US" sz="1200" dirty="0"/>
+          </a:p>
+        </p:txBody>
+      </p:sp>
+      <p:sp>
+        <p:nvSpPr>
+          <p:cNvPr id="145" name="Text 143"/>
+          <p:cNvSpPr txBox="1"/>
+          <p:nvPr/>
+        </p:nvSpPr>
+        <p:spPr>
+          <a:xfrm>
+            <a:off x="6208776" y="4135240"/>
+            <a:ext cx="310896" cy="223759"/>
+          </a:xfrm>
+          <a:prstGeom prst="rect">
+            <a:avLst/>
+          </a:prstGeom>
+          <a:noFill/>
+          <a:ln/>
+        </p:spPr>
+        <p:txBody>
+          <a:bodyPr wrap="square" lIns="0" tIns="0" rIns="0" bIns="0" rtlCol="0" anchor="ctr"/>
+          <a:lstStyle/>
+          <a:p>
+            <a:pPr algn="r" indent="0" marL="0">
+              <a:buNone/>
+            </a:pPr>
+            <a:r>
+              <a:rPr lang="en-US" sz="1200" dirty="0">
+                <a:solidFill>
                   <a:srgbClr val="9AA3AD"/>
                 </a:solidFill>
                 <a:latin typeface="Inter" pitchFamily="34" charset="0"/>
@@ -16758,14 +18238,14 @@
       </p:sp>
       <p:sp>
         <p:nvSpPr>
-          <p:cNvPr id="116" name="Text 114"/>
-          <p:cNvSpPr txBox="1"/>
-          <p:nvPr/>
-        </p:nvSpPr>
-        <p:spPr>
-          <a:xfrm>
-            <a:off x="6565392" y="4006148"/>
-            <a:ext cx="1920240" cy="239896"/>
+          <p:cNvPr id="146" name="Text 144"/>
+          <p:cNvSpPr txBox="1"/>
+          <p:nvPr/>
+        </p:nvSpPr>
+        <p:spPr>
+          <a:xfrm>
+            <a:off x="6565392" y="4135240"/>
+            <a:ext cx="1920240" cy="223759"/>
           </a:xfrm>
           <a:prstGeom prst="rect">
             <a:avLst/>
@@ -16797,14 +18277,14 @@
       </p:sp>
       <p:sp>
         <p:nvSpPr>
-          <p:cNvPr id="117" name="Shape 115"/>
+          <p:cNvPr id="147" name="Shape 145"/>
           <p:cNvSpPr/>
           <p:nvPr/>
         </p:nvSpPr>
         <p:spPr>
           <a:xfrm>
-            <a:off x="9253717" y="4070920"/>
-            <a:ext cx="82307" cy="110352"/>
+            <a:off x="9016533" y="4195654"/>
+            <a:ext cx="113751" cy="102929"/>
           </a:xfrm>
           <a:prstGeom prst="rect">
             <a:avLst/>
@@ -16817,14 +18297,14 @@
       </p:sp>
       <p:sp>
         <p:nvSpPr>
-          <p:cNvPr id="118" name="Text 116"/>
-          <p:cNvSpPr txBox="1"/>
-          <p:nvPr/>
-        </p:nvSpPr>
-        <p:spPr>
-          <a:xfrm>
-            <a:off x="10168128" y="4006148"/>
-            <a:ext cx="1234440" cy="239896"/>
+          <p:cNvPr id="148" name="Text 146"/>
+          <p:cNvSpPr txBox="1"/>
+          <p:nvPr/>
+        </p:nvSpPr>
+        <p:spPr>
+          <a:xfrm>
+            <a:off x="9756648" y="4135240"/>
+            <a:ext cx="777240" cy="223759"/>
           </a:xfrm>
           <a:prstGeom prst="rect">
             <a:avLst/>
@@ -16848,22 +18328,22 @@
                 <a:ea typeface="Inter" pitchFamily="34" charset="-122"/>
                 <a:cs typeface="Inter" pitchFamily="34" charset="-120"/>
               </a:rPr>
-              <a:t>−$6.40</a:t>
-            </a:r>
-            <a:endParaRPr lang="en-US" sz="1200" dirty="0"/>
-          </a:p>
-        </p:txBody>
-      </p:sp>
-      <p:sp>
-        <p:nvSpPr>
-          <p:cNvPr id="119" name="Text 117"/>
-          <p:cNvSpPr txBox="1"/>
-          <p:nvPr/>
-        </p:nvSpPr>
-        <p:spPr>
-          <a:xfrm>
-            <a:off x="6208776" y="4246043"/>
-            <a:ext cx="310896" cy="239896"/>
+              <a:t>−5.9%</a:t>
+            </a:r>
+            <a:endParaRPr lang="en-US" sz="1200" dirty="0"/>
+          </a:p>
+        </p:txBody>
+      </p:sp>
+      <p:sp>
+        <p:nvSpPr>
+          <p:cNvPr id="149" name="Text 147"/>
+          <p:cNvSpPr txBox="1"/>
+          <p:nvPr/>
+        </p:nvSpPr>
+        <p:spPr>
+          <a:xfrm>
+            <a:off x="10533888" y="4135240"/>
+            <a:ext cx="868680" cy="223759"/>
           </a:xfrm>
           <a:prstGeom prst="rect">
             <a:avLst/>
@@ -16881,6 +18361,45 @@
             <a:r>
               <a:rPr lang="en-US" sz="1200" dirty="0">
                 <a:solidFill>
+                  <a:srgbClr val="A82B26"/>
+                </a:solidFill>
+                <a:latin typeface="Inter" pitchFamily="34" charset="0"/>
+                <a:ea typeface="Inter" pitchFamily="34" charset="-122"/>
+                <a:cs typeface="Inter" pitchFamily="34" charset="-120"/>
+              </a:rPr>
+              <a:t>−$6</a:t>
+            </a:r>
+            <a:endParaRPr lang="en-US" sz="1200" dirty="0"/>
+          </a:p>
+        </p:txBody>
+      </p:sp>
+      <p:sp>
+        <p:nvSpPr>
+          <p:cNvPr id="150" name="Text 148"/>
+          <p:cNvSpPr txBox="1"/>
+          <p:nvPr/>
+        </p:nvSpPr>
+        <p:spPr>
+          <a:xfrm>
+            <a:off x="6208776" y="4358999"/>
+            <a:ext cx="310896" cy="223759"/>
+          </a:xfrm>
+          <a:prstGeom prst="rect">
+            <a:avLst/>
+          </a:prstGeom>
+          <a:noFill/>
+          <a:ln/>
+        </p:spPr>
+        <p:txBody>
+          <a:bodyPr wrap="square" lIns="0" tIns="0" rIns="0" bIns="0" rtlCol="0" anchor="ctr"/>
+          <a:lstStyle/>
+          <a:p>
+            <a:pPr algn="r" indent="0" marL="0">
+              <a:buNone/>
+            </a:pPr>
+            <a:r>
+              <a:rPr lang="en-US" sz="1200" dirty="0">
+                <a:solidFill>
                   <a:srgbClr val="9AA3AD"/>
                 </a:solidFill>
                 <a:latin typeface="Inter" pitchFamily="34" charset="0"/>
@@ -16895,14 +18414,14 @@
       </p:sp>
       <p:sp>
         <p:nvSpPr>
-          <p:cNvPr id="120" name="Text 118"/>
-          <p:cNvSpPr txBox="1"/>
-          <p:nvPr/>
-        </p:nvSpPr>
-        <p:spPr>
-          <a:xfrm>
-            <a:off x="6565392" y="4246043"/>
-            <a:ext cx="1920240" cy="239896"/>
+          <p:cNvPr id="151" name="Text 149"/>
+          <p:cNvSpPr txBox="1"/>
+          <p:nvPr/>
+        </p:nvSpPr>
+        <p:spPr>
+          <a:xfrm>
+            <a:off x="6565392" y="4358999"/>
+            <a:ext cx="1920240" cy="223759"/>
           </a:xfrm>
           <a:prstGeom prst="rect">
             <a:avLst/>
@@ -16934,14 +18453,14 @@
       </p:sp>
       <p:sp>
         <p:nvSpPr>
-          <p:cNvPr id="121" name="Shape 119"/>
+          <p:cNvPr id="152" name="Shape 150"/>
           <p:cNvSpPr/>
           <p:nvPr/>
         </p:nvSpPr>
         <p:spPr>
           <a:xfrm>
-            <a:off x="9203894" y="4310815"/>
-            <a:ext cx="132130" cy="110352"/>
+            <a:off x="9003546" y="4419414"/>
+            <a:ext cx="126738" cy="102929"/>
           </a:xfrm>
           <a:prstGeom prst="rect">
             <a:avLst/>
@@ -16954,14 +18473,14 @@
       </p:sp>
       <p:sp>
         <p:nvSpPr>
-          <p:cNvPr id="122" name="Text 120"/>
-          <p:cNvSpPr txBox="1"/>
-          <p:nvPr/>
-        </p:nvSpPr>
-        <p:spPr>
-          <a:xfrm>
-            <a:off x="10168128" y="4246043"/>
-            <a:ext cx="1234440" cy="239896"/>
+          <p:cNvPr id="153" name="Text 151"/>
+          <p:cNvSpPr txBox="1"/>
+          <p:nvPr/>
+        </p:nvSpPr>
+        <p:spPr>
+          <a:xfrm>
+            <a:off x="9756648" y="4358999"/>
+            <a:ext cx="777240" cy="223759"/>
           </a:xfrm>
           <a:prstGeom prst="rect">
             <a:avLst/>
@@ -16985,22 +18504,22 @@
                 <a:ea typeface="Inter" pitchFamily="34" charset="-122"/>
                 <a:cs typeface="Inter" pitchFamily="34" charset="-120"/>
               </a:rPr>
-              <a:t>−$10.27</a:t>
-            </a:r>
-            <a:endParaRPr lang="en-US" sz="1200" dirty="0"/>
-          </a:p>
-        </p:txBody>
-      </p:sp>
-      <p:sp>
-        <p:nvSpPr>
-          <p:cNvPr id="123" name="Text 121"/>
-          <p:cNvSpPr txBox="1"/>
-          <p:nvPr/>
-        </p:nvSpPr>
-        <p:spPr>
-          <a:xfrm>
-            <a:off x="6208776" y="4485939"/>
-            <a:ext cx="310896" cy="239896"/>
+              <a:t>−6.5%</a:t>
+            </a:r>
+            <a:endParaRPr lang="en-US" sz="1200" dirty="0"/>
+          </a:p>
+        </p:txBody>
+      </p:sp>
+      <p:sp>
+        <p:nvSpPr>
+          <p:cNvPr id="154" name="Text 152"/>
+          <p:cNvSpPr txBox="1"/>
+          <p:nvPr/>
+        </p:nvSpPr>
+        <p:spPr>
+          <a:xfrm>
+            <a:off x="10533888" y="4358999"/>
+            <a:ext cx="868680" cy="223759"/>
           </a:xfrm>
           <a:prstGeom prst="rect">
             <a:avLst/>
@@ -17018,6 +18537,45 @@
             <a:r>
               <a:rPr lang="en-US" sz="1200" dirty="0">
                 <a:solidFill>
+                  <a:srgbClr val="A82B26"/>
+                </a:solidFill>
+                <a:latin typeface="Inter" pitchFamily="34" charset="0"/>
+                <a:ea typeface="Inter" pitchFamily="34" charset="-122"/>
+                <a:cs typeface="Inter" pitchFamily="34" charset="-120"/>
+              </a:rPr>
+              <a:t>−$10</a:t>
+            </a:r>
+            <a:endParaRPr lang="en-US" sz="1200" dirty="0"/>
+          </a:p>
+        </p:txBody>
+      </p:sp>
+      <p:sp>
+        <p:nvSpPr>
+          <p:cNvPr id="155" name="Text 153"/>
+          <p:cNvSpPr txBox="1"/>
+          <p:nvPr/>
+        </p:nvSpPr>
+        <p:spPr>
+          <a:xfrm>
+            <a:off x="6208776" y="4582758"/>
+            <a:ext cx="310896" cy="223759"/>
+          </a:xfrm>
+          <a:prstGeom prst="rect">
+            <a:avLst/>
+          </a:prstGeom>
+          <a:noFill/>
+          <a:ln/>
+        </p:spPr>
+        <p:txBody>
+          <a:bodyPr wrap="square" lIns="0" tIns="0" rIns="0" bIns="0" rtlCol="0" anchor="ctr"/>
+          <a:lstStyle/>
+          <a:p>
+            <a:pPr algn="r" indent="0" marL="0">
+              <a:buNone/>
+            </a:pPr>
+            <a:r>
+              <a:rPr lang="en-US" sz="1200" dirty="0">
+                <a:solidFill>
                   <a:srgbClr val="9AA3AD"/>
                 </a:solidFill>
                 <a:latin typeface="Inter" pitchFamily="34" charset="0"/>
@@ -17032,14 +18590,14 @@
       </p:sp>
       <p:sp>
         <p:nvSpPr>
-          <p:cNvPr id="124" name="Text 122"/>
-          <p:cNvSpPr txBox="1"/>
-          <p:nvPr/>
-        </p:nvSpPr>
-        <p:spPr>
-          <a:xfrm>
-            <a:off x="6565392" y="4485939"/>
-            <a:ext cx="1920240" cy="239896"/>
+          <p:cNvPr id="156" name="Text 154"/>
+          <p:cNvSpPr txBox="1"/>
+          <p:nvPr/>
+        </p:nvSpPr>
+        <p:spPr>
+          <a:xfrm>
+            <a:off x="6565392" y="4582758"/>
+            <a:ext cx="1920240" cy="223759"/>
           </a:xfrm>
           <a:prstGeom prst="rect">
             <a:avLst/>
@@ -17071,14 +18629,14 @@
       </p:sp>
       <p:sp>
         <p:nvSpPr>
-          <p:cNvPr id="125" name="Shape 123"/>
+          <p:cNvPr id="157" name="Shape 155"/>
           <p:cNvSpPr/>
           <p:nvPr/>
         </p:nvSpPr>
         <p:spPr>
           <a:xfrm>
-            <a:off x="9107808" y="4550711"/>
-            <a:ext cx="228216" cy="110352"/>
+            <a:off x="8911359" y="4643173"/>
+            <a:ext cx="218925" cy="102929"/>
           </a:xfrm>
           <a:prstGeom prst="rect">
             <a:avLst/>
@@ -17091,14 +18649,14 @@
       </p:sp>
       <p:sp>
         <p:nvSpPr>
-          <p:cNvPr id="126" name="Text 124"/>
-          <p:cNvSpPr txBox="1"/>
-          <p:nvPr/>
-        </p:nvSpPr>
-        <p:spPr>
-          <a:xfrm>
-            <a:off x="10168128" y="4485939"/>
-            <a:ext cx="1234440" cy="239896"/>
+          <p:cNvPr id="158" name="Text 156"/>
+          <p:cNvSpPr txBox="1"/>
+          <p:nvPr/>
+        </p:nvSpPr>
+        <p:spPr>
+          <a:xfrm>
+            <a:off x="9756648" y="4582758"/>
+            <a:ext cx="777240" cy="223759"/>
           </a:xfrm>
           <a:prstGeom prst="rect">
             <a:avLst/>
@@ -17122,22 +18680,22 @@
                 <a:ea typeface="Inter" pitchFamily="34" charset="-122"/>
                 <a:cs typeface="Inter" pitchFamily="34" charset="-120"/>
               </a:rPr>
-              <a:t>−$17.74</a:t>
-            </a:r>
-            <a:endParaRPr lang="en-US" sz="1200" dirty="0"/>
-          </a:p>
-        </p:txBody>
-      </p:sp>
-      <p:sp>
-        <p:nvSpPr>
-          <p:cNvPr id="127" name="Text 125"/>
-          <p:cNvSpPr txBox="1"/>
-          <p:nvPr/>
-        </p:nvSpPr>
-        <p:spPr>
-          <a:xfrm>
-            <a:off x="6208776" y="4725834"/>
-            <a:ext cx="310896" cy="239896"/>
+              <a:t>−11.3%</a:t>
+            </a:r>
+            <a:endParaRPr lang="en-US" sz="1200" dirty="0"/>
+          </a:p>
+        </p:txBody>
+      </p:sp>
+      <p:sp>
+        <p:nvSpPr>
+          <p:cNvPr id="159" name="Text 157"/>
+          <p:cNvSpPr txBox="1"/>
+          <p:nvPr/>
+        </p:nvSpPr>
+        <p:spPr>
+          <a:xfrm>
+            <a:off x="10533888" y="4582758"/>
+            <a:ext cx="868680" cy="223759"/>
           </a:xfrm>
           <a:prstGeom prst="rect">
             <a:avLst/>
@@ -17155,6 +18713,45 @@
             <a:r>
               <a:rPr lang="en-US" sz="1200" dirty="0">
                 <a:solidFill>
+                  <a:srgbClr val="A82B26"/>
+                </a:solidFill>
+                <a:latin typeface="Inter" pitchFamily="34" charset="0"/>
+                <a:ea typeface="Inter" pitchFamily="34" charset="-122"/>
+                <a:cs typeface="Inter" pitchFamily="34" charset="-120"/>
+              </a:rPr>
+              <a:t>−$18</a:t>
+            </a:r>
+            <a:endParaRPr lang="en-US" sz="1200" dirty="0"/>
+          </a:p>
+        </p:txBody>
+      </p:sp>
+      <p:sp>
+        <p:nvSpPr>
+          <p:cNvPr id="160" name="Text 158"/>
+          <p:cNvSpPr txBox="1"/>
+          <p:nvPr/>
+        </p:nvSpPr>
+        <p:spPr>
+          <a:xfrm>
+            <a:off x="6208776" y="4806517"/>
+            <a:ext cx="310896" cy="223759"/>
+          </a:xfrm>
+          <a:prstGeom prst="rect">
+            <a:avLst/>
+          </a:prstGeom>
+          <a:noFill/>
+          <a:ln/>
+        </p:spPr>
+        <p:txBody>
+          <a:bodyPr wrap="square" lIns="0" tIns="0" rIns="0" bIns="0" rtlCol="0" anchor="ctr"/>
+          <a:lstStyle/>
+          <a:p>
+            <a:pPr algn="r" indent="0" marL="0">
+              <a:buNone/>
+            </a:pPr>
+            <a:r>
+              <a:rPr lang="en-US" sz="1200" dirty="0">
+                <a:solidFill>
                   <a:srgbClr val="9AA3AD"/>
                 </a:solidFill>
                 <a:latin typeface="Inter" pitchFamily="34" charset="0"/>
@@ -17169,14 +18766,14 @@
       </p:sp>
       <p:sp>
         <p:nvSpPr>
-          <p:cNvPr id="128" name="Text 126"/>
-          <p:cNvSpPr txBox="1"/>
-          <p:nvPr/>
-        </p:nvSpPr>
-        <p:spPr>
-          <a:xfrm>
-            <a:off x="6565392" y="4725834"/>
-            <a:ext cx="1920240" cy="239896"/>
+          <p:cNvPr id="161" name="Text 159"/>
+          <p:cNvSpPr txBox="1"/>
+          <p:nvPr/>
+        </p:nvSpPr>
+        <p:spPr>
+          <a:xfrm>
+            <a:off x="6565392" y="4806517"/>
+            <a:ext cx="1920240" cy="223759"/>
           </a:xfrm>
           <a:prstGeom prst="rect">
             <a:avLst/>
@@ -17208,14 +18805,14 @@
       </p:sp>
       <p:sp>
         <p:nvSpPr>
-          <p:cNvPr id="129" name="Shape 127"/>
+          <p:cNvPr id="162" name="Shape 160"/>
           <p:cNvSpPr/>
           <p:nvPr/>
         </p:nvSpPr>
         <p:spPr>
           <a:xfrm>
-            <a:off x="9069070" y="4790606"/>
-            <a:ext cx="266954" cy="110352"/>
+            <a:off x="8896761" y="4866932"/>
+            <a:ext cx="233523" cy="102929"/>
           </a:xfrm>
           <a:prstGeom prst="rect">
             <a:avLst/>
@@ -17228,14 +18825,14 @@
       </p:sp>
       <p:sp>
         <p:nvSpPr>
-          <p:cNvPr id="130" name="Text 128"/>
-          <p:cNvSpPr txBox="1"/>
-          <p:nvPr/>
-        </p:nvSpPr>
-        <p:spPr>
-          <a:xfrm>
-            <a:off x="10168128" y="4725834"/>
-            <a:ext cx="1234440" cy="239896"/>
+          <p:cNvPr id="163" name="Text 161"/>
+          <p:cNvSpPr txBox="1"/>
+          <p:nvPr/>
+        </p:nvSpPr>
+        <p:spPr>
+          <a:xfrm>
+            <a:off x="9756648" y="4806517"/>
+            <a:ext cx="777240" cy="223759"/>
           </a:xfrm>
           <a:prstGeom prst="rect">
             <a:avLst/>
@@ -17259,22 +18856,22 @@
                 <a:ea typeface="Inter" pitchFamily="34" charset="-122"/>
                 <a:cs typeface="Inter" pitchFamily="34" charset="-120"/>
               </a:rPr>
-              <a:t>−$20.75</a:t>
-            </a:r>
-            <a:endParaRPr lang="en-US" sz="1200" dirty="0"/>
-          </a:p>
-        </p:txBody>
-      </p:sp>
-      <p:sp>
-        <p:nvSpPr>
-          <p:cNvPr id="131" name="Text 129"/>
-          <p:cNvSpPr txBox="1"/>
-          <p:nvPr/>
-        </p:nvSpPr>
-        <p:spPr>
-          <a:xfrm>
-            <a:off x="6208776" y="4965730"/>
-            <a:ext cx="310896" cy="239896"/>
+              <a:t>−12.0%</a:t>
+            </a:r>
+            <a:endParaRPr lang="en-US" sz="1200" dirty="0"/>
+          </a:p>
+        </p:txBody>
+      </p:sp>
+      <p:sp>
+        <p:nvSpPr>
+          <p:cNvPr id="164" name="Text 162"/>
+          <p:cNvSpPr txBox="1"/>
+          <p:nvPr/>
+        </p:nvSpPr>
+        <p:spPr>
+          <a:xfrm>
+            <a:off x="10533888" y="4806517"/>
+            <a:ext cx="868680" cy="223759"/>
           </a:xfrm>
           <a:prstGeom prst="rect">
             <a:avLst/>
@@ -17292,6 +18889,45 @@
             <a:r>
               <a:rPr lang="en-US" sz="1200" dirty="0">
                 <a:solidFill>
+                  <a:srgbClr val="A82B26"/>
+                </a:solidFill>
+                <a:latin typeface="Inter" pitchFamily="34" charset="0"/>
+                <a:ea typeface="Inter" pitchFamily="34" charset="-122"/>
+                <a:cs typeface="Inter" pitchFamily="34" charset="-120"/>
+              </a:rPr>
+              <a:t>−$21</a:t>
+            </a:r>
+            <a:endParaRPr lang="en-US" sz="1200" dirty="0"/>
+          </a:p>
+        </p:txBody>
+      </p:sp>
+      <p:sp>
+        <p:nvSpPr>
+          <p:cNvPr id="165" name="Text 163"/>
+          <p:cNvSpPr txBox="1"/>
+          <p:nvPr/>
+        </p:nvSpPr>
+        <p:spPr>
+          <a:xfrm>
+            <a:off x="6208776" y="5030276"/>
+            <a:ext cx="310896" cy="223759"/>
+          </a:xfrm>
+          <a:prstGeom prst="rect">
+            <a:avLst/>
+          </a:prstGeom>
+          <a:noFill/>
+          <a:ln/>
+        </p:spPr>
+        <p:txBody>
+          <a:bodyPr wrap="square" lIns="0" tIns="0" rIns="0" bIns="0" rtlCol="0" anchor="ctr"/>
+          <a:lstStyle/>
+          <a:p>
+            <a:pPr algn="r" indent="0" marL="0">
+              <a:buNone/>
+            </a:pPr>
+            <a:r>
+              <a:rPr lang="en-US" sz="1200" dirty="0">
+                <a:solidFill>
                   <a:srgbClr val="9AA3AD"/>
                 </a:solidFill>
                 <a:latin typeface="Inter" pitchFamily="34" charset="0"/>
@@ -17306,14 +18942,14 @@
       </p:sp>
       <p:sp>
         <p:nvSpPr>
-          <p:cNvPr id="132" name="Text 130"/>
-          <p:cNvSpPr txBox="1"/>
-          <p:nvPr/>
-        </p:nvSpPr>
-        <p:spPr>
-          <a:xfrm>
-            <a:off x="6565392" y="4965730"/>
-            <a:ext cx="1920240" cy="239896"/>
+          <p:cNvPr id="166" name="Text 164"/>
+          <p:cNvSpPr txBox="1"/>
+          <p:nvPr/>
+        </p:nvSpPr>
+        <p:spPr>
+          <a:xfrm>
+            <a:off x="6565392" y="5030276"/>
+            <a:ext cx="1920240" cy="223759"/>
           </a:xfrm>
           <a:prstGeom prst="rect">
             <a:avLst/>
@@ -17337,22 +18973,22 @@
                 <a:ea typeface="Inter" pitchFamily="34" charset="-122"/>
                 <a:cs typeface="Inter" pitchFamily="34" charset="-120"/>
               </a:rPr>
-              <a:t>NISSAN</a:t>
-            </a:r>
-            <a:endParaRPr lang="en-US" sz="1200" dirty="0"/>
-          </a:p>
-        </p:txBody>
-      </p:sp>
-      <p:sp>
-        <p:nvSpPr>
-          <p:cNvPr id="133" name="Shape 131"/>
+              <a:t>MAZDA</a:t>
+            </a:r>
+            <a:endParaRPr lang="en-US" sz="1200" dirty="0"/>
+          </a:p>
+        </p:txBody>
+      </p:sp>
+      <p:sp>
+        <p:nvSpPr>
+          <p:cNvPr id="167" name="Shape 165"/>
           <p:cNvSpPr/>
           <p:nvPr/>
         </p:nvSpPr>
         <p:spPr>
           <a:xfrm>
-            <a:off x="8916687" y="5030502"/>
-            <a:ext cx="419337" cy="110352"/>
+            <a:off x="8696152" y="5090691"/>
+            <a:ext cx="434132" cy="102929"/>
           </a:xfrm>
           <a:prstGeom prst="rect">
             <a:avLst/>
@@ -17365,14 +19001,14 @@
       </p:sp>
       <p:sp>
         <p:nvSpPr>
-          <p:cNvPr id="134" name="Text 132"/>
-          <p:cNvSpPr txBox="1"/>
-          <p:nvPr/>
-        </p:nvSpPr>
-        <p:spPr>
-          <a:xfrm>
-            <a:off x="10168128" y="4965730"/>
-            <a:ext cx="1234440" cy="239896"/>
+          <p:cNvPr id="168" name="Text 166"/>
+          <p:cNvSpPr txBox="1"/>
+          <p:nvPr/>
+        </p:nvSpPr>
+        <p:spPr>
+          <a:xfrm>
+            <a:off x="9756648" y="5030276"/>
+            <a:ext cx="777240" cy="223759"/>
           </a:xfrm>
           <a:prstGeom prst="rect">
             <a:avLst/>
@@ -17396,22 +19032,22 @@
                 <a:ea typeface="Inter" pitchFamily="34" charset="-122"/>
                 <a:cs typeface="Inter" pitchFamily="34" charset="-120"/>
               </a:rPr>
-              <a:t>−$32.60</a:t>
-            </a:r>
-            <a:endParaRPr lang="en-US" sz="1200" dirty="0"/>
-          </a:p>
-        </p:txBody>
-      </p:sp>
-      <p:sp>
-        <p:nvSpPr>
-          <p:cNvPr id="135" name="Text 133"/>
-          <p:cNvSpPr txBox="1"/>
-          <p:nvPr/>
-        </p:nvSpPr>
-        <p:spPr>
-          <a:xfrm>
-            <a:off x="6208776" y="5205625"/>
-            <a:ext cx="310896" cy="239896"/>
+              <a:t>−22.4%</a:t>
+            </a:r>
+            <a:endParaRPr lang="en-US" sz="1200" dirty="0"/>
+          </a:p>
+        </p:txBody>
+      </p:sp>
+      <p:sp>
+        <p:nvSpPr>
+          <p:cNvPr id="169" name="Text 167"/>
+          <p:cNvSpPr txBox="1"/>
+          <p:nvPr/>
+        </p:nvSpPr>
+        <p:spPr>
+          <a:xfrm>
+            <a:off x="10533888" y="5030276"/>
+            <a:ext cx="868680" cy="223759"/>
           </a:xfrm>
           <a:prstGeom prst="rect">
             <a:avLst/>
@@ -17429,6 +19065,45 @@
             <a:r>
               <a:rPr lang="en-US" sz="1200" dirty="0">
                 <a:solidFill>
+                  <a:srgbClr val="A82B26"/>
+                </a:solidFill>
+                <a:latin typeface="Inter" pitchFamily="34" charset="0"/>
+                <a:ea typeface="Inter" pitchFamily="34" charset="-122"/>
+                <a:cs typeface="Inter" pitchFamily="34" charset="-120"/>
+              </a:rPr>
+              <a:t>−$41</a:t>
+            </a:r>
+            <a:endParaRPr lang="en-US" sz="1200" dirty="0"/>
+          </a:p>
+        </p:txBody>
+      </p:sp>
+      <p:sp>
+        <p:nvSpPr>
+          <p:cNvPr id="170" name="Text 168"/>
+          <p:cNvSpPr txBox="1"/>
+          <p:nvPr/>
+        </p:nvSpPr>
+        <p:spPr>
+          <a:xfrm>
+            <a:off x="6208776" y="5254035"/>
+            <a:ext cx="310896" cy="223759"/>
+          </a:xfrm>
+          <a:prstGeom prst="rect">
+            <a:avLst/>
+          </a:prstGeom>
+          <a:noFill/>
+          <a:ln/>
+        </p:spPr>
+        <p:txBody>
+          <a:bodyPr wrap="square" lIns="0" tIns="0" rIns="0" bIns="0" rtlCol="0" anchor="ctr"/>
+          <a:lstStyle/>
+          <a:p>
+            <a:pPr algn="r" indent="0" marL="0">
+              <a:buNone/>
+            </a:pPr>
+            <a:r>
+              <a:rPr lang="en-US" sz="1200" dirty="0">
+                <a:solidFill>
                   <a:srgbClr val="9AA3AD"/>
                 </a:solidFill>
                 <a:latin typeface="Inter" pitchFamily="34" charset="0"/>
@@ -17443,14 +19118,14 @@
       </p:sp>
       <p:sp>
         <p:nvSpPr>
-          <p:cNvPr id="136" name="Text 134"/>
-          <p:cNvSpPr txBox="1"/>
-          <p:nvPr/>
-        </p:nvSpPr>
-        <p:spPr>
-          <a:xfrm>
-            <a:off x="6565392" y="5205625"/>
-            <a:ext cx="1920240" cy="239896"/>
+          <p:cNvPr id="171" name="Text 169"/>
+          <p:cNvSpPr txBox="1"/>
+          <p:nvPr/>
+        </p:nvSpPr>
+        <p:spPr>
+          <a:xfrm>
+            <a:off x="6565392" y="5254035"/>
+            <a:ext cx="1920240" cy="223759"/>
           </a:xfrm>
           <a:prstGeom prst="rect">
             <a:avLst/>
@@ -17474,22 +19149,22 @@
                 <a:ea typeface="Inter" pitchFamily="34" charset="-122"/>
                 <a:cs typeface="Inter" pitchFamily="34" charset="-120"/>
               </a:rPr>
-              <a:t>MAZDA</a:t>
-            </a:r>
-            <a:endParaRPr lang="en-US" sz="1200" dirty="0"/>
-          </a:p>
-        </p:txBody>
-      </p:sp>
-      <p:sp>
-        <p:nvSpPr>
-          <p:cNvPr id="137" name="Shape 135"/>
+              <a:t>KIA LV</a:t>
+            </a:r>
+            <a:endParaRPr lang="en-US" sz="1200" dirty="0"/>
+          </a:p>
+        </p:txBody>
+      </p:sp>
+      <p:sp>
+        <p:nvSpPr>
+          <p:cNvPr id="172" name="Shape 170"/>
           <p:cNvSpPr/>
           <p:nvPr/>
         </p:nvSpPr>
         <p:spPr>
           <a:xfrm>
-            <a:off x="8809839" y="5270397"/>
-            <a:ext cx="526185" cy="110352"/>
+            <a:off x="8615154" y="5314450"/>
+            <a:ext cx="515130" cy="102929"/>
           </a:xfrm>
           <a:prstGeom prst="rect">
             <a:avLst/>
@@ -17502,14 +19177,14 @@
       </p:sp>
       <p:sp>
         <p:nvSpPr>
-          <p:cNvPr id="138" name="Text 136"/>
-          <p:cNvSpPr txBox="1"/>
-          <p:nvPr/>
-        </p:nvSpPr>
-        <p:spPr>
-          <a:xfrm>
-            <a:off x="10168128" y="5205625"/>
-            <a:ext cx="1234440" cy="239896"/>
+          <p:cNvPr id="173" name="Text 171"/>
+          <p:cNvSpPr txBox="1"/>
+          <p:nvPr/>
+        </p:nvSpPr>
+        <p:spPr>
+          <a:xfrm>
+            <a:off x="9756648" y="5254035"/>
+            <a:ext cx="777240" cy="223759"/>
           </a:xfrm>
           <a:prstGeom prst="rect">
             <a:avLst/>
@@ -17533,22 +19208,22 @@
                 <a:ea typeface="Inter" pitchFamily="34" charset="-122"/>
                 <a:cs typeface="Inter" pitchFamily="34" charset="-120"/>
               </a:rPr>
-              <a:t>−$40.91</a:t>
-            </a:r>
-            <a:endParaRPr lang="en-US" sz="1200" dirty="0"/>
-          </a:p>
-        </p:txBody>
-      </p:sp>
-      <p:sp>
-        <p:nvSpPr>
-          <p:cNvPr id="139" name="Text 137"/>
-          <p:cNvSpPr txBox="1"/>
-          <p:nvPr/>
-        </p:nvSpPr>
-        <p:spPr>
-          <a:xfrm>
-            <a:off x="6208776" y="5445521"/>
-            <a:ext cx="310896" cy="239896"/>
+              <a:t>−26.6%</a:t>
+            </a:r>
+            <a:endParaRPr lang="en-US" sz="1200" dirty="0"/>
+          </a:p>
+        </p:txBody>
+      </p:sp>
+      <p:sp>
+        <p:nvSpPr>
+          <p:cNvPr id="174" name="Text 172"/>
+          <p:cNvSpPr txBox="1"/>
+          <p:nvPr/>
+        </p:nvSpPr>
+        <p:spPr>
+          <a:xfrm>
+            <a:off x="10533888" y="5254035"/>
+            <a:ext cx="868680" cy="223759"/>
           </a:xfrm>
           <a:prstGeom prst="rect">
             <a:avLst/>
@@ -17566,6 +19241,45 @@
             <a:r>
               <a:rPr lang="en-US" sz="1200" dirty="0">
                 <a:solidFill>
+                  <a:srgbClr val="A82B26"/>
+                </a:solidFill>
+                <a:latin typeface="Inter" pitchFamily="34" charset="0"/>
+                <a:ea typeface="Inter" pitchFamily="34" charset="-122"/>
+                <a:cs typeface="Inter" pitchFamily="34" charset="-120"/>
+              </a:rPr>
+              <a:t>−$60</a:t>
+            </a:r>
+            <a:endParaRPr lang="en-US" sz="1200" dirty="0"/>
+          </a:p>
+        </p:txBody>
+      </p:sp>
+      <p:sp>
+        <p:nvSpPr>
+          <p:cNvPr id="175" name="Text 173"/>
+          <p:cNvSpPr txBox="1"/>
+          <p:nvPr/>
+        </p:nvSpPr>
+        <p:spPr>
+          <a:xfrm>
+            <a:off x="6208776" y="5477794"/>
+            <a:ext cx="310896" cy="223759"/>
+          </a:xfrm>
+          <a:prstGeom prst="rect">
+            <a:avLst/>
+          </a:prstGeom>
+          <a:noFill/>
+          <a:ln/>
+        </p:spPr>
+        <p:txBody>
+          <a:bodyPr wrap="square" lIns="0" tIns="0" rIns="0" bIns="0" rtlCol="0" anchor="ctr"/>
+          <a:lstStyle/>
+          <a:p>
+            <a:pPr algn="r" indent="0" marL="0">
+              <a:buNone/>
+            </a:pPr>
+            <a:r>
+              <a:rPr lang="en-US" sz="1200" dirty="0">
+                <a:solidFill>
                   <a:srgbClr val="9AA3AD"/>
                 </a:solidFill>
                 <a:latin typeface="Inter" pitchFamily="34" charset="0"/>
@@ -17580,14 +19294,14 @@
       </p:sp>
       <p:sp>
         <p:nvSpPr>
-          <p:cNvPr id="140" name="Text 138"/>
-          <p:cNvSpPr txBox="1"/>
-          <p:nvPr/>
-        </p:nvSpPr>
-        <p:spPr>
-          <a:xfrm>
-            <a:off x="6565392" y="5445521"/>
-            <a:ext cx="1920240" cy="239896"/>
+          <p:cNvPr id="176" name="Text 174"/>
+          <p:cNvSpPr txBox="1"/>
+          <p:nvPr/>
+        </p:nvSpPr>
+        <p:spPr>
+          <a:xfrm>
+            <a:off x="6565392" y="5477794"/>
+            <a:ext cx="1920240" cy="223759"/>
           </a:xfrm>
           <a:prstGeom prst="rect">
             <a:avLst/>
@@ -17611,22 +19325,22 @@
                 <a:ea typeface="Inter" pitchFamily="34" charset="-122"/>
                 <a:cs typeface="Inter" pitchFamily="34" charset="-120"/>
               </a:rPr>
-              <a:t>KIA LV</a:t>
-            </a:r>
-            <a:endParaRPr lang="en-US" sz="1200" dirty="0"/>
-          </a:p>
-        </p:txBody>
-      </p:sp>
-      <p:sp>
-        <p:nvSpPr>
-          <p:cNvPr id="141" name="Shape 139"/>
+              <a:t>NISSAN</a:t>
+            </a:r>
+            <a:endParaRPr lang="en-US" sz="1200" dirty="0"/>
+          </a:p>
+        </p:txBody>
+      </p:sp>
+      <p:sp>
+        <p:nvSpPr>
+          <p:cNvPr id="177" name="Shape 175"/>
           <p:cNvSpPr/>
           <p:nvPr/>
         </p:nvSpPr>
         <p:spPr>
           <a:xfrm>
-            <a:off x="8558784" y="5510293"/>
-            <a:ext cx="777240" cy="110352"/>
+            <a:off x="8602803" y="5538209"/>
+            <a:ext cx="527481" cy="102929"/>
           </a:xfrm>
           <a:prstGeom prst="rect">
             <a:avLst/>
@@ -17639,14 +19353,14 @@
       </p:sp>
       <p:sp>
         <p:nvSpPr>
-          <p:cNvPr id="142" name="Text 140"/>
-          <p:cNvSpPr txBox="1"/>
-          <p:nvPr/>
-        </p:nvSpPr>
-        <p:spPr>
-          <a:xfrm>
-            <a:off x="10168128" y="5445521"/>
-            <a:ext cx="1234440" cy="239896"/>
+          <p:cNvPr id="178" name="Text 176"/>
+          <p:cNvSpPr txBox="1"/>
+          <p:nvPr/>
+        </p:nvSpPr>
+        <p:spPr>
+          <a:xfrm>
+            <a:off x="9756648" y="5477794"/>
+            <a:ext cx="777240" cy="223759"/>
           </a:xfrm>
           <a:prstGeom prst="rect">
             <a:avLst/>
@@ -17670,22 +19384,61 @@
                 <a:ea typeface="Inter" pitchFamily="34" charset="-122"/>
                 <a:cs typeface="Inter" pitchFamily="34" charset="-120"/>
               </a:rPr>
-              <a:t>−$60.43</a:t>
-            </a:r>
-            <a:endParaRPr lang="en-US" sz="1200" dirty="0"/>
-          </a:p>
-        </p:txBody>
-      </p:sp>
-      <p:sp>
-        <p:nvSpPr>
-          <p:cNvPr id="143" name="Shape 141"/>
+              <a:t>−27.2%</a:t>
+            </a:r>
+            <a:endParaRPr lang="en-US" sz="1200" dirty="0"/>
+          </a:p>
+        </p:txBody>
+      </p:sp>
+      <p:sp>
+        <p:nvSpPr>
+          <p:cNvPr id="179" name="Text 177"/>
+          <p:cNvSpPr txBox="1"/>
+          <p:nvPr/>
+        </p:nvSpPr>
+        <p:spPr>
+          <a:xfrm>
+            <a:off x="10533888" y="5477794"/>
+            <a:ext cx="868680" cy="223759"/>
+          </a:xfrm>
+          <a:prstGeom prst="rect">
+            <a:avLst/>
+          </a:prstGeom>
+          <a:noFill/>
+          <a:ln/>
+        </p:spPr>
+        <p:txBody>
+          <a:bodyPr wrap="square" lIns="0" tIns="0" rIns="0" bIns="0" rtlCol="0" anchor="ctr"/>
+          <a:lstStyle/>
+          <a:p>
+            <a:pPr algn="r" indent="0" marL="0">
+              <a:buNone/>
+            </a:pPr>
+            <a:r>
+              <a:rPr lang="en-US" sz="1200" dirty="0">
+                <a:solidFill>
+                  <a:srgbClr val="A82B26"/>
+                </a:solidFill>
+                <a:latin typeface="Inter" pitchFamily="34" charset="0"/>
+                <a:ea typeface="Inter" pitchFamily="34" charset="-122"/>
+                <a:cs typeface="Inter" pitchFamily="34" charset="-120"/>
+              </a:rPr>
+              <a:t>−$33</a:t>
+            </a:r>
+            <a:endParaRPr lang="en-US" sz="1200" dirty="0"/>
+          </a:p>
+        </p:txBody>
+      </p:sp>
+      <p:sp>
+        <p:nvSpPr>
+          <p:cNvPr id="180" name="Shape 178"/>
           <p:cNvSpPr/>
           <p:nvPr/>
         </p:nvSpPr>
         <p:spPr>
           <a:xfrm>
-            <a:off x="3780130" y="1847088"/>
-            <a:ext cx="10973" cy="4078224"/>
+            <a:off x="3574390" y="2121408"/>
+            <a:ext cx="10973" cy="3803904"/>
           </a:xfrm>
           <a:prstGeom prst="rect">
             <a:avLst/>
@@ -17698,14 +19451,14 @@
       </p:sp>
       <p:sp>
         <p:nvSpPr>
-          <p:cNvPr id="144" name="Shape 142"/>
+          <p:cNvPr id="181" name="Shape 179"/>
           <p:cNvSpPr/>
           <p:nvPr/>
         </p:nvSpPr>
         <p:spPr>
           <a:xfrm>
-            <a:off x="9330538" y="1847088"/>
-            <a:ext cx="10973" cy="4078224"/>
+            <a:off x="9124798" y="2121408"/>
+            <a:ext cx="10973" cy="3803904"/>
           </a:xfrm>
           <a:prstGeom prst="rect">
             <a:avLst/>
@@ -17718,14 +19471,14 @@
       </p:sp>
       <p:sp>
         <p:nvSpPr>
-          <p:cNvPr id="145" name="Shape 143"/>
+          <p:cNvPr id="182" name="Shape 180"/>
           <p:cNvSpPr/>
           <p:nvPr/>
         </p:nvSpPr>
         <p:spPr>
           <a:xfrm>
-            <a:off x="6085332" y="1847088"/>
-            <a:ext cx="10973" cy="4078224"/>
+            <a:off x="6085332" y="2121408"/>
+            <a:ext cx="10973" cy="3803904"/>
           </a:xfrm>
           <a:prstGeom prst="rect">
             <a:avLst/>
@@ -17738,7 +19491,7 @@
       </p:sp>
       <p:sp>
         <p:nvSpPr>
-          <p:cNvPr id="146" name="Shape 144"/>
+          <p:cNvPr id="183" name="Shape 181"/>
           <p:cNvSpPr/>
           <p:nvPr/>
         </p:nvSpPr>
@@ -17758,7 +19511,7 @@
       </p:sp>
       <p:sp>
         <p:nvSpPr>
-          <p:cNvPr id="147" name="Text 145"/>
+          <p:cNvPr id="184" name="Text 182"/>
           <p:cNvSpPr txBox="1"/>
           <p:nvPr/>
         </p:nvSpPr>
@@ -17789,7 +19542,7 @@
                 <a:ea typeface="Inter" pitchFamily="34" charset="-122"/>
                 <a:cs typeface="Inter" pitchFamily="34" charset="-120"/>
               </a:rPr>
-              <a:t>20 of 33 stores raised internal ELR, led by Hyundai St George at +$46.71 to $205.15. 13 declined; Kia LV fell most at −$60.43.</a:t>
+              <a:t>20 of 33 stores raised internal ELR, led by Hyundai St George at +29.5% (+$47) to $205. 13 declined; Nissan fell most at −27.2%.</a:t>
             </a:r>
             <a:endParaRPr lang="en-US" sz="1600" dirty="0"/>
           </a:p>
@@ -18158,7 +19911,7 @@
                 <a:ea typeface="Inter" pitchFamily="34" charset="-122"/>
                 <a:cs typeface="Inter" pitchFamily="34" charset="-120"/>
               </a:rPr>
-              <a:t>$158.44  →  </a:t>
+              <a:t>$158  →  </a:t>
             </a:r>
             <a:pPr indent="0" marL="0">
               <a:spcAft>
@@ -18175,7 +19928,7 @@
                 <a:ea typeface="Inter" pitchFamily="34" charset="-122"/>
                 <a:cs typeface="Inter" pitchFamily="34" charset="-120"/>
               </a:rPr>
-              <a:t>$205.15</a:t>
+              <a:t>$205</a:t>
             </a:r>
             <a:endParaRPr lang="en-US" sz="1400" dirty="0"/>
           </a:p>
@@ -18189,17 +19942,17 @@
         </p:nvSpPr>
         <p:spPr>
           <a:xfrm>
-            <a:off x="2941320" y="2103120"/>
-            <a:ext cx="1115568" cy="755294"/>
-          </a:xfrm>
-          <a:prstGeom prst="rect">
-            <a:avLst/>
-          </a:prstGeom>
-          <a:noFill/>
-          <a:ln/>
-        </p:spPr>
-        <p:txBody>
-          <a:bodyPr wrap="square" lIns="0" tIns="0" rIns="0" bIns="0" rtlCol="0" anchor="ctr"/>
+            <a:off x="2941320" y="2193755"/>
+            <a:ext cx="1115568" cy="377647"/>
+          </a:xfrm>
+          <a:prstGeom prst="rect">
+            <a:avLst/>
+          </a:prstGeom>
+          <a:noFill/>
+          <a:ln/>
+        </p:spPr>
+        <p:txBody>
+          <a:bodyPr wrap="square" lIns="0" tIns="0" rIns="0" bIns="0" rtlCol="0" anchor="b"/>
           <a:lstStyle/>
           <a:p>
             <a:pPr algn="r" indent="0" marL="0">
@@ -18214,7 +19967,7 @@
                 <a:ea typeface="Inter" pitchFamily="34" charset="-122"/>
                 <a:cs typeface="Inter" pitchFamily="34" charset="-120"/>
               </a:rPr>
-              <a:t>+$46.71</a:t>
+              <a:t>+29.5%</a:t>
             </a:r>
             <a:endParaRPr lang="en-US" sz="1600" dirty="0"/>
           </a:p>
@@ -18223,6 +19976,45 @@
       <p:sp>
         <p:nvSpPr>
           <p:cNvPr id="13" name="Text 11"/>
+          <p:cNvSpPr txBox="1"/>
+          <p:nvPr/>
+        </p:nvSpPr>
+        <p:spPr>
+          <a:xfrm>
+            <a:off x="2941320" y="2541191"/>
+            <a:ext cx="1115568" cy="241694"/>
+          </a:xfrm>
+          <a:prstGeom prst="rect">
+            <a:avLst/>
+          </a:prstGeom>
+          <a:noFill/>
+          <a:ln/>
+        </p:spPr>
+        <p:txBody>
+          <a:bodyPr wrap="square" lIns="0" tIns="0" rIns="0" bIns="0" rtlCol="0" anchor="t"/>
+          <a:lstStyle/>
+          <a:p>
+            <a:pPr algn="r" indent="0" marL="0">
+              <a:buNone/>
+            </a:pPr>
+            <a:r>
+              <a:rPr lang="en-US" sz="1300" dirty="0">
+                <a:solidFill>
+                  <a:srgbClr val="595959"/>
+                </a:solidFill>
+                <a:latin typeface="Inter" pitchFamily="34" charset="0"/>
+                <a:ea typeface="Inter" pitchFamily="34" charset="-122"/>
+                <a:cs typeface="Inter" pitchFamily="34" charset="-120"/>
+              </a:rPr>
+              <a:t>+$47</a:t>
+            </a:r>
+            <a:endParaRPr lang="en-US" sz="1300" dirty="0"/>
+          </a:p>
+        </p:txBody>
+      </p:sp>
+      <p:sp>
+        <p:nvSpPr>
+          <p:cNvPr id="14" name="Text 12"/>
           <p:cNvSpPr txBox="1"/>
           <p:nvPr/>
         </p:nvSpPr>
@@ -18261,7 +20053,7 @@
       </p:sp>
       <p:sp>
         <p:nvSpPr>
-          <p:cNvPr id="14" name="Text 12"/>
+          <p:cNvPr id="15" name="Text 13"/>
           <p:cNvSpPr txBox="1"/>
           <p:nvPr/>
         </p:nvSpPr>
@@ -18315,7 +20107,7 @@
                 <a:ea typeface="Inter" pitchFamily="34" charset="-122"/>
                 <a:cs typeface="Inter" pitchFamily="34" charset="-120"/>
               </a:rPr>
-              <a:t>$167.46  →  </a:t>
+              <a:t>$167  →  </a:t>
             </a:r>
             <a:pPr indent="0" marL="0">
               <a:spcAft>
@@ -18332,7 +20124,7 @@
                 <a:ea typeface="Inter" pitchFamily="34" charset="-122"/>
                 <a:cs typeface="Inter" pitchFamily="34" charset="-120"/>
               </a:rPr>
-              <a:t>$207.05</a:t>
+              <a:t>$207</a:t>
             </a:r>
             <a:endParaRPr lang="en-US" sz="1400" dirty="0"/>
           </a:p>
@@ -18340,23 +20132,23 @@
       </p:sp>
       <p:sp>
         <p:nvSpPr>
-          <p:cNvPr id="15" name="Text 13"/>
-          <p:cNvSpPr txBox="1"/>
-          <p:nvPr/>
-        </p:nvSpPr>
-        <p:spPr>
-          <a:xfrm>
-            <a:off x="2941320" y="2858414"/>
-            <a:ext cx="1115568" cy="755294"/>
-          </a:xfrm>
-          <a:prstGeom prst="rect">
-            <a:avLst/>
-          </a:prstGeom>
-          <a:noFill/>
-          <a:ln/>
-        </p:spPr>
-        <p:txBody>
-          <a:bodyPr wrap="square" lIns="0" tIns="0" rIns="0" bIns="0" rtlCol="0" anchor="ctr"/>
+          <p:cNvPr id="16" name="Text 14"/>
+          <p:cNvSpPr txBox="1"/>
+          <p:nvPr/>
+        </p:nvSpPr>
+        <p:spPr>
+          <a:xfrm>
+            <a:off x="2941320" y="2949050"/>
+            <a:ext cx="1115568" cy="377647"/>
+          </a:xfrm>
+          <a:prstGeom prst="rect">
+            <a:avLst/>
+          </a:prstGeom>
+          <a:noFill/>
+          <a:ln/>
+        </p:spPr>
+        <p:txBody>
+          <a:bodyPr wrap="square" lIns="0" tIns="0" rIns="0" bIns="0" rtlCol="0" anchor="b"/>
           <a:lstStyle/>
           <a:p>
             <a:pPr algn="r" indent="0" marL="0">
@@ -18371,7 +20163,7 @@
                 <a:ea typeface="Inter" pitchFamily="34" charset="-122"/>
                 <a:cs typeface="Inter" pitchFamily="34" charset="-120"/>
               </a:rPr>
-              <a:t>+$39.59</a:t>
+              <a:t>+23.6%</a:t>
             </a:r>
             <a:endParaRPr lang="en-US" sz="1600" dirty="0"/>
           </a:p>
@@ -18379,7 +20171,46 @@
       </p:sp>
       <p:sp>
         <p:nvSpPr>
-          <p:cNvPr id="16" name="Shape 14"/>
+          <p:cNvPr id="17" name="Text 15"/>
+          <p:cNvSpPr txBox="1"/>
+          <p:nvPr/>
+        </p:nvSpPr>
+        <p:spPr>
+          <a:xfrm>
+            <a:off x="2941320" y="3296485"/>
+            <a:ext cx="1115568" cy="241694"/>
+          </a:xfrm>
+          <a:prstGeom prst="rect">
+            <a:avLst/>
+          </a:prstGeom>
+          <a:noFill/>
+          <a:ln/>
+        </p:spPr>
+        <p:txBody>
+          <a:bodyPr wrap="square" lIns="0" tIns="0" rIns="0" bIns="0" rtlCol="0" anchor="t"/>
+          <a:lstStyle/>
+          <a:p>
+            <a:pPr algn="r" indent="0" marL="0">
+              <a:buNone/>
+            </a:pPr>
+            <a:r>
+              <a:rPr lang="en-US" sz="1300" dirty="0">
+                <a:solidFill>
+                  <a:srgbClr val="595959"/>
+                </a:solidFill>
+                <a:latin typeface="Inter" pitchFamily="34" charset="0"/>
+                <a:ea typeface="Inter" pitchFamily="34" charset="-122"/>
+                <a:cs typeface="Inter" pitchFamily="34" charset="-120"/>
+              </a:rPr>
+              <a:t>+$40</a:t>
+            </a:r>
+            <a:endParaRPr lang="en-US" sz="1300" dirty="0"/>
+          </a:p>
+        </p:txBody>
+      </p:sp>
+      <p:sp>
+        <p:nvSpPr>
+          <p:cNvPr id="18" name="Shape 16"/>
           <p:cNvSpPr/>
           <p:nvPr/>
         </p:nvSpPr>
@@ -18399,7 +20230,7 @@
       </p:sp>
       <p:sp>
         <p:nvSpPr>
-          <p:cNvPr id="17" name="Text 15"/>
+          <p:cNvPr id="19" name="Text 17"/>
           <p:cNvSpPr txBox="1"/>
           <p:nvPr/>
         </p:nvSpPr>
@@ -18438,7 +20269,7 @@
       </p:sp>
       <p:sp>
         <p:nvSpPr>
-          <p:cNvPr id="18" name="Text 16"/>
+          <p:cNvPr id="20" name="Text 18"/>
           <p:cNvSpPr txBox="1"/>
           <p:nvPr/>
         </p:nvSpPr>
@@ -18492,7 +20323,7 @@
                 <a:ea typeface="Inter" pitchFamily="34" charset="-122"/>
                 <a:cs typeface="Inter" pitchFamily="34" charset="-120"/>
               </a:rPr>
-              <a:t>$138.70  →  </a:t>
+              <a:t>$139  →  </a:t>
             </a:r>
             <a:pPr indent="0" marL="0">
               <a:spcAft>
@@ -18509,7 +20340,7 @@
                 <a:ea typeface="Inter" pitchFamily="34" charset="-122"/>
                 <a:cs typeface="Inter" pitchFamily="34" charset="-120"/>
               </a:rPr>
-              <a:t>$165.81</a:t>
+              <a:t>$166</a:t>
             </a:r>
             <a:endParaRPr lang="en-US" sz="1400" dirty="0"/>
           </a:p>
@@ -18517,23 +20348,23 @@
       </p:sp>
       <p:sp>
         <p:nvSpPr>
-          <p:cNvPr id="19" name="Text 17"/>
-          <p:cNvSpPr txBox="1"/>
-          <p:nvPr/>
-        </p:nvSpPr>
-        <p:spPr>
-          <a:xfrm>
-            <a:off x="2941320" y="3613709"/>
-            <a:ext cx="1115568" cy="755294"/>
-          </a:xfrm>
-          <a:prstGeom prst="rect">
-            <a:avLst/>
-          </a:prstGeom>
-          <a:noFill/>
-          <a:ln/>
-        </p:spPr>
-        <p:txBody>
-          <a:bodyPr wrap="square" lIns="0" tIns="0" rIns="0" bIns="0" rtlCol="0" anchor="ctr"/>
+          <p:cNvPr id="21" name="Text 19"/>
+          <p:cNvSpPr txBox="1"/>
+          <p:nvPr/>
+        </p:nvSpPr>
+        <p:spPr>
+          <a:xfrm>
+            <a:off x="2941320" y="3704344"/>
+            <a:ext cx="1115568" cy="377647"/>
+          </a:xfrm>
+          <a:prstGeom prst="rect">
+            <a:avLst/>
+          </a:prstGeom>
+          <a:noFill/>
+          <a:ln/>
+        </p:spPr>
+        <p:txBody>
+          <a:bodyPr wrap="square" lIns="0" tIns="0" rIns="0" bIns="0" rtlCol="0" anchor="b"/>
           <a:lstStyle/>
           <a:p>
             <a:pPr algn="r" indent="0" marL="0">
@@ -18548,7 +20379,7 @@
                 <a:ea typeface="Inter" pitchFamily="34" charset="-122"/>
                 <a:cs typeface="Inter" pitchFamily="34" charset="-120"/>
               </a:rPr>
-              <a:t>+$27.12</a:t>
+              <a:t>+19.6%</a:t>
             </a:r>
             <a:endParaRPr lang="en-US" sz="1600" dirty="0"/>
           </a:p>
@@ -18556,7 +20387,46 @@
       </p:sp>
       <p:sp>
         <p:nvSpPr>
-          <p:cNvPr id="20" name="Text 18"/>
+          <p:cNvPr id="22" name="Text 20"/>
+          <p:cNvSpPr txBox="1"/>
+          <p:nvPr/>
+        </p:nvSpPr>
+        <p:spPr>
+          <a:xfrm>
+            <a:off x="2941320" y="4051780"/>
+            <a:ext cx="1115568" cy="241694"/>
+          </a:xfrm>
+          <a:prstGeom prst="rect">
+            <a:avLst/>
+          </a:prstGeom>
+          <a:noFill/>
+          <a:ln/>
+        </p:spPr>
+        <p:txBody>
+          <a:bodyPr wrap="square" lIns="0" tIns="0" rIns="0" bIns="0" rtlCol="0" anchor="t"/>
+          <a:lstStyle/>
+          <a:p>
+            <a:pPr algn="r" indent="0" marL="0">
+              <a:buNone/>
+            </a:pPr>
+            <a:r>
+              <a:rPr lang="en-US" sz="1300" dirty="0">
+                <a:solidFill>
+                  <a:srgbClr val="595959"/>
+                </a:solidFill>
+                <a:latin typeface="Inter" pitchFamily="34" charset="0"/>
+                <a:ea typeface="Inter" pitchFamily="34" charset="-122"/>
+                <a:cs typeface="Inter" pitchFamily="34" charset="-120"/>
+              </a:rPr>
+              <a:t>+$27</a:t>
+            </a:r>
+            <a:endParaRPr lang="en-US" sz="1300" dirty="0"/>
+          </a:p>
+        </p:txBody>
+      </p:sp>
+      <p:sp>
+        <p:nvSpPr>
+          <p:cNvPr id="23" name="Text 21"/>
           <p:cNvSpPr txBox="1"/>
           <p:nvPr/>
         </p:nvSpPr>
@@ -18595,7 +20465,7 @@
       </p:sp>
       <p:sp>
         <p:nvSpPr>
-          <p:cNvPr id="21" name="Text 19"/>
+          <p:cNvPr id="24" name="Text 22"/>
           <p:cNvSpPr txBox="1"/>
           <p:nvPr/>
         </p:nvSpPr>
@@ -18649,7 +20519,7 @@
                 <a:ea typeface="Inter" pitchFamily="34" charset="-122"/>
                 <a:cs typeface="Inter" pitchFamily="34" charset="-120"/>
               </a:rPr>
-              <a:t>$113.65  →  </a:t>
+              <a:t>$114  →  </a:t>
             </a:r>
             <a:pPr indent="0" marL="0">
               <a:spcAft>
@@ -18666,7 +20536,7 @@
                 <a:ea typeface="Inter" pitchFamily="34" charset="-122"/>
                 <a:cs typeface="Inter" pitchFamily="34" charset="-120"/>
               </a:rPr>
-              <a:t>$134.46</a:t>
+              <a:t>$134</a:t>
             </a:r>
             <a:endParaRPr lang="en-US" sz="1400" dirty="0"/>
           </a:p>
@@ -18674,23 +20544,23 @@
       </p:sp>
       <p:sp>
         <p:nvSpPr>
-          <p:cNvPr id="22" name="Text 20"/>
-          <p:cNvSpPr txBox="1"/>
-          <p:nvPr/>
-        </p:nvSpPr>
-        <p:spPr>
-          <a:xfrm>
-            <a:off x="2941320" y="4369003"/>
-            <a:ext cx="1115568" cy="755294"/>
-          </a:xfrm>
-          <a:prstGeom prst="rect">
-            <a:avLst/>
-          </a:prstGeom>
-          <a:noFill/>
-          <a:ln/>
-        </p:spPr>
-        <p:txBody>
-          <a:bodyPr wrap="square" lIns="0" tIns="0" rIns="0" bIns="0" rtlCol="0" anchor="ctr"/>
+          <p:cNvPr id="25" name="Text 23"/>
+          <p:cNvSpPr txBox="1"/>
+          <p:nvPr/>
+        </p:nvSpPr>
+        <p:spPr>
+          <a:xfrm>
+            <a:off x="2941320" y="4459639"/>
+            <a:ext cx="1115568" cy="377647"/>
+          </a:xfrm>
+          <a:prstGeom prst="rect">
+            <a:avLst/>
+          </a:prstGeom>
+          <a:noFill/>
+          <a:ln/>
+        </p:spPr>
+        <p:txBody>
+          <a:bodyPr wrap="square" lIns="0" tIns="0" rIns="0" bIns="0" rtlCol="0" anchor="b"/>
           <a:lstStyle/>
           <a:p>
             <a:pPr algn="r" indent="0" marL="0">
@@ -18705,7 +20575,7 @@
                 <a:ea typeface="Inter" pitchFamily="34" charset="-122"/>
                 <a:cs typeface="Inter" pitchFamily="34" charset="-120"/>
               </a:rPr>
-              <a:t>+$20.81</a:t>
+              <a:t>+18.3%</a:t>
             </a:r>
             <a:endParaRPr lang="en-US" sz="1600" dirty="0"/>
           </a:p>
@@ -18713,7 +20583,46 @@
       </p:sp>
       <p:sp>
         <p:nvSpPr>
-          <p:cNvPr id="23" name="Shape 21"/>
+          <p:cNvPr id="26" name="Text 24"/>
+          <p:cNvSpPr txBox="1"/>
+          <p:nvPr/>
+        </p:nvSpPr>
+        <p:spPr>
+          <a:xfrm>
+            <a:off x="2941320" y="4807074"/>
+            <a:ext cx="1115568" cy="241694"/>
+          </a:xfrm>
+          <a:prstGeom prst="rect">
+            <a:avLst/>
+          </a:prstGeom>
+          <a:noFill/>
+          <a:ln/>
+        </p:spPr>
+        <p:txBody>
+          <a:bodyPr wrap="square" lIns="0" tIns="0" rIns="0" bIns="0" rtlCol="0" anchor="t"/>
+          <a:lstStyle/>
+          <a:p>
+            <a:pPr algn="r" indent="0" marL="0">
+              <a:buNone/>
+            </a:pPr>
+            <a:r>
+              <a:rPr lang="en-US" sz="1300" dirty="0">
+                <a:solidFill>
+                  <a:srgbClr val="595959"/>
+                </a:solidFill>
+                <a:latin typeface="Inter" pitchFamily="34" charset="0"/>
+                <a:ea typeface="Inter" pitchFamily="34" charset="-122"/>
+                <a:cs typeface="Inter" pitchFamily="34" charset="-120"/>
+              </a:rPr>
+              <a:t>+$21</a:t>
+            </a:r>
+            <a:endParaRPr lang="en-US" sz="1300" dirty="0"/>
+          </a:p>
+        </p:txBody>
+      </p:sp>
+      <p:sp>
+        <p:nvSpPr>
+          <p:cNvPr id="27" name="Shape 25"/>
           <p:cNvSpPr/>
           <p:nvPr/>
         </p:nvSpPr>
@@ -18733,7 +20642,7 @@
       </p:sp>
       <p:sp>
         <p:nvSpPr>
-          <p:cNvPr id="24" name="Text 22"/>
+          <p:cNvPr id="28" name="Text 26"/>
           <p:cNvSpPr txBox="1"/>
           <p:nvPr/>
         </p:nvSpPr>
@@ -18772,7 +20681,7 @@
       </p:sp>
       <p:sp>
         <p:nvSpPr>
-          <p:cNvPr id="25" name="Text 23"/>
+          <p:cNvPr id="29" name="Text 27"/>
           <p:cNvSpPr txBox="1"/>
           <p:nvPr/>
         </p:nvSpPr>
@@ -18826,7 +20735,7 @@
                 <a:ea typeface="Inter" pitchFamily="34" charset="-122"/>
                 <a:cs typeface="Inter" pitchFamily="34" charset="-120"/>
               </a:rPr>
-              <a:t>$97.52  →  </a:t>
+              <a:t>$98  →  </a:t>
             </a:r>
             <a:pPr indent="0" marL="0">
               <a:spcAft>
@@ -18843,7 +20752,7 @@
                 <a:ea typeface="Inter" pitchFamily="34" charset="-122"/>
                 <a:cs typeface="Inter" pitchFamily="34" charset="-120"/>
               </a:rPr>
-              <a:t>$114.97</a:t>
+              <a:t>$115</a:t>
             </a:r>
             <a:endParaRPr lang="en-US" sz="1400" dirty="0"/>
           </a:p>
@@ -18851,23 +20760,23 @@
       </p:sp>
       <p:sp>
         <p:nvSpPr>
-          <p:cNvPr id="26" name="Text 24"/>
-          <p:cNvSpPr txBox="1"/>
-          <p:nvPr/>
-        </p:nvSpPr>
-        <p:spPr>
-          <a:xfrm>
-            <a:off x="2941320" y="5124298"/>
-            <a:ext cx="1115568" cy="755294"/>
-          </a:xfrm>
-          <a:prstGeom prst="rect">
-            <a:avLst/>
-          </a:prstGeom>
-          <a:noFill/>
-          <a:ln/>
-        </p:spPr>
-        <p:txBody>
-          <a:bodyPr wrap="square" lIns="0" tIns="0" rIns="0" bIns="0" rtlCol="0" anchor="ctr"/>
+          <p:cNvPr id="30" name="Text 28"/>
+          <p:cNvSpPr txBox="1"/>
+          <p:nvPr/>
+        </p:nvSpPr>
+        <p:spPr>
+          <a:xfrm>
+            <a:off x="2941320" y="5214933"/>
+            <a:ext cx="1115568" cy="377647"/>
+          </a:xfrm>
+          <a:prstGeom prst="rect">
+            <a:avLst/>
+          </a:prstGeom>
+          <a:noFill/>
+          <a:ln/>
+        </p:spPr>
+        <p:txBody>
+          <a:bodyPr wrap="square" lIns="0" tIns="0" rIns="0" bIns="0" rtlCol="0" anchor="b"/>
           <a:lstStyle/>
           <a:p>
             <a:pPr algn="r" indent="0" marL="0">
@@ -18882,7 +20791,7 @@
                 <a:ea typeface="Inter" pitchFamily="34" charset="-122"/>
                 <a:cs typeface="Inter" pitchFamily="34" charset="-120"/>
               </a:rPr>
-              <a:t>+$17.44</a:t>
+              <a:t>+17.9%</a:t>
             </a:r>
             <a:endParaRPr lang="en-US" sz="1600" dirty="0"/>
           </a:p>
@@ -18890,7 +20799,46 @@
       </p:sp>
       <p:sp>
         <p:nvSpPr>
-          <p:cNvPr id="27" name="Shape 25"/>
+          <p:cNvPr id="31" name="Text 29"/>
+          <p:cNvSpPr txBox="1"/>
+          <p:nvPr/>
+        </p:nvSpPr>
+        <p:spPr>
+          <a:xfrm>
+            <a:off x="2941320" y="5562368"/>
+            <a:ext cx="1115568" cy="241694"/>
+          </a:xfrm>
+          <a:prstGeom prst="rect">
+            <a:avLst/>
+          </a:prstGeom>
+          <a:noFill/>
+          <a:ln/>
+        </p:spPr>
+        <p:txBody>
+          <a:bodyPr wrap="square" lIns="0" tIns="0" rIns="0" bIns="0" rtlCol="0" anchor="t"/>
+          <a:lstStyle/>
+          <a:p>
+            <a:pPr algn="r" indent="0" marL="0">
+              <a:buNone/>
+            </a:pPr>
+            <a:r>
+              <a:rPr lang="en-US" sz="1300" dirty="0">
+                <a:solidFill>
+                  <a:srgbClr val="595959"/>
+                </a:solidFill>
+                <a:latin typeface="Inter" pitchFamily="34" charset="0"/>
+                <a:ea typeface="Inter" pitchFamily="34" charset="-122"/>
+                <a:cs typeface="Inter" pitchFamily="34" charset="-120"/>
+              </a:rPr>
+              <a:t>+$17</a:t>
+            </a:r>
+            <a:endParaRPr lang="en-US" sz="1300" dirty="0"/>
+          </a:p>
+        </p:txBody>
+      </p:sp>
+      <p:sp>
+        <p:nvSpPr>
+          <p:cNvPr id="32" name="Shape 30"/>
           <p:cNvSpPr/>
           <p:nvPr/>
         </p:nvSpPr>
@@ -18910,7 +20858,7 @@
       </p:sp>
       <p:sp>
         <p:nvSpPr>
-          <p:cNvPr id="28" name="Text 26"/>
+          <p:cNvPr id="33" name="Text 31"/>
           <p:cNvSpPr txBox="1"/>
           <p:nvPr/>
         </p:nvSpPr>
@@ -18949,7 +20897,7 @@
       </p:sp>
       <p:sp>
         <p:nvSpPr>
-          <p:cNvPr id="29" name="Text 27"/>
+          <p:cNvPr id="34" name="Text 32"/>
           <p:cNvSpPr txBox="1"/>
           <p:nvPr/>
         </p:nvSpPr>
@@ -18988,7 +20936,7 @@
       </p:sp>
       <p:sp>
         <p:nvSpPr>
-          <p:cNvPr id="30" name="Shape 28"/>
+          <p:cNvPr id="35" name="Shape 33"/>
           <p:cNvSpPr/>
           <p:nvPr/>
         </p:nvSpPr>
@@ -19008,7 +20956,7 @@
       </p:sp>
       <p:sp>
         <p:nvSpPr>
-          <p:cNvPr id="31" name="Text 29"/>
+          <p:cNvPr id="36" name="Text 34"/>
           <p:cNvSpPr txBox="1"/>
           <p:nvPr/>
         </p:nvSpPr>
@@ -19047,7 +20995,7 @@
       </p:sp>
       <p:sp>
         <p:nvSpPr>
-          <p:cNvPr id="32" name="Text 30"/>
+          <p:cNvPr id="37" name="Text 35"/>
           <p:cNvSpPr txBox="1"/>
           <p:nvPr/>
         </p:nvSpPr>
@@ -19081,7 +21029,7 @@
                 <a:ea typeface="Inter" pitchFamily="34" charset="-122"/>
                 <a:cs typeface="Inter" pitchFamily="34" charset="-120"/>
               </a:rPr>
-              <a:t>Kia LV</a:t>
+              <a:t>Nissan</a:t>
             </a:r>
             <a:endParaRPr lang="en-US" sz="1400" dirty="0"/>
           </a:p>
@@ -19101,7 +21049,7 @@
                 <a:ea typeface="Inter" pitchFamily="34" charset="-122"/>
                 <a:cs typeface="Inter" pitchFamily="34" charset="-120"/>
               </a:rPr>
-              <a:t>$227.39  →  </a:t>
+              <a:t>$120  →  </a:t>
             </a:r>
             <a:pPr indent="0" marL="0">
               <a:spcAft>
@@ -19118,7 +21066,7 @@
                 <a:ea typeface="Inter" pitchFamily="34" charset="-122"/>
                 <a:cs typeface="Inter" pitchFamily="34" charset="-120"/>
               </a:rPr>
-              <a:t>$166.97</a:t>
+              <a:t>$87</a:t>
             </a:r>
             <a:endParaRPr lang="en-US" sz="1400" dirty="0"/>
           </a:p>
@@ -19126,23 +21074,23 @@
       </p:sp>
       <p:sp>
         <p:nvSpPr>
-          <p:cNvPr id="33" name="Text 31"/>
-          <p:cNvSpPr txBox="1"/>
-          <p:nvPr/>
-        </p:nvSpPr>
-        <p:spPr>
-          <a:xfrm>
-            <a:off x="6632448" y="2103120"/>
-            <a:ext cx="1115568" cy="755294"/>
-          </a:xfrm>
-          <a:prstGeom prst="rect">
-            <a:avLst/>
-          </a:prstGeom>
-          <a:noFill/>
-          <a:ln/>
-        </p:spPr>
-        <p:txBody>
-          <a:bodyPr wrap="square" lIns="0" tIns="0" rIns="0" bIns="0" rtlCol="0" anchor="ctr"/>
+          <p:cNvPr id="38" name="Text 36"/>
+          <p:cNvSpPr txBox="1"/>
+          <p:nvPr/>
+        </p:nvSpPr>
+        <p:spPr>
+          <a:xfrm>
+            <a:off x="6632448" y="2193755"/>
+            <a:ext cx="1115568" cy="377647"/>
+          </a:xfrm>
+          <a:prstGeom prst="rect">
+            <a:avLst/>
+          </a:prstGeom>
+          <a:noFill/>
+          <a:ln/>
+        </p:spPr>
+        <p:txBody>
+          <a:bodyPr wrap="square" lIns="0" tIns="0" rIns="0" bIns="0" rtlCol="0" anchor="b"/>
           <a:lstStyle/>
           <a:p>
             <a:pPr algn="r" indent="0" marL="0">
@@ -19157,7 +21105,7 @@
                 <a:ea typeface="Inter" pitchFamily="34" charset="-122"/>
                 <a:cs typeface="Inter" pitchFamily="34" charset="-120"/>
               </a:rPr>
-              <a:t>−$60.43</a:t>
+              <a:t>−27.2%</a:t>
             </a:r>
             <a:endParaRPr lang="en-US" sz="1600" dirty="0"/>
           </a:p>
@@ -19165,7 +21113,46 @@
       </p:sp>
       <p:sp>
         <p:nvSpPr>
-          <p:cNvPr id="34" name="Text 32"/>
+          <p:cNvPr id="39" name="Text 37"/>
+          <p:cNvSpPr txBox="1"/>
+          <p:nvPr/>
+        </p:nvSpPr>
+        <p:spPr>
+          <a:xfrm>
+            <a:off x="6632448" y="2541191"/>
+            <a:ext cx="1115568" cy="241694"/>
+          </a:xfrm>
+          <a:prstGeom prst="rect">
+            <a:avLst/>
+          </a:prstGeom>
+          <a:noFill/>
+          <a:ln/>
+        </p:spPr>
+        <p:txBody>
+          <a:bodyPr wrap="square" lIns="0" tIns="0" rIns="0" bIns="0" rtlCol="0" anchor="t"/>
+          <a:lstStyle/>
+          <a:p>
+            <a:pPr algn="r" indent="0" marL="0">
+              <a:buNone/>
+            </a:pPr>
+            <a:r>
+              <a:rPr lang="en-US" sz="1300" dirty="0">
+                <a:solidFill>
+                  <a:srgbClr val="595959"/>
+                </a:solidFill>
+                <a:latin typeface="Inter" pitchFamily="34" charset="0"/>
+                <a:ea typeface="Inter" pitchFamily="34" charset="-122"/>
+                <a:cs typeface="Inter" pitchFamily="34" charset="-120"/>
+              </a:rPr>
+              <a:t>−$33</a:t>
+            </a:r>
+            <a:endParaRPr lang="en-US" sz="1300" dirty="0"/>
+          </a:p>
+        </p:txBody>
+      </p:sp>
+      <p:sp>
+        <p:nvSpPr>
+          <p:cNvPr id="40" name="Text 38"/>
           <p:cNvSpPr txBox="1"/>
           <p:nvPr/>
         </p:nvSpPr>
@@ -19204,7 +21191,7 @@
       </p:sp>
       <p:sp>
         <p:nvSpPr>
-          <p:cNvPr id="35" name="Text 33"/>
+          <p:cNvPr id="41" name="Text 39"/>
           <p:cNvSpPr txBox="1"/>
           <p:nvPr/>
         </p:nvSpPr>
@@ -19238,7 +21225,7 @@
                 <a:ea typeface="Inter" pitchFamily="34" charset="-122"/>
                 <a:cs typeface="Inter" pitchFamily="34" charset="-120"/>
               </a:rPr>
-              <a:t>Mazda</a:t>
+              <a:t>Kia LV</a:t>
             </a:r>
             <a:endParaRPr lang="en-US" sz="1400" dirty="0"/>
           </a:p>
@@ -19258,7 +21245,7 @@
                 <a:ea typeface="Inter" pitchFamily="34" charset="-122"/>
                 <a:cs typeface="Inter" pitchFamily="34" charset="-120"/>
               </a:rPr>
-              <a:t>$182.66  →  </a:t>
+              <a:t>$227  →  </a:t>
             </a:r>
             <a:pPr indent="0" marL="0">
               <a:spcAft>
@@ -19275,7 +21262,7 @@
                 <a:ea typeface="Inter" pitchFamily="34" charset="-122"/>
                 <a:cs typeface="Inter" pitchFamily="34" charset="-120"/>
               </a:rPr>
-              <a:t>$141.76</a:t>
+              <a:t>$167</a:t>
             </a:r>
             <a:endParaRPr lang="en-US" sz="1400" dirty="0"/>
           </a:p>
@@ -19283,23 +21270,23 @@
       </p:sp>
       <p:sp>
         <p:nvSpPr>
-          <p:cNvPr id="36" name="Text 34"/>
-          <p:cNvSpPr txBox="1"/>
-          <p:nvPr/>
-        </p:nvSpPr>
-        <p:spPr>
-          <a:xfrm>
-            <a:off x="6632448" y="2858414"/>
-            <a:ext cx="1115568" cy="755294"/>
-          </a:xfrm>
-          <a:prstGeom prst="rect">
-            <a:avLst/>
-          </a:prstGeom>
-          <a:noFill/>
-          <a:ln/>
-        </p:spPr>
-        <p:txBody>
-          <a:bodyPr wrap="square" lIns="0" tIns="0" rIns="0" bIns="0" rtlCol="0" anchor="ctr"/>
+          <p:cNvPr id="42" name="Text 40"/>
+          <p:cNvSpPr txBox="1"/>
+          <p:nvPr/>
+        </p:nvSpPr>
+        <p:spPr>
+          <a:xfrm>
+            <a:off x="6632448" y="2949050"/>
+            <a:ext cx="1115568" cy="377647"/>
+          </a:xfrm>
+          <a:prstGeom prst="rect">
+            <a:avLst/>
+          </a:prstGeom>
+          <a:noFill/>
+          <a:ln/>
+        </p:spPr>
+        <p:txBody>
+          <a:bodyPr wrap="square" lIns="0" tIns="0" rIns="0" bIns="0" rtlCol="0" anchor="b"/>
           <a:lstStyle/>
           <a:p>
             <a:pPr algn="r" indent="0" marL="0">
@@ -19314,7 +21301,7 @@
                 <a:ea typeface="Inter" pitchFamily="34" charset="-122"/>
                 <a:cs typeface="Inter" pitchFamily="34" charset="-120"/>
               </a:rPr>
-              <a:t>−$40.91</a:t>
+              <a:t>−26.6%</a:t>
             </a:r>
             <a:endParaRPr lang="en-US" sz="1600" dirty="0"/>
           </a:p>
@@ -19322,7 +21309,46 @@
       </p:sp>
       <p:sp>
         <p:nvSpPr>
-          <p:cNvPr id="37" name="Shape 35"/>
+          <p:cNvPr id="43" name="Text 41"/>
+          <p:cNvSpPr txBox="1"/>
+          <p:nvPr/>
+        </p:nvSpPr>
+        <p:spPr>
+          <a:xfrm>
+            <a:off x="6632448" y="3296485"/>
+            <a:ext cx="1115568" cy="241694"/>
+          </a:xfrm>
+          <a:prstGeom prst="rect">
+            <a:avLst/>
+          </a:prstGeom>
+          <a:noFill/>
+          <a:ln/>
+        </p:spPr>
+        <p:txBody>
+          <a:bodyPr wrap="square" lIns="0" tIns="0" rIns="0" bIns="0" rtlCol="0" anchor="t"/>
+          <a:lstStyle/>
+          <a:p>
+            <a:pPr algn="r" indent="0" marL="0">
+              <a:buNone/>
+            </a:pPr>
+            <a:r>
+              <a:rPr lang="en-US" sz="1300" dirty="0">
+                <a:solidFill>
+                  <a:srgbClr val="595959"/>
+                </a:solidFill>
+                <a:latin typeface="Inter" pitchFamily="34" charset="0"/>
+                <a:ea typeface="Inter" pitchFamily="34" charset="-122"/>
+                <a:cs typeface="Inter" pitchFamily="34" charset="-120"/>
+              </a:rPr>
+              <a:t>−$60</a:t>
+            </a:r>
+            <a:endParaRPr lang="en-US" sz="1300" dirty="0"/>
+          </a:p>
+        </p:txBody>
+      </p:sp>
+      <p:sp>
+        <p:nvSpPr>
+          <p:cNvPr id="44" name="Shape 42"/>
           <p:cNvSpPr/>
           <p:nvPr/>
         </p:nvSpPr>
@@ -19342,7 +21368,7 @@
       </p:sp>
       <p:sp>
         <p:nvSpPr>
-          <p:cNvPr id="38" name="Text 36"/>
+          <p:cNvPr id="45" name="Text 43"/>
           <p:cNvSpPr txBox="1"/>
           <p:nvPr/>
         </p:nvSpPr>
@@ -19381,7 +21407,7 @@
       </p:sp>
       <p:sp>
         <p:nvSpPr>
-          <p:cNvPr id="39" name="Text 37"/>
+          <p:cNvPr id="46" name="Text 44"/>
           <p:cNvSpPr txBox="1"/>
           <p:nvPr/>
         </p:nvSpPr>
@@ -19415,7 +21441,7 @@
                 <a:ea typeface="Inter" pitchFamily="34" charset="-122"/>
                 <a:cs typeface="Inter" pitchFamily="34" charset="-120"/>
               </a:rPr>
-              <a:t>Nissan</a:t>
+              <a:t>Mazda</a:t>
             </a:r>
             <a:endParaRPr lang="en-US" sz="1400" dirty="0"/>
           </a:p>
@@ -19435,7 +21461,7 @@
                 <a:ea typeface="Inter" pitchFamily="34" charset="-122"/>
                 <a:cs typeface="Inter" pitchFamily="34" charset="-120"/>
               </a:rPr>
-              <a:t>$119.81  →  </a:t>
+              <a:t>$183  →  </a:t>
             </a:r>
             <a:pPr indent="0" marL="0">
               <a:spcAft>
@@ -19452,7 +21478,7 @@
                 <a:ea typeface="Inter" pitchFamily="34" charset="-122"/>
                 <a:cs typeface="Inter" pitchFamily="34" charset="-120"/>
               </a:rPr>
-              <a:t>$87.21</a:t>
+              <a:t>$142</a:t>
             </a:r>
             <a:endParaRPr lang="en-US" sz="1400" dirty="0"/>
           </a:p>
@@ -19460,23 +21486,23 @@
       </p:sp>
       <p:sp>
         <p:nvSpPr>
-          <p:cNvPr id="40" name="Text 38"/>
-          <p:cNvSpPr txBox="1"/>
-          <p:nvPr/>
-        </p:nvSpPr>
-        <p:spPr>
-          <a:xfrm>
-            <a:off x="6632448" y="3613709"/>
-            <a:ext cx="1115568" cy="755294"/>
-          </a:xfrm>
-          <a:prstGeom prst="rect">
-            <a:avLst/>
-          </a:prstGeom>
-          <a:noFill/>
-          <a:ln/>
-        </p:spPr>
-        <p:txBody>
-          <a:bodyPr wrap="square" lIns="0" tIns="0" rIns="0" bIns="0" rtlCol="0" anchor="ctr"/>
+          <p:cNvPr id="47" name="Text 45"/>
+          <p:cNvSpPr txBox="1"/>
+          <p:nvPr/>
+        </p:nvSpPr>
+        <p:spPr>
+          <a:xfrm>
+            <a:off x="6632448" y="3704344"/>
+            <a:ext cx="1115568" cy="377647"/>
+          </a:xfrm>
+          <a:prstGeom prst="rect">
+            <a:avLst/>
+          </a:prstGeom>
+          <a:noFill/>
+          <a:ln/>
+        </p:spPr>
+        <p:txBody>
+          <a:bodyPr wrap="square" lIns="0" tIns="0" rIns="0" bIns="0" rtlCol="0" anchor="b"/>
           <a:lstStyle/>
           <a:p>
             <a:pPr algn="r" indent="0" marL="0">
@@ -19491,7 +21517,7 @@
                 <a:ea typeface="Inter" pitchFamily="34" charset="-122"/>
                 <a:cs typeface="Inter" pitchFamily="34" charset="-120"/>
               </a:rPr>
-              <a:t>−$32.60</a:t>
+              <a:t>−22.4%</a:t>
             </a:r>
             <a:endParaRPr lang="en-US" sz="1600" dirty="0"/>
           </a:p>
@@ -19499,7 +21525,46 @@
       </p:sp>
       <p:sp>
         <p:nvSpPr>
-          <p:cNvPr id="41" name="Text 39"/>
+          <p:cNvPr id="48" name="Text 46"/>
+          <p:cNvSpPr txBox="1"/>
+          <p:nvPr/>
+        </p:nvSpPr>
+        <p:spPr>
+          <a:xfrm>
+            <a:off x="6632448" y="4051780"/>
+            <a:ext cx="1115568" cy="241694"/>
+          </a:xfrm>
+          <a:prstGeom prst="rect">
+            <a:avLst/>
+          </a:prstGeom>
+          <a:noFill/>
+          <a:ln/>
+        </p:spPr>
+        <p:txBody>
+          <a:bodyPr wrap="square" lIns="0" tIns="0" rIns="0" bIns="0" rtlCol="0" anchor="t"/>
+          <a:lstStyle/>
+          <a:p>
+            <a:pPr algn="r" indent="0" marL="0">
+              <a:buNone/>
+            </a:pPr>
+            <a:r>
+              <a:rPr lang="en-US" sz="1300" dirty="0">
+                <a:solidFill>
+                  <a:srgbClr val="595959"/>
+                </a:solidFill>
+                <a:latin typeface="Inter" pitchFamily="34" charset="0"/>
+                <a:ea typeface="Inter" pitchFamily="34" charset="-122"/>
+                <a:cs typeface="Inter" pitchFamily="34" charset="-120"/>
+              </a:rPr>
+              <a:t>−$41</a:t>
+            </a:r>
+            <a:endParaRPr lang="en-US" sz="1300" dirty="0"/>
+          </a:p>
+        </p:txBody>
+      </p:sp>
+      <p:sp>
+        <p:nvSpPr>
+          <p:cNvPr id="49" name="Text 47"/>
           <p:cNvSpPr txBox="1"/>
           <p:nvPr/>
         </p:nvSpPr>
@@ -19538,7 +21603,7 @@
       </p:sp>
       <p:sp>
         <p:nvSpPr>
-          <p:cNvPr id="42" name="Text 40"/>
+          <p:cNvPr id="50" name="Text 48"/>
           <p:cNvSpPr txBox="1"/>
           <p:nvPr/>
         </p:nvSpPr>
@@ -19592,7 +21657,7 @@
                 <a:ea typeface="Inter" pitchFamily="34" charset="-122"/>
                 <a:cs typeface="Inter" pitchFamily="34" charset="-120"/>
               </a:rPr>
-              <a:t>$172.28  →  </a:t>
+              <a:t>$172  →  </a:t>
             </a:r>
             <a:pPr indent="0" marL="0">
               <a:spcAft>
@@ -19609,7 +21674,7 @@
                 <a:ea typeface="Inter" pitchFamily="34" charset="-122"/>
                 <a:cs typeface="Inter" pitchFamily="34" charset="-120"/>
               </a:rPr>
-              <a:t>$151.53</a:t>
+              <a:t>$152</a:t>
             </a:r>
             <a:endParaRPr lang="en-US" sz="1400" dirty="0"/>
           </a:p>
@@ -19617,23 +21682,23 @@
       </p:sp>
       <p:sp>
         <p:nvSpPr>
-          <p:cNvPr id="43" name="Text 41"/>
-          <p:cNvSpPr txBox="1"/>
-          <p:nvPr/>
-        </p:nvSpPr>
-        <p:spPr>
-          <a:xfrm>
-            <a:off x="6632448" y="4369003"/>
-            <a:ext cx="1115568" cy="755294"/>
-          </a:xfrm>
-          <a:prstGeom prst="rect">
-            <a:avLst/>
-          </a:prstGeom>
-          <a:noFill/>
-          <a:ln/>
-        </p:spPr>
-        <p:txBody>
-          <a:bodyPr wrap="square" lIns="0" tIns="0" rIns="0" bIns="0" rtlCol="0" anchor="ctr"/>
+          <p:cNvPr id="51" name="Text 49"/>
+          <p:cNvSpPr txBox="1"/>
+          <p:nvPr/>
+        </p:nvSpPr>
+        <p:spPr>
+          <a:xfrm>
+            <a:off x="6632448" y="4459639"/>
+            <a:ext cx="1115568" cy="377647"/>
+          </a:xfrm>
+          <a:prstGeom prst="rect">
+            <a:avLst/>
+          </a:prstGeom>
+          <a:noFill/>
+          <a:ln/>
+        </p:spPr>
+        <p:txBody>
+          <a:bodyPr wrap="square" lIns="0" tIns="0" rIns="0" bIns="0" rtlCol="0" anchor="b"/>
           <a:lstStyle/>
           <a:p>
             <a:pPr algn="r" indent="0" marL="0">
@@ -19648,7 +21713,7 @@
                 <a:ea typeface="Inter" pitchFamily="34" charset="-122"/>
                 <a:cs typeface="Inter" pitchFamily="34" charset="-120"/>
               </a:rPr>
-              <a:t>−$20.75</a:t>
+              <a:t>−12.0%</a:t>
             </a:r>
             <a:endParaRPr lang="en-US" sz="1600" dirty="0"/>
           </a:p>
@@ -19656,7 +21721,46 @@
       </p:sp>
       <p:sp>
         <p:nvSpPr>
-          <p:cNvPr id="44" name="Shape 42"/>
+          <p:cNvPr id="52" name="Text 50"/>
+          <p:cNvSpPr txBox="1"/>
+          <p:nvPr/>
+        </p:nvSpPr>
+        <p:spPr>
+          <a:xfrm>
+            <a:off x="6632448" y="4807074"/>
+            <a:ext cx="1115568" cy="241694"/>
+          </a:xfrm>
+          <a:prstGeom prst="rect">
+            <a:avLst/>
+          </a:prstGeom>
+          <a:noFill/>
+          <a:ln/>
+        </p:spPr>
+        <p:txBody>
+          <a:bodyPr wrap="square" lIns="0" tIns="0" rIns="0" bIns="0" rtlCol="0" anchor="t"/>
+          <a:lstStyle/>
+          <a:p>
+            <a:pPr algn="r" indent="0" marL="0">
+              <a:buNone/>
+            </a:pPr>
+            <a:r>
+              <a:rPr lang="en-US" sz="1300" dirty="0">
+                <a:solidFill>
+                  <a:srgbClr val="595959"/>
+                </a:solidFill>
+                <a:latin typeface="Inter" pitchFamily="34" charset="0"/>
+                <a:ea typeface="Inter" pitchFamily="34" charset="-122"/>
+                <a:cs typeface="Inter" pitchFamily="34" charset="-120"/>
+              </a:rPr>
+              <a:t>−$21</a:t>
+            </a:r>
+            <a:endParaRPr lang="en-US" sz="1300" dirty="0"/>
+          </a:p>
+        </p:txBody>
+      </p:sp>
+      <p:sp>
+        <p:nvSpPr>
+          <p:cNvPr id="53" name="Shape 51"/>
           <p:cNvSpPr/>
           <p:nvPr/>
         </p:nvSpPr>
@@ -19676,7 +21780,7 @@
       </p:sp>
       <p:sp>
         <p:nvSpPr>
-          <p:cNvPr id="45" name="Text 43"/>
+          <p:cNvPr id="54" name="Text 52"/>
           <p:cNvSpPr txBox="1"/>
           <p:nvPr/>
         </p:nvSpPr>
@@ -19715,7 +21819,7 @@
       </p:sp>
       <p:sp>
         <p:nvSpPr>
-          <p:cNvPr id="46" name="Text 44"/>
+          <p:cNvPr id="55" name="Text 53"/>
           <p:cNvSpPr txBox="1"/>
           <p:nvPr/>
         </p:nvSpPr>
@@ -19769,7 +21873,7 @@
                 <a:ea typeface="Inter" pitchFamily="34" charset="-122"/>
                 <a:cs typeface="Inter" pitchFamily="34" charset="-120"/>
               </a:rPr>
-              <a:t>$157.10  →  </a:t>
+              <a:t>$157  →  </a:t>
             </a:r>
             <a:pPr indent="0" marL="0">
               <a:spcAft>
@@ -19786,7 +21890,7 @@
                 <a:ea typeface="Inter" pitchFamily="34" charset="-122"/>
                 <a:cs typeface="Inter" pitchFamily="34" charset="-120"/>
               </a:rPr>
-              <a:t>$139.36</a:t>
+              <a:t>$139</a:t>
             </a:r>
             <a:endParaRPr lang="en-US" sz="1400" dirty="0"/>
           </a:p>
@@ -19794,23 +21898,23 @@
       </p:sp>
       <p:sp>
         <p:nvSpPr>
-          <p:cNvPr id="47" name="Text 45"/>
-          <p:cNvSpPr txBox="1"/>
-          <p:nvPr/>
-        </p:nvSpPr>
-        <p:spPr>
-          <a:xfrm>
-            <a:off x="6632448" y="5124298"/>
-            <a:ext cx="1115568" cy="755294"/>
-          </a:xfrm>
-          <a:prstGeom prst="rect">
-            <a:avLst/>
-          </a:prstGeom>
-          <a:noFill/>
-          <a:ln/>
-        </p:spPr>
-        <p:txBody>
-          <a:bodyPr wrap="square" lIns="0" tIns="0" rIns="0" bIns="0" rtlCol="0" anchor="ctr"/>
+          <p:cNvPr id="56" name="Text 54"/>
+          <p:cNvSpPr txBox="1"/>
+          <p:nvPr/>
+        </p:nvSpPr>
+        <p:spPr>
+          <a:xfrm>
+            <a:off x="6632448" y="5214933"/>
+            <a:ext cx="1115568" cy="377647"/>
+          </a:xfrm>
+          <a:prstGeom prst="rect">
+            <a:avLst/>
+          </a:prstGeom>
+          <a:noFill/>
+          <a:ln/>
+        </p:spPr>
+        <p:txBody>
+          <a:bodyPr wrap="square" lIns="0" tIns="0" rIns="0" bIns="0" rtlCol="0" anchor="b"/>
           <a:lstStyle/>
           <a:p>
             <a:pPr algn="r" indent="0" marL="0">
@@ -19825,7 +21929,7 @@
                 <a:ea typeface="Inter" pitchFamily="34" charset="-122"/>
                 <a:cs typeface="Inter" pitchFamily="34" charset="-120"/>
               </a:rPr>
-              <a:t>−$17.74</a:t>
+              <a:t>−11.3%</a:t>
             </a:r>
             <a:endParaRPr lang="en-US" sz="1600" dirty="0"/>
           </a:p>
@@ -19833,7 +21937,46 @@
       </p:sp>
       <p:sp>
         <p:nvSpPr>
-          <p:cNvPr id="48" name="Shape 46"/>
+          <p:cNvPr id="57" name="Text 55"/>
+          <p:cNvSpPr txBox="1"/>
+          <p:nvPr/>
+        </p:nvSpPr>
+        <p:spPr>
+          <a:xfrm>
+            <a:off x="6632448" y="5562368"/>
+            <a:ext cx="1115568" cy="241694"/>
+          </a:xfrm>
+          <a:prstGeom prst="rect">
+            <a:avLst/>
+          </a:prstGeom>
+          <a:noFill/>
+          <a:ln/>
+        </p:spPr>
+        <p:txBody>
+          <a:bodyPr wrap="square" lIns="0" tIns="0" rIns="0" bIns="0" rtlCol="0" anchor="t"/>
+          <a:lstStyle/>
+          <a:p>
+            <a:pPr algn="r" indent="0" marL="0">
+              <a:buNone/>
+            </a:pPr>
+            <a:r>
+              <a:rPr lang="en-US" sz="1300" dirty="0">
+                <a:solidFill>
+                  <a:srgbClr val="595959"/>
+                </a:solidFill>
+                <a:latin typeface="Inter" pitchFamily="34" charset="0"/>
+                <a:ea typeface="Inter" pitchFamily="34" charset="-122"/>
+                <a:cs typeface="Inter" pitchFamily="34" charset="-120"/>
+              </a:rPr>
+              <a:t>−$18</a:t>
+            </a:r>
+            <a:endParaRPr lang="en-US" sz="1300" dirty="0"/>
+          </a:p>
+        </p:txBody>
+      </p:sp>
+      <p:sp>
+        <p:nvSpPr>
+          <p:cNvPr id="58" name="Shape 56"/>
           <p:cNvSpPr/>
           <p:nvPr/>
         </p:nvSpPr>
@@ -19853,7 +21996,7 @@
       </p:sp>
       <p:sp>
         <p:nvSpPr>
-          <p:cNvPr id="49" name="Text 47"/>
+          <p:cNvPr id="59" name="Text 57"/>
           <p:cNvSpPr txBox="1"/>
           <p:nvPr/>
         </p:nvSpPr>
@@ -19892,7 +22035,7 @@
       </p:sp>
       <p:sp>
         <p:nvSpPr>
-          <p:cNvPr id="50" name="Text 48"/>
+          <p:cNvPr id="60" name="Text 58"/>
           <p:cNvSpPr txBox="1"/>
           <p:nvPr/>
         </p:nvSpPr>
@@ -19931,7 +22074,7 @@
       </p:sp>
       <p:sp>
         <p:nvSpPr>
-          <p:cNvPr id="51" name="Shape 49"/>
+          <p:cNvPr id="61" name="Shape 59"/>
           <p:cNvSpPr/>
           <p:nvPr/>
         </p:nvSpPr>
@@ -19951,7 +22094,7 @@
       </p:sp>
       <p:sp>
         <p:nvSpPr>
-          <p:cNvPr id="52" name="Text 50"/>
+          <p:cNvPr id="62" name="Text 60"/>
           <p:cNvSpPr txBox="1"/>
           <p:nvPr/>
         </p:nvSpPr>
@@ -19990,7 +22133,7 @@
       </p:sp>
       <p:sp>
         <p:nvSpPr>
-          <p:cNvPr id="53" name="Text 51"/>
+          <p:cNvPr id="63" name="Text 61"/>
           <p:cNvSpPr txBox="1"/>
           <p:nvPr/>
         </p:nvSpPr>
@@ -20024,7 +22167,7 @@
                 <a:ea typeface="Inter" pitchFamily="34" charset="-122"/>
                 <a:cs typeface="Inter" pitchFamily="34" charset="-120"/>
               </a:rPr>
-              <a:t>Hyundai St George</a:t>
+              <a:t>Acura</a:t>
             </a:r>
             <a:endParaRPr lang="en-US" sz="1400" dirty="0"/>
           </a:p>
@@ -20044,7 +22187,7 @@
                 <a:ea typeface="Inter" pitchFamily="34" charset="-122"/>
                 <a:cs typeface="Inter" pitchFamily="34" charset="-120"/>
               </a:rPr>
-              <a:t>$176.79  →  </a:t>
+              <a:t>$134  →  </a:t>
             </a:r>
             <a:pPr indent="0" marL="0">
               <a:spcAft>
@@ -20061,7 +22204,7 @@
                 <a:ea typeface="Inter" pitchFamily="34" charset="-122"/>
                 <a:cs typeface="Inter" pitchFamily="34" charset="-120"/>
               </a:rPr>
-              <a:t>$233.00</a:t>
+              <a:t>$183</a:t>
             </a:r>
             <a:endParaRPr lang="en-US" sz="1400" dirty="0"/>
           </a:p>
@@ -20069,23 +22212,23 @@
       </p:sp>
       <p:sp>
         <p:nvSpPr>
-          <p:cNvPr id="54" name="Text 52"/>
-          <p:cNvSpPr txBox="1"/>
-          <p:nvPr/>
-        </p:nvSpPr>
-        <p:spPr>
-          <a:xfrm>
-            <a:off x="10323576" y="2103120"/>
-            <a:ext cx="1115568" cy="755294"/>
-          </a:xfrm>
-          <a:prstGeom prst="rect">
-            <a:avLst/>
-          </a:prstGeom>
-          <a:noFill/>
-          <a:ln/>
-        </p:spPr>
-        <p:txBody>
-          <a:bodyPr wrap="square" lIns="0" tIns="0" rIns="0" bIns="0" rtlCol="0" anchor="ctr"/>
+          <p:cNvPr id="64" name="Text 62"/>
+          <p:cNvSpPr txBox="1"/>
+          <p:nvPr/>
+        </p:nvSpPr>
+        <p:spPr>
+          <a:xfrm>
+            <a:off x="10323576" y="2193755"/>
+            <a:ext cx="1115568" cy="377647"/>
+          </a:xfrm>
+          <a:prstGeom prst="rect">
+            <a:avLst/>
+          </a:prstGeom>
+          <a:noFill/>
+          <a:ln/>
+        </p:spPr>
+        <p:txBody>
+          <a:bodyPr wrap="square" lIns="0" tIns="0" rIns="0" bIns="0" rtlCol="0" anchor="b"/>
           <a:lstStyle/>
           <a:p>
             <a:pPr algn="r" indent="0" marL="0">
@@ -20100,7 +22243,7 @@
                 <a:ea typeface="Inter" pitchFamily="34" charset="-122"/>
                 <a:cs typeface="Inter" pitchFamily="34" charset="-120"/>
               </a:rPr>
-              <a:t>+$56.21</a:t>
+              <a:t>+36.2%</a:t>
             </a:r>
             <a:endParaRPr lang="en-US" sz="1600" dirty="0"/>
           </a:p>
@@ -20108,7 +22251,46 @@
       </p:sp>
       <p:sp>
         <p:nvSpPr>
-          <p:cNvPr id="55" name="Text 53"/>
+          <p:cNvPr id="65" name="Text 63"/>
+          <p:cNvSpPr txBox="1"/>
+          <p:nvPr/>
+        </p:nvSpPr>
+        <p:spPr>
+          <a:xfrm>
+            <a:off x="10323576" y="2541191"/>
+            <a:ext cx="1115568" cy="241694"/>
+          </a:xfrm>
+          <a:prstGeom prst="rect">
+            <a:avLst/>
+          </a:prstGeom>
+          <a:noFill/>
+          <a:ln/>
+        </p:spPr>
+        <p:txBody>
+          <a:bodyPr wrap="square" lIns="0" tIns="0" rIns="0" bIns="0" rtlCol="0" anchor="t"/>
+          <a:lstStyle/>
+          <a:p>
+            <a:pPr algn="r" indent="0" marL="0">
+              <a:buNone/>
+            </a:pPr>
+            <a:r>
+              <a:rPr lang="en-US" sz="1300" dirty="0">
+                <a:solidFill>
+                  <a:srgbClr val="595959"/>
+                </a:solidFill>
+                <a:latin typeface="Inter" pitchFamily="34" charset="0"/>
+                <a:ea typeface="Inter" pitchFamily="34" charset="-122"/>
+                <a:cs typeface="Inter" pitchFamily="34" charset="-120"/>
+              </a:rPr>
+              <a:t>+$49</a:t>
+            </a:r>
+            <a:endParaRPr lang="en-US" sz="1300" dirty="0"/>
+          </a:p>
+        </p:txBody>
+      </p:sp>
+      <p:sp>
+        <p:nvSpPr>
+          <p:cNvPr id="66" name="Text 64"/>
           <p:cNvSpPr txBox="1"/>
           <p:nvPr/>
         </p:nvSpPr>
@@ -20147,7 +22329,7 @@
       </p:sp>
       <p:sp>
         <p:nvSpPr>
-          <p:cNvPr id="56" name="Text 54"/>
+          <p:cNvPr id="67" name="Text 65"/>
           <p:cNvSpPr txBox="1"/>
           <p:nvPr/>
         </p:nvSpPr>
@@ -20181,7 +22363,7 @@
                 <a:ea typeface="Inter" pitchFamily="34" charset="-122"/>
                 <a:cs typeface="Inter" pitchFamily="34" charset="-120"/>
               </a:rPr>
-              <a:t>Acura</a:t>
+              <a:t>Hyundai St George</a:t>
             </a:r>
             <a:endParaRPr lang="en-US" sz="1400" dirty="0"/>
           </a:p>
@@ -20201,7 +22383,7 @@
                 <a:ea typeface="Inter" pitchFamily="34" charset="-122"/>
                 <a:cs typeface="Inter" pitchFamily="34" charset="-120"/>
               </a:rPr>
-              <a:t>$134.35  →  </a:t>
+              <a:t>$177  →  </a:t>
             </a:r>
             <a:pPr indent="0" marL="0">
               <a:spcAft>
@@ -20218,7 +22400,7 @@
                 <a:ea typeface="Inter" pitchFamily="34" charset="-122"/>
                 <a:cs typeface="Inter" pitchFamily="34" charset="-120"/>
               </a:rPr>
-              <a:t>$182.97</a:t>
+              <a:t>$233</a:t>
             </a:r>
             <a:endParaRPr lang="en-US" sz="1400" dirty="0"/>
           </a:p>
@@ -20226,23 +22408,23 @@
       </p:sp>
       <p:sp>
         <p:nvSpPr>
-          <p:cNvPr id="57" name="Text 55"/>
-          <p:cNvSpPr txBox="1"/>
-          <p:nvPr/>
-        </p:nvSpPr>
-        <p:spPr>
-          <a:xfrm>
-            <a:off x="10323576" y="2858414"/>
-            <a:ext cx="1115568" cy="755294"/>
-          </a:xfrm>
-          <a:prstGeom prst="rect">
-            <a:avLst/>
-          </a:prstGeom>
-          <a:noFill/>
-          <a:ln/>
-        </p:spPr>
-        <p:txBody>
-          <a:bodyPr wrap="square" lIns="0" tIns="0" rIns="0" bIns="0" rtlCol="0" anchor="ctr"/>
+          <p:cNvPr id="68" name="Text 66"/>
+          <p:cNvSpPr txBox="1"/>
+          <p:nvPr/>
+        </p:nvSpPr>
+        <p:spPr>
+          <a:xfrm>
+            <a:off x="10323576" y="2949050"/>
+            <a:ext cx="1115568" cy="377647"/>
+          </a:xfrm>
+          <a:prstGeom prst="rect">
+            <a:avLst/>
+          </a:prstGeom>
+          <a:noFill/>
+          <a:ln/>
+        </p:spPr>
+        <p:txBody>
+          <a:bodyPr wrap="square" lIns="0" tIns="0" rIns="0" bIns="0" rtlCol="0" anchor="b"/>
           <a:lstStyle/>
           <a:p>
             <a:pPr algn="r" indent="0" marL="0">
@@ -20257,7 +22439,7 @@
                 <a:ea typeface="Inter" pitchFamily="34" charset="-122"/>
                 <a:cs typeface="Inter" pitchFamily="34" charset="-120"/>
               </a:rPr>
-              <a:t>+$48.61</a:t>
+              <a:t>+31.8%</a:t>
             </a:r>
             <a:endParaRPr lang="en-US" sz="1600" dirty="0"/>
           </a:p>
@@ -20265,7 +22447,46 @@
       </p:sp>
       <p:sp>
         <p:nvSpPr>
-          <p:cNvPr id="58" name="Shape 56"/>
+          <p:cNvPr id="69" name="Text 67"/>
+          <p:cNvSpPr txBox="1"/>
+          <p:nvPr/>
+        </p:nvSpPr>
+        <p:spPr>
+          <a:xfrm>
+            <a:off x="10323576" y="3296485"/>
+            <a:ext cx="1115568" cy="241694"/>
+          </a:xfrm>
+          <a:prstGeom prst="rect">
+            <a:avLst/>
+          </a:prstGeom>
+          <a:noFill/>
+          <a:ln/>
+        </p:spPr>
+        <p:txBody>
+          <a:bodyPr wrap="square" lIns="0" tIns="0" rIns="0" bIns="0" rtlCol="0" anchor="t"/>
+          <a:lstStyle/>
+          <a:p>
+            <a:pPr algn="r" indent="0" marL="0">
+              <a:buNone/>
+            </a:pPr>
+            <a:r>
+              <a:rPr lang="en-US" sz="1300" dirty="0">
+                <a:solidFill>
+                  <a:srgbClr val="595959"/>
+                </a:solidFill>
+                <a:latin typeface="Inter" pitchFamily="34" charset="0"/>
+                <a:ea typeface="Inter" pitchFamily="34" charset="-122"/>
+                <a:cs typeface="Inter" pitchFamily="34" charset="-120"/>
+              </a:rPr>
+              <a:t>+$56</a:t>
+            </a:r>
+            <a:endParaRPr lang="en-US" sz="1300" dirty="0"/>
+          </a:p>
+        </p:txBody>
+      </p:sp>
+      <p:sp>
+        <p:nvSpPr>
+          <p:cNvPr id="70" name="Shape 68"/>
           <p:cNvSpPr/>
           <p:nvPr/>
         </p:nvSpPr>
@@ -20285,7 +22506,7 @@
       </p:sp>
       <p:sp>
         <p:nvSpPr>
-          <p:cNvPr id="59" name="Text 57"/>
+          <p:cNvPr id="71" name="Text 69"/>
           <p:cNvSpPr txBox="1"/>
           <p:nvPr/>
         </p:nvSpPr>
@@ -20324,7 +22545,7 @@
       </p:sp>
       <p:sp>
         <p:nvSpPr>
-          <p:cNvPr id="60" name="Text 58"/>
+          <p:cNvPr id="72" name="Text 70"/>
           <p:cNvSpPr txBox="1"/>
           <p:nvPr/>
         </p:nvSpPr>
@@ -20358,7 +22579,7 @@
                 <a:ea typeface="Inter" pitchFamily="34" charset="-122"/>
                 <a:cs typeface="Inter" pitchFamily="34" charset="-120"/>
               </a:rPr>
-              <a:t>Audi Reno</a:t>
+              <a:t>Toyota Henderson</a:t>
             </a:r>
             <a:endParaRPr lang="en-US" sz="1400" dirty="0"/>
           </a:p>
@@ -20378,7 +22599,7 @@
                 <a:ea typeface="Inter" pitchFamily="34" charset="-122"/>
                 <a:cs typeface="Inter" pitchFamily="34" charset="-120"/>
               </a:rPr>
-              <a:t>$159.34  →  </a:t>
+              <a:t>$103  →  </a:t>
             </a:r>
             <a:pPr indent="0" marL="0">
               <a:spcAft>
@@ -20395,7 +22616,7 @@
                 <a:ea typeface="Inter" pitchFamily="34" charset="-122"/>
                 <a:cs typeface="Inter" pitchFamily="34" charset="-120"/>
               </a:rPr>
-              <a:t>$187.46</a:t>
+              <a:t>$129</a:t>
             </a:r>
             <a:endParaRPr lang="en-US" sz="1400" dirty="0"/>
           </a:p>
@@ -20403,23 +22624,23 @@
       </p:sp>
       <p:sp>
         <p:nvSpPr>
-          <p:cNvPr id="61" name="Text 59"/>
-          <p:cNvSpPr txBox="1"/>
-          <p:nvPr/>
-        </p:nvSpPr>
-        <p:spPr>
-          <a:xfrm>
-            <a:off x="10323576" y="3613709"/>
-            <a:ext cx="1115568" cy="755294"/>
-          </a:xfrm>
-          <a:prstGeom prst="rect">
-            <a:avLst/>
-          </a:prstGeom>
-          <a:noFill/>
-          <a:ln/>
-        </p:spPr>
-        <p:txBody>
-          <a:bodyPr wrap="square" lIns="0" tIns="0" rIns="0" bIns="0" rtlCol="0" anchor="ctr"/>
+          <p:cNvPr id="73" name="Text 71"/>
+          <p:cNvSpPr txBox="1"/>
+          <p:nvPr/>
+        </p:nvSpPr>
+        <p:spPr>
+          <a:xfrm>
+            <a:off x="10323576" y="3704344"/>
+            <a:ext cx="1115568" cy="377647"/>
+          </a:xfrm>
+          <a:prstGeom prst="rect">
+            <a:avLst/>
+          </a:prstGeom>
+          <a:noFill/>
+          <a:ln/>
+        </p:spPr>
+        <p:txBody>
+          <a:bodyPr wrap="square" lIns="0" tIns="0" rIns="0" bIns="0" rtlCol="0" anchor="b"/>
           <a:lstStyle/>
           <a:p>
             <a:pPr algn="r" indent="0" marL="0">
@@ -20434,7 +22655,7 @@
                 <a:ea typeface="Inter" pitchFamily="34" charset="-122"/>
                 <a:cs typeface="Inter" pitchFamily="34" charset="-120"/>
               </a:rPr>
-              <a:t>+$28.12</a:t>
+              <a:t>+25.2%</a:t>
             </a:r>
             <a:endParaRPr lang="en-US" sz="1600" dirty="0"/>
           </a:p>
@@ -20442,7 +22663,46 @@
       </p:sp>
       <p:sp>
         <p:nvSpPr>
-          <p:cNvPr id="62" name="Text 60"/>
+          <p:cNvPr id="74" name="Text 72"/>
+          <p:cNvSpPr txBox="1"/>
+          <p:nvPr/>
+        </p:nvSpPr>
+        <p:spPr>
+          <a:xfrm>
+            <a:off x="10323576" y="4051780"/>
+            <a:ext cx="1115568" cy="241694"/>
+          </a:xfrm>
+          <a:prstGeom prst="rect">
+            <a:avLst/>
+          </a:prstGeom>
+          <a:noFill/>
+          <a:ln/>
+        </p:spPr>
+        <p:txBody>
+          <a:bodyPr wrap="square" lIns="0" tIns="0" rIns="0" bIns="0" rtlCol="0" anchor="t"/>
+          <a:lstStyle/>
+          <a:p>
+            <a:pPr algn="r" indent="0" marL="0">
+              <a:buNone/>
+            </a:pPr>
+            <a:r>
+              <a:rPr lang="en-US" sz="1300" dirty="0">
+                <a:solidFill>
+                  <a:srgbClr val="595959"/>
+                </a:solidFill>
+                <a:latin typeface="Inter" pitchFamily="34" charset="0"/>
+                <a:ea typeface="Inter" pitchFamily="34" charset="-122"/>
+                <a:cs typeface="Inter" pitchFamily="34" charset="-120"/>
+              </a:rPr>
+              <a:t>+$26</a:t>
+            </a:r>
+            <a:endParaRPr lang="en-US" sz="1300" dirty="0"/>
+          </a:p>
+        </p:txBody>
+      </p:sp>
+      <p:sp>
+        <p:nvSpPr>
+          <p:cNvPr id="75" name="Text 73"/>
           <p:cNvSpPr txBox="1"/>
           <p:nvPr/>
         </p:nvSpPr>
@@ -20481,7 +22741,7 @@
       </p:sp>
       <p:sp>
         <p:nvSpPr>
-          <p:cNvPr id="63" name="Text 61"/>
+          <p:cNvPr id="76" name="Text 74"/>
           <p:cNvSpPr txBox="1"/>
           <p:nvPr/>
         </p:nvSpPr>
@@ -20515,7 +22775,7 @@
                 <a:ea typeface="Inter" pitchFamily="34" charset="-122"/>
                 <a:cs typeface="Inter" pitchFamily="34" charset="-120"/>
               </a:rPr>
-              <a:t>Toyota Henderson</a:t>
+              <a:t>LR Henderson</a:t>
             </a:r>
             <a:endParaRPr lang="en-US" sz="1400" dirty="0"/>
           </a:p>
@@ -20535,7 +22795,7 @@
                 <a:ea typeface="Inter" pitchFamily="34" charset="-122"/>
                 <a:cs typeface="Inter" pitchFamily="34" charset="-120"/>
               </a:rPr>
-              <a:t>$102.71  →  </a:t>
+              <a:t>$97  →  </a:t>
             </a:r>
             <a:pPr indent="0" marL="0">
               <a:spcAft>
@@ -20552,7 +22812,7 @@
                 <a:ea typeface="Inter" pitchFamily="34" charset="-122"/>
                 <a:cs typeface="Inter" pitchFamily="34" charset="-120"/>
               </a:rPr>
-              <a:t>$128.57</a:t>
+              <a:t>$119</a:t>
             </a:r>
             <a:endParaRPr lang="en-US" sz="1400" dirty="0"/>
           </a:p>
@@ -20560,23 +22820,23 @@
       </p:sp>
       <p:sp>
         <p:nvSpPr>
-          <p:cNvPr id="64" name="Text 62"/>
-          <p:cNvSpPr txBox="1"/>
-          <p:nvPr/>
-        </p:nvSpPr>
-        <p:spPr>
-          <a:xfrm>
-            <a:off x="10323576" y="4369003"/>
-            <a:ext cx="1115568" cy="755294"/>
-          </a:xfrm>
-          <a:prstGeom prst="rect">
-            <a:avLst/>
-          </a:prstGeom>
-          <a:noFill/>
-          <a:ln/>
-        </p:spPr>
-        <p:txBody>
-          <a:bodyPr wrap="square" lIns="0" tIns="0" rIns="0" bIns="0" rtlCol="0" anchor="ctr"/>
+          <p:cNvPr id="77" name="Text 75"/>
+          <p:cNvSpPr txBox="1"/>
+          <p:nvPr/>
+        </p:nvSpPr>
+        <p:spPr>
+          <a:xfrm>
+            <a:off x="10323576" y="4459639"/>
+            <a:ext cx="1115568" cy="377647"/>
+          </a:xfrm>
+          <a:prstGeom prst="rect">
+            <a:avLst/>
+          </a:prstGeom>
+          <a:noFill/>
+          <a:ln/>
+        </p:spPr>
+        <p:txBody>
+          <a:bodyPr wrap="square" lIns="0" tIns="0" rIns="0" bIns="0" rtlCol="0" anchor="b"/>
           <a:lstStyle/>
           <a:p>
             <a:pPr algn="r" indent="0" marL="0">
@@ -20591,7 +22851,7 @@
                 <a:ea typeface="Inter" pitchFamily="34" charset="-122"/>
                 <a:cs typeface="Inter" pitchFamily="34" charset="-120"/>
               </a:rPr>
-              <a:t>+$25.85</a:t>
+              <a:t>+23.3%</a:t>
             </a:r>
             <a:endParaRPr lang="en-US" sz="1600" dirty="0"/>
           </a:p>
@@ -20599,7 +22859,46 @@
       </p:sp>
       <p:sp>
         <p:nvSpPr>
-          <p:cNvPr id="65" name="Shape 63"/>
+          <p:cNvPr id="78" name="Text 76"/>
+          <p:cNvSpPr txBox="1"/>
+          <p:nvPr/>
+        </p:nvSpPr>
+        <p:spPr>
+          <a:xfrm>
+            <a:off x="10323576" y="4807074"/>
+            <a:ext cx="1115568" cy="241694"/>
+          </a:xfrm>
+          <a:prstGeom prst="rect">
+            <a:avLst/>
+          </a:prstGeom>
+          <a:noFill/>
+          <a:ln/>
+        </p:spPr>
+        <p:txBody>
+          <a:bodyPr wrap="square" lIns="0" tIns="0" rIns="0" bIns="0" rtlCol="0" anchor="t"/>
+          <a:lstStyle/>
+          <a:p>
+            <a:pPr algn="r" indent="0" marL="0">
+              <a:buNone/>
+            </a:pPr>
+            <a:r>
+              <a:rPr lang="en-US" sz="1300" dirty="0">
+                <a:solidFill>
+                  <a:srgbClr val="595959"/>
+                </a:solidFill>
+                <a:latin typeface="Inter" pitchFamily="34" charset="0"/>
+                <a:ea typeface="Inter" pitchFamily="34" charset="-122"/>
+                <a:cs typeface="Inter" pitchFamily="34" charset="-120"/>
+              </a:rPr>
+              <a:t>+$23</a:t>
+            </a:r>
+            <a:endParaRPr lang="en-US" sz="1300" dirty="0"/>
+          </a:p>
+        </p:txBody>
+      </p:sp>
+      <p:sp>
+        <p:nvSpPr>
+          <p:cNvPr id="79" name="Shape 77"/>
           <p:cNvSpPr/>
           <p:nvPr/>
         </p:nvSpPr>
@@ -20619,7 +22918,7 @@
       </p:sp>
       <p:sp>
         <p:nvSpPr>
-          <p:cNvPr id="66" name="Text 64"/>
+          <p:cNvPr id="80" name="Text 78"/>
           <p:cNvSpPr txBox="1"/>
           <p:nvPr/>
         </p:nvSpPr>
@@ -20658,7 +22957,7 @@
       </p:sp>
       <p:sp>
         <p:nvSpPr>
-          <p:cNvPr id="67" name="Text 65"/>
+          <p:cNvPr id="81" name="Text 79"/>
           <p:cNvSpPr txBox="1"/>
           <p:nvPr/>
         </p:nvSpPr>
@@ -20692,7 +22991,7 @@
                 <a:ea typeface="Inter" pitchFamily="34" charset="-122"/>
                 <a:cs typeface="Inter" pitchFamily="34" charset="-120"/>
               </a:rPr>
-              <a:t>LR Henderson</a:t>
+              <a:t>Audi Reno</a:t>
             </a:r>
             <a:endParaRPr lang="en-US" sz="1400" dirty="0"/>
           </a:p>
@@ -20712,7 +23011,7 @@
                 <a:ea typeface="Inter" pitchFamily="34" charset="-122"/>
                 <a:cs typeface="Inter" pitchFamily="34" charset="-120"/>
               </a:rPr>
-              <a:t>$96.74  →  </a:t>
+              <a:t>$159  →  </a:t>
             </a:r>
             <a:pPr indent="0" marL="0">
               <a:spcAft>
@@ -20729,7 +23028,7 @@
                 <a:ea typeface="Inter" pitchFamily="34" charset="-122"/>
                 <a:cs typeface="Inter" pitchFamily="34" charset="-120"/>
               </a:rPr>
-              <a:t>$119.28</a:t>
+              <a:t>$187</a:t>
             </a:r>
             <a:endParaRPr lang="en-US" sz="1400" dirty="0"/>
           </a:p>
@@ -20737,23 +23036,23 @@
       </p:sp>
       <p:sp>
         <p:nvSpPr>
-          <p:cNvPr id="68" name="Text 66"/>
-          <p:cNvSpPr txBox="1"/>
-          <p:nvPr/>
-        </p:nvSpPr>
-        <p:spPr>
-          <a:xfrm>
-            <a:off x="10323576" y="5124298"/>
-            <a:ext cx="1115568" cy="755294"/>
-          </a:xfrm>
-          <a:prstGeom prst="rect">
-            <a:avLst/>
-          </a:prstGeom>
-          <a:noFill/>
-          <a:ln/>
-        </p:spPr>
-        <p:txBody>
-          <a:bodyPr wrap="square" lIns="0" tIns="0" rIns="0" bIns="0" rtlCol="0" anchor="ctr"/>
+          <p:cNvPr id="82" name="Text 80"/>
+          <p:cNvSpPr txBox="1"/>
+          <p:nvPr/>
+        </p:nvSpPr>
+        <p:spPr>
+          <a:xfrm>
+            <a:off x="10323576" y="5214933"/>
+            <a:ext cx="1115568" cy="377647"/>
+          </a:xfrm>
+          <a:prstGeom prst="rect">
+            <a:avLst/>
+          </a:prstGeom>
+          <a:noFill/>
+          <a:ln/>
+        </p:spPr>
+        <p:txBody>
+          <a:bodyPr wrap="square" lIns="0" tIns="0" rIns="0" bIns="0" rtlCol="0" anchor="b"/>
           <a:lstStyle/>
           <a:p>
             <a:pPr algn="r" indent="0" marL="0">
@@ -20768,7 +23067,7 @@
                 <a:ea typeface="Inter" pitchFamily="34" charset="-122"/>
                 <a:cs typeface="Inter" pitchFamily="34" charset="-120"/>
               </a:rPr>
-              <a:t>+$22.54</a:t>
+              <a:t>+17.6%</a:t>
             </a:r>
             <a:endParaRPr lang="en-US" sz="1600" dirty="0"/>
           </a:p>
@@ -20776,7 +23075,46 @@
       </p:sp>
       <p:sp>
         <p:nvSpPr>
-          <p:cNvPr id="69" name="Shape 67"/>
+          <p:cNvPr id="83" name="Text 81"/>
+          <p:cNvSpPr txBox="1"/>
+          <p:nvPr/>
+        </p:nvSpPr>
+        <p:spPr>
+          <a:xfrm>
+            <a:off x="10323576" y="5562368"/>
+            <a:ext cx="1115568" cy="241694"/>
+          </a:xfrm>
+          <a:prstGeom prst="rect">
+            <a:avLst/>
+          </a:prstGeom>
+          <a:noFill/>
+          <a:ln/>
+        </p:spPr>
+        <p:txBody>
+          <a:bodyPr wrap="square" lIns="0" tIns="0" rIns="0" bIns="0" rtlCol="0" anchor="t"/>
+          <a:lstStyle/>
+          <a:p>
+            <a:pPr algn="r" indent="0" marL="0">
+              <a:buNone/>
+            </a:pPr>
+            <a:r>
+              <a:rPr lang="en-US" sz="1300" dirty="0">
+                <a:solidFill>
+                  <a:srgbClr val="595959"/>
+                </a:solidFill>
+                <a:latin typeface="Inter" pitchFamily="34" charset="0"/>
+                <a:ea typeface="Inter" pitchFamily="34" charset="-122"/>
+                <a:cs typeface="Inter" pitchFamily="34" charset="-120"/>
+              </a:rPr>
+              <a:t>+$28</a:t>
+            </a:r>
+            <a:endParaRPr lang="en-US" sz="1300" dirty="0"/>
+          </a:p>
+        </p:txBody>
+      </p:sp>
+      <p:sp>
+        <p:nvSpPr>
+          <p:cNvPr id="84" name="Shape 82"/>
           <p:cNvSpPr/>
           <p:nvPr/>
         </p:nvSpPr>
@@ -20796,7 +23134,7 @@
       </p:sp>
       <p:sp>
         <p:nvSpPr>
-          <p:cNvPr id="70" name="Text 68"/>
+          <p:cNvPr id="85" name="Text 83"/>
           <p:cNvSpPr txBox="1"/>
           <p:nvPr/>
         </p:nvSpPr>
@@ -20827,7 +23165,7 @@
                 <a:ea typeface="Inter" pitchFamily="34" charset="-122"/>
                 <a:cs typeface="Inter" pitchFamily="34" charset="-120"/>
               </a:rPr>
-              <a:t>Ask Hyundai St George, LR Reno and Lincoln what changed. Ask Kia LV, Mazda and Nissan what got in the way. Ask Hyundai St George, Acura and Audi Reno what they started this year.</a:t>
+              <a:t>Ask Hyundai St George, LR Reno and Lincoln what changed. Ask Nissan, Kia LV and Mazda what got in the way. Ask Acura, Hyundai St George and Toyota Henderson what they started this year.</a:t>
             </a:r>
             <a:endParaRPr lang="en-US" sz="1600" dirty="0"/>
           </a:p>
@@ -35184,9 +37522,25 @@
           </a:graphicData>
         </a:graphic>
       </p:graphicFrame>
-      <p:sp>
-        <p:nvSpPr>
-          <p:cNvPr id="21" name="Shape 15"/>
+      <p:graphicFrame>
+        <p:nvGraphicFramePr>
+          <p:cNvPr id="21" name="Chart 4" descr=""/>
+          <p:cNvGraphicFramePr/>
+          <p:nvPr/>
+        </p:nvGraphicFramePr>
+        <p:xfrm>
+          <a:off x="621792" y="3218688"/>
+          <a:ext cx="10945368" cy="2679192"/>
+        </p:xfrm>
+        <a:graphic xmlns:a="http://schemas.openxmlformats.org/drawingml/2006/main">
+          <a:graphicData uri="http://schemas.openxmlformats.org/drawingml/2006/chart">
+            <c:chart xmlns:c="http://schemas.openxmlformats.org/drawingml/2006/chart" r:id="rId5"/>
+          </a:graphicData>
+        </a:graphic>
+      </p:graphicFrame>
+      <p:sp>
+        <p:nvSpPr>
+          <p:cNvPr id="22" name="Shape 15"/>
           <p:cNvSpPr/>
           <p:nvPr/>
         </p:nvSpPr>
@@ -35206,7 +37560,7 @@
       </p:sp>
       <p:sp>
         <p:nvSpPr>
-          <p:cNvPr id="22" name="Shape 16"/>
+          <p:cNvPr id="23" name="Shape 16"/>
           <p:cNvSpPr/>
           <p:nvPr/>
         </p:nvSpPr>
@@ -35226,7 +37580,7 @@
       </p:sp>
       <p:sp>
         <p:nvSpPr>
-          <p:cNvPr id="23" name="Text 17"/>
+          <p:cNvPr id="24" name="Text 17"/>
           <p:cNvSpPr txBox="1"/>
           <p:nvPr/>
         </p:nvSpPr>
@@ -35265,7 +37619,7 @@
       </p:sp>
       <p:sp>
         <p:nvSpPr>
-          <p:cNvPr id="24" name="Shape 18"/>
+          <p:cNvPr id="25" name="Shape 18"/>
           <p:cNvSpPr/>
           <p:nvPr/>
         </p:nvSpPr>
@@ -35285,7 +37639,7 @@
       </p:sp>
       <p:sp>
         <p:nvSpPr>
-          <p:cNvPr id="25" name="Shape 19"/>
+          <p:cNvPr id="26" name="Shape 19"/>
           <p:cNvSpPr/>
           <p:nvPr/>
         </p:nvSpPr>
@@ -35305,7 +37659,7 @@
       </p:sp>
       <p:sp>
         <p:nvSpPr>
-          <p:cNvPr id="26" name="Text 20"/>
+          <p:cNvPr id="27" name="Text 20"/>
           <p:cNvSpPr txBox="1"/>
           <p:nvPr/>
         </p:nvSpPr>
@@ -35344,7 +37698,7 @@
       </p:sp>
       <p:sp>
         <p:nvSpPr>
-          <p:cNvPr id="27" name="Shape 21"/>
+          <p:cNvPr id="28" name="Shape 21"/>
           <p:cNvSpPr/>
           <p:nvPr/>
         </p:nvSpPr>
@@ -35364,7 +37718,7 @@
       </p:sp>
       <p:sp>
         <p:nvSpPr>
-          <p:cNvPr id="28" name="Text 22"/>
+          <p:cNvPr id="29" name="Text 22"/>
           <p:cNvSpPr txBox="1"/>
           <p:nvPr/>
         </p:nvSpPr>

--- a/day2-deck/decks/Warranty & Internal - House Style.pptx
+++ b/day2-deck/decks/Warranty & Internal - House Style.pptx
@@ -6163,7 +6163,7 @@
           <a:p>
             <a:r>
               <a:rPr lang="en-US" dirty="0"/>
-              <a:t>Source: Qlik - Closed Repair Orders. Jan-Sep by close month. Same-store, INEOS excluded (opened 2026). GMC Prescott body shop labor types excluded. Internal labor sale / internal sold hours. A higher internal rate adds service gross but is a cost to used cars. Top and bottom five stores by change in Internal ELR, Jan-Sep 2026 vs 2025. Moving now: Jul-Sep 2026 vs Jan-Mar 2026, each store against itself; the group moved +4.1% on the same basis, so part of every store's change is seasonal.Conversation starter: each top store says one thing they started doing; each bottom store says what got in the way and what they would try. The room trades ideas. Moving now: ask the top three what they started this year.</a:t>
+              <a:t>Source: Qlik - Closed Repair Orders. Jan-Sep by close month. Same-store, INEOS excluded (opened 2026). GMC Prescott body shop labor types excluded. Internal labor sale / internal sold hours. A higher internal rate adds service gross but is a cost to used cars. Top and bottom five stores by change in Internal ELR, Jan-Sep 2026 vs 2025. Moving now: Jul-Sep 2026 vs Jan-Mar 2026, each store against itself; the group moved +4.1% on the same basis, so part of every store's change is seasonal. Green bar at the right of a row: the store is on both the top five vs last year and the top five moving now.Conversation starter: each top store says one thing they started doing; each bottom store says what got in the way and what they would try. The room trades ideas. Moving now: ask the top three what they started this year.</a:t>
             </a:r>
             <a:endParaRPr lang="en-US" dirty="0"/>
           </a:p>
@@ -6515,7 +6515,7 @@
           <a:p>
             <a:r>
               <a:rPr lang="en-US" dirty="0"/>
-              <a:t>Source: Qlik - Closed Repair Orders. Jan-Sep by close month. Same-store, INEOS excluded (opened 2026). GMC Prescott body shop labor types excluded. Distinct warranty ROs: every RO with a warranty line. Top and bottom five stores by change in warranty RO count (percent, so store size does not drive the ranking), Jan-Sep 2026 vs 2025. Moving now: Jul-Sep 2026 vs Jan-Mar 2026, each store against itself (monthly averages); the group moved +9.7% on the same basis, so part of every store's change is seasonal.Conversation starter: each top store says one thing they started doing; each bottom store says what got in the way and what they would try. The room trades ideas. Moving now: ask the top three what they started this year.</a:t>
+              <a:t>Source: Qlik - Closed Repair Orders. Jan-Sep by close month. Same-store, INEOS excluded (opened 2026). GMC Prescott body shop labor types excluded. Distinct warranty ROs: every RO with a warranty line. Top and bottom five stores by change in warranty RO count (percent, so store size does not drive the ranking), Jan-Sep 2026 vs 2025. Moving now: Jul-Sep 2026 vs Jan-Mar 2026, each store against itself (monthly averages); the group moved +9.7% on the same basis, so part of every store's change is seasonal. Green bar at the right of a row: the store is on both the top five vs last year and the top five moving now.Conversation starter: each top store says one thing they started doing; each bottom store says what got in the way and what they would try. The room trades ideas. Moving now: ask the top three what they started this year.</a:t>
             </a:r>
             <a:endParaRPr lang="en-US" dirty="0"/>
           </a:p>
@@ -6867,7 +6867,7 @@
           <a:p>
             <a:r>
               <a:rPr lang="en-US" dirty="0"/>
-              <a:t>Source: Qlik - Closed Repair Orders. Jan-Sep by close month. Same-store, INEOS excluded (opened 2026). GMC Prescott body shop labor types excluded. Warranty labor sale / warranty sold hours. Top and bottom five stores by change in Warranty ELR, Jan-Sep 2026 vs 2025. Moving now: Jul-Sep 2026 vs Jan-Mar 2026, each store against itself; the group moved +$1.73 on the same basis, so part of every store's change is seasonal.Conversation starter: each top store says one thing they started doing; each bottom store says what got in the way and what they would try. The room trades ideas. Moving now: ask the top three what they started this year.</a:t>
+              <a:t>Source: Qlik - Closed Repair Orders. Jan-Sep by close month. Same-store, INEOS excluded (opened 2026). GMC Prescott body shop labor types excluded. Warranty labor sale / warranty sold hours. Top and bottom five stores by change in Warranty ELR, Jan-Sep 2026 vs 2025. Moving now: Jul-Sep 2026 vs Jan-Mar 2026, each store against itself; the group moved +$1.73 on the same basis, so part of every store's change is seasonal. Green bar at the right of a row: the store is on both the top five vs last year and the top five moving now.Conversation starter: each top store says one thing they started doing; each bottom store says what got in the way and what they would try. The room trades ideas. Moving now: ask the top three what they started this year.</a:t>
             </a:r>
             <a:endParaRPr lang="en-US" dirty="0"/>
           </a:p>
@@ -13744,7 +13744,7 @@
               <a:buNone/>
             </a:pPr>
             <a:r>
-              <a:rPr lang="en-US" sz="1200" dirty="0">
+              <a:rPr lang="en-US" sz="1200" b="1" dirty="0">
                 <a:solidFill>
                   <a:srgbClr val="0B7A4A"/>
                 </a:solidFill>
@@ -13920,7 +13920,7 @@
               <a:buNone/>
             </a:pPr>
             <a:r>
-              <a:rPr lang="en-US" sz="1200" dirty="0">
+              <a:rPr lang="en-US" sz="1200" b="1" dirty="0">
                 <a:solidFill>
                   <a:srgbClr val="0B7A4A"/>
                 </a:solidFill>
@@ -14096,7 +14096,7 @@
               <a:buNone/>
             </a:pPr>
             <a:r>
-              <a:rPr lang="en-US" sz="1200" dirty="0">
+              <a:rPr lang="en-US" sz="1200" b="1" dirty="0">
                 <a:solidFill>
                   <a:srgbClr val="0B7A4A"/>
                 </a:solidFill>
@@ -14272,7 +14272,7 @@
               <a:buNone/>
             </a:pPr>
             <a:r>
-              <a:rPr lang="en-US" sz="1200" dirty="0">
+              <a:rPr lang="en-US" sz="1200" b="1" dirty="0">
                 <a:solidFill>
                   <a:srgbClr val="0B7A4A"/>
                 </a:solidFill>
@@ -14448,7 +14448,7 @@
               <a:buNone/>
             </a:pPr>
             <a:r>
-              <a:rPr lang="en-US" sz="1200" dirty="0">
+              <a:rPr lang="en-US" sz="1200" b="1" dirty="0">
                 <a:solidFill>
                   <a:srgbClr val="0B7A4A"/>
                 </a:solidFill>
@@ -14624,7 +14624,7 @@
               <a:buNone/>
             </a:pPr>
             <a:r>
-              <a:rPr lang="en-US" sz="1200" dirty="0">
+              <a:rPr lang="en-US" sz="1200" b="1" dirty="0">
                 <a:solidFill>
                   <a:srgbClr val="0B7A4A"/>
                 </a:solidFill>
@@ -14800,7 +14800,7 @@
               <a:buNone/>
             </a:pPr>
             <a:r>
-              <a:rPr lang="en-US" sz="1200" dirty="0">
+              <a:rPr lang="en-US" sz="1200" b="1" dirty="0">
                 <a:solidFill>
                   <a:srgbClr val="0B7A4A"/>
                 </a:solidFill>
@@ -14976,7 +14976,7 @@
               <a:buNone/>
             </a:pPr>
             <a:r>
-              <a:rPr lang="en-US" sz="1200" dirty="0">
+              <a:rPr lang="en-US" sz="1200" b="1" dirty="0">
                 <a:solidFill>
                   <a:srgbClr val="0B7A4A"/>
                 </a:solidFill>
@@ -15152,7 +15152,7 @@
               <a:buNone/>
             </a:pPr>
             <a:r>
-              <a:rPr lang="en-US" sz="1200" dirty="0">
+              <a:rPr lang="en-US" sz="1200" b="1" dirty="0">
                 <a:solidFill>
                   <a:srgbClr val="0B7A4A"/>
                 </a:solidFill>
@@ -15328,7 +15328,7 @@
               <a:buNone/>
             </a:pPr>
             <a:r>
-              <a:rPr lang="en-US" sz="1200" dirty="0">
+              <a:rPr lang="en-US" sz="1200" b="1" dirty="0">
                 <a:solidFill>
                   <a:srgbClr val="0B7A4A"/>
                 </a:solidFill>
@@ -15504,7 +15504,7 @@
               <a:buNone/>
             </a:pPr>
             <a:r>
-              <a:rPr lang="en-US" sz="1200" dirty="0">
+              <a:rPr lang="en-US" sz="1200" b="1" dirty="0">
                 <a:solidFill>
                   <a:srgbClr val="0B7A4A"/>
                 </a:solidFill>
@@ -15680,7 +15680,7 @@
               <a:buNone/>
             </a:pPr>
             <a:r>
-              <a:rPr lang="en-US" sz="1200" dirty="0">
+              <a:rPr lang="en-US" sz="1200" b="1" dirty="0">
                 <a:solidFill>
                   <a:srgbClr val="0B7A4A"/>
                 </a:solidFill>
@@ -15856,7 +15856,7 @@
               <a:buNone/>
             </a:pPr>
             <a:r>
-              <a:rPr lang="en-US" sz="1200" dirty="0">
+              <a:rPr lang="en-US" sz="1200" b="1" dirty="0">
                 <a:solidFill>
                   <a:srgbClr val="0B7A4A"/>
                 </a:solidFill>
@@ -16032,7 +16032,7 @@
               <a:buNone/>
             </a:pPr>
             <a:r>
-              <a:rPr lang="en-US" sz="1200" dirty="0">
+              <a:rPr lang="en-US" sz="1200" b="1" dirty="0">
                 <a:solidFill>
                   <a:srgbClr val="0B7A4A"/>
                 </a:solidFill>
@@ -16208,7 +16208,7 @@
               <a:buNone/>
             </a:pPr>
             <a:r>
-              <a:rPr lang="en-US" sz="1200" dirty="0">
+              <a:rPr lang="en-US" sz="1200" b="1" dirty="0">
                 <a:solidFill>
                   <a:srgbClr val="0B7A4A"/>
                 </a:solidFill>
@@ -16384,7 +16384,7 @@
               <a:buNone/>
             </a:pPr>
             <a:r>
-              <a:rPr lang="en-US" sz="1200" dirty="0">
+              <a:rPr lang="en-US" sz="1200" b="1" dirty="0">
                 <a:solidFill>
                   <a:srgbClr val="0B7A4A"/>
                 </a:solidFill>
@@ -16560,7 +16560,7 @@
               <a:buNone/>
             </a:pPr>
             <a:r>
-              <a:rPr lang="en-US" sz="1200" dirty="0">
+              <a:rPr lang="en-US" sz="1200" b="1" dirty="0">
                 <a:solidFill>
                   <a:srgbClr val="0B7A4A"/>
                 </a:solidFill>
@@ -16736,7 +16736,7 @@
               <a:buNone/>
             </a:pPr>
             <a:r>
-              <a:rPr lang="en-US" sz="1200" dirty="0">
+              <a:rPr lang="en-US" sz="1200" b="1" dirty="0">
                 <a:solidFill>
                   <a:srgbClr val="0B7A4A"/>
                 </a:solidFill>
@@ -16912,7 +16912,7 @@
               <a:buNone/>
             </a:pPr>
             <a:r>
-              <a:rPr lang="en-US" sz="1200" dirty="0">
+              <a:rPr lang="en-US" sz="1200" b="1" dirty="0">
                 <a:solidFill>
                   <a:srgbClr val="0B7A4A"/>
                 </a:solidFill>
@@ -17088,7 +17088,7 @@
               <a:buNone/>
             </a:pPr>
             <a:r>
-              <a:rPr lang="en-US" sz="1200" dirty="0">
+              <a:rPr lang="en-US" sz="1200" b="1" dirty="0">
                 <a:solidFill>
                   <a:srgbClr val="0B7A4A"/>
                 </a:solidFill>
@@ -17264,7 +17264,7 @@
               <a:buNone/>
             </a:pPr>
             <a:r>
-              <a:rPr lang="en-US" sz="1200" dirty="0">
+              <a:rPr lang="en-US" sz="1200" b="1" dirty="0">
                 <a:solidFill>
                   <a:srgbClr val="A82B26"/>
                 </a:solidFill>
@@ -17440,7 +17440,7 @@
               <a:buNone/>
             </a:pPr>
             <a:r>
-              <a:rPr lang="en-US" sz="1200" dirty="0">
+              <a:rPr lang="en-US" sz="1200" b="1" dirty="0">
                 <a:solidFill>
                   <a:srgbClr val="A82B26"/>
                 </a:solidFill>
@@ -17616,7 +17616,7 @@
               <a:buNone/>
             </a:pPr>
             <a:r>
-              <a:rPr lang="en-US" sz="1200" dirty="0">
+              <a:rPr lang="en-US" sz="1200" b="1" dirty="0">
                 <a:solidFill>
                   <a:srgbClr val="A82B26"/>
                 </a:solidFill>
@@ -17792,7 +17792,7 @@
               <a:buNone/>
             </a:pPr>
             <a:r>
-              <a:rPr lang="en-US" sz="1200" dirty="0">
+              <a:rPr lang="en-US" sz="1200" b="1" dirty="0">
                 <a:solidFill>
                   <a:srgbClr val="A82B26"/>
                 </a:solidFill>
@@ -17968,7 +17968,7 @@
               <a:buNone/>
             </a:pPr>
             <a:r>
-              <a:rPr lang="en-US" sz="1200" dirty="0">
+              <a:rPr lang="en-US" sz="1200" b="1" dirty="0">
                 <a:solidFill>
                   <a:srgbClr val="A82B26"/>
                 </a:solidFill>
@@ -18144,7 +18144,7 @@
               <a:buNone/>
             </a:pPr>
             <a:r>
-              <a:rPr lang="en-US" sz="1200" dirty="0">
+              <a:rPr lang="en-US" sz="1200" b="1" dirty="0">
                 <a:solidFill>
                   <a:srgbClr val="A82B26"/>
                 </a:solidFill>
@@ -18320,7 +18320,7 @@
               <a:buNone/>
             </a:pPr>
             <a:r>
-              <a:rPr lang="en-US" sz="1200" dirty="0">
+              <a:rPr lang="en-US" sz="1200" b="1" dirty="0">
                 <a:solidFill>
                   <a:srgbClr val="A82B26"/>
                 </a:solidFill>
@@ -18496,7 +18496,7 @@
               <a:buNone/>
             </a:pPr>
             <a:r>
-              <a:rPr lang="en-US" sz="1200" dirty="0">
+              <a:rPr lang="en-US" sz="1200" b="1" dirty="0">
                 <a:solidFill>
                   <a:srgbClr val="A82B26"/>
                 </a:solidFill>
@@ -18672,7 +18672,7 @@
               <a:buNone/>
             </a:pPr>
             <a:r>
-              <a:rPr lang="en-US" sz="1200" dirty="0">
+              <a:rPr lang="en-US" sz="1200" b="1" dirty="0">
                 <a:solidFill>
                   <a:srgbClr val="A82B26"/>
                 </a:solidFill>
@@ -18848,7 +18848,7 @@
               <a:buNone/>
             </a:pPr>
             <a:r>
-              <a:rPr lang="en-US" sz="1200" dirty="0">
+              <a:rPr lang="en-US" sz="1200" b="1" dirty="0">
                 <a:solidFill>
                   <a:srgbClr val="A82B26"/>
                 </a:solidFill>
@@ -19024,7 +19024,7 @@
               <a:buNone/>
             </a:pPr>
             <a:r>
-              <a:rPr lang="en-US" sz="1200" dirty="0">
+              <a:rPr lang="en-US" sz="1200" b="1" dirty="0">
                 <a:solidFill>
                   <a:srgbClr val="A82B26"/>
                 </a:solidFill>
@@ -19200,7 +19200,7 @@
               <a:buNone/>
             </a:pPr>
             <a:r>
-              <a:rPr lang="en-US" sz="1200" dirty="0">
+              <a:rPr lang="en-US" sz="1200" b="1" dirty="0">
                 <a:solidFill>
                   <a:srgbClr val="A82B26"/>
                 </a:solidFill>
@@ -19376,7 +19376,7 @@
               <a:buNone/>
             </a:pPr>
             <a:r>
-              <a:rPr lang="en-US" sz="1200" dirty="0">
+              <a:rPr lang="en-US" sz="1200" b="1" dirty="0">
                 <a:solidFill>
                   <a:srgbClr val="A82B26"/>
                 </a:solidFill>
@@ -19818,7 +19818,27 @@
       </p:sp>
       <p:sp>
         <p:nvSpPr>
-          <p:cNvPr id="10" name="Text 8"/>
+          <p:cNvPr id="10" name="Shape 8"/>
+          <p:cNvSpPr/>
+          <p:nvPr/>
+        </p:nvSpPr>
+        <p:spPr>
+          <a:xfrm>
+            <a:off x="4084320" y="2139696"/>
+            <a:ext cx="64008" cy="682142"/>
+          </a:xfrm>
+          <a:prstGeom prst="rect">
+            <a:avLst/>
+          </a:prstGeom>
+          <a:solidFill>
+            <a:srgbClr val="12A566"/>
+          </a:solidFill>
+          <a:ln/>
+        </p:spPr>
+      </p:sp>
+      <p:sp>
+        <p:nvSpPr>
+          <p:cNvPr id="11" name="Text 9"/>
           <p:cNvSpPr txBox="1"/>
           <p:nvPr/>
         </p:nvSpPr>
@@ -19857,7 +19877,7 @@
       </p:sp>
       <p:sp>
         <p:nvSpPr>
-          <p:cNvPr id="11" name="Text 9"/>
+          <p:cNvPr id="12" name="Text 10"/>
           <p:cNvSpPr txBox="1"/>
           <p:nvPr/>
         </p:nvSpPr>
@@ -19936,7 +19956,7 @@
       </p:sp>
       <p:sp>
         <p:nvSpPr>
-          <p:cNvPr id="12" name="Text 10"/>
+          <p:cNvPr id="13" name="Text 11"/>
           <p:cNvSpPr txBox="1"/>
           <p:nvPr/>
         </p:nvSpPr>
@@ -19975,7 +19995,7 @@
       </p:sp>
       <p:sp>
         <p:nvSpPr>
-          <p:cNvPr id="13" name="Text 11"/>
+          <p:cNvPr id="14" name="Text 12"/>
           <p:cNvSpPr txBox="1"/>
           <p:nvPr/>
         </p:nvSpPr>
@@ -20014,7 +20034,7 @@
       </p:sp>
       <p:sp>
         <p:nvSpPr>
-          <p:cNvPr id="14" name="Text 12"/>
+          <p:cNvPr id="15" name="Text 13"/>
           <p:cNvSpPr txBox="1"/>
           <p:nvPr/>
         </p:nvSpPr>
@@ -20053,7 +20073,7 @@
       </p:sp>
       <p:sp>
         <p:nvSpPr>
-          <p:cNvPr id="15" name="Text 13"/>
+          <p:cNvPr id="16" name="Text 14"/>
           <p:cNvSpPr txBox="1"/>
           <p:nvPr/>
         </p:nvSpPr>
@@ -20132,7 +20152,7 @@
       </p:sp>
       <p:sp>
         <p:nvSpPr>
-          <p:cNvPr id="16" name="Text 14"/>
+          <p:cNvPr id="17" name="Text 15"/>
           <p:cNvSpPr txBox="1"/>
           <p:nvPr/>
         </p:nvSpPr>
@@ -20171,7 +20191,7 @@
       </p:sp>
       <p:sp>
         <p:nvSpPr>
-          <p:cNvPr id="17" name="Text 15"/>
+          <p:cNvPr id="18" name="Text 16"/>
           <p:cNvSpPr txBox="1"/>
           <p:nvPr/>
         </p:nvSpPr>
@@ -20210,7 +20230,7 @@
       </p:sp>
       <p:sp>
         <p:nvSpPr>
-          <p:cNvPr id="18" name="Shape 16"/>
+          <p:cNvPr id="19" name="Shape 17"/>
           <p:cNvSpPr/>
           <p:nvPr/>
         </p:nvSpPr>
@@ -20230,7 +20250,7 @@
       </p:sp>
       <p:sp>
         <p:nvSpPr>
-          <p:cNvPr id="19" name="Text 17"/>
+          <p:cNvPr id="20" name="Text 18"/>
           <p:cNvSpPr txBox="1"/>
           <p:nvPr/>
         </p:nvSpPr>
@@ -20269,7 +20289,7 @@
       </p:sp>
       <p:sp>
         <p:nvSpPr>
-          <p:cNvPr id="20" name="Text 18"/>
+          <p:cNvPr id="21" name="Text 19"/>
           <p:cNvSpPr txBox="1"/>
           <p:nvPr/>
         </p:nvSpPr>
@@ -20348,7 +20368,7 @@
       </p:sp>
       <p:sp>
         <p:nvSpPr>
-          <p:cNvPr id="21" name="Text 19"/>
+          <p:cNvPr id="22" name="Text 20"/>
           <p:cNvSpPr txBox="1"/>
           <p:nvPr/>
         </p:nvSpPr>
@@ -20387,7 +20407,7 @@
       </p:sp>
       <p:sp>
         <p:nvSpPr>
-          <p:cNvPr id="22" name="Text 20"/>
+          <p:cNvPr id="23" name="Text 21"/>
           <p:cNvSpPr txBox="1"/>
           <p:nvPr/>
         </p:nvSpPr>
@@ -20426,7 +20446,7 @@
       </p:sp>
       <p:sp>
         <p:nvSpPr>
-          <p:cNvPr id="23" name="Text 21"/>
+          <p:cNvPr id="24" name="Text 22"/>
           <p:cNvSpPr txBox="1"/>
           <p:nvPr/>
         </p:nvSpPr>
@@ -20465,7 +20485,7 @@
       </p:sp>
       <p:sp>
         <p:nvSpPr>
-          <p:cNvPr id="24" name="Text 22"/>
+          <p:cNvPr id="25" name="Text 23"/>
           <p:cNvSpPr txBox="1"/>
           <p:nvPr/>
         </p:nvSpPr>
@@ -20544,7 +20564,7 @@
       </p:sp>
       <p:sp>
         <p:nvSpPr>
-          <p:cNvPr id="25" name="Text 23"/>
+          <p:cNvPr id="26" name="Text 24"/>
           <p:cNvSpPr txBox="1"/>
           <p:nvPr/>
         </p:nvSpPr>
@@ -20583,7 +20603,7 @@
       </p:sp>
       <p:sp>
         <p:nvSpPr>
-          <p:cNvPr id="26" name="Text 24"/>
+          <p:cNvPr id="27" name="Text 25"/>
           <p:cNvSpPr txBox="1"/>
           <p:nvPr/>
         </p:nvSpPr>
@@ -20622,7 +20642,7 @@
       </p:sp>
       <p:sp>
         <p:nvSpPr>
-          <p:cNvPr id="27" name="Shape 25"/>
+          <p:cNvPr id="28" name="Shape 26"/>
           <p:cNvSpPr/>
           <p:nvPr/>
         </p:nvSpPr>
@@ -20642,7 +20662,27 @@
       </p:sp>
       <p:sp>
         <p:nvSpPr>
-          <p:cNvPr id="28" name="Text 26"/>
+          <p:cNvPr id="29" name="Shape 27"/>
+          <p:cNvSpPr/>
+          <p:nvPr/>
+        </p:nvSpPr>
+        <p:spPr>
+          <a:xfrm>
+            <a:off x="4084320" y="5160874"/>
+            <a:ext cx="64008" cy="682142"/>
+          </a:xfrm>
+          <a:prstGeom prst="rect">
+            <a:avLst/>
+          </a:prstGeom>
+          <a:solidFill>
+            <a:srgbClr val="12A566"/>
+          </a:solidFill>
+          <a:ln/>
+        </p:spPr>
+      </p:sp>
+      <p:sp>
+        <p:nvSpPr>
+          <p:cNvPr id="30" name="Text 28"/>
           <p:cNvSpPr txBox="1"/>
           <p:nvPr/>
         </p:nvSpPr>
@@ -20681,7 +20721,7 @@
       </p:sp>
       <p:sp>
         <p:nvSpPr>
-          <p:cNvPr id="29" name="Text 27"/>
+          <p:cNvPr id="31" name="Text 29"/>
           <p:cNvSpPr txBox="1"/>
           <p:nvPr/>
         </p:nvSpPr>
@@ -20760,7 +20800,7 @@
       </p:sp>
       <p:sp>
         <p:nvSpPr>
-          <p:cNvPr id="30" name="Text 28"/>
+          <p:cNvPr id="32" name="Text 30"/>
           <p:cNvSpPr txBox="1"/>
           <p:nvPr/>
         </p:nvSpPr>
@@ -20799,7 +20839,7 @@
       </p:sp>
       <p:sp>
         <p:nvSpPr>
-          <p:cNvPr id="31" name="Text 29"/>
+          <p:cNvPr id="33" name="Text 31"/>
           <p:cNvSpPr txBox="1"/>
           <p:nvPr/>
         </p:nvSpPr>
@@ -20838,7 +20878,7 @@
       </p:sp>
       <p:sp>
         <p:nvSpPr>
-          <p:cNvPr id="32" name="Shape 30"/>
+          <p:cNvPr id="34" name="Shape 32"/>
           <p:cNvSpPr/>
           <p:nvPr/>
         </p:nvSpPr>
@@ -20858,7 +20898,7 @@
       </p:sp>
       <p:sp>
         <p:nvSpPr>
-          <p:cNvPr id="33" name="Text 31"/>
+          <p:cNvPr id="35" name="Text 33"/>
           <p:cNvSpPr txBox="1"/>
           <p:nvPr/>
         </p:nvSpPr>
@@ -20897,7 +20937,7 @@
       </p:sp>
       <p:sp>
         <p:nvSpPr>
-          <p:cNvPr id="34" name="Text 32"/>
+          <p:cNvPr id="36" name="Text 34"/>
           <p:cNvSpPr txBox="1"/>
           <p:nvPr/>
         </p:nvSpPr>
@@ -20936,7 +20976,7 @@
       </p:sp>
       <p:sp>
         <p:nvSpPr>
-          <p:cNvPr id="35" name="Shape 33"/>
+          <p:cNvPr id="37" name="Shape 35"/>
           <p:cNvSpPr/>
           <p:nvPr/>
         </p:nvSpPr>
@@ -20956,7 +20996,7 @@
       </p:sp>
       <p:sp>
         <p:nvSpPr>
-          <p:cNvPr id="36" name="Text 34"/>
+          <p:cNvPr id="38" name="Text 36"/>
           <p:cNvSpPr txBox="1"/>
           <p:nvPr/>
         </p:nvSpPr>
@@ -20995,7 +21035,7 @@
       </p:sp>
       <p:sp>
         <p:nvSpPr>
-          <p:cNvPr id="37" name="Text 35"/>
+          <p:cNvPr id="39" name="Text 37"/>
           <p:cNvSpPr txBox="1"/>
           <p:nvPr/>
         </p:nvSpPr>
@@ -21074,7 +21114,7 @@
       </p:sp>
       <p:sp>
         <p:nvSpPr>
-          <p:cNvPr id="38" name="Text 36"/>
+          <p:cNvPr id="40" name="Text 38"/>
           <p:cNvSpPr txBox="1"/>
           <p:nvPr/>
         </p:nvSpPr>
@@ -21113,7 +21153,7 @@
       </p:sp>
       <p:sp>
         <p:nvSpPr>
-          <p:cNvPr id="39" name="Text 37"/>
+          <p:cNvPr id="41" name="Text 39"/>
           <p:cNvSpPr txBox="1"/>
           <p:nvPr/>
         </p:nvSpPr>
@@ -21152,7 +21192,7 @@
       </p:sp>
       <p:sp>
         <p:nvSpPr>
-          <p:cNvPr id="40" name="Text 38"/>
+          <p:cNvPr id="42" name="Text 40"/>
           <p:cNvSpPr txBox="1"/>
           <p:nvPr/>
         </p:nvSpPr>
@@ -21191,7 +21231,7 @@
       </p:sp>
       <p:sp>
         <p:nvSpPr>
-          <p:cNvPr id="41" name="Text 39"/>
+          <p:cNvPr id="43" name="Text 41"/>
           <p:cNvSpPr txBox="1"/>
           <p:nvPr/>
         </p:nvSpPr>
@@ -21270,7 +21310,7 @@
       </p:sp>
       <p:sp>
         <p:nvSpPr>
-          <p:cNvPr id="42" name="Text 40"/>
+          <p:cNvPr id="44" name="Text 42"/>
           <p:cNvSpPr txBox="1"/>
           <p:nvPr/>
         </p:nvSpPr>
@@ -21309,7 +21349,7 @@
       </p:sp>
       <p:sp>
         <p:nvSpPr>
-          <p:cNvPr id="43" name="Text 41"/>
+          <p:cNvPr id="45" name="Text 43"/>
           <p:cNvSpPr txBox="1"/>
           <p:nvPr/>
         </p:nvSpPr>
@@ -21348,7 +21388,7 @@
       </p:sp>
       <p:sp>
         <p:nvSpPr>
-          <p:cNvPr id="44" name="Shape 42"/>
+          <p:cNvPr id="46" name="Shape 44"/>
           <p:cNvSpPr/>
           <p:nvPr/>
         </p:nvSpPr>
@@ -21368,7 +21408,7 @@
       </p:sp>
       <p:sp>
         <p:nvSpPr>
-          <p:cNvPr id="45" name="Text 43"/>
+          <p:cNvPr id="47" name="Text 45"/>
           <p:cNvSpPr txBox="1"/>
           <p:nvPr/>
         </p:nvSpPr>
@@ -21407,7 +21447,7 @@
       </p:sp>
       <p:sp>
         <p:nvSpPr>
-          <p:cNvPr id="46" name="Text 44"/>
+          <p:cNvPr id="48" name="Text 46"/>
           <p:cNvSpPr txBox="1"/>
           <p:nvPr/>
         </p:nvSpPr>
@@ -21486,7 +21526,7 @@
       </p:sp>
       <p:sp>
         <p:nvSpPr>
-          <p:cNvPr id="47" name="Text 45"/>
+          <p:cNvPr id="49" name="Text 47"/>
           <p:cNvSpPr txBox="1"/>
           <p:nvPr/>
         </p:nvSpPr>
@@ -21525,7 +21565,7 @@
       </p:sp>
       <p:sp>
         <p:nvSpPr>
-          <p:cNvPr id="48" name="Text 46"/>
+          <p:cNvPr id="50" name="Text 48"/>
           <p:cNvSpPr txBox="1"/>
           <p:nvPr/>
         </p:nvSpPr>
@@ -21564,7 +21604,7 @@
       </p:sp>
       <p:sp>
         <p:nvSpPr>
-          <p:cNvPr id="49" name="Text 47"/>
+          <p:cNvPr id="51" name="Text 49"/>
           <p:cNvSpPr txBox="1"/>
           <p:nvPr/>
         </p:nvSpPr>
@@ -21603,7 +21643,7 @@
       </p:sp>
       <p:sp>
         <p:nvSpPr>
-          <p:cNvPr id="50" name="Text 48"/>
+          <p:cNvPr id="52" name="Text 50"/>
           <p:cNvSpPr txBox="1"/>
           <p:nvPr/>
         </p:nvSpPr>
@@ -21682,7 +21722,7 @@
       </p:sp>
       <p:sp>
         <p:nvSpPr>
-          <p:cNvPr id="51" name="Text 49"/>
+          <p:cNvPr id="53" name="Text 51"/>
           <p:cNvSpPr txBox="1"/>
           <p:nvPr/>
         </p:nvSpPr>
@@ -21721,7 +21761,7 @@
       </p:sp>
       <p:sp>
         <p:nvSpPr>
-          <p:cNvPr id="52" name="Text 50"/>
+          <p:cNvPr id="54" name="Text 52"/>
           <p:cNvSpPr txBox="1"/>
           <p:nvPr/>
         </p:nvSpPr>
@@ -21760,7 +21800,7 @@
       </p:sp>
       <p:sp>
         <p:nvSpPr>
-          <p:cNvPr id="53" name="Shape 51"/>
+          <p:cNvPr id="55" name="Shape 53"/>
           <p:cNvSpPr/>
           <p:nvPr/>
         </p:nvSpPr>
@@ -21780,7 +21820,7 @@
       </p:sp>
       <p:sp>
         <p:nvSpPr>
-          <p:cNvPr id="54" name="Text 52"/>
+          <p:cNvPr id="56" name="Text 54"/>
           <p:cNvSpPr txBox="1"/>
           <p:nvPr/>
         </p:nvSpPr>
@@ -21819,7 +21859,7 @@
       </p:sp>
       <p:sp>
         <p:nvSpPr>
-          <p:cNvPr id="55" name="Text 53"/>
+          <p:cNvPr id="57" name="Text 55"/>
           <p:cNvSpPr txBox="1"/>
           <p:nvPr/>
         </p:nvSpPr>
@@ -21898,7 +21938,7 @@
       </p:sp>
       <p:sp>
         <p:nvSpPr>
-          <p:cNvPr id="56" name="Text 54"/>
+          <p:cNvPr id="58" name="Text 56"/>
           <p:cNvSpPr txBox="1"/>
           <p:nvPr/>
         </p:nvSpPr>
@@ -21937,7 +21977,7 @@
       </p:sp>
       <p:sp>
         <p:nvSpPr>
-          <p:cNvPr id="57" name="Text 55"/>
+          <p:cNvPr id="59" name="Text 57"/>
           <p:cNvSpPr txBox="1"/>
           <p:nvPr/>
         </p:nvSpPr>
@@ -21976,7 +22016,7 @@
       </p:sp>
       <p:sp>
         <p:nvSpPr>
-          <p:cNvPr id="58" name="Shape 56"/>
+          <p:cNvPr id="60" name="Shape 58"/>
           <p:cNvSpPr/>
           <p:nvPr/>
         </p:nvSpPr>
@@ -21996,7 +22036,7 @@
       </p:sp>
       <p:sp>
         <p:nvSpPr>
-          <p:cNvPr id="59" name="Text 57"/>
+          <p:cNvPr id="61" name="Text 59"/>
           <p:cNvSpPr txBox="1"/>
           <p:nvPr/>
         </p:nvSpPr>
@@ -22035,7 +22075,7 @@
       </p:sp>
       <p:sp>
         <p:nvSpPr>
-          <p:cNvPr id="60" name="Text 58"/>
+          <p:cNvPr id="62" name="Text 60"/>
           <p:cNvSpPr txBox="1"/>
           <p:nvPr/>
         </p:nvSpPr>
@@ -22074,7 +22114,7 @@
       </p:sp>
       <p:sp>
         <p:nvSpPr>
-          <p:cNvPr id="61" name="Shape 59"/>
+          <p:cNvPr id="63" name="Shape 61"/>
           <p:cNvSpPr/>
           <p:nvPr/>
         </p:nvSpPr>
@@ -22094,7 +22134,7 @@
       </p:sp>
       <p:sp>
         <p:nvSpPr>
-          <p:cNvPr id="62" name="Text 60"/>
+          <p:cNvPr id="64" name="Text 62"/>
           <p:cNvSpPr txBox="1"/>
           <p:nvPr/>
         </p:nvSpPr>
@@ -22133,7 +22173,7 @@
       </p:sp>
       <p:sp>
         <p:nvSpPr>
-          <p:cNvPr id="63" name="Text 61"/>
+          <p:cNvPr id="65" name="Text 63"/>
           <p:cNvSpPr txBox="1"/>
           <p:nvPr/>
         </p:nvSpPr>
@@ -22212,7 +22252,7 @@
       </p:sp>
       <p:sp>
         <p:nvSpPr>
-          <p:cNvPr id="64" name="Text 62"/>
+          <p:cNvPr id="66" name="Text 64"/>
           <p:cNvSpPr txBox="1"/>
           <p:nvPr/>
         </p:nvSpPr>
@@ -22251,7 +22291,7 @@
       </p:sp>
       <p:sp>
         <p:nvSpPr>
-          <p:cNvPr id="65" name="Text 63"/>
+          <p:cNvPr id="67" name="Text 65"/>
           <p:cNvSpPr txBox="1"/>
           <p:nvPr/>
         </p:nvSpPr>
@@ -22290,7 +22330,27 @@
       </p:sp>
       <p:sp>
         <p:nvSpPr>
-          <p:cNvPr id="66" name="Text 64"/>
+          <p:cNvPr id="68" name="Shape 66"/>
+          <p:cNvSpPr/>
+          <p:nvPr/>
+        </p:nvSpPr>
+        <p:spPr>
+          <a:xfrm>
+            <a:off x="11466576" y="2894990"/>
+            <a:ext cx="64008" cy="682142"/>
+          </a:xfrm>
+          <a:prstGeom prst="rect">
+            <a:avLst/>
+          </a:prstGeom>
+          <a:solidFill>
+            <a:srgbClr val="12A566"/>
+          </a:solidFill>
+          <a:ln/>
+        </p:spPr>
+      </p:sp>
+      <p:sp>
+        <p:nvSpPr>
+          <p:cNvPr id="69" name="Text 67"/>
           <p:cNvSpPr txBox="1"/>
           <p:nvPr/>
         </p:nvSpPr>
@@ -22329,7 +22389,7 @@
       </p:sp>
       <p:sp>
         <p:nvSpPr>
-          <p:cNvPr id="67" name="Text 65"/>
+          <p:cNvPr id="70" name="Text 68"/>
           <p:cNvSpPr txBox="1"/>
           <p:nvPr/>
         </p:nvSpPr>
@@ -22408,7 +22468,7 @@
       </p:sp>
       <p:sp>
         <p:nvSpPr>
-          <p:cNvPr id="68" name="Text 66"/>
+          <p:cNvPr id="71" name="Text 69"/>
           <p:cNvSpPr txBox="1"/>
           <p:nvPr/>
         </p:nvSpPr>
@@ -22447,7 +22507,7 @@
       </p:sp>
       <p:sp>
         <p:nvSpPr>
-          <p:cNvPr id="69" name="Text 67"/>
+          <p:cNvPr id="72" name="Text 70"/>
           <p:cNvSpPr txBox="1"/>
           <p:nvPr/>
         </p:nvSpPr>
@@ -22486,7 +22546,7 @@
       </p:sp>
       <p:sp>
         <p:nvSpPr>
-          <p:cNvPr id="70" name="Shape 68"/>
+          <p:cNvPr id="73" name="Shape 71"/>
           <p:cNvSpPr/>
           <p:nvPr/>
         </p:nvSpPr>
@@ -22506,7 +22566,27 @@
       </p:sp>
       <p:sp>
         <p:nvSpPr>
-          <p:cNvPr id="71" name="Text 69"/>
+          <p:cNvPr id="74" name="Shape 72"/>
+          <p:cNvSpPr/>
+          <p:nvPr/>
+        </p:nvSpPr>
+        <p:spPr>
+          <a:xfrm>
+            <a:off x="11466576" y="3650285"/>
+            <a:ext cx="64008" cy="682142"/>
+          </a:xfrm>
+          <a:prstGeom prst="rect">
+            <a:avLst/>
+          </a:prstGeom>
+          <a:solidFill>
+            <a:srgbClr val="12A566"/>
+          </a:solidFill>
+          <a:ln/>
+        </p:spPr>
+      </p:sp>
+      <p:sp>
+        <p:nvSpPr>
+          <p:cNvPr id="75" name="Text 73"/>
           <p:cNvSpPr txBox="1"/>
           <p:nvPr/>
         </p:nvSpPr>
@@ -22545,7 +22625,7 @@
       </p:sp>
       <p:sp>
         <p:nvSpPr>
-          <p:cNvPr id="72" name="Text 70"/>
+          <p:cNvPr id="76" name="Text 74"/>
           <p:cNvSpPr txBox="1"/>
           <p:nvPr/>
         </p:nvSpPr>
@@ -22624,7 +22704,7 @@
       </p:sp>
       <p:sp>
         <p:nvSpPr>
-          <p:cNvPr id="73" name="Text 71"/>
+          <p:cNvPr id="77" name="Text 75"/>
           <p:cNvSpPr txBox="1"/>
           <p:nvPr/>
         </p:nvSpPr>
@@ -22663,7 +22743,7 @@
       </p:sp>
       <p:sp>
         <p:nvSpPr>
-          <p:cNvPr id="74" name="Text 72"/>
+          <p:cNvPr id="78" name="Text 76"/>
           <p:cNvSpPr txBox="1"/>
           <p:nvPr/>
         </p:nvSpPr>
@@ -22702,7 +22782,7 @@
       </p:sp>
       <p:sp>
         <p:nvSpPr>
-          <p:cNvPr id="75" name="Text 73"/>
+          <p:cNvPr id="79" name="Text 77"/>
           <p:cNvSpPr txBox="1"/>
           <p:nvPr/>
         </p:nvSpPr>
@@ -22741,7 +22821,7 @@
       </p:sp>
       <p:sp>
         <p:nvSpPr>
-          <p:cNvPr id="76" name="Text 74"/>
+          <p:cNvPr id="80" name="Text 78"/>
           <p:cNvSpPr txBox="1"/>
           <p:nvPr/>
         </p:nvSpPr>
@@ -22820,7 +22900,7 @@
       </p:sp>
       <p:sp>
         <p:nvSpPr>
-          <p:cNvPr id="77" name="Text 75"/>
+          <p:cNvPr id="81" name="Text 79"/>
           <p:cNvSpPr txBox="1"/>
           <p:nvPr/>
         </p:nvSpPr>
@@ -22859,7 +22939,7 @@
       </p:sp>
       <p:sp>
         <p:nvSpPr>
-          <p:cNvPr id="78" name="Text 76"/>
+          <p:cNvPr id="82" name="Text 80"/>
           <p:cNvSpPr txBox="1"/>
           <p:nvPr/>
         </p:nvSpPr>
@@ -22898,7 +22978,7 @@
       </p:sp>
       <p:sp>
         <p:nvSpPr>
-          <p:cNvPr id="79" name="Shape 77"/>
+          <p:cNvPr id="83" name="Shape 81"/>
           <p:cNvSpPr/>
           <p:nvPr/>
         </p:nvSpPr>
@@ -22918,7 +22998,7 @@
       </p:sp>
       <p:sp>
         <p:nvSpPr>
-          <p:cNvPr id="80" name="Text 78"/>
+          <p:cNvPr id="84" name="Text 82"/>
           <p:cNvSpPr txBox="1"/>
           <p:nvPr/>
         </p:nvSpPr>
@@ -22957,7 +23037,7 @@
       </p:sp>
       <p:sp>
         <p:nvSpPr>
-          <p:cNvPr id="81" name="Text 79"/>
+          <p:cNvPr id="85" name="Text 83"/>
           <p:cNvSpPr txBox="1"/>
           <p:nvPr/>
         </p:nvSpPr>
@@ -23036,7 +23116,7 @@
       </p:sp>
       <p:sp>
         <p:nvSpPr>
-          <p:cNvPr id="82" name="Text 80"/>
+          <p:cNvPr id="86" name="Text 84"/>
           <p:cNvSpPr txBox="1"/>
           <p:nvPr/>
         </p:nvSpPr>
@@ -23075,7 +23155,7 @@
       </p:sp>
       <p:sp>
         <p:nvSpPr>
-          <p:cNvPr id="83" name="Text 81"/>
+          <p:cNvPr id="87" name="Text 85"/>
           <p:cNvSpPr txBox="1"/>
           <p:nvPr/>
         </p:nvSpPr>
@@ -23114,7 +23194,7 @@
       </p:sp>
       <p:sp>
         <p:nvSpPr>
-          <p:cNvPr id="84" name="Shape 82"/>
+          <p:cNvPr id="88" name="Shape 86"/>
           <p:cNvSpPr/>
           <p:nvPr/>
         </p:nvSpPr>
@@ -23134,7 +23214,7 @@
       </p:sp>
       <p:sp>
         <p:nvSpPr>
-          <p:cNvPr id="85" name="Text 83"/>
+          <p:cNvPr id="89" name="Text 87"/>
           <p:cNvSpPr txBox="1"/>
           <p:nvPr/>
         </p:nvSpPr>
@@ -29362,7 +29442,7 @@
               <a:buNone/>
             </a:pPr>
             <a:r>
-              <a:rPr lang="en-US" sz="1200" dirty="0">
+              <a:rPr lang="en-US" sz="1200" b="1" dirty="0">
                 <a:solidFill>
                   <a:srgbClr val="0B7A4A"/>
                 </a:solidFill>
@@ -29499,7 +29579,7 @@
               <a:buNone/>
             </a:pPr>
             <a:r>
-              <a:rPr lang="en-US" sz="1200" dirty="0">
+              <a:rPr lang="en-US" sz="1200" b="1" dirty="0">
                 <a:solidFill>
                   <a:srgbClr val="0B7A4A"/>
                 </a:solidFill>
@@ -29636,7 +29716,7 @@
               <a:buNone/>
             </a:pPr>
             <a:r>
-              <a:rPr lang="en-US" sz="1200" dirty="0">
+              <a:rPr lang="en-US" sz="1200" b="1" dirty="0">
                 <a:solidFill>
                   <a:srgbClr val="0B7A4A"/>
                 </a:solidFill>
@@ -29773,7 +29853,7 @@
               <a:buNone/>
             </a:pPr>
             <a:r>
-              <a:rPr lang="en-US" sz="1200" dirty="0">
+              <a:rPr lang="en-US" sz="1200" b="1" dirty="0">
                 <a:solidFill>
                   <a:srgbClr val="0B7A4A"/>
                 </a:solidFill>
@@ -29910,7 +29990,7 @@
               <a:buNone/>
             </a:pPr>
             <a:r>
-              <a:rPr lang="en-US" sz="1200" dirty="0">
+              <a:rPr lang="en-US" sz="1200" b="1" dirty="0">
                 <a:solidFill>
                   <a:srgbClr val="0B7A4A"/>
                 </a:solidFill>
@@ -30047,7 +30127,7 @@
               <a:buNone/>
             </a:pPr>
             <a:r>
-              <a:rPr lang="en-US" sz="1200" dirty="0">
+              <a:rPr lang="en-US" sz="1200" b="1" dirty="0">
                 <a:solidFill>
                   <a:srgbClr val="0B7A4A"/>
                 </a:solidFill>
@@ -30184,7 +30264,7 @@
               <a:buNone/>
             </a:pPr>
             <a:r>
-              <a:rPr lang="en-US" sz="1200" dirty="0">
+              <a:rPr lang="en-US" sz="1200" b="1" dirty="0">
                 <a:solidFill>
                   <a:srgbClr val="0B7A4A"/>
                 </a:solidFill>
@@ -30321,7 +30401,7 @@
               <a:buNone/>
             </a:pPr>
             <a:r>
-              <a:rPr lang="en-US" sz="1200" dirty="0">
+              <a:rPr lang="en-US" sz="1200" b="1" dirty="0">
                 <a:solidFill>
                   <a:srgbClr val="0B7A4A"/>
                 </a:solidFill>
@@ -30458,7 +30538,7 @@
               <a:buNone/>
             </a:pPr>
             <a:r>
-              <a:rPr lang="en-US" sz="1200" dirty="0">
+              <a:rPr lang="en-US" sz="1200" b="1" dirty="0">
                 <a:solidFill>
                   <a:srgbClr val="0B7A4A"/>
                 </a:solidFill>
@@ -30595,7 +30675,7 @@
               <a:buNone/>
             </a:pPr>
             <a:r>
-              <a:rPr lang="en-US" sz="1200" dirty="0">
+              <a:rPr lang="en-US" sz="1200" b="1" dirty="0">
                 <a:solidFill>
                   <a:srgbClr val="0B7A4A"/>
                 </a:solidFill>
@@ -30732,7 +30812,7 @@
               <a:buNone/>
             </a:pPr>
             <a:r>
-              <a:rPr lang="en-US" sz="1200" dirty="0">
+              <a:rPr lang="en-US" sz="1200" b="1" dirty="0">
                 <a:solidFill>
                   <a:srgbClr val="0B7A4A"/>
                 </a:solidFill>
@@ -30869,7 +30949,7 @@
               <a:buNone/>
             </a:pPr>
             <a:r>
-              <a:rPr lang="en-US" sz="1200" dirty="0">
+              <a:rPr lang="en-US" sz="1200" b="1" dirty="0">
                 <a:solidFill>
                   <a:srgbClr val="0B7A4A"/>
                 </a:solidFill>
@@ -31006,7 +31086,7 @@
               <a:buNone/>
             </a:pPr>
             <a:r>
-              <a:rPr lang="en-US" sz="1200" dirty="0">
+              <a:rPr lang="en-US" sz="1200" b="1" dirty="0">
                 <a:solidFill>
                   <a:srgbClr val="0B7A4A"/>
                 </a:solidFill>
@@ -31143,7 +31223,7 @@
               <a:buNone/>
             </a:pPr>
             <a:r>
-              <a:rPr lang="en-US" sz="1200" dirty="0">
+              <a:rPr lang="en-US" sz="1200" b="1" dirty="0">
                 <a:solidFill>
                   <a:srgbClr val="0B7A4A"/>
                 </a:solidFill>
@@ -31280,7 +31360,7 @@
               <a:buNone/>
             </a:pPr>
             <a:r>
-              <a:rPr lang="en-US" sz="1200" dirty="0">
+              <a:rPr lang="en-US" sz="1200" b="1" dirty="0">
                 <a:solidFill>
                   <a:srgbClr val="0B7A4A"/>
                 </a:solidFill>
@@ -31417,7 +31497,7 @@
               <a:buNone/>
             </a:pPr>
             <a:r>
-              <a:rPr lang="en-US" sz="1200" dirty="0">
+              <a:rPr lang="en-US" sz="1200" b="1" dirty="0">
                 <a:solidFill>
                   <a:srgbClr val="0B7A4A"/>
                 </a:solidFill>
@@ -31554,7 +31634,7 @@
               <a:buNone/>
             </a:pPr>
             <a:r>
-              <a:rPr lang="en-US" sz="1200" dirty="0">
+              <a:rPr lang="en-US" sz="1200" b="1" dirty="0">
                 <a:solidFill>
                   <a:srgbClr val="0B7A4A"/>
                 </a:solidFill>
@@ -31691,7 +31771,7 @@
               <a:buNone/>
             </a:pPr>
             <a:r>
-              <a:rPr lang="en-US" sz="1200" dirty="0">
+              <a:rPr lang="en-US" sz="1200" b="1" dirty="0">
                 <a:solidFill>
                   <a:srgbClr val="A82B26"/>
                 </a:solidFill>
@@ -31828,7 +31908,7 @@
               <a:buNone/>
             </a:pPr>
             <a:r>
-              <a:rPr lang="en-US" sz="1200" dirty="0">
+              <a:rPr lang="en-US" sz="1200" b="1" dirty="0">
                 <a:solidFill>
                   <a:srgbClr val="A82B26"/>
                 </a:solidFill>
@@ -31965,7 +32045,7 @@
               <a:buNone/>
             </a:pPr>
             <a:r>
-              <a:rPr lang="en-US" sz="1200" dirty="0">
+              <a:rPr lang="en-US" sz="1200" b="1" dirty="0">
                 <a:solidFill>
                   <a:srgbClr val="A82B26"/>
                 </a:solidFill>
@@ -32102,7 +32182,7 @@
               <a:buNone/>
             </a:pPr>
             <a:r>
-              <a:rPr lang="en-US" sz="1200" dirty="0">
+              <a:rPr lang="en-US" sz="1200" b="1" dirty="0">
                 <a:solidFill>
                   <a:srgbClr val="A82B26"/>
                 </a:solidFill>
@@ -32239,7 +32319,7 @@
               <a:buNone/>
             </a:pPr>
             <a:r>
-              <a:rPr lang="en-US" sz="1200" dirty="0">
+              <a:rPr lang="en-US" sz="1200" b="1" dirty="0">
                 <a:solidFill>
                   <a:srgbClr val="A82B26"/>
                 </a:solidFill>
@@ -32376,7 +32456,7 @@
               <a:buNone/>
             </a:pPr>
             <a:r>
-              <a:rPr lang="en-US" sz="1200" dirty="0">
+              <a:rPr lang="en-US" sz="1200" b="1" dirty="0">
                 <a:solidFill>
                   <a:srgbClr val="A82B26"/>
                 </a:solidFill>
@@ -32513,7 +32593,7 @@
               <a:buNone/>
             </a:pPr>
             <a:r>
-              <a:rPr lang="en-US" sz="1200" dirty="0">
+              <a:rPr lang="en-US" sz="1200" b="1" dirty="0">
                 <a:solidFill>
                   <a:srgbClr val="A82B26"/>
                 </a:solidFill>
@@ -32650,7 +32730,7 @@
               <a:buNone/>
             </a:pPr>
             <a:r>
-              <a:rPr lang="en-US" sz="1200" dirty="0">
+              <a:rPr lang="en-US" sz="1200" b="1" dirty="0">
                 <a:solidFill>
                   <a:srgbClr val="A82B26"/>
                 </a:solidFill>
@@ -32787,7 +32867,7 @@
               <a:buNone/>
             </a:pPr>
             <a:r>
-              <a:rPr lang="en-US" sz="1200" dirty="0">
+              <a:rPr lang="en-US" sz="1200" b="1" dirty="0">
                 <a:solidFill>
                   <a:srgbClr val="A82B26"/>
                 </a:solidFill>
@@ -32924,7 +33004,7 @@
               <a:buNone/>
             </a:pPr>
             <a:r>
-              <a:rPr lang="en-US" sz="1200" dirty="0">
+              <a:rPr lang="en-US" sz="1200" b="1" dirty="0">
                 <a:solidFill>
                   <a:srgbClr val="A82B26"/>
                 </a:solidFill>
@@ -33061,7 +33141,7 @@
               <a:buNone/>
             </a:pPr>
             <a:r>
-              <a:rPr lang="en-US" sz="1200" dirty="0">
+              <a:rPr lang="en-US" sz="1200" b="1" dirty="0">
                 <a:solidFill>
                   <a:srgbClr val="A82B26"/>
                 </a:solidFill>
@@ -33198,7 +33278,7 @@
               <a:buNone/>
             </a:pPr>
             <a:r>
-              <a:rPr lang="en-US" sz="1200" dirty="0">
+              <a:rPr lang="en-US" sz="1200" b="1" dirty="0">
                 <a:solidFill>
                   <a:srgbClr val="A82B26"/>
                 </a:solidFill>
@@ -33335,7 +33415,7 @@
               <a:buNone/>
             </a:pPr>
             <a:r>
-              <a:rPr lang="en-US" sz="1200" dirty="0">
+              <a:rPr lang="en-US" sz="1200" b="1" dirty="0">
                 <a:solidFill>
                   <a:srgbClr val="A82B26"/>
                 </a:solidFill>
@@ -33472,7 +33552,7 @@
               <a:buNone/>
             </a:pPr>
             <a:r>
-              <a:rPr lang="en-US" sz="1200" dirty="0">
+              <a:rPr lang="en-US" sz="1200" b="1" dirty="0">
                 <a:solidFill>
                   <a:srgbClr val="A82B26"/>
                 </a:solidFill>
@@ -33609,7 +33689,7 @@
               <a:buNone/>
             </a:pPr>
             <a:r>
-              <a:rPr lang="en-US" sz="1200" dirty="0">
+              <a:rPr lang="en-US" sz="1200" b="1" dirty="0">
                 <a:solidFill>
                   <a:srgbClr val="A82B26"/>
                 </a:solidFill>
@@ -33746,7 +33826,7 @@
               <a:buNone/>
             </a:pPr>
             <a:r>
-              <a:rPr lang="en-US" sz="1200" dirty="0">
+              <a:rPr lang="en-US" sz="1200" b="1" dirty="0">
                 <a:solidFill>
                   <a:srgbClr val="A82B26"/>
                 </a:solidFill>
@@ -43132,7 +43212,7 @@
               <a:buNone/>
             </a:pPr>
             <a:r>
-              <a:rPr lang="en-US" sz="1200" dirty="0">
+              <a:rPr lang="en-US" sz="1200" b="1" dirty="0">
                 <a:solidFill>
                   <a:srgbClr val="0B7A4A"/>
                 </a:solidFill>
@@ -43269,7 +43349,7 @@
               <a:buNone/>
             </a:pPr>
             <a:r>
-              <a:rPr lang="en-US" sz="1200" dirty="0">
+              <a:rPr lang="en-US" sz="1200" b="1" dirty="0">
                 <a:solidFill>
                   <a:srgbClr val="0B7A4A"/>
                 </a:solidFill>
@@ -43406,7 +43486,7 @@
               <a:buNone/>
             </a:pPr>
             <a:r>
-              <a:rPr lang="en-US" sz="1200" dirty="0">
+              <a:rPr lang="en-US" sz="1200" b="1" dirty="0">
                 <a:solidFill>
                   <a:srgbClr val="0B7A4A"/>
                 </a:solidFill>
@@ -43543,7 +43623,7 @@
               <a:buNone/>
             </a:pPr>
             <a:r>
-              <a:rPr lang="en-US" sz="1200" dirty="0">
+              <a:rPr lang="en-US" sz="1200" b="1" dirty="0">
                 <a:solidFill>
                   <a:srgbClr val="0B7A4A"/>
                 </a:solidFill>
@@ -43680,7 +43760,7 @@
               <a:buNone/>
             </a:pPr>
             <a:r>
-              <a:rPr lang="en-US" sz="1200" dirty="0">
+              <a:rPr lang="en-US" sz="1200" b="1" dirty="0">
                 <a:solidFill>
                   <a:srgbClr val="0B7A4A"/>
                 </a:solidFill>
@@ -43817,7 +43897,7 @@
               <a:buNone/>
             </a:pPr>
             <a:r>
-              <a:rPr lang="en-US" sz="1200" dirty="0">
+              <a:rPr lang="en-US" sz="1200" b="1" dirty="0">
                 <a:solidFill>
                   <a:srgbClr val="0B7A4A"/>
                 </a:solidFill>
@@ -43954,7 +44034,7 @@
               <a:buNone/>
             </a:pPr>
             <a:r>
-              <a:rPr lang="en-US" sz="1200" dirty="0">
+              <a:rPr lang="en-US" sz="1200" b="1" dirty="0">
                 <a:solidFill>
                   <a:srgbClr val="0B7A4A"/>
                 </a:solidFill>
@@ -44091,7 +44171,7 @@
               <a:buNone/>
             </a:pPr>
             <a:r>
-              <a:rPr lang="en-US" sz="1200" dirty="0">
+              <a:rPr lang="en-US" sz="1200" b="1" dirty="0">
                 <a:solidFill>
                   <a:srgbClr val="0B7A4A"/>
                 </a:solidFill>
@@ -44228,7 +44308,7 @@
               <a:buNone/>
             </a:pPr>
             <a:r>
-              <a:rPr lang="en-US" sz="1200" dirty="0">
+              <a:rPr lang="en-US" sz="1200" b="1" dirty="0">
                 <a:solidFill>
                   <a:srgbClr val="0B7A4A"/>
                 </a:solidFill>
@@ -44365,7 +44445,7 @@
               <a:buNone/>
             </a:pPr>
             <a:r>
-              <a:rPr lang="en-US" sz="1200" dirty="0">
+              <a:rPr lang="en-US" sz="1200" b="1" dirty="0">
                 <a:solidFill>
                   <a:srgbClr val="0B7A4A"/>
                 </a:solidFill>
@@ -44502,7 +44582,7 @@
               <a:buNone/>
             </a:pPr>
             <a:r>
-              <a:rPr lang="en-US" sz="1200" dirty="0">
+              <a:rPr lang="en-US" sz="1200" b="1" dirty="0">
                 <a:solidFill>
                   <a:srgbClr val="0B7A4A"/>
                 </a:solidFill>
@@ -44639,7 +44719,7 @@
               <a:buNone/>
             </a:pPr>
             <a:r>
-              <a:rPr lang="en-US" sz="1200" dirty="0">
+              <a:rPr lang="en-US" sz="1200" b="1" dirty="0">
                 <a:solidFill>
                   <a:srgbClr val="0B7A4A"/>
                 </a:solidFill>
@@ -44776,7 +44856,7 @@
               <a:buNone/>
             </a:pPr>
             <a:r>
-              <a:rPr lang="en-US" sz="1200" dirty="0">
+              <a:rPr lang="en-US" sz="1200" b="1" dirty="0">
                 <a:solidFill>
                   <a:srgbClr val="0B7A4A"/>
                 </a:solidFill>
@@ -44913,7 +44993,7 @@
               <a:buNone/>
             </a:pPr>
             <a:r>
-              <a:rPr lang="en-US" sz="1200" dirty="0">
+              <a:rPr lang="en-US" sz="1200" b="1" dirty="0">
                 <a:solidFill>
                   <a:srgbClr val="0B7A4A"/>
                 </a:solidFill>
@@ -45050,7 +45130,7 @@
               <a:buNone/>
             </a:pPr>
             <a:r>
-              <a:rPr lang="en-US" sz="1200" dirty="0">
+              <a:rPr lang="en-US" sz="1200" b="1" dirty="0">
                 <a:solidFill>
                   <a:srgbClr val="0B7A4A"/>
                 </a:solidFill>
@@ -45187,7 +45267,7 @@
               <a:buNone/>
             </a:pPr>
             <a:r>
-              <a:rPr lang="en-US" sz="1200" dirty="0">
+              <a:rPr lang="en-US" sz="1200" b="1" dirty="0">
                 <a:solidFill>
                   <a:srgbClr val="0B7A4A"/>
                 </a:solidFill>
@@ -45324,7 +45404,7 @@
               <a:buNone/>
             </a:pPr>
             <a:r>
-              <a:rPr lang="en-US" sz="1200" dirty="0">
+              <a:rPr lang="en-US" sz="1200" b="1" dirty="0">
                 <a:solidFill>
                   <a:srgbClr val="0B7A4A"/>
                 </a:solidFill>
@@ -45461,7 +45541,7 @@
               <a:buNone/>
             </a:pPr>
             <a:r>
-              <a:rPr lang="en-US" sz="1200" dirty="0">
+              <a:rPr lang="en-US" sz="1200" b="1" dirty="0">
                 <a:solidFill>
                   <a:srgbClr val="0B7A4A"/>
                 </a:solidFill>
@@ -45598,7 +45678,7 @@
               <a:buNone/>
             </a:pPr>
             <a:r>
-              <a:rPr lang="en-US" sz="1200" dirty="0">
+              <a:rPr lang="en-US" sz="1200" b="1" dirty="0">
                 <a:solidFill>
                   <a:srgbClr val="0B7A4A"/>
                 </a:solidFill>
@@ -45735,7 +45815,7 @@
               <a:buNone/>
             </a:pPr>
             <a:r>
-              <a:rPr lang="en-US" sz="1200" dirty="0">
+              <a:rPr lang="en-US" sz="1200" b="1" dirty="0">
                 <a:solidFill>
                   <a:srgbClr val="0B7A4A"/>
                 </a:solidFill>
@@ -45872,7 +45952,7 @@
               <a:buNone/>
             </a:pPr>
             <a:r>
-              <a:rPr lang="en-US" sz="1200" dirty="0">
+              <a:rPr lang="en-US" sz="1200" b="1" dirty="0">
                 <a:solidFill>
                   <a:srgbClr val="0B7A4A"/>
                 </a:solidFill>
@@ -46009,7 +46089,7 @@
               <a:buNone/>
             </a:pPr>
             <a:r>
-              <a:rPr lang="en-US" sz="1200" dirty="0">
+              <a:rPr lang="en-US" sz="1200" b="1" dirty="0">
                 <a:solidFill>
                   <a:srgbClr val="0B7A4A"/>
                 </a:solidFill>
@@ -46146,7 +46226,7 @@
               <a:buNone/>
             </a:pPr>
             <a:r>
-              <a:rPr lang="en-US" sz="1200" dirty="0">
+              <a:rPr lang="en-US" sz="1200" b="1" dirty="0">
                 <a:solidFill>
                   <a:srgbClr val="0B7A4A"/>
                 </a:solidFill>
@@ -46283,7 +46363,7 @@
               <a:buNone/>
             </a:pPr>
             <a:r>
-              <a:rPr lang="en-US" sz="1200" dirty="0">
+              <a:rPr lang="en-US" sz="1200" b="1" dirty="0">
                 <a:solidFill>
                   <a:srgbClr val="0B7A4A"/>
                 </a:solidFill>
@@ -46420,7 +46500,7 @@
               <a:buNone/>
             </a:pPr>
             <a:r>
-              <a:rPr lang="en-US" sz="1200" dirty="0">
+              <a:rPr lang="en-US" sz="1200" b="1" dirty="0">
                 <a:solidFill>
                   <a:srgbClr val="0B7A4A"/>
                 </a:solidFill>
@@ -46557,7 +46637,7 @@
               <a:buNone/>
             </a:pPr>
             <a:r>
-              <a:rPr lang="en-US" sz="1200" dirty="0">
+              <a:rPr lang="en-US" sz="1200" b="1" dirty="0">
                 <a:solidFill>
                   <a:srgbClr val="0B7A4A"/>
                 </a:solidFill>
@@ -46694,7 +46774,7 @@
               <a:buNone/>
             </a:pPr>
             <a:r>
-              <a:rPr lang="en-US" sz="1200" dirty="0">
+              <a:rPr lang="en-US" sz="1200" b="1" dirty="0">
                 <a:solidFill>
                   <a:srgbClr val="0B7A4A"/>
                 </a:solidFill>
@@ -46831,7 +46911,7 @@
               <a:buNone/>
             </a:pPr>
             <a:r>
-              <a:rPr lang="en-US" sz="1200" dirty="0">
+              <a:rPr lang="en-US" sz="1200" b="1" dirty="0">
                 <a:solidFill>
                   <a:srgbClr val="0B7A4A"/>
                 </a:solidFill>
@@ -46968,7 +47048,7 @@
               <a:buNone/>
             </a:pPr>
             <a:r>
-              <a:rPr lang="en-US" sz="1200" dirty="0">
+              <a:rPr lang="en-US" sz="1200" b="1" dirty="0">
                 <a:solidFill>
                   <a:srgbClr val="0B7A4A"/>
                 </a:solidFill>
@@ -47105,7 +47185,7 @@
               <a:buNone/>
             </a:pPr>
             <a:r>
-              <a:rPr lang="en-US" sz="1200" dirty="0">
+              <a:rPr lang="en-US" sz="1200" b="1" dirty="0">
                 <a:solidFill>
                   <a:srgbClr val="0B7A4A"/>
                 </a:solidFill>
@@ -47242,7 +47322,7 @@
               <a:buNone/>
             </a:pPr>
             <a:r>
-              <a:rPr lang="en-US" sz="1200" dirty="0">
+              <a:rPr lang="en-US" sz="1200" b="1" dirty="0">
                 <a:solidFill>
                   <a:srgbClr val="A82B26"/>
                 </a:solidFill>
@@ -47379,7 +47459,7 @@
               <a:buNone/>
             </a:pPr>
             <a:r>
-              <a:rPr lang="en-US" sz="1200" dirty="0">
+              <a:rPr lang="en-US" sz="1200" b="1" dirty="0">
                 <a:solidFill>
                   <a:srgbClr val="A82B26"/>
                 </a:solidFill>
@@ -47516,7 +47596,7 @@
               <a:buNone/>
             </a:pPr>
             <a:r>
-              <a:rPr lang="en-US" sz="1200" dirty="0">
+              <a:rPr lang="en-US" sz="1200" b="1" dirty="0">
                 <a:solidFill>
                   <a:srgbClr val="A82B26"/>
                 </a:solidFill>
@@ -48410,7 +48490,27 @@
       </p:sp>
       <p:sp>
         <p:nvSpPr>
-          <p:cNvPr id="20" name="Text 18"/>
+          <p:cNvPr id="20" name="Shape 18"/>
+          <p:cNvSpPr/>
+          <p:nvPr/>
+        </p:nvSpPr>
+        <p:spPr>
+          <a:xfrm>
+            <a:off x="4084320" y="4405579"/>
+            <a:ext cx="64008" cy="682142"/>
+          </a:xfrm>
+          <a:prstGeom prst="rect">
+            <a:avLst/>
+          </a:prstGeom>
+          <a:solidFill>
+            <a:srgbClr val="12A566"/>
+          </a:solidFill>
+          <a:ln/>
+        </p:spPr>
+      </p:sp>
+      <p:sp>
+        <p:nvSpPr>
+          <p:cNvPr id="21" name="Text 19"/>
           <p:cNvSpPr txBox="1"/>
           <p:nvPr/>
         </p:nvSpPr>
@@ -48449,7 +48549,7 @@
       </p:sp>
       <p:sp>
         <p:nvSpPr>
-          <p:cNvPr id="21" name="Text 19"/>
+          <p:cNvPr id="22" name="Text 20"/>
           <p:cNvSpPr txBox="1"/>
           <p:nvPr/>
         </p:nvSpPr>
@@ -48528,7 +48628,7 @@
       </p:sp>
       <p:sp>
         <p:nvSpPr>
-          <p:cNvPr id="22" name="Text 20"/>
+          <p:cNvPr id="23" name="Text 21"/>
           <p:cNvSpPr txBox="1"/>
           <p:nvPr/>
         </p:nvSpPr>
@@ -48567,7 +48667,7 @@
       </p:sp>
       <p:sp>
         <p:nvSpPr>
-          <p:cNvPr id="23" name="Shape 21"/>
+          <p:cNvPr id="24" name="Shape 22"/>
           <p:cNvSpPr/>
           <p:nvPr/>
         </p:nvSpPr>
@@ -48587,7 +48687,27 @@
       </p:sp>
       <p:sp>
         <p:nvSpPr>
-          <p:cNvPr id="24" name="Text 22"/>
+          <p:cNvPr id="25" name="Shape 23"/>
+          <p:cNvSpPr/>
+          <p:nvPr/>
+        </p:nvSpPr>
+        <p:spPr>
+          <a:xfrm>
+            <a:off x="4084320" y="5160874"/>
+            <a:ext cx="64008" cy="682142"/>
+          </a:xfrm>
+          <a:prstGeom prst="rect">
+            <a:avLst/>
+          </a:prstGeom>
+          <a:solidFill>
+            <a:srgbClr val="12A566"/>
+          </a:solidFill>
+          <a:ln/>
+        </p:spPr>
+      </p:sp>
+      <p:sp>
+        <p:nvSpPr>
+          <p:cNvPr id="26" name="Text 24"/>
           <p:cNvSpPr txBox="1"/>
           <p:nvPr/>
         </p:nvSpPr>
@@ -48626,7 +48746,7 @@
       </p:sp>
       <p:sp>
         <p:nvSpPr>
-          <p:cNvPr id="25" name="Text 23"/>
+          <p:cNvPr id="27" name="Text 25"/>
           <p:cNvSpPr txBox="1"/>
           <p:nvPr/>
         </p:nvSpPr>
@@ -48705,7 +48825,7 @@
       </p:sp>
       <p:sp>
         <p:nvSpPr>
-          <p:cNvPr id="26" name="Text 24"/>
+          <p:cNvPr id="28" name="Text 26"/>
           <p:cNvSpPr txBox="1"/>
           <p:nvPr/>
         </p:nvSpPr>
@@ -48744,7 +48864,7 @@
       </p:sp>
       <p:sp>
         <p:nvSpPr>
-          <p:cNvPr id="27" name="Shape 25"/>
+          <p:cNvPr id="29" name="Shape 27"/>
           <p:cNvSpPr/>
           <p:nvPr/>
         </p:nvSpPr>
@@ -48764,7 +48884,7 @@
       </p:sp>
       <p:sp>
         <p:nvSpPr>
-          <p:cNvPr id="28" name="Text 26"/>
+          <p:cNvPr id="30" name="Text 28"/>
           <p:cNvSpPr txBox="1"/>
           <p:nvPr/>
         </p:nvSpPr>
@@ -48803,7 +48923,7 @@
       </p:sp>
       <p:sp>
         <p:nvSpPr>
-          <p:cNvPr id="29" name="Text 27"/>
+          <p:cNvPr id="31" name="Text 29"/>
           <p:cNvSpPr txBox="1"/>
           <p:nvPr/>
         </p:nvSpPr>
@@ -48842,7 +48962,7 @@
       </p:sp>
       <p:sp>
         <p:nvSpPr>
-          <p:cNvPr id="30" name="Shape 28"/>
+          <p:cNvPr id="32" name="Shape 30"/>
           <p:cNvSpPr/>
           <p:nvPr/>
         </p:nvSpPr>
@@ -48862,7 +48982,7 @@
       </p:sp>
       <p:sp>
         <p:nvSpPr>
-          <p:cNvPr id="31" name="Text 29"/>
+          <p:cNvPr id="33" name="Text 31"/>
           <p:cNvSpPr txBox="1"/>
           <p:nvPr/>
         </p:nvSpPr>
@@ -48901,7 +49021,7 @@
       </p:sp>
       <p:sp>
         <p:nvSpPr>
-          <p:cNvPr id="32" name="Text 30"/>
+          <p:cNvPr id="34" name="Text 32"/>
           <p:cNvSpPr txBox="1"/>
           <p:nvPr/>
         </p:nvSpPr>
@@ -48980,7 +49100,7 @@
       </p:sp>
       <p:sp>
         <p:nvSpPr>
-          <p:cNvPr id="33" name="Text 31"/>
+          <p:cNvPr id="35" name="Text 33"/>
           <p:cNvSpPr txBox="1"/>
           <p:nvPr/>
         </p:nvSpPr>
@@ -49019,7 +49139,7 @@
       </p:sp>
       <p:sp>
         <p:nvSpPr>
-          <p:cNvPr id="34" name="Text 32"/>
+          <p:cNvPr id="36" name="Text 34"/>
           <p:cNvSpPr txBox="1"/>
           <p:nvPr/>
         </p:nvSpPr>
@@ -49058,7 +49178,7 @@
       </p:sp>
       <p:sp>
         <p:nvSpPr>
-          <p:cNvPr id="35" name="Text 33"/>
+          <p:cNvPr id="37" name="Text 35"/>
           <p:cNvSpPr txBox="1"/>
           <p:nvPr/>
         </p:nvSpPr>
@@ -49137,7 +49257,7 @@
       </p:sp>
       <p:sp>
         <p:nvSpPr>
-          <p:cNvPr id="36" name="Text 34"/>
+          <p:cNvPr id="38" name="Text 36"/>
           <p:cNvSpPr txBox="1"/>
           <p:nvPr/>
         </p:nvSpPr>
@@ -49176,7 +49296,7 @@
       </p:sp>
       <p:sp>
         <p:nvSpPr>
-          <p:cNvPr id="37" name="Shape 35"/>
+          <p:cNvPr id="39" name="Shape 37"/>
           <p:cNvSpPr/>
           <p:nvPr/>
         </p:nvSpPr>
@@ -49196,7 +49316,7 @@
       </p:sp>
       <p:sp>
         <p:nvSpPr>
-          <p:cNvPr id="38" name="Text 36"/>
+          <p:cNvPr id="40" name="Text 38"/>
           <p:cNvSpPr txBox="1"/>
           <p:nvPr/>
         </p:nvSpPr>
@@ -49235,7 +49355,7 @@
       </p:sp>
       <p:sp>
         <p:nvSpPr>
-          <p:cNvPr id="39" name="Text 37"/>
+          <p:cNvPr id="41" name="Text 39"/>
           <p:cNvSpPr txBox="1"/>
           <p:nvPr/>
         </p:nvSpPr>
@@ -49314,7 +49434,7 @@
       </p:sp>
       <p:sp>
         <p:nvSpPr>
-          <p:cNvPr id="40" name="Text 38"/>
+          <p:cNvPr id="42" name="Text 40"/>
           <p:cNvSpPr txBox="1"/>
           <p:nvPr/>
         </p:nvSpPr>
@@ -49353,7 +49473,7 @@
       </p:sp>
       <p:sp>
         <p:nvSpPr>
-          <p:cNvPr id="41" name="Text 39"/>
+          <p:cNvPr id="43" name="Text 41"/>
           <p:cNvSpPr txBox="1"/>
           <p:nvPr/>
         </p:nvSpPr>
@@ -49392,7 +49512,7 @@
       </p:sp>
       <p:sp>
         <p:nvSpPr>
-          <p:cNvPr id="42" name="Text 40"/>
+          <p:cNvPr id="44" name="Text 42"/>
           <p:cNvSpPr txBox="1"/>
           <p:nvPr/>
         </p:nvSpPr>
@@ -49471,7 +49591,7 @@
       </p:sp>
       <p:sp>
         <p:nvSpPr>
-          <p:cNvPr id="43" name="Text 41"/>
+          <p:cNvPr id="45" name="Text 43"/>
           <p:cNvSpPr txBox="1"/>
           <p:nvPr/>
         </p:nvSpPr>
@@ -49510,7 +49630,7 @@
       </p:sp>
       <p:sp>
         <p:nvSpPr>
-          <p:cNvPr id="44" name="Shape 42"/>
+          <p:cNvPr id="46" name="Shape 44"/>
           <p:cNvSpPr/>
           <p:nvPr/>
         </p:nvSpPr>
@@ -49530,7 +49650,7 @@
       </p:sp>
       <p:sp>
         <p:nvSpPr>
-          <p:cNvPr id="45" name="Text 43"/>
+          <p:cNvPr id="47" name="Text 45"/>
           <p:cNvSpPr txBox="1"/>
           <p:nvPr/>
         </p:nvSpPr>
@@ -49569,7 +49689,7 @@
       </p:sp>
       <p:sp>
         <p:nvSpPr>
-          <p:cNvPr id="46" name="Text 44"/>
+          <p:cNvPr id="48" name="Text 46"/>
           <p:cNvSpPr txBox="1"/>
           <p:nvPr/>
         </p:nvSpPr>
@@ -49648,7 +49768,7 @@
       </p:sp>
       <p:sp>
         <p:nvSpPr>
-          <p:cNvPr id="47" name="Text 45"/>
+          <p:cNvPr id="49" name="Text 47"/>
           <p:cNvSpPr txBox="1"/>
           <p:nvPr/>
         </p:nvSpPr>
@@ -49687,7 +49807,7 @@
       </p:sp>
       <p:sp>
         <p:nvSpPr>
-          <p:cNvPr id="48" name="Shape 46"/>
+          <p:cNvPr id="50" name="Shape 48"/>
           <p:cNvSpPr/>
           <p:nvPr/>
         </p:nvSpPr>
@@ -49707,7 +49827,7 @@
       </p:sp>
       <p:sp>
         <p:nvSpPr>
-          <p:cNvPr id="49" name="Text 47"/>
+          <p:cNvPr id="51" name="Text 49"/>
           <p:cNvSpPr txBox="1"/>
           <p:nvPr/>
         </p:nvSpPr>
@@ -49746,7 +49866,7 @@
       </p:sp>
       <p:sp>
         <p:nvSpPr>
-          <p:cNvPr id="50" name="Text 48"/>
+          <p:cNvPr id="52" name="Text 50"/>
           <p:cNvSpPr txBox="1"/>
           <p:nvPr/>
         </p:nvSpPr>
@@ -49785,7 +49905,7 @@
       </p:sp>
       <p:sp>
         <p:nvSpPr>
-          <p:cNvPr id="51" name="Shape 49"/>
+          <p:cNvPr id="53" name="Shape 51"/>
           <p:cNvSpPr/>
           <p:nvPr/>
         </p:nvSpPr>
@@ -49805,7 +49925,27 @@
       </p:sp>
       <p:sp>
         <p:nvSpPr>
-          <p:cNvPr id="52" name="Text 50"/>
+          <p:cNvPr id="54" name="Shape 52"/>
+          <p:cNvSpPr/>
+          <p:nvPr/>
+        </p:nvSpPr>
+        <p:spPr>
+          <a:xfrm>
+            <a:off x="11466576" y="2139696"/>
+            <a:ext cx="64008" cy="682142"/>
+          </a:xfrm>
+          <a:prstGeom prst="rect">
+            <a:avLst/>
+          </a:prstGeom>
+          <a:solidFill>
+            <a:srgbClr val="12A566"/>
+          </a:solidFill>
+          <a:ln/>
+        </p:spPr>
+      </p:sp>
+      <p:sp>
+        <p:nvSpPr>
+          <p:cNvPr id="55" name="Text 53"/>
           <p:cNvSpPr txBox="1"/>
           <p:nvPr/>
         </p:nvSpPr>
@@ -49844,7 +49984,7 @@
       </p:sp>
       <p:sp>
         <p:nvSpPr>
-          <p:cNvPr id="53" name="Text 51"/>
+          <p:cNvPr id="56" name="Text 54"/>
           <p:cNvSpPr txBox="1"/>
           <p:nvPr/>
         </p:nvSpPr>
@@ -49923,7 +50063,7 @@
       </p:sp>
       <p:sp>
         <p:nvSpPr>
-          <p:cNvPr id="54" name="Text 52"/>
+          <p:cNvPr id="57" name="Text 55"/>
           <p:cNvSpPr txBox="1"/>
           <p:nvPr/>
         </p:nvSpPr>
@@ -49962,7 +50102,27 @@
       </p:sp>
       <p:sp>
         <p:nvSpPr>
-          <p:cNvPr id="55" name="Text 53"/>
+          <p:cNvPr id="58" name="Shape 56"/>
+          <p:cNvSpPr/>
+          <p:nvPr/>
+        </p:nvSpPr>
+        <p:spPr>
+          <a:xfrm>
+            <a:off x="11466576" y="2894990"/>
+            <a:ext cx="64008" cy="682142"/>
+          </a:xfrm>
+          <a:prstGeom prst="rect">
+            <a:avLst/>
+          </a:prstGeom>
+          <a:solidFill>
+            <a:srgbClr val="12A566"/>
+          </a:solidFill>
+          <a:ln/>
+        </p:spPr>
+      </p:sp>
+      <p:sp>
+        <p:nvSpPr>
+          <p:cNvPr id="59" name="Text 57"/>
           <p:cNvSpPr txBox="1"/>
           <p:nvPr/>
         </p:nvSpPr>
@@ -50001,7 +50161,7 @@
       </p:sp>
       <p:sp>
         <p:nvSpPr>
-          <p:cNvPr id="56" name="Text 54"/>
+          <p:cNvPr id="60" name="Text 58"/>
           <p:cNvSpPr txBox="1"/>
           <p:nvPr/>
         </p:nvSpPr>
@@ -50080,7 +50240,7 @@
       </p:sp>
       <p:sp>
         <p:nvSpPr>
-          <p:cNvPr id="57" name="Text 55"/>
+          <p:cNvPr id="61" name="Text 59"/>
           <p:cNvSpPr txBox="1"/>
           <p:nvPr/>
         </p:nvSpPr>
@@ -50119,7 +50279,7 @@
       </p:sp>
       <p:sp>
         <p:nvSpPr>
-          <p:cNvPr id="58" name="Shape 56"/>
+          <p:cNvPr id="62" name="Shape 60"/>
           <p:cNvSpPr/>
           <p:nvPr/>
         </p:nvSpPr>
@@ -50139,7 +50299,7 @@
       </p:sp>
       <p:sp>
         <p:nvSpPr>
-          <p:cNvPr id="59" name="Text 57"/>
+          <p:cNvPr id="63" name="Text 61"/>
           <p:cNvSpPr txBox="1"/>
           <p:nvPr/>
         </p:nvSpPr>
@@ -50178,7 +50338,7 @@
       </p:sp>
       <p:sp>
         <p:nvSpPr>
-          <p:cNvPr id="60" name="Text 58"/>
+          <p:cNvPr id="64" name="Text 62"/>
           <p:cNvSpPr txBox="1"/>
           <p:nvPr/>
         </p:nvSpPr>
@@ -50257,7 +50417,7 @@
       </p:sp>
       <p:sp>
         <p:nvSpPr>
-          <p:cNvPr id="61" name="Text 59"/>
+          <p:cNvPr id="65" name="Text 63"/>
           <p:cNvSpPr txBox="1"/>
           <p:nvPr/>
         </p:nvSpPr>
@@ -50296,7 +50456,7 @@
       </p:sp>
       <p:sp>
         <p:nvSpPr>
-          <p:cNvPr id="62" name="Text 60"/>
+          <p:cNvPr id="66" name="Text 64"/>
           <p:cNvSpPr txBox="1"/>
           <p:nvPr/>
         </p:nvSpPr>
@@ -50335,7 +50495,7 @@
       </p:sp>
       <p:sp>
         <p:nvSpPr>
-          <p:cNvPr id="63" name="Text 61"/>
+          <p:cNvPr id="67" name="Text 65"/>
           <p:cNvSpPr txBox="1"/>
           <p:nvPr/>
         </p:nvSpPr>
@@ -50414,7 +50574,7 @@
       </p:sp>
       <p:sp>
         <p:nvSpPr>
-          <p:cNvPr id="64" name="Text 62"/>
+          <p:cNvPr id="68" name="Text 66"/>
           <p:cNvSpPr txBox="1"/>
           <p:nvPr/>
         </p:nvSpPr>
@@ -50453,7 +50613,7 @@
       </p:sp>
       <p:sp>
         <p:nvSpPr>
-          <p:cNvPr id="65" name="Shape 63"/>
+          <p:cNvPr id="69" name="Shape 67"/>
           <p:cNvSpPr/>
           <p:nvPr/>
         </p:nvSpPr>
@@ -50473,7 +50633,7 @@
       </p:sp>
       <p:sp>
         <p:nvSpPr>
-          <p:cNvPr id="66" name="Text 64"/>
+          <p:cNvPr id="70" name="Text 68"/>
           <p:cNvSpPr txBox="1"/>
           <p:nvPr/>
         </p:nvSpPr>
@@ -50512,7 +50672,7 @@
       </p:sp>
       <p:sp>
         <p:nvSpPr>
-          <p:cNvPr id="67" name="Text 65"/>
+          <p:cNvPr id="71" name="Text 69"/>
           <p:cNvSpPr txBox="1"/>
           <p:nvPr/>
         </p:nvSpPr>
@@ -50591,7 +50751,7 @@
       </p:sp>
       <p:sp>
         <p:nvSpPr>
-          <p:cNvPr id="68" name="Text 66"/>
+          <p:cNvPr id="72" name="Text 70"/>
           <p:cNvSpPr txBox="1"/>
           <p:nvPr/>
         </p:nvSpPr>
@@ -50630,7 +50790,7 @@
       </p:sp>
       <p:sp>
         <p:nvSpPr>
-          <p:cNvPr id="69" name="Shape 67"/>
+          <p:cNvPr id="73" name="Shape 71"/>
           <p:cNvSpPr/>
           <p:nvPr/>
         </p:nvSpPr>
@@ -50650,7 +50810,7 @@
       </p:sp>
       <p:sp>
         <p:nvSpPr>
-          <p:cNvPr id="70" name="Text 68"/>
+          <p:cNvPr id="74" name="Text 72"/>
           <p:cNvSpPr txBox="1"/>
           <p:nvPr/>
         </p:nvSpPr>

--- a/day2-deck/decks/Warranty & Internal - House Style.pptx
+++ b/day2-deck/decks/Warranty & Internal - House Style.pptx
@@ -158,7 +158,7 @@
           </c:spPr>
           <c:invertIfNegative val="0"/>
           <c:dLbls>
-            <c:numFmt formatCode="#,##0.0,&quot;K&quot;" sourceLinked="0"/>
+            <c:numFmt formatCode="0.0" sourceLinked="0"/>
             <c:txPr>
               <a:bodyPr/>
               <a:lstStyle/>
@@ -251,31 +251,31 @@
                 <c:formatCode>General</c:formatCode>
                 <c:ptCount val="12"/>
                 <c:pt idx="0">
-                  <c:v>14264</c:v>
+                  <c:v>5.08</c:v>
                 </c:pt>
                 <c:pt idx="1">
-                  <c:v>12746</c:v>
+                  <c:v>4.97</c:v>
                 </c:pt>
                 <c:pt idx="2">
-                  <c:v>13940</c:v>
+                  <c:v>5.2</c:v>
                 </c:pt>
                 <c:pt idx="3">
-                  <c:v>13710</c:v>
+                  <c:v>5.4</c:v>
                 </c:pt>
                 <c:pt idx="4">
-                  <c:v>13121</c:v>
+                  <c:v>4.7</c:v>
                 </c:pt>
                 <c:pt idx="5">
-                  <c:v>14168</c:v>
+                  <c:v>5.05</c:v>
                 </c:pt>
                 <c:pt idx="6">
-                  <c:v>14663</c:v>
+                  <c:v>5.82</c:v>
                 </c:pt>
                 <c:pt idx="7">
-                  <c:v>15204</c:v>
+                  <c:v>5.49</c:v>
                 </c:pt>
                 <c:pt idx="8">
-                  <c:v>15075</c:v>
+                  <c:v>5.36</c:v>
                 </c:pt>
                 <c:pt idx="9">
                   <c:v/>
@@ -292,7 +292,7 @@
           <c:smooth val="0"/>
         </c:ser>
         <c:dLbls>
-          <c:numFmt formatCode="#,##0.0,&quot;K&quot;" sourceLinked="0"/>
+          <c:numFmt formatCode="0.0" sourceLinked="0"/>
           <c:txPr>
             <a:bodyPr/>
             <a:lstStyle/>
@@ -363,8 +363,8 @@
         <c:axId val="2094734552"/>
         <c:scaling>
           <c:orientation val="minMax"/>
-          <c:max val="18000"/>
-          <c:min val="10000"/>
+          <c:max val="7"/>
+          <c:min val="3"/>
         </c:scaling>
         <c:delete val="0"/>
         <c:axPos val="l"/>
@@ -379,7 +379,7 @@
             </a:ln>
           </c:spPr>
         </c:majorGridlines>
-        <c:numFmt formatCode="#,##0" sourceLinked="0"/>
+        <c:numFmt formatCode="$0&quot;M&quot;" sourceLinked="0"/>
         <c:majorTickMark val="out"/>
         <c:minorTickMark val="none"/>
         <c:tickLblPos val="nextTo"/>
@@ -408,7 +408,7 @@
         <c:crossAx val="2094734554"/>
         <c:crosses val="autoZero"/>
         <c:crossBetween val="between"/>
-        <c:majorUnit val="2000"/>
+        <c:majorUnit val="1"/>
       </c:valAx>
       <c:spPr>
         <a:noFill/>
@@ -2962,7 +2962,7 @@
           </c:spPr>
           <c:invertIfNegative val="0"/>
           <c:dLbls>
-            <c:numFmt formatCode="#,##0.0,&quot;K&quot;" sourceLinked="0"/>
+            <c:numFmt formatCode="0.0" sourceLinked="0"/>
             <c:txPr>
               <a:bodyPr/>
               <a:lstStyle/>
@@ -3062,25 +3062,25 @@
                   <c:v/>
                 </c:pt>
                 <c:pt idx="2">
-                  <c:v/>
+                  <c:v>5.2</c:v>
                 </c:pt>
                 <c:pt idx="3">
-                  <c:v/>
+                  <c:v>5.4</c:v>
                 </c:pt>
                 <c:pt idx="4">
                   <c:v/>
                 </c:pt>
                 <c:pt idx="5">
-                  <c:v/>
+                  <c:v>5.05</c:v>
                 </c:pt>
                 <c:pt idx="6">
-                  <c:v/>
+                  <c:v>5.82</c:v>
                 </c:pt>
                 <c:pt idx="7">
-                  <c:v>15204</c:v>
+                  <c:v>5.49</c:v>
                 </c:pt>
                 <c:pt idx="8">
-                  <c:v>15075</c:v>
+                  <c:v>5.36</c:v>
                 </c:pt>
                 <c:pt idx="9">
                   <c:v/>
@@ -3097,7 +3097,7 @@
           <c:smooth val="0"/>
         </c:ser>
         <c:dLbls>
-          <c:numFmt formatCode="#,##0.0,&quot;K&quot;" sourceLinked="0"/>
+          <c:numFmt formatCode="0.0" sourceLinked="0"/>
           <c:txPr>
             <a:bodyPr/>
             <a:lstStyle/>
@@ -3169,12 +3169,12 @@
         <c:axId val="2094734552"/>
         <c:scaling>
           <c:orientation val="minMax"/>
-          <c:max val="18000"/>
-          <c:min val="10000"/>
+          <c:max val="7"/>
+          <c:min val="3"/>
         </c:scaling>
         <c:delete val="0"/>
         <c:axPos val="l"/>
-        <c:numFmt formatCode="#,##0" sourceLinked="0"/>
+        <c:numFmt formatCode="$0&quot;M&quot;" sourceLinked="0"/>
         <c:majorTickMark val="out"/>
         <c:minorTickMark val="none"/>
         <c:tickLblPos val="nextTo"/>
@@ -3203,7 +3203,7 @@
         <c:crossAx val="2094734554"/>
         <c:crosses val="autoZero"/>
         <c:crossBetween val="between"/>
-        <c:majorUnit val="2000"/>
+        <c:majorUnit val="1"/>
       </c:valAx>
       <c:spPr>
         <a:solidFill>
@@ -3272,7 +3272,7 @@
           </c:spPr>
           <c:invertIfNegative val="0"/>
           <c:dLbls>
-            <c:numFmt formatCode="#,##0.0,&quot;K&quot;" sourceLinked="0"/>
+            <c:numFmt formatCode="0.0" sourceLinked="0"/>
             <c:txPr>
               <a:bodyPr/>
               <a:lstStyle/>
@@ -3366,25 +3366,25 @@
                 <c:formatCode>General</c:formatCode>
                 <c:ptCount val="12"/>
                 <c:pt idx="0">
-                  <c:v>14264</c:v>
+                  <c:v>5.08</c:v>
                 </c:pt>
                 <c:pt idx="1">
-                  <c:v>12746</c:v>
+                  <c:v>4.97</c:v>
                 </c:pt>
                 <c:pt idx="2">
-                  <c:v>13940</c:v>
+                  <c:v/>
                 </c:pt>
                 <c:pt idx="3">
-                  <c:v>13710</c:v>
+                  <c:v/>
                 </c:pt>
                 <c:pt idx="4">
-                  <c:v>13121</c:v>
+                  <c:v>4.7</c:v>
                 </c:pt>
                 <c:pt idx="5">
-                  <c:v>14168</c:v>
+                  <c:v/>
                 </c:pt>
                 <c:pt idx="6">
-                  <c:v>14663</c:v>
+                  <c:v/>
                 </c:pt>
                 <c:pt idx="7">
                   <c:v/>
@@ -3407,7 +3407,7 @@
           <c:smooth val="0"/>
         </c:ser>
         <c:dLbls>
-          <c:numFmt formatCode="#,##0.0,&quot;K&quot;" sourceLinked="0"/>
+          <c:numFmt formatCode="0.0" sourceLinked="0"/>
           <c:txPr>
             <a:bodyPr/>
             <a:lstStyle/>
@@ -3479,12 +3479,12 @@
         <c:axId val="2094734552"/>
         <c:scaling>
           <c:orientation val="minMax"/>
-          <c:max val="18000"/>
-          <c:min val="10000"/>
+          <c:max val="7"/>
+          <c:min val="3"/>
         </c:scaling>
         <c:delete val="0"/>
         <c:axPos val="l"/>
-        <c:numFmt formatCode="#,##0" sourceLinked="0"/>
+        <c:numFmt formatCode="$0&quot;M&quot;" sourceLinked="0"/>
         <c:majorTickMark val="out"/>
         <c:minorTickMark val="none"/>
         <c:tickLblPos val="nextTo"/>
@@ -3513,7 +3513,7 @@
         <c:crossAx val="2094734554"/>
         <c:crosses val="autoZero"/>
         <c:crossBetween val="between"/>
-        <c:majorUnit val="2000"/>
+        <c:majorUnit val="1"/>
       </c:valAx>
       <c:spPr>
         <a:solidFill>
@@ -3582,7 +3582,7 @@
           </c:spPr>
           <c:invertIfNegative val="0"/>
           <c:dLbls>
-            <c:numFmt formatCode="#,##0.0,&quot;K&quot;" sourceLinked="0"/>
+            <c:numFmt formatCode="0.0" sourceLinked="0"/>
             <c:txPr>
               <a:bodyPr/>
               <a:lstStyle/>
@@ -3676,25 +3676,25 @@
                 <c:formatCode>General</c:formatCode>
                 <c:ptCount val="12"/>
                 <c:pt idx="0">
-                  <c:v>16565</c:v>
+                  <c:v>5.51</c:v>
                 </c:pt>
                 <c:pt idx="1">
-                  <c:v>15707</c:v>
+                  <c:v>5.18</c:v>
                 </c:pt>
                 <c:pt idx="2">
-                  <c:v>15981</c:v>
+                  <c:v/>
                 </c:pt>
                 <c:pt idx="3">
-                  <c:v>14990</c:v>
+                  <c:v/>
                 </c:pt>
                 <c:pt idx="4">
-                  <c:v>14527</c:v>
+                  <c:v>4.75</c:v>
                 </c:pt>
                 <c:pt idx="5">
-                  <c:v>14882</c:v>
+                  <c:v/>
                 </c:pt>
                 <c:pt idx="6">
-                  <c:v>15408</c:v>
+                  <c:v/>
                 </c:pt>
                 <c:pt idx="7">
                   <c:v/>
@@ -3703,13 +3703,13 @@
                   <c:v/>
                 </c:pt>
                 <c:pt idx="9">
-                  <c:v>14227</c:v>
+                  <c:v>5.39</c:v>
                 </c:pt>
                 <c:pt idx="10">
                   <c:v/>
                 </c:pt>
                 <c:pt idx="11">
-                  <c:v>14223</c:v>
+                  <c:v>5.04</c:v>
                 </c:pt>
               </c:numCache>
             </c:numRef>
@@ -3717,7 +3717,7 @@
           <c:smooth val="0"/>
         </c:ser>
         <c:dLbls>
-          <c:numFmt formatCode="#,##0.0,&quot;K&quot;" sourceLinked="0"/>
+          <c:numFmt formatCode="0.0" sourceLinked="0"/>
           <c:txPr>
             <a:bodyPr/>
             <a:lstStyle/>
@@ -3789,12 +3789,12 @@
         <c:axId val="2094734552"/>
         <c:scaling>
           <c:orientation val="minMax"/>
-          <c:max val="18000"/>
-          <c:min val="10000"/>
+          <c:max val="7"/>
+          <c:min val="3"/>
         </c:scaling>
         <c:delete val="0"/>
         <c:axPos val="l"/>
-        <c:numFmt formatCode="#,##0" sourceLinked="0"/>
+        <c:numFmt formatCode="$0&quot;M&quot;" sourceLinked="0"/>
         <c:majorTickMark val="out"/>
         <c:minorTickMark val="none"/>
         <c:tickLblPos val="nextTo"/>
@@ -3823,7 +3823,7 @@
         <c:crossAx val="2094734554"/>
         <c:crosses val="autoZero"/>
         <c:crossBetween val="between"/>
-        <c:majorUnit val="2000"/>
+        <c:majorUnit val="1"/>
       </c:valAx>
       <c:spPr>
         <a:solidFill>
@@ -3892,7 +3892,7 @@
           </c:spPr>
           <c:invertIfNegative val="0"/>
           <c:dLbls>
-            <c:numFmt formatCode="#,##0.0,&quot;K&quot;" sourceLinked="0"/>
+            <c:numFmt formatCode="0.0" sourceLinked="0"/>
             <c:txPr>
               <a:bodyPr/>
               <a:lstStyle/>
@@ -3992,31 +3992,31 @@
                   <c:v/>
                 </c:pt>
                 <c:pt idx="2">
-                  <c:v/>
+                  <c:v>5.01</c:v>
                 </c:pt>
                 <c:pt idx="3">
-                  <c:v/>
+                  <c:v>4.81</c:v>
                 </c:pt>
                 <c:pt idx="4">
                   <c:v/>
                 </c:pt>
                 <c:pt idx="5">
-                  <c:v/>
+                  <c:v>4.97</c:v>
                 </c:pt>
                 <c:pt idx="6">
-                  <c:v/>
+                  <c:v>5.13</c:v>
                 </c:pt>
                 <c:pt idx="7">
-                  <c:v>14622</c:v>
+                  <c:v>4.94</c:v>
                 </c:pt>
                 <c:pt idx="8">
-                  <c:v>13082</c:v>
+                  <c:v>4.48</c:v>
                 </c:pt>
                 <c:pt idx="9">
                   <c:v/>
                 </c:pt>
                 <c:pt idx="10">
-                  <c:v>12951</c:v>
+                  <c:v>4.42</c:v>
                 </c:pt>
                 <c:pt idx="11">
                   <c:v/>
@@ -4027,7 +4027,7 @@
           <c:smooth val="0"/>
         </c:ser>
         <c:dLbls>
-          <c:numFmt formatCode="#,##0.0,&quot;K&quot;" sourceLinked="0"/>
+          <c:numFmt formatCode="0.0" sourceLinked="0"/>
           <c:txPr>
             <a:bodyPr/>
             <a:lstStyle/>
@@ -4099,12 +4099,12 @@
         <c:axId val="2094734552"/>
         <c:scaling>
           <c:orientation val="minMax"/>
-          <c:max val="18000"/>
-          <c:min val="10000"/>
+          <c:max val="7"/>
+          <c:min val="3"/>
         </c:scaling>
         <c:delete val="0"/>
         <c:axPos val="l"/>
-        <c:numFmt formatCode="#,##0" sourceLinked="0"/>
+        <c:numFmt formatCode="$0&quot;M&quot;" sourceLinked="0"/>
         <c:majorTickMark val="out"/>
         <c:minorTickMark val="none"/>
         <c:tickLblPos val="nextTo"/>
@@ -4133,7 +4133,7 @@
         <c:crossAx val="2094734554"/>
         <c:crosses val="autoZero"/>
         <c:crossBetween val="between"/>
-        <c:majorUnit val="2000"/>
+        <c:majorUnit val="1"/>
       </c:valAx>
       <c:spPr>
         <a:solidFill>
@@ -4206,7 +4206,7 @@
           </c:spPr>
           <c:invertIfNegative val="0"/>
           <c:dLbls>
-            <c:numFmt formatCode="#,##0.0,&quot;K&quot;" sourceLinked="0"/>
+            <c:numFmt formatCode="0.0" sourceLinked="0"/>
             <c:txPr>
               <a:bodyPr/>
               <a:lstStyle/>
@@ -4299,40 +4299,40 @@
                 <c:formatCode>General</c:formatCode>
                 <c:ptCount val="12"/>
                 <c:pt idx="0">
-                  <c:v>16565</c:v>
+                  <c:v>5.51</c:v>
                 </c:pt>
                 <c:pt idx="1">
-                  <c:v>15707</c:v>
+                  <c:v>5.18</c:v>
                 </c:pt>
                 <c:pt idx="2">
-                  <c:v>15981</c:v>
+                  <c:v>5.01</c:v>
                 </c:pt>
                 <c:pt idx="3">
-                  <c:v>14990</c:v>
+                  <c:v>4.81</c:v>
                 </c:pt>
                 <c:pt idx="4">
-                  <c:v>14527</c:v>
+                  <c:v>4.75</c:v>
                 </c:pt>
                 <c:pt idx="5">
-                  <c:v>14882</c:v>
+                  <c:v>4.97</c:v>
                 </c:pt>
                 <c:pt idx="6">
-                  <c:v>15408</c:v>
+                  <c:v>5.13</c:v>
                 </c:pt>
                 <c:pt idx="7">
-                  <c:v>14622</c:v>
+                  <c:v>4.94</c:v>
                 </c:pt>
                 <c:pt idx="8">
-                  <c:v>13082</c:v>
+                  <c:v>4.48</c:v>
                 </c:pt>
                 <c:pt idx="9">
-                  <c:v>14227</c:v>
+                  <c:v>5.39</c:v>
                 </c:pt>
                 <c:pt idx="10">
-                  <c:v>12951</c:v>
+                  <c:v>4.42</c:v>
                 </c:pt>
                 <c:pt idx="11">
-                  <c:v>14223</c:v>
+                  <c:v>5.04</c:v>
                 </c:pt>
               </c:numCache>
             </c:numRef>
@@ -4340,7 +4340,7 @@
           <c:smooth val="0"/>
         </c:ser>
         <c:dLbls>
-          <c:numFmt formatCode="#,##0.0,&quot;K&quot;" sourceLinked="0"/>
+          <c:numFmt formatCode="0.0" sourceLinked="0"/>
           <c:txPr>
             <a:bodyPr/>
             <a:lstStyle/>
@@ -4413,12 +4413,12 @@
         <c:axId val="2094734552"/>
         <c:scaling>
           <c:orientation val="minMax"/>
-          <c:max val="18000"/>
-          <c:min val="10000"/>
+          <c:max val="7"/>
+          <c:min val="3"/>
         </c:scaling>
         <c:delete val="0"/>
         <c:axPos val="l"/>
-        <c:numFmt formatCode="#,##0" sourceLinked="0"/>
+        <c:numFmt formatCode="$0&quot;M&quot;" sourceLinked="0"/>
         <c:majorTickMark val="out"/>
         <c:minorTickMark val="none"/>
         <c:tickLblPos val="nextTo"/>
@@ -4447,7 +4447,7 @@
         <c:crossAx val="2094734554"/>
         <c:crosses val="autoZero"/>
         <c:crossBetween val="between"/>
-        <c:majorUnit val="2000"/>
+        <c:majorUnit val="1"/>
       </c:valAx>
       <c:spPr>
         <a:solidFill>
@@ -6251,7 +6251,7 @@
           <a:p>
             <a:r>
               <a:rPr lang="en-US" dirty="0"/>
-              <a:t>Source: Qlik - Closed Repair Orders. Jan-Sep by close month. Same-store, INEOS excluded (opened 2026). GMC Prescott body shop labor types excluded. Distinct warranty ROs: every RO with a warranty line. YTD from YTD totals, not the mean of months. Store rows reconcile to the group on every input, both years. 2025 shown January-December; October-December pulled Oct 22 on the same basis (chart only).</a:t>
+              <a:t>Source: Qlik - Profit &amp; Loss, Gross Profit - Fixed Ops Warranty (service + parts warranty gross). Same-store, INEOS excluded (opened 2026); no body shop. Jan-Sep 2026 vs Jan-Sep 2025; 2025 shown January-December. Store rows reconcile to the group to the cent, both years.</a:t>
             </a:r>
             <a:endParaRPr lang="en-US" dirty="0"/>
           </a:p>
@@ -6339,7 +6339,7 @@
           <a:p>
             <a:r>
               <a:rPr lang="en-US" dirty="0"/>
-              <a:t>Source: Qlik - Closed Repair Orders. Jan-Sep by close month. Same-store, INEOS excluded (opened 2026). GMC Prescott body shop labor types excluded. Distinct warranty ROs: every RO with a warranty line. Jan-Sep 2026 YTD.</a:t>
+              <a:t>Source: Qlik - Profit &amp; Loss, Gross Profit - Fixed Ops Warranty (service + parts warranty gross). Same-store, INEOS excluded (opened 2026); no body shop. Jan-Sep 2026.</a:t>
             </a:r>
             <a:endParaRPr lang="en-US" dirty="0"/>
           </a:p>
@@ -6427,7 +6427,7 @@
           <a:p>
             <a:r>
               <a:rPr lang="en-US" dirty="0"/>
-              <a:t>Source: Qlik - Closed Repair Orders. Jan-Sep by close month. Same-store, INEOS excluded (opened 2026). GMC Prescott body shop labor types excluded. Change in warranty RO count (percent, so store size does not drive the ranking), Jan-Sep 2026 vs 2025, best first.</a:t>
+              <a:t>Source: Qlik - Profit &amp; Loss, Gross Profit - Fixed Ops Warranty (service + parts warranty gross). Same-store, INEOS excluded (opened 2026); no body shop. Ranked by dollar change, Jan-Sep 2026 vs Jan-Sep 2025; percent change alongside, the top three and bottom three by percent marked. Warranty volume follows campaigns and recalls as well as store effort.</a:t>
             </a:r>
             <a:endParaRPr lang="en-US" dirty="0"/>
           </a:p>
@@ -6515,7 +6515,7 @@
           <a:p>
             <a:r>
               <a:rPr lang="en-US" dirty="0"/>
-              <a:t>Source: Qlik - Closed Repair Orders. Jan-Sep by close month. Same-store, INEOS excluded (opened 2026). GMC Prescott body shop labor types excluded. Distinct warranty ROs: every RO with a warranty line. Top and bottom five stores by change in warranty RO count (percent, so store size does not drive the ranking), Jan-Sep 2026 vs 2025. Moving now: Jul-Sep 2026 vs Jan-Mar 2026, each store against itself (monthly averages); the group moved +9.7% on the same basis, so part of every store's change is seasonal. Green bar at the right of a row: the store is on both the top five vs last year and the top five moving now.Conversation starter: each top store says one thing they started doing; each bottom store says what got in the way and what they would try. The room trades ideas. Moving now: ask the top three what they started this year.</a:t>
+              <a:t>Source: Qlik - Profit &amp; Loss, Gross Profit - Fixed Ops Warranty (service + parts warranty gross). Same-store, INEOS excluded (opened 2026); no body shop. Top and bottom five stores by percent change in warranty gross, Jan-Sep 2026 vs 2025. Moving now: Jul-Sep 2026 vs Jan-Mar 2026, each store against itself (monthly averages); the group moved +9.3% on the same basis, so part of every store's change is seasonal. Green bar at the right of a row: the store is on both the top five vs last year and the top five moving now.Conversation starter: each top store says one thing they started doing; each bottom store says what got in the way and what they would try. The room trades ideas. Moving now: ask the top three what they started this year.</a:t>
             </a:r>
             <a:endParaRPr lang="en-US" dirty="0"/>
           </a:p>
@@ -7351,7 +7351,7 @@
                 <a:ea typeface="Inter" pitchFamily="34" charset="-122"/>
                 <a:cs typeface="Inter" pitchFamily="34" charset="-120"/>
               </a:rPr>
-              <a:t>Warranty ROs   ·   Warranty ELR   ·   Internal ELR</a:t>
+              <a:t>Warranty gross   ·   Warranty ELR   ·   Internal ELR</a:t>
             </a:r>
             <a:endParaRPr lang="en-US" sz="2200" dirty="0"/>
           </a:p>
@@ -23375,7 +23375,7 @@
                 <a:ea typeface="Inter" pitchFamily="34" charset="-122"/>
                 <a:cs typeface="Inter" pitchFamily="34" charset="-120"/>
               </a:rPr>
-              <a:t>Warranty RO Count</a:t>
+              <a:t>Warranty Gross Profit</a:t>
             </a:r>
             <a:endParaRPr lang="en-US" sz="2800" dirty="0"/>
           </a:p>
@@ -23473,7 +23473,7 @@
                 <a:ea typeface="Inter" pitchFamily="34" charset="-122"/>
                 <a:cs typeface="Inter" pitchFamily="34" charset="-120"/>
               </a:rPr>
-              <a:t>135,764</a:t>
+              <a:t>$44.78M</a:t>
             </a:r>
             <a:endParaRPr lang="en-US" sz="3000" dirty="0"/>
           </a:p>
@@ -23551,7 +23551,7 @@
                 <a:ea typeface="Inter" pitchFamily="34" charset="-122"/>
                 <a:cs typeface="Inter" pitchFamily="34" charset="-120"/>
               </a:rPr>
-              <a:t>126,891</a:t>
+              <a:t>$47.07M</a:t>
             </a:r>
             <a:endParaRPr lang="en-US" sz="3000" dirty="0"/>
           </a:p>
@@ -23623,13 +23623,13 @@
             <a:r>
               <a:rPr lang="en-US" sz="3000" b="1" dirty="0">
                 <a:solidFill>
-                  <a:srgbClr val="A82B26"/>
-                </a:solidFill>
-                <a:latin typeface="Inter" pitchFamily="34" charset="0"/>
-                <a:ea typeface="Inter" pitchFamily="34" charset="-122"/>
-                <a:cs typeface="Inter" pitchFamily="34" charset="-120"/>
-              </a:rPr>
-              <a:t>−8,873</a:t>
+                  <a:srgbClr val="0B7A4A"/>
+                </a:solidFill>
+                <a:latin typeface="Inter" pitchFamily="34" charset="0"/>
+                <a:ea typeface="Inter" pitchFamily="34" charset="-122"/>
+                <a:cs typeface="Inter" pitchFamily="34" charset="-120"/>
+              </a:rPr>
+              <a:t>+$2.29M</a:t>
             </a:r>
             <a:endParaRPr lang="en-US" sz="3000" dirty="0"/>
           </a:p>
@@ -23701,13 +23701,13 @@
             <a:r>
               <a:rPr lang="en-US" sz="3000" b="1" dirty="0">
                 <a:solidFill>
-                  <a:srgbClr val="A82B26"/>
-                </a:solidFill>
-                <a:latin typeface="Inter" pitchFamily="34" charset="0"/>
-                <a:ea typeface="Inter" pitchFamily="34" charset="-122"/>
-                <a:cs typeface="Inter" pitchFamily="34" charset="-120"/>
-              </a:rPr>
-              <a:t>−6.5%</a:t>
+                  <a:srgbClr val="0B7A4A"/>
+                </a:solidFill>
+                <a:latin typeface="Inter" pitchFamily="34" charset="0"/>
+                <a:ea typeface="Inter" pitchFamily="34" charset="-122"/>
+                <a:cs typeface="Inter" pitchFamily="34" charset="-120"/>
+              </a:rPr>
+              <a:t>+5.1%</a:t>
             </a:r>
             <a:endParaRPr lang="en-US" sz="3000" dirty="0"/>
           </a:p>
@@ -23766,7 +23766,7 @@
                 <a:ea typeface="Inter" pitchFamily="34" charset="-122"/>
                 <a:cs typeface="Inter" pitchFamily="34" charset="-120"/>
               </a:rPr>
-              <a:t>Warranty RO Count by month, 2025 against 2026</a:t>
+              <a:t>Warranty gross profit by month, 2025 against 2026 ($M)</a:t>
             </a:r>
             <a:endParaRPr lang="en-US" sz="1500" dirty="0"/>
           </a:p>
@@ -24061,7 +24061,7 @@
             <a:avLst/>
           </a:prstGeom>
           <a:solidFill>
-            <a:srgbClr val="FBEBEA"/>
+            <a:srgbClr val="E6F6EE"/>
           </a:solidFill>
           <a:ln/>
         </p:spPr>
@@ -24093,13 +24093,13 @@
             <a:r>
               <a:rPr lang="en-US" sz="1600" b="1" dirty="0">
                 <a:solidFill>
-                  <a:srgbClr val="A82B26"/>
-                </a:solidFill>
-                <a:latin typeface="Inter" pitchFamily="34" charset="0"/>
-                <a:ea typeface="Inter" pitchFamily="34" charset="-122"/>
-                <a:cs typeface="Inter" pitchFamily="34" charset="-120"/>
-              </a:rPr>
-              <a:t>Down 8,873 to 126,891, behind 2025 in seven of nine months. Warranty volume follows OEM campaigns and recalls as much as store effort.</a:t>
+                  <a:srgbClr val="0B7A4A"/>
+                </a:solidFill>
+                <a:latin typeface="Inter" pitchFamily="34" charset="0"/>
+                <a:ea typeface="Inter" pitchFamily="34" charset="-122"/>
+                <a:cs typeface="Inter" pitchFamily="34" charset="-120"/>
+              </a:rPr>
+              <a:t>+$2.29M (+5.1%) of warranty gross year to date; 6 of nine months ahead of 2025, best September at +$877K. This is money the manufacturer owes us: process keeps it.</a:t>
             </a:r>
             <a:endParaRPr lang="en-US" sz="1600" dirty="0"/>
           </a:p>
@@ -24229,7 +24229,7 @@
                 <a:ea typeface="Inter" pitchFamily="34" charset="-122"/>
                 <a:cs typeface="Inter" pitchFamily="34" charset="-120"/>
               </a:rPr>
-              <a:t>Warranty RO Count</a:t>
+              <a:t>Warranty Gross Profit</a:t>
             </a:r>
             <a:endParaRPr lang="en-US" sz="2800" dirty="0"/>
           </a:p>
@@ -24328,7 +24328,7 @@
                 <a:ea typeface="Inter" pitchFamily="34" charset="-122"/>
                 <a:cs typeface="Inter" pitchFamily="34" charset="-120"/>
               </a:rPr>
-              <a:t>WARRANTY RO COUNT</a:t>
+              <a:t>WARRANTY GROSS</a:t>
             </a:r>
             <a:endParaRPr lang="en-US" sz="1500" dirty="0"/>
           </a:p>
@@ -24406,7 +24406,7 @@
                 <a:ea typeface="Inter" pitchFamily="34" charset="-122"/>
                 <a:cs typeface="Inter" pitchFamily="34" charset="-120"/>
               </a:rPr>
-              <a:t>126,891</a:t>
+              <a:t>$47.07M</a:t>
             </a:r>
             <a:endParaRPr lang="en-US" sz="2000" dirty="0"/>
           </a:p>
@@ -24484,7 +24484,7 @@
                 <a:ea typeface="Inter" pitchFamily="34" charset="-122"/>
                 <a:cs typeface="Inter" pitchFamily="34" charset="-120"/>
               </a:rPr>
-              <a:t>TOYOTA HENDERSON</a:t>
+              <a:t>CADILLAC</a:t>
             </a:r>
             <a:endParaRPr lang="en-US" sz="1200" dirty="0"/>
           </a:p>
@@ -24543,7 +24543,7 @@
                 <a:ea typeface="Inter" pitchFamily="34" charset="-122"/>
                 <a:cs typeface="Inter" pitchFamily="34" charset="-120"/>
               </a:rPr>
-              <a:t>11,211</a:t>
+              <a:t>$6.13M</a:t>
             </a:r>
             <a:endParaRPr lang="en-US" sz="1200" dirty="0"/>
           </a:p>
@@ -24636,7 +24636,7 @@
         <p:spPr>
           <a:xfrm>
             <a:off x="2980944" y="2151755"/>
-            <a:ext cx="1722605" cy="110352"/>
+            <a:ext cx="1575158" cy="110352"/>
           </a:xfrm>
           <a:prstGeom prst="rect">
             <a:avLst/>
@@ -24680,7 +24680,7 @@
                 <a:ea typeface="Inter" pitchFamily="34" charset="-122"/>
                 <a:cs typeface="Inter" pitchFamily="34" charset="-120"/>
               </a:rPr>
-              <a:t>10,560</a:t>
+              <a:t>$5.28M</a:t>
             </a:r>
             <a:endParaRPr lang="en-US" sz="1200" dirty="0"/>
           </a:p>
@@ -24758,7 +24758,7 @@
                 <a:ea typeface="Inter" pitchFamily="34" charset="-122"/>
                 <a:cs typeface="Inter" pitchFamily="34" charset="-120"/>
               </a:rPr>
-              <a:t>SUBARU LV</a:t>
+              <a:t>AUDI HENDERSON</a:t>
             </a:r>
             <a:endParaRPr lang="en-US" sz="1200" dirty="0"/>
           </a:p>
@@ -24773,7 +24773,7 @@
         <p:spPr>
           <a:xfrm>
             <a:off x="2980944" y="2391651"/>
-            <a:ext cx="1400922" cy="110352"/>
+            <a:ext cx="1260145" cy="110352"/>
           </a:xfrm>
           <a:prstGeom prst="rect">
             <a:avLst/>
@@ -24817,7 +24817,7 @@
                 <a:ea typeface="Inter" pitchFamily="34" charset="-122"/>
                 <a:cs typeface="Inter" pitchFamily="34" charset="-120"/>
               </a:rPr>
-              <a:t>8,588</a:t>
+              <a:t>$4.23M</a:t>
             </a:r>
             <a:endParaRPr lang="en-US" sz="1200" dirty="0"/>
           </a:p>
@@ -24895,7 +24895,7 @@
                 <a:ea typeface="Inter" pitchFamily="34" charset="-122"/>
                 <a:cs typeface="Inter" pitchFamily="34" charset="-120"/>
               </a:rPr>
-              <a:t>HONDA HENDERSON</a:t>
+              <a:t>TOYOTA HENDERSON</a:t>
             </a:r>
             <a:endParaRPr lang="en-US" sz="1200" dirty="0"/>
           </a:p>
@@ -24910,7 +24910,7 @@
         <p:spPr>
           <a:xfrm>
             <a:off x="2980944" y="2631546"/>
-            <a:ext cx="1286245" cy="110352"/>
+            <a:ext cx="1234738" cy="110352"/>
           </a:xfrm>
           <a:prstGeom prst="rect">
             <a:avLst/>
@@ -24954,7 +24954,7 @@
                 <a:ea typeface="Inter" pitchFamily="34" charset="-122"/>
                 <a:cs typeface="Inter" pitchFamily="34" charset="-120"/>
               </a:rPr>
-              <a:t>7,885</a:t>
+              <a:t>$4.14M</a:t>
             </a:r>
             <a:endParaRPr lang="en-US" sz="1200" dirty="0"/>
           </a:p>
@@ -25032,7 +25032,7 @@
                 <a:ea typeface="Inter" pitchFamily="34" charset="-122"/>
                 <a:cs typeface="Inter" pitchFamily="34" charset="-120"/>
               </a:rPr>
-              <a:t>HONDA NORTH</a:t>
+              <a:t>SUBARU LV</a:t>
             </a:r>
             <a:endParaRPr lang="en-US" sz="1200" dirty="0"/>
           </a:p>
@@ -25047,7 +25047,7 @@
         <p:spPr>
           <a:xfrm>
             <a:off x="2980944" y="2871442"/>
-            <a:ext cx="1262755" cy="110352"/>
+            <a:ext cx="916344" cy="110352"/>
           </a:xfrm>
           <a:prstGeom prst="rect">
             <a:avLst/>
@@ -25091,7 +25091,7 @@
                 <a:ea typeface="Inter" pitchFamily="34" charset="-122"/>
                 <a:cs typeface="Inter" pitchFamily="34" charset="-120"/>
               </a:rPr>
-              <a:t>7,741</a:t>
+              <a:t>$3.07M</a:t>
             </a:r>
             <a:endParaRPr lang="en-US" sz="1200" dirty="0"/>
           </a:p>
@@ -25184,7 +25184,7 @@
         <p:spPr>
           <a:xfrm>
             <a:off x="2980944" y="3111337"/>
-            <a:ext cx="1196036" cy="110352"/>
+            <a:ext cx="608663" cy="110352"/>
           </a:xfrm>
           <a:prstGeom prst="rect">
             <a:avLst/>
@@ -25228,7 +25228,7 @@
                 <a:ea typeface="Inter" pitchFamily="34" charset="-122"/>
                 <a:cs typeface="Inter" pitchFamily="34" charset="-120"/>
               </a:rPr>
-              <a:t>7,332</a:t>
+              <a:t>$2.04M</a:t>
             </a:r>
             <a:endParaRPr lang="en-US" sz="1200" dirty="0"/>
           </a:p>
@@ -25306,7 +25306,7 @@
                 <a:ea typeface="Inter" pitchFamily="34" charset="-122"/>
                 <a:cs typeface="Inter" pitchFamily="34" charset="-120"/>
               </a:rPr>
-              <a:t>AUDI HENDERSON</a:t>
+              <a:t>LR LV</a:t>
             </a:r>
             <a:endParaRPr lang="en-US" sz="1200" dirty="0"/>
           </a:p>
@@ -25321,7 +25321,7 @@
         <p:spPr>
           <a:xfrm>
             <a:off x="2980944" y="3351233"/>
-            <a:ext cx="1030953" cy="110352"/>
+            <a:ext cx="539977" cy="110352"/>
           </a:xfrm>
           <a:prstGeom prst="rect">
             <a:avLst/>
@@ -25365,7 +25365,7 @@
                 <a:ea typeface="Inter" pitchFamily="34" charset="-122"/>
                 <a:cs typeface="Inter" pitchFamily="34" charset="-120"/>
               </a:rPr>
-              <a:t>6,320</a:t>
+              <a:t>$1.81M</a:t>
             </a:r>
             <a:endParaRPr lang="en-US" sz="1200" dirty="0"/>
           </a:p>
@@ -25458,7 +25458,7 @@
         <p:spPr>
           <a:xfrm>
             <a:off x="2980944" y="3591128"/>
-            <a:ext cx="798989" cy="110352"/>
+            <a:ext cx="454485" cy="110352"/>
           </a:xfrm>
           <a:prstGeom prst="rect">
             <a:avLst/>
@@ -25502,7 +25502,7 @@
                 <a:ea typeface="Inter" pitchFamily="34" charset="-122"/>
                 <a:cs typeface="Inter" pitchFamily="34" charset="-120"/>
               </a:rPr>
-              <a:t>4,898</a:t>
+              <a:t>$1.52M</a:t>
             </a:r>
             <a:endParaRPr lang="en-US" sz="1200" dirty="0"/>
           </a:p>
@@ -25580,7 +25580,7 @@
                 <a:ea typeface="Inter" pitchFamily="34" charset="-122"/>
                 <a:cs typeface="Inter" pitchFamily="34" charset="-120"/>
               </a:rPr>
-              <a:t>CADILLAC</a:t>
+              <a:t>HONDA HENDERSON</a:t>
             </a:r>
             <a:endParaRPr lang="en-US" sz="1200" dirty="0"/>
           </a:p>
@@ -25595,7 +25595,7 @@
         <p:spPr>
           <a:xfrm>
             <a:off x="2980944" y="3831024"/>
-            <a:ext cx="772073" cy="110352"/>
+            <a:ext cx="447286" cy="110352"/>
           </a:xfrm>
           <a:prstGeom prst="rect">
             <a:avLst/>
@@ -25639,7 +25639,7 @@
                 <a:ea typeface="Inter" pitchFamily="34" charset="-122"/>
                 <a:cs typeface="Inter" pitchFamily="34" charset="-120"/>
               </a:rPr>
-              <a:t>4,733</a:t>
+              <a:t>$1.50M</a:t>
             </a:r>
             <a:endParaRPr lang="en-US" sz="1200" dirty="0"/>
           </a:p>
@@ -25717,7 +25717,7 @@
                 <a:ea typeface="Inter" pitchFamily="34" charset="-122"/>
                 <a:cs typeface="Inter" pitchFamily="34" charset="-120"/>
               </a:rPr>
-              <a:t>KIA ST GEORGE</a:t>
+              <a:t>HONDA NORTH</a:t>
             </a:r>
             <a:endParaRPr lang="en-US" sz="1200" dirty="0"/>
           </a:p>
@@ -25732,7 +25732,7 @@
         <p:spPr>
           <a:xfrm>
             <a:off x="2980944" y="4070920"/>
-            <a:ext cx="625097" cy="110352"/>
+            <a:ext cx="326866" cy="110352"/>
           </a:xfrm>
           <a:prstGeom prst="rect">
             <a:avLst/>
@@ -25776,7 +25776,7 @@
                 <a:ea typeface="Inter" pitchFamily="34" charset="-122"/>
                 <a:cs typeface="Inter" pitchFamily="34" charset="-120"/>
               </a:rPr>
-              <a:t>3,832</a:t>
+              <a:t>$1.10M</a:t>
             </a:r>
             <a:endParaRPr lang="en-US" sz="1200" dirty="0"/>
           </a:p>
@@ -25854,7 +25854,7 @@
                 <a:ea typeface="Inter" pitchFamily="34" charset="-122"/>
                 <a:cs typeface="Inter" pitchFamily="34" charset="-120"/>
               </a:rPr>
-              <a:t>CDJR POST FALLS</a:t>
+              <a:t>KIA ST GEORGE</a:t>
             </a:r>
             <a:endParaRPr lang="en-US" sz="1200" dirty="0"/>
           </a:p>
@@ -25869,7 +25869,7 @@
         <p:spPr>
           <a:xfrm>
             <a:off x="2980944" y="4310815"/>
-            <a:ext cx="616778" cy="110352"/>
+            <a:ext cx="311228" cy="110352"/>
           </a:xfrm>
           <a:prstGeom prst="rect">
             <a:avLst/>
@@ -25913,7 +25913,7 @@
                 <a:ea typeface="Inter" pitchFamily="34" charset="-122"/>
                 <a:cs typeface="Inter" pitchFamily="34" charset="-120"/>
               </a:rPr>
-              <a:t>3,781</a:t>
+              <a:t>$1.04M</a:t>
             </a:r>
             <a:endParaRPr lang="en-US" sz="1200" dirty="0"/>
           </a:p>
@@ -26006,7 +26006,7 @@
         <p:spPr>
           <a:xfrm>
             <a:off x="2980944" y="4550711"/>
-            <a:ext cx="596224" cy="110352"/>
+            <a:ext cx="305091" cy="110352"/>
           </a:xfrm>
           <a:prstGeom prst="rect">
             <a:avLst/>
@@ -26050,7 +26050,7 @@
                 <a:ea typeface="Inter" pitchFamily="34" charset="-122"/>
                 <a:cs typeface="Inter" pitchFamily="34" charset="-120"/>
               </a:rPr>
-              <a:t>3,655</a:t>
+              <a:t>$1.02M</a:t>
             </a:r>
             <a:endParaRPr lang="en-US" sz="1200" dirty="0"/>
           </a:p>
@@ -26143,7 +26143,7 @@
         <p:spPr>
           <a:xfrm>
             <a:off x="2980944" y="4790606"/>
-            <a:ext cx="595571" cy="110352"/>
+            <a:ext cx="301867" cy="110352"/>
           </a:xfrm>
           <a:prstGeom prst="rect">
             <a:avLst/>
@@ -26187,7 +26187,7 @@
                 <a:ea typeface="Inter" pitchFamily="34" charset="-122"/>
                 <a:cs typeface="Inter" pitchFamily="34" charset="-120"/>
               </a:rPr>
-              <a:t>3,651</a:t>
+              <a:t>$1.01M</a:t>
             </a:r>
             <a:endParaRPr lang="en-US" sz="1200" dirty="0"/>
           </a:p>
@@ -26265,7 +26265,7 @@
                 <a:ea typeface="Inter" pitchFamily="34" charset="-122"/>
                 <a:cs typeface="Inter" pitchFamily="34" charset="-120"/>
               </a:rPr>
-              <a:t>SUBARU PRESCOTT</a:t>
+              <a:t>AUDI RENO</a:t>
             </a:r>
             <a:endParaRPr lang="en-US" sz="1200" dirty="0"/>
           </a:p>
@@ -26280,7 +26280,7 @@
         <p:spPr>
           <a:xfrm>
             <a:off x="2980944" y="5030502"/>
-            <a:ext cx="552180" cy="110352"/>
+            <a:ext cx="298327" cy="110352"/>
           </a:xfrm>
           <a:prstGeom prst="rect">
             <a:avLst/>
@@ -26324,7 +26324,7 @@
                 <a:ea typeface="Inter" pitchFamily="34" charset="-122"/>
                 <a:cs typeface="Inter" pitchFamily="34" charset="-120"/>
               </a:rPr>
-              <a:t>3,385</a:t>
+              <a:t>$1.00M</a:t>
             </a:r>
             <a:endParaRPr lang="en-US" sz="1200" dirty="0"/>
           </a:p>
@@ -26402,7 +26402,7 @@
                 <a:ea typeface="Inter" pitchFamily="34" charset="-122"/>
                 <a:cs typeface="Inter" pitchFamily="34" charset="-120"/>
               </a:rPr>
-              <a:t>SUBARU ST GEORGE</a:t>
+              <a:t>TOYOTA SPOKANE</a:t>
             </a:r>
             <a:endParaRPr lang="en-US" sz="1200" dirty="0"/>
           </a:p>
@@ -26417,7 +26417,7 @@
         <p:spPr>
           <a:xfrm>
             <a:off x="2980944" y="5270397"/>
-            <a:ext cx="530647" cy="110352"/>
+            <a:ext cx="286844" cy="110352"/>
           </a:xfrm>
           <a:prstGeom prst="rect">
             <a:avLst/>
@@ -26461,7 +26461,7 @@
                 <a:ea typeface="Inter" pitchFamily="34" charset="-122"/>
                 <a:cs typeface="Inter" pitchFamily="34" charset="-120"/>
               </a:rPr>
-              <a:t>3,253</a:t>
+              <a:t>$962,206</a:t>
             </a:r>
             <a:endParaRPr lang="en-US" sz="1200" dirty="0"/>
           </a:p>
@@ -26539,7 +26539,7 @@
                 <a:ea typeface="Inter" pitchFamily="34" charset="-122"/>
                 <a:cs typeface="Inter" pitchFamily="34" charset="-120"/>
               </a:rPr>
-              <a:t>LINCOLN</a:t>
+              <a:t>LR HENDERSON</a:t>
             </a:r>
             <a:endParaRPr lang="en-US" sz="1200" dirty="0"/>
           </a:p>
@@ -26554,7 +26554,7 @@
         <p:spPr>
           <a:xfrm>
             <a:off x="2980944" y="5510293"/>
-            <a:ext cx="509930" cy="110352"/>
+            <a:ext cx="274516" cy="110352"/>
           </a:xfrm>
           <a:prstGeom prst="rect">
             <a:avLst/>
@@ -26598,7 +26598,7 @@
                 <a:ea typeface="Inter" pitchFamily="34" charset="-122"/>
                 <a:cs typeface="Inter" pitchFamily="34" charset="-120"/>
               </a:rPr>
-              <a:t>3,126</a:t>
+              <a:t>$920,852</a:t>
             </a:r>
             <a:endParaRPr lang="en-US" sz="1200" dirty="0"/>
           </a:p>
@@ -26676,7 +26676,7 @@
                 <a:ea typeface="Inter" pitchFamily="34" charset="-122"/>
                 <a:cs typeface="Inter" pitchFamily="34" charset="-120"/>
               </a:rPr>
-              <a:t>TOYOTA SPOKANE</a:t>
+              <a:t>VOLVO</a:t>
             </a:r>
             <a:endParaRPr lang="en-US" sz="1200" dirty="0"/>
           </a:p>
@@ -26691,7 +26691,7 @@
         <p:spPr>
           <a:xfrm>
             <a:off x="2980944" y="5750188"/>
-            <a:ext cx="500632" cy="110352"/>
+            <a:ext cx="268967" cy="110352"/>
           </a:xfrm>
           <a:prstGeom prst="rect">
             <a:avLst/>
@@ -26735,7 +26735,7 @@
                 <a:ea typeface="Inter" pitchFamily="34" charset="-122"/>
                 <a:cs typeface="Inter" pitchFamily="34" charset="-120"/>
               </a:rPr>
-              <a:t>3,069</a:t>
+              <a:t>$902,240</a:t>
             </a:r>
             <a:endParaRPr lang="en-US" sz="1200" dirty="0"/>
           </a:p>
@@ -26813,7 +26813,7 @@
                 <a:ea typeface="Inter" pitchFamily="34" charset="-122"/>
                 <a:cs typeface="Inter" pitchFamily="34" charset="-120"/>
               </a:rPr>
-              <a:t>HYUNDAI PRESCOTT</a:t>
+              <a:t>SUBARU ST GEORGE</a:t>
             </a:r>
             <a:endParaRPr lang="en-US" sz="1200" dirty="0"/>
           </a:p>
@@ -26828,7 +26828,7 @@
         <p:spPr>
           <a:xfrm>
             <a:off x="8531352" y="1911860"/>
-            <a:ext cx="457078" cy="110352"/>
+            <a:ext cx="260447" cy="110352"/>
           </a:xfrm>
           <a:prstGeom prst="rect">
             <a:avLst/>
@@ -26872,7 +26872,7 @@
                 <a:ea typeface="Inter" pitchFamily="34" charset="-122"/>
                 <a:cs typeface="Inter" pitchFamily="34" charset="-120"/>
               </a:rPr>
-              <a:t>2,802</a:t>
+              <a:t>$873,658</a:t>
             </a:r>
             <a:endParaRPr lang="en-US" sz="1200" dirty="0"/>
           </a:p>
@@ -26950,7 +26950,7 @@
                 <a:ea typeface="Inter" pitchFamily="34" charset="-122"/>
                 <a:cs typeface="Inter" pitchFamily="34" charset="-120"/>
               </a:rPr>
-              <a:t>LR LV</a:t>
+              <a:t>CHEVY GMC BULLHEAD</a:t>
             </a:r>
             <a:endParaRPr lang="en-US" sz="1200" dirty="0"/>
           </a:p>
@@ -26965,7 +26965,7 @@
         <p:spPr>
           <a:xfrm>
             <a:off x="8531352" y="2151755"/>
-            <a:ext cx="444517" cy="110352"/>
+            <a:ext cx="257699" cy="110352"/>
           </a:xfrm>
           <a:prstGeom prst="rect">
             <a:avLst/>
@@ -27009,7 +27009,7 @@
                 <a:ea typeface="Inter" pitchFamily="34" charset="-122"/>
                 <a:cs typeface="Inter" pitchFamily="34" charset="-120"/>
               </a:rPr>
-              <a:t>2,725</a:t>
+              <a:t>$864,440</a:t>
             </a:r>
             <a:endParaRPr lang="en-US" sz="1200" dirty="0"/>
           </a:p>
@@ -27087,7 +27087,7 @@
                 <a:ea typeface="Inter" pitchFamily="34" charset="-122"/>
                 <a:cs typeface="Inter" pitchFamily="34" charset="-120"/>
               </a:rPr>
-              <a:t>AUDI RENO</a:t>
+              <a:t>LINCOLN</a:t>
             </a:r>
             <a:endParaRPr lang="en-US" sz="1200" dirty="0"/>
           </a:p>
@@ -27102,7 +27102,7 @@
         <p:spPr>
           <a:xfrm>
             <a:off x="8531352" y="2391651"/>
-            <a:ext cx="408466" cy="110352"/>
+            <a:ext cx="249576" cy="110352"/>
           </a:xfrm>
           <a:prstGeom prst="rect">
             <a:avLst/>
@@ -27146,7 +27146,7 @@
                 <a:ea typeface="Inter" pitchFamily="34" charset="-122"/>
                 <a:cs typeface="Inter" pitchFamily="34" charset="-120"/>
               </a:rPr>
-              <a:t>2,504</a:t>
+              <a:t>$837,192</a:t>
             </a:r>
             <a:endParaRPr lang="en-US" sz="1200" dirty="0"/>
           </a:p>
@@ -27224,7 +27224,7 @@
                 <a:ea typeface="Inter" pitchFamily="34" charset="-122"/>
                 <a:cs typeface="Inter" pitchFamily="34" charset="-120"/>
               </a:rPr>
-              <a:t>CHEVY GMC BULLHEAD</a:t>
+              <a:t>TOYOTA PRESCOTT</a:t>
             </a:r>
             <a:endParaRPr lang="en-US" sz="1200" dirty="0"/>
           </a:p>
@@ -27239,7 +27239,7 @@
         <p:spPr>
           <a:xfrm>
             <a:off x="8531352" y="2631546"/>
-            <a:ext cx="399331" cy="110352"/>
+            <a:ext cx="242561" cy="110352"/>
           </a:xfrm>
           <a:prstGeom prst="rect">
             <a:avLst/>
@@ -27283,7 +27283,7 @@
                 <a:ea typeface="Inter" pitchFamily="34" charset="-122"/>
                 <a:cs typeface="Inter" pitchFamily="34" charset="-120"/>
               </a:rPr>
-              <a:t>2,448</a:t>
+              <a:t>$813,660</a:t>
             </a:r>
             <a:endParaRPr lang="en-US" sz="1200" dirty="0"/>
           </a:p>
@@ -27361,7 +27361,7 @@
                 <a:ea typeface="Inter" pitchFamily="34" charset="-122"/>
                 <a:cs typeface="Inter" pitchFamily="34" charset="-120"/>
               </a:rPr>
-              <a:t>VOLVO</a:t>
+              <a:t>TOYOTA FLAGSTAFF</a:t>
             </a:r>
             <a:endParaRPr lang="en-US" sz="1200" dirty="0"/>
           </a:p>
@@ -27376,7 +27376,7 @@
         <p:spPr>
           <a:xfrm>
             <a:off x="8531352" y="2871442"/>
-            <a:ext cx="375026" cy="110352"/>
+            <a:ext cx="224764" cy="110352"/>
           </a:xfrm>
           <a:prstGeom prst="rect">
             <a:avLst/>
@@ -27420,7 +27420,7 @@
                 <a:ea typeface="Inter" pitchFamily="34" charset="-122"/>
                 <a:cs typeface="Inter" pitchFamily="34" charset="-120"/>
               </a:rPr>
-              <a:t>2,299</a:t>
+              <a:t>$753,963</a:t>
             </a:r>
             <a:endParaRPr lang="en-US" sz="1200" dirty="0"/>
           </a:p>
@@ -27498,7 +27498,7 @@
                 <a:ea typeface="Inter" pitchFamily="34" charset="-122"/>
                 <a:cs typeface="Inter" pitchFamily="34" charset="-120"/>
               </a:rPr>
-              <a:t>TOYOTA PRESCOTT</a:t>
+              <a:t>LEXUS</a:t>
             </a:r>
             <a:endParaRPr lang="en-US" sz="1200" dirty="0"/>
           </a:p>
@@ -27513,7 +27513,7 @@
         <p:spPr>
           <a:xfrm>
             <a:off x="8531352" y="3111337"/>
-            <a:ext cx="369153" cy="110352"/>
+            <a:ext cx="209887" cy="110352"/>
           </a:xfrm>
           <a:prstGeom prst="rect">
             <a:avLst/>
@@ -27557,7 +27557,7 @@
                 <a:ea typeface="Inter" pitchFamily="34" charset="-122"/>
                 <a:cs typeface="Inter" pitchFamily="34" charset="-120"/>
               </a:rPr>
-              <a:t>2,263</a:t>
+              <a:t>$704,059</a:t>
             </a:r>
             <a:endParaRPr lang="en-US" sz="1200" dirty="0"/>
           </a:p>
@@ -27635,7 +27635,7 @@
                 <a:ea typeface="Inter" pitchFamily="34" charset="-122"/>
                 <a:cs typeface="Inter" pitchFamily="34" charset="-120"/>
               </a:rPr>
-              <a:t>LEXUS</a:t>
+              <a:t>CDJR POST FALLS</a:t>
             </a:r>
             <a:endParaRPr lang="en-US" sz="1200" dirty="0"/>
           </a:p>
@@ -27650,7 +27650,7 @@
         <p:spPr>
           <a:xfrm>
             <a:off x="8531352" y="3351233"/>
-            <a:ext cx="328209" cy="110352"/>
+            <a:ext cx="197473" cy="110352"/>
           </a:xfrm>
           <a:prstGeom prst="rect">
             <a:avLst/>
@@ -27694,7 +27694,7 @@
                 <a:ea typeface="Inter" pitchFamily="34" charset="-122"/>
                 <a:cs typeface="Inter" pitchFamily="34" charset="-120"/>
               </a:rPr>
-              <a:t>2,012</a:t>
+              <a:t>$662,414</a:t>
             </a:r>
             <a:endParaRPr lang="en-US" sz="1200" dirty="0"/>
           </a:p>
@@ -27772,7 +27772,7 @@
                 <a:ea typeface="Inter" pitchFamily="34" charset="-122"/>
                 <a:cs typeface="Inter" pitchFamily="34" charset="-120"/>
               </a:rPr>
-              <a:t>HONDA SPOKANE</a:t>
+              <a:t>SUBARU PRESCOTT</a:t>
             </a:r>
             <a:endParaRPr lang="en-US" sz="1200" dirty="0"/>
           </a:p>
@@ -27787,7 +27787,7 @@
         <p:spPr>
           <a:xfrm>
             <a:off x="8531352" y="3591128"/>
-            <a:ext cx="325762" cy="110352"/>
+            <a:ext cx="172153" cy="110352"/>
           </a:xfrm>
           <a:prstGeom prst="rect">
             <a:avLst/>
@@ -27831,7 +27831,7 @@
                 <a:ea typeface="Inter" pitchFamily="34" charset="-122"/>
                 <a:cs typeface="Inter" pitchFamily="34" charset="-120"/>
               </a:rPr>
-              <a:t>1,997</a:t>
+              <a:t>$577,479</a:t>
             </a:r>
             <a:endParaRPr lang="en-US" sz="1200" dirty="0"/>
           </a:p>
@@ -27909,7 +27909,7 @@
                 <a:ea typeface="Inter" pitchFamily="34" charset="-122"/>
                 <a:cs typeface="Inter" pitchFamily="34" charset="-120"/>
               </a:rPr>
-              <a:t>TOYOTA FLAGSTAFF</a:t>
+              <a:t>ACURA</a:t>
             </a:r>
             <a:endParaRPr lang="en-US" sz="1200" dirty="0"/>
           </a:p>
@@ -27924,7 +27924,7 @@
         <p:spPr>
           <a:xfrm>
             <a:off x="8531352" y="3831024"/>
-            <a:ext cx="294768" cy="110352"/>
+            <a:ext cx="170825" cy="110352"/>
           </a:xfrm>
           <a:prstGeom prst="rect">
             <a:avLst/>
@@ -27968,7 +27968,7 @@
                 <a:ea typeface="Inter" pitchFamily="34" charset="-122"/>
                 <a:cs typeface="Inter" pitchFamily="34" charset="-120"/>
               </a:rPr>
-              <a:t>1,807</a:t>
+              <a:t>$573,025</a:t>
             </a:r>
             <a:endParaRPr lang="en-US" sz="1200" dirty="0"/>
           </a:p>
@@ -28046,7 +28046,7 @@
                 <a:ea typeface="Inter" pitchFamily="34" charset="-122"/>
                 <a:cs typeface="Inter" pitchFamily="34" charset="-120"/>
               </a:rPr>
-              <a:t>MAZDA</a:t>
+              <a:t>HYUNDAI PRESCOTT</a:t>
             </a:r>
             <a:endParaRPr lang="en-US" sz="1200" dirty="0"/>
           </a:p>
@@ -28061,7 +28061,7 @@
         <p:spPr>
           <a:xfrm>
             <a:off x="8531352" y="4070920"/>
-            <a:ext cx="246646" cy="110352"/>
+            <a:ext cx="170412" cy="110352"/>
           </a:xfrm>
           <a:prstGeom prst="rect">
             <a:avLst/>
@@ -28105,7 +28105,7 @@
                 <a:ea typeface="Inter" pitchFamily="34" charset="-122"/>
                 <a:cs typeface="Inter" pitchFamily="34" charset="-120"/>
               </a:rPr>
-              <a:t>1,512</a:t>
+              <a:t>$571,642</a:t>
             </a:r>
             <a:endParaRPr lang="en-US" sz="1200" dirty="0"/>
           </a:p>
@@ -28183,7 +28183,7 @@
                 <a:ea typeface="Inter" pitchFamily="34" charset="-122"/>
                 <a:cs typeface="Inter" pitchFamily="34" charset="-120"/>
               </a:rPr>
-              <a:t>LR HENDERSON</a:t>
+              <a:t>GMC PRESCOTT</a:t>
             </a:r>
             <a:endParaRPr lang="en-US" sz="1200" dirty="0"/>
           </a:p>
@@ -28198,7 +28198,7 @@
         <p:spPr>
           <a:xfrm>
             <a:off x="8531352" y="4310815"/>
-            <a:ext cx="235390" cy="110352"/>
+            <a:ext cx="152644" cy="110352"/>
           </a:xfrm>
           <a:prstGeom prst="rect">
             <a:avLst/>
@@ -28242,7 +28242,7 @@
                 <a:ea typeface="Inter" pitchFamily="34" charset="-122"/>
                 <a:cs typeface="Inter" pitchFamily="34" charset="-120"/>
               </a:rPr>
-              <a:t>1,443</a:t>
+              <a:t>$512,039</a:t>
             </a:r>
             <a:endParaRPr lang="en-US" sz="1200" dirty="0"/>
           </a:p>
@@ -28320,7 +28320,7 @@
                 <a:ea typeface="Inter" pitchFamily="34" charset="-122"/>
                 <a:cs typeface="Inter" pitchFamily="34" charset="-120"/>
               </a:rPr>
-              <a:t>ACURA</a:t>
+              <a:t>MAZDA</a:t>
             </a:r>
             <a:endParaRPr lang="en-US" sz="1200" dirty="0"/>
           </a:p>
@@ -28335,7 +28335,7 @@
         <p:spPr>
           <a:xfrm>
             <a:off x="8531352" y="4550711"/>
-            <a:ext cx="222666" cy="110352"/>
+            <a:ext cx="144143" cy="110352"/>
           </a:xfrm>
           <a:prstGeom prst="rect">
             <a:avLst/>
@@ -28379,7 +28379,7 @@
                 <a:ea typeface="Inter" pitchFamily="34" charset="-122"/>
                 <a:cs typeface="Inter" pitchFamily="34" charset="-120"/>
               </a:rPr>
-              <a:t>1,365</a:t>
+              <a:t>$483,524</a:t>
             </a:r>
             <a:endParaRPr lang="en-US" sz="1200" dirty="0"/>
           </a:p>
@@ -28457,7 +28457,7 @@
                 <a:ea typeface="Inter" pitchFamily="34" charset="-122"/>
                 <a:cs typeface="Inter" pitchFamily="34" charset="-120"/>
               </a:rPr>
-              <a:t>GMC PRESCOTT</a:t>
+              <a:t>HONDA SPOKANE</a:t>
             </a:r>
             <a:endParaRPr lang="en-US" sz="1200" dirty="0"/>
           </a:p>
@@ -28472,7 +28472,7 @@
         <p:spPr>
           <a:xfrm>
             <a:off x="8531352" y="4790606"/>
-            <a:ext cx="212389" cy="110352"/>
+            <a:ext cx="120127" cy="110352"/>
           </a:xfrm>
           <a:prstGeom prst="rect">
             <a:avLst/>
@@ -28516,7 +28516,7 @@
                 <a:ea typeface="Inter" pitchFamily="34" charset="-122"/>
                 <a:cs typeface="Inter" pitchFamily="34" charset="-120"/>
               </a:rPr>
-              <a:t>1,302</a:t>
+              <a:t>$402,960</a:t>
             </a:r>
             <a:endParaRPr lang="en-US" sz="1200" dirty="0"/>
           </a:p>
@@ -28594,7 +28594,7 @@
                 <a:ea typeface="Inter" pitchFamily="34" charset="-122"/>
                 <a:cs typeface="Inter" pitchFamily="34" charset="-120"/>
               </a:rPr>
-              <a:t>HONDA FLAGSTAFF</a:t>
+              <a:t>LR RENO</a:t>
             </a:r>
             <a:endParaRPr lang="en-US" sz="1200" dirty="0"/>
           </a:p>
@@ -28609,7 +28609,7 @@
         <p:spPr>
           <a:xfrm>
             <a:off x="8531352" y="5030502"/>
-            <a:ext cx="201460" cy="110352"/>
+            <a:ext cx="113234" cy="110352"/>
           </a:xfrm>
           <a:prstGeom prst="rect">
             <a:avLst/>
@@ -28653,7 +28653,7 @@
                 <a:ea typeface="Inter" pitchFamily="34" charset="-122"/>
                 <a:cs typeface="Inter" pitchFamily="34" charset="-120"/>
               </a:rPr>
-              <a:t>1,235</a:t>
+              <a:t>$379,838</a:t>
             </a:r>
             <a:endParaRPr lang="en-US" sz="1200" dirty="0"/>
           </a:p>
@@ -28746,7 +28746,7 @@
         <p:spPr>
           <a:xfrm>
             <a:off x="8531352" y="5270397"/>
-            <a:ext cx="185147" cy="110352"/>
+            <a:ext cx="65139" cy="110352"/>
           </a:xfrm>
           <a:prstGeom prst="rect">
             <a:avLst/>
@@ -28790,7 +28790,7 @@
                 <a:ea typeface="Inter" pitchFamily="34" charset="-122"/>
                 <a:cs typeface="Inter" pitchFamily="34" charset="-120"/>
               </a:rPr>
-              <a:t>1,135</a:t>
+              <a:t>$218,505</a:t>
             </a:r>
             <a:endParaRPr lang="en-US" sz="1200" dirty="0"/>
           </a:p>
@@ -28868,7 +28868,7 @@
                 <a:ea typeface="Inter" pitchFamily="34" charset="-122"/>
                 <a:cs typeface="Inter" pitchFamily="34" charset="-120"/>
               </a:rPr>
-              <a:t>LR RENO</a:t>
+              <a:t>HONDA FLAGSTAFF</a:t>
             </a:r>
             <a:endParaRPr lang="en-US" sz="1200" dirty="0"/>
           </a:p>
@@ -28883,7 +28883,7 @@
         <p:spPr>
           <a:xfrm>
             <a:off x="8531352" y="5510293"/>
-            <a:ext cx="166714" cy="110352"/>
+            <a:ext cx="40300" cy="110352"/>
           </a:xfrm>
           <a:prstGeom prst="rect">
             <a:avLst/>
@@ -28927,7 +28927,7 @@
                 <a:ea typeface="Inter" pitchFamily="34" charset="-122"/>
                 <a:cs typeface="Inter" pitchFamily="34" charset="-120"/>
               </a:rPr>
-              <a:t>1,022</a:t>
+              <a:t>$135,184</a:t>
             </a:r>
             <a:endParaRPr lang="en-US" sz="1200" dirty="0"/>
           </a:p>
@@ -29006,7 +29006,7 @@
                 <a:ea typeface="Inter" pitchFamily="34" charset="-122"/>
                 <a:cs typeface="Inter" pitchFamily="34" charset="-120"/>
               </a:rPr>
-              <a:t>Toyota Henderson leads at 11,211; LR Reno is smallest at 1,022.</a:t>
+              <a:t>Cadillac leads at $6.13M of the group's $47.07M; Honda Flagstaff is smallest at $135,184.</a:t>
             </a:r>
             <a:endParaRPr lang="en-US" sz="1600" dirty="0"/>
           </a:p>
@@ -29136,7 +29136,7 @@
                 <a:ea typeface="Inter" pitchFamily="34" charset="-122"/>
                 <a:cs typeface="Inter" pitchFamily="34" charset="-120"/>
               </a:rPr>
-              <a:t>Warranty RO Count</a:t>
+              <a:t>Warranty Gross Profit</a:t>
             </a:r>
             <a:endParaRPr lang="en-US" sz="2800" dirty="0"/>
           </a:p>
@@ -29235,7 +29235,7 @@
                 <a:ea typeface="Inter" pitchFamily="34" charset="-122"/>
                 <a:cs typeface="Inter" pitchFamily="34" charset="-120"/>
               </a:rPr>
-              <a:t>WARRANTY RO COUNT</a:t>
+              <a:t>WARRANTY GROSS</a:t>
             </a:r>
             <a:endParaRPr lang="en-US" sz="1500" dirty="0"/>
           </a:p>
@@ -29307,13 +29307,13 @@
             <a:r>
               <a:rPr lang="en-US" sz="2000" b="1" dirty="0">
                 <a:solidFill>
-                  <a:srgbClr val="A82B26"/>
-                </a:solidFill>
-                <a:latin typeface="Inter" pitchFamily="34" charset="0"/>
-                <a:ea typeface="Inter" pitchFamily="34" charset="-122"/>
-                <a:cs typeface="Inter" pitchFamily="34" charset="-120"/>
-              </a:rPr>
-              <a:t>−6.5%</a:t>
+                  <a:srgbClr val="0B7A4A"/>
+                </a:solidFill>
+                <a:latin typeface="Inter" pitchFamily="34" charset="0"/>
+                <a:ea typeface="Inter" pitchFamily="34" charset="-122"/>
+                <a:cs typeface="Inter" pitchFamily="34" charset="-120"/>
+              </a:rPr>
+              <a:t>+$2.29M  ·  +5.1%</a:t>
             </a:r>
             <a:endParaRPr lang="en-US" sz="2000" dirty="0"/>
           </a:p>
@@ -29327,8 +29327,164 @@
         </p:nvSpPr>
         <p:spPr>
           <a:xfrm>
-            <a:off x="658368" y="1847088"/>
-            <a:ext cx="310896" cy="239896"/>
+            <a:off x="4206240" y="1828800"/>
+            <a:ext cx="777240" cy="256032"/>
+          </a:xfrm>
+          <a:prstGeom prst="rect">
+            <a:avLst/>
+          </a:prstGeom>
+          <a:noFill/>
+          <a:ln/>
+        </p:spPr>
+        <p:txBody>
+          <a:bodyPr wrap="square" lIns="0" tIns="0" rIns="0" bIns="0" rtlCol="0" anchor="ctr"/>
+          <a:lstStyle/>
+          <a:p>
+            <a:pPr algn="r" indent="0" marL="0">
+              <a:buNone/>
+            </a:pPr>
+            <a:r>
+              <a:rPr lang="en-US" sz="1400" b="1" dirty="0">
+                <a:solidFill>
+                  <a:srgbClr val="595959"/>
+                </a:solidFill>
+                <a:latin typeface="Inter" pitchFamily="34" charset="0"/>
+                <a:ea typeface="Inter" pitchFamily="34" charset="-122"/>
+                <a:cs typeface="Inter" pitchFamily="34" charset="-120"/>
+              </a:rPr>
+              <a:t>$</a:t>
+            </a:r>
+            <a:endParaRPr lang="en-US" sz="1400" dirty="0"/>
+          </a:p>
+        </p:txBody>
+      </p:sp>
+      <p:sp>
+        <p:nvSpPr>
+          <p:cNvPr id="12" name="Text 10"/>
+          <p:cNvSpPr txBox="1"/>
+          <p:nvPr/>
+        </p:nvSpPr>
+        <p:spPr>
+          <a:xfrm>
+            <a:off x="4983480" y="1828800"/>
+            <a:ext cx="868680" cy="256032"/>
+          </a:xfrm>
+          <a:prstGeom prst="rect">
+            <a:avLst/>
+          </a:prstGeom>
+          <a:noFill/>
+          <a:ln/>
+        </p:spPr>
+        <p:txBody>
+          <a:bodyPr wrap="square" lIns="0" tIns="0" rIns="0" bIns="0" rtlCol="0" anchor="ctr"/>
+          <a:lstStyle/>
+          <a:p>
+            <a:pPr algn="r" indent="0" marL="0">
+              <a:buNone/>
+            </a:pPr>
+            <a:r>
+              <a:rPr lang="en-US" sz="1400" b="1" dirty="0">
+                <a:solidFill>
+                  <a:srgbClr val="595959"/>
+                </a:solidFill>
+                <a:latin typeface="Inter" pitchFamily="34" charset="0"/>
+                <a:ea typeface="Inter" pitchFamily="34" charset="-122"/>
+                <a:cs typeface="Inter" pitchFamily="34" charset="-120"/>
+              </a:rPr>
+              <a:t>Change</a:t>
+            </a:r>
+            <a:endParaRPr lang="en-US" sz="1400" dirty="0"/>
+          </a:p>
+        </p:txBody>
+      </p:sp>
+      <p:sp>
+        <p:nvSpPr>
+          <p:cNvPr id="13" name="Text 11"/>
+          <p:cNvSpPr txBox="1"/>
+          <p:nvPr/>
+        </p:nvSpPr>
+        <p:spPr>
+          <a:xfrm>
+            <a:off x="9756648" y="1828800"/>
+            <a:ext cx="777240" cy="256032"/>
+          </a:xfrm>
+          <a:prstGeom prst="rect">
+            <a:avLst/>
+          </a:prstGeom>
+          <a:noFill/>
+          <a:ln/>
+        </p:spPr>
+        <p:txBody>
+          <a:bodyPr wrap="square" lIns="0" tIns="0" rIns="0" bIns="0" rtlCol="0" anchor="ctr"/>
+          <a:lstStyle/>
+          <a:p>
+            <a:pPr algn="r" indent="0" marL="0">
+              <a:buNone/>
+            </a:pPr>
+            <a:r>
+              <a:rPr lang="en-US" sz="1400" b="1" dirty="0">
+                <a:solidFill>
+                  <a:srgbClr val="595959"/>
+                </a:solidFill>
+                <a:latin typeface="Inter" pitchFamily="34" charset="0"/>
+                <a:ea typeface="Inter" pitchFamily="34" charset="-122"/>
+                <a:cs typeface="Inter" pitchFamily="34" charset="-120"/>
+              </a:rPr>
+              <a:t>$</a:t>
+            </a:r>
+            <a:endParaRPr lang="en-US" sz="1400" dirty="0"/>
+          </a:p>
+        </p:txBody>
+      </p:sp>
+      <p:sp>
+        <p:nvSpPr>
+          <p:cNvPr id="14" name="Text 12"/>
+          <p:cNvSpPr txBox="1"/>
+          <p:nvPr/>
+        </p:nvSpPr>
+        <p:spPr>
+          <a:xfrm>
+            <a:off x="10533888" y="1828800"/>
+            <a:ext cx="868680" cy="256032"/>
+          </a:xfrm>
+          <a:prstGeom prst="rect">
+            <a:avLst/>
+          </a:prstGeom>
+          <a:noFill/>
+          <a:ln/>
+        </p:spPr>
+        <p:txBody>
+          <a:bodyPr wrap="square" lIns="0" tIns="0" rIns="0" bIns="0" rtlCol="0" anchor="ctr"/>
+          <a:lstStyle/>
+          <a:p>
+            <a:pPr algn="r" indent="0" marL="0">
+              <a:buNone/>
+            </a:pPr>
+            <a:r>
+              <a:rPr lang="en-US" sz="1400" b="1" dirty="0">
+                <a:solidFill>
+                  <a:srgbClr val="595959"/>
+                </a:solidFill>
+                <a:latin typeface="Inter" pitchFamily="34" charset="0"/>
+                <a:ea typeface="Inter" pitchFamily="34" charset="-122"/>
+                <a:cs typeface="Inter" pitchFamily="34" charset="-120"/>
+              </a:rPr>
+              <a:t>Change</a:t>
+            </a:r>
+            <a:endParaRPr lang="en-US" sz="1400" dirty="0"/>
+          </a:p>
+        </p:txBody>
+      </p:sp>
+      <p:sp>
+        <p:nvSpPr>
+          <p:cNvPr id="15" name="Text 13"/>
+          <p:cNvSpPr txBox="1"/>
+          <p:nvPr/>
+        </p:nvSpPr>
+        <p:spPr>
+          <a:xfrm>
+            <a:off x="658368" y="2121408"/>
+            <a:ext cx="310896" cy="223759"/>
           </a:xfrm>
           <a:prstGeom prst="rect">
             <a:avLst/>
@@ -29360,14 +29516,14 @@
       </p:sp>
       <p:sp>
         <p:nvSpPr>
-          <p:cNvPr id="12" name="Text 10"/>
-          <p:cNvSpPr txBox="1"/>
-          <p:nvPr/>
-        </p:nvSpPr>
-        <p:spPr>
-          <a:xfrm>
-            <a:off x="1014984" y="1847088"/>
-            <a:ext cx="1920240" cy="239896"/>
+          <p:cNvPr id="16" name="Text 14"/>
+          <p:cNvSpPr txBox="1"/>
+          <p:nvPr/>
+        </p:nvSpPr>
+        <p:spPr>
+          <a:xfrm>
+            <a:off x="1014984" y="2121408"/>
+            <a:ext cx="1920240" cy="223759"/>
           </a:xfrm>
           <a:prstGeom prst="rect">
             <a:avLst/>
@@ -29391,22 +29547,22 @@
                 <a:ea typeface="Inter" pitchFamily="34" charset="-122"/>
                 <a:cs typeface="Inter" pitchFamily="34" charset="-120"/>
               </a:rPr>
-              <a:t>HYUNDAI PRESCOTT</a:t>
-            </a:r>
-            <a:endParaRPr lang="en-US" sz="1200" dirty="0"/>
-          </a:p>
-        </p:txBody>
-      </p:sp>
-      <p:sp>
-        <p:nvSpPr>
-          <p:cNvPr id="13" name="Shape 11"/>
+              <a:t>CADILLAC</a:t>
+            </a:r>
+            <a:endParaRPr lang="en-US" sz="1200" dirty="0"/>
+          </a:p>
+        </p:txBody>
+      </p:sp>
+      <p:sp>
+        <p:nvSpPr>
+          <p:cNvPr id="17" name="Shape 15"/>
           <p:cNvSpPr/>
           <p:nvPr/>
         </p:nvSpPr>
         <p:spPr>
           <a:xfrm>
-            <a:off x="3785616" y="1911860"/>
-            <a:ext cx="777240" cy="110352"/>
+            <a:off x="3579876" y="2181823"/>
+            <a:ext cx="571500" cy="102929"/>
           </a:xfrm>
           <a:prstGeom prst="rect">
             <a:avLst/>
@@ -29419,14 +29575,14 @@
       </p:sp>
       <p:sp>
         <p:nvSpPr>
-          <p:cNvPr id="14" name="Text 12"/>
-          <p:cNvSpPr txBox="1"/>
-          <p:nvPr/>
-        </p:nvSpPr>
-        <p:spPr>
-          <a:xfrm>
-            <a:off x="4617720" y="1847088"/>
-            <a:ext cx="1234440" cy="239896"/>
+          <p:cNvPr id="18" name="Text 16"/>
+          <p:cNvSpPr txBox="1"/>
+          <p:nvPr/>
+        </p:nvSpPr>
+        <p:spPr>
+          <a:xfrm>
+            <a:off x="4206240" y="2121408"/>
+            <a:ext cx="777240" cy="223759"/>
           </a:xfrm>
           <a:prstGeom prst="rect">
             <a:avLst/>
@@ -29450,100 +29606,61 @@
                 <a:ea typeface="Inter" pitchFamily="34" charset="-122"/>
                 <a:cs typeface="Inter" pitchFamily="34" charset="-120"/>
               </a:rPr>
-              <a:t>+47.9%</a:t>
-            </a:r>
-            <a:endParaRPr lang="en-US" sz="1200" dirty="0"/>
-          </a:p>
-        </p:txBody>
-      </p:sp>
-      <p:sp>
-        <p:nvSpPr>
-          <p:cNvPr id="15" name="Text 13"/>
-          <p:cNvSpPr txBox="1"/>
-          <p:nvPr/>
-        </p:nvSpPr>
-        <p:spPr>
-          <a:xfrm>
-            <a:off x="658368" y="2086984"/>
-            <a:ext cx="310896" cy="239896"/>
-          </a:xfrm>
-          <a:prstGeom prst="rect">
-            <a:avLst/>
-          </a:prstGeom>
-          <a:noFill/>
-          <a:ln/>
-        </p:spPr>
-        <p:txBody>
-          <a:bodyPr wrap="square" lIns="0" tIns="0" rIns="0" bIns="0" rtlCol="0" anchor="ctr"/>
-          <a:lstStyle/>
-          <a:p>
-            <a:pPr algn="r" indent="0" marL="0">
-              <a:buNone/>
-            </a:pPr>
-            <a:r>
-              <a:rPr lang="en-US" sz="1200" dirty="0">
-                <a:solidFill>
-                  <a:srgbClr val="9AA3AD"/>
-                </a:solidFill>
-                <a:latin typeface="Inter" pitchFamily="34" charset="0"/>
-                <a:ea typeface="Inter" pitchFamily="34" charset="-122"/>
-                <a:cs typeface="Inter" pitchFamily="34" charset="-120"/>
-              </a:rPr>
-              <a:t>2</a:t>
-            </a:r>
-            <a:endParaRPr lang="en-US" sz="1200" dirty="0"/>
-          </a:p>
-        </p:txBody>
-      </p:sp>
-      <p:sp>
-        <p:nvSpPr>
-          <p:cNvPr id="16" name="Text 14"/>
-          <p:cNvSpPr txBox="1"/>
-          <p:nvPr/>
-        </p:nvSpPr>
-        <p:spPr>
-          <a:xfrm>
-            <a:off x="1014984" y="2086984"/>
-            <a:ext cx="1920240" cy="239896"/>
-          </a:xfrm>
-          <a:prstGeom prst="rect">
-            <a:avLst/>
-          </a:prstGeom>
-          <a:noFill/>
-          <a:ln/>
-        </p:spPr>
-        <p:txBody>
-          <a:bodyPr wrap="square" lIns="0" tIns="0" rIns="0" bIns="0" rtlCol="0" anchor="ctr"/>
-          <a:lstStyle/>
-          <a:p>
-            <a:pPr indent="0" marL="0">
-              <a:buNone/>
-            </a:pPr>
-            <a:r>
-              <a:rPr lang="en-US" sz="1200" dirty="0">
-                <a:solidFill>
-                  <a:srgbClr val="1A1A1A"/>
-                </a:solidFill>
-                <a:latin typeface="Inter" pitchFamily="34" charset="0"/>
-                <a:ea typeface="Inter" pitchFamily="34" charset="-122"/>
-                <a:cs typeface="Inter" pitchFamily="34" charset="-120"/>
-              </a:rPr>
-              <a:t>LEXUS</a:t>
-            </a:r>
-            <a:endParaRPr lang="en-US" sz="1200" dirty="0"/>
-          </a:p>
-        </p:txBody>
-      </p:sp>
-      <p:sp>
-        <p:nvSpPr>
-          <p:cNvPr id="17" name="Shape 15"/>
+              <a:t>+$2.03M</a:t>
+            </a:r>
+            <a:endParaRPr lang="en-US" sz="1200" dirty="0"/>
+          </a:p>
+        </p:txBody>
+      </p:sp>
+      <p:sp>
+        <p:nvSpPr>
+          <p:cNvPr id="19" name="Text 17"/>
+          <p:cNvSpPr txBox="1"/>
+          <p:nvPr/>
+        </p:nvSpPr>
+        <p:spPr>
+          <a:xfrm>
+            <a:off x="4983480" y="2121408"/>
+            <a:ext cx="868680" cy="223759"/>
+          </a:xfrm>
+          <a:prstGeom prst="rect">
+            <a:avLst/>
+          </a:prstGeom>
+          <a:noFill/>
+          <a:ln/>
+        </p:spPr>
+        <p:txBody>
+          <a:bodyPr wrap="square" lIns="0" tIns="0" rIns="0" bIns="0" rtlCol="0" anchor="ctr"/>
+          <a:lstStyle/>
+          <a:p>
+            <a:pPr algn="r" indent="0" marL="0">
+              <a:buNone/>
+            </a:pPr>
+            <a:r>
+              <a:rPr lang="en-US" sz="1200" dirty="0">
+                <a:solidFill>
+                  <a:srgbClr val="0B7A4A"/>
+                </a:solidFill>
+                <a:latin typeface="Inter" pitchFamily="34" charset="0"/>
+                <a:ea typeface="Inter" pitchFamily="34" charset="-122"/>
+                <a:cs typeface="Inter" pitchFamily="34" charset="-120"/>
+              </a:rPr>
+              <a:t>+49.5%</a:t>
+            </a:r>
+            <a:endParaRPr lang="en-US" sz="1200" dirty="0"/>
+          </a:p>
+        </p:txBody>
+      </p:sp>
+      <p:sp>
+        <p:nvSpPr>
+          <p:cNvPr id="20" name="Shape 18"/>
           <p:cNvSpPr/>
           <p:nvPr/>
         </p:nvSpPr>
         <p:spPr>
           <a:xfrm>
-            <a:off x="3785616" y="2151755"/>
-            <a:ext cx="776748" cy="110352"/>
+            <a:off x="5907024" y="2167128"/>
+            <a:ext cx="54864" cy="132319"/>
           </a:xfrm>
           <a:prstGeom prst="rect">
             <a:avLst/>
@@ -29556,53 +29673,14 @@
       </p:sp>
       <p:sp>
         <p:nvSpPr>
-          <p:cNvPr id="18" name="Text 16"/>
-          <p:cNvSpPr txBox="1"/>
-          <p:nvPr/>
-        </p:nvSpPr>
-        <p:spPr>
-          <a:xfrm>
-            <a:off x="4617720" y="2086984"/>
-            <a:ext cx="1234440" cy="239896"/>
-          </a:xfrm>
-          <a:prstGeom prst="rect">
-            <a:avLst/>
-          </a:prstGeom>
-          <a:noFill/>
-          <a:ln/>
-        </p:spPr>
-        <p:txBody>
-          <a:bodyPr wrap="square" lIns="0" tIns="0" rIns="0" bIns="0" rtlCol="0" anchor="ctr"/>
-          <a:lstStyle/>
-          <a:p>
-            <a:pPr algn="r" indent="0" marL="0">
-              <a:buNone/>
-            </a:pPr>
-            <a:r>
-              <a:rPr lang="en-US" sz="1200" b="1" dirty="0">
-                <a:solidFill>
-                  <a:srgbClr val="0B7A4A"/>
-                </a:solidFill>
-                <a:latin typeface="Inter" pitchFamily="34" charset="0"/>
-                <a:ea typeface="Inter" pitchFamily="34" charset="-122"/>
-                <a:cs typeface="Inter" pitchFamily="34" charset="-120"/>
-              </a:rPr>
-              <a:t>+47.8%</a:t>
-            </a:r>
-            <a:endParaRPr lang="en-US" sz="1200" dirty="0"/>
-          </a:p>
-        </p:txBody>
-      </p:sp>
-      <p:sp>
-        <p:nvSpPr>
-          <p:cNvPr id="19" name="Text 17"/>
-          <p:cNvSpPr txBox="1"/>
-          <p:nvPr/>
-        </p:nvSpPr>
-        <p:spPr>
-          <a:xfrm>
-            <a:off x="658368" y="2326879"/>
-            <a:ext cx="310896" cy="239896"/>
+          <p:cNvPr id="21" name="Text 19"/>
+          <p:cNvSpPr txBox="1"/>
+          <p:nvPr/>
+        </p:nvSpPr>
+        <p:spPr>
+          <a:xfrm>
+            <a:off x="658368" y="2345167"/>
+            <a:ext cx="310896" cy="223759"/>
           </a:xfrm>
           <a:prstGeom prst="rect">
             <a:avLst/>
@@ -29626,22 +29704,22 @@
                 <a:ea typeface="Inter" pitchFamily="34" charset="-122"/>
                 <a:cs typeface="Inter" pitchFamily="34" charset="-120"/>
               </a:rPr>
-              <a:t>3</a:t>
-            </a:r>
-            <a:endParaRPr lang="en-US" sz="1200" dirty="0"/>
-          </a:p>
-        </p:txBody>
-      </p:sp>
-      <p:sp>
-        <p:nvSpPr>
-          <p:cNvPr id="20" name="Text 18"/>
-          <p:cNvSpPr txBox="1"/>
-          <p:nvPr/>
-        </p:nvSpPr>
-        <p:spPr>
-          <a:xfrm>
-            <a:off x="1014984" y="2326879"/>
-            <a:ext cx="1920240" cy="239896"/>
+              <a:t>2</a:t>
+            </a:r>
+            <a:endParaRPr lang="en-US" sz="1200" dirty="0"/>
+          </a:p>
+        </p:txBody>
+      </p:sp>
+      <p:sp>
+        <p:nvSpPr>
+          <p:cNvPr id="22" name="Text 20"/>
+          <p:cNvSpPr txBox="1"/>
+          <p:nvPr/>
+        </p:nvSpPr>
+        <p:spPr>
+          <a:xfrm>
+            <a:off x="1014984" y="2345167"/>
+            <a:ext cx="1920240" cy="223759"/>
           </a:xfrm>
           <a:prstGeom prst="rect">
             <a:avLst/>
@@ -29665,22 +29743,22 @@
                 <a:ea typeface="Inter" pitchFamily="34" charset="-122"/>
                 <a:cs typeface="Inter" pitchFamily="34" charset="-120"/>
               </a:rPr>
-              <a:t>HYUNDAI ST GEORGE</a:t>
-            </a:r>
-            <a:endParaRPr lang="en-US" sz="1200" dirty="0"/>
-          </a:p>
-        </p:txBody>
-      </p:sp>
-      <p:sp>
-        <p:nvSpPr>
-          <p:cNvPr id="21" name="Shape 19"/>
+              <a:t>AUDI HENDERSON</a:t>
+            </a:r>
+            <a:endParaRPr lang="en-US" sz="1200" dirty="0"/>
+          </a:p>
+        </p:txBody>
+      </p:sp>
+      <p:sp>
+        <p:nvSpPr>
+          <p:cNvPr id="23" name="Shape 21"/>
           <p:cNvSpPr/>
           <p:nvPr/>
         </p:nvSpPr>
         <p:spPr>
           <a:xfrm>
-            <a:off x="3785616" y="2391651"/>
-            <a:ext cx="767456" cy="110352"/>
+            <a:off x="3579876" y="2405582"/>
+            <a:ext cx="277267" cy="102929"/>
           </a:xfrm>
           <a:prstGeom prst="rect">
             <a:avLst/>
@@ -29693,14 +29771,14 @@
       </p:sp>
       <p:sp>
         <p:nvSpPr>
-          <p:cNvPr id="22" name="Text 20"/>
-          <p:cNvSpPr txBox="1"/>
-          <p:nvPr/>
-        </p:nvSpPr>
-        <p:spPr>
-          <a:xfrm>
-            <a:off x="4617720" y="2326879"/>
-            <a:ext cx="1234440" cy="239896"/>
+          <p:cNvPr id="24" name="Text 22"/>
+          <p:cNvSpPr txBox="1"/>
+          <p:nvPr/>
+        </p:nvSpPr>
+        <p:spPr>
+          <a:xfrm>
+            <a:off x="4206240" y="2345167"/>
+            <a:ext cx="777240" cy="223759"/>
           </a:xfrm>
           <a:prstGeom prst="rect">
             <a:avLst/>
@@ -29724,100 +29802,61 @@
                 <a:ea typeface="Inter" pitchFamily="34" charset="-122"/>
                 <a:cs typeface="Inter" pitchFamily="34" charset="-120"/>
               </a:rPr>
-              <a:t>+47.3%</a:t>
-            </a:r>
-            <a:endParaRPr lang="en-US" sz="1200" dirty="0"/>
-          </a:p>
-        </p:txBody>
-      </p:sp>
-      <p:sp>
-        <p:nvSpPr>
-          <p:cNvPr id="23" name="Text 21"/>
-          <p:cNvSpPr txBox="1"/>
-          <p:nvPr/>
-        </p:nvSpPr>
-        <p:spPr>
-          <a:xfrm>
-            <a:off x="658368" y="2566775"/>
-            <a:ext cx="310896" cy="239896"/>
-          </a:xfrm>
-          <a:prstGeom prst="rect">
-            <a:avLst/>
-          </a:prstGeom>
-          <a:noFill/>
-          <a:ln/>
-        </p:spPr>
-        <p:txBody>
-          <a:bodyPr wrap="square" lIns="0" tIns="0" rIns="0" bIns="0" rtlCol="0" anchor="ctr"/>
-          <a:lstStyle/>
-          <a:p>
-            <a:pPr algn="r" indent="0" marL="0">
-              <a:buNone/>
-            </a:pPr>
-            <a:r>
-              <a:rPr lang="en-US" sz="1200" dirty="0">
-                <a:solidFill>
-                  <a:srgbClr val="9AA3AD"/>
-                </a:solidFill>
-                <a:latin typeface="Inter" pitchFamily="34" charset="0"/>
-                <a:ea typeface="Inter" pitchFamily="34" charset="-122"/>
-                <a:cs typeface="Inter" pitchFamily="34" charset="-120"/>
-              </a:rPr>
-              <a:t>4</a:t>
-            </a:r>
-            <a:endParaRPr lang="en-US" sz="1200" dirty="0"/>
-          </a:p>
-        </p:txBody>
-      </p:sp>
-      <p:sp>
-        <p:nvSpPr>
-          <p:cNvPr id="24" name="Text 22"/>
-          <p:cNvSpPr txBox="1"/>
-          <p:nvPr/>
-        </p:nvSpPr>
-        <p:spPr>
-          <a:xfrm>
-            <a:off x="1014984" y="2566775"/>
-            <a:ext cx="1920240" cy="239896"/>
-          </a:xfrm>
-          <a:prstGeom prst="rect">
-            <a:avLst/>
-          </a:prstGeom>
-          <a:noFill/>
-          <a:ln/>
-        </p:spPr>
-        <p:txBody>
-          <a:bodyPr wrap="square" lIns="0" tIns="0" rIns="0" bIns="0" rtlCol="0" anchor="ctr"/>
-          <a:lstStyle/>
-          <a:p>
-            <a:pPr indent="0" marL="0">
-              <a:buNone/>
-            </a:pPr>
-            <a:r>
-              <a:rPr lang="en-US" sz="1200" dirty="0">
-                <a:solidFill>
-                  <a:srgbClr val="1A1A1A"/>
-                </a:solidFill>
-                <a:latin typeface="Inter" pitchFamily="34" charset="0"/>
-                <a:ea typeface="Inter" pitchFamily="34" charset="-122"/>
-                <a:cs typeface="Inter" pitchFamily="34" charset="-120"/>
-              </a:rPr>
-              <a:t>TOYOTA PRESCOTT</a:t>
-            </a:r>
-            <a:endParaRPr lang="en-US" sz="1200" dirty="0"/>
-          </a:p>
-        </p:txBody>
-      </p:sp>
-      <p:sp>
-        <p:nvSpPr>
-          <p:cNvPr id="25" name="Shape 23"/>
+              <a:t>+$985K</a:t>
+            </a:r>
+            <a:endParaRPr lang="en-US" sz="1200" dirty="0"/>
+          </a:p>
+        </p:txBody>
+      </p:sp>
+      <p:sp>
+        <p:nvSpPr>
+          <p:cNvPr id="25" name="Text 23"/>
+          <p:cNvSpPr txBox="1"/>
+          <p:nvPr/>
+        </p:nvSpPr>
+        <p:spPr>
+          <a:xfrm>
+            <a:off x="4983480" y="2345167"/>
+            <a:ext cx="868680" cy="223759"/>
+          </a:xfrm>
+          <a:prstGeom prst="rect">
+            <a:avLst/>
+          </a:prstGeom>
+          <a:noFill/>
+          <a:ln/>
+        </p:spPr>
+        <p:txBody>
+          <a:bodyPr wrap="square" lIns="0" tIns="0" rIns="0" bIns="0" rtlCol="0" anchor="ctr"/>
+          <a:lstStyle/>
+          <a:p>
+            <a:pPr algn="r" indent="0" marL="0">
+              <a:buNone/>
+            </a:pPr>
+            <a:r>
+              <a:rPr lang="en-US" sz="1200" dirty="0">
+                <a:solidFill>
+                  <a:srgbClr val="0B7A4A"/>
+                </a:solidFill>
+                <a:latin typeface="Inter" pitchFamily="34" charset="0"/>
+                <a:ea typeface="Inter" pitchFamily="34" charset="-122"/>
+                <a:cs typeface="Inter" pitchFamily="34" charset="-120"/>
+              </a:rPr>
+              <a:t>+30.4%</a:t>
+            </a:r>
+            <a:endParaRPr lang="en-US" sz="1200" dirty="0"/>
+          </a:p>
+        </p:txBody>
+      </p:sp>
+      <p:sp>
+        <p:nvSpPr>
+          <p:cNvPr id="26" name="Shape 24"/>
           <p:cNvSpPr/>
           <p:nvPr/>
         </p:nvSpPr>
         <p:spPr>
           <a:xfrm>
-            <a:off x="3785616" y="2631546"/>
-            <a:ext cx="583236" cy="110352"/>
+            <a:off x="5907024" y="2390887"/>
+            <a:ext cx="54864" cy="132319"/>
           </a:xfrm>
           <a:prstGeom prst="rect">
             <a:avLst/>
@@ -29830,53 +29869,14 @@
       </p:sp>
       <p:sp>
         <p:nvSpPr>
-          <p:cNvPr id="26" name="Text 24"/>
-          <p:cNvSpPr txBox="1"/>
-          <p:nvPr/>
-        </p:nvSpPr>
-        <p:spPr>
-          <a:xfrm>
-            <a:off x="4617720" y="2566775"/>
-            <a:ext cx="1234440" cy="239896"/>
-          </a:xfrm>
-          <a:prstGeom prst="rect">
-            <a:avLst/>
-          </a:prstGeom>
-          <a:noFill/>
-          <a:ln/>
-        </p:spPr>
-        <p:txBody>
-          <a:bodyPr wrap="square" lIns="0" tIns="0" rIns="0" bIns="0" rtlCol="0" anchor="ctr"/>
-          <a:lstStyle/>
-          <a:p>
-            <a:pPr algn="r" indent="0" marL="0">
-              <a:buNone/>
-            </a:pPr>
-            <a:r>
-              <a:rPr lang="en-US" sz="1200" b="1" dirty="0">
-                <a:solidFill>
-                  <a:srgbClr val="0B7A4A"/>
-                </a:solidFill>
-                <a:latin typeface="Inter" pitchFamily="34" charset="0"/>
-                <a:ea typeface="Inter" pitchFamily="34" charset="-122"/>
-                <a:cs typeface="Inter" pitchFamily="34" charset="-120"/>
-              </a:rPr>
-              <a:t>+35.9%</a:t>
-            </a:r>
-            <a:endParaRPr lang="en-US" sz="1200" dirty="0"/>
-          </a:p>
-        </p:txBody>
-      </p:sp>
-      <p:sp>
-        <p:nvSpPr>
           <p:cNvPr id="27" name="Text 25"/>
           <p:cNvSpPr txBox="1"/>
           <p:nvPr/>
         </p:nvSpPr>
         <p:spPr>
           <a:xfrm>
-            <a:off x="658368" y="2806670"/>
-            <a:ext cx="310896" cy="239896"/>
+            <a:off x="658368" y="2568926"/>
+            <a:ext cx="310896" cy="223759"/>
           </a:xfrm>
           <a:prstGeom prst="rect">
             <a:avLst/>
@@ -29900,7 +29900,7 @@
                 <a:ea typeface="Inter" pitchFamily="34" charset="-122"/>
                 <a:cs typeface="Inter" pitchFamily="34" charset="-120"/>
               </a:rPr>
-              <a:t>5</a:t>
+              <a:t>3</a:t>
             </a:r>
             <a:endParaRPr lang="en-US" sz="1200" dirty="0"/>
           </a:p>
@@ -29914,8 +29914,8 @@
         </p:nvSpPr>
         <p:spPr>
           <a:xfrm>
-            <a:off x="1014984" y="2806670"/>
-            <a:ext cx="1920240" cy="239896"/>
+            <a:off x="1014984" y="2568926"/>
+            <a:ext cx="1920240" cy="223759"/>
           </a:xfrm>
           <a:prstGeom prst="rect">
             <a:avLst/>
@@ -29953,8 +29953,8 @@
         </p:nvSpPr>
         <p:spPr>
           <a:xfrm>
-            <a:off x="3785616" y="2871442"/>
-            <a:ext cx="530854" cy="110352"/>
+            <a:off x="3579876" y="2629341"/>
+            <a:ext cx="159416" cy="102929"/>
           </a:xfrm>
           <a:prstGeom prst="rect">
             <a:avLst/>
@@ -29973,8 +29973,8 @@
         </p:nvSpPr>
         <p:spPr>
           <a:xfrm>
-            <a:off x="4617720" y="2806670"/>
-            <a:ext cx="1234440" cy="239896"/>
+            <a:off x="4206240" y="2568926"/>
+            <a:ext cx="777240" cy="223759"/>
           </a:xfrm>
           <a:prstGeom prst="rect">
             <a:avLst/>
@@ -29998,7 +29998,7 @@
                 <a:ea typeface="Inter" pitchFamily="34" charset="-122"/>
                 <a:cs typeface="Inter" pitchFamily="34" charset="-120"/>
               </a:rPr>
-              <a:t>+32.7%</a:t>
+              <a:t>+$566K</a:t>
             </a:r>
             <a:endParaRPr lang="en-US" sz="1200" dirty="0"/>
           </a:p>
@@ -30012,8 +30012,47 @@
         </p:nvSpPr>
         <p:spPr>
           <a:xfrm>
-            <a:off x="658368" y="3046566"/>
-            <a:ext cx="310896" cy="239896"/>
+            <a:off x="4983480" y="2568926"/>
+            <a:ext cx="868680" cy="223759"/>
+          </a:xfrm>
+          <a:prstGeom prst="rect">
+            <a:avLst/>
+          </a:prstGeom>
+          <a:noFill/>
+          <a:ln/>
+        </p:spPr>
+        <p:txBody>
+          <a:bodyPr wrap="square" lIns="0" tIns="0" rIns="0" bIns="0" rtlCol="0" anchor="ctr"/>
+          <a:lstStyle/>
+          <a:p>
+            <a:pPr algn="r" indent="0" marL="0">
+              <a:buNone/>
+            </a:pPr>
+            <a:r>
+              <a:rPr lang="en-US" sz="1200" dirty="0">
+                <a:solidFill>
+                  <a:srgbClr val="0B7A4A"/>
+                </a:solidFill>
+                <a:latin typeface="Inter" pitchFamily="34" charset="0"/>
+                <a:ea typeface="Inter" pitchFamily="34" charset="-122"/>
+                <a:cs typeface="Inter" pitchFamily="34" charset="-120"/>
+              </a:rPr>
+              <a:t>+15.8%</a:t>
+            </a:r>
+            <a:endParaRPr lang="en-US" sz="1200" dirty="0"/>
+          </a:p>
+        </p:txBody>
+      </p:sp>
+      <p:sp>
+        <p:nvSpPr>
+          <p:cNvPr id="32" name="Text 30"/>
+          <p:cNvSpPr txBox="1"/>
+          <p:nvPr/>
+        </p:nvSpPr>
+        <p:spPr>
+          <a:xfrm>
+            <a:off x="658368" y="2792685"/>
+            <a:ext cx="310896" cy="223759"/>
           </a:xfrm>
           <a:prstGeom prst="rect">
             <a:avLst/>
@@ -30037,22 +30076,22 @@
                 <a:ea typeface="Inter" pitchFamily="34" charset="-122"/>
                 <a:cs typeface="Inter" pitchFamily="34" charset="-120"/>
               </a:rPr>
-              <a:t>6</a:t>
-            </a:r>
-            <a:endParaRPr lang="en-US" sz="1200" dirty="0"/>
-          </a:p>
-        </p:txBody>
-      </p:sp>
-      <p:sp>
-        <p:nvSpPr>
-          <p:cNvPr id="32" name="Text 30"/>
-          <p:cNvSpPr txBox="1"/>
-          <p:nvPr/>
-        </p:nvSpPr>
-        <p:spPr>
-          <a:xfrm>
-            <a:off x="1014984" y="3046566"/>
-            <a:ext cx="1920240" cy="239896"/>
+              <a:t>4</a:t>
+            </a:r>
+            <a:endParaRPr lang="en-US" sz="1200" dirty="0"/>
+          </a:p>
+        </p:txBody>
+      </p:sp>
+      <p:sp>
+        <p:nvSpPr>
+          <p:cNvPr id="33" name="Text 31"/>
+          <p:cNvSpPr txBox="1"/>
+          <p:nvPr/>
+        </p:nvSpPr>
+        <p:spPr>
+          <a:xfrm>
+            <a:off x="1014984" y="2792685"/>
+            <a:ext cx="1920240" cy="223759"/>
           </a:xfrm>
           <a:prstGeom prst="rect">
             <a:avLst/>
@@ -30076,22 +30115,22 @@
                 <a:ea typeface="Inter" pitchFamily="34" charset="-122"/>
                 <a:cs typeface="Inter" pitchFamily="34" charset="-120"/>
               </a:rPr>
-              <a:t>TOYOTA FLAGSTAFF</a:t>
-            </a:r>
-            <a:endParaRPr lang="en-US" sz="1200" dirty="0"/>
-          </a:p>
-        </p:txBody>
-      </p:sp>
-      <p:sp>
-        <p:nvSpPr>
-          <p:cNvPr id="33" name="Shape 31"/>
+              <a:t>CHEVY LV</a:t>
+            </a:r>
+            <a:endParaRPr lang="en-US" sz="1200" dirty="0"/>
+          </a:p>
+        </p:txBody>
+      </p:sp>
+      <p:sp>
+        <p:nvSpPr>
+          <p:cNvPr id="34" name="Shape 32"/>
           <p:cNvSpPr/>
           <p:nvPr/>
         </p:nvSpPr>
         <p:spPr>
           <a:xfrm>
-            <a:off x="3785616" y="3111337"/>
-            <a:ext cx="485650" cy="110352"/>
+            <a:off x="3579876" y="2853100"/>
+            <a:ext cx="142804" cy="102929"/>
           </a:xfrm>
           <a:prstGeom prst="rect">
             <a:avLst/>
@@ -30104,14 +30143,14 @@
       </p:sp>
       <p:sp>
         <p:nvSpPr>
-          <p:cNvPr id="34" name="Text 32"/>
-          <p:cNvSpPr txBox="1"/>
-          <p:nvPr/>
-        </p:nvSpPr>
-        <p:spPr>
-          <a:xfrm>
-            <a:off x="4617720" y="3046566"/>
-            <a:ext cx="1234440" cy="239896"/>
+          <p:cNvPr id="35" name="Text 33"/>
+          <p:cNvSpPr txBox="1"/>
+          <p:nvPr/>
+        </p:nvSpPr>
+        <p:spPr>
+          <a:xfrm>
+            <a:off x="4206240" y="2792685"/>
+            <a:ext cx="777240" cy="223759"/>
           </a:xfrm>
           <a:prstGeom prst="rect">
             <a:avLst/>
@@ -30135,22 +30174,61 @@
                 <a:ea typeface="Inter" pitchFamily="34" charset="-122"/>
                 <a:cs typeface="Inter" pitchFamily="34" charset="-120"/>
               </a:rPr>
-              <a:t>+29.9%</a:t>
-            </a:r>
-            <a:endParaRPr lang="en-US" sz="1200" dirty="0"/>
-          </a:p>
-        </p:txBody>
-      </p:sp>
-      <p:sp>
-        <p:nvSpPr>
-          <p:cNvPr id="35" name="Text 33"/>
-          <p:cNvSpPr txBox="1"/>
-          <p:nvPr/>
-        </p:nvSpPr>
-        <p:spPr>
-          <a:xfrm>
-            <a:off x="658368" y="3286461"/>
-            <a:ext cx="310896" cy="239896"/>
+              <a:t>+$507K</a:t>
+            </a:r>
+            <a:endParaRPr lang="en-US" sz="1200" dirty="0"/>
+          </a:p>
+        </p:txBody>
+      </p:sp>
+      <p:sp>
+        <p:nvSpPr>
+          <p:cNvPr id="36" name="Text 34"/>
+          <p:cNvSpPr txBox="1"/>
+          <p:nvPr/>
+        </p:nvSpPr>
+        <p:spPr>
+          <a:xfrm>
+            <a:off x="4983480" y="2792685"/>
+            <a:ext cx="868680" cy="223759"/>
+          </a:xfrm>
+          <a:prstGeom prst="rect">
+            <a:avLst/>
+          </a:prstGeom>
+          <a:noFill/>
+          <a:ln/>
+        </p:spPr>
+        <p:txBody>
+          <a:bodyPr wrap="square" lIns="0" tIns="0" rIns="0" bIns="0" rtlCol="0" anchor="ctr"/>
+          <a:lstStyle/>
+          <a:p>
+            <a:pPr algn="r" indent="0" marL="0">
+              <a:buNone/>
+            </a:pPr>
+            <a:r>
+              <a:rPr lang="en-US" sz="1200" dirty="0">
+                <a:solidFill>
+                  <a:srgbClr val="0B7A4A"/>
+                </a:solidFill>
+                <a:latin typeface="Inter" pitchFamily="34" charset="0"/>
+                <a:ea typeface="Inter" pitchFamily="34" charset="-122"/>
+                <a:cs typeface="Inter" pitchFamily="34" charset="-120"/>
+              </a:rPr>
+              <a:t>+10.6%</a:t>
+            </a:r>
+            <a:endParaRPr lang="en-US" sz="1200" dirty="0"/>
+          </a:p>
+        </p:txBody>
+      </p:sp>
+      <p:sp>
+        <p:nvSpPr>
+          <p:cNvPr id="37" name="Text 35"/>
+          <p:cNvSpPr txBox="1"/>
+          <p:nvPr/>
+        </p:nvSpPr>
+        <p:spPr>
+          <a:xfrm>
+            <a:off x="658368" y="3016444"/>
+            <a:ext cx="310896" cy="223759"/>
           </a:xfrm>
           <a:prstGeom prst="rect">
             <a:avLst/>
@@ -30174,22 +30252,22 @@
                 <a:ea typeface="Inter" pitchFamily="34" charset="-122"/>
                 <a:cs typeface="Inter" pitchFamily="34" charset="-120"/>
               </a:rPr>
-              <a:t>7</a:t>
-            </a:r>
-            <a:endParaRPr lang="en-US" sz="1200" dirty="0"/>
-          </a:p>
-        </p:txBody>
-      </p:sp>
-      <p:sp>
-        <p:nvSpPr>
-          <p:cNvPr id="36" name="Text 34"/>
-          <p:cNvSpPr txBox="1"/>
-          <p:nvPr/>
-        </p:nvSpPr>
-        <p:spPr>
-          <a:xfrm>
-            <a:off x="1014984" y="3286461"/>
-            <a:ext cx="1920240" cy="239896"/>
+              <a:t>5</a:t>
+            </a:r>
+            <a:endParaRPr lang="en-US" sz="1200" dirty="0"/>
+          </a:p>
+        </p:txBody>
+      </p:sp>
+      <p:sp>
+        <p:nvSpPr>
+          <p:cNvPr id="38" name="Text 36"/>
+          <p:cNvSpPr txBox="1"/>
+          <p:nvPr/>
+        </p:nvSpPr>
+        <p:spPr>
+          <a:xfrm>
+            <a:off x="1014984" y="3016444"/>
+            <a:ext cx="1920240" cy="223759"/>
           </a:xfrm>
           <a:prstGeom prst="rect">
             <a:avLst/>
@@ -30213,22 +30291,22 @@
                 <a:ea typeface="Inter" pitchFamily="34" charset="-122"/>
                 <a:cs typeface="Inter" pitchFamily="34" charset="-120"/>
               </a:rPr>
-              <a:t>LR RENO</a:t>
-            </a:r>
-            <a:endParaRPr lang="en-US" sz="1200" dirty="0"/>
-          </a:p>
-        </p:txBody>
-      </p:sp>
-      <p:sp>
-        <p:nvSpPr>
-          <p:cNvPr id="37" name="Shape 35"/>
+              <a:t>LR LV</a:t>
+            </a:r>
+            <a:endParaRPr lang="en-US" sz="1200" dirty="0"/>
+          </a:p>
+        </p:txBody>
+      </p:sp>
+      <p:sp>
+        <p:nvSpPr>
+          <p:cNvPr id="39" name="Shape 37"/>
           <p:cNvSpPr/>
           <p:nvPr/>
         </p:nvSpPr>
         <p:spPr>
           <a:xfrm>
-            <a:off x="3785616" y="3351233"/>
-            <a:ext cx="368446" cy="110352"/>
+            <a:off x="3579876" y="3076859"/>
+            <a:ext cx="89161" cy="102929"/>
           </a:xfrm>
           <a:prstGeom prst="rect">
             <a:avLst/>
@@ -30241,14 +30319,14 @@
       </p:sp>
       <p:sp>
         <p:nvSpPr>
-          <p:cNvPr id="38" name="Text 36"/>
-          <p:cNvSpPr txBox="1"/>
-          <p:nvPr/>
-        </p:nvSpPr>
-        <p:spPr>
-          <a:xfrm>
-            <a:off x="4617720" y="3286461"/>
-            <a:ext cx="1234440" cy="239896"/>
+          <p:cNvPr id="40" name="Text 38"/>
+          <p:cNvSpPr txBox="1"/>
+          <p:nvPr/>
+        </p:nvSpPr>
+        <p:spPr>
+          <a:xfrm>
+            <a:off x="4206240" y="3016444"/>
+            <a:ext cx="777240" cy="223759"/>
           </a:xfrm>
           <a:prstGeom prst="rect">
             <a:avLst/>
@@ -30272,22 +30350,61 @@
                 <a:ea typeface="Inter" pitchFamily="34" charset="-122"/>
                 <a:cs typeface="Inter" pitchFamily="34" charset="-120"/>
               </a:rPr>
-              <a:t>+22.7%</a:t>
-            </a:r>
-            <a:endParaRPr lang="en-US" sz="1200" dirty="0"/>
-          </a:p>
-        </p:txBody>
-      </p:sp>
-      <p:sp>
-        <p:nvSpPr>
-          <p:cNvPr id="39" name="Text 37"/>
-          <p:cNvSpPr txBox="1"/>
-          <p:nvPr/>
-        </p:nvSpPr>
-        <p:spPr>
-          <a:xfrm>
-            <a:off x="658368" y="3526357"/>
-            <a:ext cx="310896" cy="239896"/>
+              <a:t>+$317K</a:t>
+            </a:r>
+            <a:endParaRPr lang="en-US" sz="1200" dirty="0"/>
+          </a:p>
+        </p:txBody>
+      </p:sp>
+      <p:sp>
+        <p:nvSpPr>
+          <p:cNvPr id="41" name="Text 39"/>
+          <p:cNvSpPr txBox="1"/>
+          <p:nvPr/>
+        </p:nvSpPr>
+        <p:spPr>
+          <a:xfrm>
+            <a:off x="4983480" y="3016444"/>
+            <a:ext cx="868680" cy="223759"/>
+          </a:xfrm>
+          <a:prstGeom prst="rect">
+            <a:avLst/>
+          </a:prstGeom>
+          <a:noFill/>
+          <a:ln/>
+        </p:spPr>
+        <p:txBody>
+          <a:bodyPr wrap="square" lIns="0" tIns="0" rIns="0" bIns="0" rtlCol="0" anchor="ctr"/>
+          <a:lstStyle/>
+          <a:p>
+            <a:pPr algn="r" indent="0" marL="0">
+              <a:buNone/>
+            </a:pPr>
+            <a:r>
+              <a:rPr lang="en-US" sz="1200" dirty="0">
+                <a:solidFill>
+                  <a:srgbClr val="0B7A4A"/>
+                </a:solidFill>
+                <a:latin typeface="Inter" pitchFamily="34" charset="0"/>
+                <a:ea typeface="Inter" pitchFamily="34" charset="-122"/>
+                <a:cs typeface="Inter" pitchFamily="34" charset="-120"/>
+              </a:rPr>
+              <a:t>+21.2%</a:t>
+            </a:r>
+            <a:endParaRPr lang="en-US" sz="1200" dirty="0"/>
+          </a:p>
+        </p:txBody>
+      </p:sp>
+      <p:sp>
+        <p:nvSpPr>
+          <p:cNvPr id="42" name="Text 40"/>
+          <p:cNvSpPr txBox="1"/>
+          <p:nvPr/>
+        </p:nvSpPr>
+        <p:spPr>
+          <a:xfrm>
+            <a:off x="658368" y="3240203"/>
+            <a:ext cx="310896" cy="223759"/>
           </a:xfrm>
           <a:prstGeom prst="rect">
             <a:avLst/>
@@ -30311,22 +30428,22 @@
                 <a:ea typeface="Inter" pitchFamily="34" charset="-122"/>
                 <a:cs typeface="Inter" pitchFamily="34" charset="-120"/>
               </a:rPr>
-              <a:t>8</a:t>
-            </a:r>
-            <a:endParaRPr lang="en-US" sz="1200" dirty="0"/>
-          </a:p>
-        </p:txBody>
-      </p:sp>
-      <p:sp>
-        <p:nvSpPr>
-          <p:cNvPr id="40" name="Text 38"/>
-          <p:cNvSpPr txBox="1"/>
-          <p:nvPr/>
-        </p:nvSpPr>
-        <p:spPr>
-          <a:xfrm>
-            <a:off x="1014984" y="3526357"/>
-            <a:ext cx="1920240" cy="239896"/>
+              <a:t>6</a:t>
+            </a:r>
+            <a:endParaRPr lang="en-US" sz="1200" dirty="0"/>
+          </a:p>
+        </p:txBody>
+      </p:sp>
+      <p:sp>
+        <p:nvSpPr>
+          <p:cNvPr id="43" name="Text 41"/>
+          <p:cNvSpPr txBox="1"/>
+          <p:nvPr/>
+        </p:nvSpPr>
+        <p:spPr>
+          <a:xfrm>
+            <a:off x="1014984" y="3240203"/>
+            <a:ext cx="1920240" cy="223759"/>
           </a:xfrm>
           <a:prstGeom prst="rect">
             <a:avLst/>
@@ -30350,22 +30467,22 @@
                 <a:ea typeface="Inter" pitchFamily="34" charset="-122"/>
                 <a:cs typeface="Inter" pitchFamily="34" charset="-120"/>
               </a:rPr>
-              <a:t>TOYOTA SPOKANE</a:t>
-            </a:r>
-            <a:endParaRPr lang="en-US" sz="1200" dirty="0"/>
-          </a:p>
-        </p:txBody>
-      </p:sp>
-      <p:sp>
-        <p:nvSpPr>
-          <p:cNvPr id="41" name="Shape 39"/>
+              <a:t>LEXUS</a:t>
+            </a:r>
+            <a:endParaRPr lang="en-US" sz="1200" dirty="0"/>
+          </a:p>
+        </p:txBody>
+      </p:sp>
+      <p:sp>
+        <p:nvSpPr>
+          <p:cNvPr id="44" name="Shape 42"/>
           <p:cNvSpPr/>
           <p:nvPr/>
         </p:nvSpPr>
         <p:spPr>
           <a:xfrm>
-            <a:off x="3785616" y="3591128"/>
-            <a:ext cx="332044" cy="110352"/>
+            <a:off x="3579876" y="3300618"/>
+            <a:ext cx="54587" cy="102929"/>
           </a:xfrm>
           <a:prstGeom prst="rect">
             <a:avLst/>
@@ -30378,14 +30495,14 @@
       </p:sp>
       <p:sp>
         <p:nvSpPr>
-          <p:cNvPr id="42" name="Text 40"/>
-          <p:cNvSpPr txBox="1"/>
-          <p:nvPr/>
-        </p:nvSpPr>
-        <p:spPr>
-          <a:xfrm>
-            <a:off x="4617720" y="3526357"/>
-            <a:ext cx="1234440" cy="239896"/>
+          <p:cNvPr id="45" name="Text 43"/>
+          <p:cNvSpPr txBox="1"/>
+          <p:nvPr/>
+        </p:nvSpPr>
+        <p:spPr>
+          <a:xfrm>
+            <a:off x="4206240" y="3240203"/>
+            <a:ext cx="777240" cy="223759"/>
           </a:xfrm>
           <a:prstGeom prst="rect">
             <a:avLst/>
@@ -30409,100 +30526,61 @@
                 <a:ea typeface="Inter" pitchFamily="34" charset="-122"/>
                 <a:cs typeface="Inter" pitchFamily="34" charset="-120"/>
               </a:rPr>
-              <a:t>+20.4%</a:t>
-            </a:r>
-            <a:endParaRPr lang="en-US" sz="1200" dirty="0"/>
-          </a:p>
-        </p:txBody>
-      </p:sp>
-      <p:sp>
-        <p:nvSpPr>
-          <p:cNvPr id="43" name="Text 41"/>
-          <p:cNvSpPr txBox="1"/>
-          <p:nvPr/>
-        </p:nvSpPr>
-        <p:spPr>
-          <a:xfrm>
-            <a:off x="658368" y="3766252"/>
-            <a:ext cx="310896" cy="239896"/>
-          </a:xfrm>
-          <a:prstGeom prst="rect">
-            <a:avLst/>
-          </a:prstGeom>
-          <a:noFill/>
-          <a:ln/>
-        </p:spPr>
-        <p:txBody>
-          <a:bodyPr wrap="square" lIns="0" tIns="0" rIns="0" bIns="0" rtlCol="0" anchor="ctr"/>
-          <a:lstStyle/>
-          <a:p>
-            <a:pPr algn="r" indent="0" marL="0">
-              <a:buNone/>
-            </a:pPr>
-            <a:r>
-              <a:rPr lang="en-US" sz="1200" dirty="0">
-                <a:solidFill>
-                  <a:srgbClr val="9AA3AD"/>
-                </a:solidFill>
-                <a:latin typeface="Inter" pitchFamily="34" charset="0"/>
-                <a:ea typeface="Inter" pitchFamily="34" charset="-122"/>
-                <a:cs typeface="Inter" pitchFamily="34" charset="-120"/>
-              </a:rPr>
-              <a:t>9</a:t>
-            </a:r>
-            <a:endParaRPr lang="en-US" sz="1200" dirty="0"/>
-          </a:p>
-        </p:txBody>
-      </p:sp>
-      <p:sp>
-        <p:nvSpPr>
-          <p:cNvPr id="44" name="Text 42"/>
-          <p:cNvSpPr txBox="1"/>
-          <p:nvPr/>
-        </p:nvSpPr>
-        <p:spPr>
-          <a:xfrm>
-            <a:off x="1014984" y="3766252"/>
-            <a:ext cx="1920240" cy="239896"/>
-          </a:xfrm>
-          <a:prstGeom prst="rect">
-            <a:avLst/>
-          </a:prstGeom>
-          <a:noFill/>
-          <a:ln/>
-        </p:spPr>
-        <p:txBody>
-          <a:bodyPr wrap="square" lIns="0" tIns="0" rIns="0" bIns="0" rtlCol="0" anchor="ctr"/>
-          <a:lstStyle/>
-          <a:p>
-            <a:pPr indent="0" marL="0">
-              <a:buNone/>
-            </a:pPr>
-            <a:r>
-              <a:rPr lang="en-US" sz="1200" dirty="0">
-                <a:solidFill>
-                  <a:srgbClr val="1A1A1A"/>
-                </a:solidFill>
-                <a:latin typeface="Inter" pitchFamily="34" charset="0"/>
-                <a:ea typeface="Inter" pitchFamily="34" charset="-122"/>
-                <a:cs typeface="Inter" pitchFamily="34" charset="-120"/>
-              </a:rPr>
-              <a:t>LR HENDERSON</a:t>
-            </a:r>
-            <a:endParaRPr lang="en-US" sz="1200" dirty="0"/>
-          </a:p>
-        </p:txBody>
-      </p:sp>
-      <p:sp>
-        <p:nvSpPr>
-          <p:cNvPr id="45" name="Shape 43"/>
+              <a:t>+$194K</a:t>
+            </a:r>
+            <a:endParaRPr lang="en-US" sz="1200" dirty="0"/>
+          </a:p>
+        </p:txBody>
+      </p:sp>
+      <p:sp>
+        <p:nvSpPr>
+          <p:cNvPr id="46" name="Text 44"/>
+          <p:cNvSpPr txBox="1"/>
+          <p:nvPr/>
+        </p:nvSpPr>
+        <p:spPr>
+          <a:xfrm>
+            <a:off x="4983480" y="3240203"/>
+            <a:ext cx="868680" cy="223759"/>
+          </a:xfrm>
+          <a:prstGeom prst="rect">
+            <a:avLst/>
+          </a:prstGeom>
+          <a:noFill/>
+          <a:ln/>
+        </p:spPr>
+        <p:txBody>
+          <a:bodyPr wrap="square" lIns="0" tIns="0" rIns="0" bIns="0" rtlCol="0" anchor="ctr"/>
+          <a:lstStyle/>
+          <a:p>
+            <a:pPr algn="r" indent="0" marL="0">
+              <a:buNone/>
+            </a:pPr>
+            <a:r>
+              <a:rPr lang="en-US" sz="1200" dirty="0">
+                <a:solidFill>
+                  <a:srgbClr val="0B7A4A"/>
+                </a:solidFill>
+                <a:latin typeface="Inter" pitchFamily="34" charset="0"/>
+                <a:ea typeface="Inter" pitchFamily="34" charset="-122"/>
+                <a:cs typeface="Inter" pitchFamily="34" charset="-120"/>
+              </a:rPr>
+              <a:t>+38.0%</a:t>
+            </a:r>
+            <a:endParaRPr lang="en-US" sz="1200" dirty="0"/>
+          </a:p>
+        </p:txBody>
+      </p:sp>
+      <p:sp>
+        <p:nvSpPr>
+          <p:cNvPr id="47" name="Shape 45"/>
           <p:cNvSpPr/>
           <p:nvPr/>
         </p:nvSpPr>
         <p:spPr>
           <a:xfrm>
-            <a:off x="3785616" y="3831024"/>
-            <a:ext cx="194010" cy="110352"/>
+            <a:off x="5907024" y="3285923"/>
+            <a:ext cx="54864" cy="132319"/>
           </a:xfrm>
           <a:prstGeom prst="rect">
             <a:avLst/>
@@ -30515,53 +30593,14 @@
       </p:sp>
       <p:sp>
         <p:nvSpPr>
-          <p:cNvPr id="46" name="Text 44"/>
-          <p:cNvSpPr txBox="1"/>
-          <p:nvPr/>
-        </p:nvSpPr>
-        <p:spPr>
-          <a:xfrm>
-            <a:off x="4617720" y="3766252"/>
-            <a:ext cx="1234440" cy="239896"/>
-          </a:xfrm>
-          <a:prstGeom prst="rect">
-            <a:avLst/>
-          </a:prstGeom>
-          <a:noFill/>
-          <a:ln/>
-        </p:spPr>
-        <p:txBody>
-          <a:bodyPr wrap="square" lIns="0" tIns="0" rIns="0" bIns="0" rtlCol="0" anchor="ctr"/>
-          <a:lstStyle/>
-          <a:p>
-            <a:pPr algn="r" indent="0" marL="0">
-              <a:buNone/>
-            </a:pPr>
-            <a:r>
-              <a:rPr lang="en-US" sz="1200" b="1" dirty="0">
-                <a:solidFill>
-                  <a:srgbClr val="0B7A4A"/>
-                </a:solidFill>
-                <a:latin typeface="Inter" pitchFamily="34" charset="0"/>
-                <a:ea typeface="Inter" pitchFamily="34" charset="-122"/>
-                <a:cs typeface="Inter" pitchFamily="34" charset="-120"/>
-              </a:rPr>
-              <a:t>+11.9%</a:t>
-            </a:r>
-            <a:endParaRPr lang="en-US" sz="1200" dirty="0"/>
-          </a:p>
-        </p:txBody>
-      </p:sp>
-      <p:sp>
-        <p:nvSpPr>
-          <p:cNvPr id="47" name="Text 45"/>
-          <p:cNvSpPr txBox="1"/>
-          <p:nvPr/>
-        </p:nvSpPr>
-        <p:spPr>
-          <a:xfrm>
-            <a:off x="658368" y="4006148"/>
-            <a:ext cx="310896" cy="239896"/>
+          <p:cNvPr id="48" name="Text 46"/>
+          <p:cNvSpPr txBox="1"/>
+          <p:nvPr/>
+        </p:nvSpPr>
+        <p:spPr>
+          <a:xfrm>
+            <a:off x="658368" y="3463962"/>
+            <a:ext cx="310896" cy="223759"/>
           </a:xfrm>
           <a:prstGeom prst="rect">
             <a:avLst/>
@@ -30585,22 +30624,22 @@
                 <a:ea typeface="Inter" pitchFamily="34" charset="-122"/>
                 <a:cs typeface="Inter" pitchFamily="34" charset="-120"/>
               </a:rPr>
-              <a:t>10</a:t>
-            </a:r>
-            <a:endParaRPr lang="en-US" sz="1200" dirty="0"/>
-          </a:p>
-        </p:txBody>
-      </p:sp>
-      <p:sp>
-        <p:nvSpPr>
-          <p:cNvPr id="48" name="Text 46"/>
-          <p:cNvSpPr txBox="1"/>
-          <p:nvPr/>
-        </p:nvSpPr>
-        <p:spPr>
-          <a:xfrm>
-            <a:off x="1014984" y="4006148"/>
-            <a:ext cx="1920240" cy="239896"/>
+              <a:t>7</a:t>
+            </a:r>
+            <a:endParaRPr lang="en-US" sz="1200" dirty="0"/>
+          </a:p>
+        </p:txBody>
+      </p:sp>
+      <p:sp>
+        <p:nvSpPr>
+          <p:cNvPr id="49" name="Text 47"/>
+          <p:cNvSpPr txBox="1"/>
+          <p:nvPr/>
+        </p:nvSpPr>
+        <p:spPr>
+          <a:xfrm>
+            <a:off x="1014984" y="3463962"/>
+            <a:ext cx="1920240" cy="223759"/>
           </a:xfrm>
           <a:prstGeom prst="rect">
             <a:avLst/>
@@ -30624,22 +30663,22 @@
                 <a:ea typeface="Inter" pitchFamily="34" charset="-122"/>
                 <a:cs typeface="Inter" pitchFamily="34" charset="-120"/>
               </a:rPr>
-              <a:t>LR LV</a:t>
-            </a:r>
-            <a:endParaRPr lang="en-US" sz="1200" dirty="0"/>
-          </a:p>
-        </p:txBody>
-      </p:sp>
-      <p:sp>
-        <p:nvSpPr>
-          <p:cNvPr id="49" name="Shape 47"/>
+              <a:t>LINCOLN</a:t>
+            </a:r>
+            <a:endParaRPr lang="en-US" sz="1200" dirty="0"/>
+          </a:p>
+        </p:txBody>
+      </p:sp>
+      <p:sp>
+        <p:nvSpPr>
+          <p:cNvPr id="50" name="Shape 48"/>
           <p:cNvSpPr/>
           <p:nvPr/>
         </p:nvSpPr>
         <p:spPr>
           <a:xfrm>
-            <a:off x="3785616" y="4070920"/>
-            <a:ext cx="188933" cy="110352"/>
+            <a:off x="3579876" y="3524377"/>
+            <a:ext cx="47745" cy="102929"/>
           </a:xfrm>
           <a:prstGeom prst="rect">
             <a:avLst/>
@@ -30652,14 +30691,14 @@
       </p:sp>
       <p:sp>
         <p:nvSpPr>
-          <p:cNvPr id="50" name="Text 48"/>
-          <p:cNvSpPr txBox="1"/>
-          <p:nvPr/>
-        </p:nvSpPr>
-        <p:spPr>
-          <a:xfrm>
-            <a:off x="4617720" y="4006148"/>
-            <a:ext cx="1234440" cy="239896"/>
+          <p:cNvPr id="51" name="Text 49"/>
+          <p:cNvSpPr txBox="1"/>
+          <p:nvPr/>
+        </p:nvSpPr>
+        <p:spPr>
+          <a:xfrm>
+            <a:off x="4206240" y="3463962"/>
+            <a:ext cx="777240" cy="223759"/>
           </a:xfrm>
           <a:prstGeom prst="rect">
             <a:avLst/>
@@ -30683,22 +30722,61 @@
                 <a:ea typeface="Inter" pitchFamily="34" charset="-122"/>
                 <a:cs typeface="Inter" pitchFamily="34" charset="-120"/>
               </a:rPr>
-              <a:t>+11.6%</a:t>
-            </a:r>
-            <a:endParaRPr lang="en-US" sz="1200" dirty="0"/>
-          </a:p>
-        </p:txBody>
-      </p:sp>
-      <p:sp>
-        <p:nvSpPr>
-          <p:cNvPr id="51" name="Text 49"/>
-          <p:cNvSpPr txBox="1"/>
-          <p:nvPr/>
-        </p:nvSpPr>
-        <p:spPr>
-          <a:xfrm>
-            <a:off x="658368" y="4246043"/>
-            <a:ext cx="310896" cy="239896"/>
+              <a:t>+$170K</a:t>
+            </a:r>
+            <a:endParaRPr lang="en-US" sz="1200" dirty="0"/>
+          </a:p>
+        </p:txBody>
+      </p:sp>
+      <p:sp>
+        <p:nvSpPr>
+          <p:cNvPr id="52" name="Text 50"/>
+          <p:cNvSpPr txBox="1"/>
+          <p:nvPr/>
+        </p:nvSpPr>
+        <p:spPr>
+          <a:xfrm>
+            <a:off x="4983480" y="3463962"/>
+            <a:ext cx="868680" cy="223759"/>
+          </a:xfrm>
+          <a:prstGeom prst="rect">
+            <a:avLst/>
+          </a:prstGeom>
+          <a:noFill/>
+          <a:ln/>
+        </p:spPr>
+        <p:txBody>
+          <a:bodyPr wrap="square" lIns="0" tIns="0" rIns="0" bIns="0" rtlCol="0" anchor="ctr"/>
+          <a:lstStyle/>
+          <a:p>
+            <a:pPr algn="r" indent="0" marL="0">
+              <a:buNone/>
+            </a:pPr>
+            <a:r>
+              <a:rPr lang="en-US" sz="1200" dirty="0">
+                <a:solidFill>
+                  <a:srgbClr val="0B7A4A"/>
+                </a:solidFill>
+                <a:latin typeface="Inter" pitchFamily="34" charset="0"/>
+                <a:ea typeface="Inter" pitchFamily="34" charset="-122"/>
+                <a:cs typeface="Inter" pitchFamily="34" charset="-120"/>
+              </a:rPr>
+              <a:t>+25.4%</a:t>
+            </a:r>
+            <a:endParaRPr lang="en-US" sz="1200" dirty="0"/>
+          </a:p>
+        </p:txBody>
+      </p:sp>
+      <p:sp>
+        <p:nvSpPr>
+          <p:cNvPr id="53" name="Text 51"/>
+          <p:cNvSpPr txBox="1"/>
+          <p:nvPr/>
+        </p:nvSpPr>
+        <p:spPr>
+          <a:xfrm>
+            <a:off x="658368" y="3687721"/>
+            <a:ext cx="310896" cy="223759"/>
           </a:xfrm>
           <a:prstGeom prst="rect">
             <a:avLst/>
@@ -30722,22 +30800,22 @@
                 <a:ea typeface="Inter" pitchFamily="34" charset="-122"/>
                 <a:cs typeface="Inter" pitchFamily="34" charset="-120"/>
               </a:rPr>
-              <a:t>11</a:t>
-            </a:r>
-            <a:endParaRPr lang="en-US" sz="1200" dirty="0"/>
-          </a:p>
-        </p:txBody>
-      </p:sp>
-      <p:sp>
-        <p:nvSpPr>
-          <p:cNvPr id="52" name="Text 50"/>
-          <p:cNvSpPr txBox="1"/>
-          <p:nvPr/>
-        </p:nvSpPr>
-        <p:spPr>
-          <a:xfrm>
-            <a:off x="1014984" y="4246043"/>
-            <a:ext cx="1920240" cy="239896"/>
+              <a:t>8</a:t>
+            </a:r>
+            <a:endParaRPr lang="en-US" sz="1200" dirty="0"/>
+          </a:p>
+        </p:txBody>
+      </p:sp>
+      <p:sp>
+        <p:nvSpPr>
+          <p:cNvPr id="54" name="Text 52"/>
+          <p:cNvSpPr txBox="1"/>
+          <p:nvPr/>
+        </p:nvSpPr>
+        <p:spPr>
+          <a:xfrm>
+            <a:off x="1014984" y="3687721"/>
+            <a:ext cx="1920240" cy="223759"/>
           </a:xfrm>
           <a:prstGeom prst="rect">
             <a:avLst/>
@@ -30761,22 +30839,22 @@
                 <a:ea typeface="Inter" pitchFamily="34" charset="-122"/>
                 <a:cs typeface="Inter" pitchFamily="34" charset="-120"/>
               </a:rPr>
-              <a:t>LINCOLN</a:t>
-            </a:r>
-            <a:endParaRPr lang="en-US" sz="1200" dirty="0"/>
-          </a:p>
-        </p:txBody>
-      </p:sp>
-      <p:sp>
-        <p:nvSpPr>
-          <p:cNvPr id="53" name="Shape 51"/>
+              <a:t>KIA LV</a:t>
+            </a:r>
+            <a:endParaRPr lang="en-US" sz="1200" dirty="0"/>
+          </a:p>
+        </p:txBody>
+      </p:sp>
+      <p:sp>
+        <p:nvSpPr>
+          <p:cNvPr id="55" name="Shape 53"/>
           <p:cNvSpPr/>
           <p:nvPr/>
         </p:nvSpPr>
         <p:spPr>
           <a:xfrm>
-            <a:off x="3785616" y="4310815"/>
-            <a:ext cx="164792" cy="110352"/>
+            <a:off x="3579876" y="3748136"/>
+            <a:ext cx="41257" cy="102929"/>
           </a:xfrm>
           <a:prstGeom prst="rect">
             <a:avLst/>
@@ -30789,14 +30867,14 @@
       </p:sp>
       <p:sp>
         <p:nvSpPr>
-          <p:cNvPr id="54" name="Text 52"/>
-          <p:cNvSpPr txBox="1"/>
-          <p:nvPr/>
-        </p:nvSpPr>
-        <p:spPr>
-          <a:xfrm>
-            <a:off x="4617720" y="4246043"/>
-            <a:ext cx="1234440" cy="239896"/>
+          <p:cNvPr id="56" name="Text 54"/>
+          <p:cNvSpPr txBox="1"/>
+          <p:nvPr/>
+        </p:nvSpPr>
+        <p:spPr>
+          <a:xfrm>
+            <a:off x="4206240" y="3687721"/>
+            <a:ext cx="777240" cy="223759"/>
           </a:xfrm>
           <a:prstGeom prst="rect">
             <a:avLst/>
@@ -30820,22 +30898,61 @@
                 <a:ea typeface="Inter" pitchFamily="34" charset="-122"/>
                 <a:cs typeface="Inter" pitchFamily="34" charset="-120"/>
               </a:rPr>
-              <a:t>+10.1%</a:t>
-            </a:r>
-            <a:endParaRPr lang="en-US" sz="1200" dirty="0"/>
-          </a:p>
-        </p:txBody>
-      </p:sp>
-      <p:sp>
-        <p:nvSpPr>
-          <p:cNvPr id="55" name="Text 53"/>
-          <p:cNvSpPr txBox="1"/>
-          <p:nvPr/>
-        </p:nvSpPr>
-        <p:spPr>
-          <a:xfrm>
-            <a:off x="658368" y="4485939"/>
-            <a:ext cx="310896" cy="239896"/>
+              <a:t>+$147K</a:t>
+            </a:r>
+            <a:endParaRPr lang="en-US" sz="1200" dirty="0"/>
+          </a:p>
+        </p:txBody>
+      </p:sp>
+      <p:sp>
+        <p:nvSpPr>
+          <p:cNvPr id="57" name="Text 55"/>
+          <p:cNvSpPr txBox="1"/>
+          <p:nvPr/>
+        </p:nvSpPr>
+        <p:spPr>
+          <a:xfrm>
+            <a:off x="4983480" y="3687721"/>
+            <a:ext cx="868680" cy="223759"/>
+          </a:xfrm>
+          <a:prstGeom prst="rect">
+            <a:avLst/>
+          </a:prstGeom>
+          <a:noFill/>
+          <a:ln/>
+        </p:spPr>
+        <p:txBody>
+          <a:bodyPr wrap="square" lIns="0" tIns="0" rIns="0" bIns="0" rtlCol="0" anchor="ctr"/>
+          <a:lstStyle/>
+          <a:p>
+            <a:pPr algn="r" indent="0" marL="0">
+              <a:buNone/>
+            </a:pPr>
+            <a:r>
+              <a:rPr lang="en-US" sz="1200" dirty="0">
+                <a:solidFill>
+                  <a:srgbClr val="0B7A4A"/>
+                </a:solidFill>
+                <a:latin typeface="Inter" pitchFamily="34" charset="0"/>
+                <a:ea typeface="Inter" pitchFamily="34" charset="-122"/>
+                <a:cs typeface="Inter" pitchFamily="34" charset="-120"/>
+              </a:rPr>
+              <a:t>+7.7%</a:t>
+            </a:r>
+            <a:endParaRPr lang="en-US" sz="1200" dirty="0"/>
+          </a:p>
+        </p:txBody>
+      </p:sp>
+      <p:sp>
+        <p:nvSpPr>
+          <p:cNvPr id="58" name="Text 56"/>
+          <p:cNvSpPr txBox="1"/>
+          <p:nvPr/>
+        </p:nvSpPr>
+        <p:spPr>
+          <a:xfrm>
+            <a:off x="658368" y="3911480"/>
+            <a:ext cx="310896" cy="223759"/>
           </a:xfrm>
           <a:prstGeom prst="rect">
             <a:avLst/>
@@ -30859,22 +30976,22 @@
                 <a:ea typeface="Inter" pitchFamily="34" charset="-122"/>
                 <a:cs typeface="Inter" pitchFamily="34" charset="-120"/>
               </a:rPr>
-              <a:t>12</a:t>
-            </a:r>
-            <a:endParaRPr lang="en-US" sz="1200" dirty="0"/>
-          </a:p>
-        </p:txBody>
-      </p:sp>
-      <p:sp>
-        <p:nvSpPr>
-          <p:cNvPr id="56" name="Text 54"/>
-          <p:cNvSpPr txBox="1"/>
-          <p:nvPr/>
-        </p:nvSpPr>
-        <p:spPr>
-          <a:xfrm>
-            <a:off x="1014984" y="4485939"/>
-            <a:ext cx="1920240" cy="239896"/>
+              <a:t>9</a:t>
+            </a:r>
+            <a:endParaRPr lang="en-US" sz="1200" dirty="0"/>
+          </a:p>
+        </p:txBody>
+      </p:sp>
+      <p:sp>
+        <p:nvSpPr>
+          <p:cNvPr id="59" name="Text 57"/>
+          <p:cNvSpPr txBox="1"/>
+          <p:nvPr/>
+        </p:nvSpPr>
+        <p:spPr>
+          <a:xfrm>
+            <a:off x="1014984" y="3911480"/>
+            <a:ext cx="1920240" cy="223759"/>
           </a:xfrm>
           <a:prstGeom prst="rect">
             <a:avLst/>
@@ -30898,22 +31015,22 @@
                 <a:ea typeface="Inter" pitchFamily="34" charset="-122"/>
                 <a:cs typeface="Inter" pitchFamily="34" charset="-120"/>
               </a:rPr>
-              <a:t>NISSAN</a:t>
-            </a:r>
-            <a:endParaRPr lang="en-US" sz="1200" dirty="0"/>
-          </a:p>
-        </p:txBody>
-      </p:sp>
-      <p:sp>
-        <p:nvSpPr>
-          <p:cNvPr id="57" name="Shape 55"/>
+              <a:t>HYUNDAI PRESCOTT</a:t>
+            </a:r>
+            <a:endParaRPr lang="en-US" sz="1200" dirty="0"/>
+          </a:p>
+        </p:txBody>
+      </p:sp>
+      <p:sp>
+        <p:nvSpPr>
+          <p:cNvPr id="60" name="Shape 58"/>
           <p:cNvSpPr/>
           <p:nvPr/>
         </p:nvSpPr>
         <p:spPr>
           <a:xfrm>
-            <a:off x="3785616" y="4550711"/>
-            <a:ext cx="144852" cy="110352"/>
+            <a:off x="3579876" y="3971895"/>
+            <a:ext cx="36189" cy="102929"/>
           </a:xfrm>
           <a:prstGeom prst="rect">
             <a:avLst/>
@@ -30926,14 +31043,14 @@
       </p:sp>
       <p:sp>
         <p:nvSpPr>
-          <p:cNvPr id="58" name="Text 56"/>
-          <p:cNvSpPr txBox="1"/>
-          <p:nvPr/>
-        </p:nvSpPr>
-        <p:spPr>
-          <a:xfrm>
-            <a:off x="4617720" y="4485939"/>
-            <a:ext cx="1234440" cy="239896"/>
+          <p:cNvPr id="61" name="Text 59"/>
+          <p:cNvSpPr txBox="1"/>
+          <p:nvPr/>
+        </p:nvSpPr>
+        <p:spPr>
+          <a:xfrm>
+            <a:off x="4206240" y="3911480"/>
+            <a:ext cx="777240" cy="223759"/>
           </a:xfrm>
           <a:prstGeom prst="rect">
             <a:avLst/>
@@ -30957,22 +31074,61 @@
                 <a:ea typeface="Inter" pitchFamily="34" charset="-122"/>
                 <a:cs typeface="Inter" pitchFamily="34" charset="-120"/>
               </a:rPr>
-              <a:t>+8.9%</a:t>
-            </a:r>
-            <a:endParaRPr lang="en-US" sz="1200" dirty="0"/>
-          </a:p>
-        </p:txBody>
-      </p:sp>
-      <p:sp>
-        <p:nvSpPr>
-          <p:cNvPr id="59" name="Text 57"/>
-          <p:cNvSpPr txBox="1"/>
-          <p:nvPr/>
-        </p:nvSpPr>
-        <p:spPr>
-          <a:xfrm>
-            <a:off x="658368" y="4725834"/>
-            <a:ext cx="310896" cy="239896"/>
+              <a:t>+$129K</a:t>
+            </a:r>
+            <a:endParaRPr lang="en-US" sz="1200" dirty="0"/>
+          </a:p>
+        </p:txBody>
+      </p:sp>
+      <p:sp>
+        <p:nvSpPr>
+          <p:cNvPr id="62" name="Text 60"/>
+          <p:cNvSpPr txBox="1"/>
+          <p:nvPr/>
+        </p:nvSpPr>
+        <p:spPr>
+          <a:xfrm>
+            <a:off x="4983480" y="3911480"/>
+            <a:ext cx="868680" cy="223759"/>
+          </a:xfrm>
+          <a:prstGeom prst="rect">
+            <a:avLst/>
+          </a:prstGeom>
+          <a:noFill/>
+          <a:ln/>
+        </p:spPr>
+        <p:txBody>
+          <a:bodyPr wrap="square" lIns="0" tIns="0" rIns="0" bIns="0" rtlCol="0" anchor="ctr"/>
+          <a:lstStyle/>
+          <a:p>
+            <a:pPr algn="r" indent="0" marL="0">
+              <a:buNone/>
+            </a:pPr>
+            <a:r>
+              <a:rPr lang="en-US" sz="1200" dirty="0">
+                <a:solidFill>
+                  <a:srgbClr val="0B7A4A"/>
+                </a:solidFill>
+                <a:latin typeface="Inter" pitchFamily="34" charset="0"/>
+                <a:ea typeface="Inter" pitchFamily="34" charset="-122"/>
+                <a:cs typeface="Inter" pitchFamily="34" charset="-120"/>
+              </a:rPr>
+              <a:t>+29.0%</a:t>
+            </a:r>
+            <a:endParaRPr lang="en-US" sz="1200" dirty="0"/>
+          </a:p>
+        </p:txBody>
+      </p:sp>
+      <p:sp>
+        <p:nvSpPr>
+          <p:cNvPr id="63" name="Text 61"/>
+          <p:cNvSpPr txBox="1"/>
+          <p:nvPr/>
+        </p:nvSpPr>
+        <p:spPr>
+          <a:xfrm>
+            <a:off x="658368" y="4135240"/>
+            <a:ext cx="310896" cy="223759"/>
           </a:xfrm>
           <a:prstGeom prst="rect">
             <a:avLst/>
@@ -30996,22 +31152,22 @@
                 <a:ea typeface="Inter" pitchFamily="34" charset="-122"/>
                 <a:cs typeface="Inter" pitchFamily="34" charset="-120"/>
               </a:rPr>
-              <a:t>13</a:t>
-            </a:r>
-            <a:endParaRPr lang="en-US" sz="1200" dirty="0"/>
-          </a:p>
-        </p:txBody>
-      </p:sp>
-      <p:sp>
-        <p:nvSpPr>
-          <p:cNvPr id="60" name="Text 58"/>
-          <p:cNvSpPr txBox="1"/>
-          <p:nvPr/>
-        </p:nvSpPr>
-        <p:spPr>
-          <a:xfrm>
-            <a:off x="1014984" y="4725834"/>
-            <a:ext cx="1920240" cy="239896"/>
+              <a:t>10</a:t>
+            </a:r>
+            <a:endParaRPr lang="en-US" sz="1200" dirty="0"/>
+          </a:p>
+        </p:txBody>
+      </p:sp>
+      <p:sp>
+        <p:nvSpPr>
+          <p:cNvPr id="64" name="Text 62"/>
+          <p:cNvSpPr txBox="1"/>
+          <p:nvPr/>
+        </p:nvSpPr>
+        <p:spPr>
+          <a:xfrm>
+            <a:off x="1014984" y="4135240"/>
+            <a:ext cx="1920240" cy="223759"/>
           </a:xfrm>
           <a:prstGeom prst="rect">
             <a:avLst/>
@@ -31035,22 +31191,22 @@
                 <a:ea typeface="Inter" pitchFamily="34" charset="-122"/>
                 <a:cs typeface="Inter" pitchFamily="34" charset="-120"/>
               </a:rPr>
-              <a:t>AUDI HENDERSON</a:t>
-            </a:r>
-            <a:endParaRPr lang="en-US" sz="1200" dirty="0"/>
-          </a:p>
-        </p:txBody>
-      </p:sp>
-      <p:sp>
-        <p:nvSpPr>
-          <p:cNvPr id="61" name="Shape 59"/>
+              <a:t>NISSAN</a:t>
+            </a:r>
+            <a:endParaRPr lang="en-US" sz="1200" dirty="0"/>
+          </a:p>
+        </p:txBody>
+      </p:sp>
+      <p:sp>
+        <p:nvSpPr>
+          <p:cNvPr id="65" name="Shape 63"/>
           <p:cNvSpPr/>
           <p:nvPr/>
         </p:nvSpPr>
         <p:spPr>
           <a:xfrm>
-            <a:off x="3785616" y="4790606"/>
-            <a:ext cx="120626" cy="110352"/>
+            <a:off x="3579876" y="4195654"/>
+            <a:ext cx="33030" cy="102929"/>
           </a:xfrm>
           <a:prstGeom prst="rect">
             <a:avLst/>
@@ -31063,14 +31219,14 @@
       </p:sp>
       <p:sp>
         <p:nvSpPr>
-          <p:cNvPr id="62" name="Text 60"/>
-          <p:cNvSpPr txBox="1"/>
-          <p:nvPr/>
-        </p:nvSpPr>
-        <p:spPr>
-          <a:xfrm>
-            <a:off x="4617720" y="4725834"/>
-            <a:ext cx="1234440" cy="239896"/>
+          <p:cNvPr id="66" name="Text 64"/>
+          <p:cNvSpPr txBox="1"/>
+          <p:nvPr/>
+        </p:nvSpPr>
+        <p:spPr>
+          <a:xfrm>
+            <a:off x="4206240" y="4135240"/>
+            <a:ext cx="777240" cy="223759"/>
           </a:xfrm>
           <a:prstGeom prst="rect">
             <a:avLst/>
@@ -31094,22 +31250,61 @@
                 <a:ea typeface="Inter" pitchFamily="34" charset="-122"/>
                 <a:cs typeface="Inter" pitchFamily="34" charset="-120"/>
               </a:rPr>
-              <a:t>+7.4%</a:t>
-            </a:r>
-            <a:endParaRPr lang="en-US" sz="1200" dirty="0"/>
-          </a:p>
-        </p:txBody>
-      </p:sp>
-      <p:sp>
-        <p:nvSpPr>
-          <p:cNvPr id="63" name="Text 61"/>
-          <p:cNvSpPr txBox="1"/>
-          <p:nvPr/>
-        </p:nvSpPr>
-        <p:spPr>
-          <a:xfrm>
-            <a:off x="658368" y="4965730"/>
-            <a:ext cx="310896" cy="239896"/>
+              <a:t>+$117K</a:t>
+            </a:r>
+            <a:endParaRPr lang="en-US" sz="1200" dirty="0"/>
+          </a:p>
+        </p:txBody>
+      </p:sp>
+      <p:sp>
+        <p:nvSpPr>
+          <p:cNvPr id="67" name="Text 65"/>
+          <p:cNvSpPr txBox="1"/>
+          <p:nvPr/>
+        </p:nvSpPr>
+        <p:spPr>
+          <a:xfrm>
+            <a:off x="4983480" y="4135240"/>
+            <a:ext cx="868680" cy="223759"/>
+          </a:xfrm>
+          <a:prstGeom prst="rect">
+            <a:avLst/>
+          </a:prstGeom>
+          <a:noFill/>
+          <a:ln/>
+        </p:spPr>
+        <p:txBody>
+          <a:bodyPr wrap="square" lIns="0" tIns="0" rIns="0" bIns="0" rtlCol="0" anchor="ctr"/>
+          <a:lstStyle/>
+          <a:p>
+            <a:pPr algn="r" indent="0" marL="0">
+              <a:buNone/>
+            </a:pPr>
+            <a:r>
+              <a:rPr lang="en-US" sz="1200" dirty="0">
+                <a:solidFill>
+                  <a:srgbClr val="0B7A4A"/>
+                </a:solidFill>
+                <a:latin typeface="Inter" pitchFamily="34" charset="0"/>
+                <a:ea typeface="Inter" pitchFamily="34" charset="-122"/>
+                <a:cs typeface="Inter" pitchFamily="34" charset="-120"/>
+              </a:rPr>
+              <a:t>+13.1%</a:t>
+            </a:r>
+            <a:endParaRPr lang="en-US" sz="1200" dirty="0"/>
+          </a:p>
+        </p:txBody>
+      </p:sp>
+      <p:sp>
+        <p:nvSpPr>
+          <p:cNvPr id="68" name="Text 66"/>
+          <p:cNvSpPr txBox="1"/>
+          <p:nvPr/>
+        </p:nvSpPr>
+        <p:spPr>
+          <a:xfrm>
+            <a:off x="658368" y="4358999"/>
+            <a:ext cx="310896" cy="223759"/>
           </a:xfrm>
           <a:prstGeom prst="rect">
             <a:avLst/>
@@ -31133,22 +31328,22 @@
                 <a:ea typeface="Inter" pitchFamily="34" charset="-122"/>
                 <a:cs typeface="Inter" pitchFamily="34" charset="-120"/>
               </a:rPr>
-              <a:t>14</a:t>
-            </a:r>
-            <a:endParaRPr lang="en-US" sz="1200" dirty="0"/>
-          </a:p>
-        </p:txBody>
-      </p:sp>
-      <p:sp>
-        <p:nvSpPr>
-          <p:cNvPr id="64" name="Text 62"/>
-          <p:cNvSpPr txBox="1"/>
-          <p:nvPr/>
-        </p:nvSpPr>
-        <p:spPr>
-          <a:xfrm>
-            <a:off x="1014984" y="4965730"/>
-            <a:ext cx="1920240" cy="239896"/>
+              <a:t>11</a:t>
+            </a:r>
+            <a:endParaRPr lang="en-US" sz="1200" dirty="0"/>
+          </a:p>
+        </p:txBody>
+      </p:sp>
+      <p:sp>
+        <p:nvSpPr>
+          <p:cNvPr id="69" name="Text 67"/>
+          <p:cNvSpPr txBox="1"/>
+          <p:nvPr/>
+        </p:nvSpPr>
+        <p:spPr>
+          <a:xfrm>
+            <a:off x="1014984" y="4358999"/>
+            <a:ext cx="1920240" cy="223759"/>
           </a:xfrm>
           <a:prstGeom prst="rect">
             <a:avLst/>
@@ -31172,22 +31367,22 @@
                 <a:ea typeface="Inter" pitchFamily="34" charset="-122"/>
                 <a:cs typeface="Inter" pitchFamily="34" charset="-120"/>
               </a:rPr>
-              <a:t>KIA ST GEORGE</a:t>
-            </a:r>
-            <a:endParaRPr lang="en-US" sz="1200" dirty="0"/>
-          </a:p>
-        </p:txBody>
-      </p:sp>
-      <p:sp>
-        <p:nvSpPr>
-          <p:cNvPr id="65" name="Shape 63"/>
+              <a:t>TOYOTA FLAGSTAFF</a:t>
+            </a:r>
+            <a:endParaRPr lang="en-US" sz="1200" dirty="0"/>
+          </a:p>
+        </p:txBody>
+      </p:sp>
+      <p:sp>
+        <p:nvSpPr>
+          <p:cNvPr id="70" name="Shape 68"/>
           <p:cNvSpPr/>
           <p:nvPr/>
         </p:nvSpPr>
         <p:spPr>
           <a:xfrm>
-            <a:off x="3785616" y="5030502"/>
-            <a:ext cx="110915" cy="110352"/>
+            <a:off x="3579876" y="4419414"/>
+            <a:ext cx="32509" cy="102929"/>
           </a:xfrm>
           <a:prstGeom prst="rect">
             <a:avLst/>
@@ -31200,14 +31395,14 @@
       </p:sp>
       <p:sp>
         <p:nvSpPr>
-          <p:cNvPr id="66" name="Text 64"/>
-          <p:cNvSpPr txBox="1"/>
-          <p:nvPr/>
-        </p:nvSpPr>
-        <p:spPr>
-          <a:xfrm>
-            <a:off x="4617720" y="4965730"/>
-            <a:ext cx="1234440" cy="239896"/>
+          <p:cNvPr id="71" name="Text 69"/>
+          <p:cNvSpPr txBox="1"/>
+          <p:nvPr/>
+        </p:nvSpPr>
+        <p:spPr>
+          <a:xfrm>
+            <a:off x="4206240" y="4358999"/>
+            <a:ext cx="777240" cy="223759"/>
           </a:xfrm>
           <a:prstGeom prst="rect">
             <a:avLst/>
@@ -31231,22 +31426,61 @@
                 <a:ea typeface="Inter" pitchFamily="34" charset="-122"/>
                 <a:cs typeface="Inter" pitchFamily="34" charset="-120"/>
               </a:rPr>
-              <a:t>+6.8%</a:t>
-            </a:r>
-            <a:endParaRPr lang="en-US" sz="1200" dirty="0"/>
-          </a:p>
-        </p:txBody>
-      </p:sp>
-      <p:sp>
-        <p:nvSpPr>
-          <p:cNvPr id="67" name="Text 65"/>
-          <p:cNvSpPr txBox="1"/>
-          <p:nvPr/>
-        </p:nvSpPr>
-        <p:spPr>
-          <a:xfrm>
-            <a:off x="658368" y="5205625"/>
-            <a:ext cx="310896" cy="239896"/>
+              <a:t>+$115K</a:t>
+            </a:r>
+            <a:endParaRPr lang="en-US" sz="1200" dirty="0"/>
+          </a:p>
+        </p:txBody>
+      </p:sp>
+      <p:sp>
+        <p:nvSpPr>
+          <p:cNvPr id="72" name="Text 70"/>
+          <p:cNvSpPr txBox="1"/>
+          <p:nvPr/>
+        </p:nvSpPr>
+        <p:spPr>
+          <a:xfrm>
+            <a:off x="4983480" y="4358999"/>
+            <a:ext cx="868680" cy="223759"/>
+          </a:xfrm>
+          <a:prstGeom prst="rect">
+            <a:avLst/>
+          </a:prstGeom>
+          <a:noFill/>
+          <a:ln/>
+        </p:spPr>
+        <p:txBody>
+          <a:bodyPr wrap="square" lIns="0" tIns="0" rIns="0" bIns="0" rtlCol="0" anchor="ctr"/>
+          <a:lstStyle/>
+          <a:p>
+            <a:pPr algn="r" indent="0" marL="0">
+              <a:buNone/>
+            </a:pPr>
+            <a:r>
+              <a:rPr lang="en-US" sz="1200" dirty="0">
+                <a:solidFill>
+                  <a:srgbClr val="0B7A4A"/>
+                </a:solidFill>
+                <a:latin typeface="Inter" pitchFamily="34" charset="0"/>
+                <a:ea typeface="Inter" pitchFamily="34" charset="-122"/>
+                <a:cs typeface="Inter" pitchFamily="34" charset="-120"/>
+              </a:rPr>
+              <a:t>+18.1%</a:t>
+            </a:r>
+            <a:endParaRPr lang="en-US" sz="1200" dirty="0"/>
+          </a:p>
+        </p:txBody>
+      </p:sp>
+      <p:sp>
+        <p:nvSpPr>
+          <p:cNvPr id="73" name="Text 71"/>
+          <p:cNvSpPr txBox="1"/>
+          <p:nvPr/>
+        </p:nvSpPr>
+        <p:spPr>
+          <a:xfrm>
+            <a:off x="658368" y="4582758"/>
+            <a:ext cx="310896" cy="223759"/>
           </a:xfrm>
           <a:prstGeom prst="rect">
             <a:avLst/>
@@ -31270,22 +31504,22 @@
                 <a:ea typeface="Inter" pitchFamily="34" charset="-122"/>
                 <a:cs typeface="Inter" pitchFamily="34" charset="-120"/>
               </a:rPr>
-              <a:t>15</a:t>
-            </a:r>
-            <a:endParaRPr lang="en-US" sz="1200" dirty="0"/>
-          </a:p>
-        </p:txBody>
-      </p:sp>
-      <p:sp>
-        <p:nvSpPr>
-          <p:cNvPr id="68" name="Text 66"/>
-          <p:cNvSpPr txBox="1"/>
-          <p:nvPr/>
-        </p:nvSpPr>
-        <p:spPr>
-          <a:xfrm>
-            <a:off x="1014984" y="5205625"/>
-            <a:ext cx="1920240" cy="239896"/>
+              <a:t>12</a:t>
+            </a:r>
+            <a:endParaRPr lang="en-US" sz="1200" dirty="0"/>
+          </a:p>
+        </p:txBody>
+      </p:sp>
+      <p:sp>
+        <p:nvSpPr>
+          <p:cNvPr id="74" name="Text 72"/>
+          <p:cNvSpPr txBox="1"/>
+          <p:nvPr/>
+        </p:nvSpPr>
+        <p:spPr>
+          <a:xfrm>
+            <a:off x="1014984" y="4582758"/>
+            <a:ext cx="1920240" cy="223759"/>
           </a:xfrm>
           <a:prstGeom prst="rect">
             <a:avLst/>
@@ -31309,22 +31543,22 @@
                 <a:ea typeface="Inter" pitchFamily="34" charset="-122"/>
                 <a:cs typeface="Inter" pitchFamily="34" charset="-120"/>
               </a:rPr>
-              <a:t>SUBARU PRESCOTT</a:t>
-            </a:r>
-            <a:endParaRPr lang="en-US" sz="1200" dirty="0"/>
-          </a:p>
-        </p:txBody>
-      </p:sp>
-      <p:sp>
-        <p:nvSpPr>
-          <p:cNvPr id="69" name="Shape 67"/>
+              <a:t>LR HENDERSON</a:t>
+            </a:r>
+            <a:endParaRPr lang="en-US" sz="1200" dirty="0"/>
+          </a:p>
+        </p:txBody>
+      </p:sp>
+      <p:sp>
+        <p:nvSpPr>
+          <p:cNvPr id="75" name="Shape 73"/>
           <p:cNvSpPr/>
           <p:nvPr/>
         </p:nvSpPr>
         <p:spPr>
           <a:xfrm>
-            <a:off x="3785616" y="5270397"/>
-            <a:ext cx="65894" cy="110352"/>
+            <a:off x="3579876" y="4643173"/>
+            <a:ext cx="13097" cy="102929"/>
           </a:xfrm>
           <a:prstGeom prst="rect">
             <a:avLst/>
@@ -31337,14 +31571,14 @@
       </p:sp>
       <p:sp>
         <p:nvSpPr>
-          <p:cNvPr id="70" name="Text 68"/>
-          <p:cNvSpPr txBox="1"/>
-          <p:nvPr/>
-        </p:nvSpPr>
-        <p:spPr>
-          <a:xfrm>
-            <a:off x="4617720" y="5205625"/>
-            <a:ext cx="1234440" cy="239896"/>
+          <p:cNvPr id="76" name="Text 74"/>
+          <p:cNvSpPr txBox="1"/>
+          <p:nvPr/>
+        </p:nvSpPr>
+        <p:spPr>
+          <a:xfrm>
+            <a:off x="4206240" y="4582758"/>
+            <a:ext cx="777240" cy="223759"/>
           </a:xfrm>
           <a:prstGeom prst="rect">
             <a:avLst/>
@@ -31368,22 +31602,61 @@
                 <a:ea typeface="Inter" pitchFamily="34" charset="-122"/>
                 <a:cs typeface="Inter" pitchFamily="34" charset="-120"/>
               </a:rPr>
-              <a:t>+4.1%</a:t>
-            </a:r>
-            <a:endParaRPr lang="en-US" sz="1200" dirty="0"/>
-          </a:p>
-        </p:txBody>
-      </p:sp>
-      <p:sp>
-        <p:nvSpPr>
-          <p:cNvPr id="71" name="Text 69"/>
-          <p:cNvSpPr txBox="1"/>
-          <p:nvPr/>
-        </p:nvSpPr>
-        <p:spPr>
-          <a:xfrm>
-            <a:off x="658368" y="5445521"/>
-            <a:ext cx="310896" cy="239896"/>
+              <a:t>+$47K</a:t>
+            </a:r>
+            <a:endParaRPr lang="en-US" sz="1200" dirty="0"/>
+          </a:p>
+        </p:txBody>
+      </p:sp>
+      <p:sp>
+        <p:nvSpPr>
+          <p:cNvPr id="77" name="Text 75"/>
+          <p:cNvSpPr txBox="1"/>
+          <p:nvPr/>
+        </p:nvSpPr>
+        <p:spPr>
+          <a:xfrm>
+            <a:off x="4983480" y="4582758"/>
+            <a:ext cx="868680" cy="223759"/>
+          </a:xfrm>
+          <a:prstGeom prst="rect">
+            <a:avLst/>
+          </a:prstGeom>
+          <a:noFill/>
+          <a:ln/>
+        </p:spPr>
+        <p:txBody>
+          <a:bodyPr wrap="square" lIns="0" tIns="0" rIns="0" bIns="0" rtlCol="0" anchor="ctr"/>
+          <a:lstStyle/>
+          <a:p>
+            <a:pPr algn="r" indent="0" marL="0">
+              <a:buNone/>
+            </a:pPr>
+            <a:r>
+              <a:rPr lang="en-US" sz="1200" dirty="0">
+                <a:solidFill>
+                  <a:srgbClr val="0B7A4A"/>
+                </a:solidFill>
+                <a:latin typeface="Inter" pitchFamily="34" charset="0"/>
+                <a:ea typeface="Inter" pitchFamily="34" charset="-122"/>
+                <a:cs typeface="Inter" pitchFamily="34" charset="-120"/>
+              </a:rPr>
+              <a:t>+5.3%</a:t>
+            </a:r>
+            <a:endParaRPr lang="en-US" sz="1200" dirty="0"/>
+          </a:p>
+        </p:txBody>
+      </p:sp>
+      <p:sp>
+        <p:nvSpPr>
+          <p:cNvPr id="78" name="Text 76"/>
+          <p:cNvSpPr txBox="1"/>
+          <p:nvPr/>
+        </p:nvSpPr>
+        <p:spPr>
+          <a:xfrm>
+            <a:off x="658368" y="4806517"/>
+            <a:ext cx="310896" cy="223759"/>
           </a:xfrm>
           <a:prstGeom prst="rect">
             <a:avLst/>
@@ -31407,22 +31680,22 @@
                 <a:ea typeface="Inter" pitchFamily="34" charset="-122"/>
                 <a:cs typeface="Inter" pitchFamily="34" charset="-120"/>
               </a:rPr>
-              <a:t>16</a:t>
-            </a:r>
-            <a:endParaRPr lang="en-US" sz="1200" dirty="0"/>
-          </a:p>
-        </p:txBody>
-      </p:sp>
-      <p:sp>
-        <p:nvSpPr>
-          <p:cNvPr id="72" name="Text 70"/>
-          <p:cNvSpPr txBox="1"/>
-          <p:nvPr/>
-        </p:nvSpPr>
-        <p:spPr>
-          <a:xfrm>
-            <a:off x="1014984" y="5445521"/>
-            <a:ext cx="1920240" cy="239896"/>
+              <a:t>13</a:t>
+            </a:r>
+            <a:endParaRPr lang="en-US" sz="1200" dirty="0"/>
+          </a:p>
+        </p:txBody>
+      </p:sp>
+      <p:sp>
+        <p:nvSpPr>
+          <p:cNvPr id="79" name="Text 77"/>
+          <p:cNvSpPr txBox="1"/>
+          <p:nvPr/>
+        </p:nvSpPr>
+        <p:spPr>
+          <a:xfrm>
+            <a:off x="1014984" y="4806517"/>
+            <a:ext cx="1920240" cy="223759"/>
           </a:xfrm>
           <a:prstGeom prst="rect">
             <a:avLst/>
@@ -31446,22 +31719,22 @@
                 <a:ea typeface="Inter" pitchFamily="34" charset="-122"/>
                 <a:cs typeface="Inter" pitchFamily="34" charset="-120"/>
               </a:rPr>
-              <a:t>AUDI RENO</a:t>
-            </a:r>
-            <a:endParaRPr lang="en-US" sz="1200" dirty="0"/>
-          </a:p>
-        </p:txBody>
-      </p:sp>
-      <p:sp>
-        <p:nvSpPr>
-          <p:cNvPr id="73" name="Shape 71"/>
+              <a:t>SUBARU ST GEORGE</a:t>
+            </a:r>
+            <a:endParaRPr lang="en-US" sz="1200" dirty="0"/>
+          </a:p>
+        </p:txBody>
+      </p:sp>
+      <p:sp>
+        <p:nvSpPr>
+          <p:cNvPr id="80" name="Shape 78"/>
           <p:cNvSpPr/>
           <p:nvPr/>
         </p:nvSpPr>
         <p:spPr>
           <a:xfrm>
-            <a:off x="3785616" y="5510293"/>
-            <a:ext cx="54286" cy="110352"/>
+            <a:off x="3579876" y="4866932"/>
+            <a:ext cx="12802" cy="102929"/>
           </a:xfrm>
           <a:prstGeom prst="rect">
             <a:avLst/>
@@ -31474,14 +31747,14 @@
       </p:sp>
       <p:sp>
         <p:nvSpPr>
-          <p:cNvPr id="74" name="Text 72"/>
-          <p:cNvSpPr txBox="1"/>
-          <p:nvPr/>
-        </p:nvSpPr>
-        <p:spPr>
-          <a:xfrm>
-            <a:off x="4617720" y="5445521"/>
-            <a:ext cx="1234440" cy="239896"/>
+          <p:cNvPr id="81" name="Text 79"/>
+          <p:cNvSpPr txBox="1"/>
+          <p:nvPr/>
+        </p:nvSpPr>
+        <p:spPr>
+          <a:xfrm>
+            <a:off x="4206240" y="4806517"/>
+            <a:ext cx="777240" cy="223759"/>
           </a:xfrm>
           <a:prstGeom prst="rect">
             <a:avLst/>
@@ -31505,22 +31778,61 @@
                 <a:ea typeface="Inter" pitchFamily="34" charset="-122"/>
                 <a:cs typeface="Inter" pitchFamily="34" charset="-120"/>
               </a:rPr>
-              <a:t>+3.3%</a:t>
-            </a:r>
-            <a:endParaRPr lang="en-US" sz="1200" dirty="0"/>
-          </a:p>
-        </p:txBody>
-      </p:sp>
-      <p:sp>
-        <p:nvSpPr>
-          <p:cNvPr id="75" name="Text 73"/>
-          <p:cNvSpPr txBox="1"/>
-          <p:nvPr/>
-        </p:nvSpPr>
-        <p:spPr>
-          <a:xfrm>
-            <a:off x="658368" y="5685416"/>
-            <a:ext cx="310896" cy="239896"/>
+              <a:t>+$43K</a:t>
+            </a:r>
+            <a:endParaRPr lang="en-US" sz="1200" dirty="0"/>
+          </a:p>
+        </p:txBody>
+      </p:sp>
+      <p:sp>
+        <p:nvSpPr>
+          <p:cNvPr id="82" name="Text 80"/>
+          <p:cNvSpPr txBox="1"/>
+          <p:nvPr/>
+        </p:nvSpPr>
+        <p:spPr>
+          <a:xfrm>
+            <a:off x="4983480" y="4806517"/>
+            <a:ext cx="868680" cy="223759"/>
+          </a:xfrm>
+          <a:prstGeom prst="rect">
+            <a:avLst/>
+          </a:prstGeom>
+          <a:noFill/>
+          <a:ln/>
+        </p:spPr>
+        <p:txBody>
+          <a:bodyPr wrap="square" lIns="0" tIns="0" rIns="0" bIns="0" rtlCol="0" anchor="ctr"/>
+          <a:lstStyle/>
+          <a:p>
+            <a:pPr algn="r" indent="0" marL="0">
+              <a:buNone/>
+            </a:pPr>
+            <a:r>
+              <a:rPr lang="en-US" sz="1200" dirty="0">
+                <a:solidFill>
+                  <a:srgbClr val="0B7A4A"/>
+                </a:solidFill>
+                <a:latin typeface="Inter" pitchFamily="34" charset="0"/>
+                <a:ea typeface="Inter" pitchFamily="34" charset="-122"/>
+                <a:cs typeface="Inter" pitchFamily="34" charset="-120"/>
+              </a:rPr>
+              <a:t>+5.2%</a:t>
+            </a:r>
+            <a:endParaRPr lang="en-US" sz="1200" dirty="0"/>
+          </a:p>
+        </p:txBody>
+      </p:sp>
+      <p:sp>
+        <p:nvSpPr>
+          <p:cNvPr id="83" name="Text 81"/>
+          <p:cNvSpPr txBox="1"/>
+          <p:nvPr/>
+        </p:nvSpPr>
+        <p:spPr>
+          <a:xfrm>
+            <a:off x="658368" y="5030276"/>
+            <a:ext cx="310896" cy="223759"/>
           </a:xfrm>
           <a:prstGeom prst="rect">
             <a:avLst/>
@@ -31544,22 +31856,22 @@
                 <a:ea typeface="Inter" pitchFamily="34" charset="-122"/>
                 <a:cs typeface="Inter" pitchFamily="34" charset="-120"/>
               </a:rPr>
-              <a:t>17</a:t>
-            </a:r>
-            <a:endParaRPr lang="en-US" sz="1200" dirty="0"/>
-          </a:p>
-        </p:txBody>
-      </p:sp>
-      <p:sp>
-        <p:nvSpPr>
-          <p:cNvPr id="76" name="Text 74"/>
-          <p:cNvSpPr txBox="1"/>
-          <p:nvPr/>
-        </p:nvSpPr>
-        <p:spPr>
-          <a:xfrm>
-            <a:off x="1014984" y="5685416"/>
-            <a:ext cx="1920240" cy="239896"/>
+              <a:t>14</a:t>
+            </a:r>
+            <a:endParaRPr lang="en-US" sz="1200" dirty="0"/>
+          </a:p>
+        </p:txBody>
+      </p:sp>
+      <p:sp>
+        <p:nvSpPr>
+          <p:cNvPr id="84" name="Text 82"/>
+          <p:cNvSpPr txBox="1"/>
+          <p:nvPr/>
+        </p:nvSpPr>
+        <p:spPr>
+          <a:xfrm>
+            <a:off x="1014984" y="5030276"/>
+            <a:ext cx="1920240" cy="223759"/>
           </a:xfrm>
           <a:prstGeom prst="rect">
             <a:avLst/>
@@ -31583,22 +31895,22 @@
                 <a:ea typeface="Inter" pitchFamily="34" charset="-122"/>
                 <a:cs typeface="Inter" pitchFamily="34" charset="-120"/>
               </a:rPr>
-              <a:t>CDJR POST FALLS</a:t>
-            </a:r>
-            <a:endParaRPr lang="en-US" sz="1200" dirty="0"/>
-          </a:p>
-        </p:txBody>
-      </p:sp>
-      <p:sp>
-        <p:nvSpPr>
-          <p:cNvPr id="77" name="Shape 75"/>
+              <a:t>LR RENO</a:t>
+            </a:r>
+            <a:endParaRPr lang="en-US" sz="1200" dirty="0"/>
+          </a:p>
+        </p:txBody>
+      </p:sp>
+      <p:sp>
+        <p:nvSpPr>
+          <p:cNvPr id="85" name="Shape 83"/>
           <p:cNvSpPr/>
           <p:nvPr/>
         </p:nvSpPr>
         <p:spPr>
           <a:xfrm>
-            <a:off x="3785616" y="5750188"/>
-            <a:ext cx="21762" cy="110352"/>
+            <a:off x="3579876" y="5090691"/>
+            <a:ext cx="12802" cy="102929"/>
           </a:xfrm>
           <a:prstGeom prst="rect">
             <a:avLst/>
@@ -31611,14 +31923,14 @@
       </p:sp>
       <p:sp>
         <p:nvSpPr>
-          <p:cNvPr id="78" name="Text 76"/>
-          <p:cNvSpPr txBox="1"/>
-          <p:nvPr/>
-        </p:nvSpPr>
-        <p:spPr>
-          <a:xfrm>
-            <a:off x="4617720" y="5685416"/>
-            <a:ext cx="1234440" cy="239896"/>
+          <p:cNvPr id="86" name="Text 84"/>
+          <p:cNvSpPr txBox="1"/>
+          <p:nvPr/>
+        </p:nvSpPr>
+        <p:spPr>
+          <a:xfrm>
+            <a:off x="4206240" y="5030276"/>
+            <a:ext cx="777240" cy="223759"/>
           </a:xfrm>
           <a:prstGeom prst="rect">
             <a:avLst/>
@@ -31642,22 +31954,61 @@
                 <a:ea typeface="Inter" pitchFamily="34" charset="-122"/>
                 <a:cs typeface="Inter" pitchFamily="34" charset="-120"/>
               </a:rPr>
-              <a:t>+1.3%</a:t>
-            </a:r>
-            <a:endParaRPr lang="en-US" sz="1200" dirty="0"/>
-          </a:p>
-        </p:txBody>
-      </p:sp>
-      <p:sp>
-        <p:nvSpPr>
-          <p:cNvPr id="79" name="Text 77"/>
-          <p:cNvSpPr txBox="1"/>
-          <p:nvPr/>
-        </p:nvSpPr>
-        <p:spPr>
-          <a:xfrm>
-            <a:off x="6208776" y="1847088"/>
-            <a:ext cx="310896" cy="239896"/>
+              <a:t>+$41K</a:t>
+            </a:r>
+            <a:endParaRPr lang="en-US" sz="1200" dirty="0"/>
+          </a:p>
+        </p:txBody>
+      </p:sp>
+      <p:sp>
+        <p:nvSpPr>
+          <p:cNvPr id="87" name="Text 85"/>
+          <p:cNvSpPr txBox="1"/>
+          <p:nvPr/>
+        </p:nvSpPr>
+        <p:spPr>
+          <a:xfrm>
+            <a:off x="4983480" y="5030276"/>
+            <a:ext cx="868680" cy="223759"/>
+          </a:xfrm>
+          <a:prstGeom prst="rect">
+            <a:avLst/>
+          </a:prstGeom>
+          <a:noFill/>
+          <a:ln/>
+        </p:spPr>
+        <p:txBody>
+          <a:bodyPr wrap="square" lIns="0" tIns="0" rIns="0" bIns="0" rtlCol="0" anchor="ctr"/>
+          <a:lstStyle/>
+          <a:p>
+            <a:pPr algn="r" indent="0" marL="0">
+              <a:buNone/>
+            </a:pPr>
+            <a:r>
+              <a:rPr lang="en-US" sz="1200" dirty="0">
+                <a:solidFill>
+                  <a:srgbClr val="0B7A4A"/>
+                </a:solidFill>
+                <a:latin typeface="Inter" pitchFamily="34" charset="0"/>
+                <a:ea typeface="Inter" pitchFamily="34" charset="-122"/>
+                <a:cs typeface="Inter" pitchFamily="34" charset="-120"/>
+              </a:rPr>
+              <a:t>+12.1%</a:t>
+            </a:r>
+            <a:endParaRPr lang="en-US" sz="1200" dirty="0"/>
+          </a:p>
+        </p:txBody>
+      </p:sp>
+      <p:sp>
+        <p:nvSpPr>
+          <p:cNvPr id="88" name="Text 86"/>
+          <p:cNvSpPr txBox="1"/>
+          <p:nvPr/>
+        </p:nvSpPr>
+        <p:spPr>
+          <a:xfrm>
+            <a:off x="658368" y="5254035"/>
+            <a:ext cx="310896" cy="223759"/>
           </a:xfrm>
           <a:prstGeom prst="rect">
             <a:avLst/>
@@ -31681,6 +32032,534 @@
                 <a:ea typeface="Inter" pitchFamily="34" charset="-122"/>
                 <a:cs typeface="Inter" pitchFamily="34" charset="-120"/>
               </a:rPr>
+              <a:t>15</a:t>
+            </a:r>
+            <a:endParaRPr lang="en-US" sz="1200" dirty="0"/>
+          </a:p>
+        </p:txBody>
+      </p:sp>
+      <p:sp>
+        <p:nvSpPr>
+          <p:cNvPr id="89" name="Text 87"/>
+          <p:cNvSpPr txBox="1"/>
+          <p:nvPr/>
+        </p:nvSpPr>
+        <p:spPr>
+          <a:xfrm>
+            <a:off x="1014984" y="5254035"/>
+            <a:ext cx="1920240" cy="223759"/>
+          </a:xfrm>
+          <a:prstGeom prst="rect">
+            <a:avLst/>
+          </a:prstGeom>
+          <a:noFill/>
+          <a:ln/>
+        </p:spPr>
+        <p:txBody>
+          <a:bodyPr wrap="square" lIns="0" tIns="0" rIns="0" bIns="0" rtlCol="0" anchor="ctr"/>
+          <a:lstStyle/>
+          <a:p>
+            <a:pPr indent="0" marL="0">
+              <a:buNone/>
+            </a:pPr>
+            <a:r>
+              <a:rPr lang="en-US" sz="1200" dirty="0">
+                <a:solidFill>
+                  <a:srgbClr val="1A1A1A"/>
+                </a:solidFill>
+                <a:latin typeface="Inter" pitchFamily="34" charset="0"/>
+                <a:ea typeface="Inter" pitchFamily="34" charset="-122"/>
+                <a:cs typeface="Inter" pitchFamily="34" charset="-120"/>
+              </a:rPr>
+              <a:t>AUDI RENO</a:t>
+            </a:r>
+            <a:endParaRPr lang="en-US" sz="1200" dirty="0"/>
+          </a:p>
+        </p:txBody>
+      </p:sp>
+      <p:sp>
+        <p:nvSpPr>
+          <p:cNvPr id="90" name="Shape 88"/>
+          <p:cNvSpPr/>
+          <p:nvPr/>
+        </p:nvSpPr>
+        <p:spPr>
+          <a:xfrm>
+            <a:off x="3579876" y="5314450"/>
+            <a:ext cx="12802" cy="102929"/>
+          </a:xfrm>
+          <a:prstGeom prst="rect">
+            <a:avLst/>
+          </a:prstGeom>
+          <a:solidFill>
+            <a:srgbClr val="12A566"/>
+          </a:solidFill>
+          <a:ln/>
+        </p:spPr>
+      </p:sp>
+      <p:sp>
+        <p:nvSpPr>
+          <p:cNvPr id="91" name="Text 89"/>
+          <p:cNvSpPr txBox="1"/>
+          <p:nvPr/>
+        </p:nvSpPr>
+        <p:spPr>
+          <a:xfrm>
+            <a:off x="4206240" y="5254035"/>
+            <a:ext cx="777240" cy="223759"/>
+          </a:xfrm>
+          <a:prstGeom prst="rect">
+            <a:avLst/>
+          </a:prstGeom>
+          <a:noFill/>
+          <a:ln/>
+        </p:spPr>
+        <p:txBody>
+          <a:bodyPr wrap="square" lIns="0" tIns="0" rIns="0" bIns="0" rtlCol="0" anchor="ctr"/>
+          <a:lstStyle/>
+          <a:p>
+            <a:pPr algn="r" indent="0" marL="0">
+              <a:buNone/>
+            </a:pPr>
+            <a:r>
+              <a:rPr lang="en-US" sz="1200" b="1" dirty="0">
+                <a:solidFill>
+                  <a:srgbClr val="0B7A4A"/>
+                </a:solidFill>
+                <a:latin typeface="Inter" pitchFamily="34" charset="0"/>
+                <a:ea typeface="Inter" pitchFamily="34" charset="-122"/>
+                <a:cs typeface="Inter" pitchFamily="34" charset="-120"/>
+              </a:rPr>
+              <a:t>+$31K</a:t>
+            </a:r>
+            <a:endParaRPr lang="en-US" sz="1200" dirty="0"/>
+          </a:p>
+        </p:txBody>
+      </p:sp>
+      <p:sp>
+        <p:nvSpPr>
+          <p:cNvPr id="92" name="Text 90"/>
+          <p:cNvSpPr txBox="1"/>
+          <p:nvPr/>
+        </p:nvSpPr>
+        <p:spPr>
+          <a:xfrm>
+            <a:off x="4983480" y="5254035"/>
+            <a:ext cx="868680" cy="223759"/>
+          </a:xfrm>
+          <a:prstGeom prst="rect">
+            <a:avLst/>
+          </a:prstGeom>
+          <a:noFill/>
+          <a:ln/>
+        </p:spPr>
+        <p:txBody>
+          <a:bodyPr wrap="square" lIns="0" tIns="0" rIns="0" bIns="0" rtlCol="0" anchor="ctr"/>
+          <a:lstStyle/>
+          <a:p>
+            <a:pPr algn="r" indent="0" marL="0">
+              <a:buNone/>
+            </a:pPr>
+            <a:r>
+              <a:rPr lang="en-US" sz="1200" dirty="0">
+                <a:solidFill>
+                  <a:srgbClr val="0B7A4A"/>
+                </a:solidFill>
+                <a:latin typeface="Inter" pitchFamily="34" charset="0"/>
+                <a:ea typeface="Inter" pitchFamily="34" charset="-122"/>
+                <a:cs typeface="Inter" pitchFamily="34" charset="-120"/>
+              </a:rPr>
+              <a:t>+3.1%</a:t>
+            </a:r>
+            <a:endParaRPr lang="en-US" sz="1200" dirty="0"/>
+          </a:p>
+        </p:txBody>
+      </p:sp>
+      <p:sp>
+        <p:nvSpPr>
+          <p:cNvPr id="93" name="Text 91"/>
+          <p:cNvSpPr txBox="1"/>
+          <p:nvPr/>
+        </p:nvSpPr>
+        <p:spPr>
+          <a:xfrm>
+            <a:off x="658368" y="5477794"/>
+            <a:ext cx="310896" cy="223759"/>
+          </a:xfrm>
+          <a:prstGeom prst="rect">
+            <a:avLst/>
+          </a:prstGeom>
+          <a:noFill/>
+          <a:ln/>
+        </p:spPr>
+        <p:txBody>
+          <a:bodyPr wrap="square" lIns="0" tIns="0" rIns="0" bIns="0" rtlCol="0" anchor="ctr"/>
+          <a:lstStyle/>
+          <a:p>
+            <a:pPr algn="r" indent="0" marL="0">
+              <a:buNone/>
+            </a:pPr>
+            <a:r>
+              <a:rPr lang="en-US" sz="1200" dirty="0">
+                <a:solidFill>
+                  <a:srgbClr val="9AA3AD"/>
+                </a:solidFill>
+                <a:latin typeface="Inter" pitchFamily="34" charset="0"/>
+                <a:ea typeface="Inter" pitchFamily="34" charset="-122"/>
+                <a:cs typeface="Inter" pitchFamily="34" charset="-120"/>
+              </a:rPr>
+              <a:t>16</a:t>
+            </a:r>
+            <a:endParaRPr lang="en-US" sz="1200" dirty="0"/>
+          </a:p>
+        </p:txBody>
+      </p:sp>
+      <p:sp>
+        <p:nvSpPr>
+          <p:cNvPr id="94" name="Text 92"/>
+          <p:cNvSpPr txBox="1"/>
+          <p:nvPr/>
+        </p:nvSpPr>
+        <p:spPr>
+          <a:xfrm>
+            <a:off x="1014984" y="5477794"/>
+            <a:ext cx="1920240" cy="223759"/>
+          </a:xfrm>
+          <a:prstGeom prst="rect">
+            <a:avLst/>
+          </a:prstGeom>
+          <a:noFill/>
+          <a:ln/>
+        </p:spPr>
+        <p:txBody>
+          <a:bodyPr wrap="square" lIns="0" tIns="0" rIns="0" bIns="0" rtlCol="0" anchor="ctr"/>
+          <a:lstStyle/>
+          <a:p>
+            <a:pPr indent="0" marL="0">
+              <a:buNone/>
+            </a:pPr>
+            <a:r>
+              <a:rPr lang="en-US" sz="1200" dirty="0">
+                <a:solidFill>
+                  <a:srgbClr val="1A1A1A"/>
+                </a:solidFill>
+                <a:latin typeface="Inter" pitchFamily="34" charset="0"/>
+                <a:ea typeface="Inter" pitchFamily="34" charset="-122"/>
+                <a:cs typeface="Inter" pitchFamily="34" charset="-120"/>
+              </a:rPr>
+              <a:t>TOYOTA SPOKANE</a:t>
+            </a:r>
+            <a:endParaRPr lang="en-US" sz="1200" dirty="0"/>
+          </a:p>
+        </p:txBody>
+      </p:sp>
+      <p:sp>
+        <p:nvSpPr>
+          <p:cNvPr id="95" name="Shape 93"/>
+          <p:cNvSpPr/>
+          <p:nvPr/>
+        </p:nvSpPr>
+        <p:spPr>
+          <a:xfrm>
+            <a:off x="3579876" y="5538209"/>
+            <a:ext cx="12802" cy="102929"/>
+          </a:xfrm>
+          <a:prstGeom prst="rect">
+            <a:avLst/>
+          </a:prstGeom>
+          <a:solidFill>
+            <a:srgbClr val="12A566"/>
+          </a:solidFill>
+          <a:ln/>
+        </p:spPr>
+      </p:sp>
+      <p:sp>
+        <p:nvSpPr>
+          <p:cNvPr id="96" name="Text 94"/>
+          <p:cNvSpPr txBox="1"/>
+          <p:nvPr/>
+        </p:nvSpPr>
+        <p:spPr>
+          <a:xfrm>
+            <a:off x="4206240" y="5477794"/>
+            <a:ext cx="777240" cy="223759"/>
+          </a:xfrm>
+          <a:prstGeom prst="rect">
+            <a:avLst/>
+          </a:prstGeom>
+          <a:noFill/>
+          <a:ln/>
+        </p:spPr>
+        <p:txBody>
+          <a:bodyPr wrap="square" lIns="0" tIns="0" rIns="0" bIns="0" rtlCol="0" anchor="ctr"/>
+          <a:lstStyle/>
+          <a:p>
+            <a:pPr algn="r" indent="0" marL="0">
+              <a:buNone/>
+            </a:pPr>
+            <a:r>
+              <a:rPr lang="en-US" sz="1200" b="1" dirty="0">
+                <a:solidFill>
+                  <a:srgbClr val="0B7A4A"/>
+                </a:solidFill>
+                <a:latin typeface="Inter" pitchFamily="34" charset="0"/>
+                <a:ea typeface="Inter" pitchFamily="34" charset="-122"/>
+                <a:cs typeface="Inter" pitchFamily="34" charset="-120"/>
+              </a:rPr>
+              <a:t>+$19K</a:t>
+            </a:r>
+            <a:endParaRPr lang="en-US" sz="1200" dirty="0"/>
+          </a:p>
+        </p:txBody>
+      </p:sp>
+      <p:sp>
+        <p:nvSpPr>
+          <p:cNvPr id="97" name="Text 95"/>
+          <p:cNvSpPr txBox="1"/>
+          <p:nvPr/>
+        </p:nvSpPr>
+        <p:spPr>
+          <a:xfrm>
+            <a:off x="4983480" y="5477794"/>
+            <a:ext cx="868680" cy="223759"/>
+          </a:xfrm>
+          <a:prstGeom prst="rect">
+            <a:avLst/>
+          </a:prstGeom>
+          <a:noFill/>
+          <a:ln/>
+        </p:spPr>
+        <p:txBody>
+          <a:bodyPr wrap="square" lIns="0" tIns="0" rIns="0" bIns="0" rtlCol="0" anchor="ctr"/>
+          <a:lstStyle/>
+          <a:p>
+            <a:pPr algn="r" indent="0" marL="0">
+              <a:buNone/>
+            </a:pPr>
+            <a:r>
+              <a:rPr lang="en-US" sz="1200" dirty="0">
+                <a:solidFill>
+                  <a:srgbClr val="0B7A4A"/>
+                </a:solidFill>
+                <a:latin typeface="Inter" pitchFamily="34" charset="0"/>
+                <a:ea typeface="Inter" pitchFamily="34" charset="-122"/>
+                <a:cs typeface="Inter" pitchFamily="34" charset="-120"/>
+              </a:rPr>
+              <a:t>+2.0%</a:t>
+            </a:r>
+            <a:endParaRPr lang="en-US" sz="1200" dirty="0"/>
+          </a:p>
+        </p:txBody>
+      </p:sp>
+      <p:sp>
+        <p:nvSpPr>
+          <p:cNvPr id="98" name="Text 96"/>
+          <p:cNvSpPr txBox="1"/>
+          <p:nvPr/>
+        </p:nvSpPr>
+        <p:spPr>
+          <a:xfrm>
+            <a:off x="658368" y="5701553"/>
+            <a:ext cx="310896" cy="223759"/>
+          </a:xfrm>
+          <a:prstGeom prst="rect">
+            <a:avLst/>
+          </a:prstGeom>
+          <a:noFill/>
+          <a:ln/>
+        </p:spPr>
+        <p:txBody>
+          <a:bodyPr wrap="square" lIns="0" tIns="0" rIns="0" bIns="0" rtlCol="0" anchor="ctr"/>
+          <a:lstStyle/>
+          <a:p>
+            <a:pPr algn="r" indent="0" marL="0">
+              <a:buNone/>
+            </a:pPr>
+            <a:r>
+              <a:rPr lang="en-US" sz="1200" dirty="0">
+                <a:solidFill>
+                  <a:srgbClr val="9AA3AD"/>
+                </a:solidFill>
+                <a:latin typeface="Inter" pitchFamily="34" charset="0"/>
+                <a:ea typeface="Inter" pitchFamily="34" charset="-122"/>
+                <a:cs typeface="Inter" pitchFamily="34" charset="-120"/>
+              </a:rPr>
+              <a:t>17</a:t>
+            </a:r>
+            <a:endParaRPr lang="en-US" sz="1200" dirty="0"/>
+          </a:p>
+        </p:txBody>
+      </p:sp>
+      <p:sp>
+        <p:nvSpPr>
+          <p:cNvPr id="99" name="Text 97"/>
+          <p:cNvSpPr txBox="1"/>
+          <p:nvPr/>
+        </p:nvSpPr>
+        <p:spPr>
+          <a:xfrm>
+            <a:off x="1014984" y="5701553"/>
+            <a:ext cx="1920240" cy="223759"/>
+          </a:xfrm>
+          <a:prstGeom prst="rect">
+            <a:avLst/>
+          </a:prstGeom>
+          <a:noFill/>
+          <a:ln/>
+        </p:spPr>
+        <p:txBody>
+          <a:bodyPr wrap="square" lIns="0" tIns="0" rIns="0" bIns="0" rtlCol="0" anchor="ctr"/>
+          <a:lstStyle/>
+          <a:p>
+            <a:pPr indent="0" marL="0">
+              <a:buNone/>
+            </a:pPr>
+            <a:r>
+              <a:rPr lang="en-US" sz="1200" dirty="0">
+                <a:solidFill>
+                  <a:srgbClr val="1A1A1A"/>
+                </a:solidFill>
+                <a:latin typeface="Inter" pitchFamily="34" charset="0"/>
+                <a:ea typeface="Inter" pitchFamily="34" charset="-122"/>
+                <a:cs typeface="Inter" pitchFamily="34" charset="-120"/>
+              </a:rPr>
+              <a:t>SUBARU PRESCOTT</a:t>
+            </a:r>
+            <a:endParaRPr lang="en-US" sz="1200" dirty="0"/>
+          </a:p>
+        </p:txBody>
+      </p:sp>
+      <p:sp>
+        <p:nvSpPr>
+          <p:cNvPr id="100" name="Shape 98"/>
+          <p:cNvSpPr/>
+          <p:nvPr/>
+        </p:nvSpPr>
+        <p:spPr>
+          <a:xfrm>
+            <a:off x="3579876" y="5761968"/>
+            <a:ext cx="12802" cy="102929"/>
+          </a:xfrm>
+          <a:prstGeom prst="rect">
+            <a:avLst/>
+          </a:prstGeom>
+          <a:solidFill>
+            <a:srgbClr val="12A566"/>
+          </a:solidFill>
+          <a:ln/>
+        </p:spPr>
+      </p:sp>
+      <p:sp>
+        <p:nvSpPr>
+          <p:cNvPr id="101" name="Text 99"/>
+          <p:cNvSpPr txBox="1"/>
+          <p:nvPr/>
+        </p:nvSpPr>
+        <p:spPr>
+          <a:xfrm>
+            <a:off x="4206240" y="5701553"/>
+            <a:ext cx="777240" cy="223759"/>
+          </a:xfrm>
+          <a:prstGeom prst="rect">
+            <a:avLst/>
+          </a:prstGeom>
+          <a:noFill/>
+          <a:ln/>
+        </p:spPr>
+        <p:txBody>
+          <a:bodyPr wrap="square" lIns="0" tIns="0" rIns="0" bIns="0" rtlCol="0" anchor="ctr"/>
+          <a:lstStyle/>
+          <a:p>
+            <a:pPr algn="r" indent="0" marL="0">
+              <a:buNone/>
+            </a:pPr>
+            <a:r>
+              <a:rPr lang="en-US" sz="1200" b="1" dirty="0">
+                <a:solidFill>
+                  <a:srgbClr val="0B7A4A"/>
+                </a:solidFill>
+                <a:latin typeface="Inter" pitchFamily="34" charset="0"/>
+                <a:ea typeface="Inter" pitchFamily="34" charset="-122"/>
+                <a:cs typeface="Inter" pitchFamily="34" charset="-120"/>
+              </a:rPr>
+              <a:t>+$17K</a:t>
+            </a:r>
+            <a:endParaRPr lang="en-US" sz="1200" dirty="0"/>
+          </a:p>
+        </p:txBody>
+      </p:sp>
+      <p:sp>
+        <p:nvSpPr>
+          <p:cNvPr id="102" name="Text 100"/>
+          <p:cNvSpPr txBox="1"/>
+          <p:nvPr/>
+        </p:nvSpPr>
+        <p:spPr>
+          <a:xfrm>
+            <a:off x="4983480" y="5701553"/>
+            <a:ext cx="868680" cy="223759"/>
+          </a:xfrm>
+          <a:prstGeom prst="rect">
+            <a:avLst/>
+          </a:prstGeom>
+          <a:noFill/>
+          <a:ln/>
+        </p:spPr>
+        <p:txBody>
+          <a:bodyPr wrap="square" lIns="0" tIns="0" rIns="0" bIns="0" rtlCol="0" anchor="ctr"/>
+          <a:lstStyle/>
+          <a:p>
+            <a:pPr algn="r" indent="0" marL="0">
+              <a:buNone/>
+            </a:pPr>
+            <a:r>
+              <a:rPr lang="en-US" sz="1200" dirty="0">
+                <a:solidFill>
+                  <a:srgbClr val="0B7A4A"/>
+                </a:solidFill>
+                <a:latin typeface="Inter" pitchFamily="34" charset="0"/>
+                <a:ea typeface="Inter" pitchFamily="34" charset="-122"/>
+                <a:cs typeface="Inter" pitchFamily="34" charset="-120"/>
+              </a:rPr>
+              <a:t>+3.1%</a:t>
+            </a:r>
+            <a:endParaRPr lang="en-US" sz="1200" dirty="0"/>
+          </a:p>
+        </p:txBody>
+      </p:sp>
+      <p:sp>
+        <p:nvSpPr>
+          <p:cNvPr id="103" name="Text 101"/>
+          <p:cNvSpPr txBox="1"/>
+          <p:nvPr/>
+        </p:nvSpPr>
+        <p:spPr>
+          <a:xfrm>
+            <a:off x="6208776" y="2121408"/>
+            <a:ext cx="310896" cy="223759"/>
+          </a:xfrm>
+          <a:prstGeom prst="rect">
+            <a:avLst/>
+          </a:prstGeom>
+          <a:noFill/>
+          <a:ln/>
+        </p:spPr>
+        <p:txBody>
+          <a:bodyPr wrap="square" lIns="0" tIns="0" rIns="0" bIns="0" rtlCol="0" anchor="ctr"/>
+          <a:lstStyle/>
+          <a:p>
+            <a:pPr algn="r" indent="0" marL="0">
+              <a:buNone/>
+            </a:pPr>
+            <a:r>
+              <a:rPr lang="en-US" sz="1200" dirty="0">
+                <a:solidFill>
+                  <a:srgbClr val="9AA3AD"/>
+                </a:solidFill>
+                <a:latin typeface="Inter" pitchFamily="34" charset="0"/>
+                <a:ea typeface="Inter" pitchFamily="34" charset="-122"/>
+                <a:cs typeface="Inter" pitchFamily="34" charset="-120"/>
+              </a:rPr>
               <a:t>18</a:t>
             </a:r>
             <a:endParaRPr lang="en-US" sz="1200" dirty="0"/>
@@ -31689,14 +32568,14 @@
       </p:sp>
       <p:sp>
         <p:nvSpPr>
-          <p:cNvPr id="80" name="Text 78"/>
-          <p:cNvSpPr txBox="1"/>
-          <p:nvPr/>
-        </p:nvSpPr>
-        <p:spPr>
-          <a:xfrm>
-            <a:off x="6565392" y="1847088"/>
-            <a:ext cx="1920240" cy="239896"/>
+          <p:cNvPr id="104" name="Text 102"/>
+          <p:cNvSpPr txBox="1"/>
+          <p:nvPr/>
+        </p:nvSpPr>
+        <p:spPr>
+          <a:xfrm>
+            <a:off x="6565392" y="2121408"/>
+            <a:ext cx="1920240" cy="223759"/>
           </a:xfrm>
           <a:prstGeom prst="rect">
             <a:avLst/>
@@ -31720,22 +32599,198 @@
                 <a:ea typeface="Inter" pitchFamily="34" charset="-122"/>
                 <a:cs typeface="Inter" pitchFamily="34" charset="-120"/>
               </a:rPr>
-              <a:t>CADILLAC</a:t>
-            </a:r>
-            <a:endParaRPr lang="en-US" sz="1200" dirty="0"/>
-          </a:p>
-        </p:txBody>
-      </p:sp>
-      <p:sp>
-        <p:nvSpPr>
-          <p:cNvPr id="81" name="Shape 79"/>
+              <a:t>KIA ST GEORGE</a:t>
+            </a:r>
+            <a:endParaRPr lang="en-US" sz="1200" dirty="0"/>
+          </a:p>
+        </p:txBody>
+      </p:sp>
+      <p:sp>
+        <p:nvSpPr>
+          <p:cNvPr id="105" name="Shape 103"/>
           <p:cNvSpPr/>
           <p:nvPr/>
         </p:nvSpPr>
         <p:spPr>
           <a:xfrm>
-            <a:off x="9267349" y="1911860"/>
-            <a:ext cx="68675" cy="110352"/>
+            <a:off x="9130284" y="2181823"/>
+            <a:ext cx="12802" cy="102929"/>
+          </a:xfrm>
+          <a:prstGeom prst="rect">
+            <a:avLst/>
+          </a:prstGeom>
+          <a:solidFill>
+            <a:srgbClr val="12A566"/>
+          </a:solidFill>
+          <a:ln/>
+        </p:spPr>
+      </p:sp>
+      <p:sp>
+        <p:nvSpPr>
+          <p:cNvPr id="106" name="Text 104"/>
+          <p:cNvSpPr txBox="1"/>
+          <p:nvPr/>
+        </p:nvSpPr>
+        <p:spPr>
+          <a:xfrm>
+            <a:off x="9756648" y="2121408"/>
+            <a:ext cx="777240" cy="223759"/>
+          </a:xfrm>
+          <a:prstGeom prst="rect">
+            <a:avLst/>
+          </a:prstGeom>
+          <a:noFill/>
+          <a:ln/>
+        </p:spPr>
+        <p:txBody>
+          <a:bodyPr wrap="square" lIns="0" tIns="0" rIns="0" bIns="0" rtlCol="0" anchor="ctr"/>
+          <a:lstStyle/>
+          <a:p>
+            <a:pPr algn="r" indent="0" marL="0">
+              <a:buNone/>
+            </a:pPr>
+            <a:r>
+              <a:rPr lang="en-US" sz="1200" b="1" dirty="0">
+                <a:solidFill>
+                  <a:srgbClr val="0B7A4A"/>
+                </a:solidFill>
+                <a:latin typeface="Inter" pitchFamily="34" charset="0"/>
+                <a:ea typeface="Inter" pitchFamily="34" charset="-122"/>
+                <a:cs typeface="Inter" pitchFamily="34" charset="-120"/>
+              </a:rPr>
+              <a:t>+$12K</a:t>
+            </a:r>
+            <a:endParaRPr lang="en-US" sz="1200" dirty="0"/>
+          </a:p>
+        </p:txBody>
+      </p:sp>
+      <p:sp>
+        <p:nvSpPr>
+          <p:cNvPr id="107" name="Text 105"/>
+          <p:cNvSpPr txBox="1"/>
+          <p:nvPr/>
+        </p:nvSpPr>
+        <p:spPr>
+          <a:xfrm>
+            <a:off x="10533888" y="2121408"/>
+            <a:ext cx="868680" cy="223759"/>
+          </a:xfrm>
+          <a:prstGeom prst="rect">
+            <a:avLst/>
+          </a:prstGeom>
+          <a:noFill/>
+          <a:ln/>
+        </p:spPr>
+        <p:txBody>
+          <a:bodyPr wrap="square" lIns="0" tIns="0" rIns="0" bIns="0" rtlCol="0" anchor="ctr"/>
+          <a:lstStyle/>
+          <a:p>
+            <a:pPr algn="r" indent="0" marL="0">
+              <a:buNone/>
+            </a:pPr>
+            <a:r>
+              <a:rPr lang="en-US" sz="1200" dirty="0">
+                <a:solidFill>
+                  <a:srgbClr val="0B7A4A"/>
+                </a:solidFill>
+                <a:latin typeface="Inter" pitchFamily="34" charset="0"/>
+                <a:ea typeface="Inter" pitchFamily="34" charset="-122"/>
+                <a:cs typeface="Inter" pitchFamily="34" charset="-120"/>
+              </a:rPr>
+              <a:t>+1.1%</a:t>
+            </a:r>
+            <a:endParaRPr lang="en-US" sz="1200" dirty="0"/>
+          </a:p>
+        </p:txBody>
+      </p:sp>
+      <p:sp>
+        <p:nvSpPr>
+          <p:cNvPr id="108" name="Text 106"/>
+          <p:cNvSpPr txBox="1"/>
+          <p:nvPr/>
+        </p:nvSpPr>
+        <p:spPr>
+          <a:xfrm>
+            <a:off x="6208776" y="2345167"/>
+            <a:ext cx="310896" cy="223759"/>
+          </a:xfrm>
+          <a:prstGeom prst="rect">
+            <a:avLst/>
+          </a:prstGeom>
+          <a:noFill/>
+          <a:ln/>
+        </p:spPr>
+        <p:txBody>
+          <a:bodyPr wrap="square" lIns="0" tIns="0" rIns="0" bIns="0" rtlCol="0" anchor="ctr"/>
+          <a:lstStyle/>
+          <a:p>
+            <a:pPr algn="r" indent="0" marL="0">
+              <a:buNone/>
+            </a:pPr>
+            <a:r>
+              <a:rPr lang="en-US" sz="1200" dirty="0">
+                <a:solidFill>
+                  <a:srgbClr val="9AA3AD"/>
+                </a:solidFill>
+                <a:latin typeface="Inter" pitchFamily="34" charset="0"/>
+                <a:ea typeface="Inter" pitchFamily="34" charset="-122"/>
+                <a:cs typeface="Inter" pitchFamily="34" charset="-120"/>
+              </a:rPr>
+              <a:t>19</a:t>
+            </a:r>
+            <a:endParaRPr lang="en-US" sz="1200" dirty="0"/>
+          </a:p>
+        </p:txBody>
+      </p:sp>
+      <p:sp>
+        <p:nvSpPr>
+          <p:cNvPr id="109" name="Text 107"/>
+          <p:cNvSpPr txBox="1"/>
+          <p:nvPr/>
+        </p:nvSpPr>
+        <p:spPr>
+          <a:xfrm>
+            <a:off x="6565392" y="2345167"/>
+            <a:ext cx="1920240" cy="223759"/>
+          </a:xfrm>
+          <a:prstGeom prst="rect">
+            <a:avLst/>
+          </a:prstGeom>
+          <a:noFill/>
+          <a:ln/>
+        </p:spPr>
+        <p:txBody>
+          <a:bodyPr wrap="square" lIns="0" tIns="0" rIns="0" bIns="0" rtlCol="0" anchor="ctr"/>
+          <a:lstStyle/>
+          <a:p>
+            <a:pPr indent="0" marL="0">
+              <a:buNone/>
+            </a:pPr>
+            <a:r>
+              <a:rPr lang="en-US" sz="1200" dirty="0">
+                <a:solidFill>
+                  <a:srgbClr val="1A1A1A"/>
+                </a:solidFill>
+                <a:latin typeface="Inter" pitchFamily="34" charset="0"/>
+                <a:ea typeface="Inter" pitchFamily="34" charset="-122"/>
+                <a:cs typeface="Inter" pitchFamily="34" charset="-120"/>
+              </a:rPr>
+              <a:t>VOLVO</a:t>
+            </a:r>
+            <a:endParaRPr lang="en-US" sz="1200" dirty="0"/>
+          </a:p>
+        </p:txBody>
+      </p:sp>
+      <p:sp>
+        <p:nvSpPr>
+          <p:cNvPr id="110" name="Shape 108"/>
+          <p:cNvSpPr/>
+          <p:nvPr/>
+        </p:nvSpPr>
+        <p:spPr>
+          <a:xfrm>
+            <a:off x="9127747" y="2405582"/>
+            <a:ext cx="12802" cy="102929"/>
           </a:xfrm>
           <a:prstGeom prst="rect">
             <a:avLst/>
@@ -31748,14 +32803,14 @@
       </p:sp>
       <p:sp>
         <p:nvSpPr>
-          <p:cNvPr id="82" name="Text 80"/>
-          <p:cNvSpPr txBox="1"/>
-          <p:nvPr/>
-        </p:nvSpPr>
-        <p:spPr>
-          <a:xfrm>
-            <a:off x="10168128" y="1847088"/>
-            <a:ext cx="1234440" cy="239896"/>
+          <p:cNvPr id="111" name="Text 109"/>
+          <p:cNvSpPr txBox="1"/>
+          <p:nvPr/>
+        </p:nvSpPr>
+        <p:spPr>
+          <a:xfrm>
+            <a:off x="9756648" y="2345167"/>
+            <a:ext cx="777240" cy="223759"/>
           </a:xfrm>
           <a:prstGeom prst="rect">
             <a:avLst/>
@@ -31779,22 +32834,61 @@
                 <a:ea typeface="Inter" pitchFamily="34" charset="-122"/>
                 <a:cs typeface="Inter" pitchFamily="34" charset="-120"/>
               </a:rPr>
-              <a:t>−4.2%</a:t>
-            </a:r>
-            <a:endParaRPr lang="en-US" sz="1200" dirty="0"/>
-          </a:p>
-        </p:txBody>
-      </p:sp>
-      <p:sp>
-        <p:nvSpPr>
-          <p:cNvPr id="83" name="Text 81"/>
-          <p:cNvSpPr txBox="1"/>
-          <p:nvPr/>
-        </p:nvSpPr>
-        <p:spPr>
-          <a:xfrm>
-            <a:off x="6208776" y="2086984"/>
-            <a:ext cx="310896" cy="239896"/>
+              <a:t>−$9K</a:t>
+            </a:r>
+            <a:endParaRPr lang="en-US" sz="1200" dirty="0"/>
+          </a:p>
+        </p:txBody>
+      </p:sp>
+      <p:sp>
+        <p:nvSpPr>
+          <p:cNvPr id="112" name="Text 110"/>
+          <p:cNvSpPr txBox="1"/>
+          <p:nvPr/>
+        </p:nvSpPr>
+        <p:spPr>
+          <a:xfrm>
+            <a:off x="10533888" y="2345167"/>
+            <a:ext cx="868680" cy="223759"/>
+          </a:xfrm>
+          <a:prstGeom prst="rect">
+            <a:avLst/>
+          </a:prstGeom>
+          <a:noFill/>
+          <a:ln/>
+        </p:spPr>
+        <p:txBody>
+          <a:bodyPr wrap="square" lIns="0" tIns="0" rIns="0" bIns="0" rtlCol="0" anchor="ctr"/>
+          <a:lstStyle/>
+          <a:p>
+            <a:pPr algn="r" indent="0" marL="0">
+              <a:buNone/>
+            </a:pPr>
+            <a:r>
+              <a:rPr lang="en-US" sz="1200" dirty="0">
+                <a:solidFill>
+                  <a:srgbClr val="A82B26"/>
+                </a:solidFill>
+                <a:latin typeface="Inter" pitchFamily="34" charset="0"/>
+                <a:ea typeface="Inter" pitchFamily="34" charset="-122"/>
+                <a:cs typeface="Inter" pitchFamily="34" charset="-120"/>
+              </a:rPr>
+              <a:t>−1.0%</a:t>
+            </a:r>
+            <a:endParaRPr lang="en-US" sz="1200" dirty="0"/>
+          </a:p>
+        </p:txBody>
+      </p:sp>
+      <p:sp>
+        <p:nvSpPr>
+          <p:cNvPr id="113" name="Text 111"/>
+          <p:cNvSpPr txBox="1"/>
+          <p:nvPr/>
+        </p:nvSpPr>
+        <p:spPr>
+          <a:xfrm>
+            <a:off x="6208776" y="2568926"/>
+            <a:ext cx="310896" cy="223759"/>
           </a:xfrm>
           <a:prstGeom prst="rect">
             <a:avLst/>
@@ -31818,22 +32912,22 @@
                 <a:ea typeface="Inter" pitchFamily="34" charset="-122"/>
                 <a:cs typeface="Inter" pitchFamily="34" charset="-120"/>
               </a:rPr>
-              <a:t>19</a:t>
-            </a:r>
-            <a:endParaRPr lang="en-US" sz="1200" dirty="0"/>
-          </a:p>
-        </p:txBody>
-      </p:sp>
-      <p:sp>
-        <p:nvSpPr>
-          <p:cNvPr id="84" name="Text 82"/>
-          <p:cNvSpPr txBox="1"/>
-          <p:nvPr/>
-        </p:nvSpPr>
-        <p:spPr>
-          <a:xfrm>
-            <a:off x="6565392" y="2086984"/>
-            <a:ext cx="1920240" cy="239896"/>
+              <a:t>20</a:t>
+            </a:r>
+            <a:endParaRPr lang="en-US" sz="1200" dirty="0"/>
+          </a:p>
+        </p:txBody>
+      </p:sp>
+      <p:sp>
+        <p:nvSpPr>
+          <p:cNvPr id="114" name="Text 112"/>
+          <p:cNvSpPr txBox="1"/>
+          <p:nvPr/>
+        </p:nvSpPr>
+        <p:spPr>
+          <a:xfrm>
+            <a:off x="6565392" y="2568926"/>
+            <a:ext cx="1920240" cy="223759"/>
           </a:xfrm>
           <a:prstGeom prst="rect">
             <a:avLst/>
@@ -31857,22 +32951,22 @@
                 <a:ea typeface="Inter" pitchFamily="34" charset="-122"/>
                 <a:cs typeface="Inter" pitchFamily="34" charset="-120"/>
               </a:rPr>
-              <a:t>SUBARU LV</a:t>
-            </a:r>
-            <a:endParaRPr lang="en-US" sz="1200" dirty="0"/>
-          </a:p>
-        </p:txBody>
-      </p:sp>
-      <p:sp>
-        <p:nvSpPr>
-          <p:cNvPr id="85" name="Shape 83"/>
+              <a:t>TOYOTA PRESCOTT</a:t>
+            </a:r>
+            <a:endParaRPr lang="en-US" sz="1200" dirty="0"/>
+          </a:p>
+        </p:txBody>
+      </p:sp>
+      <p:sp>
+        <p:nvSpPr>
+          <p:cNvPr id="115" name="Shape 113"/>
           <p:cNvSpPr/>
           <p:nvPr/>
         </p:nvSpPr>
         <p:spPr>
           <a:xfrm>
-            <a:off x="9226847" y="2151755"/>
-            <a:ext cx="109177" cy="110352"/>
+            <a:off x="9127670" y="2629341"/>
+            <a:ext cx="12802" cy="102929"/>
           </a:xfrm>
           <a:prstGeom prst="rect">
             <a:avLst/>
@@ -31885,14 +32979,14 @@
       </p:sp>
       <p:sp>
         <p:nvSpPr>
-          <p:cNvPr id="86" name="Text 84"/>
-          <p:cNvSpPr txBox="1"/>
-          <p:nvPr/>
-        </p:nvSpPr>
-        <p:spPr>
-          <a:xfrm>
-            <a:off x="10168128" y="2086984"/>
-            <a:ext cx="1234440" cy="239896"/>
+          <p:cNvPr id="116" name="Text 114"/>
+          <p:cNvSpPr txBox="1"/>
+          <p:nvPr/>
+        </p:nvSpPr>
+        <p:spPr>
+          <a:xfrm>
+            <a:off x="9756648" y="2568926"/>
+            <a:ext cx="777240" cy="223759"/>
           </a:xfrm>
           <a:prstGeom prst="rect">
             <a:avLst/>
@@ -31916,22 +33010,61 @@
                 <a:ea typeface="Inter" pitchFamily="34" charset="-122"/>
                 <a:cs typeface="Inter" pitchFamily="34" charset="-120"/>
               </a:rPr>
-              <a:t>−6.7%</a:t>
-            </a:r>
-            <a:endParaRPr lang="en-US" sz="1200" dirty="0"/>
-          </a:p>
-        </p:txBody>
-      </p:sp>
-      <p:sp>
-        <p:nvSpPr>
-          <p:cNvPr id="87" name="Text 85"/>
-          <p:cNvSpPr txBox="1"/>
-          <p:nvPr/>
-        </p:nvSpPr>
-        <p:spPr>
-          <a:xfrm>
-            <a:off x="6208776" y="2326879"/>
-            <a:ext cx="310896" cy="239896"/>
+              <a:t>−$9K</a:t>
+            </a:r>
+            <a:endParaRPr lang="en-US" sz="1200" dirty="0"/>
+          </a:p>
+        </p:txBody>
+      </p:sp>
+      <p:sp>
+        <p:nvSpPr>
+          <p:cNvPr id="117" name="Text 115"/>
+          <p:cNvSpPr txBox="1"/>
+          <p:nvPr/>
+        </p:nvSpPr>
+        <p:spPr>
+          <a:xfrm>
+            <a:off x="10533888" y="2568926"/>
+            <a:ext cx="868680" cy="223759"/>
+          </a:xfrm>
+          <a:prstGeom prst="rect">
+            <a:avLst/>
+          </a:prstGeom>
+          <a:noFill/>
+          <a:ln/>
+        </p:spPr>
+        <p:txBody>
+          <a:bodyPr wrap="square" lIns="0" tIns="0" rIns="0" bIns="0" rtlCol="0" anchor="ctr"/>
+          <a:lstStyle/>
+          <a:p>
+            <a:pPr algn="r" indent="0" marL="0">
+              <a:buNone/>
+            </a:pPr>
+            <a:r>
+              <a:rPr lang="en-US" sz="1200" dirty="0">
+                <a:solidFill>
+                  <a:srgbClr val="A82B26"/>
+                </a:solidFill>
+                <a:latin typeface="Inter" pitchFamily="34" charset="0"/>
+                <a:ea typeface="Inter" pitchFamily="34" charset="-122"/>
+                <a:cs typeface="Inter" pitchFamily="34" charset="-120"/>
+              </a:rPr>
+              <a:t>−1.1%</a:t>
+            </a:r>
+            <a:endParaRPr lang="en-US" sz="1200" dirty="0"/>
+          </a:p>
+        </p:txBody>
+      </p:sp>
+      <p:sp>
+        <p:nvSpPr>
+          <p:cNvPr id="118" name="Text 116"/>
+          <p:cNvSpPr txBox="1"/>
+          <p:nvPr/>
+        </p:nvSpPr>
+        <p:spPr>
+          <a:xfrm>
+            <a:off x="6208776" y="2792685"/>
+            <a:ext cx="310896" cy="223759"/>
           </a:xfrm>
           <a:prstGeom prst="rect">
             <a:avLst/>
@@ -31955,22 +33088,22 @@
                 <a:ea typeface="Inter" pitchFamily="34" charset="-122"/>
                 <a:cs typeface="Inter" pitchFamily="34" charset="-120"/>
               </a:rPr>
-              <a:t>20</a:t>
-            </a:r>
-            <a:endParaRPr lang="en-US" sz="1200" dirty="0"/>
-          </a:p>
-        </p:txBody>
-      </p:sp>
-      <p:sp>
-        <p:nvSpPr>
-          <p:cNvPr id="88" name="Text 86"/>
-          <p:cNvSpPr txBox="1"/>
-          <p:nvPr/>
-        </p:nvSpPr>
-        <p:spPr>
-          <a:xfrm>
-            <a:off x="6565392" y="2326879"/>
-            <a:ext cx="1920240" cy="239896"/>
+              <a:t>21</a:t>
+            </a:r>
+            <a:endParaRPr lang="en-US" sz="1200" dirty="0"/>
+          </a:p>
+        </p:txBody>
+      </p:sp>
+      <p:sp>
+        <p:nvSpPr>
+          <p:cNvPr id="119" name="Text 117"/>
+          <p:cNvSpPr txBox="1"/>
+          <p:nvPr/>
+        </p:nvSpPr>
+        <p:spPr>
+          <a:xfrm>
+            <a:off x="6565392" y="2792685"/>
+            <a:ext cx="1920240" cy="223759"/>
           </a:xfrm>
           <a:prstGeom prst="rect">
             <a:avLst/>
@@ -31994,22 +33127,22 @@
                 <a:ea typeface="Inter" pitchFamily="34" charset="-122"/>
                 <a:cs typeface="Inter" pitchFamily="34" charset="-120"/>
               </a:rPr>
-              <a:t>KIA LV</a:t>
-            </a:r>
-            <a:endParaRPr lang="en-US" sz="1200" dirty="0"/>
-          </a:p>
-        </p:txBody>
-      </p:sp>
-      <p:sp>
-        <p:nvSpPr>
-          <p:cNvPr id="89" name="Shape 87"/>
+              <a:t>GMC PRESCOTT</a:t>
+            </a:r>
+            <a:endParaRPr lang="en-US" sz="1200" dirty="0"/>
+          </a:p>
+        </p:txBody>
+      </p:sp>
+      <p:sp>
+        <p:nvSpPr>
+          <p:cNvPr id="120" name="Shape 118"/>
           <p:cNvSpPr/>
           <p:nvPr/>
         </p:nvSpPr>
         <p:spPr>
           <a:xfrm>
-            <a:off x="9209036" y="2391651"/>
-            <a:ext cx="126988" cy="110352"/>
+            <a:off x="9127631" y="2853100"/>
+            <a:ext cx="12802" cy="102929"/>
           </a:xfrm>
           <a:prstGeom prst="rect">
             <a:avLst/>
@@ -32022,14 +33155,14 @@
       </p:sp>
       <p:sp>
         <p:nvSpPr>
-          <p:cNvPr id="90" name="Text 88"/>
-          <p:cNvSpPr txBox="1"/>
-          <p:nvPr/>
-        </p:nvSpPr>
-        <p:spPr>
-          <a:xfrm>
-            <a:off x="10168128" y="2326879"/>
-            <a:ext cx="1234440" cy="239896"/>
+          <p:cNvPr id="121" name="Text 119"/>
+          <p:cNvSpPr txBox="1"/>
+          <p:nvPr/>
+        </p:nvSpPr>
+        <p:spPr>
+          <a:xfrm>
+            <a:off x="9756648" y="2792685"/>
+            <a:ext cx="777240" cy="223759"/>
           </a:xfrm>
           <a:prstGeom prst="rect">
             <a:avLst/>
@@ -32053,22 +33186,61 @@
                 <a:ea typeface="Inter" pitchFamily="34" charset="-122"/>
                 <a:cs typeface="Inter" pitchFamily="34" charset="-120"/>
               </a:rPr>
-              <a:t>−7.8%</a:t>
-            </a:r>
-            <a:endParaRPr lang="en-US" sz="1200" dirty="0"/>
-          </a:p>
-        </p:txBody>
-      </p:sp>
-      <p:sp>
-        <p:nvSpPr>
-          <p:cNvPr id="91" name="Text 89"/>
-          <p:cNvSpPr txBox="1"/>
-          <p:nvPr/>
-        </p:nvSpPr>
-        <p:spPr>
-          <a:xfrm>
-            <a:off x="6208776" y="2566775"/>
-            <a:ext cx="310896" cy="239896"/>
+              <a:t>−$9K</a:t>
+            </a:r>
+            <a:endParaRPr lang="en-US" sz="1200" dirty="0"/>
+          </a:p>
+        </p:txBody>
+      </p:sp>
+      <p:sp>
+        <p:nvSpPr>
+          <p:cNvPr id="122" name="Text 120"/>
+          <p:cNvSpPr txBox="1"/>
+          <p:nvPr/>
+        </p:nvSpPr>
+        <p:spPr>
+          <a:xfrm>
+            <a:off x="10533888" y="2792685"/>
+            <a:ext cx="868680" cy="223759"/>
+          </a:xfrm>
+          <a:prstGeom prst="rect">
+            <a:avLst/>
+          </a:prstGeom>
+          <a:noFill/>
+          <a:ln/>
+        </p:spPr>
+        <p:txBody>
+          <a:bodyPr wrap="square" lIns="0" tIns="0" rIns="0" bIns="0" rtlCol="0" anchor="ctr"/>
+          <a:lstStyle/>
+          <a:p>
+            <a:pPr algn="r" indent="0" marL="0">
+              <a:buNone/>
+            </a:pPr>
+            <a:r>
+              <a:rPr lang="en-US" sz="1200" dirty="0">
+                <a:solidFill>
+                  <a:srgbClr val="A82B26"/>
+                </a:solidFill>
+                <a:latin typeface="Inter" pitchFamily="34" charset="0"/>
+                <a:ea typeface="Inter" pitchFamily="34" charset="-122"/>
+                <a:cs typeface="Inter" pitchFamily="34" charset="-120"/>
+              </a:rPr>
+              <a:t>−1.8%</a:t>
+            </a:r>
+            <a:endParaRPr lang="en-US" sz="1200" dirty="0"/>
+          </a:p>
+        </p:txBody>
+      </p:sp>
+      <p:sp>
+        <p:nvSpPr>
+          <p:cNvPr id="123" name="Text 121"/>
+          <p:cNvSpPr txBox="1"/>
+          <p:nvPr/>
+        </p:nvSpPr>
+        <p:spPr>
+          <a:xfrm>
+            <a:off x="6208776" y="3016444"/>
+            <a:ext cx="310896" cy="223759"/>
           </a:xfrm>
           <a:prstGeom prst="rect">
             <a:avLst/>
@@ -32092,22 +33264,22 @@
                 <a:ea typeface="Inter" pitchFamily="34" charset="-122"/>
                 <a:cs typeface="Inter" pitchFamily="34" charset="-120"/>
               </a:rPr>
-              <a:t>21</a:t>
-            </a:r>
-            <a:endParaRPr lang="en-US" sz="1200" dirty="0"/>
-          </a:p>
-        </p:txBody>
-      </p:sp>
-      <p:sp>
-        <p:nvSpPr>
-          <p:cNvPr id="92" name="Text 90"/>
-          <p:cNvSpPr txBox="1"/>
-          <p:nvPr/>
-        </p:nvSpPr>
-        <p:spPr>
-          <a:xfrm>
-            <a:off x="6565392" y="2566775"/>
-            <a:ext cx="1920240" cy="239896"/>
+              <a:t>22</a:t>
+            </a:r>
+            <a:endParaRPr lang="en-US" sz="1200" dirty="0"/>
+          </a:p>
+        </p:txBody>
+      </p:sp>
+      <p:sp>
+        <p:nvSpPr>
+          <p:cNvPr id="124" name="Text 122"/>
+          <p:cNvSpPr txBox="1"/>
+          <p:nvPr/>
+        </p:nvSpPr>
+        <p:spPr>
+          <a:xfrm>
+            <a:off x="6565392" y="3016444"/>
+            <a:ext cx="1920240" cy="223759"/>
           </a:xfrm>
           <a:prstGeom prst="rect">
             <a:avLst/>
@@ -32131,22 +33303,22 @@
                 <a:ea typeface="Inter" pitchFamily="34" charset="-122"/>
                 <a:cs typeface="Inter" pitchFamily="34" charset="-120"/>
               </a:rPr>
-              <a:t>CHEVY LV</a:t>
-            </a:r>
-            <a:endParaRPr lang="en-US" sz="1200" dirty="0"/>
-          </a:p>
-        </p:txBody>
-      </p:sp>
-      <p:sp>
-        <p:nvSpPr>
-          <p:cNvPr id="93" name="Shape 91"/>
+              <a:t>MAZDA</a:t>
+            </a:r>
+            <a:endParaRPr lang="en-US" sz="1200" dirty="0"/>
+          </a:p>
+        </p:txBody>
+      </p:sp>
+      <p:sp>
+        <p:nvSpPr>
+          <p:cNvPr id="125" name="Shape 123"/>
           <p:cNvSpPr/>
           <p:nvPr/>
         </p:nvSpPr>
         <p:spPr>
           <a:xfrm>
-            <a:off x="9157295" y="2631546"/>
-            <a:ext cx="178729" cy="110352"/>
+            <a:off x="9121264" y="3076859"/>
+            <a:ext cx="12802" cy="102929"/>
           </a:xfrm>
           <a:prstGeom prst="rect">
             <a:avLst/>
@@ -32159,14 +33331,14 @@
       </p:sp>
       <p:sp>
         <p:nvSpPr>
-          <p:cNvPr id="94" name="Text 92"/>
-          <p:cNvSpPr txBox="1"/>
-          <p:nvPr/>
-        </p:nvSpPr>
-        <p:spPr>
-          <a:xfrm>
-            <a:off x="10168128" y="2566775"/>
-            <a:ext cx="1234440" cy="239896"/>
+          <p:cNvPr id="126" name="Text 124"/>
+          <p:cNvSpPr txBox="1"/>
+          <p:nvPr/>
+        </p:nvSpPr>
+        <p:spPr>
+          <a:xfrm>
+            <a:off x="9756648" y="3016444"/>
+            <a:ext cx="777240" cy="223759"/>
           </a:xfrm>
           <a:prstGeom prst="rect">
             <a:avLst/>
@@ -32190,22 +33362,61 @@
                 <a:ea typeface="Inter" pitchFamily="34" charset="-122"/>
                 <a:cs typeface="Inter" pitchFamily="34" charset="-120"/>
               </a:rPr>
-              <a:t>−11.0%</a:t>
-            </a:r>
-            <a:endParaRPr lang="en-US" sz="1200" dirty="0"/>
-          </a:p>
-        </p:txBody>
-      </p:sp>
-      <p:sp>
-        <p:nvSpPr>
-          <p:cNvPr id="95" name="Text 93"/>
-          <p:cNvSpPr txBox="1"/>
-          <p:nvPr/>
-        </p:nvSpPr>
-        <p:spPr>
-          <a:xfrm>
-            <a:off x="6208776" y="2806670"/>
-            <a:ext cx="310896" cy="239896"/>
+              <a:t>−$32K</a:t>
+            </a:r>
+            <a:endParaRPr lang="en-US" sz="1200" dirty="0"/>
+          </a:p>
+        </p:txBody>
+      </p:sp>
+      <p:sp>
+        <p:nvSpPr>
+          <p:cNvPr id="127" name="Text 125"/>
+          <p:cNvSpPr txBox="1"/>
+          <p:nvPr/>
+        </p:nvSpPr>
+        <p:spPr>
+          <a:xfrm>
+            <a:off x="10533888" y="3016444"/>
+            <a:ext cx="868680" cy="223759"/>
+          </a:xfrm>
+          <a:prstGeom prst="rect">
+            <a:avLst/>
+          </a:prstGeom>
+          <a:noFill/>
+          <a:ln/>
+        </p:spPr>
+        <p:txBody>
+          <a:bodyPr wrap="square" lIns="0" tIns="0" rIns="0" bIns="0" rtlCol="0" anchor="ctr"/>
+          <a:lstStyle/>
+          <a:p>
+            <a:pPr algn="r" indent="0" marL="0">
+              <a:buNone/>
+            </a:pPr>
+            <a:r>
+              <a:rPr lang="en-US" sz="1200" dirty="0">
+                <a:solidFill>
+                  <a:srgbClr val="A82B26"/>
+                </a:solidFill>
+                <a:latin typeface="Inter" pitchFamily="34" charset="0"/>
+                <a:ea typeface="Inter" pitchFamily="34" charset="-122"/>
+                <a:cs typeface="Inter" pitchFamily="34" charset="-120"/>
+              </a:rPr>
+              <a:t>−6.2%</a:t>
+            </a:r>
+            <a:endParaRPr lang="en-US" sz="1200" dirty="0"/>
+          </a:p>
+        </p:txBody>
+      </p:sp>
+      <p:sp>
+        <p:nvSpPr>
+          <p:cNvPr id="128" name="Text 126"/>
+          <p:cNvSpPr txBox="1"/>
+          <p:nvPr/>
+        </p:nvSpPr>
+        <p:spPr>
+          <a:xfrm>
+            <a:off x="6208776" y="3240203"/>
+            <a:ext cx="310896" cy="223759"/>
           </a:xfrm>
           <a:prstGeom prst="rect">
             <a:avLst/>
@@ -32229,22 +33440,22 @@
                 <a:ea typeface="Inter" pitchFamily="34" charset="-122"/>
                 <a:cs typeface="Inter" pitchFamily="34" charset="-120"/>
               </a:rPr>
-              <a:t>22</a:t>
-            </a:r>
-            <a:endParaRPr lang="en-US" sz="1200" dirty="0"/>
-          </a:p>
-        </p:txBody>
-      </p:sp>
-      <p:sp>
-        <p:nvSpPr>
-          <p:cNvPr id="96" name="Text 94"/>
-          <p:cNvSpPr txBox="1"/>
-          <p:nvPr/>
-        </p:nvSpPr>
-        <p:spPr>
-          <a:xfrm>
-            <a:off x="6565392" y="2806670"/>
-            <a:ext cx="1920240" cy="239896"/>
+              <a:t>23</a:t>
+            </a:r>
+            <a:endParaRPr lang="en-US" sz="1200" dirty="0"/>
+          </a:p>
+        </p:txBody>
+      </p:sp>
+      <p:sp>
+        <p:nvSpPr>
+          <p:cNvPr id="129" name="Text 127"/>
+          <p:cNvSpPr txBox="1"/>
+          <p:nvPr/>
+        </p:nvSpPr>
+        <p:spPr>
+          <a:xfrm>
+            <a:off x="6565392" y="3240203"/>
+            <a:ext cx="1920240" cy="223759"/>
           </a:xfrm>
           <a:prstGeom prst="rect">
             <a:avLst/>
@@ -32276,14 +33487,14 @@
       </p:sp>
       <p:sp>
         <p:nvSpPr>
-          <p:cNvPr id="97" name="Shape 95"/>
+          <p:cNvPr id="130" name="Shape 128"/>
           <p:cNvSpPr/>
           <p:nvPr/>
         </p:nvSpPr>
         <p:spPr>
           <a:xfrm>
-            <a:off x="9151411" y="2871442"/>
-            <a:ext cx="184613" cy="110352"/>
+            <a:off x="9119676" y="3300618"/>
+            <a:ext cx="12802" cy="102929"/>
           </a:xfrm>
           <a:prstGeom prst="rect">
             <a:avLst/>
@@ -32296,14 +33507,14 @@
       </p:sp>
       <p:sp>
         <p:nvSpPr>
-          <p:cNvPr id="98" name="Text 96"/>
-          <p:cNvSpPr txBox="1"/>
-          <p:nvPr/>
-        </p:nvSpPr>
-        <p:spPr>
-          <a:xfrm>
-            <a:off x="10168128" y="2806670"/>
-            <a:ext cx="1234440" cy="239896"/>
+          <p:cNvPr id="131" name="Text 129"/>
+          <p:cNvSpPr txBox="1"/>
+          <p:nvPr/>
+        </p:nvSpPr>
+        <p:spPr>
+          <a:xfrm>
+            <a:off x="9756648" y="3240203"/>
+            <a:ext cx="777240" cy="223759"/>
           </a:xfrm>
           <a:prstGeom prst="rect">
             <a:avLst/>
@@ -32327,22 +33538,61 @@
                 <a:ea typeface="Inter" pitchFamily="34" charset="-122"/>
                 <a:cs typeface="Inter" pitchFamily="34" charset="-120"/>
               </a:rPr>
-              <a:t>−11.4%</a:t>
-            </a:r>
-            <a:endParaRPr lang="en-US" sz="1200" dirty="0"/>
-          </a:p>
-        </p:txBody>
-      </p:sp>
-      <p:sp>
-        <p:nvSpPr>
-          <p:cNvPr id="99" name="Text 97"/>
-          <p:cNvSpPr txBox="1"/>
-          <p:nvPr/>
-        </p:nvSpPr>
-        <p:spPr>
-          <a:xfrm>
-            <a:off x="6208776" y="3046566"/>
-            <a:ext cx="310896" cy="239896"/>
+              <a:t>−$38K</a:t>
+            </a:r>
+            <a:endParaRPr lang="en-US" sz="1200" dirty="0"/>
+          </a:p>
+        </p:txBody>
+      </p:sp>
+      <p:sp>
+        <p:nvSpPr>
+          <p:cNvPr id="132" name="Text 130"/>
+          <p:cNvSpPr txBox="1"/>
+          <p:nvPr/>
+        </p:nvSpPr>
+        <p:spPr>
+          <a:xfrm>
+            <a:off x="10533888" y="3240203"/>
+            <a:ext cx="868680" cy="223759"/>
+          </a:xfrm>
+          <a:prstGeom prst="rect">
+            <a:avLst/>
+          </a:prstGeom>
+          <a:noFill/>
+          <a:ln/>
+        </p:spPr>
+        <p:txBody>
+          <a:bodyPr wrap="square" lIns="0" tIns="0" rIns="0" bIns="0" rtlCol="0" anchor="ctr"/>
+          <a:lstStyle/>
+          <a:p>
+            <a:pPr algn="r" indent="0" marL="0">
+              <a:buNone/>
+            </a:pPr>
+            <a:r>
+              <a:rPr lang="en-US" sz="1200" dirty="0">
+                <a:solidFill>
+                  <a:srgbClr val="A82B26"/>
+                </a:solidFill>
+                <a:latin typeface="Inter" pitchFamily="34" charset="0"/>
+                <a:ea typeface="Inter" pitchFamily="34" charset="-122"/>
+                <a:cs typeface="Inter" pitchFamily="34" charset="-120"/>
+              </a:rPr>
+              <a:t>−4.2%</a:t>
+            </a:r>
+            <a:endParaRPr lang="en-US" sz="1200" dirty="0"/>
+          </a:p>
+        </p:txBody>
+      </p:sp>
+      <p:sp>
+        <p:nvSpPr>
+          <p:cNvPr id="133" name="Text 131"/>
+          <p:cNvSpPr txBox="1"/>
+          <p:nvPr/>
+        </p:nvSpPr>
+        <p:spPr>
+          <a:xfrm>
+            <a:off x="6208776" y="3463962"/>
+            <a:ext cx="310896" cy="223759"/>
           </a:xfrm>
           <a:prstGeom prst="rect">
             <a:avLst/>
@@ -32366,22 +33616,22 @@
                 <a:ea typeface="Inter" pitchFamily="34" charset="-122"/>
                 <a:cs typeface="Inter" pitchFamily="34" charset="-120"/>
               </a:rPr>
-              <a:t>23</a:t>
-            </a:r>
-            <a:endParaRPr lang="en-US" sz="1200" dirty="0"/>
-          </a:p>
-        </p:txBody>
-      </p:sp>
-      <p:sp>
-        <p:nvSpPr>
-          <p:cNvPr id="100" name="Text 98"/>
-          <p:cNvSpPr txBox="1"/>
-          <p:nvPr/>
-        </p:nvSpPr>
-        <p:spPr>
-          <a:xfrm>
-            <a:off x="6565392" y="3046566"/>
-            <a:ext cx="1920240" cy="239896"/>
+              <a:t>24</a:t>
+            </a:r>
+            <a:endParaRPr lang="en-US" sz="1200" dirty="0"/>
+          </a:p>
+        </p:txBody>
+      </p:sp>
+      <p:sp>
+        <p:nvSpPr>
+          <p:cNvPr id="134" name="Text 132"/>
+          <p:cNvSpPr txBox="1"/>
+          <p:nvPr/>
+        </p:nvSpPr>
+        <p:spPr>
+          <a:xfrm>
+            <a:off x="6565392" y="3463962"/>
+            <a:ext cx="1920240" cy="223759"/>
           </a:xfrm>
           <a:prstGeom prst="rect">
             <a:avLst/>
@@ -32405,22 +33655,22 @@
                 <a:ea typeface="Inter" pitchFamily="34" charset="-122"/>
                 <a:cs typeface="Inter" pitchFamily="34" charset="-120"/>
               </a:rPr>
-              <a:t>VW ST GEORGE</a:t>
-            </a:r>
-            <a:endParaRPr lang="en-US" sz="1200" dirty="0"/>
-          </a:p>
-        </p:txBody>
-      </p:sp>
-      <p:sp>
-        <p:nvSpPr>
-          <p:cNvPr id="101" name="Shape 99"/>
+              <a:t>HYUNDAI ST GEORGE</a:t>
+            </a:r>
+            <a:endParaRPr lang="en-US" sz="1200" dirty="0"/>
+          </a:p>
+        </p:txBody>
+      </p:sp>
+      <p:sp>
+        <p:nvSpPr>
+          <p:cNvPr id="135" name="Shape 133"/>
           <p:cNvSpPr/>
           <p:nvPr/>
         </p:nvSpPr>
         <p:spPr>
           <a:xfrm>
-            <a:off x="9132099" y="3111337"/>
-            <a:ext cx="203925" cy="110352"/>
+            <a:off x="9119152" y="3524377"/>
+            <a:ext cx="12802" cy="102929"/>
           </a:xfrm>
           <a:prstGeom prst="rect">
             <a:avLst/>
@@ -32433,14 +33683,14 @@
       </p:sp>
       <p:sp>
         <p:nvSpPr>
-          <p:cNvPr id="102" name="Text 100"/>
-          <p:cNvSpPr txBox="1"/>
-          <p:nvPr/>
-        </p:nvSpPr>
-        <p:spPr>
-          <a:xfrm>
-            <a:off x="10168128" y="3046566"/>
-            <a:ext cx="1234440" cy="239896"/>
+          <p:cNvPr id="136" name="Text 134"/>
+          <p:cNvSpPr txBox="1"/>
+          <p:nvPr/>
+        </p:nvSpPr>
+        <p:spPr>
+          <a:xfrm>
+            <a:off x="9756648" y="3463962"/>
+            <a:ext cx="777240" cy="223759"/>
           </a:xfrm>
           <a:prstGeom prst="rect">
             <a:avLst/>
@@ -32464,22 +33714,61 @@
                 <a:ea typeface="Inter" pitchFamily="34" charset="-122"/>
                 <a:cs typeface="Inter" pitchFamily="34" charset="-120"/>
               </a:rPr>
-              <a:t>−12.6%</a:t>
-            </a:r>
-            <a:endParaRPr lang="en-US" sz="1200" dirty="0"/>
-          </a:p>
-        </p:txBody>
-      </p:sp>
-      <p:sp>
-        <p:nvSpPr>
-          <p:cNvPr id="103" name="Text 101"/>
-          <p:cNvSpPr txBox="1"/>
-          <p:nvPr/>
-        </p:nvSpPr>
-        <p:spPr>
-          <a:xfrm>
-            <a:off x="6208776" y="3286461"/>
-            <a:ext cx="310896" cy="239896"/>
+              <a:t>−$40K</a:t>
+            </a:r>
+            <a:endParaRPr lang="en-US" sz="1200" dirty="0"/>
+          </a:p>
+        </p:txBody>
+      </p:sp>
+      <p:sp>
+        <p:nvSpPr>
+          <p:cNvPr id="137" name="Text 135"/>
+          <p:cNvSpPr txBox="1"/>
+          <p:nvPr/>
+        </p:nvSpPr>
+        <p:spPr>
+          <a:xfrm>
+            <a:off x="10533888" y="3463962"/>
+            <a:ext cx="868680" cy="223759"/>
+          </a:xfrm>
+          <a:prstGeom prst="rect">
+            <a:avLst/>
+          </a:prstGeom>
+          <a:noFill/>
+          <a:ln/>
+        </p:spPr>
+        <p:txBody>
+          <a:bodyPr wrap="square" lIns="0" tIns="0" rIns="0" bIns="0" rtlCol="0" anchor="ctr"/>
+          <a:lstStyle/>
+          <a:p>
+            <a:pPr algn="r" indent="0" marL="0">
+              <a:buNone/>
+            </a:pPr>
+            <a:r>
+              <a:rPr lang="en-US" sz="1200" dirty="0">
+                <a:solidFill>
+                  <a:srgbClr val="A82B26"/>
+                </a:solidFill>
+                <a:latin typeface="Inter" pitchFamily="34" charset="0"/>
+                <a:ea typeface="Inter" pitchFamily="34" charset="-122"/>
+                <a:cs typeface="Inter" pitchFamily="34" charset="-120"/>
+              </a:rPr>
+              <a:t>−3.7%</a:t>
+            </a:r>
+            <a:endParaRPr lang="en-US" sz="1200" dirty="0"/>
+          </a:p>
+        </p:txBody>
+      </p:sp>
+      <p:sp>
+        <p:nvSpPr>
+          <p:cNvPr id="138" name="Text 136"/>
+          <p:cNvSpPr txBox="1"/>
+          <p:nvPr/>
+        </p:nvSpPr>
+        <p:spPr>
+          <a:xfrm>
+            <a:off x="6208776" y="3687721"/>
+            <a:ext cx="310896" cy="223759"/>
           </a:xfrm>
           <a:prstGeom prst="rect">
             <a:avLst/>
@@ -32503,22 +33792,22 @@
                 <a:ea typeface="Inter" pitchFamily="34" charset="-122"/>
                 <a:cs typeface="Inter" pitchFamily="34" charset="-120"/>
               </a:rPr>
-              <a:t>24</a:t>
-            </a:r>
-            <a:endParaRPr lang="en-US" sz="1200" dirty="0"/>
-          </a:p>
-        </p:txBody>
-      </p:sp>
-      <p:sp>
-        <p:nvSpPr>
-          <p:cNvPr id="104" name="Text 102"/>
-          <p:cNvSpPr txBox="1"/>
-          <p:nvPr/>
-        </p:nvSpPr>
-        <p:spPr>
-          <a:xfrm>
-            <a:off x="6565392" y="3286461"/>
-            <a:ext cx="1920240" cy="239896"/>
+              <a:t>25</a:t>
+            </a:r>
+            <a:endParaRPr lang="en-US" sz="1200" dirty="0"/>
+          </a:p>
+        </p:txBody>
+      </p:sp>
+      <p:sp>
+        <p:nvSpPr>
+          <p:cNvPr id="139" name="Text 137"/>
+          <p:cNvSpPr txBox="1"/>
+          <p:nvPr/>
+        </p:nvSpPr>
+        <p:spPr>
+          <a:xfrm>
+            <a:off x="6565392" y="3687721"/>
+            <a:ext cx="1920240" cy="223759"/>
           </a:xfrm>
           <a:prstGeom prst="rect">
             <a:avLst/>
@@ -32542,22 +33831,22 @@
                 <a:ea typeface="Inter" pitchFamily="34" charset="-122"/>
                 <a:cs typeface="Inter" pitchFamily="34" charset="-120"/>
               </a:rPr>
-              <a:t>SUBARU ST GEORGE</a:t>
-            </a:r>
-            <a:endParaRPr lang="en-US" sz="1200" dirty="0"/>
-          </a:p>
-        </p:txBody>
-      </p:sp>
-      <p:sp>
-        <p:nvSpPr>
-          <p:cNvPr id="105" name="Shape 103"/>
+              <a:t>VW ST GEORGE</a:t>
+            </a:r>
+            <a:endParaRPr lang="en-US" sz="1200" dirty="0"/>
+          </a:p>
+        </p:txBody>
+      </p:sp>
+      <p:sp>
+        <p:nvSpPr>
+          <p:cNvPr id="140" name="Shape 138"/>
           <p:cNvSpPr/>
           <p:nvPr/>
         </p:nvSpPr>
         <p:spPr>
           <a:xfrm>
-            <a:off x="9091020" y="3351233"/>
-            <a:ext cx="245004" cy="110352"/>
+            <a:off x="9113768" y="3748136"/>
+            <a:ext cx="16516" cy="102929"/>
           </a:xfrm>
           <a:prstGeom prst="rect">
             <a:avLst/>
@@ -32570,14 +33859,14 @@
       </p:sp>
       <p:sp>
         <p:nvSpPr>
-          <p:cNvPr id="106" name="Text 104"/>
-          <p:cNvSpPr txBox="1"/>
-          <p:nvPr/>
-        </p:nvSpPr>
-        <p:spPr>
-          <a:xfrm>
-            <a:off x="10168128" y="3286461"/>
-            <a:ext cx="1234440" cy="239896"/>
+          <p:cNvPr id="141" name="Text 139"/>
+          <p:cNvSpPr txBox="1"/>
+          <p:nvPr/>
+        </p:nvSpPr>
+        <p:spPr>
+          <a:xfrm>
+            <a:off x="9756648" y="3687721"/>
+            <a:ext cx="777240" cy="223759"/>
           </a:xfrm>
           <a:prstGeom prst="rect">
             <a:avLst/>
@@ -32601,22 +33890,61 @@
                 <a:ea typeface="Inter" pitchFamily="34" charset="-122"/>
                 <a:cs typeface="Inter" pitchFamily="34" charset="-120"/>
               </a:rPr>
-              <a:t>−15.1%</a:t>
-            </a:r>
-            <a:endParaRPr lang="en-US" sz="1200" dirty="0"/>
-          </a:p>
-        </p:txBody>
-      </p:sp>
-      <p:sp>
-        <p:nvSpPr>
-          <p:cNvPr id="107" name="Text 105"/>
-          <p:cNvSpPr txBox="1"/>
-          <p:nvPr/>
-        </p:nvSpPr>
-        <p:spPr>
-          <a:xfrm>
-            <a:off x="6208776" y="3526357"/>
-            <a:ext cx="310896" cy="239896"/>
+              <a:t>−$59K</a:t>
+            </a:r>
+            <a:endParaRPr lang="en-US" sz="1200" dirty="0"/>
+          </a:p>
+        </p:txBody>
+      </p:sp>
+      <p:sp>
+        <p:nvSpPr>
+          <p:cNvPr id="142" name="Text 140"/>
+          <p:cNvSpPr txBox="1"/>
+          <p:nvPr/>
+        </p:nvSpPr>
+        <p:spPr>
+          <a:xfrm>
+            <a:off x="10533888" y="3687721"/>
+            <a:ext cx="868680" cy="223759"/>
+          </a:xfrm>
+          <a:prstGeom prst="rect">
+            <a:avLst/>
+          </a:prstGeom>
+          <a:noFill/>
+          <a:ln/>
+        </p:spPr>
+        <p:txBody>
+          <a:bodyPr wrap="square" lIns="0" tIns="0" rIns="0" bIns="0" rtlCol="0" anchor="ctr"/>
+          <a:lstStyle/>
+          <a:p>
+            <a:pPr algn="r" indent="0" marL="0">
+              <a:buNone/>
+            </a:pPr>
+            <a:r>
+              <a:rPr lang="en-US" sz="1200" dirty="0">
+                <a:solidFill>
+                  <a:srgbClr val="A82B26"/>
+                </a:solidFill>
+                <a:latin typeface="Inter" pitchFamily="34" charset="0"/>
+                <a:ea typeface="Inter" pitchFamily="34" charset="-122"/>
+                <a:cs typeface="Inter" pitchFamily="34" charset="-120"/>
+              </a:rPr>
+              <a:t>−21.2%</a:t>
+            </a:r>
+            <a:endParaRPr lang="en-US" sz="1200" dirty="0"/>
+          </a:p>
+        </p:txBody>
+      </p:sp>
+      <p:sp>
+        <p:nvSpPr>
+          <p:cNvPr id="143" name="Text 141"/>
+          <p:cNvSpPr txBox="1"/>
+          <p:nvPr/>
+        </p:nvSpPr>
+        <p:spPr>
+          <a:xfrm>
+            <a:off x="6208776" y="3911480"/>
+            <a:ext cx="310896" cy="223759"/>
           </a:xfrm>
           <a:prstGeom prst="rect">
             <a:avLst/>
@@ -32640,22 +33968,22 @@
                 <a:ea typeface="Inter" pitchFamily="34" charset="-122"/>
                 <a:cs typeface="Inter" pitchFamily="34" charset="-120"/>
               </a:rPr>
-              <a:t>25</a:t>
-            </a:r>
-            <a:endParaRPr lang="en-US" sz="1200" dirty="0"/>
-          </a:p>
-        </p:txBody>
-      </p:sp>
-      <p:sp>
-        <p:nvSpPr>
-          <p:cNvPr id="108" name="Text 106"/>
-          <p:cNvSpPr txBox="1"/>
-          <p:nvPr/>
-        </p:nvSpPr>
-        <p:spPr>
-          <a:xfrm>
-            <a:off x="6565392" y="3526357"/>
-            <a:ext cx="1920240" cy="239896"/>
+              <a:t>26</a:t>
+            </a:r>
+            <a:endParaRPr lang="en-US" sz="1200" dirty="0"/>
+          </a:p>
+        </p:txBody>
+      </p:sp>
+      <p:sp>
+        <p:nvSpPr>
+          <p:cNvPr id="144" name="Text 142"/>
+          <p:cNvSpPr txBox="1"/>
+          <p:nvPr/>
+        </p:nvSpPr>
+        <p:spPr>
+          <a:xfrm>
+            <a:off x="6565392" y="3911480"/>
+            <a:ext cx="1920240" cy="223759"/>
           </a:xfrm>
           <a:prstGeom prst="rect">
             <a:avLst/>
@@ -32679,22 +34007,22 @@
                 <a:ea typeface="Inter" pitchFamily="34" charset="-122"/>
                 <a:cs typeface="Inter" pitchFamily="34" charset="-120"/>
               </a:rPr>
-              <a:t>VW HENDERSON</a:t>
-            </a:r>
-            <a:endParaRPr lang="en-US" sz="1200" dirty="0"/>
-          </a:p>
-        </p:txBody>
-      </p:sp>
-      <p:sp>
-        <p:nvSpPr>
-          <p:cNvPr id="109" name="Shape 107"/>
+              <a:t>HONDA FLAGSTAFF</a:t>
+            </a:r>
+            <a:endParaRPr lang="en-US" sz="1200" dirty="0"/>
+          </a:p>
+        </p:txBody>
+      </p:sp>
+      <p:sp>
+        <p:nvSpPr>
+          <p:cNvPr id="145" name="Shape 143"/>
           <p:cNvSpPr/>
           <p:nvPr/>
         </p:nvSpPr>
         <p:spPr>
           <a:xfrm>
-            <a:off x="9014543" y="3591128"/>
-            <a:ext cx="321481" cy="110352"/>
+            <a:off x="9106887" y="3971895"/>
+            <a:ext cx="23397" cy="102929"/>
           </a:xfrm>
           <a:prstGeom prst="rect">
             <a:avLst/>
@@ -32707,14 +34035,14 @@
       </p:sp>
       <p:sp>
         <p:nvSpPr>
-          <p:cNvPr id="110" name="Text 108"/>
-          <p:cNvSpPr txBox="1"/>
-          <p:nvPr/>
-        </p:nvSpPr>
-        <p:spPr>
-          <a:xfrm>
-            <a:off x="10168128" y="3526357"/>
-            <a:ext cx="1234440" cy="239896"/>
+          <p:cNvPr id="146" name="Text 144"/>
+          <p:cNvSpPr txBox="1"/>
+          <p:nvPr/>
+        </p:nvSpPr>
+        <p:spPr>
+          <a:xfrm>
+            <a:off x="9756648" y="3911480"/>
+            <a:ext cx="777240" cy="223759"/>
           </a:xfrm>
           <a:prstGeom prst="rect">
             <a:avLst/>
@@ -32738,100 +34066,61 @@
                 <a:ea typeface="Inter" pitchFamily="34" charset="-122"/>
                 <a:cs typeface="Inter" pitchFamily="34" charset="-120"/>
               </a:rPr>
-              <a:t>−19.8%</a:t>
-            </a:r>
-            <a:endParaRPr lang="en-US" sz="1200" dirty="0"/>
-          </a:p>
-        </p:txBody>
-      </p:sp>
-      <p:sp>
-        <p:nvSpPr>
-          <p:cNvPr id="111" name="Text 109"/>
-          <p:cNvSpPr txBox="1"/>
-          <p:nvPr/>
-        </p:nvSpPr>
-        <p:spPr>
-          <a:xfrm>
-            <a:off x="6208776" y="3766252"/>
-            <a:ext cx="310896" cy="239896"/>
-          </a:xfrm>
-          <a:prstGeom prst="rect">
-            <a:avLst/>
-          </a:prstGeom>
-          <a:noFill/>
-          <a:ln/>
-        </p:spPr>
-        <p:txBody>
-          <a:bodyPr wrap="square" lIns="0" tIns="0" rIns="0" bIns="0" rtlCol="0" anchor="ctr"/>
-          <a:lstStyle/>
-          <a:p>
-            <a:pPr algn="r" indent="0" marL="0">
-              <a:buNone/>
-            </a:pPr>
-            <a:r>
-              <a:rPr lang="en-US" sz="1200" dirty="0">
-                <a:solidFill>
-                  <a:srgbClr val="9AA3AD"/>
-                </a:solidFill>
-                <a:latin typeface="Inter" pitchFamily="34" charset="0"/>
-                <a:ea typeface="Inter" pitchFamily="34" charset="-122"/>
-                <a:cs typeface="Inter" pitchFamily="34" charset="-120"/>
-              </a:rPr>
-              <a:t>26</a:t>
-            </a:r>
-            <a:endParaRPr lang="en-US" sz="1200" dirty="0"/>
-          </a:p>
-        </p:txBody>
-      </p:sp>
-      <p:sp>
-        <p:nvSpPr>
-          <p:cNvPr id="112" name="Text 110"/>
-          <p:cNvSpPr txBox="1"/>
-          <p:nvPr/>
-        </p:nvSpPr>
-        <p:spPr>
-          <a:xfrm>
-            <a:off x="6565392" y="3766252"/>
-            <a:ext cx="1920240" cy="239896"/>
-          </a:xfrm>
-          <a:prstGeom prst="rect">
-            <a:avLst/>
-          </a:prstGeom>
-          <a:noFill/>
-          <a:ln/>
-        </p:spPr>
-        <p:txBody>
-          <a:bodyPr wrap="square" lIns="0" tIns="0" rIns="0" bIns="0" rtlCol="0" anchor="ctr"/>
-          <a:lstStyle/>
-          <a:p>
-            <a:pPr indent="0" marL="0">
-              <a:buNone/>
-            </a:pPr>
-            <a:r>
-              <a:rPr lang="en-US" sz="1200" dirty="0">
-                <a:solidFill>
-                  <a:srgbClr val="1A1A1A"/>
-                </a:solidFill>
-                <a:latin typeface="Inter" pitchFamily="34" charset="0"/>
-                <a:ea typeface="Inter" pitchFamily="34" charset="-122"/>
-                <a:cs typeface="Inter" pitchFamily="34" charset="-120"/>
-              </a:rPr>
-              <a:t>GMC PRESCOTT</a:t>
-            </a:r>
-            <a:endParaRPr lang="en-US" sz="1200" dirty="0"/>
-          </a:p>
-        </p:txBody>
-      </p:sp>
-      <p:sp>
-        <p:nvSpPr>
-          <p:cNvPr id="113" name="Shape 111"/>
+              <a:t>−$83K</a:t>
+            </a:r>
+            <a:endParaRPr lang="en-US" sz="1200" dirty="0"/>
+          </a:p>
+        </p:txBody>
+      </p:sp>
+      <p:sp>
+        <p:nvSpPr>
+          <p:cNvPr id="147" name="Text 145"/>
+          <p:cNvSpPr txBox="1"/>
+          <p:nvPr/>
+        </p:nvSpPr>
+        <p:spPr>
+          <a:xfrm>
+            <a:off x="10533888" y="3911480"/>
+            <a:ext cx="868680" cy="223759"/>
+          </a:xfrm>
+          <a:prstGeom prst="rect">
+            <a:avLst/>
+          </a:prstGeom>
+          <a:noFill/>
+          <a:ln/>
+        </p:spPr>
+        <p:txBody>
+          <a:bodyPr wrap="square" lIns="0" tIns="0" rIns="0" bIns="0" rtlCol="0" anchor="ctr"/>
+          <a:lstStyle/>
+          <a:p>
+            <a:pPr algn="r" indent="0" marL="0">
+              <a:buNone/>
+            </a:pPr>
+            <a:r>
+              <a:rPr lang="en-US" sz="1200" dirty="0">
+                <a:solidFill>
+                  <a:srgbClr val="A82B26"/>
+                </a:solidFill>
+                <a:latin typeface="Inter" pitchFamily="34" charset="0"/>
+                <a:ea typeface="Inter" pitchFamily="34" charset="-122"/>
+                <a:cs typeface="Inter" pitchFamily="34" charset="-120"/>
+              </a:rPr>
+              <a:t>−38.1%</a:t>
+            </a:r>
+            <a:endParaRPr lang="en-US" sz="1200" dirty="0"/>
+          </a:p>
+        </p:txBody>
+      </p:sp>
+      <p:sp>
+        <p:nvSpPr>
+          <p:cNvPr id="148" name="Shape 146"/>
           <p:cNvSpPr/>
           <p:nvPr/>
         </p:nvSpPr>
         <p:spPr>
           <a:xfrm>
-            <a:off x="9006870" y="3831024"/>
-            <a:ext cx="329154" cy="110352"/>
+            <a:off x="11457432" y="3957200"/>
+            <a:ext cx="54864" cy="132319"/>
           </a:xfrm>
           <a:prstGeom prst="rect">
             <a:avLst/>
@@ -32844,53 +34133,14 @@
       </p:sp>
       <p:sp>
         <p:nvSpPr>
-          <p:cNvPr id="114" name="Text 112"/>
-          <p:cNvSpPr txBox="1"/>
-          <p:nvPr/>
-        </p:nvSpPr>
-        <p:spPr>
-          <a:xfrm>
-            <a:off x="10168128" y="3766252"/>
-            <a:ext cx="1234440" cy="239896"/>
-          </a:xfrm>
-          <a:prstGeom prst="rect">
-            <a:avLst/>
-          </a:prstGeom>
-          <a:noFill/>
-          <a:ln/>
-        </p:spPr>
-        <p:txBody>
-          <a:bodyPr wrap="square" lIns="0" tIns="0" rIns="0" bIns="0" rtlCol="0" anchor="ctr"/>
-          <a:lstStyle/>
-          <a:p>
-            <a:pPr algn="r" indent="0" marL="0">
-              <a:buNone/>
-            </a:pPr>
-            <a:r>
-              <a:rPr lang="en-US" sz="1200" b="1" dirty="0">
-                <a:solidFill>
-                  <a:srgbClr val="A82B26"/>
-                </a:solidFill>
-                <a:latin typeface="Inter" pitchFamily="34" charset="0"/>
-                <a:ea typeface="Inter" pitchFamily="34" charset="-122"/>
-                <a:cs typeface="Inter" pitchFamily="34" charset="-120"/>
-              </a:rPr>
-              <a:t>−20.3%</a:t>
-            </a:r>
-            <a:endParaRPr lang="en-US" sz="1200" dirty="0"/>
-          </a:p>
-        </p:txBody>
-      </p:sp>
-      <p:sp>
-        <p:nvSpPr>
-          <p:cNvPr id="115" name="Text 113"/>
-          <p:cNvSpPr txBox="1"/>
-          <p:nvPr/>
-        </p:nvSpPr>
-        <p:spPr>
-          <a:xfrm>
-            <a:off x="6208776" y="4006148"/>
-            <a:ext cx="310896" cy="239896"/>
+          <p:cNvPr id="149" name="Text 147"/>
+          <p:cNvSpPr txBox="1"/>
+          <p:nvPr/>
+        </p:nvSpPr>
+        <p:spPr>
+          <a:xfrm>
+            <a:off x="6208776" y="4135240"/>
+            <a:ext cx="310896" cy="223759"/>
           </a:xfrm>
           <a:prstGeom prst="rect">
             <a:avLst/>
@@ -32922,14 +34172,14 @@
       </p:sp>
       <p:sp>
         <p:nvSpPr>
-          <p:cNvPr id="116" name="Text 114"/>
-          <p:cNvSpPr txBox="1"/>
-          <p:nvPr/>
-        </p:nvSpPr>
-        <p:spPr>
-          <a:xfrm>
-            <a:off x="6565392" y="4006148"/>
-            <a:ext cx="1920240" cy="239896"/>
+          <p:cNvPr id="150" name="Text 148"/>
+          <p:cNvSpPr txBox="1"/>
+          <p:nvPr/>
+        </p:nvSpPr>
+        <p:spPr>
+          <a:xfrm>
+            <a:off x="6565392" y="4135240"/>
+            <a:ext cx="1920240" cy="223759"/>
           </a:xfrm>
           <a:prstGeom prst="rect">
             <a:avLst/>
@@ -32953,22 +34203,22 @@
                 <a:ea typeface="Inter" pitchFamily="34" charset="-122"/>
                 <a:cs typeface="Inter" pitchFamily="34" charset="-120"/>
               </a:rPr>
-              <a:t>VOLVO</a:t>
-            </a:r>
-            <a:endParaRPr lang="en-US" sz="1200" dirty="0"/>
-          </a:p>
-        </p:txBody>
-      </p:sp>
-      <p:sp>
-        <p:nvSpPr>
-          <p:cNvPr id="117" name="Shape 115"/>
+              <a:t>SUBARU LV</a:t>
+            </a:r>
+            <a:endParaRPr lang="en-US" sz="1200" dirty="0"/>
+          </a:p>
+        </p:txBody>
+      </p:sp>
+      <p:sp>
+        <p:nvSpPr>
+          <p:cNvPr id="151" name="Shape 149"/>
           <p:cNvSpPr/>
           <p:nvPr/>
         </p:nvSpPr>
         <p:spPr>
           <a:xfrm>
-            <a:off x="8967454" y="4070920"/>
-            <a:ext cx="368570" cy="110352"/>
+            <a:off x="9084919" y="4195654"/>
+            <a:ext cx="45365" cy="102929"/>
           </a:xfrm>
           <a:prstGeom prst="rect">
             <a:avLst/>
@@ -32981,14 +34231,14 @@
       </p:sp>
       <p:sp>
         <p:nvSpPr>
-          <p:cNvPr id="118" name="Text 116"/>
-          <p:cNvSpPr txBox="1"/>
-          <p:nvPr/>
-        </p:nvSpPr>
-        <p:spPr>
-          <a:xfrm>
-            <a:off x="10168128" y="4006148"/>
-            <a:ext cx="1234440" cy="239896"/>
+          <p:cNvPr id="152" name="Text 150"/>
+          <p:cNvSpPr txBox="1"/>
+          <p:nvPr/>
+        </p:nvSpPr>
+        <p:spPr>
+          <a:xfrm>
+            <a:off x="9756648" y="4135240"/>
+            <a:ext cx="777240" cy="223759"/>
           </a:xfrm>
           <a:prstGeom prst="rect">
             <a:avLst/>
@@ -33012,22 +34262,61 @@
                 <a:ea typeface="Inter" pitchFamily="34" charset="-122"/>
                 <a:cs typeface="Inter" pitchFamily="34" charset="-120"/>
               </a:rPr>
-              <a:t>−22.7%</a:t>
-            </a:r>
-            <a:endParaRPr lang="en-US" sz="1200" dirty="0"/>
-          </a:p>
-        </p:txBody>
-      </p:sp>
-      <p:sp>
-        <p:nvSpPr>
-          <p:cNvPr id="119" name="Text 117"/>
-          <p:cNvSpPr txBox="1"/>
-          <p:nvPr/>
-        </p:nvSpPr>
-        <p:spPr>
-          <a:xfrm>
-            <a:off x="6208776" y="4246043"/>
-            <a:ext cx="310896" cy="239896"/>
+              <a:t>−$161K</a:t>
+            </a:r>
+            <a:endParaRPr lang="en-US" sz="1200" dirty="0"/>
+          </a:p>
+        </p:txBody>
+      </p:sp>
+      <p:sp>
+        <p:nvSpPr>
+          <p:cNvPr id="153" name="Text 151"/>
+          <p:cNvSpPr txBox="1"/>
+          <p:nvPr/>
+        </p:nvSpPr>
+        <p:spPr>
+          <a:xfrm>
+            <a:off x="10533888" y="4135240"/>
+            <a:ext cx="868680" cy="223759"/>
+          </a:xfrm>
+          <a:prstGeom prst="rect">
+            <a:avLst/>
+          </a:prstGeom>
+          <a:noFill/>
+          <a:ln/>
+        </p:spPr>
+        <p:txBody>
+          <a:bodyPr wrap="square" lIns="0" tIns="0" rIns="0" bIns="0" rtlCol="0" anchor="ctr"/>
+          <a:lstStyle/>
+          <a:p>
+            <a:pPr algn="r" indent="0" marL="0">
+              <a:buNone/>
+            </a:pPr>
+            <a:r>
+              <a:rPr lang="en-US" sz="1200" dirty="0">
+                <a:solidFill>
+                  <a:srgbClr val="A82B26"/>
+                </a:solidFill>
+                <a:latin typeface="Inter" pitchFamily="34" charset="0"/>
+                <a:ea typeface="Inter" pitchFamily="34" charset="-122"/>
+                <a:cs typeface="Inter" pitchFamily="34" charset="-120"/>
+              </a:rPr>
+              <a:t>−5.0%</a:t>
+            </a:r>
+            <a:endParaRPr lang="en-US" sz="1200" dirty="0"/>
+          </a:p>
+        </p:txBody>
+      </p:sp>
+      <p:sp>
+        <p:nvSpPr>
+          <p:cNvPr id="154" name="Text 152"/>
+          <p:cNvSpPr txBox="1"/>
+          <p:nvPr/>
+        </p:nvSpPr>
+        <p:spPr>
+          <a:xfrm>
+            <a:off x="6208776" y="4358999"/>
+            <a:ext cx="310896" cy="223759"/>
           </a:xfrm>
           <a:prstGeom prst="rect">
             <a:avLst/>
@@ -33059,14 +34348,14 @@
       </p:sp>
       <p:sp>
         <p:nvSpPr>
-          <p:cNvPr id="120" name="Text 118"/>
-          <p:cNvSpPr txBox="1"/>
-          <p:nvPr/>
-        </p:nvSpPr>
-        <p:spPr>
-          <a:xfrm>
-            <a:off x="6565392" y="4246043"/>
-            <a:ext cx="1920240" cy="239896"/>
+          <p:cNvPr id="155" name="Text 153"/>
+          <p:cNvSpPr txBox="1"/>
+          <p:nvPr/>
+        </p:nvSpPr>
+        <p:spPr>
+          <a:xfrm>
+            <a:off x="6565392" y="4358999"/>
+            <a:ext cx="1920240" cy="223759"/>
           </a:xfrm>
           <a:prstGeom prst="rect">
             <a:avLst/>
@@ -33090,22 +34379,22 @@
                 <a:ea typeface="Inter" pitchFamily="34" charset="-122"/>
                 <a:cs typeface="Inter" pitchFamily="34" charset="-120"/>
               </a:rPr>
-              <a:t>HONDA NORTH</a:t>
-            </a:r>
-            <a:endParaRPr lang="en-US" sz="1200" dirty="0"/>
-          </a:p>
-        </p:txBody>
-      </p:sp>
-      <p:sp>
-        <p:nvSpPr>
-          <p:cNvPr id="121" name="Shape 119"/>
+              <a:t>HONDA SPOKANE</a:t>
+            </a:r>
+            <a:endParaRPr lang="en-US" sz="1200" dirty="0"/>
+          </a:p>
+        </p:txBody>
+      </p:sp>
+      <p:sp>
+        <p:nvSpPr>
+          <p:cNvPr id="156" name="Shape 154"/>
           <p:cNvSpPr/>
           <p:nvPr/>
         </p:nvSpPr>
         <p:spPr>
           <a:xfrm>
-            <a:off x="8892133" y="4310815"/>
-            <a:ext cx="443891" cy="110352"/>
+            <a:off x="9084120" y="4419414"/>
+            <a:ext cx="46164" cy="102929"/>
           </a:xfrm>
           <a:prstGeom prst="rect">
             <a:avLst/>
@@ -33118,14 +34407,14 @@
       </p:sp>
       <p:sp>
         <p:nvSpPr>
-          <p:cNvPr id="122" name="Text 120"/>
-          <p:cNvSpPr txBox="1"/>
-          <p:nvPr/>
-        </p:nvSpPr>
-        <p:spPr>
-          <a:xfrm>
-            <a:off x="10168128" y="4246043"/>
-            <a:ext cx="1234440" cy="239896"/>
+          <p:cNvPr id="157" name="Text 155"/>
+          <p:cNvSpPr txBox="1"/>
+          <p:nvPr/>
+        </p:nvSpPr>
+        <p:spPr>
+          <a:xfrm>
+            <a:off x="9756648" y="4358999"/>
+            <a:ext cx="777240" cy="223759"/>
           </a:xfrm>
           <a:prstGeom prst="rect">
             <a:avLst/>
@@ -33149,22 +34438,61 @@
                 <a:ea typeface="Inter" pitchFamily="34" charset="-122"/>
                 <a:cs typeface="Inter" pitchFamily="34" charset="-120"/>
               </a:rPr>
-              <a:t>−27.3%</a:t>
-            </a:r>
-            <a:endParaRPr lang="en-US" sz="1200" dirty="0"/>
-          </a:p>
-        </p:txBody>
-      </p:sp>
-      <p:sp>
-        <p:nvSpPr>
-          <p:cNvPr id="123" name="Text 121"/>
-          <p:cNvSpPr txBox="1"/>
-          <p:nvPr/>
-        </p:nvSpPr>
-        <p:spPr>
-          <a:xfrm>
-            <a:off x="6208776" y="4485939"/>
-            <a:ext cx="310896" cy="239896"/>
+              <a:t>−$164K</a:t>
+            </a:r>
+            <a:endParaRPr lang="en-US" sz="1200" dirty="0"/>
+          </a:p>
+        </p:txBody>
+      </p:sp>
+      <p:sp>
+        <p:nvSpPr>
+          <p:cNvPr id="158" name="Text 156"/>
+          <p:cNvSpPr txBox="1"/>
+          <p:nvPr/>
+        </p:nvSpPr>
+        <p:spPr>
+          <a:xfrm>
+            <a:off x="10533888" y="4358999"/>
+            <a:ext cx="868680" cy="223759"/>
+          </a:xfrm>
+          <a:prstGeom prst="rect">
+            <a:avLst/>
+          </a:prstGeom>
+          <a:noFill/>
+          <a:ln/>
+        </p:spPr>
+        <p:txBody>
+          <a:bodyPr wrap="square" lIns="0" tIns="0" rIns="0" bIns="0" rtlCol="0" anchor="ctr"/>
+          <a:lstStyle/>
+          <a:p>
+            <a:pPr algn="r" indent="0" marL="0">
+              <a:buNone/>
+            </a:pPr>
+            <a:r>
+              <a:rPr lang="en-US" sz="1200" dirty="0">
+                <a:solidFill>
+                  <a:srgbClr val="A82B26"/>
+                </a:solidFill>
+                <a:latin typeface="Inter" pitchFamily="34" charset="0"/>
+                <a:ea typeface="Inter" pitchFamily="34" charset="-122"/>
+                <a:cs typeface="Inter" pitchFamily="34" charset="-120"/>
+              </a:rPr>
+              <a:t>−28.9%</a:t>
+            </a:r>
+            <a:endParaRPr lang="en-US" sz="1200" dirty="0"/>
+          </a:p>
+        </p:txBody>
+      </p:sp>
+      <p:sp>
+        <p:nvSpPr>
+          <p:cNvPr id="159" name="Text 157"/>
+          <p:cNvSpPr txBox="1"/>
+          <p:nvPr/>
+        </p:nvSpPr>
+        <p:spPr>
+          <a:xfrm>
+            <a:off x="6208776" y="4582758"/>
+            <a:ext cx="310896" cy="223759"/>
           </a:xfrm>
           <a:prstGeom prst="rect">
             <a:avLst/>
@@ -33196,14 +34524,14 @@
       </p:sp>
       <p:sp>
         <p:nvSpPr>
-          <p:cNvPr id="124" name="Text 122"/>
-          <p:cNvSpPr txBox="1"/>
-          <p:nvPr/>
-        </p:nvSpPr>
-        <p:spPr>
-          <a:xfrm>
-            <a:off x="6565392" y="4485939"/>
-            <a:ext cx="1920240" cy="239896"/>
+          <p:cNvPr id="160" name="Text 158"/>
+          <p:cNvSpPr txBox="1"/>
+          <p:nvPr/>
+        </p:nvSpPr>
+        <p:spPr>
+          <a:xfrm>
+            <a:off x="6565392" y="4582758"/>
+            <a:ext cx="1920240" cy="223759"/>
           </a:xfrm>
           <a:prstGeom prst="rect">
             <a:avLst/>
@@ -33227,22 +34555,22 @@
                 <a:ea typeface="Inter" pitchFamily="34" charset="-122"/>
                 <a:cs typeface="Inter" pitchFamily="34" charset="-120"/>
               </a:rPr>
-              <a:t>HONDA FLAGSTAFF</a:t>
-            </a:r>
-            <a:endParaRPr lang="en-US" sz="1200" dirty="0"/>
-          </a:p>
-        </p:txBody>
-      </p:sp>
-      <p:sp>
-        <p:nvSpPr>
-          <p:cNvPr id="125" name="Shape 123"/>
+              <a:t>CDJR POST FALLS</a:t>
+            </a:r>
+            <a:endParaRPr lang="en-US" sz="1200" dirty="0"/>
+          </a:p>
+        </p:txBody>
+      </p:sp>
+      <p:sp>
+        <p:nvSpPr>
+          <p:cNvPr id="161" name="Shape 159"/>
           <p:cNvSpPr/>
           <p:nvPr/>
         </p:nvSpPr>
         <p:spPr>
           <a:xfrm>
-            <a:off x="8853570" y="4550711"/>
-            <a:ext cx="482454" cy="110352"/>
+            <a:off x="9071585" y="4643173"/>
+            <a:ext cx="58699" cy="102929"/>
           </a:xfrm>
           <a:prstGeom prst="rect">
             <a:avLst/>
@@ -33255,14 +34583,14 @@
       </p:sp>
       <p:sp>
         <p:nvSpPr>
-          <p:cNvPr id="126" name="Text 124"/>
-          <p:cNvSpPr txBox="1"/>
-          <p:nvPr/>
-        </p:nvSpPr>
-        <p:spPr>
-          <a:xfrm>
-            <a:off x="10168128" y="4485939"/>
-            <a:ext cx="1234440" cy="239896"/>
+          <p:cNvPr id="162" name="Text 160"/>
+          <p:cNvSpPr txBox="1"/>
+          <p:nvPr/>
+        </p:nvSpPr>
+        <p:spPr>
+          <a:xfrm>
+            <a:off x="9756648" y="4582758"/>
+            <a:ext cx="777240" cy="223759"/>
           </a:xfrm>
           <a:prstGeom prst="rect">
             <a:avLst/>
@@ -33286,22 +34614,61 @@
                 <a:ea typeface="Inter" pitchFamily="34" charset="-122"/>
                 <a:cs typeface="Inter" pitchFamily="34" charset="-120"/>
               </a:rPr>
-              <a:t>−29.7%</a:t>
-            </a:r>
-            <a:endParaRPr lang="en-US" sz="1200" dirty="0"/>
-          </a:p>
-        </p:txBody>
-      </p:sp>
-      <p:sp>
-        <p:nvSpPr>
-          <p:cNvPr id="127" name="Text 125"/>
-          <p:cNvSpPr txBox="1"/>
-          <p:nvPr/>
-        </p:nvSpPr>
-        <p:spPr>
-          <a:xfrm>
-            <a:off x="6208776" y="4725834"/>
-            <a:ext cx="310896" cy="239896"/>
+              <a:t>−$209K</a:t>
+            </a:r>
+            <a:endParaRPr lang="en-US" sz="1200" dirty="0"/>
+          </a:p>
+        </p:txBody>
+      </p:sp>
+      <p:sp>
+        <p:nvSpPr>
+          <p:cNvPr id="163" name="Text 161"/>
+          <p:cNvSpPr txBox="1"/>
+          <p:nvPr/>
+        </p:nvSpPr>
+        <p:spPr>
+          <a:xfrm>
+            <a:off x="10533888" y="4582758"/>
+            <a:ext cx="868680" cy="223759"/>
+          </a:xfrm>
+          <a:prstGeom prst="rect">
+            <a:avLst/>
+          </a:prstGeom>
+          <a:noFill/>
+          <a:ln/>
+        </p:spPr>
+        <p:txBody>
+          <a:bodyPr wrap="square" lIns="0" tIns="0" rIns="0" bIns="0" rtlCol="0" anchor="ctr"/>
+          <a:lstStyle/>
+          <a:p>
+            <a:pPr algn="r" indent="0" marL="0">
+              <a:buNone/>
+            </a:pPr>
+            <a:r>
+              <a:rPr lang="en-US" sz="1200" dirty="0">
+                <a:solidFill>
+                  <a:srgbClr val="A82B26"/>
+                </a:solidFill>
+                <a:latin typeface="Inter" pitchFamily="34" charset="0"/>
+                <a:ea typeface="Inter" pitchFamily="34" charset="-122"/>
+                <a:cs typeface="Inter" pitchFamily="34" charset="-120"/>
+              </a:rPr>
+              <a:t>−23.9%</a:t>
+            </a:r>
+            <a:endParaRPr lang="en-US" sz="1200" dirty="0"/>
+          </a:p>
+        </p:txBody>
+      </p:sp>
+      <p:sp>
+        <p:nvSpPr>
+          <p:cNvPr id="164" name="Text 162"/>
+          <p:cNvSpPr txBox="1"/>
+          <p:nvPr/>
+        </p:nvSpPr>
+        <p:spPr>
+          <a:xfrm>
+            <a:off x="6208776" y="4806517"/>
+            <a:ext cx="310896" cy="223759"/>
           </a:xfrm>
           <a:prstGeom prst="rect">
             <a:avLst/>
@@ -33333,14 +34700,14 @@
       </p:sp>
       <p:sp>
         <p:nvSpPr>
-          <p:cNvPr id="128" name="Text 126"/>
-          <p:cNvSpPr txBox="1"/>
-          <p:nvPr/>
-        </p:nvSpPr>
-        <p:spPr>
-          <a:xfrm>
-            <a:off x="6565392" y="4725834"/>
-            <a:ext cx="1920240" cy="239896"/>
+          <p:cNvPr id="165" name="Text 163"/>
+          <p:cNvSpPr txBox="1"/>
+          <p:nvPr/>
+        </p:nvSpPr>
+        <p:spPr>
+          <a:xfrm>
+            <a:off x="6565392" y="4806517"/>
+            <a:ext cx="1920240" cy="223759"/>
           </a:xfrm>
           <a:prstGeom prst="rect">
             <a:avLst/>
@@ -33364,22 +34731,22 @@
                 <a:ea typeface="Inter" pitchFamily="34" charset="-122"/>
                 <a:cs typeface="Inter" pitchFamily="34" charset="-120"/>
               </a:rPr>
-              <a:t>HONDA SPOKANE</a:t>
-            </a:r>
-            <a:endParaRPr lang="en-US" sz="1200" dirty="0"/>
-          </a:p>
-        </p:txBody>
-      </p:sp>
-      <p:sp>
-        <p:nvSpPr>
-          <p:cNvPr id="129" name="Shape 127"/>
+              <a:t>ACURA</a:t>
+            </a:r>
+            <a:endParaRPr lang="en-US" sz="1200" dirty="0"/>
+          </a:p>
+        </p:txBody>
+      </p:sp>
+      <p:sp>
+        <p:nvSpPr>
+          <p:cNvPr id="166" name="Shape 164"/>
           <p:cNvSpPr/>
           <p:nvPr/>
         </p:nvSpPr>
         <p:spPr>
           <a:xfrm>
-            <a:off x="8762298" y="4790606"/>
-            <a:ext cx="573726" cy="110352"/>
+            <a:off x="9014745" y="4866932"/>
+            <a:ext cx="115539" cy="102929"/>
           </a:xfrm>
           <a:prstGeom prst="rect">
             <a:avLst/>
@@ -33392,14 +34759,14 @@
       </p:sp>
       <p:sp>
         <p:nvSpPr>
-          <p:cNvPr id="130" name="Text 128"/>
-          <p:cNvSpPr txBox="1"/>
-          <p:nvPr/>
-        </p:nvSpPr>
-        <p:spPr>
-          <a:xfrm>
-            <a:off x="10168128" y="4725834"/>
-            <a:ext cx="1234440" cy="239896"/>
+          <p:cNvPr id="167" name="Text 165"/>
+          <p:cNvSpPr txBox="1"/>
+          <p:nvPr/>
+        </p:nvSpPr>
+        <p:spPr>
+          <a:xfrm>
+            <a:off x="9756648" y="4806517"/>
+            <a:ext cx="777240" cy="223759"/>
           </a:xfrm>
           <a:prstGeom prst="rect">
             <a:avLst/>
@@ -33423,100 +34790,61 @@
                 <a:ea typeface="Inter" pitchFamily="34" charset="-122"/>
                 <a:cs typeface="Inter" pitchFamily="34" charset="-120"/>
               </a:rPr>
-              <a:t>−35.3%</a:t>
-            </a:r>
-            <a:endParaRPr lang="en-US" sz="1200" dirty="0"/>
-          </a:p>
-        </p:txBody>
-      </p:sp>
-      <p:sp>
-        <p:nvSpPr>
-          <p:cNvPr id="131" name="Text 129"/>
-          <p:cNvSpPr txBox="1"/>
-          <p:nvPr/>
-        </p:nvSpPr>
-        <p:spPr>
-          <a:xfrm>
-            <a:off x="6208776" y="4965730"/>
-            <a:ext cx="310896" cy="239896"/>
-          </a:xfrm>
-          <a:prstGeom prst="rect">
-            <a:avLst/>
-          </a:prstGeom>
-          <a:noFill/>
-          <a:ln/>
-        </p:spPr>
-        <p:txBody>
-          <a:bodyPr wrap="square" lIns="0" tIns="0" rIns="0" bIns="0" rtlCol="0" anchor="ctr"/>
-          <a:lstStyle/>
-          <a:p>
-            <a:pPr algn="r" indent="0" marL="0">
-              <a:buNone/>
-            </a:pPr>
-            <a:r>
-              <a:rPr lang="en-US" sz="1200" dirty="0">
-                <a:solidFill>
-                  <a:srgbClr val="9AA3AD"/>
-                </a:solidFill>
-                <a:latin typeface="Inter" pitchFamily="34" charset="0"/>
-                <a:ea typeface="Inter" pitchFamily="34" charset="-122"/>
-                <a:cs typeface="Inter" pitchFamily="34" charset="-120"/>
-              </a:rPr>
-              <a:t>31</a:t>
-            </a:r>
-            <a:endParaRPr lang="en-US" sz="1200" dirty="0"/>
-          </a:p>
-        </p:txBody>
-      </p:sp>
-      <p:sp>
-        <p:nvSpPr>
-          <p:cNvPr id="132" name="Text 130"/>
-          <p:cNvSpPr txBox="1"/>
-          <p:nvPr/>
-        </p:nvSpPr>
-        <p:spPr>
-          <a:xfrm>
-            <a:off x="6565392" y="4965730"/>
-            <a:ext cx="1920240" cy="239896"/>
-          </a:xfrm>
-          <a:prstGeom prst="rect">
-            <a:avLst/>
-          </a:prstGeom>
-          <a:noFill/>
-          <a:ln/>
-        </p:spPr>
-        <p:txBody>
-          <a:bodyPr wrap="square" lIns="0" tIns="0" rIns="0" bIns="0" rtlCol="0" anchor="ctr"/>
-          <a:lstStyle/>
-          <a:p>
-            <a:pPr indent="0" marL="0">
-              <a:buNone/>
-            </a:pPr>
-            <a:r>
-              <a:rPr lang="en-US" sz="1200" dirty="0">
-                <a:solidFill>
-                  <a:srgbClr val="1A1A1A"/>
-                </a:solidFill>
-                <a:latin typeface="Inter" pitchFamily="34" charset="0"/>
-                <a:ea typeface="Inter" pitchFamily="34" charset="-122"/>
-                <a:cs typeface="Inter" pitchFamily="34" charset="-120"/>
-              </a:rPr>
-              <a:t>HONDA HENDERSON</a:t>
-            </a:r>
-            <a:endParaRPr lang="en-US" sz="1200" dirty="0"/>
-          </a:p>
-        </p:txBody>
-      </p:sp>
-      <p:sp>
-        <p:nvSpPr>
-          <p:cNvPr id="133" name="Shape 131"/>
+              <a:t>−$410K</a:t>
+            </a:r>
+            <a:endParaRPr lang="en-US" sz="1200" dirty="0"/>
+          </a:p>
+        </p:txBody>
+      </p:sp>
+      <p:sp>
+        <p:nvSpPr>
+          <p:cNvPr id="168" name="Text 166"/>
+          <p:cNvSpPr txBox="1"/>
+          <p:nvPr/>
+        </p:nvSpPr>
+        <p:spPr>
+          <a:xfrm>
+            <a:off x="10533888" y="4806517"/>
+            <a:ext cx="868680" cy="223759"/>
+          </a:xfrm>
+          <a:prstGeom prst="rect">
+            <a:avLst/>
+          </a:prstGeom>
+          <a:noFill/>
+          <a:ln/>
+        </p:spPr>
+        <p:txBody>
+          <a:bodyPr wrap="square" lIns="0" tIns="0" rIns="0" bIns="0" rtlCol="0" anchor="ctr"/>
+          <a:lstStyle/>
+          <a:p>
+            <a:pPr algn="r" indent="0" marL="0">
+              <a:buNone/>
+            </a:pPr>
+            <a:r>
+              <a:rPr lang="en-US" sz="1200" dirty="0">
+                <a:solidFill>
+                  <a:srgbClr val="A82B26"/>
+                </a:solidFill>
+                <a:latin typeface="Inter" pitchFamily="34" charset="0"/>
+                <a:ea typeface="Inter" pitchFamily="34" charset="-122"/>
+                <a:cs typeface="Inter" pitchFamily="34" charset="-120"/>
+              </a:rPr>
+              <a:t>−41.7%</a:t>
+            </a:r>
+            <a:endParaRPr lang="en-US" sz="1200" dirty="0"/>
+          </a:p>
+        </p:txBody>
+      </p:sp>
+      <p:sp>
+        <p:nvSpPr>
+          <p:cNvPr id="169" name="Shape 167"/>
           <p:cNvSpPr/>
           <p:nvPr/>
         </p:nvSpPr>
         <p:spPr>
           <a:xfrm>
-            <a:off x="8694064" y="5030502"/>
-            <a:ext cx="641960" cy="110352"/>
+            <a:off x="11457432" y="4852237"/>
+            <a:ext cx="54864" cy="132319"/>
           </a:xfrm>
           <a:prstGeom prst="rect">
             <a:avLst/>
@@ -33529,53 +34857,14 @@
       </p:sp>
       <p:sp>
         <p:nvSpPr>
-          <p:cNvPr id="134" name="Text 132"/>
-          <p:cNvSpPr txBox="1"/>
-          <p:nvPr/>
-        </p:nvSpPr>
-        <p:spPr>
-          <a:xfrm>
-            <a:off x="10168128" y="4965730"/>
-            <a:ext cx="1234440" cy="239896"/>
-          </a:xfrm>
-          <a:prstGeom prst="rect">
-            <a:avLst/>
-          </a:prstGeom>
-          <a:noFill/>
-          <a:ln/>
-        </p:spPr>
-        <p:txBody>
-          <a:bodyPr wrap="square" lIns="0" tIns="0" rIns="0" bIns="0" rtlCol="0" anchor="ctr"/>
-          <a:lstStyle/>
-          <a:p>
-            <a:pPr algn="r" indent="0" marL="0">
-              <a:buNone/>
-            </a:pPr>
-            <a:r>
-              <a:rPr lang="en-US" sz="1200" b="1" dirty="0">
-                <a:solidFill>
-                  <a:srgbClr val="A82B26"/>
-                </a:solidFill>
-                <a:latin typeface="Inter" pitchFamily="34" charset="0"/>
-                <a:ea typeface="Inter" pitchFamily="34" charset="-122"/>
-                <a:cs typeface="Inter" pitchFamily="34" charset="-120"/>
-              </a:rPr>
-              <a:t>−39.5%</a:t>
-            </a:r>
-            <a:endParaRPr lang="en-US" sz="1200" dirty="0"/>
-          </a:p>
-        </p:txBody>
-      </p:sp>
-      <p:sp>
-        <p:nvSpPr>
-          <p:cNvPr id="135" name="Text 133"/>
-          <p:cNvSpPr txBox="1"/>
-          <p:nvPr/>
-        </p:nvSpPr>
-        <p:spPr>
-          <a:xfrm>
-            <a:off x="6208776" y="5205625"/>
-            <a:ext cx="310896" cy="239896"/>
+          <p:cNvPr id="170" name="Text 168"/>
+          <p:cNvSpPr txBox="1"/>
+          <p:nvPr/>
+        </p:nvSpPr>
+        <p:spPr>
+          <a:xfrm>
+            <a:off x="6208776" y="5030276"/>
+            <a:ext cx="310896" cy="223759"/>
           </a:xfrm>
           <a:prstGeom prst="rect">
             <a:avLst/>
@@ -33599,22 +34888,22 @@
                 <a:ea typeface="Inter" pitchFamily="34" charset="-122"/>
                 <a:cs typeface="Inter" pitchFamily="34" charset="-120"/>
               </a:rPr>
-              <a:t>32</a:t>
-            </a:r>
-            <a:endParaRPr lang="en-US" sz="1200" dirty="0"/>
-          </a:p>
-        </p:txBody>
-      </p:sp>
-      <p:sp>
-        <p:nvSpPr>
-          <p:cNvPr id="136" name="Text 134"/>
-          <p:cNvSpPr txBox="1"/>
-          <p:nvPr/>
-        </p:nvSpPr>
-        <p:spPr>
-          <a:xfrm>
-            <a:off x="6565392" y="5205625"/>
-            <a:ext cx="1920240" cy="239896"/>
+              <a:t>31</a:t>
+            </a:r>
+            <a:endParaRPr lang="en-US" sz="1200" dirty="0"/>
+          </a:p>
+        </p:txBody>
+      </p:sp>
+      <p:sp>
+        <p:nvSpPr>
+          <p:cNvPr id="171" name="Text 169"/>
+          <p:cNvSpPr txBox="1"/>
+          <p:nvPr/>
+        </p:nvSpPr>
+        <p:spPr>
+          <a:xfrm>
+            <a:off x="6565392" y="5030276"/>
+            <a:ext cx="1920240" cy="223759"/>
           </a:xfrm>
           <a:prstGeom prst="rect">
             <a:avLst/>
@@ -33638,22 +34927,22 @@
                 <a:ea typeface="Inter" pitchFamily="34" charset="-122"/>
                 <a:cs typeface="Inter" pitchFamily="34" charset="-120"/>
               </a:rPr>
-              <a:t>MAZDA</a:t>
-            </a:r>
-            <a:endParaRPr lang="en-US" sz="1200" dirty="0"/>
-          </a:p>
-        </p:txBody>
-      </p:sp>
-      <p:sp>
-        <p:nvSpPr>
-          <p:cNvPr id="137" name="Shape 135"/>
+              <a:t>HONDA HENDERSON</a:t>
+            </a:r>
+            <a:endParaRPr lang="en-US" sz="1200" dirty="0"/>
+          </a:p>
+        </p:txBody>
+      </p:sp>
+      <p:sp>
+        <p:nvSpPr>
+          <p:cNvPr id="172" name="Shape 170"/>
           <p:cNvSpPr/>
           <p:nvPr/>
         </p:nvSpPr>
         <p:spPr>
           <a:xfrm>
-            <a:off x="8626252" y="5270397"/>
-            <a:ext cx="709772" cy="110352"/>
+            <a:off x="8970632" y="5090691"/>
+            <a:ext cx="159652" cy="102929"/>
           </a:xfrm>
           <a:prstGeom prst="rect">
             <a:avLst/>
@@ -33666,14 +34955,14 @@
       </p:sp>
       <p:sp>
         <p:nvSpPr>
-          <p:cNvPr id="138" name="Text 136"/>
-          <p:cNvSpPr txBox="1"/>
-          <p:nvPr/>
-        </p:nvSpPr>
-        <p:spPr>
-          <a:xfrm>
-            <a:off x="10168128" y="5205625"/>
-            <a:ext cx="1234440" cy="239896"/>
+          <p:cNvPr id="173" name="Text 171"/>
+          <p:cNvSpPr txBox="1"/>
+          <p:nvPr/>
+        </p:nvSpPr>
+        <p:spPr>
+          <a:xfrm>
+            <a:off x="9756648" y="5030276"/>
+            <a:ext cx="777240" cy="223759"/>
           </a:xfrm>
           <a:prstGeom prst="rect">
             <a:avLst/>
@@ -33697,22 +34986,61 @@
                 <a:ea typeface="Inter" pitchFamily="34" charset="-122"/>
                 <a:cs typeface="Inter" pitchFamily="34" charset="-120"/>
               </a:rPr>
-              <a:t>−43.7%</a:t>
-            </a:r>
-            <a:endParaRPr lang="en-US" sz="1200" dirty="0"/>
-          </a:p>
-        </p:txBody>
-      </p:sp>
-      <p:sp>
-        <p:nvSpPr>
-          <p:cNvPr id="139" name="Text 137"/>
-          <p:cNvSpPr txBox="1"/>
-          <p:nvPr/>
-        </p:nvSpPr>
-        <p:spPr>
-          <a:xfrm>
-            <a:off x="6208776" y="5445521"/>
-            <a:ext cx="310896" cy="239896"/>
+              <a:t>−$567K</a:t>
+            </a:r>
+            <a:endParaRPr lang="en-US" sz="1200" dirty="0"/>
+          </a:p>
+        </p:txBody>
+      </p:sp>
+      <p:sp>
+        <p:nvSpPr>
+          <p:cNvPr id="174" name="Text 172"/>
+          <p:cNvSpPr txBox="1"/>
+          <p:nvPr/>
+        </p:nvSpPr>
+        <p:spPr>
+          <a:xfrm>
+            <a:off x="10533888" y="5030276"/>
+            <a:ext cx="868680" cy="223759"/>
+          </a:xfrm>
+          <a:prstGeom prst="rect">
+            <a:avLst/>
+          </a:prstGeom>
+          <a:noFill/>
+          <a:ln/>
+        </p:spPr>
+        <p:txBody>
+          <a:bodyPr wrap="square" lIns="0" tIns="0" rIns="0" bIns="0" rtlCol="0" anchor="ctr"/>
+          <a:lstStyle/>
+          <a:p>
+            <a:pPr algn="r" indent="0" marL="0">
+              <a:buNone/>
+            </a:pPr>
+            <a:r>
+              <a:rPr lang="en-US" sz="1200" dirty="0">
+                <a:solidFill>
+                  <a:srgbClr val="A82B26"/>
+                </a:solidFill>
+                <a:latin typeface="Inter" pitchFamily="34" charset="0"/>
+                <a:ea typeface="Inter" pitchFamily="34" charset="-122"/>
+                <a:cs typeface="Inter" pitchFamily="34" charset="-120"/>
+              </a:rPr>
+              <a:t>−27.4%</a:t>
+            </a:r>
+            <a:endParaRPr lang="en-US" sz="1200" dirty="0"/>
+          </a:p>
+        </p:txBody>
+      </p:sp>
+      <p:sp>
+        <p:nvSpPr>
+          <p:cNvPr id="175" name="Text 173"/>
+          <p:cNvSpPr txBox="1"/>
+          <p:nvPr/>
+        </p:nvSpPr>
+        <p:spPr>
+          <a:xfrm>
+            <a:off x="6208776" y="5254035"/>
+            <a:ext cx="310896" cy="223759"/>
           </a:xfrm>
           <a:prstGeom prst="rect">
             <a:avLst/>
@@ -33736,22 +35064,22 @@
                 <a:ea typeface="Inter" pitchFamily="34" charset="-122"/>
                 <a:cs typeface="Inter" pitchFamily="34" charset="-120"/>
               </a:rPr>
-              <a:t>33</a:t>
-            </a:r>
-            <a:endParaRPr lang="en-US" sz="1200" dirty="0"/>
-          </a:p>
-        </p:txBody>
-      </p:sp>
-      <p:sp>
-        <p:nvSpPr>
-          <p:cNvPr id="140" name="Text 138"/>
-          <p:cNvSpPr txBox="1"/>
-          <p:nvPr/>
-        </p:nvSpPr>
-        <p:spPr>
-          <a:xfrm>
-            <a:off x="6565392" y="5445521"/>
-            <a:ext cx="1920240" cy="239896"/>
+              <a:t>32</a:t>
+            </a:r>
+            <a:endParaRPr lang="en-US" sz="1200" dirty="0"/>
+          </a:p>
+        </p:txBody>
+      </p:sp>
+      <p:sp>
+        <p:nvSpPr>
+          <p:cNvPr id="176" name="Text 174"/>
+          <p:cNvSpPr txBox="1"/>
+          <p:nvPr/>
+        </p:nvSpPr>
+        <p:spPr>
+          <a:xfrm>
+            <a:off x="6565392" y="5254035"/>
+            <a:ext cx="1920240" cy="223759"/>
           </a:xfrm>
           <a:prstGeom prst="rect">
             <a:avLst/>
@@ -33775,22 +35103,22 @@
                 <a:ea typeface="Inter" pitchFamily="34" charset="-122"/>
                 <a:cs typeface="Inter" pitchFamily="34" charset="-120"/>
               </a:rPr>
-              <a:t>ACURA</a:t>
-            </a:r>
-            <a:endParaRPr lang="en-US" sz="1200" dirty="0"/>
-          </a:p>
-        </p:txBody>
-      </p:sp>
-      <p:sp>
-        <p:nvSpPr>
-          <p:cNvPr id="141" name="Shape 139"/>
+              <a:t>HONDA NORTH</a:t>
+            </a:r>
+            <a:endParaRPr lang="en-US" sz="1200" dirty="0"/>
+          </a:p>
+        </p:txBody>
+      </p:sp>
+      <p:sp>
+        <p:nvSpPr>
+          <p:cNvPr id="177" name="Shape 175"/>
           <p:cNvSpPr/>
           <p:nvPr/>
         </p:nvSpPr>
         <p:spPr>
           <a:xfrm>
-            <a:off x="8583100" y="5510293"/>
-            <a:ext cx="752924" cy="110352"/>
+            <a:off x="8965208" y="5314450"/>
+            <a:ext cx="165076" cy="102929"/>
           </a:xfrm>
           <a:prstGeom prst="rect">
             <a:avLst/>
@@ -33803,14 +35131,14 @@
       </p:sp>
       <p:sp>
         <p:nvSpPr>
-          <p:cNvPr id="142" name="Text 140"/>
-          <p:cNvSpPr txBox="1"/>
-          <p:nvPr/>
-        </p:nvSpPr>
-        <p:spPr>
-          <a:xfrm>
-            <a:off x="10168128" y="5445521"/>
-            <a:ext cx="1234440" cy="239896"/>
+          <p:cNvPr id="178" name="Text 176"/>
+          <p:cNvSpPr txBox="1"/>
+          <p:nvPr/>
+        </p:nvSpPr>
+        <p:spPr>
+          <a:xfrm>
+            <a:off x="9756648" y="5254035"/>
+            <a:ext cx="777240" cy="223759"/>
           </a:xfrm>
           <a:prstGeom prst="rect">
             <a:avLst/>
@@ -33834,22 +35162,257 @@
                 <a:ea typeface="Inter" pitchFamily="34" charset="-122"/>
                 <a:cs typeface="Inter" pitchFamily="34" charset="-120"/>
               </a:rPr>
-              <a:t>−46.4%</a:t>
-            </a:r>
-            <a:endParaRPr lang="en-US" sz="1200" dirty="0"/>
-          </a:p>
-        </p:txBody>
-      </p:sp>
-      <p:sp>
-        <p:nvSpPr>
-          <p:cNvPr id="143" name="Shape 141"/>
+              <a:t>−$586K</a:t>
+            </a:r>
+            <a:endParaRPr lang="en-US" sz="1200" dirty="0"/>
+          </a:p>
+        </p:txBody>
+      </p:sp>
+      <p:sp>
+        <p:nvSpPr>
+          <p:cNvPr id="179" name="Text 177"/>
+          <p:cNvSpPr txBox="1"/>
+          <p:nvPr/>
+        </p:nvSpPr>
+        <p:spPr>
+          <a:xfrm>
+            <a:off x="10533888" y="5254035"/>
+            <a:ext cx="868680" cy="223759"/>
+          </a:xfrm>
+          <a:prstGeom prst="rect">
+            <a:avLst/>
+          </a:prstGeom>
+          <a:noFill/>
+          <a:ln/>
+        </p:spPr>
+        <p:txBody>
+          <a:bodyPr wrap="square" lIns="0" tIns="0" rIns="0" bIns="0" rtlCol="0" anchor="ctr"/>
+          <a:lstStyle/>
+          <a:p>
+            <a:pPr algn="r" indent="0" marL="0">
+              <a:buNone/>
+            </a:pPr>
+            <a:r>
+              <a:rPr lang="en-US" sz="1200" dirty="0">
+                <a:solidFill>
+                  <a:srgbClr val="A82B26"/>
+                </a:solidFill>
+                <a:latin typeface="Inter" pitchFamily="34" charset="0"/>
+                <a:ea typeface="Inter" pitchFamily="34" charset="-122"/>
+                <a:cs typeface="Inter" pitchFamily="34" charset="-120"/>
+              </a:rPr>
+              <a:t>−34.8%</a:t>
+            </a:r>
+            <a:endParaRPr lang="en-US" sz="1200" dirty="0"/>
+          </a:p>
+        </p:txBody>
+      </p:sp>
+      <p:sp>
+        <p:nvSpPr>
+          <p:cNvPr id="180" name="Text 178"/>
+          <p:cNvSpPr txBox="1"/>
+          <p:nvPr/>
+        </p:nvSpPr>
+        <p:spPr>
+          <a:xfrm>
+            <a:off x="6208776" y="5477794"/>
+            <a:ext cx="310896" cy="223759"/>
+          </a:xfrm>
+          <a:prstGeom prst="rect">
+            <a:avLst/>
+          </a:prstGeom>
+          <a:noFill/>
+          <a:ln/>
+        </p:spPr>
+        <p:txBody>
+          <a:bodyPr wrap="square" lIns="0" tIns="0" rIns="0" bIns="0" rtlCol="0" anchor="ctr"/>
+          <a:lstStyle/>
+          <a:p>
+            <a:pPr algn="r" indent="0" marL="0">
+              <a:buNone/>
+            </a:pPr>
+            <a:r>
+              <a:rPr lang="en-US" sz="1200" dirty="0">
+                <a:solidFill>
+                  <a:srgbClr val="9AA3AD"/>
+                </a:solidFill>
+                <a:latin typeface="Inter" pitchFamily="34" charset="0"/>
+                <a:ea typeface="Inter" pitchFamily="34" charset="-122"/>
+                <a:cs typeface="Inter" pitchFamily="34" charset="-120"/>
+              </a:rPr>
+              <a:t>33</a:t>
+            </a:r>
+            <a:endParaRPr lang="en-US" sz="1200" dirty="0"/>
+          </a:p>
+        </p:txBody>
+      </p:sp>
+      <p:sp>
+        <p:nvSpPr>
+          <p:cNvPr id="181" name="Text 179"/>
+          <p:cNvSpPr txBox="1"/>
+          <p:nvPr/>
+        </p:nvSpPr>
+        <p:spPr>
+          <a:xfrm>
+            <a:off x="6565392" y="5477794"/>
+            <a:ext cx="1920240" cy="223759"/>
+          </a:xfrm>
+          <a:prstGeom prst="rect">
+            <a:avLst/>
+          </a:prstGeom>
+          <a:noFill/>
+          <a:ln/>
+        </p:spPr>
+        <p:txBody>
+          <a:bodyPr wrap="square" lIns="0" tIns="0" rIns="0" bIns="0" rtlCol="0" anchor="ctr"/>
+          <a:lstStyle/>
+          <a:p>
+            <a:pPr indent="0" marL="0">
+              <a:buNone/>
+            </a:pPr>
+            <a:r>
+              <a:rPr lang="en-US" sz="1200" dirty="0">
+                <a:solidFill>
+                  <a:srgbClr val="1A1A1A"/>
+                </a:solidFill>
+                <a:latin typeface="Inter" pitchFamily="34" charset="0"/>
+                <a:ea typeface="Inter" pitchFamily="34" charset="-122"/>
+                <a:cs typeface="Inter" pitchFamily="34" charset="-120"/>
+              </a:rPr>
+              <a:t>VW HENDERSON</a:t>
+            </a:r>
+            <a:endParaRPr lang="en-US" sz="1200" dirty="0"/>
+          </a:p>
+        </p:txBody>
+      </p:sp>
+      <p:sp>
+        <p:nvSpPr>
+          <p:cNvPr id="182" name="Shape 180"/>
           <p:cNvSpPr/>
           <p:nvPr/>
         </p:nvSpPr>
         <p:spPr>
           <a:xfrm>
-            <a:off x="3780130" y="1847088"/>
-            <a:ext cx="10973" cy="4078224"/>
+            <a:off x="8898849" y="5538209"/>
+            <a:ext cx="231435" cy="102929"/>
+          </a:xfrm>
+          <a:prstGeom prst="rect">
+            <a:avLst/>
+          </a:prstGeom>
+          <a:solidFill>
+            <a:srgbClr val="C2352F"/>
+          </a:solidFill>
+          <a:ln/>
+        </p:spPr>
+      </p:sp>
+      <p:sp>
+        <p:nvSpPr>
+          <p:cNvPr id="183" name="Text 181"/>
+          <p:cNvSpPr txBox="1"/>
+          <p:nvPr/>
+        </p:nvSpPr>
+        <p:spPr>
+          <a:xfrm>
+            <a:off x="9756648" y="5477794"/>
+            <a:ext cx="777240" cy="223759"/>
+          </a:xfrm>
+          <a:prstGeom prst="rect">
+            <a:avLst/>
+          </a:prstGeom>
+          <a:noFill/>
+          <a:ln/>
+        </p:spPr>
+        <p:txBody>
+          <a:bodyPr wrap="square" lIns="0" tIns="0" rIns="0" bIns="0" rtlCol="0" anchor="ctr"/>
+          <a:lstStyle/>
+          <a:p>
+            <a:pPr algn="r" indent="0" marL="0">
+              <a:buNone/>
+            </a:pPr>
+            <a:r>
+              <a:rPr lang="en-US" sz="1200" b="1" dirty="0">
+                <a:solidFill>
+                  <a:srgbClr val="A82B26"/>
+                </a:solidFill>
+                <a:latin typeface="Inter" pitchFamily="34" charset="0"/>
+                <a:ea typeface="Inter" pitchFamily="34" charset="-122"/>
+                <a:cs typeface="Inter" pitchFamily="34" charset="-120"/>
+              </a:rPr>
+              <a:t>−$822K</a:t>
+            </a:r>
+            <a:endParaRPr lang="en-US" sz="1200" dirty="0"/>
+          </a:p>
+        </p:txBody>
+      </p:sp>
+      <p:sp>
+        <p:nvSpPr>
+          <p:cNvPr id="184" name="Text 182"/>
+          <p:cNvSpPr txBox="1"/>
+          <p:nvPr/>
+        </p:nvSpPr>
+        <p:spPr>
+          <a:xfrm>
+            <a:off x="10533888" y="5477794"/>
+            <a:ext cx="868680" cy="223759"/>
+          </a:xfrm>
+          <a:prstGeom prst="rect">
+            <a:avLst/>
+          </a:prstGeom>
+          <a:noFill/>
+          <a:ln/>
+        </p:spPr>
+        <p:txBody>
+          <a:bodyPr wrap="square" lIns="0" tIns="0" rIns="0" bIns="0" rtlCol="0" anchor="ctr"/>
+          <a:lstStyle/>
+          <a:p>
+            <a:pPr algn="r" indent="0" marL="0">
+              <a:buNone/>
+            </a:pPr>
+            <a:r>
+              <a:rPr lang="en-US" sz="1200" dirty="0">
+                <a:solidFill>
+                  <a:srgbClr val="A82B26"/>
+                </a:solidFill>
+                <a:latin typeface="Inter" pitchFamily="34" charset="0"/>
+                <a:ea typeface="Inter" pitchFamily="34" charset="-122"/>
+                <a:cs typeface="Inter" pitchFamily="34" charset="-120"/>
+              </a:rPr>
+              <a:t>−35.0%</a:t>
+            </a:r>
+            <a:endParaRPr lang="en-US" sz="1200" dirty="0"/>
+          </a:p>
+        </p:txBody>
+      </p:sp>
+      <p:sp>
+        <p:nvSpPr>
+          <p:cNvPr id="185" name="Shape 183"/>
+          <p:cNvSpPr/>
+          <p:nvPr/>
+        </p:nvSpPr>
+        <p:spPr>
+          <a:xfrm>
+            <a:off x="11457432" y="5523514"/>
+            <a:ext cx="54864" cy="132319"/>
+          </a:xfrm>
+          <a:prstGeom prst="rect">
+            <a:avLst/>
+          </a:prstGeom>
+          <a:solidFill>
+            <a:srgbClr val="C2352F"/>
+          </a:solidFill>
+          <a:ln/>
+        </p:spPr>
+      </p:sp>
+      <p:sp>
+        <p:nvSpPr>
+          <p:cNvPr id="186" name="Shape 184"/>
+          <p:cNvSpPr/>
+          <p:nvPr/>
+        </p:nvSpPr>
+        <p:spPr>
+          <a:xfrm>
+            <a:off x="3574390" y="2121408"/>
+            <a:ext cx="10973" cy="3803904"/>
           </a:xfrm>
           <a:prstGeom prst="rect">
             <a:avLst/>
@@ -33862,14 +35425,14 @@
       </p:sp>
       <p:sp>
         <p:nvSpPr>
-          <p:cNvPr id="144" name="Shape 142"/>
+          <p:cNvPr id="187" name="Shape 185"/>
           <p:cNvSpPr/>
           <p:nvPr/>
         </p:nvSpPr>
         <p:spPr>
           <a:xfrm>
-            <a:off x="9330538" y="1847088"/>
-            <a:ext cx="10973" cy="4078224"/>
+            <a:off x="9124798" y="2121408"/>
+            <a:ext cx="10973" cy="3803904"/>
           </a:xfrm>
           <a:prstGeom prst="rect">
             <a:avLst/>
@@ -33882,14 +35445,14 @@
       </p:sp>
       <p:sp>
         <p:nvSpPr>
-          <p:cNvPr id="145" name="Shape 143"/>
+          <p:cNvPr id="188" name="Shape 186"/>
           <p:cNvSpPr/>
           <p:nvPr/>
         </p:nvSpPr>
         <p:spPr>
           <a:xfrm>
-            <a:off x="6085332" y="1847088"/>
-            <a:ext cx="10973" cy="4078224"/>
+            <a:off x="6085332" y="2121408"/>
+            <a:ext cx="10973" cy="3803904"/>
           </a:xfrm>
           <a:prstGeom prst="rect">
             <a:avLst/>
@@ -33902,7 +35465,7 @@
       </p:sp>
       <p:sp>
         <p:nvSpPr>
-          <p:cNvPr id="146" name="Shape 144"/>
+          <p:cNvPr id="189" name="Shape 187"/>
           <p:cNvSpPr/>
           <p:nvPr/>
         </p:nvSpPr>
@@ -33915,14 +35478,14 @@
             <a:avLst/>
           </a:prstGeom>
           <a:solidFill>
-            <a:srgbClr val="FBEBEA"/>
+            <a:srgbClr val="E6F6EE"/>
           </a:solidFill>
           <a:ln/>
         </p:spPr>
       </p:sp>
       <p:sp>
         <p:nvSpPr>
-          <p:cNvPr id="147" name="Text 145"/>
+          <p:cNvPr id="190" name="Text 188"/>
           <p:cNvSpPr txBox="1"/>
           <p:nvPr/>
         </p:nvSpPr>
@@ -33947,13 +35510,13 @@
             <a:r>
               <a:rPr lang="en-US" sz="1600" b="1" dirty="0">
                 <a:solidFill>
-                  <a:srgbClr val="A82B26"/>
-                </a:solidFill>
-                <a:latin typeface="Inter" pitchFamily="34" charset="0"/>
-                <a:ea typeface="Inter" pitchFamily="34" charset="-122"/>
-                <a:cs typeface="Inter" pitchFamily="34" charset="-120"/>
-              </a:rPr>
-              <a:t>17 of 33 stores grew warranty RO count, led by Hyundai Prescott at +47.9% to 2,802. 16 declined; Acura fell most at −46.4%.</a:t>
+                  <a:srgbClr val="0B7A4A"/>
+                </a:solidFill>
+                <a:latin typeface="Inter" pitchFamily="34" charset="0"/>
+                <a:ea typeface="Inter" pitchFamily="34" charset="-122"/>
+                <a:cs typeface="Inter" pitchFamily="34" charset="-120"/>
+              </a:rPr>
+              <a:t>18 of 33 stores grew warranty gross. Cadillac added the most at +$2.03M (+49.5%); VW Henderson fell most at −$822K (−35.0%).</a:t>
             </a:r>
             <a:endParaRPr lang="en-US" sz="1600" dirty="0"/>
           </a:p>
@@ -34083,7 +35646,7 @@
                 <a:ea typeface="Inter" pitchFamily="34" charset="-122"/>
                 <a:cs typeface="Inter" pitchFamily="34" charset="-120"/>
               </a:rPr>
-              <a:t>Warranty RO Count</a:t>
+              <a:t>Warranty Gross Profit</a:t>
             </a:r>
             <a:endParaRPr lang="en-US" sz="2800" dirty="0"/>
           </a:p>
@@ -34302,7 +35865,7 @@
                 <a:ea typeface="Inter" pitchFamily="34" charset="-122"/>
                 <a:cs typeface="Inter" pitchFamily="34" charset="-120"/>
               </a:rPr>
-              <a:t>Hyundai Prescott</a:t>
+              <a:t>Cadillac</a:t>
             </a:r>
             <a:endParaRPr lang="en-US" sz="1400" dirty="0"/>
           </a:p>
@@ -34322,7 +35885,7 @@
                 <a:ea typeface="Inter" pitchFamily="34" charset="-122"/>
                 <a:cs typeface="Inter" pitchFamily="34" charset="-120"/>
               </a:rPr>
-              <a:t>1,895  →  </a:t>
+              <a:t>$4.10M  →  </a:t>
             </a:r>
             <a:pPr indent="0" marL="0">
               <a:spcAft>
@@ -34339,7 +35902,7 @@
                 <a:ea typeface="Inter" pitchFamily="34" charset="-122"/>
                 <a:cs typeface="Inter" pitchFamily="34" charset="-120"/>
               </a:rPr>
-              <a:t>2,802</a:t>
+              <a:t>$6.13M</a:t>
             </a:r>
             <a:endParaRPr lang="en-US" sz="1400" dirty="0"/>
           </a:p>
@@ -34378,7 +35941,7 @@
                 <a:ea typeface="Inter" pitchFamily="34" charset="-122"/>
                 <a:cs typeface="Inter" pitchFamily="34" charset="-120"/>
               </a:rPr>
-              <a:t>+47.9%</a:t>
+              <a:t>+49.5%</a:t>
             </a:r>
             <a:endParaRPr lang="en-US" sz="1600" dirty="0"/>
           </a:p>
@@ -34479,7 +36042,7 @@
                 <a:ea typeface="Inter" pitchFamily="34" charset="-122"/>
                 <a:cs typeface="Inter" pitchFamily="34" charset="-120"/>
               </a:rPr>
-              <a:t>1,361  →  </a:t>
+              <a:t>$510K  →  </a:t>
             </a:r>
             <a:pPr indent="0" marL="0">
               <a:spcAft>
@@ -34496,7 +36059,7 @@
                 <a:ea typeface="Inter" pitchFamily="34" charset="-122"/>
                 <a:cs typeface="Inter" pitchFamily="34" charset="-120"/>
               </a:rPr>
-              <a:t>2,012</a:t>
+              <a:t>$704K</a:t>
             </a:r>
             <a:endParaRPr lang="en-US" sz="1400" dirty="0"/>
           </a:p>
@@ -34535,7 +36098,7 @@
                 <a:ea typeface="Inter" pitchFamily="34" charset="-122"/>
                 <a:cs typeface="Inter" pitchFamily="34" charset="-120"/>
               </a:rPr>
-              <a:t>+47.8%</a:t>
+              <a:t>+38.0%</a:t>
             </a:r>
             <a:endParaRPr lang="en-US" sz="1600" dirty="0"/>
           </a:p>
@@ -34636,7 +36199,7 @@
                 <a:ea typeface="Inter" pitchFamily="34" charset="-122"/>
                 <a:cs typeface="Inter" pitchFamily="34" charset="-120"/>
               </a:rPr>
-              <a:t>Hyundai St George</a:t>
+              <a:t>Audi Henderson</a:t>
             </a:r>
             <a:endParaRPr lang="en-US" sz="1400" dirty="0"/>
           </a:p>
@@ -34656,7 +36219,7 @@
                 <a:ea typeface="Inter" pitchFamily="34" charset="-122"/>
                 <a:cs typeface="Inter" pitchFamily="34" charset="-120"/>
               </a:rPr>
-              <a:t>2,482  →  </a:t>
+              <a:t>$3.24M  →  </a:t>
             </a:r>
             <a:pPr indent="0" marL="0">
               <a:spcAft>
@@ -34673,7 +36236,7 @@
                 <a:ea typeface="Inter" pitchFamily="34" charset="-122"/>
                 <a:cs typeface="Inter" pitchFamily="34" charset="-120"/>
               </a:rPr>
-              <a:t>3,655</a:t>
+              <a:t>$4.23M</a:t>
             </a:r>
             <a:endParaRPr lang="en-US" sz="1400" dirty="0"/>
           </a:p>
@@ -34712,7 +36275,7 @@
                 <a:ea typeface="Inter" pitchFamily="34" charset="-122"/>
                 <a:cs typeface="Inter" pitchFamily="34" charset="-120"/>
               </a:rPr>
-              <a:t>+47.3%</a:t>
+              <a:t>+30.4%</a:t>
             </a:r>
             <a:endParaRPr lang="en-US" sz="1600" dirty="0"/>
           </a:p>
@@ -34793,7 +36356,7 @@
                 <a:ea typeface="Inter" pitchFamily="34" charset="-122"/>
                 <a:cs typeface="Inter" pitchFamily="34" charset="-120"/>
               </a:rPr>
-              <a:t>Toyota Prescott</a:t>
+              <a:t>Hyundai Prescott</a:t>
             </a:r>
             <a:endParaRPr lang="en-US" sz="1400" dirty="0"/>
           </a:p>
@@ -34813,7 +36376,7 @@
                 <a:ea typeface="Inter" pitchFamily="34" charset="-122"/>
                 <a:cs typeface="Inter" pitchFamily="34" charset="-120"/>
               </a:rPr>
-              <a:t>1,665  →  </a:t>
+              <a:t>$443K  →  </a:t>
             </a:r>
             <a:pPr indent="0" marL="0">
               <a:spcAft>
@@ -34830,7 +36393,7 @@
                 <a:ea typeface="Inter" pitchFamily="34" charset="-122"/>
                 <a:cs typeface="Inter" pitchFamily="34" charset="-120"/>
               </a:rPr>
-              <a:t>2,263</a:t>
+              <a:t>$572K</a:t>
             </a:r>
             <a:endParaRPr lang="en-US" sz="1400" dirty="0"/>
           </a:p>
@@ -34869,7 +36432,7 @@
                 <a:ea typeface="Inter" pitchFamily="34" charset="-122"/>
                 <a:cs typeface="Inter" pitchFamily="34" charset="-120"/>
               </a:rPr>
-              <a:t>+35.9%</a:t>
+              <a:t>+29.0%</a:t>
             </a:r>
             <a:endParaRPr lang="en-US" sz="1600" dirty="0"/>
           </a:p>
@@ -34970,7 +36533,7 @@
                 <a:ea typeface="Inter" pitchFamily="34" charset="-122"/>
                 <a:cs typeface="Inter" pitchFamily="34" charset="-120"/>
               </a:rPr>
-              <a:t>Toyota Henderson</a:t>
+              <a:t>Lincoln</a:t>
             </a:r>
             <a:endParaRPr lang="en-US" sz="1400" dirty="0"/>
           </a:p>
@@ -34990,7 +36553,7 @@
                 <a:ea typeface="Inter" pitchFamily="34" charset="-122"/>
                 <a:cs typeface="Inter" pitchFamily="34" charset="-120"/>
               </a:rPr>
-              <a:t>8,449  →  </a:t>
+              <a:t>$668K  →  </a:t>
             </a:r>
             <a:pPr indent="0" marL="0">
               <a:spcAft>
@@ -35007,7 +36570,7 @@
                 <a:ea typeface="Inter" pitchFamily="34" charset="-122"/>
                 <a:cs typeface="Inter" pitchFamily="34" charset="-120"/>
               </a:rPr>
-              <a:t>11,211</a:t>
+              <a:t>$837K</a:t>
             </a:r>
             <a:endParaRPr lang="en-US" sz="1400" dirty="0"/>
           </a:p>
@@ -35046,7 +36609,7 @@
                 <a:ea typeface="Inter" pitchFamily="34" charset="-122"/>
                 <a:cs typeface="Inter" pitchFamily="34" charset="-120"/>
               </a:rPr>
-              <a:t>+32.7%</a:t>
+              <a:t>+25.4%</a:t>
             </a:r>
             <a:endParaRPr lang="en-US" sz="1600" dirty="0"/>
           </a:p>
@@ -35265,7 +36828,7 @@
                 <a:ea typeface="Inter" pitchFamily="34" charset="-122"/>
                 <a:cs typeface="Inter" pitchFamily="34" charset="-120"/>
               </a:rPr>
-              <a:t>2,545  →  </a:t>
+              <a:t>$983K  →  </a:t>
             </a:r>
             <a:pPr indent="0" marL="0">
               <a:spcAft>
@@ -35282,7 +36845,7 @@
                 <a:ea typeface="Inter" pitchFamily="34" charset="-122"/>
                 <a:cs typeface="Inter" pitchFamily="34" charset="-120"/>
               </a:rPr>
-              <a:t>1,365</a:t>
+              <a:t>$573K</a:t>
             </a:r>
             <a:endParaRPr lang="en-US" sz="1400" dirty="0"/>
           </a:p>
@@ -35321,7 +36884,7 @@
                 <a:ea typeface="Inter" pitchFamily="34" charset="-122"/>
                 <a:cs typeface="Inter" pitchFamily="34" charset="-120"/>
               </a:rPr>
-              <a:t>−46.4%</a:t>
+              <a:t>−41.7%</a:t>
             </a:r>
             <a:endParaRPr lang="en-US" sz="1600" dirty="0"/>
           </a:p>
@@ -35402,7 +36965,7 @@
                 <a:ea typeface="Inter" pitchFamily="34" charset="-122"/>
                 <a:cs typeface="Inter" pitchFamily="34" charset="-120"/>
               </a:rPr>
-              <a:t>Mazda</a:t>
+              <a:t>Honda Flagstaff</a:t>
             </a:r>
             <a:endParaRPr lang="en-US" sz="1400" dirty="0"/>
           </a:p>
@@ -35422,7 +36985,7 @@
                 <a:ea typeface="Inter" pitchFamily="34" charset="-122"/>
                 <a:cs typeface="Inter" pitchFamily="34" charset="-120"/>
               </a:rPr>
-              <a:t>2,686  →  </a:t>
+              <a:t>$218K  →  </a:t>
             </a:r>
             <a:pPr indent="0" marL="0">
               <a:spcAft>
@@ -35439,7 +37002,7 @@
                 <a:ea typeface="Inter" pitchFamily="34" charset="-122"/>
                 <a:cs typeface="Inter" pitchFamily="34" charset="-120"/>
               </a:rPr>
-              <a:t>1,512</a:t>
+              <a:t>$135K</a:t>
             </a:r>
             <a:endParaRPr lang="en-US" sz="1400" dirty="0"/>
           </a:p>
@@ -35478,7 +37041,7 @@
                 <a:ea typeface="Inter" pitchFamily="34" charset="-122"/>
                 <a:cs typeface="Inter" pitchFamily="34" charset="-120"/>
               </a:rPr>
-              <a:t>−43.7%</a:t>
+              <a:t>−38.1%</a:t>
             </a:r>
             <a:endParaRPr lang="en-US" sz="1600" dirty="0"/>
           </a:p>
@@ -35579,7 +37142,7 @@
                 <a:ea typeface="Inter" pitchFamily="34" charset="-122"/>
                 <a:cs typeface="Inter" pitchFamily="34" charset="-120"/>
               </a:rPr>
-              <a:t>Honda Henderson</a:t>
+              <a:t>VW Henderson</a:t>
             </a:r>
             <a:endParaRPr lang="en-US" sz="1400" dirty="0"/>
           </a:p>
@@ -35599,7 +37162,7 @@
                 <a:ea typeface="Inter" pitchFamily="34" charset="-122"/>
                 <a:cs typeface="Inter" pitchFamily="34" charset="-120"/>
               </a:rPr>
-              <a:t>13,040  →  </a:t>
+              <a:t>$2.35M  →  </a:t>
             </a:r>
             <a:pPr indent="0" marL="0">
               <a:spcAft>
@@ -35616,7 +37179,7 @@
                 <a:ea typeface="Inter" pitchFamily="34" charset="-122"/>
                 <a:cs typeface="Inter" pitchFamily="34" charset="-120"/>
               </a:rPr>
-              <a:t>7,885</a:t>
+              <a:t>$1.52M</a:t>
             </a:r>
             <a:endParaRPr lang="en-US" sz="1400" dirty="0"/>
           </a:p>
@@ -35655,7 +37218,7 @@
                 <a:ea typeface="Inter" pitchFamily="34" charset="-122"/>
                 <a:cs typeface="Inter" pitchFamily="34" charset="-120"/>
               </a:rPr>
-              <a:t>−39.5%</a:t>
+              <a:t>−35.0%</a:t>
             </a:r>
             <a:endParaRPr lang="en-US" sz="1600" dirty="0"/>
           </a:p>
@@ -35736,7 +37299,7 @@
                 <a:ea typeface="Inter" pitchFamily="34" charset="-122"/>
                 <a:cs typeface="Inter" pitchFamily="34" charset="-120"/>
               </a:rPr>
-              <a:t>Honda Spokane</a:t>
+              <a:t>Honda North</a:t>
             </a:r>
             <a:endParaRPr lang="en-US" sz="1400" dirty="0"/>
           </a:p>
@@ -35756,7 +37319,7 @@
                 <a:ea typeface="Inter" pitchFamily="34" charset="-122"/>
                 <a:cs typeface="Inter" pitchFamily="34" charset="-120"/>
               </a:rPr>
-              <a:t>3,088  →  </a:t>
+              <a:t>$1.68M  →  </a:t>
             </a:r>
             <a:pPr indent="0" marL="0">
               <a:spcAft>
@@ -35773,7 +37336,7 @@
                 <a:ea typeface="Inter" pitchFamily="34" charset="-122"/>
                 <a:cs typeface="Inter" pitchFamily="34" charset="-120"/>
               </a:rPr>
-              <a:t>1,997</a:t>
+              <a:t>$1.10M</a:t>
             </a:r>
             <a:endParaRPr lang="en-US" sz="1400" dirty="0"/>
           </a:p>
@@ -35812,7 +37375,7 @@
                 <a:ea typeface="Inter" pitchFamily="34" charset="-122"/>
                 <a:cs typeface="Inter" pitchFamily="34" charset="-120"/>
               </a:rPr>
-              <a:t>−35.3%</a:t>
+              <a:t>−34.8%</a:t>
             </a:r>
             <a:endParaRPr lang="en-US" sz="1600" dirty="0"/>
           </a:p>
@@ -35913,7 +37476,7 @@
                 <a:ea typeface="Inter" pitchFamily="34" charset="-122"/>
                 <a:cs typeface="Inter" pitchFamily="34" charset="-120"/>
               </a:rPr>
-              <a:t>Honda Flagstaff</a:t>
+              <a:t>Honda Spokane</a:t>
             </a:r>
             <a:endParaRPr lang="en-US" sz="1400" dirty="0"/>
           </a:p>
@@ -35933,7 +37496,7 @@
                 <a:ea typeface="Inter" pitchFamily="34" charset="-122"/>
                 <a:cs typeface="Inter" pitchFamily="34" charset="-120"/>
               </a:rPr>
-              <a:t>1,757  →  </a:t>
+              <a:t>$567K  →  </a:t>
             </a:r>
             <a:pPr indent="0" marL="0">
               <a:spcAft>
@@ -35950,7 +37513,7 @@
                 <a:ea typeface="Inter" pitchFamily="34" charset="-122"/>
                 <a:cs typeface="Inter" pitchFamily="34" charset="-120"/>
               </a:rPr>
-              <a:t>1,235</a:t>
+              <a:t>$403K</a:t>
             </a:r>
             <a:endParaRPr lang="en-US" sz="1400" dirty="0"/>
           </a:p>
@@ -35989,7 +37552,7 @@
                 <a:ea typeface="Inter" pitchFamily="34" charset="-122"/>
                 <a:cs typeface="Inter" pitchFamily="34" charset="-120"/>
               </a:rPr>
-              <a:t>−29.7%</a:t>
+              <a:t>−28.9%</a:t>
             </a:r>
             <a:endParaRPr lang="en-US" sz="1600" dirty="0"/>
           </a:p>
@@ -36188,7 +37751,7 @@
                 <a:ea typeface="Inter" pitchFamily="34" charset="-122"/>
                 <a:cs typeface="Inter" pitchFamily="34" charset="-120"/>
               </a:rPr>
-              <a:t>LR Reno</a:t>
+              <a:t>Honda North</a:t>
             </a:r>
             <a:endParaRPr lang="en-US" sz="1400" dirty="0"/>
           </a:p>
@@ -36208,7 +37771,7 @@
                 <a:ea typeface="Inter" pitchFamily="34" charset="-122"/>
                 <a:cs typeface="Inter" pitchFamily="34" charset="-120"/>
               </a:rPr>
-              <a:t>79  →  </a:t>
+              <a:t>$99K  →  </a:t>
             </a:r>
             <a:pPr indent="0" marL="0">
               <a:spcAft>
@@ -36225,7 +37788,7 @@
                 <a:ea typeface="Inter" pitchFamily="34" charset="-122"/>
                 <a:cs typeface="Inter" pitchFamily="34" charset="-120"/>
               </a:rPr>
-              <a:t>157</a:t>
+              <a:t>$156K</a:t>
             </a:r>
             <a:endParaRPr lang="en-US" sz="1400" dirty="0"/>
           </a:p>
@@ -36264,7 +37827,7 @@
                 <a:ea typeface="Inter" pitchFamily="34" charset="-122"/>
                 <a:cs typeface="Inter" pitchFamily="34" charset="-120"/>
               </a:rPr>
-              <a:t>+98.3%</a:t>
+              <a:t>+57.0%</a:t>
             </a:r>
             <a:endParaRPr lang="en-US" sz="1600" dirty="0"/>
           </a:p>
@@ -36365,7 +37928,7 @@
                 <a:ea typeface="Inter" pitchFamily="34" charset="-122"/>
                 <a:cs typeface="Inter" pitchFamily="34" charset="-120"/>
               </a:rPr>
-              <a:t>223  →  </a:t>
+              <a:t>$163K  →  </a:t>
             </a:r>
             <a:pPr indent="0" marL="0">
               <a:spcAft>
@@ -36382,7 +37945,7 @@
                 <a:ea typeface="Inter" pitchFamily="34" charset="-122"/>
                 <a:cs typeface="Inter" pitchFamily="34" charset="-120"/>
               </a:rPr>
-              <a:t>409</a:t>
+              <a:t>$244K</a:t>
             </a:r>
             <a:endParaRPr lang="en-US" sz="1400" dirty="0"/>
           </a:p>
@@ -36421,7 +37984,7 @@
                 <a:ea typeface="Inter" pitchFamily="34" charset="-122"/>
                 <a:cs typeface="Inter" pitchFamily="34" charset="-120"/>
               </a:rPr>
-              <a:t>+83.0%</a:t>
+              <a:t>+49.6%</a:t>
             </a:r>
             <a:endParaRPr lang="en-US" sz="1600" dirty="0"/>
           </a:p>
@@ -36522,7 +38085,7 @@
                 <a:ea typeface="Inter" pitchFamily="34" charset="-122"/>
                 <a:cs typeface="Inter" pitchFamily="34" charset="-120"/>
               </a:rPr>
-              <a:t>LR Henderson</a:t>
+              <a:t>Nissan</a:t>
             </a:r>
             <a:endParaRPr lang="en-US" sz="1400" dirty="0"/>
           </a:p>
@@ -36542,7 +38105,7 @@
                 <a:ea typeface="Inter" pitchFamily="34" charset="-122"/>
                 <a:cs typeface="Inter" pitchFamily="34" charset="-120"/>
               </a:rPr>
-              <a:t>125  →  </a:t>
+              <a:t>$95K  →  </a:t>
             </a:r>
             <a:pPr indent="0" marL="0">
               <a:spcAft>
@@ -36559,7 +38122,7 @@
                 <a:ea typeface="Inter" pitchFamily="34" charset="-122"/>
                 <a:cs typeface="Inter" pitchFamily="34" charset="-120"/>
               </a:rPr>
-              <a:t>214</a:t>
+              <a:t>$135K</a:t>
             </a:r>
             <a:endParaRPr lang="en-US" sz="1400" dirty="0"/>
           </a:p>
@@ -36598,7 +38161,7 @@
                 <a:ea typeface="Inter" pitchFamily="34" charset="-122"/>
                 <a:cs typeface="Inter" pitchFamily="34" charset="-120"/>
               </a:rPr>
-              <a:t>+71.0%</a:t>
+              <a:t>+41.6%</a:t>
             </a:r>
             <a:endParaRPr lang="en-US" sz="1600" dirty="0"/>
           </a:p>
@@ -36679,7 +38242,7 @@
                 <a:ea typeface="Inter" pitchFamily="34" charset="-122"/>
                 <a:cs typeface="Inter" pitchFamily="34" charset="-120"/>
               </a:rPr>
-              <a:t>CDJR Post Falls</a:t>
+              <a:t>Kia St George</a:t>
             </a:r>
             <a:endParaRPr lang="en-US" sz="1400" dirty="0"/>
           </a:p>
@@ -36699,7 +38262,7 @@
                 <a:ea typeface="Inter" pitchFamily="34" charset="-122"/>
                 <a:cs typeface="Inter" pitchFamily="34" charset="-120"/>
               </a:rPr>
-              <a:t>345  →  </a:t>
+              <a:t>$101K  →  </a:t>
             </a:r>
             <a:pPr indent="0" marL="0">
               <a:spcAft>
@@ -36716,7 +38279,7 @@
                 <a:ea typeface="Inter" pitchFamily="34" charset="-122"/>
                 <a:cs typeface="Inter" pitchFamily="34" charset="-120"/>
               </a:rPr>
-              <a:t>560</a:t>
+              <a:t>$139K</a:t>
             </a:r>
             <a:endParaRPr lang="en-US" sz="1400" dirty="0"/>
           </a:p>
@@ -36755,7 +38318,7 @@
                 <a:ea typeface="Inter" pitchFamily="34" charset="-122"/>
                 <a:cs typeface="Inter" pitchFamily="34" charset="-120"/>
               </a:rPr>
-              <a:t>+62.2%</a:t>
+              <a:t>+38.2%</a:t>
             </a:r>
             <a:endParaRPr lang="en-US" sz="1600" dirty="0"/>
           </a:p>
@@ -36856,7 +38419,7 @@
                 <a:ea typeface="Inter" pitchFamily="34" charset="-122"/>
                 <a:cs typeface="Inter" pitchFamily="34" charset="-120"/>
               </a:rPr>
-              <a:t>Honda Spokane</a:t>
+              <a:t>Toyota Spokane</a:t>
             </a:r>
             <a:endParaRPr lang="en-US" sz="1400" dirty="0"/>
           </a:p>
@@ -36876,7 +38439,7 @@
                 <a:ea typeface="Inter" pitchFamily="34" charset="-122"/>
                 <a:cs typeface="Inter" pitchFamily="34" charset="-120"/>
               </a:rPr>
-              <a:t>181  →  </a:t>
+              <a:t>$95K  →  </a:t>
             </a:r>
             <a:pPr indent="0" marL="0">
               <a:spcAft>
@@ -36893,7 +38456,7 @@
                 <a:ea typeface="Inter" pitchFamily="34" charset="-122"/>
                 <a:cs typeface="Inter" pitchFamily="34" charset="-120"/>
               </a:rPr>
-              <a:t>283</a:t>
+              <a:t>$125K</a:t>
             </a:r>
             <a:endParaRPr lang="en-US" sz="1400" dirty="0"/>
           </a:p>
@@ -36932,7 +38495,7 @@
                 <a:ea typeface="Inter" pitchFamily="34" charset="-122"/>
                 <a:cs typeface="Inter" pitchFamily="34" charset="-120"/>
               </a:rPr>
-              <a:t>+56.5%</a:t>
+              <a:t>+32.4%</a:t>
             </a:r>
             <a:endParaRPr lang="en-US" sz="1600" dirty="0"/>
           </a:p>
@@ -36991,7 +38554,7 @@
                 <a:ea typeface="Inter" pitchFamily="34" charset="-122"/>
                 <a:cs typeface="Inter" pitchFamily="34" charset="-120"/>
               </a:rPr>
-              <a:t>Ask Hyundai Prescott, Lexus and Hyundai St George what changed. Ask Acura, Mazda and Honda Henderson what got in the way. Ask LR Reno, LR LV and LR Henderson what they started this year.</a:t>
+              <a:t>Ask Cadillac, Lexus and Audi Henderson what changed. Ask Acura, Honda Flagstaff and VW Henderson what got in the way. Ask Honda North, LR LV and Nissan what they started this year.</a:t>
             </a:r>
             <a:endParaRPr lang="en-US" sz="1600" dirty="0"/>
           </a:p>

--- a/day2-deck/decks/Warranty & Internal - House Style.pptx
+++ b/day2-deck/decks/Warranty & Internal - House Style.pptx
@@ -19790,7 +19790,7 @@
                 <a:ea typeface="Inter" pitchFamily="34" charset="-122"/>
                 <a:cs typeface="Inter" pitchFamily="34" charset="-120"/>
               </a:rPr>
-              <a:t>Jan–Sep 2026 vs Jan–Sep 2025</a:t>
+              <a:t>Jan–Sep, this year vs last</a:t>
             </a:r>
             <a:endParaRPr lang="en-US" sz="1200" dirty="0"/>
           </a:p>
@@ -20968,7 +20968,7 @@
                 <a:ea typeface="Inter" pitchFamily="34" charset="-122"/>
                 <a:cs typeface="Inter" pitchFamily="34" charset="-120"/>
               </a:rPr>
-              <a:t>Jan–Sep 2026 vs Jan–Sep 2025</a:t>
+              <a:t>Jan–Sep, this year vs last</a:t>
             </a:r>
             <a:endParaRPr lang="en-US" sz="1200" dirty="0"/>
           </a:p>
@@ -22106,7 +22106,7 @@
                 <a:ea typeface="Inter" pitchFamily="34" charset="-122"/>
                 <a:cs typeface="Inter" pitchFamily="34" charset="-120"/>
               </a:rPr>
-              <a:t>Jul–Sep vs Jan–Mar 2026</a:t>
+              <a:t>Jul–Sep vs Jan–Mar this year</a:t>
             </a:r>
             <a:endParaRPr lang="en-US" sz="1200" dirty="0"/>
           </a:p>
@@ -35764,7 +35764,7 @@
                 <a:ea typeface="Inter" pitchFamily="34" charset="-122"/>
                 <a:cs typeface="Inter" pitchFamily="34" charset="-120"/>
               </a:rPr>
-              <a:t>Jan–Sep 2026 vs Jan–Sep 2025</a:t>
+              <a:t>Jan–Sep, this year vs last</a:t>
             </a:r>
             <a:endParaRPr lang="en-US" sz="1200" dirty="0"/>
           </a:p>
@@ -36707,7 +36707,7 @@
                 <a:ea typeface="Inter" pitchFamily="34" charset="-122"/>
                 <a:cs typeface="Inter" pitchFamily="34" charset="-120"/>
               </a:rPr>
-              <a:t>Jan–Sep 2026 vs Jan–Sep 2025</a:t>
+              <a:t>Jan–Sep, this year vs last</a:t>
             </a:r>
             <a:endParaRPr lang="en-US" sz="1200" dirty="0"/>
           </a:p>
@@ -37650,7 +37650,7 @@
                 <a:ea typeface="Inter" pitchFamily="34" charset="-122"/>
                 <a:cs typeface="Inter" pitchFamily="34" charset="-120"/>
               </a:rPr>
-              <a:t>Jul–Sep vs Jan–Mar 2026, per month</a:t>
+              <a:t>Jul–Sep vs Jan–Mar this year</a:t>
             </a:r>
             <a:endParaRPr lang="en-US" sz="1200" dirty="0"/>
           </a:p>
@@ -49534,7 +49534,7 @@
                 <a:ea typeface="Inter" pitchFamily="34" charset="-122"/>
                 <a:cs typeface="Inter" pitchFamily="34" charset="-120"/>
               </a:rPr>
-              <a:t>Jan–Sep 2026 vs Jan–Sep 2025</a:t>
+              <a:t>Jan–Sep, this year vs last</a:t>
             </a:r>
             <a:endParaRPr lang="en-US" sz="1200" dirty="0"/>
           </a:p>
@@ -50517,7 +50517,7 @@
                 <a:ea typeface="Inter" pitchFamily="34" charset="-122"/>
                 <a:cs typeface="Inter" pitchFamily="34" charset="-120"/>
               </a:rPr>
-              <a:t>Jan–Sep 2026 vs Jan–Sep 2025</a:t>
+              <a:t>Jan–Sep, this year vs last</a:t>
             </a:r>
             <a:endParaRPr lang="en-US" sz="1200" dirty="0"/>
           </a:p>
@@ -51460,7 +51460,7 @@
                 <a:ea typeface="Inter" pitchFamily="34" charset="-122"/>
                 <a:cs typeface="Inter" pitchFamily="34" charset="-120"/>
               </a:rPr>
-              <a:t>Jul–Sep vs Jan–Mar 2026</a:t>
+              <a:t>Jul–Sep vs Jan–Mar this year</a:t>
             </a:r>
             <a:endParaRPr lang="en-US" sz="1200" dirty="0"/>
           </a:p>

--- a/day2-deck/decks/Warranty & Internal - House Style.pptx
+++ b/day2-deck/decks/Warranty & Internal - House Style.pptx
@@ -5987,7 +5987,7 @@
           <a:p>
             <a:r>
               <a:rPr lang="en-US" dirty="0"/>
-              <a:t>Takeaway (off the slide): 21 of 33 stores at or above the $130 group, led by LR Reno at $207. Nissan is lowest at $87.Source: Qlik - Closed Repair Orders. Jan-Sep by close month. Same-store, INEOS excluded (opened 2026). GMC Prescott body shop labor types excluded. Internal labor sale / internal sold hours. A higher internal rate adds service gross but is a cost to used cars. Jan-Sep 2026 YTD. Green at or above the group, red below.</a:t>
+              <a:t>Takeaway with the store call-outs (off the slide): 21 of 33 stores at or above the $130 group, led by LR Reno at $207. Nissan is lowest at $87.Source: Qlik - Closed Repair Orders. Jan-Sep by close month. Same-store, INEOS excluded (opened 2026). GMC Prescott body shop labor types excluded. Internal labor sale / internal sold hours. A higher internal rate adds service gross but is a cost to used cars. Jan-Sep 2026 YTD. Green at or above the group, red below.</a:t>
             </a:r>
             <a:endParaRPr lang="en-US" dirty="0"/>
           </a:p>
@@ -6075,7 +6075,7 @@
           <a:p>
             <a:r>
               <a:rPr lang="en-US" dirty="0"/>
-              <a:t>Takeaway (off the slide): 20 of 33 stores raised internal ELR, led by Hyundai St George at +29.5% (+$47) to $205. 13 declined; Nissan fell most at −27.2%.Source: Qlik - Closed Repair Orders. Jan-Sep by close month. Same-store, INEOS excluded (opened 2026). GMC Prescott body shop labor types excluded. Change in Internal ELR, Jan-Sep 2026 vs 2025, best first. Ranked by percent change; the change in the measure's own unit alongside.</a:t>
+              <a:t>Takeaway with the store call-outs (off the slide): 20 of 33 stores raised internal ELR, led by Hyundai St George at +29.5% (+$47) to $205. 13 declined; Nissan fell most at −27.2%.Source: Qlik - Closed Repair Orders. Jan-Sep by close month. Same-store, INEOS excluded (opened 2026). GMC Prescott body shop labor types excluded. Change in Internal ELR, Jan-Sep 2026 vs 2025, best first. Ranked by percent change; the change in the measure's own unit alongside.</a:t>
             </a:r>
             <a:endParaRPr lang="en-US" dirty="0"/>
           </a:p>
@@ -6163,7 +6163,7 @@
           <a:p>
             <a:r>
               <a:rPr lang="en-US" dirty="0"/>
-              <a:t>Takeaway (off the slide): Ask Hyundai St George, LR Reno and Lincoln what changed. Ask Nissan, Kia LV and Mazda what got in the way. Ask Acura, Hyundai St George and Toyota Henderson what they started this year.Source: Qlik - Closed Repair Orders. Jan-Sep by close month. Same-store, INEOS excluded (opened 2026). GMC Prescott body shop labor types excluded. Internal labor sale / internal sold hours. A higher internal rate adds service gross but is a cost to used cars. Top and bottom five stores by change in Internal ELR, Jan-Sep 2026 vs 2025. Moving now: Jul-Sep 2026 vs Jan-Mar 2026, each store against itself; the group moved +4.1% on the same basis, so part of every store's change is seasonal. Green bar at the right of a row: the store is on both the top five vs last year and the top five moving now.Conversation starter: each top store says one thing they started doing; each bottom store says what got in the way and what they would try. The room trades ideas. Moving now: ask the top three what they started this year.</a:t>
+              <a:t>Takeaway with the store call-outs (off the slide): Ask Hyundai St George, LR Reno and Lincoln what changed. Ask Nissan, Kia LV and Mazda what got in the way. Ask Acura, Hyundai St George and Toyota Henderson what they started this year.Source: Qlik - Closed Repair Orders. Jan-Sep by close month. Same-store, INEOS excluded (opened 2026). GMC Prescott body shop labor types excluded. Internal labor sale / internal sold hours. A higher internal rate adds service gross but is a cost to used cars. Top and bottom five stores by change in Internal ELR, Jan-Sep 2026 vs 2025. Moving now: Jul-Sep 2026 vs Jan-Mar 2026, each store against itself; the group moved +4.1% on the same basis, so part of every store's change is seasonal. Green bar at the right of a row: the store is on both the top five vs last year and the top five moving now.Conversation starter: each top store says one thing they started doing; each bottom store says what got in the way and what they would try. The room trades ideas. Moving now: ask the top three what they started this year.</a:t>
             </a:r>
             <a:endParaRPr lang="en-US" dirty="0"/>
           </a:p>
@@ -6339,7 +6339,7 @@
           <a:p>
             <a:r>
               <a:rPr lang="en-US" dirty="0"/>
-              <a:t>Takeaway (off the slide): Cadillac leads at $6.13M of the group's $47.07M; Honda Flagstaff is smallest at $135,184.Source: Qlik - Profit &amp; Loss, Gross Profit - Fixed Ops Warranty (service + parts warranty gross). Same-store, INEOS excluded (opened 2026); no body shop. Jan-Sep 2026.</a:t>
+              <a:t>Takeaway with the store call-outs (off the slide): Cadillac leads at $6.13M of the group's $47.07M; Honda Flagstaff is smallest at $135,184.Source: Qlik - Profit &amp; Loss, Gross Profit - Fixed Ops Warranty (service + parts warranty gross). Same-store, INEOS excluded (opened 2026); no body shop. Jan-Sep 2026.</a:t>
             </a:r>
             <a:endParaRPr lang="en-US" dirty="0"/>
           </a:p>
@@ -6427,7 +6427,7 @@
           <a:p>
             <a:r>
               <a:rPr lang="en-US" dirty="0"/>
-              <a:t>Takeaway (off the slide): 18 of 33 stores grew warranty gross. Cadillac added the most at +$2.03M (+49.5%); VW Henderson fell most at −$822K (−35.0%).Source: Qlik - Profit &amp; Loss, Gross Profit - Fixed Ops Warranty (service + parts warranty gross). Same-store, INEOS excluded (opened 2026); no body shop. Ranked by dollar change, Jan-Sep 2026 vs Jan-Sep 2025; percent change alongside, the top three and bottom three by percent marked. Warranty volume follows campaigns and recalls as well as store effort.</a:t>
+              <a:t>Takeaway with the store call-outs (off the slide): 18 of 33 stores grew warranty gross. Cadillac added the most at +$2.03M (+49.5%); VW Henderson fell most at −$822K (−35.0%).Source: Qlik - Profit &amp; Loss, Gross Profit - Fixed Ops Warranty (service + parts warranty gross). Same-store, INEOS excluded (opened 2026); no body shop. Ranked by dollar change, Jan-Sep 2026 vs Jan-Sep 2025; percent change alongside, the top three and bottom three by percent marked. Warranty volume follows campaigns and recalls as well as store effort.</a:t>
             </a:r>
             <a:endParaRPr lang="en-US" dirty="0"/>
           </a:p>
@@ -6515,7 +6515,7 @@
           <a:p>
             <a:r>
               <a:rPr lang="en-US" dirty="0"/>
-              <a:t>Takeaway (off the slide): Ask Cadillac, Lexus and Audi Henderson what changed. Ask Acura, Honda Flagstaff and VW Henderson what got in the way. Ask Honda North, LR LV and Nissan what they started this year.Source: Qlik - Profit &amp; Loss, Gross Profit - Fixed Ops Warranty (service + parts warranty gross). Same-store, INEOS excluded (opened 2026); no body shop. Top and bottom five stores by percent change in warranty gross, Jan-Sep 2026 vs 2025. Moving now: Jul-Sep 2026 vs Jan-Mar 2026, each store against itself (monthly averages); the group moved +9.3% on the same basis, so part of every store's change is seasonal. Green bar at the right of a row: the store is on both the top five vs last year and the top five moving now.Conversation starter: each top store says one thing they started doing; each bottom store says what got in the way and what they would try. The room trades ideas. Moving now: ask the top three what they started this year.</a:t>
+              <a:t>Takeaway with the store call-outs (off the slide): Ask Cadillac, Lexus and Audi Henderson what changed. Ask Acura, Honda Flagstaff and VW Henderson what got in the way. Ask Honda North, LR LV and Nissan what they started this year.Source: Qlik - Profit &amp; Loss, Gross Profit - Fixed Ops Warranty (service + parts warranty gross). Same-store, INEOS excluded (opened 2026); no body shop. Top and bottom five stores by percent change in warranty gross, Jan-Sep 2026 vs 2025. Moving now: Jul-Sep 2026 vs Jan-Mar 2026, each store against itself (monthly averages); the group moved +9.3% on the same basis, so part of every store's change is seasonal. Green bar at the right of a row: the store is on both the top five vs last year and the top five moving now.Conversation starter: each top store says one thing they started doing; each bottom store says what got in the way and what they would try. The room trades ideas. Moving now: ask the top three what they started this year.</a:t>
             </a:r>
             <a:endParaRPr lang="en-US" dirty="0"/>
           </a:p>
@@ -6691,7 +6691,7 @@
           <a:p>
             <a:r>
               <a:rPr lang="en-US" dirty="0"/>
-              <a:t>Takeaway (off the slide): 12 of 33 stores at or above the $197.17 group, led by Audi Henderson at $308.88. Subaru Prescott is lowest at $121.50.Source: Qlik - Closed Repair Orders. Jan-Sep by close month. Same-store, INEOS excluded (opened 2026). GMC Prescott body shop labor types excluded. Warranty labor sale / warranty sold hours. Jan-Sep 2026 YTD. Green at or above the group, red below.</a:t>
+              <a:t>Takeaway with the store call-outs (off the slide): 12 of 33 stores at or above the $197.17 group, led by Audi Henderson at $308.88. Subaru Prescott is lowest at $121.50.Source: Qlik - Closed Repair Orders. Jan-Sep by close month. Same-store, INEOS excluded (opened 2026). GMC Prescott body shop labor types excluded. Warranty labor sale / warranty sold hours. Jan-Sep 2026 YTD. Green at or above the group, red below.</a:t>
             </a:r>
             <a:endParaRPr lang="en-US" dirty="0"/>
           </a:p>
@@ -6779,7 +6779,7 @@
           <a:p>
             <a:r>
               <a:rPr lang="en-US" dirty="0"/>
-              <a:t>Takeaway (off the slide): 30 of 33 stores raised warranty ELR, led by LR LV at +$57.74 to $274.91. 3 declined; Honda North fell most at −$12.25.Source: Qlik - Closed Repair Orders. Jan-Sep by close month. Same-store, INEOS excluded (opened 2026). GMC Prescott body shop labor types excluded. Change in Warranty ELR, Jan-Sep 2026 vs 2025, best first.</a:t>
+              <a:t>Takeaway with the store call-outs (off the slide): 30 of 33 stores raised warranty ELR, led by LR LV at +$57.74 to $274.91. 3 declined; Honda North fell most at −$12.25.Source: Qlik - Closed Repair Orders. Jan-Sep by close month. Same-store, INEOS excluded (opened 2026). GMC Prescott body shop labor types excluded. Change in Warranty ELR, Jan-Sep 2026 vs 2025, best first.</a:t>
             </a:r>
             <a:endParaRPr lang="en-US" dirty="0"/>
           </a:p>
@@ -6867,7 +6867,7 @@
           <a:p>
             <a:r>
               <a:rPr lang="en-US" dirty="0"/>
-              <a:t>Takeaway (off the slide): Ask LR LV, Audi Henderson and Volvo what changed. Ask Honda North, LR Reno and Cadillac what got in the way. Ask Nissan, LR Henderson and Honda Flagstaff what they started this year.Source: Qlik - Closed Repair Orders. Jan-Sep by close month. Same-store, INEOS excluded (opened 2026). GMC Prescott body shop labor types excluded. Warranty labor sale / warranty sold hours. Top and bottom five stores by change in Warranty ELR, Jan-Sep 2026 vs 2025. Moving now: Jul-Sep 2026 vs Jan-Mar 2026, each store against itself; the group moved +$1.73 on the same basis, so part of every store's change is seasonal. Green bar at the right of a row: the store is on both the top five vs last year and the top five moving now.Conversation starter: each top store says one thing they started doing; each bottom store says what got in the way and what they would try. The room trades ideas. Moving now: ask the top three what they started this year.</a:t>
+              <a:t>Takeaway with the store call-outs (off the slide): Ask LR LV, Audi Henderson and Volvo what changed. Ask Honda North, LR Reno and Cadillac what got in the way. Ask Nissan, LR Henderson and Honda Flagstaff what they started this year.Source: Qlik - Closed Repair Orders. Jan-Sep by close month. Same-store, INEOS excluded (opened 2026). GMC Prescott body shop labor types excluded. Warranty labor sale / warranty sold hours. Top and bottom five stores by change in Warranty ELR, Jan-Sep 2026 vs 2025. Moving now: Jul-Sep 2026 vs Jan-Mar 2026, each store against itself; the group moved +$1.73 on the same basis, so part of every store's change is seasonal. Green bar at the right of a row: the store is on both the top five vs last year and the top five moving now.Conversation starter: each top store says one thing they started doing; each bottom store says what got in the way and what they would try. The room trades ideas. Moving now: ask the top three what they started this year.</a:t>
             </a:r>
             <a:endParaRPr lang="en-US" dirty="0"/>
           </a:p>
@@ -8350,7 +8350,7 @@
         <p:spPr>
           <a:xfrm>
             <a:off x="457200" y="1207008"/>
-            <a:ext cx="11274552" cy="5148072"/>
+            <a:ext cx="11274552" cy="4782312"/>
           </a:xfrm>
           <a:prstGeom prst="rect">
             <a:avLst/>
@@ -8527,7 +8527,7 @@
         <p:spPr>
           <a:xfrm>
             <a:off x="658368" y="1847088"/>
-            <a:ext cx="310896" cy="261411"/>
+            <a:ext cx="310896" cy="239896"/>
           </a:xfrm>
           <a:prstGeom prst="rect">
             <a:avLst/>
@@ -8566,7 +8566,7 @@
         <p:spPr>
           <a:xfrm>
             <a:off x="1014984" y="1847088"/>
-            <a:ext cx="1920240" cy="261411"/>
+            <a:ext cx="1920240" cy="239896"/>
           </a:xfrm>
           <a:prstGeom prst="rect">
             <a:avLst/>
@@ -8604,8 +8604,8 @@
         </p:nvSpPr>
         <p:spPr>
           <a:xfrm>
-            <a:off x="3008376" y="1912441"/>
-            <a:ext cx="1691640" cy="130705"/>
+            <a:off x="3008376" y="1907062"/>
+            <a:ext cx="1691640" cy="119948"/>
           </a:xfrm>
           <a:prstGeom prst="rect">
             <a:avLst/>
@@ -8625,7 +8625,7 @@
         <p:spPr>
           <a:xfrm>
             <a:off x="4754880" y="1847088"/>
-            <a:ext cx="1143000" cy="261411"/>
+            <a:ext cx="1143000" cy="239896"/>
           </a:xfrm>
           <a:prstGeom prst="rect">
             <a:avLst/>
@@ -8663,8 +8663,8 @@
         </p:nvSpPr>
         <p:spPr>
           <a:xfrm>
-            <a:off x="658368" y="2108499"/>
-            <a:ext cx="310896" cy="261411"/>
+            <a:off x="658368" y="2086984"/>
+            <a:ext cx="310896" cy="239896"/>
           </a:xfrm>
           <a:prstGeom prst="rect">
             <a:avLst/>
@@ -8702,8 +8702,8 @@
         </p:nvSpPr>
         <p:spPr>
           <a:xfrm>
-            <a:off x="1014984" y="2108499"/>
-            <a:ext cx="1920240" cy="261411"/>
+            <a:off x="1014984" y="2086984"/>
+            <a:ext cx="1920240" cy="239896"/>
           </a:xfrm>
           <a:prstGeom prst="rect">
             <a:avLst/>
@@ -8741,8 +8741,8 @@
         </p:nvSpPr>
         <p:spPr>
           <a:xfrm>
-            <a:off x="3008376" y="2173852"/>
-            <a:ext cx="1676174" cy="130705"/>
+            <a:off x="3008376" y="2146957"/>
+            <a:ext cx="1676174" cy="119948"/>
           </a:xfrm>
           <a:prstGeom prst="rect">
             <a:avLst/>
@@ -8761,8 +8761,8 @@
         </p:nvSpPr>
         <p:spPr>
           <a:xfrm>
-            <a:off x="4754880" y="2108499"/>
-            <a:ext cx="1143000" cy="261411"/>
+            <a:off x="4754880" y="2086984"/>
+            <a:ext cx="1143000" cy="239896"/>
           </a:xfrm>
           <a:prstGeom prst="rect">
             <a:avLst/>
@@ -8800,8 +8800,8 @@
         </p:nvSpPr>
         <p:spPr>
           <a:xfrm>
-            <a:off x="658368" y="2369910"/>
-            <a:ext cx="310896" cy="261411"/>
+            <a:off x="658368" y="2326879"/>
+            <a:ext cx="310896" cy="239896"/>
           </a:xfrm>
           <a:prstGeom prst="rect">
             <a:avLst/>
@@ -8839,8 +8839,8 @@
         </p:nvSpPr>
         <p:spPr>
           <a:xfrm>
-            <a:off x="1014984" y="2369910"/>
-            <a:ext cx="1920240" cy="261411"/>
+            <a:off x="1014984" y="2326879"/>
+            <a:ext cx="1920240" cy="239896"/>
           </a:xfrm>
           <a:prstGeom prst="rect">
             <a:avLst/>
@@ -8878,8 +8878,8 @@
         </p:nvSpPr>
         <p:spPr>
           <a:xfrm>
-            <a:off x="3008376" y="2435262"/>
-            <a:ext cx="1535097" cy="130705"/>
+            <a:off x="3008376" y="2386853"/>
+            <a:ext cx="1535097" cy="119948"/>
           </a:xfrm>
           <a:prstGeom prst="rect">
             <a:avLst/>
@@ -8898,8 +8898,8 @@
         </p:nvSpPr>
         <p:spPr>
           <a:xfrm>
-            <a:off x="4754880" y="2369910"/>
-            <a:ext cx="1143000" cy="261411"/>
+            <a:off x="4754880" y="2326879"/>
+            <a:ext cx="1143000" cy="239896"/>
           </a:xfrm>
           <a:prstGeom prst="rect">
             <a:avLst/>
@@ -8937,8 +8937,8 @@
         </p:nvSpPr>
         <p:spPr>
           <a:xfrm>
-            <a:off x="658368" y="2631320"/>
-            <a:ext cx="310896" cy="261411"/>
+            <a:off x="658368" y="2566775"/>
+            <a:ext cx="310896" cy="239896"/>
           </a:xfrm>
           <a:prstGeom prst="rect">
             <a:avLst/>
@@ -8976,8 +8976,8 @@
         </p:nvSpPr>
         <p:spPr>
           <a:xfrm>
-            <a:off x="1014984" y="2631320"/>
-            <a:ext cx="1920240" cy="261411"/>
+            <a:off x="1014984" y="2566775"/>
+            <a:ext cx="1920240" cy="239896"/>
           </a:xfrm>
           <a:prstGeom prst="rect">
             <a:avLst/>
@@ -9015,8 +9015,8 @@
         </p:nvSpPr>
         <p:spPr>
           <a:xfrm>
-            <a:off x="3008376" y="2696673"/>
-            <a:ext cx="1440950" cy="130705"/>
+            <a:off x="3008376" y="2626748"/>
+            <a:ext cx="1440950" cy="119948"/>
           </a:xfrm>
           <a:prstGeom prst="rect">
             <a:avLst/>
@@ -9035,8 +9035,8 @@
         </p:nvSpPr>
         <p:spPr>
           <a:xfrm>
-            <a:off x="4754880" y="2631320"/>
-            <a:ext cx="1143000" cy="261411"/>
+            <a:off x="4754880" y="2566775"/>
+            <a:ext cx="1143000" cy="239896"/>
           </a:xfrm>
           <a:prstGeom prst="rect">
             <a:avLst/>
@@ -9074,8 +9074,8 @@
         </p:nvSpPr>
         <p:spPr>
           <a:xfrm>
-            <a:off x="658368" y="2892731"/>
-            <a:ext cx="310896" cy="261411"/>
+            <a:off x="658368" y="2806670"/>
+            <a:ext cx="310896" cy="239896"/>
           </a:xfrm>
           <a:prstGeom prst="rect">
             <a:avLst/>
@@ -9113,8 +9113,8 @@
         </p:nvSpPr>
         <p:spPr>
           <a:xfrm>
-            <a:off x="1014984" y="2892731"/>
-            <a:ext cx="1920240" cy="261411"/>
+            <a:off x="1014984" y="2806670"/>
+            <a:ext cx="1920240" cy="239896"/>
           </a:xfrm>
           <a:prstGeom prst="rect">
             <a:avLst/>
@@ -9152,8 +9152,8 @@
         </p:nvSpPr>
         <p:spPr>
           <a:xfrm>
-            <a:off x="3008376" y="2958084"/>
-            <a:ext cx="1416843" cy="130705"/>
+            <a:off x="3008376" y="2866644"/>
+            <a:ext cx="1416843" cy="119948"/>
           </a:xfrm>
           <a:prstGeom prst="rect">
             <a:avLst/>
@@ -9172,8 +9172,8 @@
         </p:nvSpPr>
         <p:spPr>
           <a:xfrm>
-            <a:off x="4754880" y="2892731"/>
-            <a:ext cx="1143000" cy="261411"/>
+            <a:off x="4754880" y="2806670"/>
+            <a:ext cx="1143000" cy="239896"/>
           </a:xfrm>
           <a:prstGeom prst="rect">
             <a:avLst/>
@@ -9211,8 +9211,8 @@
         </p:nvSpPr>
         <p:spPr>
           <a:xfrm>
-            <a:off x="658368" y="3154142"/>
-            <a:ext cx="310896" cy="261411"/>
+            <a:off x="658368" y="3046566"/>
+            <a:ext cx="310896" cy="239896"/>
           </a:xfrm>
           <a:prstGeom prst="rect">
             <a:avLst/>
@@ -9250,8 +9250,8 @@
         </p:nvSpPr>
         <p:spPr>
           <a:xfrm>
-            <a:off x="1014984" y="3154142"/>
-            <a:ext cx="1920240" cy="261411"/>
+            <a:off x="1014984" y="3046566"/>
+            <a:ext cx="1920240" cy="239896"/>
           </a:xfrm>
           <a:prstGeom prst="rect">
             <a:avLst/>
@@ -9289,8 +9289,8 @@
         </p:nvSpPr>
         <p:spPr>
           <a:xfrm>
-            <a:off x="3008376" y="3219495"/>
-            <a:ext cx="1364170" cy="130705"/>
+            <a:off x="3008376" y="3106540"/>
+            <a:ext cx="1364170" cy="119948"/>
           </a:xfrm>
           <a:prstGeom prst="rect">
             <a:avLst/>
@@ -9309,8 +9309,8 @@
         </p:nvSpPr>
         <p:spPr>
           <a:xfrm>
-            <a:off x="4754880" y="3154142"/>
-            <a:ext cx="1143000" cy="261411"/>
+            <a:off x="4754880" y="3046566"/>
+            <a:ext cx="1143000" cy="239896"/>
           </a:xfrm>
           <a:prstGeom prst="rect">
             <a:avLst/>
@@ -9348,8 +9348,8 @@
         </p:nvSpPr>
         <p:spPr>
           <a:xfrm>
-            <a:off x="658368" y="3415553"/>
-            <a:ext cx="310896" cy="261411"/>
+            <a:off x="658368" y="3286461"/>
+            <a:ext cx="310896" cy="239896"/>
           </a:xfrm>
           <a:prstGeom prst="rect">
             <a:avLst/>
@@ -9387,8 +9387,8 @@
         </p:nvSpPr>
         <p:spPr>
           <a:xfrm>
-            <a:off x="1014984" y="3415553"/>
-            <a:ext cx="1920240" cy="261411"/>
+            <a:off x="1014984" y="3286461"/>
+            <a:ext cx="1920240" cy="239896"/>
           </a:xfrm>
           <a:prstGeom prst="rect">
             <a:avLst/>
@@ -9426,8 +9426,8 @@
         </p:nvSpPr>
         <p:spPr>
           <a:xfrm>
-            <a:off x="3008376" y="3480906"/>
-            <a:ext cx="1354753" cy="130705"/>
+            <a:off x="3008376" y="3346435"/>
+            <a:ext cx="1354753" cy="119948"/>
           </a:xfrm>
           <a:prstGeom prst="rect">
             <a:avLst/>
@@ -9446,8 +9446,8 @@
         </p:nvSpPr>
         <p:spPr>
           <a:xfrm>
-            <a:off x="4754880" y="3415553"/>
-            <a:ext cx="1143000" cy="261411"/>
+            <a:off x="4754880" y="3286461"/>
+            <a:ext cx="1143000" cy="239896"/>
           </a:xfrm>
           <a:prstGeom prst="rect">
             <a:avLst/>
@@ -9485,8 +9485,8 @@
         </p:nvSpPr>
         <p:spPr>
           <a:xfrm>
-            <a:off x="658368" y="3676964"/>
-            <a:ext cx="310896" cy="261411"/>
+            <a:off x="658368" y="3526357"/>
+            <a:ext cx="310896" cy="239896"/>
           </a:xfrm>
           <a:prstGeom prst="rect">
             <a:avLst/>
@@ -9524,8 +9524,8 @@
         </p:nvSpPr>
         <p:spPr>
           <a:xfrm>
-            <a:off x="1014984" y="3676964"/>
-            <a:ext cx="1920240" cy="261411"/>
+            <a:off x="1014984" y="3526357"/>
+            <a:ext cx="1920240" cy="239896"/>
           </a:xfrm>
           <a:prstGeom prst="rect">
             <a:avLst/>
@@ -9563,8 +9563,8 @@
         </p:nvSpPr>
         <p:spPr>
           <a:xfrm>
-            <a:off x="3008376" y="3742316"/>
-            <a:ext cx="1334617" cy="130705"/>
+            <a:off x="3008376" y="3586331"/>
+            <a:ext cx="1334617" cy="119948"/>
           </a:xfrm>
           <a:prstGeom prst="rect">
             <a:avLst/>
@@ -9583,8 +9583,8 @@
         </p:nvSpPr>
         <p:spPr>
           <a:xfrm>
-            <a:off x="4754880" y="3676964"/>
-            <a:ext cx="1143000" cy="261411"/>
+            <a:off x="4754880" y="3526357"/>
+            <a:ext cx="1143000" cy="239896"/>
           </a:xfrm>
           <a:prstGeom prst="rect">
             <a:avLst/>
@@ -9622,8 +9622,8 @@
         </p:nvSpPr>
         <p:spPr>
           <a:xfrm>
-            <a:off x="658368" y="3938375"/>
-            <a:ext cx="310896" cy="261411"/>
+            <a:off x="658368" y="3766252"/>
+            <a:ext cx="310896" cy="239896"/>
           </a:xfrm>
           <a:prstGeom prst="rect">
             <a:avLst/>
@@ -9661,8 +9661,8 @@
         </p:nvSpPr>
         <p:spPr>
           <a:xfrm>
-            <a:off x="1014984" y="3938375"/>
-            <a:ext cx="1920240" cy="261411"/>
+            <a:off x="1014984" y="3766252"/>
+            <a:ext cx="1920240" cy="239896"/>
           </a:xfrm>
           <a:prstGeom prst="rect">
             <a:avLst/>
@@ -9700,8 +9700,8 @@
         </p:nvSpPr>
         <p:spPr>
           <a:xfrm>
-            <a:off x="3008376" y="4003727"/>
-            <a:ext cx="1326282" cy="130705"/>
+            <a:off x="3008376" y="3826226"/>
+            <a:ext cx="1326282" cy="119948"/>
           </a:xfrm>
           <a:prstGeom prst="rect">
             <a:avLst/>
@@ -9720,8 +9720,8 @@
         </p:nvSpPr>
         <p:spPr>
           <a:xfrm>
-            <a:off x="4754880" y="3938375"/>
-            <a:ext cx="1143000" cy="261411"/>
+            <a:off x="4754880" y="3766252"/>
+            <a:ext cx="1143000" cy="239896"/>
           </a:xfrm>
           <a:prstGeom prst="rect">
             <a:avLst/>
@@ -9759,8 +9759,8 @@
         </p:nvSpPr>
         <p:spPr>
           <a:xfrm>
-            <a:off x="658368" y="4199785"/>
-            <a:ext cx="310896" cy="261411"/>
+            <a:off x="658368" y="4006148"/>
+            <a:ext cx="310896" cy="239896"/>
           </a:xfrm>
           <a:prstGeom prst="rect">
             <a:avLst/>
@@ -9798,8 +9798,8 @@
         </p:nvSpPr>
         <p:spPr>
           <a:xfrm>
-            <a:off x="1014984" y="4199785"/>
-            <a:ext cx="1920240" cy="261411"/>
+            <a:off x="1014984" y="4006148"/>
+            <a:ext cx="1920240" cy="239896"/>
           </a:xfrm>
           <a:prstGeom prst="rect">
             <a:avLst/>
@@ -9837,8 +9837,8 @@
         </p:nvSpPr>
         <p:spPr>
           <a:xfrm>
-            <a:off x="3008376" y="4265138"/>
-            <a:ext cx="1298491" cy="130705"/>
+            <a:off x="3008376" y="4066122"/>
+            <a:ext cx="1298491" cy="119948"/>
           </a:xfrm>
           <a:prstGeom prst="rect">
             <a:avLst/>
@@ -9857,8 +9857,8 @@
         </p:nvSpPr>
         <p:spPr>
           <a:xfrm>
-            <a:off x="4754880" y="4199785"/>
-            <a:ext cx="1143000" cy="261411"/>
+            <a:off x="4754880" y="4006148"/>
+            <a:ext cx="1143000" cy="239896"/>
           </a:xfrm>
           <a:prstGeom prst="rect">
             <a:avLst/>
@@ -9896,8 +9896,8 @@
         </p:nvSpPr>
         <p:spPr>
           <a:xfrm>
-            <a:off x="658368" y="4461196"/>
-            <a:ext cx="310896" cy="261411"/>
+            <a:off x="658368" y="4246043"/>
+            <a:ext cx="310896" cy="239896"/>
           </a:xfrm>
           <a:prstGeom prst="rect">
             <a:avLst/>
@@ -9935,8 +9935,8 @@
         </p:nvSpPr>
         <p:spPr>
           <a:xfrm>
-            <a:off x="1014984" y="4461196"/>
-            <a:ext cx="1920240" cy="261411"/>
+            <a:off x="1014984" y="4246043"/>
+            <a:ext cx="1920240" cy="239896"/>
           </a:xfrm>
           <a:prstGeom prst="rect">
             <a:avLst/>
@@ -9974,8 +9974,8 @@
         </p:nvSpPr>
         <p:spPr>
           <a:xfrm>
-            <a:off x="3008376" y="4526549"/>
-            <a:ext cx="1265243" cy="130705"/>
+            <a:off x="3008376" y="4306017"/>
+            <a:ext cx="1265243" cy="119948"/>
           </a:xfrm>
           <a:prstGeom prst="rect">
             <a:avLst/>
@@ -9994,8 +9994,8 @@
         </p:nvSpPr>
         <p:spPr>
           <a:xfrm>
-            <a:off x="4754880" y="4461196"/>
-            <a:ext cx="1143000" cy="261411"/>
+            <a:off x="4754880" y="4246043"/>
+            <a:ext cx="1143000" cy="239896"/>
           </a:xfrm>
           <a:prstGeom prst="rect">
             <a:avLst/>
@@ -10033,8 +10033,8 @@
         </p:nvSpPr>
         <p:spPr>
           <a:xfrm>
-            <a:off x="658368" y="4722607"/>
-            <a:ext cx="310896" cy="261411"/>
+            <a:off x="658368" y="4485939"/>
+            <a:ext cx="310896" cy="239896"/>
           </a:xfrm>
           <a:prstGeom prst="rect">
             <a:avLst/>
@@ -10072,8 +10072,8 @@
         </p:nvSpPr>
         <p:spPr>
           <a:xfrm>
-            <a:off x="1014984" y="4722607"/>
-            <a:ext cx="1920240" cy="261411"/>
+            <a:off x="1014984" y="4485939"/>
+            <a:ext cx="1920240" cy="239896"/>
           </a:xfrm>
           <a:prstGeom prst="rect">
             <a:avLst/>
@@ -10111,8 +10111,8 @@
         </p:nvSpPr>
         <p:spPr>
           <a:xfrm>
-            <a:off x="3008376" y="4787960"/>
-            <a:ext cx="1238047" cy="130705"/>
+            <a:off x="3008376" y="4545913"/>
+            <a:ext cx="1238047" cy="119948"/>
           </a:xfrm>
           <a:prstGeom prst="rect">
             <a:avLst/>
@@ -10131,8 +10131,8 @@
         </p:nvSpPr>
         <p:spPr>
           <a:xfrm>
-            <a:off x="4754880" y="4722607"/>
-            <a:ext cx="1143000" cy="261411"/>
+            <a:off x="4754880" y="4485939"/>
+            <a:ext cx="1143000" cy="239896"/>
           </a:xfrm>
           <a:prstGeom prst="rect">
             <a:avLst/>
@@ -10170,8 +10170,8 @@
         </p:nvSpPr>
         <p:spPr>
           <a:xfrm>
-            <a:off x="658368" y="4984018"/>
-            <a:ext cx="310896" cy="261411"/>
+            <a:off x="658368" y="4725834"/>
+            <a:ext cx="310896" cy="239896"/>
           </a:xfrm>
           <a:prstGeom prst="rect">
             <a:avLst/>
@@ -10209,8 +10209,8 @@
         </p:nvSpPr>
         <p:spPr>
           <a:xfrm>
-            <a:off x="1014984" y="4984018"/>
-            <a:ext cx="1920240" cy="261411"/>
+            <a:off x="1014984" y="4725834"/>
+            <a:ext cx="1920240" cy="239896"/>
           </a:xfrm>
           <a:prstGeom prst="rect">
             <a:avLst/>
@@ -10248,8 +10248,8 @@
         </p:nvSpPr>
         <p:spPr>
           <a:xfrm>
-            <a:off x="3008376" y="5049371"/>
-            <a:ext cx="1199792" cy="130705"/>
+            <a:off x="3008376" y="4785808"/>
+            <a:ext cx="1199792" cy="119948"/>
           </a:xfrm>
           <a:prstGeom prst="rect">
             <a:avLst/>
@@ -10268,8 +10268,8 @@
         </p:nvSpPr>
         <p:spPr>
           <a:xfrm>
-            <a:off x="4754880" y="4984018"/>
-            <a:ext cx="1143000" cy="261411"/>
+            <a:off x="4754880" y="4725834"/>
+            <a:ext cx="1143000" cy="239896"/>
           </a:xfrm>
           <a:prstGeom prst="rect">
             <a:avLst/>
@@ -10307,8 +10307,8 @@
         </p:nvSpPr>
         <p:spPr>
           <a:xfrm>
-            <a:off x="658368" y="5245429"/>
-            <a:ext cx="310896" cy="261411"/>
+            <a:off x="658368" y="4965730"/>
+            <a:ext cx="310896" cy="239896"/>
           </a:xfrm>
           <a:prstGeom prst="rect">
             <a:avLst/>
@@ -10346,8 +10346,8 @@
         </p:nvSpPr>
         <p:spPr>
           <a:xfrm>
-            <a:off x="1014984" y="5245429"/>
-            <a:ext cx="1920240" cy="261411"/>
+            <a:off x="1014984" y="4965730"/>
+            <a:ext cx="1920240" cy="239896"/>
           </a:xfrm>
           <a:prstGeom prst="rect">
             <a:avLst/>
@@ -10385,8 +10385,8 @@
         </p:nvSpPr>
         <p:spPr>
           <a:xfrm>
-            <a:off x="3008376" y="5310781"/>
-            <a:ext cx="1199589" cy="130705"/>
+            <a:off x="3008376" y="5025704"/>
+            <a:ext cx="1199589" cy="119948"/>
           </a:xfrm>
           <a:prstGeom prst="rect">
             <a:avLst/>
@@ -10405,8 +10405,8 @@
         </p:nvSpPr>
         <p:spPr>
           <a:xfrm>
-            <a:off x="4754880" y="5245429"/>
-            <a:ext cx="1143000" cy="261411"/>
+            <a:off x="4754880" y="4965730"/>
+            <a:ext cx="1143000" cy="239896"/>
           </a:xfrm>
           <a:prstGeom prst="rect">
             <a:avLst/>
@@ -10444,8 +10444,8 @@
         </p:nvSpPr>
         <p:spPr>
           <a:xfrm>
-            <a:off x="658368" y="5506840"/>
-            <a:ext cx="310896" cy="261411"/>
+            <a:off x="658368" y="5205625"/>
+            <a:ext cx="310896" cy="239896"/>
           </a:xfrm>
           <a:prstGeom prst="rect">
             <a:avLst/>
@@ -10483,8 +10483,8 @@
         </p:nvSpPr>
         <p:spPr>
           <a:xfrm>
-            <a:off x="1014984" y="5506840"/>
-            <a:ext cx="1920240" cy="261411"/>
+            <a:off x="1014984" y="5205625"/>
+            <a:ext cx="1920240" cy="239896"/>
           </a:xfrm>
           <a:prstGeom prst="rect">
             <a:avLst/>
@@ -10522,8 +10522,8 @@
         </p:nvSpPr>
         <p:spPr>
           <a:xfrm>
-            <a:off x="3008376" y="5572192"/>
-            <a:ext cx="1158201" cy="130705"/>
+            <a:off x="3008376" y="5265599"/>
+            <a:ext cx="1158201" cy="119948"/>
           </a:xfrm>
           <a:prstGeom prst="rect">
             <a:avLst/>
@@ -10542,8 +10542,8 @@
         </p:nvSpPr>
         <p:spPr>
           <a:xfrm>
-            <a:off x="4754880" y="5506840"/>
-            <a:ext cx="1143000" cy="261411"/>
+            <a:off x="4754880" y="5205625"/>
+            <a:ext cx="1143000" cy="239896"/>
           </a:xfrm>
           <a:prstGeom prst="rect">
             <a:avLst/>
@@ -10581,8 +10581,8 @@
         </p:nvSpPr>
         <p:spPr>
           <a:xfrm>
-            <a:off x="658368" y="5768250"/>
-            <a:ext cx="310896" cy="261411"/>
+            <a:off x="658368" y="5445521"/>
+            <a:ext cx="310896" cy="239896"/>
           </a:xfrm>
           <a:prstGeom prst="rect">
             <a:avLst/>
@@ -10620,8 +10620,8 @@
         </p:nvSpPr>
         <p:spPr>
           <a:xfrm>
-            <a:off x="1014984" y="5768250"/>
-            <a:ext cx="1920240" cy="261411"/>
+            <a:off x="1014984" y="5445521"/>
+            <a:ext cx="1920240" cy="239896"/>
           </a:xfrm>
           <a:prstGeom prst="rect">
             <a:avLst/>
@@ -10659,8 +10659,8 @@
         </p:nvSpPr>
         <p:spPr>
           <a:xfrm>
-            <a:off x="3008376" y="5833603"/>
-            <a:ext cx="1138632" cy="130705"/>
+            <a:off x="3008376" y="5505495"/>
+            <a:ext cx="1138632" cy="119948"/>
           </a:xfrm>
           <a:prstGeom prst="rect">
             <a:avLst/>
@@ -10679,8 +10679,8 @@
         </p:nvSpPr>
         <p:spPr>
           <a:xfrm>
-            <a:off x="4754880" y="5768250"/>
-            <a:ext cx="1143000" cy="261411"/>
+            <a:off x="4754880" y="5445521"/>
+            <a:ext cx="1143000" cy="239896"/>
           </a:xfrm>
           <a:prstGeom prst="rect">
             <a:avLst/>
@@ -10718,8 +10718,8 @@
         </p:nvSpPr>
         <p:spPr>
           <a:xfrm>
-            <a:off x="658368" y="6029661"/>
-            <a:ext cx="310896" cy="261411"/>
+            <a:off x="658368" y="5685416"/>
+            <a:ext cx="310896" cy="239896"/>
           </a:xfrm>
           <a:prstGeom prst="rect">
             <a:avLst/>
@@ -10757,8 +10757,8 @@
         </p:nvSpPr>
         <p:spPr>
           <a:xfrm>
-            <a:off x="1014984" y="6029661"/>
-            <a:ext cx="1920240" cy="261411"/>
+            <a:off x="1014984" y="5685416"/>
+            <a:ext cx="1920240" cy="239896"/>
           </a:xfrm>
           <a:prstGeom prst="rect">
             <a:avLst/>
@@ -10796,8 +10796,8 @@
         </p:nvSpPr>
         <p:spPr>
           <a:xfrm>
-            <a:off x="3008376" y="6095014"/>
-            <a:ext cx="1122612" cy="130705"/>
+            <a:off x="3008376" y="5745390"/>
+            <a:ext cx="1122612" cy="119948"/>
           </a:xfrm>
           <a:prstGeom prst="rect">
             <a:avLst/>
@@ -10816,8 +10816,8 @@
         </p:nvSpPr>
         <p:spPr>
           <a:xfrm>
-            <a:off x="4754880" y="6029661"/>
-            <a:ext cx="1143000" cy="261411"/>
+            <a:off x="4754880" y="5685416"/>
+            <a:ext cx="1143000" cy="239896"/>
           </a:xfrm>
           <a:prstGeom prst="rect">
             <a:avLst/>
@@ -10856,7 +10856,7 @@
         <p:spPr>
           <a:xfrm>
             <a:off x="6208776" y="1847088"/>
-            <a:ext cx="310896" cy="261411"/>
+            <a:ext cx="310896" cy="239896"/>
           </a:xfrm>
           <a:prstGeom prst="rect">
             <a:avLst/>
@@ -10895,7 +10895,7 @@
         <p:spPr>
           <a:xfrm>
             <a:off x="6565392" y="1847088"/>
-            <a:ext cx="1920240" cy="261411"/>
+            <a:ext cx="1920240" cy="239896"/>
           </a:xfrm>
           <a:prstGeom prst="rect">
             <a:avLst/>
@@ -10933,8 +10933,8 @@
         </p:nvSpPr>
         <p:spPr>
           <a:xfrm>
-            <a:off x="8558784" y="1912441"/>
-            <a:ext cx="1121023" cy="130705"/>
+            <a:off x="8558784" y="1907062"/>
+            <a:ext cx="1121023" cy="119948"/>
           </a:xfrm>
           <a:prstGeom prst="rect">
             <a:avLst/>
@@ -10954,7 +10954,7 @@
         <p:spPr>
           <a:xfrm>
             <a:off x="10305288" y="1847088"/>
-            <a:ext cx="1143000" cy="261411"/>
+            <a:ext cx="1143000" cy="239896"/>
           </a:xfrm>
           <a:prstGeom prst="rect">
             <a:avLst/>
@@ -10992,8 +10992,8 @@
         </p:nvSpPr>
         <p:spPr>
           <a:xfrm>
-            <a:off x="6208776" y="2108499"/>
-            <a:ext cx="310896" cy="261411"/>
+            <a:off x="6208776" y="2086984"/>
+            <a:ext cx="310896" cy="239896"/>
           </a:xfrm>
           <a:prstGeom prst="rect">
             <a:avLst/>
@@ -11031,8 +11031,8 @@
         </p:nvSpPr>
         <p:spPr>
           <a:xfrm>
-            <a:off x="6565392" y="2108499"/>
-            <a:ext cx="1920240" cy="261411"/>
+            <a:off x="6565392" y="2086984"/>
+            <a:ext cx="1920240" cy="239896"/>
           </a:xfrm>
           <a:prstGeom prst="rect">
             <a:avLst/>
@@ -11070,8 +11070,8 @@
         </p:nvSpPr>
         <p:spPr>
           <a:xfrm>
-            <a:off x="8558784" y="2173852"/>
-            <a:ext cx="1118529" cy="130705"/>
+            <a:off x="8558784" y="2146957"/>
+            <a:ext cx="1118529" cy="119948"/>
           </a:xfrm>
           <a:prstGeom prst="rect">
             <a:avLst/>
@@ -11090,8 +11090,8 @@
         </p:nvSpPr>
         <p:spPr>
           <a:xfrm>
-            <a:off x="10305288" y="2108499"/>
-            <a:ext cx="1143000" cy="261411"/>
+            <a:off x="10305288" y="2086984"/>
+            <a:ext cx="1143000" cy="239896"/>
           </a:xfrm>
           <a:prstGeom prst="rect">
             <a:avLst/>
@@ -11129,8 +11129,8 @@
         </p:nvSpPr>
         <p:spPr>
           <a:xfrm>
-            <a:off x="6208776" y="2369910"/>
-            <a:ext cx="310896" cy="261411"/>
+            <a:off x="6208776" y="2326879"/>
+            <a:ext cx="310896" cy="239896"/>
           </a:xfrm>
           <a:prstGeom prst="rect">
             <a:avLst/>
@@ -11168,8 +11168,8 @@
         </p:nvSpPr>
         <p:spPr>
           <a:xfrm>
-            <a:off x="6565392" y="2369910"/>
-            <a:ext cx="1920240" cy="261411"/>
+            <a:off x="6565392" y="2326879"/>
+            <a:ext cx="1920240" cy="239896"/>
           </a:xfrm>
           <a:prstGeom prst="rect">
             <a:avLst/>
@@ -11207,8 +11207,8 @@
         </p:nvSpPr>
         <p:spPr>
           <a:xfrm>
-            <a:off x="8558784" y="2435262"/>
-            <a:ext cx="1098819" cy="130705"/>
+            <a:off x="8558784" y="2386853"/>
+            <a:ext cx="1098819" cy="119948"/>
           </a:xfrm>
           <a:prstGeom prst="rect">
             <a:avLst/>
@@ -11227,8 +11227,8 @@
         </p:nvSpPr>
         <p:spPr>
           <a:xfrm>
-            <a:off x="10305288" y="2369910"/>
-            <a:ext cx="1143000" cy="261411"/>
+            <a:off x="10305288" y="2326879"/>
+            <a:ext cx="1143000" cy="239896"/>
           </a:xfrm>
           <a:prstGeom prst="rect">
             <a:avLst/>
@@ -11266,8 +11266,8 @@
         </p:nvSpPr>
         <p:spPr>
           <a:xfrm>
-            <a:off x="6208776" y="2631320"/>
-            <a:ext cx="310896" cy="261411"/>
+            <a:off x="6208776" y="2566775"/>
+            <a:ext cx="310896" cy="239896"/>
           </a:xfrm>
           <a:prstGeom prst="rect">
             <a:avLst/>
@@ -11305,8 +11305,8 @@
         </p:nvSpPr>
         <p:spPr>
           <a:xfrm>
-            <a:off x="6565392" y="2631320"/>
-            <a:ext cx="1920240" cy="261411"/>
+            <a:off x="6565392" y="2566775"/>
+            <a:ext cx="1920240" cy="239896"/>
           </a:xfrm>
           <a:prstGeom prst="rect">
             <a:avLst/>
@@ -11344,8 +11344,8 @@
         </p:nvSpPr>
         <p:spPr>
           <a:xfrm>
-            <a:off x="8558784" y="2696673"/>
-            <a:ext cx="1098580" cy="130705"/>
+            <a:off x="8558784" y="2626748"/>
+            <a:ext cx="1098580" cy="119948"/>
           </a:xfrm>
           <a:prstGeom prst="rect">
             <a:avLst/>
@@ -11364,8 +11364,8 @@
         </p:nvSpPr>
         <p:spPr>
           <a:xfrm>
-            <a:off x="10305288" y="2631320"/>
-            <a:ext cx="1143000" cy="261411"/>
+            <a:off x="10305288" y="2566775"/>
+            <a:ext cx="1143000" cy="239896"/>
           </a:xfrm>
           <a:prstGeom prst="rect">
             <a:avLst/>
@@ -11403,8 +11403,8 @@
         </p:nvSpPr>
         <p:spPr>
           <a:xfrm>
-            <a:off x="6208776" y="2892731"/>
-            <a:ext cx="310896" cy="261411"/>
+            <a:off x="6208776" y="2806670"/>
+            <a:ext cx="310896" cy="239896"/>
           </a:xfrm>
           <a:prstGeom prst="rect">
             <a:avLst/>
@@ -11442,8 +11442,8 @@
         </p:nvSpPr>
         <p:spPr>
           <a:xfrm>
-            <a:off x="6565392" y="2892731"/>
-            <a:ext cx="1920240" cy="261411"/>
+            <a:off x="6565392" y="2806670"/>
+            <a:ext cx="1920240" cy="239896"/>
           </a:xfrm>
           <a:prstGeom prst="rect">
             <a:avLst/>
@@ -11481,8 +11481,8 @@
         </p:nvSpPr>
         <p:spPr>
           <a:xfrm>
-            <a:off x="8558784" y="2958084"/>
-            <a:ext cx="1047559" cy="130705"/>
+            <a:off x="8558784" y="2866644"/>
+            <a:ext cx="1047559" cy="119948"/>
           </a:xfrm>
           <a:prstGeom prst="rect">
             <a:avLst/>
@@ -11501,8 +11501,8 @@
         </p:nvSpPr>
         <p:spPr>
           <a:xfrm>
-            <a:off x="10305288" y="2892731"/>
-            <a:ext cx="1143000" cy="261411"/>
+            <a:off x="10305288" y="2806670"/>
+            <a:ext cx="1143000" cy="239896"/>
           </a:xfrm>
           <a:prstGeom prst="rect">
             <a:avLst/>
@@ -11540,8 +11540,8 @@
         </p:nvSpPr>
         <p:spPr>
           <a:xfrm>
-            <a:off x="6208776" y="3154142"/>
-            <a:ext cx="310896" cy="261411"/>
+            <a:off x="6208776" y="3046566"/>
+            <a:ext cx="310896" cy="239896"/>
           </a:xfrm>
           <a:prstGeom prst="rect">
             <a:avLst/>
@@ -11579,8 +11579,8 @@
         </p:nvSpPr>
         <p:spPr>
           <a:xfrm>
-            <a:off x="6565392" y="3154142"/>
-            <a:ext cx="1920240" cy="261411"/>
+            <a:off x="6565392" y="3046566"/>
+            <a:ext cx="1920240" cy="239896"/>
           </a:xfrm>
           <a:prstGeom prst="rect">
             <a:avLst/>
@@ -11618,8 +11618,8 @@
         </p:nvSpPr>
         <p:spPr>
           <a:xfrm>
-            <a:off x="8558784" y="3219495"/>
-            <a:ext cx="1040989" cy="130705"/>
+            <a:off x="8558784" y="3106540"/>
+            <a:ext cx="1040989" cy="119948"/>
           </a:xfrm>
           <a:prstGeom prst="rect">
             <a:avLst/>
@@ -11638,8 +11638,8 @@
         </p:nvSpPr>
         <p:spPr>
           <a:xfrm>
-            <a:off x="10305288" y="3154142"/>
-            <a:ext cx="1143000" cy="261411"/>
+            <a:off x="10305288" y="3046566"/>
+            <a:ext cx="1143000" cy="239896"/>
           </a:xfrm>
           <a:prstGeom prst="rect">
             <a:avLst/>
@@ -11677,8 +11677,8 @@
         </p:nvSpPr>
         <p:spPr>
           <a:xfrm>
-            <a:off x="6208776" y="3415553"/>
-            <a:ext cx="310896" cy="261411"/>
+            <a:off x="6208776" y="3286461"/>
+            <a:ext cx="310896" cy="239896"/>
           </a:xfrm>
           <a:prstGeom prst="rect">
             <a:avLst/>
@@ -11716,8 +11716,8 @@
         </p:nvSpPr>
         <p:spPr>
           <a:xfrm>
-            <a:off x="6565392" y="3415553"/>
-            <a:ext cx="1920240" cy="261411"/>
+            <a:off x="6565392" y="3286461"/>
+            <a:ext cx="1920240" cy="239896"/>
           </a:xfrm>
           <a:prstGeom prst="rect">
             <a:avLst/>
@@ -11755,8 +11755,8 @@
         </p:nvSpPr>
         <p:spPr>
           <a:xfrm>
-            <a:off x="8558784" y="3480906"/>
-            <a:ext cx="1016832" cy="130705"/>
+            <a:off x="8558784" y="3346435"/>
+            <a:ext cx="1016832" cy="119948"/>
           </a:xfrm>
           <a:prstGeom prst="rect">
             <a:avLst/>
@@ -11775,8 +11775,8 @@
         </p:nvSpPr>
         <p:spPr>
           <a:xfrm>
-            <a:off x="10305288" y="3415553"/>
-            <a:ext cx="1143000" cy="261411"/>
+            <a:off x="10305288" y="3286461"/>
+            <a:ext cx="1143000" cy="239896"/>
           </a:xfrm>
           <a:prstGeom prst="rect">
             <a:avLst/>
@@ -11814,8 +11814,8 @@
         </p:nvSpPr>
         <p:spPr>
           <a:xfrm>
-            <a:off x="6208776" y="3676964"/>
-            <a:ext cx="310896" cy="261411"/>
+            <a:off x="6208776" y="3526357"/>
+            <a:ext cx="310896" cy="239896"/>
           </a:xfrm>
           <a:prstGeom prst="rect">
             <a:avLst/>
@@ -11853,8 +11853,8 @@
         </p:nvSpPr>
         <p:spPr>
           <a:xfrm>
-            <a:off x="6565392" y="3676964"/>
-            <a:ext cx="1920240" cy="261411"/>
+            <a:off x="6565392" y="3526357"/>
+            <a:ext cx="1920240" cy="239896"/>
           </a:xfrm>
           <a:prstGeom prst="rect">
             <a:avLst/>
@@ -11892,8 +11892,8 @@
         </p:nvSpPr>
         <p:spPr>
           <a:xfrm>
-            <a:off x="8558784" y="3742316"/>
-            <a:ext cx="1002319" cy="130705"/>
+            <a:off x="8558784" y="3586331"/>
+            <a:ext cx="1002319" cy="119948"/>
           </a:xfrm>
           <a:prstGeom prst="rect">
             <a:avLst/>
@@ -11912,8 +11912,8 @@
         </p:nvSpPr>
         <p:spPr>
           <a:xfrm>
-            <a:off x="10305288" y="3676964"/>
-            <a:ext cx="1143000" cy="261411"/>
+            <a:off x="10305288" y="3526357"/>
+            <a:ext cx="1143000" cy="239896"/>
           </a:xfrm>
           <a:prstGeom prst="rect">
             <a:avLst/>
@@ -11951,8 +11951,8 @@
         </p:nvSpPr>
         <p:spPr>
           <a:xfrm>
-            <a:off x="6208776" y="3938375"/>
-            <a:ext cx="310896" cy="261411"/>
+            <a:off x="6208776" y="3766252"/>
+            <a:ext cx="310896" cy="239896"/>
           </a:xfrm>
           <a:prstGeom prst="rect">
             <a:avLst/>
@@ -11990,8 +11990,8 @@
         </p:nvSpPr>
         <p:spPr>
           <a:xfrm>
-            <a:off x="6565392" y="3938375"/>
-            <a:ext cx="1920240" cy="261411"/>
+            <a:off x="6565392" y="3766252"/>
+            <a:ext cx="1920240" cy="239896"/>
           </a:xfrm>
           <a:prstGeom prst="rect">
             <a:avLst/>
@@ -12029,8 +12029,8 @@
         </p:nvSpPr>
         <p:spPr>
           <a:xfrm>
-            <a:off x="8558784" y="4003727"/>
-            <a:ext cx="975333" cy="130705"/>
+            <a:off x="8558784" y="3826226"/>
+            <a:ext cx="975333" cy="119948"/>
           </a:xfrm>
           <a:prstGeom prst="rect">
             <a:avLst/>
@@ -12049,8 +12049,8 @@
         </p:nvSpPr>
         <p:spPr>
           <a:xfrm>
-            <a:off x="10305288" y="3938375"/>
-            <a:ext cx="1143000" cy="261411"/>
+            <a:off x="10305288" y="3766252"/>
+            <a:ext cx="1143000" cy="239896"/>
           </a:xfrm>
           <a:prstGeom prst="rect">
             <a:avLst/>
@@ -12088,8 +12088,8 @@
         </p:nvSpPr>
         <p:spPr>
           <a:xfrm>
-            <a:off x="6208776" y="4199785"/>
-            <a:ext cx="310896" cy="261411"/>
+            <a:off x="6208776" y="4006148"/>
+            <a:ext cx="310896" cy="239896"/>
           </a:xfrm>
           <a:prstGeom prst="rect">
             <a:avLst/>
@@ -12127,8 +12127,8 @@
         </p:nvSpPr>
         <p:spPr>
           <a:xfrm>
-            <a:off x="6565392" y="4199785"/>
-            <a:ext cx="1920240" cy="261411"/>
+            <a:off x="6565392" y="4006148"/>
+            <a:ext cx="1920240" cy="239896"/>
           </a:xfrm>
           <a:prstGeom prst="rect">
             <a:avLst/>
@@ -12166,8 +12166,8 @@
         </p:nvSpPr>
         <p:spPr>
           <a:xfrm>
-            <a:off x="8558784" y="4265138"/>
-            <a:ext cx="957418" cy="130705"/>
+            <a:off x="8558784" y="4066122"/>
+            <a:ext cx="957418" cy="119948"/>
           </a:xfrm>
           <a:prstGeom prst="rect">
             <a:avLst/>
@@ -12186,8 +12186,8 @@
         </p:nvSpPr>
         <p:spPr>
           <a:xfrm>
-            <a:off x="10305288" y="4199785"/>
-            <a:ext cx="1143000" cy="261411"/>
+            <a:off x="10305288" y="4006148"/>
+            <a:ext cx="1143000" cy="239896"/>
           </a:xfrm>
           <a:prstGeom prst="rect">
             <a:avLst/>
@@ -12225,8 +12225,8 @@
         </p:nvSpPr>
         <p:spPr>
           <a:xfrm>
-            <a:off x="6208776" y="4461196"/>
-            <a:ext cx="310896" cy="261411"/>
+            <a:off x="6208776" y="4246043"/>
+            <a:ext cx="310896" cy="239896"/>
           </a:xfrm>
           <a:prstGeom prst="rect">
             <a:avLst/>
@@ -12264,8 +12264,8 @@
         </p:nvSpPr>
         <p:spPr>
           <a:xfrm>
-            <a:off x="6565392" y="4461196"/>
-            <a:ext cx="1920240" cy="261411"/>
+            <a:off x="6565392" y="4246043"/>
+            <a:ext cx="1920240" cy="239896"/>
           </a:xfrm>
           <a:prstGeom prst="rect">
             <a:avLst/>
@@ -12303,8 +12303,8 @@
         </p:nvSpPr>
         <p:spPr>
           <a:xfrm>
-            <a:off x="8558784" y="4526549"/>
-            <a:ext cx="939310" cy="130705"/>
+            <a:off x="8558784" y="4306017"/>
+            <a:ext cx="939310" cy="119948"/>
           </a:xfrm>
           <a:prstGeom prst="rect">
             <a:avLst/>
@@ -12323,8 +12323,8 @@
         </p:nvSpPr>
         <p:spPr>
           <a:xfrm>
-            <a:off x="10305288" y="4461196"/>
-            <a:ext cx="1143000" cy="261411"/>
+            <a:off x="10305288" y="4246043"/>
+            <a:ext cx="1143000" cy="239896"/>
           </a:xfrm>
           <a:prstGeom prst="rect">
             <a:avLst/>
@@ -12362,8 +12362,8 @@
         </p:nvSpPr>
         <p:spPr>
           <a:xfrm>
-            <a:off x="6208776" y="4722607"/>
-            <a:ext cx="310896" cy="261411"/>
+            <a:off x="6208776" y="4485939"/>
+            <a:ext cx="310896" cy="239896"/>
           </a:xfrm>
           <a:prstGeom prst="rect">
             <a:avLst/>
@@ -12401,8 +12401,8 @@
         </p:nvSpPr>
         <p:spPr>
           <a:xfrm>
-            <a:off x="6565392" y="4722607"/>
-            <a:ext cx="1920240" cy="261411"/>
+            <a:off x="6565392" y="4485939"/>
+            <a:ext cx="1920240" cy="239896"/>
           </a:xfrm>
           <a:prstGeom prst="rect">
             <a:avLst/>
@@ -12440,8 +12440,8 @@
         </p:nvSpPr>
         <p:spPr>
           <a:xfrm>
-            <a:off x="8558784" y="4787960"/>
-            <a:ext cx="892374" cy="130705"/>
+            <a:off x="8558784" y="4545913"/>
+            <a:ext cx="892374" cy="119948"/>
           </a:xfrm>
           <a:prstGeom prst="rect">
             <a:avLst/>
@@ -12460,8 +12460,8 @@
         </p:nvSpPr>
         <p:spPr>
           <a:xfrm>
-            <a:off x="10305288" y="4722607"/>
-            <a:ext cx="1143000" cy="261411"/>
+            <a:off x="10305288" y="4485939"/>
+            <a:ext cx="1143000" cy="239896"/>
           </a:xfrm>
           <a:prstGeom prst="rect">
             <a:avLst/>
@@ -12499,8 +12499,8 @@
         </p:nvSpPr>
         <p:spPr>
           <a:xfrm>
-            <a:off x="6208776" y="4984018"/>
-            <a:ext cx="310896" cy="261411"/>
+            <a:off x="6208776" y="4725834"/>
+            <a:ext cx="310896" cy="239896"/>
           </a:xfrm>
           <a:prstGeom prst="rect">
             <a:avLst/>
@@ -12538,8 +12538,8 @@
         </p:nvSpPr>
         <p:spPr>
           <a:xfrm>
-            <a:off x="6565392" y="4984018"/>
-            <a:ext cx="1920240" cy="261411"/>
+            <a:off x="6565392" y="4725834"/>
+            <a:ext cx="1920240" cy="239896"/>
           </a:xfrm>
           <a:prstGeom prst="rect">
             <a:avLst/>
@@ -12577,8 +12577,8 @@
         </p:nvSpPr>
         <p:spPr>
           <a:xfrm>
-            <a:off x="8558784" y="5049371"/>
-            <a:ext cx="857012" cy="130705"/>
+            <a:off x="8558784" y="4785808"/>
+            <a:ext cx="857012" cy="119948"/>
           </a:xfrm>
           <a:prstGeom prst="rect">
             <a:avLst/>
@@ -12597,8 +12597,8 @@
         </p:nvSpPr>
         <p:spPr>
           <a:xfrm>
-            <a:off x="10305288" y="4984018"/>
-            <a:ext cx="1143000" cy="261411"/>
+            <a:off x="10305288" y="4725834"/>
+            <a:ext cx="1143000" cy="239896"/>
           </a:xfrm>
           <a:prstGeom prst="rect">
             <a:avLst/>
@@ -12636,8 +12636,8 @@
         </p:nvSpPr>
         <p:spPr>
           <a:xfrm>
-            <a:off x="6208776" y="5245429"/>
-            <a:ext cx="310896" cy="261411"/>
+            <a:off x="6208776" y="4965730"/>
+            <a:ext cx="310896" cy="239896"/>
           </a:xfrm>
           <a:prstGeom prst="rect">
             <a:avLst/>
@@ -12675,8 +12675,8 @@
         </p:nvSpPr>
         <p:spPr>
           <a:xfrm>
-            <a:off x="6565392" y="5245429"/>
-            <a:ext cx="1920240" cy="261411"/>
+            <a:off x="6565392" y="4965730"/>
+            <a:ext cx="1920240" cy="239896"/>
           </a:xfrm>
           <a:prstGeom prst="rect">
             <a:avLst/>
@@ -12714,8 +12714,8 @@
         </p:nvSpPr>
         <p:spPr>
           <a:xfrm>
-            <a:off x="8558784" y="5310781"/>
-            <a:ext cx="838677" cy="130705"/>
+            <a:off x="8558784" y="5025704"/>
+            <a:ext cx="838677" cy="119948"/>
           </a:xfrm>
           <a:prstGeom prst="rect">
             <a:avLst/>
@@ -12734,8 +12734,8 @@
         </p:nvSpPr>
         <p:spPr>
           <a:xfrm>
-            <a:off x="10305288" y="5245429"/>
-            <a:ext cx="1143000" cy="261411"/>
+            <a:off x="10305288" y="4965730"/>
+            <a:ext cx="1143000" cy="239896"/>
           </a:xfrm>
           <a:prstGeom prst="rect">
             <a:avLst/>
@@ -12773,8 +12773,8 @@
         </p:nvSpPr>
         <p:spPr>
           <a:xfrm>
-            <a:off x="6208776" y="5506840"/>
-            <a:ext cx="310896" cy="261411"/>
+            <a:off x="6208776" y="5205625"/>
+            <a:ext cx="310896" cy="239896"/>
           </a:xfrm>
           <a:prstGeom prst="rect">
             <a:avLst/>
@@ -12812,8 +12812,8 @@
         </p:nvSpPr>
         <p:spPr>
           <a:xfrm>
-            <a:off x="6565392" y="5506840"/>
-            <a:ext cx="1920240" cy="261411"/>
+            <a:off x="6565392" y="5205625"/>
+            <a:ext cx="1920240" cy="239896"/>
           </a:xfrm>
           <a:prstGeom prst="rect">
             <a:avLst/>
@@ -12851,8 +12851,8 @@
         </p:nvSpPr>
         <p:spPr>
           <a:xfrm>
-            <a:off x="8558784" y="5572192"/>
-            <a:ext cx="815241" cy="130705"/>
+            <a:off x="8558784" y="5265599"/>
+            <a:ext cx="815241" cy="119948"/>
           </a:xfrm>
           <a:prstGeom prst="rect">
             <a:avLst/>
@@ -12871,8 +12871,8 @@
         </p:nvSpPr>
         <p:spPr>
           <a:xfrm>
-            <a:off x="10305288" y="5506840"/>
-            <a:ext cx="1143000" cy="261411"/>
+            <a:off x="10305288" y="5205625"/>
+            <a:ext cx="1143000" cy="239896"/>
           </a:xfrm>
           <a:prstGeom prst="rect">
             <a:avLst/>
@@ -12910,8 +12910,8 @@
         </p:nvSpPr>
         <p:spPr>
           <a:xfrm>
-            <a:off x="6208776" y="5768250"/>
-            <a:ext cx="310896" cy="261411"/>
+            <a:off x="6208776" y="5445521"/>
+            <a:ext cx="310896" cy="239896"/>
           </a:xfrm>
           <a:prstGeom prst="rect">
             <a:avLst/>
@@ -12949,8 +12949,8 @@
         </p:nvSpPr>
         <p:spPr>
           <a:xfrm>
-            <a:off x="6565392" y="5768250"/>
-            <a:ext cx="1920240" cy="261411"/>
+            <a:off x="6565392" y="5445521"/>
+            <a:ext cx="1920240" cy="239896"/>
           </a:xfrm>
           <a:prstGeom prst="rect">
             <a:avLst/>
@@ -12988,8 +12988,8 @@
         </p:nvSpPr>
         <p:spPr>
           <a:xfrm>
-            <a:off x="8558784" y="5833603"/>
-            <a:ext cx="712528" cy="130705"/>
+            <a:off x="8558784" y="5505495"/>
+            <a:ext cx="712528" cy="119948"/>
           </a:xfrm>
           <a:prstGeom prst="rect">
             <a:avLst/>
@@ -13008,8 +13008,8 @@
         </p:nvSpPr>
         <p:spPr>
           <a:xfrm>
-            <a:off x="10305288" y="5768250"/>
-            <a:ext cx="1143000" cy="261411"/>
+            <a:off x="10305288" y="5445521"/>
+            <a:ext cx="1143000" cy="239896"/>
           </a:xfrm>
           <a:prstGeom prst="rect">
             <a:avLst/>
@@ -13048,7 +13048,7 @@
         <p:spPr>
           <a:xfrm>
             <a:off x="4061880" y="1847088"/>
-            <a:ext cx="14630" cy="4443984"/>
+            <a:ext cx="14630" cy="4078224"/>
           </a:xfrm>
           <a:prstGeom prst="rect">
             <a:avLst/>
@@ -13068,7 +13068,7 @@
         <p:spPr>
           <a:xfrm>
             <a:off x="9612288" y="1847088"/>
-            <a:ext cx="14630" cy="4443984"/>
+            <a:ext cx="14630" cy="4078224"/>
           </a:xfrm>
           <a:prstGeom prst="rect">
             <a:avLst/>
@@ -13088,7 +13088,7 @@
         <p:spPr>
           <a:xfrm>
             <a:off x="6085332" y="1847088"/>
-            <a:ext cx="10973" cy="4443984"/>
+            <a:ext cx="10973" cy="4078224"/>
           </a:xfrm>
           <a:prstGeom prst="rect">
             <a:avLst/>
@@ -13098,6 +13098,65 @@
           </a:solidFill>
           <a:ln/>
         </p:spPr>
+      </p:sp>
+      <p:sp>
+        <p:nvSpPr>
+          <p:cNvPr id="147" name="Shape 144"/>
+          <p:cNvSpPr/>
+          <p:nvPr/>
+        </p:nvSpPr>
+        <p:spPr>
+          <a:xfrm>
+            <a:off x="457200" y="6126480"/>
+            <a:ext cx="11274552" cy="371856"/>
+          </a:xfrm>
+          <a:prstGeom prst="rect">
+            <a:avLst/>
+          </a:prstGeom>
+          <a:solidFill>
+            <a:srgbClr val="EDF4FA"/>
+          </a:solidFill>
+          <a:ln/>
+        </p:spPr>
+      </p:sp>
+      <p:sp>
+        <p:nvSpPr>
+          <p:cNvPr id="148" name="Text 145"/>
+          <p:cNvSpPr txBox="1"/>
+          <p:nvPr/>
+        </p:nvSpPr>
+        <p:spPr>
+          <a:xfrm>
+            <a:off x="658368" y="6144768"/>
+            <a:ext cx="10927080" cy="335280"/>
+          </a:xfrm>
+          <a:prstGeom prst="rect">
+            <a:avLst/>
+          </a:prstGeom>
+          <a:noFill/>
+          <a:ln/>
+        </p:spPr>
+        <p:txBody>
+          <a:bodyPr wrap="square" lIns="0" tIns="0" rIns="0" bIns="0" rtlCol="0" anchor="ctr"/>
+          <a:lstStyle/>
+          <a:p>
+            <a:pPr indent="0" marL="0">
+              <a:buNone/>
+            </a:pPr>
+            <a:r>
+              <a:rPr lang="en-US" sz="1600" b="1" dirty="0">
+                <a:solidFill>
+                  <a:srgbClr val="0B2C4A"/>
+                </a:solidFill>
+                <a:latin typeface="Inter" pitchFamily="34" charset="0"/>
+                <a:ea typeface="Inter" pitchFamily="34" charset="-122"/>
+                <a:cs typeface="Inter" pitchFamily="34" charset="-120"/>
+              </a:rPr>
+              <a:t>21 of 33 stores at or above the $130 group.</a:t>
+            </a:r>
+            <a:endParaRPr lang="en-US" sz="1600" dirty="0"/>
+          </a:p>
+        </p:txBody>
       </p:sp>
     </p:spTree>
   </p:cSld>
@@ -13238,7 +13297,7 @@
         <p:spPr>
           <a:xfrm>
             <a:off x="457200" y="1207008"/>
-            <a:ext cx="11274552" cy="5148072"/>
+            <a:ext cx="11274552" cy="4782312"/>
           </a:xfrm>
           <a:prstGeom prst="rect">
             <a:avLst/>
@@ -13571,7 +13630,7 @@
         <p:spPr>
           <a:xfrm>
             <a:off x="658368" y="2121408"/>
-            <a:ext cx="310896" cy="245274"/>
+            <a:ext cx="310896" cy="223759"/>
           </a:xfrm>
           <a:prstGeom prst="rect">
             <a:avLst/>
@@ -13610,7 +13669,7 @@
         <p:spPr>
           <a:xfrm>
             <a:off x="1014984" y="2121408"/>
-            <a:ext cx="1920240" cy="245274"/>
+            <a:ext cx="1920240" cy="223759"/>
           </a:xfrm>
           <a:prstGeom prst="rect">
             <a:avLst/>
@@ -13648,8 +13707,8 @@
         </p:nvSpPr>
         <p:spPr>
           <a:xfrm>
-            <a:off x="3579876" y="2187632"/>
-            <a:ext cx="571500" cy="112826"/>
+            <a:off x="3579876" y="2181823"/>
+            <a:ext cx="571500" cy="102929"/>
           </a:xfrm>
           <a:prstGeom prst="rect">
             <a:avLst/>
@@ -13669,7 +13728,7 @@
         <p:spPr>
           <a:xfrm>
             <a:off x="4206240" y="2121408"/>
-            <a:ext cx="777240" cy="245274"/>
+            <a:ext cx="777240" cy="223759"/>
           </a:xfrm>
           <a:prstGeom prst="rect">
             <a:avLst/>
@@ -13708,7 +13767,7 @@
         <p:spPr>
           <a:xfrm>
             <a:off x="4983480" y="2121408"/>
-            <a:ext cx="868680" cy="245274"/>
+            <a:ext cx="868680" cy="223759"/>
           </a:xfrm>
           <a:prstGeom prst="rect">
             <a:avLst/>
@@ -13746,8 +13805,8 @@
         </p:nvSpPr>
         <p:spPr>
           <a:xfrm>
-            <a:off x="658368" y="2366682"/>
-            <a:ext cx="310896" cy="245274"/>
+            <a:off x="658368" y="2345167"/>
+            <a:ext cx="310896" cy="223759"/>
           </a:xfrm>
           <a:prstGeom prst="rect">
             <a:avLst/>
@@ -13785,8 +13844,8 @@
         </p:nvSpPr>
         <p:spPr>
           <a:xfrm>
-            <a:off x="1014984" y="2366682"/>
-            <a:ext cx="1920240" cy="245274"/>
+            <a:off x="1014984" y="2345167"/>
+            <a:ext cx="1920240" cy="223759"/>
           </a:xfrm>
           <a:prstGeom prst="rect">
             <a:avLst/>
@@ -13824,8 +13883,8 @@
         </p:nvSpPr>
         <p:spPr>
           <a:xfrm>
-            <a:off x="3579876" y="2432906"/>
-            <a:ext cx="458290" cy="112826"/>
+            <a:off x="3579876" y="2405582"/>
+            <a:ext cx="458290" cy="102929"/>
           </a:xfrm>
           <a:prstGeom prst="rect">
             <a:avLst/>
@@ -13844,8 +13903,8 @@
         </p:nvSpPr>
         <p:spPr>
           <a:xfrm>
-            <a:off x="4206240" y="2366682"/>
-            <a:ext cx="777240" cy="245274"/>
+            <a:off x="4206240" y="2345167"/>
+            <a:ext cx="777240" cy="223759"/>
           </a:xfrm>
           <a:prstGeom prst="rect">
             <a:avLst/>
@@ -13883,8 +13942,8 @@
         </p:nvSpPr>
         <p:spPr>
           <a:xfrm>
-            <a:off x="4983480" y="2366682"/>
-            <a:ext cx="868680" cy="245274"/>
+            <a:off x="4983480" y="2345167"/>
+            <a:ext cx="868680" cy="223759"/>
           </a:xfrm>
           <a:prstGeom prst="rect">
             <a:avLst/>
@@ -13922,8 +13981,8 @@
         </p:nvSpPr>
         <p:spPr>
           <a:xfrm>
-            <a:off x="658368" y="2611957"/>
-            <a:ext cx="310896" cy="245274"/>
+            <a:off x="658368" y="2568926"/>
+            <a:ext cx="310896" cy="223759"/>
           </a:xfrm>
           <a:prstGeom prst="rect">
             <a:avLst/>
@@ -13961,8 +14020,8 @@
         </p:nvSpPr>
         <p:spPr>
           <a:xfrm>
-            <a:off x="1014984" y="2611957"/>
-            <a:ext cx="1920240" cy="245274"/>
+            <a:off x="1014984" y="2568926"/>
+            <a:ext cx="1920240" cy="223759"/>
           </a:xfrm>
           <a:prstGeom prst="rect">
             <a:avLst/>
@@ -14000,8 +14059,8 @@
         </p:nvSpPr>
         <p:spPr>
           <a:xfrm>
-            <a:off x="3579876" y="2678181"/>
-            <a:ext cx="378989" cy="112826"/>
+            <a:off x="3579876" y="2629341"/>
+            <a:ext cx="378989" cy="102929"/>
           </a:xfrm>
           <a:prstGeom prst="rect">
             <a:avLst/>
@@ -14020,8 +14079,8 @@
         </p:nvSpPr>
         <p:spPr>
           <a:xfrm>
-            <a:off x="4206240" y="2611957"/>
-            <a:ext cx="777240" cy="245274"/>
+            <a:off x="4206240" y="2568926"/>
+            <a:ext cx="777240" cy="223759"/>
           </a:xfrm>
           <a:prstGeom prst="rect">
             <a:avLst/>
@@ -14059,8 +14118,8 @@
         </p:nvSpPr>
         <p:spPr>
           <a:xfrm>
-            <a:off x="4983480" y="2611957"/>
-            <a:ext cx="868680" cy="245274"/>
+            <a:off x="4983480" y="2568926"/>
+            <a:ext cx="868680" cy="223759"/>
           </a:xfrm>
           <a:prstGeom prst="rect">
             <a:avLst/>
@@ -14098,8 +14157,8 @@
         </p:nvSpPr>
         <p:spPr>
           <a:xfrm>
-            <a:off x="658368" y="2857231"/>
-            <a:ext cx="310896" cy="245274"/>
+            <a:off x="658368" y="2792685"/>
+            <a:ext cx="310896" cy="223759"/>
           </a:xfrm>
           <a:prstGeom prst="rect">
             <a:avLst/>
@@ -14137,8 +14196,8 @@
         </p:nvSpPr>
         <p:spPr>
           <a:xfrm>
-            <a:off x="1014984" y="2857231"/>
-            <a:ext cx="1920240" cy="245274"/>
+            <a:off x="1014984" y="2792685"/>
+            <a:ext cx="1920240" cy="223759"/>
           </a:xfrm>
           <a:prstGeom prst="rect">
             <a:avLst/>
@@ -14176,8 +14235,8 @@
         </p:nvSpPr>
         <p:spPr>
           <a:xfrm>
-            <a:off x="3579876" y="2923455"/>
-            <a:ext cx="355006" cy="112826"/>
+            <a:off x="3579876" y="2853100"/>
+            <a:ext cx="355006" cy="102929"/>
           </a:xfrm>
           <a:prstGeom prst="rect">
             <a:avLst/>
@@ -14196,8 +14255,8 @@
         </p:nvSpPr>
         <p:spPr>
           <a:xfrm>
-            <a:off x="4206240" y="2857231"/>
-            <a:ext cx="777240" cy="245274"/>
+            <a:off x="4206240" y="2792685"/>
+            <a:ext cx="777240" cy="223759"/>
           </a:xfrm>
           <a:prstGeom prst="rect">
             <a:avLst/>
@@ -14235,8 +14294,8 @@
         </p:nvSpPr>
         <p:spPr>
           <a:xfrm>
-            <a:off x="4983480" y="2857231"/>
-            <a:ext cx="868680" cy="245274"/>
+            <a:off x="4983480" y="2792685"/>
+            <a:ext cx="868680" cy="223759"/>
           </a:xfrm>
           <a:prstGeom prst="rect">
             <a:avLst/>
@@ -14274,8 +14333,8 @@
         </p:nvSpPr>
         <p:spPr>
           <a:xfrm>
-            <a:off x="658368" y="3102505"/>
-            <a:ext cx="310896" cy="245274"/>
+            <a:off x="658368" y="3016444"/>
+            <a:ext cx="310896" cy="223759"/>
           </a:xfrm>
           <a:prstGeom prst="rect">
             <a:avLst/>
@@ -14313,8 +14372,8 @@
         </p:nvSpPr>
         <p:spPr>
           <a:xfrm>
-            <a:off x="1014984" y="3102505"/>
-            <a:ext cx="1920240" cy="245274"/>
+            <a:off x="1014984" y="3016444"/>
+            <a:ext cx="1920240" cy="223759"/>
           </a:xfrm>
           <a:prstGeom prst="rect">
             <a:avLst/>
@@ -14352,8 +14411,8 @@
         </p:nvSpPr>
         <p:spPr>
           <a:xfrm>
-            <a:off x="3579876" y="3168729"/>
-            <a:ext cx="346724" cy="112826"/>
+            <a:off x="3579876" y="3076859"/>
+            <a:ext cx="346724" cy="102929"/>
           </a:xfrm>
           <a:prstGeom prst="rect">
             <a:avLst/>
@@ -14372,8 +14431,8 @@
         </p:nvSpPr>
         <p:spPr>
           <a:xfrm>
-            <a:off x="4206240" y="3102505"/>
-            <a:ext cx="777240" cy="245274"/>
+            <a:off x="4206240" y="3016444"/>
+            <a:ext cx="777240" cy="223759"/>
           </a:xfrm>
           <a:prstGeom prst="rect">
             <a:avLst/>
@@ -14411,8 +14470,8 @@
         </p:nvSpPr>
         <p:spPr>
           <a:xfrm>
-            <a:off x="4983480" y="3102505"/>
-            <a:ext cx="868680" cy="245274"/>
+            <a:off x="4983480" y="3016444"/>
+            <a:ext cx="868680" cy="223759"/>
           </a:xfrm>
           <a:prstGeom prst="rect">
             <a:avLst/>
@@ -14450,8 +14509,8 @@
         </p:nvSpPr>
         <p:spPr>
           <a:xfrm>
-            <a:off x="658368" y="3347780"/>
-            <a:ext cx="310896" cy="245274"/>
+            <a:off x="658368" y="3240203"/>
+            <a:ext cx="310896" cy="223759"/>
           </a:xfrm>
           <a:prstGeom prst="rect">
             <a:avLst/>
@@ -14489,8 +14548,8 @@
         </p:nvSpPr>
         <p:spPr>
           <a:xfrm>
-            <a:off x="1014984" y="3347780"/>
-            <a:ext cx="1920240" cy="245274"/>
+            <a:off x="1014984" y="3240203"/>
+            <a:ext cx="1920240" cy="223759"/>
           </a:xfrm>
           <a:prstGeom prst="rect">
             <a:avLst/>
@@ -14528,8 +14587,8 @@
         </p:nvSpPr>
         <p:spPr>
           <a:xfrm>
-            <a:off x="3579876" y="3414004"/>
-            <a:ext cx="266633" cy="112826"/>
+            <a:off x="3579876" y="3300618"/>
+            <a:ext cx="266633" cy="102929"/>
           </a:xfrm>
           <a:prstGeom prst="rect">
             <a:avLst/>
@@ -14548,8 +14607,8 @@
         </p:nvSpPr>
         <p:spPr>
           <a:xfrm>
-            <a:off x="4206240" y="3347780"/>
-            <a:ext cx="777240" cy="245274"/>
+            <a:off x="4206240" y="3240203"/>
+            <a:ext cx="777240" cy="223759"/>
           </a:xfrm>
           <a:prstGeom prst="rect">
             <a:avLst/>
@@ -14587,8 +14646,8 @@
         </p:nvSpPr>
         <p:spPr>
           <a:xfrm>
-            <a:off x="4983480" y="3347780"/>
-            <a:ext cx="868680" cy="245274"/>
+            <a:off x="4983480" y="3240203"/>
+            <a:ext cx="868680" cy="223759"/>
           </a:xfrm>
           <a:prstGeom prst="rect">
             <a:avLst/>
@@ -14626,8 +14685,8 @@
         </p:nvSpPr>
         <p:spPr>
           <a:xfrm>
-            <a:off x="658368" y="3593054"/>
-            <a:ext cx="310896" cy="245274"/>
+            <a:off x="658368" y="3463962"/>
+            <a:ext cx="310896" cy="223759"/>
           </a:xfrm>
           <a:prstGeom prst="rect">
             <a:avLst/>
@@ -14665,8 +14724,8 @@
         </p:nvSpPr>
         <p:spPr>
           <a:xfrm>
-            <a:off x="1014984" y="3593054"/>
-            <a:ext cx="1920240" cy="245274"/>
+            <a:off x="1014984" y="3463962"/>
+            <a:ext cx="1920240" cy="223759"/>
           </a:xfrm>
           <a:prstGeom prst="rect">
             <a:avLst/>
@@ -14704,8 +14763,8 @@
         </p:nvSpPr>
         <p:spPr>
           <a:xfrm>
-            <a:off x="3579876" y="3659278"/>
-            <a:ext cx="215058" cy="112826"/>
+            <a:off x="3579876" y="3524377"/>
+            <a:ext cx="215058" cy="102929"/>
           </a:xfrm>
           <a:prstGeom prst="rect">
             <a:avLst/>
@@ -14724,8 +14783,8 @@
         </p:nvSpPr>
         <p:spPr>
           <a:xfrm>
-            <a:off x="4206240" y="3593054"/>
-            <a:ext cx="777240" cy="245274"/>
+            <a:off x="4206240" y="3463962"/>
+            <a:ext cx="777240" cy="223759"/>
           </a:xfrm>
           <a:prstGeom prst="rect">
             <a:avLst/>
@@ -14763,8 +14822,8 @@
         </p:nvSpPr>
         <p:spPr>
           <a:xfrm>
-            <a:off x="4983480" y="3593054"/>
-            <a:ext cx="868680" cy="245274"/>
+            <a:off x="4983480" y="3463962"/>
+            <a:ext cx="868680" cy="223759"/>
           </a:xfrm>
           <a:prstGeom prst="rect">
             <a:avLst/>
@@ -14802,8 +14861,8 @@
         </p:nvSpPr>
         <p:spPr>
           <a:xfrm>
-            <a:off x="658368" y="3838328"/>
-            <a:ext cx="310896" cy="245274"/>
+            <a:off x="658368" y="3687721"/>
+            <a:ext cx="310896" cy="223759"/>
           </a:xfrm>
           <a:prstGeom prst="rect">
             <a:avLst/>
@@ -14841,8 +14900,8 @@
         </p:nvSpPr>
         <p:spPr>
           <a:xfrm>
-            <a:off x="1014984" y="3838328"/>
-            <a:ext cx="1920240" cy="245274"/>
+            <a:off x="1014984" y="3687721"/>
+            <a:ext cx="1920240" cy="223759"/>
           </a:xfrm>
           <a:prstGeom prst="rect">
             <a:avLst/>
@@ -14880,8 +14939,8 @@
         </p:nvSpPr>
         <p:spPr>
           <a:xfrm>
-            <a:off x="3579876" y="3904553"/>
-            <a:ext cx="185543" cy="112826"/>
+            <a:off x="3579876" y="3748136"/>
+            <a:ext cx="185543" cy="102929"/>
           </a:xfrm>
           <a:prstGeom prst="rect">
             <a:avLst/>
@@ -14900,8 +14959,8 @@
         </p:nvSpPr>
         <p:spPr>
           <a:xfrm>
-            <a:off x="4206240" y="3838328"/>
-            <a:ext cx="777240" cy="245274"/>
+            <a:off x="4206240" y="3687721"/>
+            <a:ext cx="777240" cy="223759"/>
           </a:xfrm>
           <a:prstGeom prst="rect">
             <a:avLst/>
@@ -14939,8 +14998,8 @@
         </p:nvSpPr>
         <p:spPr>
           <a:xfrm>
-            <a:off x="4983480" y="3838328"/>
-            <a:ext cx="868680" cy="245274"/>
+            <a:off x="4983480" y="3687721"/>
+            <a:ext cx="868680" cy="223759"/>
           </a:xfrm>
           <a:prstGeom prst="rect">
             <a:avLst/>
@@ -14978,8 +15037,8 @@
         </p:nvSpPr>
         <p:spPr>
           <a:xfrm>
-            <a:off x="658368" y="4083603"/>
-            <a:ext cx="310896" cy="245274"/>
+            <a:off x="658368" y="3911480"/>
+            <a:ext cx="310896" cy="223759"/>
           </a:xfrm>
           <a:prstGeom prst="rect">
             <a:avLst/>
@@ -15017,8 +15076,8 @@
         </p:nvSpPr>
         <p:spPr>
           <a:xfrm>
-            <a:off x="1014984" y="4083603"/>
-            <a:ext cx="1920240" cy="245274"/>
+            <a:off x="1014984" y="3911480"/>
+            <a:ext cx="1920240" cy="223759"/>
           </a:xfrm>
           <a:prstGeom prst="rect">
             <a:avLst/>
@@ -15056,8 +15115,8 @@
         </p:nvSpPr>
         <p:spPr>
           <a:xfrm>
-            <a:off x="3579876" y="4149827"/>
-            <a:ext cx="173131" cy="112826"/>
+            <a:off x="3579876" y="3971895"/>
+            <a:ext cx="173131" cy="102929"/>
           </a:xfrm>
           <a:prstGeom prst="rect">
             <a:avLst/>
@@ -15076,8 +15135,8 @@
         </p:nvSpPr>
         <p:spPr>
           <a:xfrm>
-            <a:off x="4206240" y="4083603"/>
-            <a:ext cx="777240" cy="245274"/>
+            <a:off x="4206240" y="3911480"/>
+            <a:ext cx="777240" cy="223759"/>
           </a:xfrm>
           <a:prstGeom prst="rect">
             <a:avLst/>
@@ -15115,8 +15174,8 @@
         </p:nvSpPr>
         <p:spPr>
           <a:xfrm>
-            <a:off x="4983480" y="4083603"/>
-            <a:ext cx="868680" cy="245274"/>
+            <a:off x="4983480" y="3911480"/>
+            <a:ext cx="868680" cy="223759"/>
           </a:xfrm>
           <a:prstGeom prst="rect">
             <a:avLst/>
@@ -15154,8 +15213,8 @@
         </p:nvSpPr>
         <p:spPr>
           <a:xfrm>
-            <a:off x="658368" y="4328877"/>
-            <a:ext cx="310896" cy="245274"/>
+            <a:off x="658368" y="4135240"/>
+            <a:ext cx="310896" cy="223759"/>
           </a:xfrm>
           <a:prstGeom prst="rect">
             <a:avLst/>
@@ -15193,8 +15252,8 @@
         </p:nvSpPr>
         <p:spPr>
           <a:xfrm>
-            <a:off x="1014984" y="4328877"/>
-            <a:ext cx="1920240" cy="245274"/>
+            <a:off x="1014984" y="4135240"/>
+            <a:ext cx="1920240" cy="223759"/>
           </a:xfrm>
           <a:prstGeom prst="rect">
             <a:avLst/>
@@ -15232,8 +15291,8 @@
         </p:nvSpPr>
         <p:spPr>
           <a:xfrm>
-            <a:off x="3579876" y="4395101"/>
-            <a:ext cx="84555" cy="112826"/>
+            <a:off x="3579876" y="4195654"/>
+            <a:ext cx="84555" cy="102929"/>
           </a:xfrm>
           <a:prstGeom prst="rect">
             <a:avLst/>
@@ -15252,8 +15311,8 @@
         </p:nvSpPr>
         <p:spPr>
           <a:xfrm>
-            <a:off x="4206240" y="4328877"/>
-            <a:ext cx="777240" cy="245274"/>
+            <a:off x="4206240" y="4135240"/>
+            <a:ext cx="777240" cy="223759"/>
           </a:xfrm>
           <a:prstGeom prst="rect">
             <a:avLst/>
@@ -15291,8 +15350,8 @@
         </p:nvSpPr>
         <p:spPr>
           <a:xfrm>
-            <a:off x="4983480" y="4328877"/>
-            <a:ext cx="868680" cy="245274"/>
+            <a:off x="4983480" y="4135240"/>
+            <a:ext cx="868680" cy="223759"/>
           </a:xfrm>
           <a:prstGeom prst="rect">
             <a:avLst/>
@@ -15330,8 +15389,8 @@
         </p:nvSpPr>
         <p:spPr>
           <a:xfrm>
-            <a:off x="658368" y="4574152"/>
-            <a:ext cx="310896" cy="245274"/>
+            <a:off x="658368" y="4358999"/>
+            <a:ext cx="310896" cy="223759"/>
           </a:xfrm>
           <a:prstGeom prst="rect">
             <a:avLst/>
@@ -15369,8 +15428,8 @@
         </p:nvSpPr>
         <p:spPr>
           <a:xfrm>
-            <a:off x="1014984" y="4574152"/>
-            <a:ext cx="1920240" cy="245274"/>
+            <a:off x="1014984" y="4358999"/>
+            <a:ext cx="1920240" cy="223759"/>
           </a:xfrm>
           <a:prstGeom prst="rect">
             <a:avLst/>
@@ -15408,8 +15467,8 @@
         </p:nvSpPr>
         <p:spPr>
           <a:xfrm>
-            <a:off x="3579876" y="4640376"/>
-            <a:ext cx="79737" cy="112826"/>
+            <a:off x="3579876" y="4419414"/>
+            <a:ext cx="79737" cy="102929"/>
           </a:xfrm>
           <a:prstGeom prst="rect">
             <a:avLst/>
@@ -15428,8 +15487,8 @@
         </p:nvSpPr>
         <p:spPr>
           <a:xfrm>
-            <a:off x="4206240" y="4574152"/>
-            <a:ext cx="777240" cy="245274"/>
+            <a:off x="4206240" y="4358999"/>
+            <a:ext cx="777240" cy="223759"/>
           </a:xfrm>
           <a:prstGeom prst="rect">
             <a:avLst/>
@@ -15467,8 +15526,8 @@
         </p:nvSpPr>
         <p:spPr>
           <a:xfrm>
-            <a:off x="4983480" y="4574152"/>
-            <a:ext cx="868680" cy="245274"/>
+            <a:off x="4983480" y="4358999"/>
+            <a:ext cx="868680" cy="223759"/>
           </a:xfrm>
           <a:prstGeom prst="rect">
             <a:avLst/>
@@ -15506,8 +15565,8 @@
         </p:nvSpPr>
         <p:spPr>
           <a:xfrm>
-            <a:off x="658368" y="4819426"/>
-            <a:ext cx="310896" cy="245274"/>
+            <a:off x="658368" y="4582758"/>
+            <a:ext cx="310896" cy="223759"/>
           </a:xfrm>
           <a:prstGeom prst="rect">
             <a:avLst/>
@@ -15545,8 +15604,8 @@
         </p:nvSpPr>
         <p:spPr>
           <a:xfrm>
-            <a:off x="1014984" y="4819426"/>
-            <a:ext cx="1920240" cy="245274"/>
+            <a:off x="1014984" y="4582758"/>
+            <a:ext cx="1920240" cy="223759"/>
           </a:xfrm>
           <a:prstGeom prst="rect">
             <a:avLst/>
@@ -15584,8 +15643,8 @@
         </p:nvSpPr>
         <p:spPr>
           <a:xfrm>
-            <a:off x="3579876" y="4885650"/>
-            <a:ext cx="78983" cy="112826"/>
+            <a:off x="3579876" y="4643173"/>
+            <a:ext cx="78983" cy="102929"/>
           </a:xfrm>
           <a:prstGeom prst="rect">
             <a:avLst/>
@@ -15604,8 +15663,8 @@
         </p:nvSpPr>
         <p:spPr>
           <a:xfrm>
-            <a:off x="4206240" y="4819426"/>
-            <a:ext cx="777240" cy="245274"/>
+            <a:off x="4206240" y="4582758"/>
+            <a:ext cx="777240" cy="223759"/>
           </a:xfrm>
           <a:prstGeom prst="rect">
             <a:avLst/>
@@ -15643,8 +15702,8 @@
         </p:nvSpPr>
         <p:spPr>
           <a:xfrm>
-            <a:off x="4983480" y="4819426"/>
-            <a:ext cx="868680" cy="245274"/>
+            <a:off x="4983480" y="4582758"/>
+            <a:ext cx="868680" cy="223759"/>
           </a:xfrm>
           <a:prstGeom prst="rect">
             <a:avLst/>
@@ -15682,8 +15741,8 @@
         </p:nvSpPr>
         <p:spPr>
           <a:xfrm>
-            <a:off x="658368" y="5064700"/>
-            <a:ext cx="310896" cy="245274"/>
+            <a:off x="658368" y="4806517"/>
+            <a:ext cx="310896" cy="223759"/>
           </a:xfrm>
           <a:prstGeom prst="rect">
             <a:avLst/>
@@ -15721,8 +15780,8 @@
         </p:nvSpPr>
         <p:spPr>
           <a:xfrm>
-            <a:off x="1014984" y="5064700"/>
-            <a:ext cx="1920240" cy="245274"/>
+            <a:off x="1014984" y="4806517"/>
+            <a:ext cx="1920240" cy="223759"/>
           </a:xfrm>
           <a:prstGeom prst="rect">
             <a:avLst/>
@@ -15760,8 +15819,8 @@
         </p:nvSpPr>
         <p:spPr>
           <a:xfrm>
-            <a:off x="3579876" y="5130924"/>
-            <a:ext cx="77026" cy="112826"/>
+            <a:off x="3579876" y="4866932"/>
+            <a:ext cx="77026" cy="102929"/>
           </a:xfrm>
           <a:prstGeom prst="rect">
             <a:avLst/>
@@ -15780,8 +15839,8 @@
         </p:nvSpPr>
         <p:spPr>
           <a:xfrm>
-            <a:off x="4206240" y="5064700"/>
-            <a:ext cx="777240" cy="245274"/>
+            <a:off x="4206240" y="4806517"/>
+            <a:ext cx="777240" cy="223759"/>
           </a:xfrm>
           <a:prstGeom prst="rect">
             <a:avLst/>
@@ -15819,8 +15878,8 @@
         </p:nvSpPr>
         <p:spPr>
           <a:xfrm>
-            <a:off x="4983480" y="5064700"/>
-            <a:ext cx="868680" cy="245274"/>
+            <a:off x="4983480" y="4806517"/>
+            <a:ext cx="868680" cy="223759"/>
           </a:xfrm>
           <a:prstGeom prst="rect">
             <a:avLst/>
@@ -15858,8 +15917,8 @@
         </p:nvSpPr>
         <p:spPr>
           <a:xfrm>
-            <a:off x="658368" y="5309975"/>
-            <a:ext cx="310896" cy="245274"/>
+            <a:off x="658368" y="5030276"/>
+            <a:ext cx="310896" cy="223759"/>
           </a:xfrm>
           <a:prstGeom prst="rect">
             <a:avLst/>
@@ -15897,8 +15956,8 @@
         </p:nvSpPr>
         <p:spPr>
           <a:xfrm>
-            <a:off x="1014984" y="5309975"/>
-            <a:ext cx="1920240" cy="245274"/>
+            <a:off x="1014984" y="5030276"/>
+            <a:ext cx="1920240" cy="223759"/>
           </a:xfrm>
           <a:prstGeom prst="rect">
             <a:avLst/>
@@ -15936,8 +15995,8 @@
         </p:nvSpPr>
         <p:spPr>
           <a:xfrm>
-            <a:off x="3579876" y="5376199"/>
-            <a:ext cx="63122" cy="112826"/>
+            <a:off x="3579876" y="5090691"/>
+            <a:ext cx="63122" cy="102929"/>
           </a:xfrm>
           <a:prstGeom prst="rect">
             <a:avLst/>
@@ -15956,8 +16015,8 @@
         </p:nvSpPr>
         <p:spPr>
           <a:xfrm>
-            <a:off x="4206240" y="5309975"/>
-            <a:ext cx="777240" cy="245274"/>
+            <a:off x="4206240" y="5030276"/>
+            <a:ext cx="777240" cy="223759"/>
           </a:xfrm>
           <a:prstGeom prst="rect">
             <a:avLst/>
@@ -15995,8 +16054,8 @@
         </p:nvSpPr>
         <p:spPr>
           <a:xfrm>
-            <a:off x="4983480" y="5309975"/>
-            <a:ext cx="868680" cy="245274"/>
+            <a:off x="4983480" y="5030276"/>
+            <a:ext cx="868680" cy="223759"/>
           </a:xfrm>
           <a:prstGeom prst="rect">
             <a:avLst/>
@@ -16034,8 +16093,8 @@
         </p:nvSpPr>
         <p:spPr>
           <a:xfrm>
-            <a:off x="658368" y="5555249"/>
-            <a:ext cx="310896" cy="245274"/>
+            <a:off x="658368" y="5254035"/>
+            <a:ext cx="310896" cy="223759"/>
           </a:xfrm>
           <a:prstGeom prst="rect">
             <a:avLst/>
@@ -16073,8 +16132,8 @@
         </p:nvSpPr>
         <p:spPr>
           <a:xfrm>
-            <a:off x="1014984" y="5555249"/>
-            <a:ext cx="1920240" cy="245274"/>
+            <a:off x="1014984" y="5254035"/>
+            <a:ext cx="1920240" cy="223759"/>
           </a:xfrm>
           <a:prstGeom prst="rect">
             <a:avLst/>
@@ -16112,8 +16171,8 @@
         </p:nvSpPr>
         <p:spPr>
           <a:xfrm>
-            <a:off x="3579876" y="5621473"/>
-            <a:ext cx="59886" cy="112826"/>
+            <a:off x="3579876" y="5314450"/>
+            <a:ext cx="59886" cy="102929"/>
           </a:xfrm>
           <a:prstGeom prst="rect">
             <a:avLst/>
@@ -16132,8 +16191,8 @@
         </p:nvSpPr>
         <p:spPr>
           <a:xfrm>
-            <a:off x="4206240" y="5555249"/>
-            <a:ext cx="777240" cy="245274"/>
+            <a:off x="4206240" y="5254035"/>
+            <a:ext cx="777240" cy="223759"/>
           </a:xfrm>
           <a:prstGeom prst="rect">
             <a:avLst/>
@@ -16171,8 +16230,8 @@
         </p:nvSpPr>
         <p:spPr>
           <a:xfrm>
-            <a:off x="4983480" y="5555249"/>
-            <a:ext cx="868680" cy="245274"/>
+            <a:off x="4983480" y="5254035"/>
+            <a:ext cx="868680" cy="223759"/>
           </a:xfrm>
           <a:prstGeom prst="rect">
             <a:avLst/>
@@ -16210,8 +16269,8 @@
         </p:nvSpPr>
         <p:spPr>
           <a:xfrm>
-            <a:off x="658368" y="5800523"/>
-            <a:ext cx="310896" cy="245274"/>
+            <a:off x="658368" y="5477794"/>
+            <a:ext cx="310896" cy="223759"/>
           </a:xfrm>
           <a:prstGeom prst="rect">
             <a:avLst/>
@@ -16249,8 +16308,8 @@
         </p:nvSpPr>
         <p:spPr>
           <a:xfrm>
-            <a:off x="1014984" y="5800523"/>
-            <a:ext cx="1920240" cy="245274"/>
+            <a:off x="1014984" y="5477794"/>
+            <a:ext cx="1920240" cy="223759"/>
           </a:xfrm>
           <a:prstGeom prst="rect">
             <a:avLst/>
@@ -16288,8 +16347,8 @@
         </p:nvSpPr>
         <p:spPr>
           <a:xfrm>
-            <a:off x="3579876" y="5866747"/>
-            <a:ext cx="50878" cy="112826"/>
+            <a:off x="3579876" y="5538209"/>
+            <a:ext cx="50878" cy="102929"/>
           </a:xfrm>
           <a:prstGeom prst="rect">
             <a:avLst/>
@@ -16308,8 +16367,8 @@
         </p:nvSpPr>
         <p:spPr>
           <a:xfrm>
-            <a:off x="4206240" y="5800523"/>
-            <a:ext cx="777240" cy="245274"/>
+            <a:off x="4206240" y="5477794"/>
+            <a:ext cx="777240" cy="223759"/>
           </a:xfrm>
           <a:prstGeom prst="rect">
             <a:avLst/>
@@ -16347,8 +16406,8 @@
         </p:nvSpPr>
         <p:spPr>
           <a:xfrm>
-            <a:off x="4983480" y="5800523"/>
-            <a:ext cx="868680" cy="245274"/>
+            <a:off x="4983480" y="5477794"/>
+            <a:ext cx="868680" cy="223759"/>
           </a:xfrm>
           <a:prstGeom prst="rect">
             <a:avLst/>
@@ -16386,8 +16445,8 @@
         </p:nvSpPr>
         <p:spPr>
           <a:xfrm>
-            <a:off x="658368" y="6045798"/>
-            <a:ext cx="310896" cy="245274"/>
+            <a:off x="658368" y="5701553"/>
+            <a:ext cx="310896" cy="223759"/>
           </a:xfrm>
           <a:prstGeom prst="rect">
             <a:avLst/>
@@ -16425,8 +16484,8 @@
         </p:nvSpPr>
         <p:spPr>
           <a:xfrm>
-            <a:off x="1014984" y="6045798"/>
-            <a:ext cx="1920240" cy="245274"/>
+            <a:off x="1014984" y="5701553"/>
+            <a:ext cx="1920240" cy="223759"/>
           </a:xfrm>
           <a:prstGeom prst="rect">
             <a:avLst/>
@@ -16464,8 +16523,8 @@
         </p:nvSpPr>
         <p:spPr>
           <a:xfrm>
-            <a:off x="3579876" y="6112022"/>
-            <a:ext cx="48098" cy="112826"/>
+            <a:off x="3579876" y="5761968"/>
+            <a:ext cx="48098" cy="102929"/>
           </a:xfrm>
           <a:prstGeom prst="rect">
             <a:avLst/>
@@ -16484,8 +16543,8 @@
         </p:nvSpPr>
         <p:spPr>
           <a:xfrm>
-            <a:off x="4206240" y="6045798"/>
-            <a:ext cx="777240" cy="245274"/>
+            <a:off x="4206240" y="5701553"/>
+            <a:ext cx="777240" cy="223759"/>
           </a:xfrm>
           <a:prstGeom prst="rect">
             <a:avLst/>
@@ -16523,8 +16582,8 @@
         </p:nvSpPr>
         <p:spPr>
           <a:xfrm>
-            <a:off x="4983480" y="6045798"/>
-            <a:ext cx="868680" cy="245274"/>
+            <a:off x="4983480" y="5701553"/>
+            <a:ext cx="868680" cy="223759"/>
           </a:xfrm>
           <a:prstGeom prst="rect">
             <a:avLst/>
@@ -16563,7 +16622,7 @@
         <p:spPr>
           <a:xfrm>
             <a:off x="6208776" y="2121408"/>
-            <a:ext cx="310896" cy="245274"/>
+            <a:ext cx="310896" cy="223759"/>
           </a:xfrm>
           <a:prstGeom prst="rect">
             <a:avLst/>
@@ -16602,7 +16661,7 @@
         <p:spPr>
           <a:xfrm>
             <a:off x="6565392" y="2121408"/>
-            <a:ext cx="1920240" cy="245274"/>
+            <a:ext cx="1920240" cy="223759"/>
           </a:xfrm>
           <a:prstGeom prst="rect">
             <a:avLst/>
@@ -16640,8 +16699,8 @@
         </p:nvSpPr>
         <p:spPr>
           <a:xfrm>
-            <a:off x="9130284" y="2187632"/>
-            <a:ext cx="40236" cy="112826"/>
+            <a:off x="9130284" y="2181823"/>
+            <a:ext cx="40236" cy="102929"/>
           </a:xfrm>
           <a:prstGeom prst="rect">
             <a:avLst/>
@@ -16661,7 +16720,7 @@
         <p:spPr>
           <a:xfrm>
             <a:off x="9756648" y="2121408"/>
-            <a:ext cx="777240" cy="245274"/>
+            <a:ext cx="777240" cy="223759"/>
           </a:xfrm>
           <a:prstGeom prst="rect">
             <a:avLst/>
@@ -16700,7 +16759,7 @@
         <p:spPr>
           <a:xfrm>
             <a:off x="10533888" y="2121408"/>
-            <a:ext cx="868680" cy="245274"/>
+            <a:ext cx="868680" cy="223759"/>
           </a:xfrm>
           <a:prstGeom prst="rect">
             <a:avLst/>
@@ -16738,8 +16797,8 @@
         </p:nvSpPr>
         <p:spPr>
           <a:xfrm>
-            <a:off x="6208776" y="2366682"/>
-            <a:ext cx="310896" cy="245274"/>
+            <a:off x="6208776" y="2345167"/>
+            <a:ext cx="310896" cy="223759"/>
           </a:xfrm>
           <a:prstGeom prst="rect">
             <a:avLst/>
@@ -16777,8 +16836,8 @@
         </p:nvSpPr>
         <p:spPr>
           <a:xfrm>
-            <a:off x="6565392" y="2366682"/>
-            <a:ext cx="1920240" cy="245274"/>
+            <a:off x="6565392" y="2345167"/>
+            <a:ext cx="1920240" cy="223759"/>
           </a:xfrm>
           <a:prstGeom prst="rect">
             <a:avLst/>
@@ -16816,8 +16875,8 @@
         </p:nvSpPr>
         <p:spPr>
           <a:xfrm>
-            <a:off x="9130284" y="2432906"/>
-            <a:ext cx="27776" cy="112826"/>
+            <a:off x="9130284" y="2405582"/>
+            <a:ext cx="27776" cy="102929"/>
           </a:xfrm>
           <a:prstGeom prst="rect">
             <a:avLst/>
@@ -16836,8 +16895,8 @@
         </p:nvSpPr>
         <p:spPr>
           <a:xfrm>
-            <a:off x="9756648" y="2366682"/>
-            <a:ext cx="777240" cy="245274"/>
+            <a:off x="9756648" y="2345167"/>
+            <a:ext cx="777240" cy="223759"/>
           </a:xfrm>
           <a:prstGeom prst="rect">
             <a:avLst/>
@@ -16875,8 +16934,8 @@
         </p:nvSpPr>
         <p:spPr>
           <a:xfrm>
-            <a:off x="10533888" y="2366682"/>
-            <a:ext cx="868680" cy="245274"/>
+            <a:off x="10533888" y="2345167"/>
+            <a:ext cx="868680" cy="223759"/>
           </a:xfrm>
           <a:prstGeom prst="rect">
             <a:avLst/>
@@ -16914,8 +16973,8 @@
         </p:nvSpPr>
         <p:spPr>
           <a:xfrm>
-            <a:off x="6208776" y="2611957"/>
-            <a:ext cx="310896" cy="245274"/>
+            <a:off x="6208776" y="2568926"/>
+            <a:ext cx="310896" cy="223759"/>
           </a:xfrm>
           <a:prstGeom prst="rect">
             <a:avLst/>
@@ -16953,8 +17012,8 @@
         </p:nvSpPr>
         <p:spPr>
           <a:xfrm>
-            <a:off x="6565392" y="2611957"/>
-            <a:ext cx="1920240" cy="245274"/>
+            <a:off x="6565392" y="2568926"/>
+            <a:ext cx="1920240" cy="223759"/>
           </a:xfrm>
           <a:prstGeom prst="rect">
             <a:avLst/>
@@ -16992,8 +17051,8 @@
         </p:nvSpPr>
         <p:spPr>
           <a:xfrm>
-            <a:off x="9130284" y="2678181"/>
-            <a:ext cx="12802" cy="112826"/>
+            <a:off x="9130284" y="2629341"/>
+            <a:ext cx="12802" cy="102929"/>
           </a:xfrm>
           <a:prstGeom prst="rect">
             <a:avLst/>
@@ -17012,8 +17071,8 @@
         </p:nvSpPr>
         <p:spPr>
           <a:xfrm>
-            <a:off x="9756648" y="2611957"/>
-            <a:ext cx="777240" cy="245274"/>
+            <a:off x="9756648" y="2568926"/>
+            <a:ext cx="777240" cy="223759"/>
           </a:xfrm>
           <a:prstGeom prst="rect">
             <a:avLst/>
@@ -17051,8 +17110,8 @@
         </p:nvSpPr>
         <p:spPr>
           <a:xfrm>
-            <a:off x="10533888" y="2611957"/>
-            <a:ext cx="868680" cy="245274"/>
+            <a:off x="10533888" y="2568926"/>
+            <a:ext cx="868680" cy="223759"/>
           </a:xfrm>
           <a:prstGeom prst="rect">
             <a:avLst/>
@@ -17090,8 +17149,8 @@
         </p:nvSpPr>
         <p:spPr>
           <a:xfrm>
-            <a:off x="6208776" y="2857231"/>
-            <a:ext cx="310896" cy="245274"/>
+            <a:off x="6208776" y="2792685"/>
+            <a:ext cx="310896" cy="223759"/>
           </a:xfrm>
           <a:prstGeom prst="rect">
             <a:avLst/>
@@ -17129,8 +17188,8 @@
         </p:nvSpPr>
         <p:spPr>
           <a:xfrm>
-            <a:off x="6565392" y="2857231"/>
-            <a:ext cx="1920240" cy="245274"/>
+            <a:off x="6565392" y="2792685"/>
+            <a:ext cx="1920240" cy="223759"/>
           </a:xfrm>
           <a:prstGeom prst="rect">
             <a:avLst/>
@@ -17168,8 +17227,8 @@
         </p:nvSpPr>
         <p:spPr>
           <a:xfrm>
-            <a:off x="9116275" y="2923455"/>
-            <a:ext cx="14009" cy="112826"/>
+            <a:off x="9116275" y="2853100"/>
+            <a:ext cx="14009" cy="102929"/>
           </a:xfrm>
           <a:prstGeom prst="rect">
             <a:avLst/>
@@ -17188,8 +17247,8 @@
         </p:nvSpPr>
         <p:spPr>
           <a:xfrm>
-            <a:off x="9756648" y="2857231"/>
-            <a:ext cx="777240" cy="245274"/>
+            <a:off x="9756648" y="2792685"/>
+            <a:ext cx="777240" cy="223759"/>
           </a:xfrm>
           <a:prstGeom prst="rect">
             <a:avLst/>
@@ -17227,8 +17286,8 @@
         </p:nvSpPr>
         <p:spPr>
           <a:xfrm>
-            <a:off x="10533888" y="2857231"/>
-            <a:ext cx="868680" cy="245274"/>
+            <a:off x="10533888" y="2792685"/>
+            <a:ext cx="868680" cy="223759"/>
           </a:xfrm>
           <a:prstGeom prst="rect">
             <a:avLst/>
@@ -17266,8 +17325,8 @@
         </p:nvSpPr>
         <p:spPr>
           <a:xfrm>
-            <a:off x="6208776" y="3102505"/>
-            <a:ext cx="310896" cy="245274"/>
+            <a:off x="6208776" y="3016444"/>
+            <a:ext cx="310896" cy="223759"/>
           </a:xfrm>
           <a:prstGeom prst="rect">
             <a:avLst/>
@@ -17305,8 +17364,8 @@
         </p:nvSpPr>
         <p:spPr>
           <a:xfrm>
-            <a:off x="6565392" y="3102505"/>
-            <a:ext cx="1920240" cy="245274"/>
+            <a:off x="6565392" y="3016444"/>
+            <a:ext cx="1920240" cy="223759"/>
           </a:xfrm>
           <a:prstGeom prst="rect">
             <a:avLst/>
@@ -17344,8 +17403,8 @@
         </p:nvSpPr>
         <p:spPr>
           <a:xfrm>
-            <a:off x="9109610" y="3168729"/>
-            <a:ext cx="20674" cy="112826"/>
+            <a:off x="9109610" y="3076859"/>
+            <a:ext cx="20674" cy="102929"/>
           </a:xfrm>
           <a:prstGeom prst="rect">
             <a:avLst/>
@@ -17364,8 +17423,8 @@
         </p:nvSpPr>
         <p:spPr>
           <a:xfrm>
-            <a:off x="9756648" y="3102505"/>
-            <a:ext cx="777240" cy="245274"/>
+            <a:off x="9756648" y="3016444"/>
+            <a:ext cx="777240" cy="223759"/>
           </a:xfrm>
           <a:prstGeom prst="rect">
             <a:avLst/>
@@ -17403,8 +17462,8 @@
         </p:nvSpPr>
         <p:spPr>
           <a:xfrm>
-            <a:off x="10533888" y="3102505"/>
-            <a:ext cx="868680" cy="245274"/>
+            <a:off x="10533888" y="3016444"/>
+            <a:ext cx="868680" cy="223759"/>
           </a:xfrm>
           <a:prstGeom prst="rect">
             <a:avLst/>
@@ -17442,8 +17501,8 @@
         </p:nvSpPr>
         <p:spPr>
           <a:xfrm>
-            <a:off x="6208776" y="3347780"/>
-            <a:ext cx="310896" cy="245274"/>
+            <a:off x="6208776" y="3240203"/>
+            <a:ext cx="310896" cy="223759"/>
           </a:xfrm>
           <a:prstGeom prst="rect">
             <a:avLst/>
@@ -17481,8 +17540,8 @@
         </p:nvSpPr>
         <p:spPr>
           <a:xfrm>
-            <a:off x="6565392" y="3347780"/>
-            <a:ext cx="1920240" cy="245274"/>
+            <a:off x="6565392" y="3240203"/>
+            <a:ext cx="1920240" cy="223759"/>
           </a:xfrm>
           <a:prstGeom prst="rect">
             <a:avLst/>
@@ -17520,8 +17579,8 @@
         </p:nvSpPr>
         <p:spPr>
           <a:xfrm>
-            <a:off x="9102480" y="3414004"/>
-            <a:ext cx="27804" cy="112826"/>
+            <a:off x="9102480" y="3300618"/>
+            <a:ext cx="27804" cy="102929"/>
           </a:xfrm>
           <a:prstGeom prst="rect">
             <a:avLst/>
@@ -17540,8 +17599,8 @@
         </p:nvSpPr>
         <p:spPr>
           <a:xfrm>
-            <a:off x="9756648" y="3347780"/>
-            <a:ext cx="777240" cy="245274"/>
+            <a:off x="9756648" y="3240203"/>
+            <a:ext cx="777240" cy="223759"/>
           </a:xfrm>
           <a:prstGeom prst="rect">
             <a:avLst/>
@@ -17579,8 +17638,8 @@
         </p:nvSpPr>
         <p:spPr>
           <a:xfrm>
-            <a:off x="10533888" y="3347780"/>
-            <a:ext cx="868680" cy="245274"/>
+            <a:off x="10533888" y="3240203"/>
+            <a:ext cx="868680" cy="223759"/>
           </a:xfrm>
           <a:prstGeom prst="rect">
             <a:avLst/>
@@ -17618,8 +17677,8 @@
         </p:nvSpPr>
         <p:spPr>
           <a:xfrm>
-            <a:off x="6208776" y="3593054"/>
-            <a:ext cx="310896" cy="245274"/>
+            <a:off x="6208776" y="3463962"/>
+            <a:ext cx="310896" cy="223759"/>
           </a:xfrm>
           <a:prstGeom prst="rect">
             <a:avLst/>
@@ -17657,8 +17716,8 @@
         </p:nvSpPr>
         <p:spPr>
           <a:xfrm>
-            <a:off x="6565392" y="3593054"/>
-            <a:ext cx="1920240" cy="245274"/>
+            <a:off x="6565392" y="3463962"/>
+            <a:ext cx="1920240" cy="223759"/>
           </a:xfrm>
           <a:prstGeom prst="rect">
             <a:avLst/>
@@ -17696,8 +17755,8 @@
         </p:nvSpPr>
         <p:spPr>
           <a:xfrm>
-            <a:off x="9068832" y="3659278"/>
-            <a:ext cx="61452" cy="112826"/>
+            <a:off x="9068832" y="3524377"/>
+            <a:ext cx="61452" cy="102929"/>
           </a:xfrm>
           <a:prstGeom prst="rect">
             <a:avLst/>
@@ -17716,8 +17775,8 @@
         </p:nvSpPr>
         <p:spPr>
           <a:xfrm>
-            <a:off x="9756648" y="3593054"/>
-            <a:ext cx="777240" cy="245274"/>
+            <a:off x="9756648" y="3463962"/>
+            <a:ext cx="777240" cy="223759"/>
           </a:xfrm>
           <a:prstGeom prst="rect">
             <a:avLst/>
@@ -17755,8 +17814,8 @@
         </p:nvSpPr>
         <p:spPr>
           <a:xfrm>
-            <a:off x="10533888" y="3593054"/>
-            <a:ext cx="868680" cy="245274"/>
+            <a:off x="10533888" y="3463962"/>
+            <a:ext cx="868680" cy="223759"/>
           </a:xfrm>
           <a:prstGeom prst="rect">
             <a:avLst/>
@@ -17794,8 +17853,8 @@
         </p:nvSpPr>
         <p:spPr>
           <a:xfrm>
-            <a:off x="6208776" y="3838328"/>
-            <a:ext cx="310896" cy="245274"/>
+            <a:off x="6208776" y="3687721"/>
+            <a:ext cx="310896" cy="223759"/>
           </a:xfrm>
           <a:prstGeom prst="rect">
             <a:avLst/>
@@ -17833,8 +17892,8 @@
         </p:nvSpPr>
         <p:spPr>
           <a:xfrm>
-            <a:off x="6565392" y="3838328"/>
-            <a:ext cx="1920240" cy="245274"/>
+            <a:off x="6565392" y="3687721"/>
+            <a:ext cx="1920240" cy="223759"/>
           </a:xfrm>
           <a:prstGeom prst="rect">
             <a:avLst/>
@@ -17872,8 +17931,8 @@
         </p:nvSpPr>
         <p:spPr>
           <a:xfrm>
-            <a:off x="9047246" y="3904553"/>
-            <a:ext cx="83038" cy="112826"/>
+            <a:off x="9047246" y="3748136"/>
+            <a:ext cx="83038" cy="102929"/>
           </a:xfrm>
           <a:prstGeom prst="rect">
             <a:avLst/>
@@ -17892,8 +17951,8 @@
         </p:nvSpPr>
         <p:spPr>
           <a:xfrm>
-            <a:off x="9756648" y="3838328"/>
-            <a:ext cx="777240" cy="245274"/>
+            <a:off x="9756648" y="3687721"/>
+            <a:ext cx="777240" cy="223759"/>
           </a:xfrm>
           <a:prstGeom prst="rect">
             <a:avLst/>
@@ -17931,8 +17990,8 @@
         </p:nvSpPr>
         <p:spPr>
           <a:xfrm>
-            <a:off x="10533888" y="3838328"/>
-            <a:ext cx="868680" cy="245274"/>
+            <a:off x="10533888" y="3687721"/>
+            <a:ext cx="868680" cy="223759"/>
           </a:xfrm>
           <a:prstGeom prst="rect">
             <a:avLst/>
@@ -17970,8 +18029,8 @@
         </p:nvSpPr>
         <p:spPr>
           <a:xfrm>
-            <a:off x="6208776" y="4083603"/>
-            <a:ext cx="310896" cy="245274"/>
+            <a:off x="6208776" y="3911480"/>
+            <a:ext cx="310896" cy="223759"/>
           </a:xfrm>
           <a:prstGeom prst="rect">
             <a:avLst/>
@@ -18009,8 +18068,8 @@
         </p:nvSpPr>
         <p:spPr>
           <a:xfrm>
-            <a:off x="6565392" y="4083603"/>
-            <a:ext cx="1920240" cy="245274"/>
+            <a:off x="6565392" y="3911480"/>
+            <a:ext cx="1920240" cy="223759"/>
           </a:xfrm>
           <a:prstGeom prst="rect">
             <a:avLst/>
@@ -18048,8 +18107,8 @@
         </p:nvSpPr>
         <p:spPr>
           <a:xfrm>
-            <a:off x="9034692" y="4149827"/>
-            <a:ext cx="95592" cy="112826"/>
+            <a:off x="9034692" y="3971895"/>
+            <a:ext cx="95592" cy="102929"/>
           </a:xfrm>
           <a:prstGeom prst="rect">
             <a:avLst/>
@@ -18068,8 +18127,8 @@
         </p:nvSpPr>
         <p:spPr>
           <a:xfrm>
-            <a:off x="9756648" y="4083603"/>
-            <a:ext cx="777240" cy="245274"/>
+            <a:off x="9756648" y="3911480"/>
+            <a:ext cx="777240" cy="223759"/>
           </a:xfrm>
           <a:prstGeom prst="rect">
             <a:avLst/>
@@ -18107,8 +18166,8 @@
         </p:nvSpPr>
         <p:spPr>
           <a:xfrm>
-            <a:off x="10533888" y="4083603"/>
-            <a:ext cx="868680" cy="245274"/>
+            <a:off x="10533888" y="3911480"/>
+            <a:ext cx="868680" cy="223759"/>
           </a:xfrm>
           <a:prstGeom prst="rect">
             <a:avLst/>
@@ -18146,8 +18205,8 @@
         </p:nvSpPr>
         <p:spPr>
           <a:xfrm>
-            <a:off x="6208776" y="4328877"/>
-            <a:ext cx="310896" cy="245274"/>
+            <a:off x="6208776" y="4135240"/>
+            <a:ext cx="310896" cy="223759"/>
           </a:xfrm>
           <a:prstGeom prst="rect">
             <a:avLst/>
@@ -18185,8 +18244,8 @@
         </p:nvSpPr>
         <p:spPr>
           <a:xfrm>
-            <a:off x="6565392" y="4328877"/>
-            <a:ext cx="1920240" cy="245274"/>
+            <a:off x="6565392" y="4135240"/>
+            <a:ext cx="1920240" cy="223759"/>
           </a:xfrm>
           <a:prstGeom prst="rect">
             <a:avLst/>
@@ -18224,8 +18283,8 @@
         </p:nvSpPr>
         <p:spPr>
           <a:xfrm>
-            <a:off x="9016533" y="4395101"/>
-            <a:ext cx="113751" cy="112826"/>
+            <a:off x="9016533" y="4195654"/>
+            <a:ext cx="113751" cy="102929"/>
           </a:xfrm>
           <a:prstGeom prst="rect">
             <a:avLst/>
@@ -18244,8 +18303,8 @@
         </p:nvSpPr>
         <p:spPr>
           <a:xfrm>
-            <a:off x="9756648" y="4328877"/>
-            <a:ext cx="777240" cy="245274"/>
+            <a:off x="9756648" y="4135240"/>
+            <a:ext cx="777240" cy="223759"/>
           </a:xfrm>
           <a:prstGeom prst="rect">
             <a:avLst/>
@@ -18283,8 +18342,8 @@
         </p:nvSpPr>
         <p:spPr>
           <a:xfrm>
-            <a:off x="10533888" y="4328877"/>
-            <a:ext cx="868680" cy="245274"/>
+            <a:off x="10533888" y="4135240"/>
+            <a:ext cx="868680" cy="223759"/>
           </a:xfrm>
           <a:prstGeom prst="rect">
             <a:avLst/>
@@ -18322,8 +18381,8 @@
         </p:nvSpPr>
         <p:spPr>
           <a:xfrm>
-            <a:off x="6208776" y="4574152"/>
-            <a:ext cx="310896" cy="245274"/>
+            <a:off x="6208776" y="4358999"/>
+            <a:ext cx="310896" cy="223759"/>
           </a:xfrm>
           <a:prstGeom prst="rect">
             <a:avLst/>
@@ -18361,8 +18420,8 @@
         </p:nvSpPr>
         <p:spPr>
           <a:xfrm>
-            <a:off x="6565392" y="4574152"/>
-            <a:ext cx="1920240" cy="245274"/>
+            <a:off x="6565392" y="4358999"/>
+            <a:ext cx="1920240" cy="223759"/>
           </a:xfrm>
           <a:prstGeom prst="rect">
             <a:avLst/>
@@ -18400,8 +18459,8 @@
         </p:nvSpPr>
         <p:spPr>
           <a:xfrm>
-            <a:off x="9003546" y="4640376"/>
-            <a:ext cx="126738" cy="112826"/>
+            <a:off x="9003546" y="4419414"/>
+            <a:ext cx="126738" cy="102929"/>
           </a:xfrm>
           <a:prstGeom prst="rect">
             <a:avLst/>
@@ -18420,8 +18479,8 @@
         </p:nvSpPr>
         <p:spPr>
           <a:xfrm>
-            <a:off x="9756648" y="4574152"/>
-            <a:ext cx="777240" cy="245274"/>
+            <a:off x="9756648" y="4358999"/>
+            <a:ext cx="777240" cy="223759"/>
           </a:xfrm>
           <a:prstGeom prst="rect">
             <a:avLst/>
@@ -18459,8 +18518,8 @@
         </p:nvSpPr>
         <p:spPr>
           <a:xfrm>
-            <a:off x="10533888" y="4574152"/>
-            <a:ext cx="868680" cy="245274"/>
+            <a:off x="10533888" y="4358999"/>
+            <a:ext cx="868680" cy="223759"/>
           </a:xfrm>
           <a:prstGeom prst="rect">
             <a:avLst/>
@@ -18498,8 +18557,8 @@
         </p:nvSpPr>
         <p:spPr>
           <a:xfrm>
-            <a:off x="6208776" y="4819426"/>
-            <a:ext cx="310896" cy="245274"/>
+            <a:off x="6208776" y="4582758"/>
+            <a:ext cx="310896" cy="223759"/>
           </a:xfrm>
           <a:prstGeom prst="rect">
             <a:avLst/>
@@ -18537,8 +18596,8 @@
         </p:nvSpPr>
         <p:spPr>
           <a:xfrm>
-            <a:off x="6565392" y="4819426"/>
-            <a:ext cx="1920240" cy="245274"/>
+            <a:off x="6565392" y="4582758"/>
+            <a:ext cx="1920240" cy="223759"/>
           </a:xfrm>
           <a:prstGeom prst="rect">
             <a:avLst/>
@@ -18576,8 +18635,8 @@
         </p:nvSpPr>
         <p:spPr>
           <a:xfrm>
-            <a:off x="8911359" y="4885650"/>
-            <a:ext cx="218925" cy="112826"/>
+            <a:off x="8911359" y="4643173"/>
+            <a:ext cx="218925" cy="102929"/>
           </a:xfrm>
           <a:prstGeom prst="rect">
             <a:avLst/>
@@ -18596,8 +18655,8 @@
         </p:nvSpPr>
         <p:spPr>
           <a:xfrm>
-            <a:off x="9756648" y="4819426"/>
-            <a:ext cx="777240" cy="245274"/>
+            <a:off x="9756648" y="4582758"/>
+            <a:ext cx="777240" cy="223759"/>
           </a:xfrm>
           <a:prstGeom prst="rect">
             <a:avLst/>
@@ -18635,8 +18694,8 @@
         </p:nvSpPr>
         <p:spPr>
           <a:xfrm>
-            <a:off x="10533888" y="4819426"/>
-            <a:ext cx="868680" cy="245274"/>
+            <a:off x="10533888" y="4582758"/>
+            <a:ext cx="868680" cy="223759"/>
           </a:xfrm>
           <a:prstGeom prst="rect">
             <a:avLst/>
@@ -18674,8 +18733,8 @@
         </p:nvSpPr>
         <p:spPr>
           <a:xfrm>
-            <a:off x="6208776" y="5064700"/>
-            <a:ext cx="310896" cy="245274"/>
+            <a:off x="6208776" y="4806517"/>
+            <a:ext cx="310896" cy="223759"/>
           </a:xfrm>
           <a:prstGeom prst="rect">
             <a:avLst/>
@@ -18713,8 +18772,8 @@
         </p:nvSpPr>
         <p:spPr>
           <a:xfrm>
-            <a:off x="6565392" y="5064700"/>
-            <a:ext cx="1920240" cy="245274"/>
+            <a:off x="6565392" y="4806517"/>
+            <a:ext cx="1920240" cy="223759"/>
           </a:xfrm>
           <a:prstGeom prst="rect">
             <a:avLst/>
@@ -18752,8 +18811,8 @@
         </p:nvSpPr>
         <p:spPr>
           <a:xfrm>
-            <a:off x="8896761" y="5130924"/>
-            <a:ext cx="233523" cy="112826"/>
+            <a:off x="8896761" y="4866932"/>
+            <a:ext cx="233523" cy="102929"/>
           </a:xfrm>
           <a:prstGeom prst="rect">
             <a:avLst/>
@@ -18772,8 +18831,8 @@
         </p:nvSpPr>
         <p:spPr>
           <a:xfrm>
-            <a:off x="9756648" y="5064700"/>
-            <a:ext cx="777240" cy="245274"/>
+            <a:off x="9756648" y="4806517"/>
+            <a:ext cx="777240" cy="223759"/>
           </a:xfrm>
           <a:prstGeom prst="rect">
             <a:avLst/>
@@ -18811,8 +18870,8 @@
         </p:nvSpPr>
         <p:spPr>
           <a:xfrm>
-            <a:off x="10533888" y="5064700"/>
-            <a:ext cx="868680" cy="245274"/>
+            <a:off x="10533888" y="4806517"/>
+            <a:ext cx="868680" cy="223759"/>
           </a:xfrm>
           <a:prstGeom prst="rect">
             <a:avLst/>
@@ -18850,8 +18909,8 @@
         </p:nvSpPr>
         <p:spPr>
           <a:xfrm>
-            <a:off x="6208776" y="5309975"/>
-            <a:ext cx="310896" cy="245274"/>
+            <a:off x="6208776" y="5030276"/>
+            <a:ext cx="310896" cy="223759"/>
           </a:xfrm>
           <a:prstGeom prst="rect">
             <a:avLst/>
@@ -18889,8 +18948,8 @@
         </p:nvSpPr>
         <p:spPr>
           <a:xfrm>
-            <a:off x="6565392" y="5309975"/>
-            <a:ext cx="1920240" cy="245274"/>
+            <a:off x="6565392" y="5030276"/>
+            <a:ext cx="1920240" cy="223759"/>
           </a:xfrm>
           <a:prstGeom prst="rect">
             <a:avLst/>
@@ -18928,8 +18987,8 @@
         </p:nvSpPr>
         <p:spPr>
           <a:xfrm>
-            <a:off x="8696152" y="5376199"/>
-            <a:ext cx="434132" cy="112826"/>
+            <a:off x="8696152" y="5090691"/>
+            <a:ext cx="434132" cy="102929"/>
           </a:xfrm>
           <a:prstGeom prst="rect">
             <a:avLst/>
@@ -18948,8 +19007,8 @@
         </p:nvSpPr>
         <p:spPr>
           <a:xfrm>
-            <a:off x="9756648" y="5309975"/>
-            <a:ext cx="777240" cy="245274"/>
+            <a:off x="9756648" y="5030276"/>
+            <a:ext cx="777240" cy="223759"/>
           </a:xfrm>
           <a:prstGeom prst="rect">
             <a:avLst/>
@@ -18987,8 +19046,8 @@
         </p:nvSpPr>
         <p:spPr>
           <a:xfrm>
-            <a:off x="10533888" y="5309975"/>
-            <a:ext cx="868680" cy="245274"/>
+            <a:off x="10533888" y="5030276"/>
+            <a:ext cx="868680" cy="223759"/>
           </a:xfrm>
           <a:prstGeom prst="rect">
             <a:avLst/>
@@ -19026,8 +19085,8 @@
         </p:nvSpPr>
         <p:spPr>
           <a:xfrm>
-            <a:off x="6208776" y="5555249"/>
-            <a:ext cx="310896" cy="245274"/>
+            <a:off x="6208776" y="5254035"/>
+            <a:ext cx="310896" cy="223759"/>
           </a:xfrm>
           <a:prstGeom prst="rect">
             <a:avLst/>
@@ -19065,8 +19124,8 @@
         </p:nvSpPr>
         <p:spPr>
           <a:xfrm>
-            <a:off x="6565392" y="5555249"/>
-            <a:ext cx="1920240" cy="245274"/>
+            <a:off x="6565392" y="5254035"/>
+            <a:ext cx="1920240" cy="223759"/>
           </a:xfrm>
           <a:prstGeom prst="rect">
             <a:avLst/>
@@ -19104,8 +19163,8 @@
         </p:nvSpPr>
         <p:spPr>
           <a:xfrm>
-            <a:off x="8615154" y="5621473"/>
-            <a:ext cx="515130" cy="112826"/>
+            <a:off x="8615154" y="5314450"/>
+            <a:ext cx="515130" cy="102929"/>
           </a:xfrm>
           <a:prstGeom prst="rect">
             <a:avLst/>
@@ -19124,8 +19183,8 @@
         </p:nvSpPr>
         <p:spPr>
           <a:xfrm>
-            <a:off x="9756648" y="5555249"/>
-            <a:ext cx="777240" cy="245274"/>
+            <a:off x="9756648" y="5254035"/>
+            <a:ext cx="777240" cy="223759"/>
           </a:xfrm>
           <a:prstGeom prst="rect">
             <a:avLst/>
@@ -19163,8 +19222,8 @@
         </p:nvSpPr>
         <p:spPr>
           <a:xfrm>
-            <a:off x="10533888" y="5555249"/>
-            <a:ext cx="868680" cy="245274"/>
+            <a:off x="10533888" y="5254035"/>
+            <a:ext cx="868680" cy="223759"/>
           </a:xfrm>
           <a:prstGeom prst="rect">
             <a:avLst/>
@@ -19202,8 +19261,8 @@
         </p:nvSpPr>
         <p:spPr>
           <a:xfrm>
-            <a:off x="6208776" y="5800523"/>
-            <a:ext cx="310896" cy="245274"/>
+            <a:off x="6208776" y="5477794"/>
+            <a:ext cx="310896" cy="223759"/>
           </a:xfrm>
           <a:prstGeom prst="rect">
             <a:avLst/>
@@ -19241,8 +19300,8 @@
         </p:nvSpPr>
         <p:spPr>
           <a:xfrm>
-            <a:off x="6565392" y="5800523"/>
-            <a:ext cx="1920240" cy="245274"/>
+            <a:off x="6565392" y="5477794"/>
+            <a:ext cx="1920240" cy="223759"/>
           </a:xfrm>
           <a:prstGeom prst="rect">
             <a:avLst/>
@@ -19280,8 +19339,8 @@
         </p:nvSpPr>
         <p:spPr>
           <a:xfrm>
-            <a:off x="8602803" y="5866747"/>
-            <a:ext cx="527481" cy="112826"/>
+            <a:off x="8602803" y="5538209"/>
+            <a:ext cx="527481" cy="102929"/>
           </a:xfrm>
           <a:prstGeom prst="rect">
             <a:avLst/>
@@ -19300,8 +19359,8 @@
         </p:nvSpPr>
         <p:spPr>
           <a:xfrm>
-            <a:off x="9756648" y="5800523"/>
-            <a:ext cx="777240" cy="245274"/>
+            <a:off x="9756648" y="5477794"/>
+            <a:ext cx="777240" cy="223759"/>
           </a:xfrm>
           <a:prstGeom prst="rect">
             <a:avLst/>
@@ -19339,8 +19398,8 @@
         </p:nvSpPr>
         <p:spPr>
           <a:xfrm>
-            <a:off x="10533888" y="5800523"/>
-            <a:ext cx="868680" cy="245274"/>
+            <a:off x="10533888" y="5477794"/>
+            <a:ext cx="868680" cy="223759"/>
           </a:xfrm>
           <a:prstGeom prst="rect">
             <a:avLst/>
@@ -19379,7 +19438,7 @@
         <p:spPr>
           <a:xfrm>
             <a:off x="3574390" y="2121408"/>
-            <a:ext cx="10973" cy="4169664"/>
+            <a:ext cx="10973" cy="3803904"/>
           </a:xfrm>
           <a:prstGeom prst="rect">
             <a:avLst/>
@@ -19399,7 +19458,7 @@
         <p:spPr>
           <a:xfrm>
             <a:off x="9124798" y="2121408"/>
-            <a:ext cx="10973" cy="4169664"/>
+            <a:ext cx="10973" cy="3803904"/>
           </a:xfrm>
           <a:prstGeom prst="rect">
             <a:avLst/>
@@ -19419,7 +19478,7 @@
         <p:spPr>
           <a:xfrm>
             <a:off x="6085332" y="2121408"/>
-            <a:ext cx="10973" cy="4169664"/>
+            <a:ext cx="10973" cy="3803904"/>
           </a:xfrm>
           <a:prstGeom prst="rect">
             <a:avLst/>
@@ -19429,6 +19488,65 @@
           </a:solidFill>
           <a:ln/>
         </p:spPr>
+      </p:sp>
+      <p:sp>
+        <p:nvSpPr>
+          <p:cNvPr id="184" name="Shape 181"/>
+          <p:cNvSpPr/>
+          <p:nvPr/>
+        </p:nvSpPr>
+        <p:spPr>
+          <a:xfrm>
+            <a:off x="457200" y="6126480"/>
+            <a:ext cx="11274552" cy="371856"/>
+          </a:xfrm>
+          <a:prstGeom prst="rect">
+            <a:avLst/>
+          </a:prstGeom>
+          <a:solidFill>
+            <a:srgbClr val="E6F6EE"/>
+          </a:solidFill>
+          <a:ln/>
+        </p:spPr>
+      </p:sp>
+      <p:sp>
+        <p:nvSpPr>
+          <p:cNvPr id="185" name="Text 182"/>
+          <p:cNvSpPr txBox="1"/>
+          <p:nvPr/>
+        </p:nvSpPr>
+        <p:spPr>
+          <a:xfrm>
+            <a:off x="658368" y="6144768"/>
+            <a:ext cx="10927080" cy="335280"/>
+          </a:xfrm>
+          <a:prstGeom prst="rect">
+            <a:avLst/>
+          </a:prstGeom>
+          <a:noFill/>
+          <a:ln/>
+        </p:spPr>
+        <p:txBody>
+          <a:bodyPr wrap="square" lIns="0" tIns="0" rIns="0" bIns="0" rtlCol="0" anchor="ctr"/>
+          <a:lstStyle/>
+          <a:p>
+            <a:pPr indent="0" marL="0">
+              <a:buNone/>
+            </a:pPr>
+            <a:r>
+              <a:rPr lang="en-US" sz="1600" b="1" dirty="0">
+                <a:solidFill>
+                  <a:srgbClr val="0B7A4A"/>
+                </a:solidFill>
+                <a:latin typeface="Inter" pitchFamily="34" charset="0"/>
+                <a:ea typeface="Inter" pitchFamily="34" charset="-122"/>
+                <a:cs typeface="Inter" pitchFamily="34" charset="-120"/>
+              </a:rPr>
+              <a:t>20 of 33 stores raised internal ELR. 13 declined.</a:t>
+            </a:r>
+            <a:endParaRPr lang="en-US" sz="1600" dirty="0"/>
+          </a:p>
+        </p:txBody>
       </p:sp>
     </p:spTree>
   </p:cSld>
@@ -28915,7 +29033,7 @@
         <p:spPr>
           <a:xfrm>
             <a:off x="457200" y="1207008"/>
-            <a:ext cx="11274552" cy="5148072"/>
+            <a:ext cx="11274552" cy="4782312"/>
           </a:xfrm>
           <a:prstGeom prst="rect">
             <a:avLst/>
@@ -29248,7 +29366,7 @@
         <p:spPr>
           <a:xfrm>
             <a:off x="658368" y="2121408"/>
-            <a:ext cx="310896" cy="245274"/>
+            <a:ext cx="310896" cy="223759"/>
           </a:xfrm>
           <a:prstGeom prst="rect">
             <a:avLst/>
@@ -29287,7 +29405,7 @@
         <p:spPr>
           <a:xfrm>
             <a:off x="1014984" y="2121408"/>
-            <a:ext cx="1920240" cy="245274"/>
+            <a:ext cx="1920240" cy="223759"/>
           </a:xfrm>
           <a:prstGeom prst="rect">
             <a:avLst/>
@@ -29325,8 +29443,8 @@
         </p:nvSpPr>
         <p:spPr>
           <a:xfrm>
-            <a:off x="3579876" y="2187632"/>
-            <a:ext cx="571500" cy="112826"/>
+            <a:off x="3579876" y="2181823"/>
+            <a:ext cx="571500" cy="102929"/>
           </a:xfrm>
           <a:prstGeom prst="rect">
             <a:avLst/>
@@ -29346,7 +29464,7 @@
         <p:spPr>
           <a:xfrm>
             <a:off x="4206240" y="2121408"/>
-            <a:ext cx="777240" cy="245274"/>
+            <a:ext cx="777240" cy="223759"/>
           </a:xfrm>
           <a:prstGeom prst="rect">
             <a:avLst/>
@@ -29385,7 +29503,7 @@
         <p:spPr>
           <a:xfrm>
             <a:off x="4983480" y="2121408"/>
-            <a:ext cx="868680" cy="245274"/>
+            <a:ext cx="868680" cy="223759"/>
           </a:xfrm>
           <a:prstGeom prst="rect">
             <a:avLst/>
@@ -29424,7 +29542,7 @@
         <p:spPr>
           <a:xfrm>
             <a:off x="5907024" y="2167128"/>
-            <a:ext cx="54864" cy="153834"/>
+            <a:ext cx="54864" cy="132319"/>
           </a:xfrm>
           <a:prstGeom prst="rect">
             <a:avLst/>
@@ -29443,8 +29561,8 @@
         </p:nvSpPr>
         <p:spPr>
           <a:xfrm>
-            <a:off x="658368" y="2366682"/>
-            <a:ext cx="310896" cy="245274"/>
+            <a:off x="658368" y="2345167"/>
+            <a:ext cx="310896" cy="223759"/>
           </a:xfrm>
           <a:prstGeom prst="rect">
             <a:avLst/>
@@ -29482,8 +29600,8 @@
         </p:nvSpPr>
         <p:spPr>
           <a:xfrm>
-            <a:off x="1014984" y="2366682"/>
-            <a:ext cx="1920240" cy="245274"/>
+            <a:off x="1014984" y="2345167"/>
+            <a:ext cx="1920240" cy="223759"/>
           </a:xfrm>
           <a:prstGeom prst="rect">
             <a:avLst/>
@@ -29521,8 +29639,8 @@
         </p:nvSpPr>
         <p:spPr>
           <a:xfrm>
-            <a:off x="3579876" y="2432906"/>
-            <a:ext cx="277267" cy="112826"/>
+            <a:off x="3579876" y="2405582"/>
+            <a:ext cx="277267" cy="102929"/>
           </a:xfrm>
           <a:prstGeom prst="rect">
             <a:avLst/>
@@ -29541,8 +29659,8 @@
         </p:nvSpPr>
         <p:spPr>
           <a:xfrm>
-            <a:off x="4206240" y="2366682"/>
-            <a:ext cx="777240" cy="245274"/>
+            <a:off x="4206240" y="2345167"/>
+            <a:ext cx="777240" cy="223759"/>
           </a:xfrm>
           <a:prstGeom prst="rect">
             <a:avLst/>
@@ -29580,8 +29698,8 @@
         </p:nvSpPr>
         <p:spPr>
           <a:xfrm>
-            <a:off x="4983480" y="2366682"/>
-            <a:ext cx="868680" cy="245274"/>
+            <a:off x="4983480" y="2345167"/>
+            <a:ext cx="868680" cy="223759"/>
           </a:xfrm>
           <a:prstGeom prst="rect">
             <a:avLst/>
@@ -29619,8 +29737,8 @@
         </p:nvSpPr>
         <p:spPr>
           <a:xfrm>
-            <a:off x="5907024" y="2412402"/>
-            <a:ext cx="54864" cy="153834"/>
+            <a:off x="5907024" y="2390887"/>
+            <a:ext cx="54864" cy="132319"/>
           </a:xfrm>
           <a:prstGeom prst="rect">
             <a:avLst/>
@@ -29639,8 +29757,8 @@
         </p:nvSpPr>
         <p:spPr>
           <a:xfrm>
-            <a:off x="658368" y="2611957"/>
-            <a:ext cx="310896" cy="245274"/>
+            <a:off x="658368" y="2568926"/>
+            <a:ext cx="310896" cy="223759"/>
           </a:xfrm>
           <a:prstGeom prst="rect">
             <a:avLst/>
@@ -29678,8 +29796,8 @@
         </p:nvSpPr>
         <p:spPr>
           <a:xfrm>
-            <a:off x="1014984" y="2611957"/>
-            <a:ext cx="1920240" cy="245274"/>
+            <a:off x="1014984" y="2568926"/>
+            <a:ext cx="1920240" cy="223759"/>
           </a:xfrm>
           <a:prstGeom prst="rect">
             <a:avLst/>
@@ -29717,8 +29835,8 @@
         </p:nvSpPr>
         <p:spPr>
           <a:xfrm>
-            <a:off x="3579876" y="2678181"/>
-            <a:ext cx="159416" cy="112826"/>
+            <a:off x="3579876" y="2629341"/>
+            <a:ext cx="159416" cy="102929"/>
           </a:xfrm>
           <a:prstGeom prst="rect">
             <a:avLst/>
@@ -29737,8 +29855,8 @@
         </p:nvSpPr>
         <p:spPr>
           <a:xfrm>
-            <a:off x="4206240" y="2611957"/>
-            <a:ext cx="777240" cy="245274"/>
+            <a:off x="4206240" y="2568926"/>
+            <a:ext cx="777240" cy="223759"/>
           </a:xfrm>
           <a:prstGeom prst="rect">
             <a:avLst/>
@@ -29776,8 +29894,8 @@
         </p:nvSpPr>
         <p:spPr>
           <a:xfrm>
-            <a:off x="4983480" y="2611957"/>
-            <a:ext cx="868680" cy="245274"/>
+            <a:off x="4983480" y="2568926"/>
+            <a:ext cx="868680" cy="223759"/>
           </a:xfrm>
           <a:prstGeom prst="rect">
             <a:avLst/>
@@ -29815,8 +29933,8 @@
         </p:nvSpPr>
         <p:spPr>
           <a:xfrm>
-            <a:off x="658368" y="2857231"/>
-            <a:ext cx="310896" cy="245274"/>
+            <a:off x="658368" y="2792685"/>
+            <a:ext cx="310896" cy="223759"/>
           </a:xfrm>
           <a:prstGeom prst="rect">
             <a:avLst/>
@@ -29854,8 +29972,8 @@
         </p:nvSpPr>
         <p:spPr>
           <a:xfrm>
-            <a:off x="1014984" y="2857231"/>
-            <a:ext cx="1920240" cy="245274"/>
+            <a:off x="1014984" y="2792685"/>
+            <a:ext cx="1920240" cy="223759"/>
           </a:xfrm>
           <a:prstGeom prst="rect">
             <a:avLst/>
@@ -29893,8 +30011,8 @@
         </p:nvSpPr>
         <p:spPr>
           <a:xfrm>
-            <a:off x="3579876" y="2923455"/>
-            <a:ext cx="142804" cy="112826"/>
+            <a:off x="3579876" y="2853100"/>
+            <a:ext cx="142804" cy="102929"/>
           </a:xfrm>
           <a:prstGeom prst="rect">
             <a:avLst/>
@@ -29913,8 +30031,8 @@
         </p:nvSpPr>
         <p:spPr>
           <a:xfrm>
-            <a:off x="4206240" y="2857231"/>
-            <a:ext cx="777240" cy="245274"/>
+            <a:off x="4206240" y="2792685"/>
+            <a:ext cx="777240" cy="223759"/>
           </a:xfrm>
           <a:prstGeom prst="rect">
             <a:avLst/>
@@ -29952,8 +30070,8 @@
         </p:nvSpPr>
         <p:spPr>
           <a:xfrm>
-            <a:off x="4983480" y="2857231"/>
-            <a:ext cx="868680" cy="245274"/>
+            <a:off x="4983480" y="2792685"/>
+            <a:ext cx="868680" cy="223759"/>
           </a:xfrm>
           <a:prstGeom prst="rect">
             <a:avLst/>
@@ -29991,8 +30109,8 @@
         </p:nvSpPr>
         <p:spPr>
           <a:xfrm>
-            <a:off x="658368" y="3102505"/>
-            <a:ext cx="310896" cy="245274"/>
+            <a:off x="658368" y="3016444"/>
+            <a:ext cx="310896" cy="223759"/>
           </a:xfrm>
           <a:prstGeom prst="rect">
             <a:avLst/>
@@ -30030,8 +30148,8 @@
         </p:nvSpPr>
         <p:spPr>
           <a:xfrm>
-            <a:off x="1014984" y="3102505"/>
-            <a:ext cx="1920240" cy="245274"/>
+            <a:off x="1014984" y="3016444"/>
+            <a:ext cx="1920240" cy="223759"/>
           </a:xfrm>
           <a:prstGeom prst="rect">
             <a:avLst/>
@@ -30069,8 +30187,8 @@
         </p:nvSpPr>
         <p:spPr>
           <a:xfrm>
-            <a:off x="3579876" y="3168729"/>
-            <a:ext cx="89161" cy="112826"/>
+            <a:off x="3579876" y="3076859"/>
+            <a:ext cx="89161" cy="102929"/>
           </a:xfrm>
           <a:prstGeom prst="rect">
             <a:avLst/>
@@ -30089,8 +30207,8 @@
         </p:nvSpPr>
         <p:spPr>
           <a:xfrm>
-            <a:off x="4206240" y="3102505"/>
-            <a:ext cx="777240" cy="245274"/>
+            <a:off x="4206240" y="3016444"/>
+            <a:ext cx="777240" cy="223759"/>
           </a:xfrm>
           <a:prstGeom prst="rect">
             <a:avLst/>
@@ -30128,8 +30246,8 @@
         </p:nvSpPr>
         <p:spPr>
           <a:xfrm>
-            <a:off x="4983480" y="3102505"/>
-            <a:ext cx="868680" cy="245274"/>
+            <a:off x="4983480" y="3016444"/>
+            <a:ext cx="868680" cy="223759"/>
           </a:xfrm>
           <a:prstGeom prst="rect">
             <a:avLst/>
@@ -30167,8 +30285,8 @@
         </p:nvSpPr>
         <p:spPr>
           <a:xfrm>
-            <a:off x="658368" y="3347780"/>
-            <a:ext cx="310896" cy="245274"/>
+            <a:off x="658368" y="3240203"/>
+            <a:ext cx="310896" cy="223759"/>
           </a:xfrm>
           <a:prstGeom prst="rect">
             <a:avLst/>
@@ -30206,8 +30324,8 @@
         </p:nvSpPr>
         <p:spPr>
           <a:xfrm>
-            <a:off x="1014984" y="3347780"/>
-            <a:ext cx="1920240" cy="245274"/>
+            <a:off x="1014984" y="3240203"/>
+            <a:ext cx="1920240" cy="223759"/>
           </a:xfrm>
           <a:prstGeom prst="rect">
             <a:avLst/>
@@ -30245,8 +30363,8 @@
         </p:nvSpPr>
         <p:spPr>
           <a:xfrm>
-            <a:off x="3579876" y="3414004"/>
-            <a:ext cx="54587" cy="112826"/>
+            <a:off x="3579876" y="3300618"/>
+            <a:ext cx="54587" cy="102929"/>
           </a:xfrm>
           <a:prstGeom prst="rect">
             <a:avLst/>
@@ -30265,8 +30383,8 @@
         </p:nvSpPr>
         <p:spPr>
           <a:xfrm>
-            <a:off x="4206240" y="3347780"/>
-            <a:ext cx="777240" cy="245274"/>
+            <a:off x="4206240" y="3240203"/>
+            <a:ext cx="777240" cy="223759"/>
           </a:xfrm>
           <a:prstGeom prst="rect">
             <a:avLst/>
@@ -30304,8 +30422,8 @@
         </p:nvSpPr>
         <p:spPr>
           <a:xfrm>
-            <a:off x="4983480" y="3347780"/>
-            <a:ext cx="868680" cy="245274"/>
+            <a:off x="4983480" y="3240203"/>
+            <a:ext cx="868680" cy="223759"/>
           </a:xfrm>
           <a:prstGeom prst="rect">
             <a:avLst/>
@@ -30343,8 +30461,8 @@
         </p:nvSpPr>
         <p:spPr>
           <a:xfrm>
-            <a:off x="5907024" y="3393500"/>
-            <a:ext cx="54864" cy="153834"/>
+            <a:off x="5907024" y="3285923"/>
+            <a:ext cx="54864" cy="132319"/>
           </a:xfrm>
           <a:prstGeom prst="rect">
             <a:avLst/>
@@ -30363,8 +30481,8 @@
         </p:nvSpPr>
         <p:spPr>
           <a:xfrm>
-            <a:off x="658368" y="3593054"/>
-            <a:ext cx="310896" cy="245274"/>
+            <a:off x="658368" y="3463962"/>
+            <a:ext cx="310896" cy="223759"/>
           </a:xfrm>
           <a:prstGeom prst="rect">
             <a:avLst/>
@@ -30402,8 +30520,8 @@
         </p:nvSpPr>
         <p:spPr>
           <a:xfrm>
-            <a:off x="1014984" y="3593054"/>
-            <a:ext cx="1920240" cy="245274"/>
+            <a:off x="1014984" y="3463962"/>
+            <a:ext cx="1920240" cy="223759"/>
           </a:xfrm>
           <a:prstGeom prst="rect">
             <a:avLst/>
@@ -30441,8 +30559,8 @@
         </p:nvSpPr>
         <p:spPr>
           <a:xfrm>
-            <a:off x="3579876" y="3659278"/>
-            <a:ext cx="47745" cy="112826"/>
+            <a:off x="3579876" y="3524377"/>
+            <a:ext cx="47745" cy="102929"/>
           </a:xfrm>
           <a:prstGeom prst="rect">
             <a:avLst/>
@@ -30461,8 +30579,8 @@
         </p:nvSpPr>
         <p:spPr>
           <a:xfrm>
-            <a:off x="4206240" y="3593054"/>
-            <a:ext cx="777240" cy="245274"/>
+            <a:off x="4206240" y="3463962"/>
+            <a:ext cx="777240" cy="223759"/>
           </a:xfrm>
           <a:prstGeom prst="rect">
             <a:avLst/>
@@ -30500,8 +30618,8 @@
         </p:nvSpPr>
         <p:spPr>
           <a:xfrm>
-            <a:off x="4983480" y="3593054"/>
-            <a:ext cx="868680" cy="245274"/>
+            <a:off x="4983480" y="3463962"/>
+            <a:ext cx="868680" cy="223759"/>
           </a:xfrm>
           <a:prstGeom prst="rect">
             <a:avLst/>
@@ -30539,8 +30657,8 @@
         </p:nvSpPr>
         <p:spPr>
           <a:xfrm>
-            <a:off x="658368" y="3838328"/>
-            <a:ext cx="310896" cy="245274"/>
+            <a:off x="658368" y="3687721"/>
+            <a:ext cx="310896" cy="223759"/>
           </a:xfrm>
           <a:prstGeom prst="rect">
             <a:avLst/>
@@ -30578,8 +30696,8 @@
         </p:nvSpPr>
         <p:spPr>
           <a:xfrm>
-            <a:off x="1014984" y="3838328"/>
-            <a:ext cx="1920240" cy="245274"/>
+            <a:off x="1014984" y="3687721"/>
+            <a:ext cx="1920240" cy="223759"/>
           </a:xfrm>
           <a:prstGeom prst="rect">
             <a:avLst/>
@@ -30617,8 +30735,8 @@
         </p:nvSpPr>
         <p:spPr>
           <a:xfrm>
-            <a:off x="3579876" y="3904553"/>
-            <a:ext cx="41257" cy="112826"/>
+            <a:off x="3579876" y="3748136"/>
+            <a:ext cx="41257" cy="102929"/>
           </a:xfrm>
           <a:prstGeom prst="rect">
             <a:avLst/>
@@ -30637,8 +30755,8 @@
         </p:nvSpPr>
         <p:spPr>
           <a:xfrm>
-            <a:off x="4206240" y="3838328"/>
-            <a:ext cx="777240" cy="245274"/>
+            <a:off x="4206240" y="3687721"/>
+            <a:ext cx="777240" cy="223759"/>
           </a:xfrm>
           <a:prstGeom prst="rect">
             <a:avLst/>
@@ -30676,8 +30794,8 @@
         </p:nvSpPr>
         <p:spPr>
           <a:xfrm>
-            <a:off x="4983480" y="3838328"/>
-            <a:ext cx="868680" cy="245274"/>
+            <a:off x="4983480" y="3687721"/>
+            <a:ext cx="868680" cy="223759"/>
           </a:xfrm>
           <a:prstGeom prst="rect">
             <a:avLst/>
@@ -30715,8 +30833,8 @@
         </p:nvSpPr>
         <p:spPr>
           <a:xfrm>
-            <a:off x="658368" y="4083603"/>
-            <a:ext cx="310896" cy="245274"/>
+            <a:off x="658368" y="3911480"/>
+            <a:ext cx="310896" cy="223759"/>
           </a:xfrm>
           <a:prstGeom prst="rect">
             <a:avLst/>
@@ -30754,8 +30872,8 @@
         </p:nvSpPr>
         <p:spPr>
           <a:xfrm>
-            <a:off x="1014984" y="4083603"/>
-            <a:ext cx="1920240" cy="245274"/>
+            <a:off x="1014984" y="3911480"/>
+            <a:ext cx="1920240" cy="223759"/>
           </a:xfrm>
           <a:prstGeom prst="rect">
             <a:avLst/>
@@ -30793,8 +30911,8 @@
         </p:nvSpPr>
         <p:spPr>
           <a:xfrm>
-            <a:off x="3579876" y="4149827"/>
-            <a:ext cx="36189" cy="112826"/>
+            <a:off x="3579876" y="3971895"/>
+            <a:ext cx="36189" cy="102929"/>
           </a:xfrm>
           <a:prstGeom prst="rect">
             <a:avLst/>
@@ -30813,8 +30931,8 @@
         </p:nvSpPr>
         <p:spPr>
           <a:xfrm>
-            <a:off x="4206240" y="4083603"/>
-            <a:ext cx="777240" cy="245274"/>
+            <a:off x="4206240" y="3911480"/>
+            <a:ext cx="777240" cy="223759"/>
           </a:xfrm>
           <a:prstGeom prst="rect">
             <a:avLst/>
@@ -30852,8 +30970,8 @@
         </p:nvSpPr>
         <p:spPr>
           <a:xfrm>
-            <a:off x="4983480" y="4083603"/>
-            <a:ext cx="868680" cy="245274"/>
+            <a:off x="4983480" y="3911480"/>
+            <a:ext cx="868680" cy="223759"/>
           </a:xfrm>
           <a:prstGeom prst="rect">
             <a:avLst/>
@@ -30891,8 +31009,8 @@
         </p:nvSpPr>
         <p:spPr>
           <a:xfrm>
-            <a:off x="658368" y="4328877"/>
-            <a:ext cx="310896" cy="245274"/>
+            <a:off x="658368" y="4135240"/>
+            <a:ext cx="310896" cy="223759"/>
           </a:xfrm>
           <a:prstGeom prst="rect">
             <a:avLst/>
@@ -30930,8 +31048,8 @@
         </p:nvSpPr>
         <p:spPr>
           <a:xfrm>
-            <a:off x="1014984" y="4328877"/>
-            <a:ext cx="1920240" cy="245274"/>
+            <a:off x="1014984" y="4135240"/>
+            <a:ext cx="1920240" cy="223759"/>
           </a:xfrm>
           <a:prstGeom prst="rect">
             <a:avLst/>
@@ -30969,8 +31087,8 @@
         </p:nvSpPr>
         <p:spPr>
           <a:xfrm>
-            <a:off x="3579876" y="4395101"/>
-            <a:ext cx="33030" cy="112826"/>
+            <a:off x="3579876" y="4195654"/>
+            <a:ext cx="33030" cy="102929"/>
           </a:xfrm>
           <a:prstGeom prst="rect">
             <a:avLst/>
@@ -30989,8 +31107,8 @@
         </p:nvSpPr>
         <p:spPr>
           <a:xfrm>
-            <a:off x="4206240" y="4328877"/>
-            <a:ext cx="777240" cy="245274"/>
+            <a:off x="4206240" y="4135240"/>
+            <a:ext cx="777240" cy="223759"/>
           </a:xfrm>
           <a:prstGeom prst="rect">
             <a:avLst/>
@@ -31028,8 +31146,8 @@
         </p:nvSpPr>
         <p:spPr>
           <a:xfrm>
-            <a:off x="4983480" y="4328877"/>
-            <a:ext cx="868680" cy="245274"/>
+            <a:off x="4983480" y="4135240"/>
+            <a:ext cx="868680" cy="223759"/>
           </a:xfrm>
           <a:prstGeom prst="rect">
             <a:avLst/>
@@ -31067,8 +31185,8 @@
         </p:nvSpPr>
         <p:spPr>
           <a:xfrm>
-            <a:off x="658368" y="4574152"/>
-            <a:ext cx="310896" cy="245274"/>
+            <a:off x="658368" y="4358999"/>
+            <a:ext cx="310896" cy="223759"/>
           </a:xfrm>
           <a:prstGeom prst="rect">
             <a:avLst/>
@@ -31106,8 +31224,8 @@
         </p:nvSpPr>
         <p:spPr>
           <a:xfrm>
-            <a:off x="1014984" y="4574152"/>
-            <a:ext cx="1920240" cy="245274"/>
+            <a:off x="1014984" y="4358999"/>
+            <a:ext cx="1920240" cy="223759"/>
           </a:xfrm>
           <a:prstGeom prst="rect">
             <a:avLst/>
@@ -31145,8 +31263,8 @@
         </p:nvSpPr>
         <p:spPr>
           <a:xfrm>
-            <a:off x="3579876" y="4640376"/>
-            <a:ext cx="32509" cy="112826"/>
+            <a:off x="3579876" y="4419414"/>
+            <a:ext cx="32509" cy="102929"/>
           </a:xfrm>
           <a:prstGeom prst="rect">
             <a:avLst/>
@@ -31165,8 +31283,8 @@
         </p:nvSpPr>
         <p:spPr>
           <a:xfrm>
-            <a:off x="4206240" y="4574152"/>
-            <a:ext cx="777240" cy="245274"/>
+            <a:off x="4206240" y="4358999"/>
+            <a:ext cx="777240" cy="223759"/>
           </a:xfrm>
           <a:prstGeom prst="rect">
             <a:avLst/>
@@ -31204,8 +31322,8 @@
         </p:nvSpPr>
         <p:spPr>
           <a:xfrm>
-            <a:off x="4983480" y="4574152"/>
-            <a:ext cx="868680" cy="245274"/>
+            <a:off x="4983480" y="4358999"/>
+            <a:ext cx="868680" cy="223759"/>
           </a:xfrm>
           <a:prstGeom prst="rect">
             <a:avLst/>
@@ -31243,8 +31361,8 @@
         </p:nvSpPr>
         <p:spPr>
           <a:xfrm>
-            <a:off x="658368" y="4819426"/>
-            <a:ext cx="310896" cy="245274"/>
+            <a:off x="658368" y="4582758"/>
+            <a:ext cx="310896" cy="223759"/>
           </a:xfrm>
           <a:prstGeom prst="rect">
             <a:avLst/>
@@ -31282,8 +31400,8 @@
         </p:nvSpPr>
         <p:spPr>
           <a:xfrm>
-            <a:off x="1014984" y="4819426"/>
-            <a:ext cx="1920240" cy="245274"/>
+            <a:off x="1014984" y="4582758"/>
+            <a:ext cx="1920240" cy="223759"/>
           </a:xfrm>
           <a:prstGeom prst="rect">
             <a:avLst/>
@@ -31321,8 +31439,8 @@
         </p:nvSpPr>
         <p:spPr>
           <a:xfrm>
-            <a:off x="3579876" y="4885650"/>
-            <a:ext cx="13097" cy="112826"/>
+            <a:off x="3579876" y="4643173"/>
+            <a:ext cx="13097" cy="102929"/>
           </a:xfrm>
           <a:prstGeom prst="rect">
             <a:avLst/>
@@ -31341,8 +31459,8 @@
         </p:nvSpPr>
         <p:spPr>
           <a:xfrm>
-            <a:off x="4206240" y="4819426"/>
-            <a:ext cx="777240" cy="245274"/>
+            <a:off x="4206240" y="4582758"/>
+            <a:ext cx="777240" cy="223759"/>
           </a:xfrm>
           <a:prstGeom prst="rect">
             <a:avLst/>
@@ -31380,8 +31498,8 @@
         </p:nvSpPr>
         <p:spPr>
           <a:xfrm>
-            <a:off x="4983480" y="4819426"/>
-            <a:ext cx="868680" cy="245274"/>
+            <a:off x="4983480" y="4582758"/>
+            <a:ext cx="868680" cy="223759"/>
           </a:xfrm>
           <a:prstGeom prst="rect">
             <a:avLst/>
@@ -31419,8 +31537,8 @@
         </p:nvSpPr>
         <p:spPr>
           <a:xfrm>
-            <a:off x="658368" y="5064700"/>
-            <a:ext cx="310896" cy="245274"/>
+            <a:off x="658368" y="4806517"/>
+            <a:ext cx="310896" cy="223759"/>
           </a:xfrm>
           <a:prstGeom prst="rect">
             <a:avLst/>
@@ -31458,8 +31576,8 @@
         </p:nvSpPr>
         <p:spPr>
           <a:xfrm>
-            <a:off x="1014984" y="5064700"/>
-            <a:ext cx="1920240" cy="245274"/>
+            <a:off x="1014984" y="4806517"/>
+            <a:ext cx="1920240" cy="223759"/>
           </a:xfrm>
           <a:prstGeom prst="rect">
             <a:avLst/>
@@ -31497,8 +31615,8 @@
         </p:nvSpPr>
         <p:spPr>
           <a:xfrm>
-            <a:off x="3579876" y="5130924"/>
-            <a:ext cx="12802" cy="112826"/>
+            <a:off x="3579876" y="4866932"/>
+            <a:ext cx="12802" cy="102929"/>
           </a:xfrm>
           <a:prstGeom prst="rect">
             <a:avLst/>
@@ -31517,8 +31635,8 @@
         </p:nvSpPr>
         <p:spPr>
           <a:xfrm>
-            <a:off x="4206240" y="5064700"/>
-            <a:ext cx="777240" cy="245274"/>
+            <a:off x="4206240" y="4806517"/>
+            <a:ext cx="777240" cy="223759"/>
           </a:xfrm>
           <a:prstGeom prst="rect">
             <a:avLst/>
@@ -31556,8 +31674,8 @@
         </p:nvSpPr>
         <p:spPr>
           <a:xfrm>
-            <a:off x="4983480" y="5064700"/>
-            <a:ext cx="868680" cy="245274"/>
+            <a:off x="4983480" y="4806517"/>
+            <a:ext cx="868680" cy="223759"/>
           </a:xfrm>
           <a:prstGeom prst="rect">
             <a:avLst/>
@@ -31595,8 +31713,8 @@
         </p:nvSpPr>
         <p:spPr>
           <a:xfrm>
-            <a:off x="658368" y="5309975"/>
-            <a:ext cx="310896" cy="245274"/>
+            <a:off x="658368" y="5030276"/>
+            <a:ext cx="310896" cy="223759"/>
           </a:xfrm>
           <a:prstGeom prst="rect">
             <a:avLst/>
@@ -31634,8 +31752,8 @@
         </p:nvSpPr>
         <p:spPr>
           <a:xfrm>
-            <a:off x="1014984" y="5309975"/>
-            <a:ext cx="1920240" cy="245274"/>
+            <a:off x="1014984" y="5030276"/>
+            <a:ext cx="1920240" cy="223759"/>
           </a:xfrm>
           <a:prstGeom prst="rect">
             <a:avLst/>
@@ -31673,8 +31791,8 @@
         </p:nvSpPr>
         <p:spPr>
           <a:xfrm>
-            <a:off x="3579876" y="5376199"/>
-            <a:ext cx="12802" cy="112826"/>
+            <a:off x="3579876" y="5090691"/>
+            <a:ext cx="12802" cy="102929"/>
           </a:xfrm>
           <a:prstGeom prst="rect">
             <a:avLst/>
@@ -31693,8 +31811,8 @@
         </p:nvSpPr>
         <p:spPr>
           <a:xfrm>
-            <a:off x="4206240" y="5309975"/>
-            <a:ext cx="777240" cy="245274"/>
+            <a:off x="4206240" y="5030276"/>
+            <a:ext cx="777240" cy="223759"/>
           </a:xfrm>
           <a:prstGeom prst="rect">
             <a:avLst/>
@@ -31732,8 +31850,8 @@
         </p:nvSpPr>
         <p:spPr>
           <a:xfrm>
-            <a:off x="4983480" y="5309975"/>
-            <a:ext cx="868680" cy="245274"/>
+            <a:off x="4983480" y="5030276"/>
+            <a:ext cx="868680" cy="223759"/>
           </a:xfrm>
           <a:prstGeom prst="rect">
             <a:avLst/>
@@ -31771,8 +31889,8 @@
         </p:nvSpPr>
         <p:spPr>
           <a:xfrm>
-            <a:off x="658368" y="5555249"/>
-            <a:ext cx="310896" cy="245274"/>
+            <a:off x="658368" y="5254035"/>
+            <a:ext cx="310896" cy="223759"/>
           </a:xfrm>
           <a:prstGeom prst="rect">
             <a:avLst/>
@@ -31810,8 +31928,8 @@
         </p:nvSpPr>
         <p:spPr>
           <a:xfrm>
-            <a:off x="1014984" y="5555249"/>
-            <a:ext cx="1920240" cy="245274"/>
+            <a:off x="1014984" y="5254035"/>
+            <a:ext cx="1920240" cy="223759"/>
           </a:xfrm>
           <a:prstGeom prst="rect">
             <a:avLst/>
@@ -31849,8 +31967,8 @@
         </p:nvSpPr>
         <p:spPr>
           <a:xfrm>
-            <a:off x="3579876" y="5621473"/>
-            <a:ext cx="12802" cy="112826"/>
+            <a:off x="3579876" y="5314450"/>
+            <a:ext cx="12802" cy="102929"/>
           </a:xfrm>
           <a:prstGeom prst="rect">
             <a:avLst/>
@@ -31869,8 +31987,8 @@
         </p:nvSpPr>
         <p:spPr>
           <a:xfrm>
-            <a:off x="4206240" y="5555249"/>
-            <a:ext cx="777240" cy="245274"/>
+            <a:off x="4206240" y="5254035"/>
+            <a:ext cx="777240" cy="223759"/>
           </a:xfrm>
           <a:prstGeom prst="rect">
             <a:avLst/>
@@ -31908,8 +32026,8 @@
         </p:nvSpPr>
         <p:spPr>
           <a:xfrm>
-            <a:off x="4983480" y="5555249"/>
-            <a:ext cx="868680" cy="245274"/>
+            <a:off x="4983480" y="5254035"/>
+            <a:ext cx="868680" cy="223759"/>
           </a:xfrm>
           <a:prstGeom prst="rect">
             <a:avLst/>
@@ -31947,8 +32065,8 @@
         </p:nvSpPr>
         <p:spPr>
           <a:xfrm>
-            <a:off x="658368" y="5800523"/>
-            <a:ext cx="310896" cy="245274"/>
+            <a:off x="658368" y="5477794"/>
+            <a:ext cx="310896" cy="223759"/>
           </a:xfrm>
           <a:prstGeom prst="rect">
             <a:avLst/>
@@ -31986,8 +32104,8 @@
         </p:nvSpPr>
         <p:spPr>
           <a:xfrm>
-            <a:off x="1014984" y="5800523"/>
-            <a:ext cx="1920240" cy="245274"/>
+            <a:off x="1014984" y="5477794"/>
+            <a:ext cx="1920240" cy="223759"/>
           </a:xfrm>
           <a:prstGeom prst="rect">
             <a:avLst/>
@@ -32025,8 +32143,8 @@
         </p:nvSpPr>
         <p:spPr>
           <a:xfrm>
-            <a:off x="3579876" y="5866747"/>
-            <a:ext cx="12802" cy="112826"/>
+            <a:off x="3579876" y="5538209"/>
+            <a:ext cx="12802" cy="102929"/>
           </a:xfrm>
           <a:prstGeom prst="rect">
             <a:avLst/>
@@ -32045,8 +32163,8 @@
         </p:nvSpPr>
         <p:spPr>
           <a:xfrm>
-            <a:off x="4206240" y="5800523"/>
-            <a:ext cx="777240" cy="245274"/>
+            <a:off x="4206240" y="5477794"/>
+            <a:ext cx="777240" cy="223759"/>
           </a:xfrm>
           <a:prstGeom prst="rect">
             <a:avLst/>
@@ -32084,8 +32202,8 @@
         </p:nvSpPr>
         <p:spPr>
           <a:xfrm>
-            <a:off x="4983480" y="5800523"/>
-            <a:ext cx="868680" cy="245274"/>
+            <a:off x="4983480" y="5477794"/>
+            <a:ext cx="868680" cy="223759"/>
           </a:xfrm>
           <a:prstGeom prst="rect">
             <a:avLst/>
@@ -32123,8 +32241,8 @@
         </p:nvSpPr>
         <p:spPr>
           <a:xfrm>
-            <a:off x="658368" y="6045798"/>
-            <a:ext cx="310896" cy="245274"/>
+            <a:off x="658368" y="5701553"/>
+            <a:ext cx="310896" cy="223759"/>
           </a:xfrm>
           <a:prstGeom prst="rect">
             <a:avLst/>
@@ -32162,8 +32280,8 @@
         </p:nvSpPr>
         <p:spPr>
           <a:xfrm>
-            <a:off x="1014984" y="6045798"/>
-            <a:ext cx="1920240" cy="245274"/>
+            <a:off x="1014984" y="5701553"/>
+            <a:ext cx="1920240" cy="223759"/>
           </a:xfrm>
           <a:prstGeom prst="rect">
             <a:avLst/>
@@ -32201,8 +32319,8 @@
         </p:nvSpPr>
         <p:spPr>
           <a:xfrm>
-            <a:off x="3579876" y="6112022"/>
-            <a:ext cx="12802" cy="112826"/>
+            <a:off x="3579876" y="5761968"/>
+            <a:ext cx="12802" cy="102929"/>
           </a:xfrm>
           <a:prstGeom prst="rect">
             <a:avLst/>
@@ -32221,8 +32339,8 @@
         </p:nvSpPr>
         <p:spPr>
           <a:xfrm>
-            <a:off x="4206240" y="6045798"/>
-            <a:ext cx="777240" cy="245274"/>
+            <a:off x="4206240" y="5701553"/>
+            <a:ext cx="777240" cy="223759"/>
           </a:xfrm>
           <a:prstGeom prst="rect">
             <a:avLst/>
@@ -32260,8 +32378,8 @@
         </p:nvSpPr>
         <p:spPr>
           <a:xfrm>
-            <a:off x="4983480" y="6045798"/>
-            <a:ext cx="868680" cy="245274"/>
+            <a:off x="4983480" y="5701553"/>
+            <a:ext cx="868680" cy="223759"/>
           </a:xfrm>
           <a:prstGeom prst="rect">
             <a:avLst/>
@@ -32300,7 +32418,7 @@
         <p:spPr>
           <a:xfrm>
             <a:off x="6208776" y="2121408"/>
-            <a:ext cx="310896" cy="245274"/>
+            <a:ext cx="310896" cy="223759"/>
           </a:xfrm>
           <a:prstGeom prst="rect">
             <a:avLst/>
@@ -32339,7 +32457,7 @@
         <p:spPr>
           <a:xfrm>
             <a:off x="6565392" y="2121408"/>
-            <a:ext cx="1920240" cy="245274"/>
+            <a:ext cx="1920240" cy="223759"/>
           </a:xfrm>
           <a:prstGeom prst="rect">
             <a:avLst/>
@@ -32377,8 +32495,8 @@
         </p:nvSpPr>
         <p:spPr>
           <a:xfrm>
-            <a:off x="9130284" y="2187632"/>
-            <a:ext cx="12802" cy="112826"/>
+            <a:off x="9130284" y="2181823"/>
+            <a:ext cx="12802" cy="102929"/>
           </a:xfrm>
           <a:prstGeom prst="rect">
             <a:avLst/>
@@ -32398,7 +32516,7 @@
         <p:spPr>
           <a:xfrm>
             <a:off x="9756648" y="2121408"/>
-            <a:ext cx="777240" cy="245274"/>
+            <a:ext cx="777240" cy="223759"/>
           </a:xfrm>
           <a:prstGeom prst="rect">
             <a:avLst/>
@@ -32437,7 +32555,7 @@
         <p:spPr>
           <a:xfrm>
             <a:off x="10533888" y="2121408"/>
-            <a:ext cx="868680" cy="245274"/>
+            <a:ext cx="868680" cy="223759"/>
           </a:xfrm>
           <a:prstGeom prst="rect">
             <a:avLst/>
@@ -32475,8 +32593,8 @@
         </p:nvSpPr>
         <p:spPr>
           <a:xfrm>
-            <a:off x="6208776" y="2366682"/>
-            <a:ext cx="310896" cy="245274"/>
+            <a:off x="6208776" y="2345167"/>
+            <a:ext cx="310896" cy="223759"/>
           </a:xfrm>
           <a:prstGeom prst="rect">
             <a:avLst/>
@@ -32514,8 +32632,8 @@
         </p:nvSpPr>
         <p:spPr>
           <a:xfrm>
-            <a:off x="6565392" y="2366682"/>
-            <a:ext cx="1920240" cy="245274"/>
+            <a:off x="6565392" y="2345167"/>
+            <a:ext cx="1920240" cy="223759"/>
           </a:xfrm>
           <a:prstGeom prst="rect">
             <a:avLst/>
@@ -32553,8 +32671,8 @@
         </p:nvSpPr>
         <p:spPr>
           <a:xfrm>
-            <a:off x="9127747" y="2432906"/>
-            <a:ext cx="12802" cy="112826"/>
+            <a:off x="9127747" y="2405582"/>
+            <a:ext cx="12802" cy="102929"/>
           </a:xfrm>
           <a:prstGeom prst="rect">
             <a:avLst/>
@@ -32573,8 +32691,8 @@
         </p:nvSpPr>
         <p:spPr>
           <a:xfrm>
-            <a:off x="9756648" y="2366682"/>
-            <a:ext cx="777240" cy="245274"/>
+            <a:off x="9756648" y="2345167"/>
+            <a:ext cx="777240" cy="223759"/>
           </a:xfrm>
           <a:prstGeom prst="rect">
             <a:avLst/>
@@ -32612,8 +32730,8 @@
         </p:nvSpPr>
         <p:spPr>
           <a:xfrm>
-            <a:off x="10533888" y="2366682"/>
-            <a:ext cx="868680" cy="245274"/>
+            <a:off x="10533888" y="2345167"/>
+            <a:ext cx="868680" cy="223759"/>
           </a:xfrm>
           <a:prstGeom prst="rect">
             <a:avLst/>
@@ -32651,8 +32769,8 @@
         </p:nvSpPr>
         <p:spPr>
           <a:xfrm>
-            <a:off x="6208776" y="2611957"/>
-            <a:ext cx="310896" cy="245274"/>
+            <a:off x="6208776" y="2568926"/>
+            <a:ext cx="310896" cy="223759"/>
           </a:xfrm>
           <a:prstGeom prst="rect">
             <a:avLst/>
@@ -32690,8 +32808,8 @@
         </p:nvSpPr>
         <p:spPr>
           <a:xfrm>
-            <a:off x="6565392" y="2611957"/>
-            <a:ext cx="1920240" cy="245274"/>
+            <a:off x="6565392" y="2568926"/>
+            <a:ext cx="1920240" cy="223759"/>
           </a:xfrm>
           <a:prstGeom prst="rect">
             <a:avLst/>
@@ -32729,8 +32847,8 @@
         </p:nvSpPr>
         <p:spPr>
           <a:xfrm>
-            <a:off x="9127670" y="2678181"/>
-            <a:ext cx="12802" cy="112826"/>
+            <a:off x="9127670" y="2629341"/>
+            <a:ext cx="12802" cy="102929"/>
           </a:xfrm>
           <a:prstGeom prst="rect">
             <a:avLst/>
@@ -32749,8 +32867,8 @@
         </p:nvSpPr>
         <p:spPr>
           <a:xfrm>
-            <a:off x="9756648" y="2611957"/>
-            <a:ext cx="777240" cy="245274"/>
+            <a:off x="9756648" y="2568926"/>
+            <a:ext cx="777240" cy="223759"/>
           </a:xfrm>
           <a:prstGeom prst="rect">
             <a:avLst/>
@@ -32788,8 +32906,8 @@
         </p:nvSpPr>
         <p:spPr>
           <a:xfrm>
-            <a:off x="10533888" y="2611957"/>
-            <a:ext cx="868680" cy="245274"/>
+            <a:off x="10533888" y="2568926"/>
+            <a:ext cx="868680" cy="223759"/>
           </a:xfrm>
           <a:prstGeom prst="rect">
             <a:avLst/>
@@ -32827,8 +32945,8 @@
         </p:nvSpPr>
         <p:spPr>
           <a:xfrm>
-            <a:off x="6208776" y="2857231"/>
-            <a:ext cx="310896" cy="245274"/>
+            <a:off x="6208776" y="2792685"/>
+            <a:ext cx="310896" cy="223759"/>
           </a:xfrm>
           <a:prstGeom prst="rect">
             <a:avLst/>
@@ -32866,8 +32984,8 @@
         </p:nvSpPr>
         <p:spPr>
           <a:xfrm>
-            <a:off x="6565392" y="2857231"/>
-            <a:ext cx="1920240" cy="245274"/>
+            <a:off x="6565392" y="2792685"/>
+            <a:ext cx="1920240" cy="223759"/>
           </a:xfrm>
           <a:prstGeom prst="rect">
             <a:avLst/>
@@ -32905,8 +33023,8 @@
         </p:nvSpPr>
         <p:spPr>
           <a:xfrm>
-            <a:off x="9127631" y="2923455"/>
-            <a:ext cx="12802" cy="112826"/>
+            <a:off x="9127631" y="2853100"/>
+            <a:ext cx="12802" cy="102929"/>
           </a:xfrm>
           <a:prstGeom prst="rect">
             <a:avLst/>
@@ -32925,8 +33043,8 @@
         </p:nvSpPr>
         <p:spPr>
           <a:xfrm>
-            <a:off x="9756648" y="2857231"/>
-            <a:ext cx="777240" cy="245274"/>
+            <a:off x="9756648" y="2792685"/>
+            <a:ext cx="777240" cy="223759"/>
           </a:xfrm>
           <a:prstGeom prst="rect">
             <a:avLst/>
@@ -32964,8 +33082,8 @@
         </p:nvSpPr>
         <p:spPr>
           <a:xfrm>
-            <a:off x="10533888" y="2857231"/>
-            <a:ext cx="868680" cy="245274"/>
+            <a:off x="10533888" y="2792685"/>
+            <a:ext cx="868680" cy="223759"/>
           </a:xfrm>
           <a:prstGeom prst="rect">
             <a:avLst/>
@@ -33003,8 +33121,8 @@
         </p:nvSpPr>
         <p:spPr>
           <a:xfrm>
-            <a:off x="6208776" y="3102505"/>
-            <a:ext cx="310896" cy="245274"/>
+            <a:off x="6208776" y="3016444"/>
+            <a:ext cx="310896" cy="223759"/>
           </a:xfrm>
           <a:prstGeom prst="rect">
             <a:avLst/>
@@ -33042,8 +33160,8 @@
         </p:nvSpPr>
         <p:spPr>
           <a:xfrm>
-            <a:off x="6565392" y="3102505"/>
-            <a:ext cx="1920240" cy="245274"/>
+            <a:off x="6565392" y="3016444"/>
+            <a:ext cx="1920240" cy="223759"/>
           </a:xfrm>
           <a:prstGeom prst="rect">
             <a:avLst/>
@@ -33081,8 +33199,8 @@
         </p:nvSpPr>
         <p:spPr>
           <a:xfrm>
-            <a:off x="9121264" y="3168729"/>
-            <a:ext cx="12802" cy="112826"/>
+            <a:off x="9121264" y="3076859"/>
+            <a:ext cx="12802" cy="102929"/>
           </a:xfrm>
           <a:prstGeom prst="rect">
             <a:avLst/>
@@ -33101,8 +33219,8 @@
         </p:nvSpPr>
         <p:spPr>
           <a:xfrm>
-            <a:off x="9756648" y="3102505"/>
-            <a:ext cx="777240" cy="245274"/>
+            <a:off x="9756648" y="3016444"/>
+            <a:ext cx="777240" cy="223759"/>
           </a:xfrm>
           <a:prstGeom prst="rect">
             <a:avLst/>
@@ -33140,8 +33258,8 @@
         </p:nvSpPr>
         <p:spPr>
           <a:xfrm>
-            <a:off x="10533888" y="3102505"/>
-            <a:ext cx="868680" cy="245274"/>
+            <a:off x="10533888" y="3016444"/>
+            <a:ext cx="868680" cy="223759"/>
           </a:xfrm>
           <a:prstGeom prst="rect">
             <a:avLst/>
@@ -33179,8 +33297,8 @@
         </p:nvSpPr>
         <p:spPr>
           <a:xfrm>
-            <a:off x="6208776" y="3347780"/>
-            <a:ext cx="310896" cy="245274"/>
+            <a:off x="6208776" y="3240203"/>
+            <a:ext cx="310896" cy="223759"/>
           </a:xfrm>
           <a:prstGeom prst="rect">
             <a:avLst/>
@@ -33218,8 +33336,8 @@
         </p:nvSpPr>
         <p:spPr>
           <a:xfrm>
-            <a:off x="6565392" y="3347780"/>
-            <a:ext cx="1920240" cy="245274"/>
+            <a:off x="6565392" y="3240203"/>
+            <a:ext cx="1920240" cy="223759"/>
           </a:xfrm>
           <a:prstGeom prst="rect">
             <a:avLst/>
@@ -33257,8 +33375,8 @@
         </p:nvSpPr>
         <p:spPr>
           <a:xfrm>
-            <a:off x="9119676" y="3414004"/>
-            <a:ext cx="12802" cy="112826"/>
+            <a:off x="9119676" y="3300618"/>
+            <a:ext cx="12802" cy="102929"/>
           </a:xfrm>
           <a:prstGeom prst="rect">
             <a:avLst/>
@@ -33277,8 +33395,8 @@
         </p:nvSpPr>
         <p:spPr>
           <a:xfrm>
-            <a:off x="9756648" y="3347780"/>
-            <a:ext cx="777240" cy="245274"/>
+            <a:off x="9756648" y="3240203"/>
+            <a:ext cx="777240" cy="223759"/>
           </a:xfrm>
           <a:prstGeom prst="rect">
             <a:avLst/>
@@ -33316,8 +33434,8 @@
         </p:nvSpPr>
         <p:spPr>
           <a:xfrm>
-            <a:off x="10533888" y="3347780"/>
-            <a:ext cx="868680" cy="245274"/>
+            <a:off x="10533888" y="3240203"/>
+            <a:ext cx="868680" cy="223759"/>
           </a:xfrm>
           <a:prstGeom prst="rect">
             <a:avLst/>
@@ -33355,8 +33473,8 @@
         </p:nvSpPr>
         <p:spPr>
           <a:xfrm>
-            <a:off x="6208776" y="3593054"/>
-            <a:ext cx="310896" cy="245274"/>
+            <a:off x="6208776" y="3463962"/>
+            <a:ext cx="310896" cy="223759"/>
           </a:xfrm>
           <a:prstGeom prst="rect">
             <a:avLst/>
@@ -33394,8 +33512,8 @@
         </p:nvSpPr>
         <p:spPr>
           <a:xfrm>
-            <a:off x="6565392" y="3593054"/>
-            <a:ext cx="1920240" cy="245274"/>
+            <a:off x="6565392" y="3463962"/>
+            <a:ext cx="1920240" cy="223759"/>
           </a:xfrm>
           <a:prstGeom prst="rect">
             <a:avLst/>
@@ -33433,8 +33551,8 @@
         </p:nvSpPr>
         <p:spPr>
           <a:xfrm>
-            <a:off x="9119152" y="3659278"/>
-            <a:ext cx="12802" cy="112826"/>
+            <a:off x="9119152" y="3524377"/>
+            <a:ext cx="12802" cy="102929"/>
           </a:xfrm>
           <a:prstGeom prst="rect">
             <a:avLst/>
@@ -33453,8 +33571,8 @@
         </p:nvSpPr>
         <p:spPr>
           <a:xfrm>
-            <a:off x="9756648" y="3593054"/>
-            <a:ext cx="777240" cy="245274"/>
+            <a:off x="9756648" y="3463962"/>
+            <a:ext cx="777240" cy="223759"/>
           </a:xfrm>
           <a:prstGeom prst="rect">
             <a:avLst/>
@@ -33492,8 +33610,8 @@
         </p:nvSpPr>
         <p:spPr>
           <a:xfrm>
-            <a:off x="10533888" y="3593054"/>
-            <a:ext cx="868680" cy="245274"/>
+            <a:off x="10533888" y="3463962"/>
+            <a:ext cx="868680" cy="223759"/>
           </a:xfrm>
           <a:prstGeom prst="rect">
             <a:avLst/>
@@ -33531,8 +33649,8 @@
         </p:nvSpPr>
         <p:spPr>
           <a:xfrm>
-            <a:off x="6208776" y="3838328"/>
-            <a:ext cx="310896" cy="245274"/>
+            <a:off x="6208776" y="3687721"/>
+            <a:ext cx="310896" cy="223759"/>
           </a:xfrm>
           <a:prstGeom prst="rect">
             <a:avLst/>
@@ -33570,8 +33688,8 @@
         </p:nvSpPr>
         <p:spPr>
           <a:xfrm>
-            <a:off x="6565392" y="3838328"/>
-            <a:ext cx="1920240" cy="245274"/>
+            <a:off x="6565392" y="3687721"/>
+            <a:ext cx="1920240" cy="223759"/>
           </a:xfrm>
           <a:prstGeom prst="rect">
             <a:avLst/>
@@ -33609,8 +33727,8 @@
         </p:nvSpPr>
         <p:spPr>
           <a:xfrm>
-            <a:off x="9113768" y="3904553"/>
-            <a:ext cx="16516" cy="112826"/>
+            <a:off x="9113768" y="3748136"/>
+            <a:ext cx="16516" cy="102929"/>
           </a:xfrm>
           <a:prstGeom prst="rect">
             <a:avLst/>
@@ -33629,8 +33747,8 @@
         </p:nvSpPr>
         <p:spPr>
           <a:xfrm>
-            <a:off x="9756648" y="3838328"/>
-            <a:ext cx="777240" cy="245274"/>
+            <a:off x="9756648" y="3687721"/>
+            <a:ext cx="777240" cy="223759"/>
           </a:xfrm>
           <a:prstGeom prst="rect">
             <a:avLst/>
@@ -33668,8 +33786,8 @@
         </p:nvSpPr>
         <p:spPr>
           <a:xfrm>
-            <a:off x="10533888" y="3838328"/>
-            <a:ext cx="868680" cy="245274"/>
+            <a:off x="10533888" y="3687721"/>
+            <a:ext cx="868680" cy="223759"/>
           </a:xfrm>
           <a:prstGeom prst="rect">
             <a:avLst/>
@@ -33707,8 +33825,8 @@
         </p:nvSpPr>
         <p:spPr>
           <a:xfrm>
-            <a:off x="6208776" y="4083603"/>
-            <a:ext cx="310896" cy="245274"/>
+            <a:off x="6208776" y="3911480"/>
+            <a:ext cx="310896" cy="223759"/>
           </a:xfrm>
           <a:prstGeom prst="rect">
             <a:avLst/>
@@ -33746,8 +33864,8 @@
         </p:nvSpPr>
         <p:spPr>
           <a:xfrm>
-            <a:off x="6565392" y="4083603"/>
-            <a:ext cx="1920240" cy="245274"/>
+            <a:off x="6565392" y="3911480"/>
+            <a:ext cx="1920240" cy="223759"/>
           </a:xfrm>
           <a:prstGeom prst="rect">
             <a:avLst/>
@@ -33785,8 +33903,8 @@
         </p:nvSpPr>
         <p:spPr>
           <a:xfrm>
-            <a:off x="9106887" y="4149827"/>
-            <a:ext cx="23397" cy="112826"/>
+            <a:off x="9106887" y="3971895"/>
+            <a:ext cx="23397" cy="102929"/>
           </a:xfrm>
           <a:prstGeom prst="rect">
             <a:avLst/>
@@ -33805,8 +33923,8 @@
         </p:nvSpPr>
         <p:spPr>
           <a:xfrm>
-            <a:off x="9756648" y="4083603"/>
-            <a:ext cx="777240" cy="245274"/>
+            <a:off x="9756648" y="3911480"/>
+            <a:ext cx="777240" cy="223759"/>
           </a:xfrm>
           <a:prstGeom prst="rect">
             <a:avLst/>
@@ -33844,8 +33962,8 @@
         </p:nvSpPr>
         <p:spPr>
           <a:xfrm>
-            <a:off x="10533888" y="4083603"/>
-            <a:ext cx="868680" cy="245274"/>
+            <a:off x="10533888" y="3911480"/>
+            <a:ext cx="868680" cy="223759"/>
           </a:xfrm>
           <a:prstGeom prst="rect">
             <a:avLst/>
@@ -33883,8 +34001,8 @@
         </p:nvSpPr>
         <p:spPr>
           <a:xfrm>
-            <a:off x="11457432" y="4129323"/>
-            <a:ext cx="54864" cy="153834"/>
+            <a:off x="11457432" y="3957200"/>
+            <a:ext cx="54864" cy="132319"/>
           </a:xfrm>
           <a:prstGeom prst="rect">
             <a:avLst/>
@@ -33903,8 +34021,8 @@
         </p:nvSpPr>
         <p:spPr>
           <a:xfrm>
-            <a:off x="6208776" y="4328877"/>
-            <a:ext cx="310896" cy="245274"/>
+            <a:off x="6208776" y="4135240"/>
+            <a:ext cx="310896" cy="223759"/>
           </a:xfrm>
           <a:prstGeom prst="rect">
             <a:avLst/>
@@ -33942,8 +34060,8 @@
         </p:nvSpPr>
         <p:spPr>
           <a:xfrm>
-            <a:off x="6565392" y="4328877"/>
-            <a:ext cx="1920240" cy="245274"/>
+            <a:off x="6565392" y="4135240"/>
+            <a:ext cx="1920240" cy="223759"/>
           </a:xfrm>
           <a:prstGeom prst="rect">
             <a:avLst/>
@@ -33981,8 +34099,8 @@
         </p:nvSpPr>
         <p:spPr>
           <a:xfrm>
-            <a:off x="9084919" y="4395101"/>
-            <a:ext cx="45365" cy="112826"/>
+            <a:off x="9084919" y="4195654"/>
+            <a:ext cx="45365" cy="102929"/>
           </a:xfrm>
           <a:prstGeom prst="rect">
             <a:avLst/>
@@ -34001,8 +34119,8 @@
         </p:nvSpPr>
         <p:spPr>
           <a:xfrm>
-            <a:off x="9756648" y="4328877"/>
-            <a:ext cx="777240" cy="245274"/>
+            <a:off x="9756648" y="4135240"/>
+            <a:ext cx="777240" cy="223759"/>
           </a:xfrm>
           <a:prstGeom prst="rect">
             <a:avLst/>
@@ -34040,8 +34158,8 @@
         </p:nvSpPr>
         <p:spPr>
           <a:xfrm>
-            <a:off x="10533888" y="4328877"/>
-            <a:ext cx="868680" cy="245274"/>
+            <a:off x="10533888" y="4135240"/>
+            <a:ext cx="868680" cy="223759"/>
           </a:xfrm>
           <a:prstGeom prst="rect">
             <a:avLst/>
@@ -34079,8 +34197,8 @@
         </p:nvSpPr>
         <p:spPr>
           <a:xfrm>
-            <a:off x="6208776" y="4574152"/>
-            <a:ext cx="310896" cy="245274"/>
+            <a:off x="6208776" y="4358999"/>
+            <a:ext cx="310896" cy="223759"/>
           </a:xfrm>
           <a:prstGeom prst="rect">
             <a:avLst/>
@@ -34118,8 +34236,8 @@
         </p:nvSpPr>
         <p:spPr>
           <a:xfrm>
-            <a:off x="6565392" y="4574152"/>
-            <a:ext cx="1920240" cy="245274"/>
+            <a:off x="6565392" y="4358999"/>
+            <a:ext cx="1920240" cy="223759"/>
           </a:xfrm>
           <a:prstGeom prst="rect">
             <a:avLst/>
@@ -34157,8 +34275,8 @@
         </p:nvSpPr>
         <p:spPr>
           <a:xfrm>
-            <a:off x="9084120" y="4640376"/>
-            <a:ext cx="46164" cy="112826"/>
+            <a:off x="9084120" y="4419414"/>
+            <a:ext cx="46164" cy="102929"/>
           </a:xfrm>
           <a:prstGeom prst="rect">
             <a:avLst/>
@@ -34177,8 +34295,8 @@
         </p:nvSpPr>
         <p:spPr>
           <a:xfrm>
-            <a:off x="9756648" y="4574152"/>
-            <a:ext cx="777240" cy="245274"/>
+            <a:off x="9756648" y="4358999"/>
+            <a:ext cx="777240" cy="223759"/>
           </a:xfrm>
           <a:prstGeom prst="rect">
             <a:avLst/>
@@ -34216,8 +34334,8 @@
         </p:nvSpPr>
         <p:spPr>
           <a:xfrm>
-            <a:off x="10533888" y="4574152"/>
-            <a:ext cx="868680" cy="245274"/>
+            <a:off x="10533888" y="4358999"/>
+            <a:ext cx="868680" cy="223759"/>
           </a:xfrm>
           <a:prstGeom prst="rect">
             <a:avLst/>
@@ -34255,8 +34373,8 @@
         </p:nvSpPr>
         <p:spPr>
           <a:xfrm>
-            <a:off x="6208776" y="4819426"/>
-            <a:ext cx="310896" cy="245274"/>
+            <a:off x="6208776" y="4582758"/>
+            <a:ext cx="310896" cy="223759"/>
           </a:xfrm>
           <a:prstGeom prst="rect">
             <a:avLst/>
@@ -34294,8 +34412,8 @@
         </p:nvSpPr>
         <p:spPr>
           <a:xfrm>
-            <a:off x="6565392" y="4819426"/>
-            <a:ext cx="1920240" cy="245274"/>
+            <a:off x="6565392" y="4582758"/>
+            <a:ext cx="1920240" cy="223759"/>
           </a:xfrm>
           <a:prstGeom prst="rect">
             <a:avLst/>
@@ -34333,8 +34451,8 @@
         </p:nvSpPr>
         <p:spPr>
           <a:xfrm>
-            <a:off x="9071585" y="4885650"/>
-            <a:ext cx="58699" cy="112826"/>
+            <a:off x="9071585" y="4643173"/>
+            <a:ext cx="58699" cy="102929"/>
           </a:xfrm>
           <a:prstGeom prst="rect">
             <a:avLst/>
@@ -34353,8 +34471,8 @@
         </p:nvSpPr>
         <p:spPr>
           <a:xfrm>
-            <a:off x="9756648" y="4819426"/>
-            <a:ext cx="777240" cy="245274"/>
+            <a:off x="9756648" y="4582758"/>
+            <a:ext cx="777240" cy="223759"/>
           </a:xfrm>
           <a:prstGeom prst="rect">
             <a:avLst/>
@@ -34392,8 +34510,8 @@
         </p:nvSpPr>
         <p:spPr>
           <a:xfrm>
-            <a:off x="10533888" y="4819426"/>
-            <a:ext cx="868680" cy="245274"/>
+            <a:off x="10533888" y="4582758"/>
+            <a:ext cx="868680" cy="223759"/>
           </a:xfrm>
           <a:prstGeom prst="rect">
             <a:avLst/>
@@ -34431,8 +34549,8 @@
         </p:nvSpPr>
         <p:spPr>
           <a:xfrm>
-            <a:off x="6208776" y="5064700"/>
-            <a:ext cx="310896" cy="245274"/>
+            <a:off x="6208776" y="4806517"/>
+            <a:ext cx="310896" cy="223759"/>
           </a:xfrm>
           <a:prstGeom prst="rect">
             <a:avLst/>
@@ -34470,8 +34588,8 @@
         </p:nvSpPr>
         <p:spPr>
           <a:xfrm>
-            <a:off x="6565392" y="5064700"/>
-            <a:ext cx="1920240" cy="245274"/>
+            <a:off x="6565392" y="4806517"/>
+            <a:ext cx="1920240" cy="223759"/>
           </a:xfrm>
           <a:prstGeom prst="rect">
             <a:avLst/>
@@ -34509,8 +34627,8 @@
         </p:nvSpPr>
         <p:spPr>
           <a:xfrm>
-            <a:off x="9014745" y="5130924"/>
-            <a:ext cx="115539" cy="112826"/>
+            <a:off x="9014745" y="4866932"/>
+            <a:ext cx="115539" cy="102929"/>
           </a:xfrm>
           <a:prstGeom prst="rect">
             <a:avLst/>
@@ -34529,8 +34647,8 @@
         </p:nvSpPr>
         <p:spPr>
           <a:xfrm>
-            <a:off x="9756648" y="5064700"/>
-            <a:ext cx="777240" cy="245274"/>
+            <a:off x="9756648" y="4806517"/>
+            <a:ext cx="777240" cy="223759"/>
           </a:xfrm>
           <a:prstGeom prst="rect">
             <a:avLst/>
@@ -34568,8 +34686,8 @@
         </p:nvSpPr>
         <p:spPr>
           <a:xfrm>
-            <a:off x="10533888" y="5064700"/>
-            <a:ext cx="868680" cy="245274"/>
+            <a:off x="10533888" y="4806517"/>
+            <a:ext cx="868680" cy="223759"/>
           </a:xfrm>
           <a:prstGeom prst="rect">
             <a:avLst/>
@@ -34607,8 +34725,8 @@
         </p:nvSpPr>
         <p:spPr>
           <a:xfrm>
-            <a:off x="11457432" y="5110420"/>
-            <a:ext cx="54864" cy="153834"/>
+            <a:off x="11457432" y="4852237"/>
+            <a:ext cx="54864" cy="132319"/>
           </a:xfrm>
           <a:prstGeom prst="rect">
             <a:avLst/>
@@ -34627,8 +34745,8 @@
         </p:nvSpPr>
         <p:spPr>
           <a:xfrm>
-            <a:off x="6208776" y="5309975"/>
-            <a:ext cx="310896" cy="245274"/>
+            <a:off x="6208776" y="5030276"/>
+            <a:ext cx="310896" cy="223759"/>
           </a:xfrm>
           <a:prstGeom prst="rect">
             <a:avLst/>
@@ -34666,8 +34784,8 @@
         </p:nvSpPr>
         <p:spPr>
           <a:xfrm>
-            <a:off x="6565392" y="5309975"/>
-            <a:ext cx="1920240" cy="245274"/>
+            <a:off x="6565392" y="5030276"/>
+            <a:ext cx="1920240" cy="223759"/>
           </a:xfrm>
           <a:prstGeom prst="rect">
             <a:avLst/>
@@ -34705,8 +34823,8 @@
         </p:nvSpPr>
         <p:spPr>
           <a:xfrm>
-            <a:off x="8970632" y="5376199"/>
-            <a:ext cx="159652" cy="112826"/>
+            <a:off x="8970632" y="5090691"/>
+            <a:ext cx="159652" cy="102929"/>
           </a:xfrm>
           <a:prstGeom prst="rect">
             <a:avLst/>
@@ -34725,8 +34843,8 @@
         </p:nvSpPr>
         <p:spPr>
           <a:xfrm>
-            <a:off x="9756648" y="5309975"/>
-            <a:ext cx="777240" cy="245274"/>
+            <a:off x="9756648" y="5030276"/>
+            <a:ext cx="777240" cy="223759"/>
           </a:xfrm>
           <a:prstGeom prst="rect">
             <a:avLst/>
@@ -34764,8 +34882,8 @@
         </p:nvSpPr>
         <p:spPr>
           <a:xfrm>
-            <a:off x="10533888" y="5309975"/>
-            <a:ext cx="868680" cy="245274"/>
+            <a:off x="10533888" y="5030276"/>
+            <a:ext cx="868680" cy="223759"/>
           </a:xfrm>
           <a:prstGeom prst="rect">
             <a:avLst/>
@@ -34803,8 +34921,8 @@
         </p:nvSpPr>
         <p:spPr>
           <a:xfrm>
-            <a:off x="6208776" y="5555249"/>
-            <a:ext cx="310896" cy="245274"/>
+            <a:off x="6208776" y="5254035"/>
+            <a:ext cx="310896" cy="223759"/>
           </a:xfrm>
           <a:prstGeom prst="rect">
             <a:avLst/>
@@ -34842,8 +34960,8 @@
         </p:nvSpPr>
         <p:spPr>
           <a:xfrm>
-            <a:off x="6565392" y="5555249"/>
-            <a:ext cx="1920240" cy="245274"/>
+            <a:off x="6565392" y="5254035"/>
+            <a:ext cx="1920240" cy="223759"/>
           </a:xfrm>
           <a:prstGeom prst="rect">
             <a:avLst/>
@@ -34881,8 +34999,8 @@
         </p:nvSpPr>
         <p:spPr>
           <a:xfrm>
-            <a:off x="8965208" y="5621473"/>
-            <a:ext cx="165076" cy="112826"/>
+            <a:off x="8965208" y="5314450"/>
+            <a:ext cx="165076" cy="102929"/>
           </a:xfrm>
           <a:prstGeom prst="rect">
             <a:avLst/>
@@ -34901,8 +35019,8 @@
         </p:nvSpPr>
         <p:spPr>
           <a:xfrm>
-            <a:off x="9756648" y="5555249"/>
-            <a:ext cx="777240" cy="245274"/>
+            <a:off x="9756648" y="5254035"/>
+            <a:ext cx="777240" cy="223759"/>
           </a:xfrm>
           <a:prstGeom prst="rect">
             <a:avLst/>
@@ -34940,8 +35058,8 @@
         </p:nvSpPr>
         <p:spPr>
           <a:xfrm>
-            <a:off x="10533888" y="5555249"/>
-            <a:ext cx="868680" cy="245274"/>
+            <a:off x="10533888" y="5254035"/>
+            <a:ext cx="868680" cy="223759"/>
           </a:xfrm>
           <a:prstGeom prst="rect">
             <a:avLst/>
@@ -34979,8 +35097,8 @@
         </p:nvSpPr>
         <p:spPr>
           <a:xfrm>
-            <a:off x="6208776" y="5800523"/>
-            <a:ext cx="310896" cy="245274"/>
+            <a:off x="6208776" y="5477794"/>
+            <a:ext cx="310896" cy="223759"/>
           </a:xfrm>
           <a:prstGeom prst="rect">
             <a:avLst/>
@@ -35018,8 +35136,8 @@
         </p:nvSpPr>
         <p:spPr>
           <a:xfrm>
-            <a:off x="6565392" y="5800523"/>
-            <a:ext cx="1920240" cy="245274"/>
+            <a:off x="6565392" y="5477794"/>
+            <a:ext cx="1920240" cy="223759"/>
           </a:xfrm>
           <a:prstGeom prst="rect">
             <a:avLst/>
@@ -35057,8 +35175,8 @@
         </p:nvSpPr>
         <p:spPr>
           <a:xfrm>
-            <a:off x="8898849" y="5866747"/>
-            <a:ext cx="231435" cy="112826"/>
+            <a:off x="8898849" y="5538209"/>
+            <a:ext cx="231435" cy="102929"/>
           </a:xfrm>
           <a:prstGeom prst="rect">
             <a:avLst/>
@@ -35077,8 +35195,8 @@
         </p:nvSpPr>
         <p:spPr>
           <a:xfrm>
-            <a:off x="9756648" y="5800523"/>
-            <a:ext cx="777240" cy="245274"/>
+            <a:off x="9756648" y="5477794"/>
+            <a:ext cx="777240" cy="223759"/>
           </a:xfrm>
           <a:prstGeom prst="rect">
             <a:avLst/>
@@ -35116,8 +35234,8 @@
         </p:nvSpPr>
         <p:spPr>
           <a:xfrm>
-            <a:off x="10533888" y="5800523"/>
-            <a:ext cx="868680" cy="245274"/>
+            <a:off x="10533888" y="5477794"/>
+            <a:ext cx="868680" cy="223759"/>
           </a:xfrm>
           <a:prstGeom prst="rect">
             <a:avLst/>
@@ -35155,8 +35273,8 @@
         </p:nvSpPr>
         <p:spPr>
           <a:xfrm>
-            <a:off x="11457432" y="5846243"/>
-            <a:ext cx="54864" cy="153834"/>
+            <a:off x="11457432" y="5523514"/>
+            <a:ext cx="54864" cy="132319"/>
           </a:xfrm>
           <a:prstGeom prst="rect">
             <a:avLst/>
@@ -35176,7 +35294,7 @@
         <p:spPr>
           <a:xfrm>
             <a:off x="3574390" y="2121408"/>
-            <a:ext cx="10973" cy="4169664"/>
+            <a:ext cx="10973" cy="3803904"/>
           </a:xfrm>
           <a:prstGeom prst="rect">
             <a:avLst/>
@@ -35196,7 +35314,7 @@
         <p:spPr>
           <a:xfrm>
             <a:off x="9124798" y="2121408"/>
-            <a:ext cx="10973" cy="4169664"/>
+            <a:ext cx="10973" cy="3803904"/>
           </a:xfrm>
           <a:prstGeom prst="rect">
             <a:avLst/>
@@ -35216,7 +35334,7 @@
         <p:spPr>
           <a:xfrm>
             <a:off x="6085332" y="2121408"/>
-            <a:ext cx="10973" cy="4169664"/>
+            <a:ext cx="10973" cy="3803904"/>
           </a:xfrm>
           <a:prstGeom prst="rect">
             <a:avLst/>
@@ -35226,6 +35344,65 @@
           </a:solidFill>
           <a:ln/>
         </p:spPr>
+      </p:sp>
+      <p:sp>
+        <p:nvSpPr>
+          <p:cNvPr id="190" name="Shape 187"/>
+          <p:cNvSpPr/>
+          <p:nvPr/>
+        </p:nvSpPr>
+        <p:spPr>
+          <a:xfrm>
+            <a:off x="457200" y="6126480"/>
+            <a:ext cx="11274552" cy="371856"/>
+          </a:xfrm>
+          <a:prstGeom prst="rect">
+            <a:avLst/>
+          </a:prstGeom>
+          <a:solidFill>
+            <a:srgbClr val="E6F6EE"/>
+          </a:solidFill>
+          <a:ln/>
+        </p:spPr>
+      </p:sp>
+      <p:sp>
+        <p:nvSpPr>
+          <p:cNvPr id="191" name="Text 188"/>
+          <p:cNvSpPr txBox="1"/>
+          <p:nvPr/>
+        </p:nvSpPr>
+        <p:spPr>
+          <a:xfrm>
+            <a:off x="658368" y="6144768"/>
+            <a:ext cx="10927080" cy="335280"/>
+          </a:xfrm>
+          <a:prstGeom prst="rect">
+            <a:avLst/>
+          </a:prstGeom>
+          <a:noFill/>
+          <a:ln/>
+        </p:spPr>
+        <p:txBody>
+          <a:bodyPr wrap="square" lIns="0" tIns="0" rIns="0" bIns="0" rtlCol="0" anchor="ctr"/>
+          <a:lstStyle/>
+          <a:p>
+            <a:pPr indent="0" marL="0">
+              <a:buNone/>
+            </a:pPr>
+            <a:r>
+              <a:rPr lang="en-US" sz="1600" b="1" dirty="0">
+                <a:solidFill>
+                  <a:srgbClr val="0B7A4A"/>
+                </a:solidFill>
+                <a:latin typeface="Inter" pitchFamily="34" charset="0"/>
+                <a:ea typeface="Inter" pitchFamily="34" charset="-122"/>
+                <a:cs typeface="Inter" pitchFamily="34" charset="-120"/>
+              </a:rPr>
+              <a:t>18 of 33 stores grew warranty gross.</a:t>
+            </a:r>
+            <a:endParaRPr lang="en-US" sz="1600" dirty="0"/>
+          </a:p>
+        </p:txBody>
       </p:sp>
     </p:spTree>
   </p:cSld>
@@ -39183,7 +39360,7 @@
         <p:spPr>
           <a:xfrm>
             <a:off x="457200" y="1207008"/>
-            <a:ext cx="11274552" cy="5148072"/>
+            <a:ext cx="11274552" cy="4782312"/>
           </a:xfrm>
           <a:prstGeom prst="rect">
             <a:avLst/>
@@ -39360,7 +39537,7 @@
         <p:spPr>
           <a:xfrm>
             <a:off x="658368" y="1847088"/>
-            <a:ext cx="310896" cy="261411"/>
+            <a:ext cx="310896" cy="239896"/>
           </a:xfrm>
           <a:prstGeom prst="rect">
             <a:avLst/>
@@ -39399,7 +39576,7 @@
         <p:spPr>
           <a:xfrm>
             <a:off x="1014984" y="1847088"/>
-            <a:ext cx="1920240" cy="261411"/>
+            <a:ext cx="1920240" cy="239896"/>
           </a:xfrm>
           <a:prstGeom prst="rect">
             <a:avLst/>
@@ -39437,8 +39614,8 @@
         </p:nvSpPr>
         <p:spPr>
           <a:xfrm>
-            <a:off x="3008376" y="1912441"/>
-            <a:ext cx="1691640" cy="130705"/>
+            <a:off x="3008376" y="1907062"/>
+            <a:ext cx="1691640" cy="119948"/>
           </a:xfrm>
           <a:prstGeom prst="rect">
             <a:avLst/>
@@ -39458,7 +39635,7 @@
         <p:spPr>
           <a:xfrm>
             <a:off x="4754880" y="1847088"/>
-            <a:ext cx="1143000" cy="261411"/>
+            <a:ext cx="1143000" cy="239896"/>
           </a:xfrm>
           <a:prstGeom prst="rect">
             <a:avLst/>
@@ -39496,8 +39673,8 @@
         </p:nvSpPr>
         <p:spPr>
           <a:xfrm>
-            <a:off x="658368" y="2108499"/>
-            <a:ext cx="310896" cy="261411"/>
+            <a:off x="658368" y="2086984"/>
+            <a:ext cx="310896" cy="239896"/>
           </a:xfrm>
           <a:prstGeom prst="rect">
             <a:avLst/>
@@ -39535,8 +39712,8 @@
         </p:nvSpPr>
         <p:spPr>
           <a:xfrm>
-            <a:off x="1014984" y="2108499"/>
-            <a:ext cx="1920240" cy="261411"/>
+            <a:off x="1014984" y="2086984"/>
+            <a:ext cx="1920240" cy="239896"/>
           </a:xfrm>
           <a:prstGeom prst="rect">
             <a:avLst/>
@@ -39574,8 +39751,8 @@
         </p:nvSpPr>
         <p:spPr>
           <a:xfrm>
-            <a:off x="3008376" y="2173852"/>
-            <a:ext cx="1505642" cy="130705"/>
+            <a:off x="3008376" y="2146957"/>
+            <a:ext cx="1505642" cy="119948"/>
           </a:xfrm>
           <a:prstGeom prst="rect">
             <a:avLst/>
@@ -39594,8 +39771,8 @@
         </p:nvSpPr>
         <p:spPr>
           <a:xfrm>
-            <a:off x="4754880" y="2108499"/>
-            <a:ext cx="1143000" cy="261411"/>
+            <a:off x="4754880" y="2086984"/>
+            <a:ext cx="1143000" cy="239896"/>
           </a:xfrm>
           <a:prstGeom prst="rect">
             <a:avLst/>
@@ -39633,8 +39810,8 @@
         </p:nvSpPr>
         <p:spPr>
           <a:xfrm>
-            <a:off x="658368" y="2369910"/>
-            <a:ext cx="310896" cy="261411"/>
+            <a:off x="658368" y="2326879"/>
+            <a:ext cx="310896" cy="239896"/>
           </a:xfrm>
           <a:prstGeom prst="rect">
             <a:avLst/>
@@ -39672,8 +39849,8 @@
         </p:nvSpPr>
         <p:spPr>
           <a:xfrm>
-            <a:off x="1014984" y="2369910"/>
-            <a:ext cx="1920240" cy="261411"/>
+            <a:off x="1014984" y="2326879"/>
+            <a:ext cx="1920240" cy="239896"/>
           </a:xfrm>
           <a:prstGeom prst="rect">
             <a:avLst/>
@@ -39711,8 +39888,8 @@
         </p:nvSpPr>
         <p:spPr>
           <a:xfrm>
-            <a:off x="3008376" y="2435262"/>
-            <a:ext cx="1441456" cy="130705"/>
+            <a:off x="3008376" y="2386853"/>
+            <a:ext cx="1441456" cy="119948"/>
           </a:xfrm>
           <a:prstGeom prst="rect">
             <a:avLst/>
@@ -39731,8 +39908,8 @@
         </p:nvSpPr>
         <p:spPr>
           <a:xfrm>
-            <a:off x="4754880" y="2369910"/>
-            <a:ext cx="1143000" cy="261411"/>
+            <a:off x="4754880" y="2326879"/>
+            <a:ext cx="1143000" cy="239896"/>
           </a:xfrm>
           <a:prstGeom prst="rect">
             <a:avLst/>
@@ -39770,8 +39947,8 @@
         </p:nvSpPr>
         <p:spPr>
           <a:xfrm>
-            <a:off x="658368" y="2631320"/>
-            <a:ext cx="310896" cy="261411"/>
+            <a:off x="658368" y="2566775"/>
+            <a:ext cx="310896" cy="239896"/>
           </a:xfrm>
           <a:prstGeom prst="rect">
             <a:avLst/>
@@ -39809,8 +39986,8 @@
         </p:nvSpPr>
         <p:spPr>
           <a:xfrm>
-            <a:off x="1014984" y="2631320"/>
-            <a:ext cx="1920240" cy="261411"/>
+            <a:off x="1014984" y="2566775"/>
+            <a:ext cx="1920240" cy="239896"/>
           </a:xfrm>
           <a:prstGeom prst="rect">
             <a:avLst/>
@@ -39848,8 +40025,8 @@
         </p:nvSpPr>
         <p:spPr>
           <a:xfrm>
-            <a:off x="3008376" y="2696673"/>
-            <a:ext cx="1284359" cy="130705"/>
+            <a:off x="3008376" y="2626748"/>
+            <a:ext cx="1284359" cy="119948"/>
           </a:xfrm>
           <a:prstGeom prst="rect">
             <a:avLst/>
@@ -39868,8 +40045,8 @@
         </p:nvSpPr>
         <p:spPr>
           <a:xfrm>
-            <a:off x="4754880" y="2631320"/>
-            <a:ext cx="1143000" cy="261411"/>
+            <a:off x="4754880" y="2566775"/>
+            <a:ext cx="1143000" cy="239896"/>
           </a:xfrm>
           <a:prstGeom prst="rect">
             <a:avLst/>
@@ -39907,8 +40084,8 @@
         </p:nvSpPr>
         <p:spPr>
           <a:xfrm>
-            <a:off x="658368" y="2892731"/>
-            <a:ext cx="310896" cy="261411"/>
+            <a:off x="658368" y="2806670"/>
+            <a:ext cx="310896" cy="239896"/>
           </a:xfrm>
           <a:prstGeom prst="rect">
             <a:avLst/>
@@ -39946,8 +40123,8 @@
         </p:nvSpPr>
         <p:spPr>
           <a:xfrm>
-            <a:off x="1014984" y="2892731"/>
-            <a:ext cx="1920240" cy="261411"/>
+            <a:off x="1014984" y="2806670"/>
+            <a:ext cx="1920240" cy="239896"/>
           </a:xfrm>
           <a:prstGeom prst="rect">
             <a:avLst/>
@@ -39985,8 +40162,8 @@
         </p:nvSpPr>
         <p:spPr>
           <a:xfrm>
-            <a:off x="3008376" y="2958084"/>
-            <a:ext cx="1250858" cy="130705"/>
+            <a:off x="3008376" y="2866644"/>
+            <a:ext cx="1250858" cy="119948"/>
           </a:xfrm>
           <a:prstGeom prst="rect">
             <a:avLst/>
@@ -40005,8 +40182,8 @@
         </p:nvSpPr>
         <p:spPr>
           <a:xfrm>
-            <a:off x="4754880" y="2892731"/>
-            <a:ext cx="1143000" cy="261411"/>
+            <a:off x="4754880" y="2806670"/>
+            <a:ext cx="1143000" cy="239896"/>
           </a:xfrm>
           <a:prstGeom prst="rect">
             <a:avLst/>
@@ -40044,8 +40221,8 @@
         </p:nvSpPr>
         <p:spPr>
           <a:xfrm>
-            <a:off x="658368" y="3154142"/>
-            <a:ext cx="310896" cy="261411"/>
+            <a:off x="658368" y="3046566"/>
+            <a:ext cx="310896" cy="239896"/>
           </a:xfrm>
           <a:prstGeom prst="rect">
             <a:avLst/>
@@ -40083,8 +40260,8 @@
         </p:nvSpPr>
         <p:spPr>
           <a:xfrm>
-            <a:off x="1014984" y="3154142"/>
-            <a:ext cx="1920240" cy="261411"/>
+            <a:off x="1014984" y="3046566"/>
+            <a:ext cx="1920240" cy="239896"/>
           </a:xfrm>
           <a:prstGeom prst="rect">
             <a:avLst/>
@@ -40122,8 +40299,8 @@
         </p:nvSpPr>
         <p:spPr>
           <a:xfrm>
-            <a:off x="3008376" y="3219495"/>
-            <a:ext cx="1187628" cy="130705"/>
+            <a:off x="3008376" y="3106540"/>
+            <a:ext cx="1187628" cy="119948"/>
           </a:xfrm>
           <a:prstGeom prst="rect">
             <a:avLst/>
@@ -40142,8 +40319,8 @@
         </p:nvSpPr>
         <p:spPr>
           <a:xfrm>
-            <a:off x="4754880" y="3154142"/>
-            <a:ext cx="1143000" cy="261411"/>
+            <a:off x="4754880" y="3046566"/>
+            <a:ext cx="1143000" cy="239896"/>
           </a:xfrm>
           <a:prstGeom prst="rect">
             <a:avLst/>
@@ -40181,8 +40358,8 @@
         </p:nvSpPr>
         <p:spPr>
           <a:xfrm>
-            <a:off x="658368" y="3415553"/>
-            <a:ext cx="310896" cy="261411"/>
+            <a:off x="658368" y="3286461"/>
+            <a:ext cx="310896" cy="239896"/>
           </a:xfrm>
           <a:prstGeom prst="rect">
             <a:avLst/>
@@ -40220,8 +40397,8 @@
         </p:nvSpPr>
         <p:spPr>
           <a:xfrm>
-            <a:off x="1014984" y="3415553"/>
-            <a:ext cx="1920240" cy="261411"/>
+            <a:off x="1014984" y="3286461"/>
+            <a:ext cx="1920240" cy="239896"/>
           </a:xfrm>
           <a:prstGeom prst="rect">
             <a:avLst/>
@@ -40259,8 +40436,8 @@
         </p:nvSpPr>
         <p:spPr>
           <a:xfrm>
-            <a:off x="3008376" y="3480906"/>
-            <a:ext cx="1163222" cy="130705"/>
+            <a:off x="3008376" y="3346435"/>
+            <a:ext cx="1163222" cy="119948"/>
           </a:xfrm>
           <a:prstGeom prst="rect">
             <a:avLst/>
@@ -40279,8 +40456,8 @@
         </p:nvSpPr>
         <p:spPr>
           <a:xfrm>
-            <a:off x="4754880" y="3415553"/>
-            <a:ext cx="1143000" cy="261411"/>
+            <a:off x="4754880" y="3286461"/>
+            <a:ext cx="1143000" cy="239896"/>
           </a:xfrm>
           <a:prstGeom prst="rect">
             <a:avLst/>
@@ -40318,8 +40495,8 @@
         </p:nvSpPr>
         <p:spPr>
           <a:xfrm>
-            <a:off x="658368" y="3676964"/>
-            <a:ext cx="310896" cy="261411"/>
+            <a:off x="658368" y="3526357"/>
+            <a:ext cx="310896" cy="239896"/>
           </a:xfrm>
           <a:prstGeom prst="rect">
             <a:avLst/>
@@ -40357,8 +40534,8 @@
         </p:nvSpPr>
         <p:spPr>
           <a:xfrm>
-            <a:off x="1014984" y="3676964"/>
-            <a:ext cx="1920240" cy="261411"/>
+            <a:off x="1014984" y="3526357"/>
+            <a:ext cx="1920240" cy="239896"/>
           </a:xfrm>
           <a:prstGeom prst="rect">
             <a:avLst/>
@@ -40396,8 +40573,8 @@
         </p:nvSpPr>
         <p:spPr>
           <a:xfrm>
-            <a:off x="3008376" y="3742316"/>
-            <a:ext cx="1148321" cy="130705"/>
+            <a:off x="3008376" y="3586331"/>
+            <a:ext cx="1148321" cy="119948"/>
           </a:xfrm>
           <a:prstGeom prst="rect">
             <a:avLst/>
@@ -40416,8 +40593,8 @@
         </p:nvSpPr>
         <p:spPr>
           <a:xfrm>
-            <a:off x="4754880" y="3676964"/>
-            <a:ext cx="1143000" cy="261411"/>
+            <a:off x="4754880" y="3526357"/>
+            <a:ext cx="1143000" cy="239896"/>
           </a:xfrm>
           <a:prstGeom prst="rect">
             <a:avLst/>
@@ -40455,8 +40632,8 @@
         </p:nvSpPr>
         <p:spPr>
           <a:xfrm>
-            <a:off x="658368" y="3938375"/>
-            <a:ext cx="310896" cy="261411"/>
+            <a:off x="658368" y="3766252"/>
+            <a:ext cx="310896" cy="239896"/>
           </a:xfrm>
           <a:prstGeom prst="rect">
             <a:avLst/>
@@ -40494,8 +40671,8 @@
         </p:nvSpPr>
         <p:spPr>
           <a:xfrm>
-            <a:off x="1014984" y="3938375"/>
-            <a:ext cx="1920240" cy="261411"/>
+            <a:off x="1014984" y="3766252"/>
+            <a:ext cx="1920240" cy="239896"/>
           </a:xfrm>
           <a:prstGeom prst="rect">
             <a:avLst/>
@@ -40533,8 +40710,8 @@
         </p:nvSpPr>
         <p:spPr>
           <a:xfrm>
-            <a:off x="3008376" y="4003727"/>
-            <a:ext cx="1147249" cy="130705"/>
+            <a:off x="3008376" y="3826226"/>
+            <a:ext cx="1147249" cy="119948"/>
           </a:xfrm>
           <a:prstGeom prst="rect">
             <a:avLst/>
@@ -40553,8 +40730,8 @@
         </p:nvSpPr>
         <p:spPr>
           <a:xfrm>
-            <a:off x="4754880" y="3938375"/>
-            <a:ext cx="1143000" cy="261411"/>
+            <a:off x="4754880" y="3766252"/>
+            <a:ext cx="1143000" cy="239896"/>
           </a:xfrm>
           <a:prstGeom prst="rect">
             <a:avLst/>
@@ -40592,8 +40769,8 @@
         </p:nvSpPr>
         <p:spPr>
           <a:xfrm>
-            <a:off x="658368" y="4199785"/>
-            <a:ext cx="310896" cy="261411"/>
+            <a:off x="658368" y="4006148"/>
+            <a:ext cx="310896" cy="239896"/>
           </a:xfrm>
           <a:prstGeom prst="rect">
             <a:avLst/>
@@ -40631,8 +40808,8 @@
         </p:nvSpPr>
         <p:spPr>
           <a:xfrm>
-            <a:off x="1014984" y="4199785"/>
-            <a:ext cx="1920240" cy="261411"/>
+            <a:off x="1014984" y="4006148"/>
+            <a:ext cx="1920240" cy="239896"/>
           </a:xfrm>
           <a:prstGeom prst="rect">
             <a:avLst/>
@@ -40670,8 +40847,8 @@
         </p:nvSpPr>
         <p:spPr>
           <a:xfrm>
-            <a:off x="3008376" y="4265138"/>
-            <a:ext cx="1133466" cy="130705"/>
+            <a:off x="3008376" y="4066122"/>
+            <a:ext cx="1133466" cy="119948"/>
           </a:xfrm>
           <a:prstGeom prst="rect">
             <a:avLst/>
@@ -40690,8 +40867,8 @@
         </p:nvSpPr>
         <p:spPr>
           <a:xfrm>
-            <a:off x="4754880" y="4199785"/>
-            <a:ext cx="1143000" cy="261411"/>
+            <a:off x="4754880" y="4006148"/>
+            <a:ext cx="1143000" cy="239896"/>
           </a:xfrm>
           <a:prstGeom prst="rect">
             <a:avLst/>
@@ -40729,8 +40906,8 @@
         </p:nvSpPr>
         <p:spPr>
           <a:xfrm>
-            <a:off x="658368" y="4461196"/>
-            <a:ext cx="310896" cy="261411"/>
+            <a:off x="658368" y="4246043"/>
+            <a:ext cx="310896" cy="239896"/>
           </a:xfrm>
           <a:prstGeom prst="rect">
             <a:avLst/>
@@ -40768,8 +40945,8 @@
         </p:nvSpPr>
         <p:spPr>
           <a:xfrm>
-            <a:off x="1014984" y="4461196"/>
-            <a:ext cx="1920240" cy="261411"/>
+            <a:off x="1014984" y="4246043"/>
+            <a:ext cx="1920240" cy="239896"/>
           </a:xfrm>
           <a:prstGeom prst="rect">
             <a:avLst/>
@@ -40807,8 +40984,8 @@
         </p:nvSpPr>
         <p:spPr>
           <a:xfrm>
-            <a:off x="3008376" y="4526549"/>
-            <a:ext cx="1133414" cy="130705"/>
+            <a:off x="3008376" y="4306017"/>
+            <a:ext cx="1133414" cy="119948"/>
           </a:xfrm>
           <a:prstGeom prst="rect">
             <a:avLst/>
@@ -40827,8 +41004,8 @@
         </p:nvSpPr>
         <p:spPr>
           <a:xfrm>
-            <a:off x="4754880" y="4461196"/>
-            <a:ext cx="1143000" cy="261411"/>
+            <a:off x="4754880" y="4246043"/>
+            <a:ext cx="1143000" cy="239896"/>
           </a:xfrm>
           <a:prstGeom prst="rect">
             <a:avLst/>
@@ -40866,8 +41043,8 @@
         </p:nvSpPr>
         <p:spPr>
           <a:xfrm>
-            <a:off x="658368" y="4722607"/>
-            <a:ext cx="310896" cy="261411"/>
+            <a:off x="658368" y="4485939"/>
+            <a:ext cx="310896" cy="239896"/>
           </a:xfrm>
           <a:prstGeom prst="rect">
             <a:avLst/>
@@ -40905,8 +41082,8 @@
         </p:nvSpPr>
         <p:spPr>
           <a:xfrm>
-            <a:off x="1014984" y="4722607"/>
-            <a:ext cx="1920240" cy="261411"/>
+            <a:off x="1014984" y="4485939"/>
+            <a:ext cx="1920240" cy="239896"/>
           </a:xfrm>
           <a:prstGeom prst="rect">
             <a:avLst/>
@@ -40944,8 +41121,8 @@
         </p:nvSpPr>
         <p:spPr>
           <a:xfrm>
-            <a:off x="3008376" y="4787960"/>
-            <a:ext cx="1082147" cy="130705"/>
+            <a:off x="3008376" y="4545913"/>
+            <a:ext cx="1082147" cy="119948"/>
           </a:xfrm>
           <a:prstGeom prst="rect">
             <a:avLst/>
@@ -40964,8 +41141,8 @@
         </p:nvSpPr>
         <p:spPr>
           <a:xfrm>
-            <a:off x="4754880" y="4722607"/>
-            <a:ext cx="1143000" cy="261411"/>
+            <a:off x="4754880" y="4485939"/>
+            <a:ext cx="1143000" cy="239896"/>
           </a:xfrm>
           <a:prstGeom prst="rect">
             <a:avLst/>
@@ -41003,8 +41180,8 @@
         </p:nvSpPr>
         <p:spPr>
           <a:xfrm>
-            <a:off x="658368" y="4984018"/>
-            <a:ext cx="310896" cy="261411"/>
+            <a:off x="658368" y="4725834"/>
+            <a:ext cx="310896" cy="239896"/>
           </a:xfrm>
           <a:prstGeom prst="rect">
             <a:avLst/>
@@ -41042,8 +41219,8 @@
         </p:nvSpPr>
         <p:spPr>
           <a:xfrm>
-            <a:off x="1014984" y="4984018"/>
-            <a:ext cx="1920240" cy="261411"/>
+            <a:off x="1014984" y="4725834"/>
+            <a:ext cx="1920240" cy="239896"/>
           </a:xfrm>
           <a:prstGeom prst="rect">
             <a:avLst/>
@@ -41081,8 +41258,8 @@
         </p:nvSpPr>
         <p:spPr>
           <a:xfrm>
-            <a:off x="3008376" y="5049371"/>
-            <a:ext cx="1070003" cy="130705"/>
+            <a:off x="3008376" y="4785808"/>
+            <a:ext cx="1070003" cy="119948"/>
           </a:xfrm>
           <a:prstGeom prst="rect">
             <a:avLst/>
@@ -41101,8 +41278,8 @@
         </p:nvSpPr>
         <p:spPr>
           <a:xfrm>
-            <a:off x="4754880" y="4984018"/>
-            <a:ext cx="1143000" cy="261411"/>
+            <a:off x="4754880" y="4725834"/>
+            <a:ext cx="1143000" cy="239896"/>
           </a:xfrm>
           <a:prstGeom prst="rect">
             <a:avLst/>
@@ -41140,8 +41317,8 @@
         </p:nvSpPr>
         <p:spPr>
           <a:xfrm>
-            <a:off x="658368" y="5245429"/>
-            <a:ext cx="310896" cy="261411"/>
+            <a:off x="658368" y="4965730"/>
+            <a:ext cx="310896" cy="239896"/>
           </a:xfrm>
           <a:prstGeom prst="rect">
             <a:avLst/>
@@ -41179,8 +41356,8 @@
         </p:nvSpPr>
         <p:spPr>
           <a:xfrm>
-            <a:off x="1014984" y="5245429"/>
-            <a:ext cx="1920240" cy="261411"/>
+            <a:off x="1014984" y="4965730"/>
+            <a:ext cx="1920240" cy="239896"/>
           </a:xfrm>
           <a:prstGeom prst="rect">
             <a:avLst/>
@@ -41218,8 +41395,8 @@
         </p:nvSpPr>
         <p:spPr>
           <a:xfrm>
-            <a:off x="3008376" y="5310781"/>
-            <a:ext cx="1068869" cy="130705"/>
+            <a:off x="3008376" y="5025704"/>
+            <a:ext cx="1068869" cy="119948"/>
           </a:xfrm>
           <a:prstGeom prst="rect">
             <a:avLst/>
@@ -41238,8 +41415,8 @@
         </p:nvSpPr>
         <p:spPr>
           <a:xfrm>
-            <a:off x="4754880" y="5245429"/>
-            <a:ext cx="1143000" cy="261411"/>
+            <a:off x="4754880" y="4965730"/>
+            <a:ext cx="1143000" cy="239896"/>
           </a:xfrm>
           <a:prstGeom prst="rect">
             <a:avLst/>
@@ -41277,8 +41454,8 @@
         </p:nvSpPr>
         <p:spPr>
           <a:xfrm>
-            <a:off x="658368" y="5506840"/>
-            <a:ext cx="310896" cy="261411"/>
+            <a:off x="658368" y="5205625"/>
+            <a:ext cx="310896" cy="239896"/>
           </a:xfrm>
           <a:prstGeom prst="rect">
             <a:avLst/>
@@ -41316,8 +41493,8 @@
         </p:nvSpPr>
         <p:spPr>
           <a:xfrm>
-            <a:off x="1014984" y="5506840"/>
-            <a:ext cx="1920240" cy="261411"/>
+            <a:off x="1014984" y="5205625"/>
+            <a:ext cx="1920240" cy="239896"/>
           </a:xfrm>
           <a:prstGeom prst="rect">
             <a:avLst/>
@@ -41355,8 +41532,8 @@
         </p:nvSpPr>
         <p:spPr>
           <a:xfrm>
-            <a:off x="3008376" y="5572192"/>
-            <a:ext cx="1018700" cy="130705"/>
+            <a:off x="3008376" y="5265599"/>
+            <a:ext cx="1018700" cy="119948"/>
           </a:xfrm>
           <a:prstGeom prst="rect">
             <a:avLst/>
@@ -41375,8 +41552,8 @@
         </p:nvSpPr>
         <p:spPr>
           <a:xfrm>
-            <a:off x="4754880" y="5506840"/>
-            <a:ext cx="1143000" cy="261411"/>
+            <a:off x="4754880" y="5205625"/>
+            <a:ext cx="1143000" cy="239896"/>
           </a:xfrm>
           <a:prstGeom prst="rect">
             <a:avLst/>
@@ -41414,8 +41591,8 @@
         </p:nvSpPr>
         <p:spPr>
           <a:xfrm>
-            <a:off x="658368" y="5768250"/>
-            <a:ext cx="310896" cy="261411"/>
+            <a:off x="658368" y="5445521"/>
+            <a:ext cx="310896" cy="239896"/>
           </a:xfrm>
           <a:prstGeom prst="rect">
             <a:avLst/>
@@ -41453,8 +41630,8 @@
         </p:nvSpPr>
         <p:spPr>
           <a:xfrm>
-            <a:off x="1014984" y="5768250"/>
-            <a:ext cx="1920240" cy="261411"/>
+            <a:off x="1014984" y="5445521"/>
+            <a:ext cx="1920240" cy="239896"/>
           </a:xfrm>
           <a:prstGeom prst="rect">
             <a:avLst/>
@@ -41492,8 +41669,8 @@
         </p:nvSpPr>
         <p:spPr>
           <a:xfrm>
-            <a:off x="3008376" y="5833603"/>
-            <a:ext cx="1002048" cy="130705"/>
+            <a:off x="3008376" y="5505495"/>
+            <a:ext cx="1002048" cy="119948"/>
           </a:xfrm>
           <a:prstGeom prst="rect">
             <a:avLst/>
@@ -41512,8 +41689,8 @@
         </p:nvSpPr>
         <p:spPr>
           <a:xfrm>
-            <a:off x="4754880" y="5768250"/>
-            <a:ext cx="1143000" cy="261411"/>
+            <a:off x="4754880" y="5445521"/>
+            <a:ext cx="1143000" cy="239896"/>
           </a:xfrm>
           <a:prstGeom prst="rect">
             <a:avLst/>
@@ -41551,8 +41728,8 @@
         </p:nvSpPr>
         <p:spPr>
           <a:xfrm>
-            <a:off x="658368" y="6029661"/>
-            <a:ext cx="310896" cy="261411"/>
+            <a:off x="658368" y="5685416"/>
+            <a:ext cx="310896" cy="239896"/>
           </a:xfrm>
           <a:prstGeom prst="rect">
             <a:avLst/>
@@ -41590,8 +41767,8 @@
         </p:nvSpPr>
         <p:spPr>
           <a:xfrm>
-            <a:off x="1014984" y="6029661"/>
-            <a:ext cx="1920240" cy="261411"/>
+            <a:off x="1014984" y="5685416"/>
+            <a:ext cx="1920240" cy="239896"/>
           </a:xfrm>
           <a:prstGeom prst="rect">
             <a:avLst/>
@@ -41629,8 +41806,8 @@
         </p:nvSpPr>
         <p:spPr>
           <a:xfrm>
-            <a:off x="3008376" y="6095014"/>
-            <a:ext cx="989419" cy="130705"/>
+            <a:off x="3008376" y="5745390"/>
+            <a:ext cx="989419" cy="119948"/>
           </a:xfrm>
           <a:prstGeom prst="rect">
             <a:avLst/>
@@ -41649,8 +41826,8 @@
         </p:nvSpPr>
         <p:spPr>
           <a:xfrm>
-            <a:off x="4754880" y="6029661"/>
-            <a:ext cx="1143000" cy="261411"/>
+            <a:off x="4754880" y="5685416"/>
+            <a:ext cx="1143000" cy="239896"/>
           </a:xfrm>
           <a:prstGeom prst="rect">
             <a:avLst/>
@@ -41689,7 +41866,7 @@
         <p:spPr>
           <a:xfrm>
             <a:off x="6208776" y="1847088"/>
-            <a:ext cx="310896" cy="261411"/>
+            <a:ext cx="310896" cy="239896"/>
           </a:xfrm>
           <a:prstGeom prst="rect">
             <a:avLst/>
@@ -41728,7 +41905,7 @@
         <p:spPr>
           <a:xfrm>
             <a:off x="6565392" y="1847088"/>
-            <a:ext cx="1920240" cy="261411"/>
+            <a:ext cx="1920240" cy="239896"/>
           </a:xfrm>
           <a:prstGeom prst="rect">
             <a:avLst/>
@@ -41766,8 +41943,8 @@
         </p:nvSpPr>
         <p:spPr>
           <a:xfrm>
-            <a:off x="8558784" y="1912441"/>
-            <a:ext cx="988968" cy="130705"/>
+            <a:off x="8558784" y="1907062"/>
+            <a:ext cx="988968" cy="119948"/>
           </a:xfrm>
           <a:prstGeom prst="rect">
             <a:avLst/>
@@ -41787,7 +41964,7 @@
         <p:spPr>
           <a:xfrm>
             <a:off x="10305288" y="1847088"/>
-            <a:ext cx="1143000" cy="261411"/>
+            <a:ext cx="1143000" cy="239896"/>
           </a:xfrm>
           <a:prstGeom prst="rect">
             <a:avLst/>
@@ -41825,8 +42002,8 @@
         </p:nvSpPr>
         <p:spPr>
           <a:xfrm>
-            <a:off x="6208776" y="2108499"/>
-            <a:ext cx="310896" cy="261411"/>
+            <a:off x="6208776" y="2086984"/>
+            <a:ext cx="310896" cy="239896"/>
           </a:xfrm>
           <a:prstGeom prst="rect">
             <a:avLst/>
@@ -41864,8 +42041,8 @@
         </p:nvSpPr>
         <p:spPr>
           <a:xfrm>
-            <a:off x="6565392" y="2108499"/>
-            <a:ext cx="1920240" cy="261411"/>
+            <a:off x="6565392" y="2086984"/>
+            <a:ext cx="1920240" cy="239896"/>
           </a:xfrm>
           <a:prstGeom prst="rect">
             <a:avLst/>
@@ -41903,8 +42080,8 @@
         </p:nvSpPr>
         <p:spPr>
           <a:xfrm>
-            <a:off x="8558784" y="2173852"/>
-            <a:ext cx="972705" cy="130705"/>
+            <a:off x="8558784" y="2146957"/>
+            <a:ext cx="972705" cy="119948"/>
           </a:xfrm>
           <a:prstGeom prst="rect">
             <a:avLst/>
@@ -41923,8 +42100,8 @@
         </p:nvSpPr>
         <p:spPr>
           <a:xfrm>
-            <a:off x="10305288" y="2108499"/>
-            <a:ext cx="1143000" cy="261411"/>
+            <a:off x="10305288" y="2086984"/>
+            <a:ext cx="1143000" cy="239896"/>
           </a:xfrm>
           <a:prstGeom prst="rect">
             <a:avLst/>
@@ -41962,8 +42139,8 @@
         </p:nvSpPr>
         <p:spPr>
           <a:xfrm>
-            <a:off x="6208776" y="2369910"/>
-            <a:ext cx="310896" cy="261411"/>
+            <a:off x="6208776" y="2326879"/>
+            <a:ext cx="310896" cy="239896"/>
           </a:xfrm>
           <a:prstGeom prst="rect">
             <a:avLst/>
@@ -42001,8 +42178,8 @@
         </p:nvSpPr>
         <p:spPr>
           <a:xfrm>
-            <a:off x="6565392" y="2369910"/>
-            <a:ext cx="1920240" cy="261411"/>
+            <a:off x="6565392" y="2326879"/>
+            <a:ext cx="1920240" cy="239896"/>
           </a:xfrm>
           <a:prstGeom prst="rect">
             <a:avLst/>
@@ -42040,8 +42217,8 @@
         </p:nvSpPr>
         <p:spPr>
           <a:xfrm>
-            <a:off x="8558784" y="2435262"/>
-            <a:ext cx="967216" cy="130705"/>
+            <a:off x="8558784" y="2386853"/>
+            <a:ext cx="967216" cy="119948"/>
           </a:xfrm>
           <a:prstGeom prst="rect">
             <a:avLst/>
@@ -42060,8 +42237,8 @@
         </p:nvSpPr>
         <p:spPr>
           <a:xfrm>
-            <a:off x="10305288" y="2369910"/>
-            <a:ext cx="1143000" cy="261411"/>
+            <a:off x="10305288" y="2326879"/>
+            <a:ext cx="1143000" cy="239896"/>
           </a:xfrm>
           <a:prstGeom prst="rect">
             <a:avLst/>
@@ -42099,8 +42276,8 @@
         </p:nvSpPr>
         <p:spPr>
           <a:xfrm>
-            <a:off x="6208776" y="2631320"/>
-            <a:ext cx="310896" cy="261411"/>
+            <a:off x="6208776" y="2566775"/>
+            <a:ext cx="310896" cy="239896"/>
           </a:xfrm>
           <a:prstGeom prst="rect">
             <a:avLst/>
@@ -42138,8 +42315,8 @@
         </p:nvSpPr>
         <p:spPr>
           <a:xfrm>
-            <a:off x="6565392" y="2631320"/>
-            <a:ext cx="1920240" cy="261411"/>
+            <a:off x="6565392" y="2566775"/>
+            <a:ext cx="1920240" cy="239896"/>
           </a:xfrm>
           <a:prstGeom prst="rect">
             <a:avLst/>
@@ -42177,8 +42354,8 @@
         </p:nvSpPr>
         <p:spPr>
           <a:xfrm>
-            <a:off x="8558784" y="2696673"/>
-            <a:ext cx="950479" cy="130705"/>
+            <a:off x="8558784" y="2626748"/>
+            <a:ext cx="950479" cy="119948"/>
           </a:xfrm>
           <a:prstGeom prst="rect">
             <a:avLst/>
@@ -42197,8 +42374,8 @@
         </p:nvSpPr>
         <p:spPr>
           <a:xfrm>
-            <a:off x="10305288" y="2631320"/>
-            <a:ext cx="1143000" cy="261411"/>
+            <a:off x="10305288" y="2566775"/>
+            <a:ext cx="1143000" cy="239896"/>
           </a:xfrm>
           <a:prstGeom prst="rect">
             <a:avLst/>
@@ -42236,8 +42413,8 @@
         </p:nvSpPr>
         <p:spPr>
           <a:xfrm>
-            <a:off x="6208776" y="2892731"/>
-            <a:ext cx="310896" cy="261411"/>
+            <a:off x="6208776" y="2806670"/>
+            <a:ext cx="310896" cy="239896"/>
           </a:xfrm>
           <a:prstGeom prst="rect">
             <a:avLst/>
@@ -42275,8 +42452,8 @@
         </p:nvSpPr>
         <p:spPr>
           <a:xfrm>
-            <a:off x="6565392" y="2892731"/>
-            <a:ext cx="1920240" cy="261411"/>
+            <a:off x="6565392" y="2806670"/>
+            <a:ext cx="1920240" cy="239896"/>
           </a:xfrm>
           <a:prstGeom prst="rect">
             <a:avLst/>
@@ -42314,8 +42491,8 @@
         </p:nvSpPr>
         <p:spPr>
           <a:xfrm>
-            <a:off x="8558784" y="2958084"/>
-            <a:ext cx="938985" cy="130705"/>
+            <a:off x="8558784" y="2866644"/>
+            <a:ext cx="938985" cy="119948"/>
           </a:xfrm>
           <a:prstGeom prst="rect">
             <a:avLst/>
@@ -42334,8 +42511,8 @@
         </p:nvSpPr>
         <p:spPr>
           <a:xfrm>
-            <a:off x="10305288" y="2892731"/>
-            <a:ext cx="1143000" cy="261411"/>
+            <a:off x="10305288" y="2806670"/>
+            <a:ext cx="1143000" cy="239896"/>
           </a:xfrm>
           <a:prstGeom prst="rect">
             <a:avLst/>
@@ -42373,8 +42550,8 @@
         </p:nvSpPr>
         <p:spPr>
           <a:xfrm>
-            <a:off x="6208776" y="3154142"/>
-            <a:ext cx="310896" cy="261411"/>
+            <a:off x="6208776" y="3046566"/>
+            <a:ext cx="310896" cy="239896"/>
           </a:xfrm>
           <a:prstGeom prst="rect">
             <a:avLst/>
@@ -42412,8 +42589,8 @@
         </p:nvSpPr>
         <p:spPr>
           <a:xfrm>
-            <a:off x="6565392" y="3154142"/>
-            <a:ext cx="1920240" cy="261411"/>
+            <a:off x="6565392" y="3046566"/>
+            <a:ext cx="1920240" cy="239896"/>
           </a:xfrm>
           <a:prstGeom prst="rect">
             <a:avLst/>
@@ -42451,8 +42628,8 @@
         </p:nvSpPr>
         <p:spPr>
           <a:xfrm>
-            <a:off x="8558784" y="3219495"/>
-            <a:ext cx="937921" cy="130705"/>
+            <a:off x="8558784" y="3106540"/>
+            <a:ext cx="937921" cy="119948"/>
           </a:xfrm>
           <a:prstGeom prst="rect">
             <a:avLst/>
@@ -42471,8 +42648,8 @@
         </p:nvSpPr>
         <p:spPr>
           <a:xfrm>
-            <a:off x="10305288" y="3154142"/>
-            <a:ext cx="1143000" cy="261411"/>
+            <a:off x="10305288" y="3046566"/>
+            <a:ext cx="1143000" cy="239896"/>
           </a:xfrm>
           <a:prstGeom prst="rect">
             <a:avLst/>
@@ -42510,8 +42687,8 @@
         </p:nvSpPr>
         <p:spPr>
           <a:xfrm>
-            <a:off x="6208776" y="3415553"/>
-            <a:ext cx="310896" cy="261411"/>
+            <a:off x="6208776" y="3286461"/>
+            <a:ext cx="310896" cy="239896"/>
           </a:xfrm>
           <a:prstGeom prst="rect">
             <a:avLst/>
@@ -42549,8 +42726,8 @@
         </p:nvSpPr>
         <p:spPr>
           <a:xfrm>
-            <a:off x="6565392" y="3415553"/>
-            <a:ext cx="1920240" cy="261411"/>
+            <a:off x="6565392" y="3286461"/>
+            <a:ext cx="1920240" cy="239896"/>
           </a:xfrm>
           <a:prstGeom prst="rect">
             <a:avLst/>
@@ -42588,8 +42765,8 @@
         </p:nvSpPr>
         <p:spPr>
           <a:xfrm>
-            <a:off x="8558784" y="3480906"/>
-            <a:ext cx="936379" cy="130705"/>
+            <a:off x="8558784" y="3346435"/>
+            <a:ext cx="936379" cy="119948"/>
           </a:xfrm>
           <a:prstGeom prst="rect">
             <a:avLst/>
@@ -42608,8 +42785,8 @@
         </p:nvSpPr>
         <p:spPr>
           <a:xfrm>
-            <a:off x="10305288" y="3415553"/>
-            <a:ext cx="1143000" cy="261411"/>
+            <a:off x="10305288" y="3286461"/>
+            <a:ext cx="1143000" cy="239896"/>
           </a:xfrm>
           <a:prstGeom prst="rect">
             <a:avLst/>
@@ -42647,8 +42824,8 @@
         </p:nvSpPr>
         <p:spPr>
           <a:xfrm>
-            <a:off x="6208776" y="3676964"/>
-            <a:ext cx="310896" cy="261411"/>
+            <a:off x="6208776" y="3526357"/>
+            <a:ext cx="310896" cy="239896"/>
           </a:xfrm>
           <a:prstGeom prst="rect">
             <a:avLst/>
@@ -42686,8 +42863,8 @@
         </p:nvSpPr>
         <p:spPr>
           <a:xfrm>
-            <a:off x="6565392" y="3676964"/>
-            <a:ext cx="1920240" cy="261411"/>
+            <a:off x="6565392" y="3526357"/>
+            <a:ext cx="1920240" cy="239896"/>
           </a:xfrm>
           <a:prstGeom prst="rect">
             <a:avLst/>
@@ -42725,8 +42902,8 @@
         </p:nvSpPr>
         <p:spPr>
           <a:xfrm>
-            <a:off x="8558784" y="3742316"/>
-            <a:ext cx="934636" cy="130705"/>
+            <a:off x="8558784" y="3586331"/>
+            <a:ext cx="934636" cy="119948"/>
           </a:xfrm>
           <a:prstGeom prst="rect">
             <a:avLst/>
@@ -42745,8 +42922,8 @@
         </p:nvSpPr>
         <p:spPr>
           <a:xfrm>
-            <a:off x="10305288" y="3676964"/>
-            <a:ext cx="1143000" cy="261411"/>
+            <a:off x="10305288" y="3526357"/>
+            <a:ext cx="1143000" cy="239896"/>
           </a:xfrm>
           <a:prstGeom prst="rect">
             <a:avLst/>
@@ -42784,8 +42961,8 @@
         </p:nvSpPr>
         <p:spPr>
           <a:xfrm>
-            <a:off x="6208776" y="3938375"/>
-            <a:ext cx="310896" cy="261411"/>
+            <a:off x="6208776" y="3766252"/>
+            <a:ext cx="310896" cy="239896"/>
           </a:xfrm>
           <a:prstGeom prst="rect">
             <a:avLst/>
@@ -42823,8 +43000,8 @@
         </p:nvSpPr>
         <p:spPr>
           <a:xfrm>
-            <a:off x="6565392" y="3938375"/>
-            <a:ext cx="1920240" cy="261411"/>
+            <a:off x="6565392" y="3766252"/>
+            <a:ext cx="1920240" cy="239896"/>
           </a:xfrm>
           <a:prstGeom prst="rect">
             <a:avLst/>
@@ -42862,8 +43039,8 @@
         </p:nvSpPr>
         <p:spPr>
           <a:xfrm>
-            <a:off x="8558784" y="4003727"/>
-            <a:ext cx="899074" cy="130705"/>
+            <a:off x="8558784" y="3826226"/>
+            <a:ext cx="899074" cy="119948"/>
           </a:xfrm>
           <a:prstGeom prst="rect">
             <a:avLst/>
@@ -42882,8 +43059,8 @@
         </p:nvSpPr>
         <p:spPr>
           <a:xfrm>
-            <a:off x="10305288" y="3938375"/>
-            <a:ext cx="1143000" cy="261411"/>
+            <a:off x="10305288" y="3766252"/>
+            <a:ext cx="1143000" cy="239896"/>
           </a:xfrm>
           <a:prstGeom prst="rect">
             <a:avLst/>
@@ -42921,8 +43098,8 @@
         </p:nvSpPr>
         <p:spPr>
           <a:xfrm>
-            <a:off x="6208776" y="4199785"/>
-            <a:ext cx="310896" cy="261411"/>
+            <a:off x="6208776" y="4006148"/>
+            <a:ext cx="310896" cy="239896"/>
           </a:xfrm>
           <a:prstGeom prst="rect">
             <a:avLst/>
@@ -42960,8 +43137,8 @@
         </p:nvSpPr>
         <p:spPr>
           <a:xfrm>
-            <a:off x="6565392" y="4199785"/>
-            <a:ext cx="1920240" cy="261411"/>
+            <a:off x="6565392" y="4006148"/>
+            <a:ext cx="1920240" cy="239896"/>
           </a:xfrm>
           <a:prstGeom prst="rect">
             <a:avLst/>
@@ -42999,8 +43176,8 @@
         </p:nvSpPr>
         <p:spPr>
           <a:xfrm>
-            <a:off x="8558784" y="4265138"/>
-            <a:ext cx="878217" cy="130705"/>
+            <a:off x="8558784" y="4066122"/>
+            <a:ext cx="878217" cy="119948"/>
           </a:xfrm>
           <a:prstGeom prst="rect">
             <a:avLst/>
@@ -43019,8 +43196,8 @@
         </p:nvSpPr>
         <p:spPr>
           <a:xfrm>
-            <a:off x="10305288" y="4199785"/>
-            <a:ext cx="1143000" cy="261411"/>
+            <a:off x="10305288" y="4006148"/>
+            <a:ext cx="1143000" cy="239896"/>
           </a:xfrm>
           <a:prstGeom prst="rect">
             <a:avLst/>
@@ -43058,8 +43235,8 @@
         </p:nvSpPr>
         <p:spPr>
           <a:xfrm>
-            <a:off x="6208776" y="4461196"/>
-            <a:ext cx="310896" cy="261411"/>
+            <a:off x="6208776" y="4246043"/>
+            <a:ext cx="310896" cy="239896"/>
           </a:xfrm>
           <a:prstGeom prst="rect">
             <a:avLst/>
@@ -43097,8 +43274,8 @@
         </p:nvSpPr>
         <p:spPr>
           <a:xfrm>
-            <a:off x="6565392" y="4461196"/>
-            <a:ext cx="1920240" cy="261411"/>
+            <a:off x="6565392" y="4246043"/>
+            <a:ext cx="1920240" cy="239896"/>
           </a:xfrm>
           <a:prstGeom prst="rect">
             <a:avLst/>
@@ -43136,8 +43313,8 @@
         </p:nvSpPr>
         <p:spPr>
           <a:xfrm>
-            <a:off x="8558784" y="4526549"/>
-            <a:ext cx="864282" cy="130705"/>
+            <a:off x="8558784" y="4306017"/>
+            <a:ext cx="864282" cy="119948"/>
           </a:xfrm>
           <a:prstGeom prst="rect">
             <a:avLst/>
@@ -43156,8 +43333,8 @@
         </p:nvSpPr>
         <p:spPr>
           <a:xfrm>
-            <a:off x="10305288" y="4461196"/>
-            <a:ext cx="1143000" cy="261411"/>
+            <a:off x="10305288" y="4246043"/>
+            <a:ext cx="1143000" cy="239896"/>
           </a:xfrm>
           <a:prstGeom prst="rect">
             <a:avLst/>
@@ -43195,8 +43372,8 @@
         </p:nvSpPr>
         <p:spPr>
           <a:xfrm>
-            <a:off x="6208776" y="4722607"/>
-            <a:ext cx="310896" cy="261411"/>
+            <a:off x="6208776" y="4485939"/>
+            <a:ext cx="310896" cy="239896"/>
           </a:xfrm>
           <a:prstGeom prst="rect">
             <a:avLst/>
@@ -43234,8 +43411,8 @@
         </p:nvSpPr>
         <p:spPr>
           <a:xfrm>
-            <a:off x="6565392" y="4722607"/>
-            <a:ext cx="1920240" cy="261411"/>
+            <a:off x="6565392" y="4485939"/>
+            <a:ext cx="1920240" cy="239896"/>
           </a:xfrm>
           <a:prstGeom prst="rect">
             <a:avLst/>
@@ -43273,8 +43450,8 @@
         </p:nvSpPr>
         <p:spPr>
           <a:xfrm>
-            <a:off x="8558784" y="4787960"/>
-            <a:ext cx="853702" cy="130705"/>
+            <a:off x="8558784" y="4545913"/>
+            <a:ext cx="853702" cy="119948"/>
           </a:xfrm>
           <a:prstGeom prst="rect">
             <a:avLst/>
@@ -43293,8 +43470,8 @@
         </p:nvSpPr>
         <p:spPr>
           <a:xfrm>
-            <a:off x="10305288" y="4722607"/>
-            <a:ext cx="1143000" cy="261411"/>
+            <a:off x="10305288" y="4485939"/>
+            <a:ext cx="1143000" cy="239896"/>
           </a:xfrm>
           <a:prstGeom prst="rect">
             <a:avLst/>
@@ -43332,8 +43509,8 @@
         </p:nvSpPr>
         <p:spPr>
           <a:xfrm>
-            <a:off x="6208776" y="4984018"/>
-            <a:ext cx="310896" cy="261411"/>
+            <a:off x="6208776" y="4725834"/>
+            <a:ext cx="310896" cy="239896"/>
           </a:xfrm>
           <a:prstGeom prst="rect">
             <a:avLst/>
@@ -43371,8 +43548,8 @@
         </p:nvSpPr>
         <p:spPr>
           <a:xfrm>
-            <a:off x="6565392" y="4984018"/>
-            <a:ext cx="1920240" cy="261411"/>
+            <a:off x="6565392" y="4725834"/>
+            <a:ext cx="1920240" cy="239896"/>
           </a:xfrm>
           <a:prstGeom prst="rect">
             <a:avLst/>
@@ -43410,8 +43587,8 @@
         </p:nvSpPr>
         <p:spPr>
           <a:xfrm>
-            <a:off x="8558784" y="5049371"/>
-            <a:ext cx="830028" cy="130705"/>
+            <a:off x="8558784" y="4785808"/>
+            <a:ext cx="830028" cy="119948"/>
           </a:xfrm>
           <a:prstGeom prst="rect">
             <a:avLst/>
@@ -43430,8 +43607,8 @@
         </p:nvSpPr>
         <p:spPr>
           <a:xfrm>
-            <a:off x="10305288" y="4984018"/>
-            <a:ext cx="1143000" cy="261411"/>
+            <a:off x="10305288" y="4725834"/>
+            <a:ext cx="1143000" cy="239896"/>
           </a:xfrm>
           <a:prstGeom prst="rect">
             <a:avLst/>
@@ -43469,8 +43646,8 @@
         </p:nvSpPr>
         <p:spPr>
           <a:xfrm>
-            <a:off x="6208776" y="5245429"/>
-            <a:ext cx="310896" cy="261411"/>
+            <a:off x="6208776" y="4965730"/>
+            <a:ext cx="310896" cy="239896"/>
           </a:xfrm>
           <a:prstGeom prst="rect">
             <a:avLst/>
@@ -43508,8 +43685,8 @@
         </p:nvSpPr>
         <p:spPr>
           <a:xfrm>
-            <a:off x="6565392" y="5245429"/>
-            <a:ext cx="1920240" cy="261411"/>
+            <a:off x="6565392" y="4965730"/>
+            <a:ext cx="1920240" cy="239896"/>
           </a:xfrm>
           <a:prstGeom prst="rect">
             <a:avLst/>
@@ -43547,8 +43724,8 @@
         </p:nvSpPr>
         <p:spPr>
           <a:xfrm>
-            <a:off x="8558784" y="5310781"/>
-            <a:ext cx="781476" cy="130705"/>
+            <a:off x="8558784" y="5025704"/>
+            <a:ext cx="781476" cy="119948"/>
           </a:xfrm>
           <a:prstGeom prst="rect">
             <a:avLst/>
@@ -43567,8 +43744,8 @@
         </p:nvSpPr>
         <p:spPr>
           <a:xfrm>
-            <a:off x="10305288" y="5245429"/>
-            <a:ext cx="1143000" cy="261411"/>
+            <a:off x="10305288" y="4965730"/>
+            <a:ext cx="1143000" cy="239896"/>
           </a:xfrm>
           <a:prstGeom prst="rect">
             <a:avLst/>
@@ -43606,8 +43783,8 @@
         </p:nvSpPr>
         <p:spPr>
           <a:xfrm>
-            <a:off x="6208776" y="5506840"/>
-            <a:ext cx="310896" cy="261411"/>
+            <a:off x="6208776" y="5205625"/>
+            <a:ext cx="310896" cy="239896"/>
           </a:xfrm>
           <a:prstGeom prst="rect">
             <a:avLst/>
@@ -43645,8 +43822,8 @@
         </p:nvSpPr>
         <p:spPr>
           <a:xfrm>
-            <a:off x="6565392" y="5506840"/>
-            <a:ext cx="1920240" cy="261411"/>
+            <a:off x="6565392" y="5205625"/>
+            <a:ext cx="1920240" cy="239896"/>
           </a:xfrm>
           <a:prstGeom prst="rect">
             <a:avLst/>
@@ -43684,8 +43861,8 @@
         </p:nvSpPr>
         <p:spPr>
           <a:xfrm>
-            <a:off x="8558784" y="5572192"/>
-            <a:ext cx="714628" cy="130705"/>
+            <a:off x="8558784" y="5265599"/>
+            <a:ext cx="714628" cy="119948"/>
           </a:xfrm>
           <a:prstGeom prst="rect">
             <a:avLst/>
@@ -43704,8 +43881,8 @@
         </p:nvSpPr>
         <p:spPr>
           <a:xfrm>
-            <a:off x="10305288" y="5506840"/>
-            <a:ext cx="1143000" cy="261411"/>
+            <a:off x="10305288" y="5205625"/>
+            <a:ext cx="1143000" cy="239896"/>
           </a:xfrm>
           <a:prstGeom prst="rect">
             <a:avLst/>
@@ -43743,8 +43920,8 @@
         </p:nvSpPr>
         <p:spPr>
           <a:xfrm>
-            <a:off x="6208776" y="5768250"/>
-            <a:ext cx="310896" cy="261411"/>
+            <a:off x="6208776" y="5445521"/>
+            <a:ext cx="310896" cy="239896"/>
           </a:xfrm>
           <a:prstGeom prst="rect">
             <a:avLst/>
@@ -43782,8 +43959,8 @@
         </p:nvSpPr>
         <p:spPr>
           <a:xfrm>
-            <a:off x="6565392" y="5768250"/>
-            <a:ext cx="1920240" cy="261411"/>
+            <a:off x="6565392" y="5445521"/>
+            <a:ext cx="1920240" cy="239896"/>
           </a:xfrm>
           <a:prstGeom prst="rect">
             <a:avLst/>
@@ -43821,8 +43998,8 @@
         </p:nvSpPr>
         <p:spPr>
           <a:xfrm>
-            <a:off x="8558784" y="5833603"/>
-            <a:ext cx="665401" cy="130705"/>
+            <a:off x="8558784" y="5505495"/>
+            <a:ext cx="665401" cy="119948"/>
           </a:xfrm>
           <a:prstGeom prst="rect">
             <a:avLst/>
@@ -43841,8 +44018,8 @@
         </p:nvSpPr>
         <p:spPr>
           <a:xfrm>
-            <a:off x="10305288" y="5768250"/>
-            <a:ext cx="1143000" cy="261411"/>
+            <a:off x="10305288" y="5445521"/>
+            <a:ext cx="1143000" cy="239896"/>
           </a:xfrm>
           <a:prstGeom prst="rect">
             <a:avLst/>
@@ -43881,7 +44058,7 @@
         <p:spPr>
           <a:xfrm>
             <a:off x="4080932" y="1847088"/>
-            <a:ext cx="14630" cy="4443984"/>
+            <a:ext cx="14630" cy="4078224"/>
           </a:xfrm>
           <a:prstGeom prst="rect">
             <a:avLst/>
@@ -43901,7 +44078,7 @@
         <p:spPr>
           <a:xfrm>
             <a:off x="9631340" y="1847088"/>
-            <a:ext cx="14630" cy="4443984"/>
+            <a:ext cx="14630" cy="4078224"/>
           </a:xfrm>
           <a:prstGeom prst="rect">
             <a:avLst/>
@@ -43921,7 +44098,7 @@
         <p:spPr>
           <a:xfrm>
             <a:off x="6085332" y="1847088"/>
-            <a:ext cx="10973" cy="4443984"/>
+            <a:ext cx="10973" cy="4078224"/>
           </a:xfrm>
           <a:prstGeom prst="rect">
             <a:avLst/>
@@ -43931,6 +44108,65 @@
           </a:solidFill>
           <a:ln/>
         </p:spPr>
+      </p:sp>
+      <p:sp>
+        <p:nvSpPr>
+          <p:cNvPr id="147" name="Shape 144"/>
+          <p:cNvSpPr/>
+          <p:nvPr/>
+        </p:nvSpPr>
+        <p:spPr>
+          <a:xfrm>
+            <a:off x="457200" y="6126480"/>
+            <a:ext cx="11274552" cy="371856"/>
+          </a:xfrm>
+          <a:prstGeom prst="rect">
+            <a:avLst/>
+          </a:prstGeom>
+          <a:solidFill>
+            <a:srgbClr val="EDF4FA"/>
+          </a:solidFill>
+          <a:ln/>
+        </p:spPr>
+      </p:sp>
+      <p:sp>
+        <p:nvSpPr>
+          <p:cNvPr id="148" name="Text 145"/>
+          <p:cNvSpPr txBox="1"/>
+          <p:nvPr/>
+        </p:nvSpPr>
+        <p:spPr>
+          <a:xfrm>
+            <a:off x="658368" y="6144768"/>
+            <a:ext cx="10927080" cy="335280"/>
+          </a:xfrm>
+          <a:prstGeom prst="rect">
+            <a:avLst/>
+          </a:prstGeom>
+          <a:noFill/>
+          <a:ln/>
+        </p:spPr>
+        <p:txBody>
+          <a:bodyPr wrap="square" lIns="0" tIns="0" rIns="0" bIns="0" rtlCol="0" anchor="ctr"/>
+          <a:lstStyle/>
+          <a:p>
+            <a:pPr indent="0" marL="0">
+              <a:buNone/>
+            </a:pPr>
+            <a:r>
+              <a:rPr lang="en-US" sz="1600" b="1" dirty="0">
+                <a:solidFill>
+                  <a:srgbClr val="0B2C4A"/>
+                </a:solidFill>
+                <a:latin typeface="Inter" pitchFamily="34" charset="0"/>
+                <a:ea typeface="Inter" pitchFamily="34" charset="-122"/>
+                <a:cs typeface="Inter" pitchFamily="34" charset="-120"/>
+              </a:rPr>
+              <a:t>12 of 33 stores at or above the $197.17 group.</a:t>
+            </a:r>
+            <a:endParaRPr lang="en-US" sz="1600" dirty="0"/>
+          </a:p>
+        </p:txBody>
       </p:sp>
     </p:spTree>
   </p:cSld>
@@ -44071,7 +44307,7 @@
         <p:spPr>
           <a:xfrm>
             <a:off x="457200" y="1207008"/>
-            <a:ext cx="11274552" cy="5148072"/>
+            <a:ext cx="11274552" cy="4782312"/>
           </a:xfrm>
           <a:prstGeom prst="rect">
             <a:avLst/>
@@ -44248,7 +44484,7 @@
         <p:spPr>
           <a:xfrm>
             <a:off x="658368" y="1847088"/>
-            <a:ext cx="310896" cy="261411"/>
+            <a:ext cx="310896" cy="239896"/>
           </a:xfrm>
           <a:prstGeom prst="rect">
             <a:avLst/>
@@ -44287,7 +44523,7 @@
         <p:spPr>
           <a:xfrm>
             <a:off x="1014984" y="1847088"/>
-            <a:ext cx="1920240" cy="261411"/>
+            <a:ext cx="1920240" cy="239896"/>
           </a:xfrm>
           <a:prstGeom prst="rect">
             <a:avLst/>
@@ -44325,8 +44561,8 @@
         </p:nvSpPr>
         <p:spPr>
           <a:xfrm>
-            <a:off x="3785616" y="1917669"/>
-            <a:ext cx="777240" cy="120249"/>
+            <a:off x="3785616" y="1911860"/>
+            <a:ext cx="777240" cy="110352"/>
           </a:xfrm>
           <a:prstGeom prst="rect">
             <a:avLst/>
@@ -44346,7 +44582,7 @@
         <p:spPr>
           <a:xfrm>
             <a:off x="4617720" y="1847088"/>
-            <a:ext cx="1234440" cy="261411"/>
+            <a:ext cx="1234440" cy="239896"/>
           </a:xfrm>
           <a:prstGeom prst="rect">
             <a:avLst/>
@@ -44384,8 +44620,8 @@
         </p:nvSpPr>
         <p:spPr>
           <a:xfrm>
-            <a:off x="658368" y="2108499"/>
-            <a:ext cx="310896" cy="261411"/>
+            <a:off x="658368" y="2086984"/>
+            <a:ext cx="310896" cy="239896"/>
           </a:xfrm>
           <a:prstGeom prst="rect">
             <a:avLst/>
@@ -44423,8 +44659,8 @@
         </p:nvSpPr>
         <p:spPr>
           <a:xfrm>
-            <a:off x="1014984" y="2108499"/>
-            <a:ext cx="1920240" cy="261411"/>
+            <a:off x="1014984" y="2086984"/>
+            <a:ext cx="1920240" cy="239896"/>
           </a:xfrm>
           <a:prstGeom prst="rect">
             <a:avLst/>
@@ -44462,8 +44698,8 @@
         </p:nvSpPr>
         <p:spPr>
           <a:xfrm>
-            <a:off x="3785616" y="2179080"/>
-            <a:ext cx="536453" cy="120249"/>
+            <a:off x="3785616" y="2151755"/>
+            <a:ext cx="536453" cy="110352"/>
           </a:xfrm>
           <a:prstGeom prst="rect">
             <a:avLst/>
@@ -44482,8 +44718,8 @@
         </p:nvSpPr>
         <p:spPr>
           <a:xfrm>
-            <a:off x="4617720" y="2108499"/>
-            <a:ext cx="1234440" cy="261411"/>
+            <a:off x="4617720" y="2086984"/>
+            <a:ext cx="1234440" cy="239896"/>
           </a:xfrm>
           <a:prstGeom prst="rect">
             <a:avLst/>
@@ -44521,8 +44757,8 @@
         </p:nvSpPr>
         <p:spPr>
           <a:xfrm>
-            <a:off x="658368" y="2369910"/>
-            <a:ext cx="310896" cy="261411"/>
+            <a:off x="658368" y="2326879"/>
+            <a:ext cx="310896" cy="239896"/>
           </a:xfrm>
           <a:prstGeom prst="rect">
             <a:avLst/>
@@ -44560,8 +44796,8 @@
         </p:nvSpPr>
         <p:spPr>
           <a:xfrm>
-            <a:off x="1014984" y="2369910"/>
-            <a:ext cx="1920240" cy="261411"/>
+            <a:off x="1014984" y="2326879"/>
+            <a:ext cx="1920240" cy="239896"/>
           </a:xfrm>
           <a:prstGeom prst="rect">
             <a:avLst/>
@@ -44599,8 +44835,8 @@
         </p:nvSpPr>
         <p:spPr>
           <a:xfrm>
-            <a:off x="3785616" y="2440491"/>
-            <a:ext cx="368406" cy="120249"/>
+            <a:off x="3785616" y="2391651"/>
+            <a:ext cx="368406" cy="110352"/>
           </a:xfrm>
           <a:prstGeom prst="rect">
             <a:avLst/>
@@ -44619,8 +44855,8 @@
         </p:nvSpPr>
         <p:spPr>
           <a:xfrm>
-            <a:off x="4617720" y="2369910"/>
-            <a:ext cx="1234440" cy="261411"/>
+            <a:off x="4617720" y="2326879"/>
+            <a:ext cx="1234440" cy="239896"/>
           </a:xfrm>
           <a:prstGeom prst="rect">
             <a:avLst/>
@@ -44658,8 +44894,8 @@
         </p:nvSpPr>
         <p:spPr>
           <a:xfrm>
-            <a:off x="658368" y="2631320"/>
-            <a:ext cx="310896" cy="261411"/>
+            <a:off x="658368" y="2566775"/>
+            <a:ext cx="310896" cy="239896"/>
           </a:xfrm>
           <a:prstGeom prst="rect">
             <a:avLst/>
@@ -44697,8 +44933,8 @@
         </p:nvSpPr>
         <p:spPr>
           <a:xfrm>
-            <a:off x="1014984" y="2631320"/>
-            <a:ext cx="1920240" cy="261411"/>
+            <a:off x="1014984" y="2566775"/>
+            <a:ext cx="1920240" cy="239896"/>
           </a:xfrm>
           <a:prstGeom prst="rect">
             <a:avLst/>
@@ -44736,8 +44972,8 @@
         </p:nvSpPr>
         <p:spPr>
           <a:xfrm>
-            <a:off x="3785616" y="2701901"/>
-            <a:ext cx="355137" cy="120249"/>
+            <a:off x="3785616" y="2631546"/>
+            <a:ext cx="355137" cy="110352"/>
           </a:xfrm>
           <a:prstGeom prst="rect">
             <a:avLst/>
@@ -44756,8 +44992,8 @@
         </p:nvSpPr>
         <p:spPr>
           <a:xfrm>
-            <a:off x="4617720" y="2631320"/>
-            <a:ext cx="1234440" cy="261411"/>
+            <a:off x="4617720" y="2566775"/>
+            <a:ext cx="1234440" cy="239896"/>
           </a:xfrm>
           <a:prstGeom prst="rect">
             <a:avLst/>
@@ -44795,8 +45031,8 @@
         </p:nvSpPr>
         <p:spPr>
           <a:xfrm>
-            <a:off x="658368" y="2892731"/>
-            <a:ext cx="310896" cy="261411"/>
+            <a:off x="658368" y="2806670"/>
+            <a:ext cx="310896" cy="239896"/>
           </a:xfrm>
           <a:prstGeom prst="rect">
             <a:avLst/>
@@ -44834,8 +45070,8 @@
         </p:nvSpPr>
         <p:spPr>
           <a:xfrm>
-            <a:off x="1014984" y="2892731"/>
-            <a:ext cx="1920240" cy="261411"/>
+            <a:off x="1014984" y="2806670"/>
+            <a:ext cx="1920240" cy="239896"/>
           </a:xfrm>
           <a:prstGeom prst="rect">
             <a:avLst/>
@@ -44873,8 +45109,8 @@
         </p:nvSpPr>
         <p:spPr>
           <a:xfrm>
-            <a:off x="3785616" y="2963312"/>
-            <a:ext cx="276603" cy="120249"/>
+            <a:off x="3785616" y="2871442"/>
+            <a:ext cx="276603" cy="110352"/>
           </a:xfrm>
           <a:prstGeom prst="rect">
             <a:avLst/>
@@ -44893,8 +45129,8 @@
         </p:nvSpPr>
         <p:spPr>
           <a:xfrm>
-            <a:off x="4617720" y="2892731"/>
-            <a:ext cx="1234440" cy="261411"/>
+            <a:off x="4617720" y="2806670"/>
+            <a:ext cx="1234440" cy="239896"/>
           </a:xfrm>
           <a:prstGeom prst="rect">
             <a:avLst/>
@@ -44932,8 +45168,8 @@
         </p:nvSpPr>
         <p:spPr>
           <a:xfrm>
-            <a:off x="658368" y="3154142"/>
-            <a:ext cx="310896" cy="261411"/>
+            <a:off x="658368" y="3046566"/>
+            <a:ext cx="310896" cy="239896"/>
           </a:xfrm>
           <a:prstGeom prst="rect">
             <a:avLst/>
@@ -44971,8 +45207,8 @@
         </p:nvSpPr>
         <p:spPr>
           <a:xfrm>
-            <a:off x="1014984" y="3154142"/>
-            <a:ext cx="1920240" cy="261411"/>
+            <a:off x="1014984" y="3046566"/>
+            <a:ext cx="1920240" cy="239896"/>
           </a:xfrm>
           <a:prstGeom prst="rect">
             <a:avLst/>
@@ -45010,8 +45246,8 @@
         </p:nvSpPr>
         <p:spPr>
           <a:xfrm>
-            <a:off x="3785616" y="3224723"/>
-            <a:ext cx="258528" cy="120249"/>
+            <a:off x="3785616" y="3111337"/>
+            <a:ext cx="258528" cy="110352"/>
           </a:xfrm>
           <a:prstGeom prst="rect">
             <a:avLst/>
@@ -45030,8 +45266,8 @@
         </p:nvSpPr>
         <p:spPr>
           <a:xfrm>
-            <a:off x="4617720" y="3154142"/>
-            <a:ext cx="1234440" cy="261411"/>
+            <a:off x="4617720" y="3046566"/>
+            <a:ext cx="1234440" cy="239896"/>
           </a:xfrm>
           <a:prstGeom prst="rect">
             <a:avLst/>
@@ -45069,8 +45305,8 @@
         </p:nvSpPr>
         <p:spPr>
           <a:xfrm>
-            <a:off x="658368" y="3415553"/>
-            <a:ext cx="310896" cy="261411"/>
+            <a:off x="658368" y="3286461"/>
+            <a:ext cx="310896" cy="239896"/>
           </a:xfrm>
           <a:prstGeom prst="rect">
             <a:avLst/>
@@ -45108,8 +45344,8 @@
         </p:nvSpPr>
         <p:spPr>
           <a:xfrm>
-            <a:off x="1014984" y="3415553"/>
-            <a:ext cx="1920240" cy="261411"/>
+            <a:off x="1014984" y="3286461"/>
+            <a:ext cx="1920240" cy="239896"/>
           </a:xfrm>
           <a:prstGeom prst="rect">
             <a:avLst/>
@@ -45147,8 +45383,8 @@
         </p:nvSpPr>
         <p:spPr>
           <a:xfrm>
-            <a:off x="3785616" y="3486134"/>
-            <a:ext cx="257839" cy="120249"/>
+            <a:off x="3785616" y="3351233"/>
+            <a:ext cx="257839" cy="110352"/>
           </a:xfrm>
           <a:prstGeom prst="rect">
             <a:avLst/>
@@ -45167,8 +45403,8 @@
         </p:nvSpPr>
         <p:spPr>
           <a:xfrm>
-            <a:off x="4617720" y="3415553"/>
-            <a:ext cx="1234440" cy="261411"/>
+            <a:off x="4617720" y="3286461"/>
+            <a:ext cx="1234440" cy="239896"/>
           </a:xfrm>
           <a:prstGeom prst="rect">
             <a:avLst/>
@@ -45206,8 +45442,8 @@
         </p:nvSpPr>
         <p:spPr>
           <a:xfrm>
-            <a:off x="658368" y="3676964"/>
-            <a:ext cx="310896" cy="261411"/>
+            <a:off x="658368" y="3526357"/>
+            <a:ext cx="310896" cy="239896"/>
           </a:xfrm>
           <a:prstGeom prst="rect">
             <a:avLst/>
@@ -45245,8 +45481,8 @@
         </p:nvSpPr>
         <p:spPr>
           <a:xfrm>
-            <a:off x="1014984" y="3676964"/>
-            <a:ext cx="1920240" cy="261411"/>
+            <a:off x="1014984" y="3526357"/>
+            <a:ext cx="1920240" cy="239896"/>
           </a:xfrm>
           <a:prstGeom prst="rect">
             <a:avLst/>
@@ -45284,8 +45520,8 @@
         </p:nvSpPr>
         <p:spPr>
           <a:xfrm>
-            <a:off x="3785616" y="3747545"/>
-            <a:ext cx="228187" cy="120249"/>
+            <a:off x="3785616" y="3591128"/>
+            <a:ext cx="228187" cy="110352"/>
           </a:xfrm>
           <a:prstGeom prst="rect">
             <a:avLst/>
@@ -45304,8 +45540,8 @@
         </p:nvSpPr>
         <p:spPr>
           <a:xfrm>
-            <a:off x="4617720" y="3676964"/>
-            <a:ext cx="1234440" cy="261411"/>
+            <a:off x="4617720" y="3526357"/>
+            <a:ext cx="1234440" cy="239896"/>
           </a:xfrm>
           <a:prstGeom prst="rect">
             <a:avLst/>
@@ -45343,8 +45579,8 @@
         </p:nvSpPr>
         <p:spPr>
           <a:xfrm>
-            <a:off x="658368" y="3938375"/>
-            <a:ext cx="310896" cy="261411"/>
+            <a:off x="658368" y="3766252"/>
+            <a:ext cx="310896" cy="239896"/>
           </a:xfrm>
           <a:prstGeom prst="rect">
             <a:avLst/>
@@ -45382,8 +45618,8 @@
         </p:nvSpPr>
         <p:spPr>
           <a:xfrm>
-            <a:off x="1014984" y="3938375"/>
-            <a:ext cx="1920240" cy="261411"/>
+            <a:off x="1014984" y="3766252"/>
+            <a:ext cx="1920240" cy="239896"/>
           </a:xfrm>
           <a:prstGeom prst="rect">
             <a:avLst/>
@@ -45421,8 +45657,8 @@
         </p:nvSpPr>
         <p:spPr>
           <a:xfrm>
-            <a:off x="3785616" y="4008956"/>
-            <a:ext cx="225720" cy="120249"/>
+            <a:off x="3785616" y="3831024"/>
+            <a:ext cx="225720" cy="110352"/>
           </a:xfrm>
           <a:prstGeom prst="rect">
             <a:avLst/>
@@ -45441,8 +45677,8 @@
         </p:nvSpPr>
         <p:spPr>
           <a:xfrm>
-            <a:off x="4617720" y="3938375"/>
-            <a:ext cx="1234440" cy="261411"/>
+            <a:off x="4617720" y="3766252"/>
+            <a:ext cx="1234440" cy="239896"/>
           </a:xfrm>
           <a:prstGeom prst="rect">
             <a:avLst/>
@@ -45480,8 +45716,8 @@
         </p:nvSpPr>
         <p:spPr>
           <a:xfrm>
-            <a:off x="658368" y="4199785"/>
-            <a:ext cx="310896" cy="261411"/>
+            <a:off x="658368" y="4006148"/>
+            <a:ext cx="310896" cy="239896"/>
           </a:xfrm>
           <a:prstGeom prst="rect">
             <a:avLst/>
@@ -45519,8 +45755,8 @@
         </p:nvSpPr>
         <p:spPr>
           <a:xfrm>
-            <a:off x="1014984" y="4199785"/>
-            <a:ext cx="1920240" cy="261411"/>
+            <a:off x="1014984" y="4006148"/>
+            <a:ext cx="1920240" cy="239896"/>
           </a:xfrm>
           <a:prstGeom prst="rect">
             <a:avLst/>
@@ -45558,8 +45794,8 @@
         </p:nvSpPr>
         <p:spPr>
           <a:xfrm>
-            <a:off x="3785616" y="4270366"/>
-            <a:ext cx="225689" cy="120249"/>
+            <a:off x="3785616" y="4070920"/>
+            <a:ext cx="225689" cy="110352"/>
           </a:xfrm>
           <a:prstGeom prst="rect">
             <a:avLst/>
@@ -45578,8 +45814,8 @@
         </p:nvSpPr>
         <p:spPr>
           <a:xfrm>
-            <a:off x="4617720" y="4199785"/>
-            <a:ext cx="1234440" cy="261411"/>
+            <a:off x="4617720" y="4006148"/>
+            <a:ext cx="1234440" cy="239896"/>
           </a:xfrm>
           <a:prstGeom prst="rect">
             <a:avLst/>
@@ -45617,8 +45853,8 @@
         </p:nvSpPr>
         <p:spPr>
           <a:xfrm>
-            <a:off x="658368" y="4461196"/>
-            <a:ext cx="310896" cy="261411"/>
+            <a:off x="658368" y="4246043"/>
+            <a:ext cx="310896" cy="239896"/>
           </a:xfrm>
           <a:prstGeom prst="rect">
             <a:avLst/>
@@ -45656,8 +45892,8 @@
         </p:nvSpPr>
         <p:spPr>
           <a:xfrm>
-            <a:off x="1014984" y="4461196"/>
-            <a:ext cx="1920240" cy="261411"/>
+            <a:off x="1014984" y="4246043"/>
+            <a:ext cx="1920240" cy="239896"/>
           </a:xfrm>
           <a:prstGeom prst="rect">
             <a:avLst/>
@@ -45695,8 +45931,8 @@
         </p:nvSpPr>
         <p:spPr>
           <a:xfrm>
-            <a:off x="3785616" y="4531777"/>
-            <a:ext cx="216007" cy="120249"/>
+            <a:off x="3785616" y="4310815"/>
+            <a:ext cx="216007" cy="110352"/>
           </a:xfrm>
           <a:prstGeom prst="rect">
             <a:avLst/>
@@ -45715,8 +45951,8 @@
         </p:nvSpPr>
         <p:spPr>
           <a:xfrm>
-            <a:off x="4617720" y="4461196"/>
-            <a:ext cx="1234440" cy="261411"/>
+            <a:off x="4617720" y="4246043"/>
+            <a:ext cx="1234440" cy="239896"/>
           </a:xfrm>
           <a:prstGeom prst="rect">
             <a:avLst/>
@@ -45754,8 +45990,8 @@
         </p:nvSpPr>
         <p:spPr>
           <a:xfrm>
-            <a:off x="658368" y="4722607"/>
-            <a:ext cx="310896" cy="261411"/>
+            <a:off x="658368" y="4485939"/>
+            <a:ext cx="310896" cy="239896"/>
           </a:xfrm>
           <a:prstGeom prst="rect">
             <a:avLst/>
@@ -45793,8 +46029,8 @@
         </p:nvSpPr>
         <p:spPr>
           <a:xfrm>
-            <a:off x="1014984" y="4722607"/>
-            <a:ext cx="1920240" cy="261411"/>
+            <a:off x="1014984" y="4485939"/>
+            <a:ext cx="1920240" cy="239896"/>
           </a:xfrm>
           <a:prstGeom prst="rect">
             <a:avLst/>
@@ -45832,8 +46068,8 @@
         </p:nvSpPr>
         <p:spPr>
           <a:xfrm>
-            <a:off x="3785616" y="4793188"/>
-            <a:ext cx="214668" cy="120249"/>
+            <a:off x="3785616" y="4550711"/>
+            <a:ext cx="214668" cy="110352"/>
           </a:xfrm>
           <a:prstGeom prst="rect">
             <a:avLst/>
@@ -45852,8 +46088,8 @@
         </p:nvSpPr>
         <p:spPr>
           <a:xfrm>
-            <a:off x="4617720" y="4722607"/>
-            <a:ext cx="1234440" cy="261411"/>
+            <a:off x="4617720" y="4485939"/>
+            <a:ext cx="1234440" cy="239896"/>
           </a:xfrm>
           <a:prstGeom prst="rect">
             <a:avLst/>
@@ -45891,8 +46127,8 @@
         </p:nvSpPr>
         <p:spPr>
           <a:xfrm>
-            <a:off x="658368" y="4984018"/>
-            <a:ext cx="310896" cy="261411"/>
+            <a:off x="658368" y="4725834"/>
+            <a:ext cx="310896" cy="239896"/>
           </a:xfrm>
           <a:prstGeom prst="rect">
             <a:avLst/>
@@ -45930,8 +46166,8 @@
         </p:nvSpPr>
         <p:spPr>
           <a:xfrm>
-            <a:off x="1014984" y="4984018"/>
-            <a:ext cx="1920240" cy="261411"/>
+            <a:off x="1014984" y="4725834"/>
+            <a:ext cx="1920240" cy="239896"/>
           </a:xfrm>
           <a:prstGeom prst="rect">
             <a:avLst/>
@@ -45969,8 +46205,8 @@
         </p:nvSpPr>
         <p:spPr>
           <a:xfrm>
-            <a:off x="3785616" y="5054599"/>
-            <a:ext cx="183559" cy="120249"/>
+            <a:off x="3785616" y="4790606"/>
+            <a:ext cx="183559" cy="110352"/>
           </a:xfrm>
           <a:prstGeom prst="rect">
             <a:avLst/>
@@ -45989,8 +46225,8 @@
         </p:nvSpPr>
         <p:spPr>
           <a:xfrm>
-            <a:off x="4617720" y="4984018"/>
-            <a:ext cx="1234440" cy="261411"/>
+            <a:off x="4617720" y="4725834"/>
+            <a:ext cx="1234440" cy="239896"/>
           </a:xfrm>
           <a:prstGeom prst="rect">
             <a:avLst/>
@@ -46028,8 +46264,8 @@
         </p:nvSpPr>
         <p:spPr>
           <a:xfrm>
-            <a:off x="658368" y="5245429"/>
-            <a:ext cx="310896" cy="261411"/>
+            <a:off x="658368" y="4965730"/>
+            <a:ext cx="310896" cy="239896"/>
           </a:xfrm>
           <a:prstGeom prst="rect">
             <a:avLst/>
@@ -46067,8 +46303,8 @@
         </p:nvSpPr>
         <p:spPr>
           <a:xfrm>
-            <a:off x="1014984" y="5245429"/>
-            <a:ext cx="1920240" cy="261411"/>
+            <a:off x="1014984" y="4965730"/>
+            <a:ext cx="1920240" cy="239896"/>
           </a:xfrm>
           <a:prstGeom prst="rect">
             <a:avLst/>
@@ -46106,8 +46342,8 @@
         </p:nvSpPr>
         <p:spPr>
           <a:xfrm>
-            <a:off x="3785616" y="5316010"/>
-            <a:ext cx="173511" cy="120249"/>
+            <a:off x="3785616" y="5030502"/>
+            <a:ext cx="173511" cy="110352"/>
           </a:xfrm>
           <a:prstGeom prst="rect">
             <a:avLst/>
@@ -46126,8 +46362,8 @@
         </p:nvSpPr>
         <p:spPr>
           <a:xfrm>
-            <a:off x="4617720" y="5245429"/>
-            <a:ext cx="1234440" cy="261411"/>
+            <a:off x="4617720" y="4965730"/>
+            <a:ext cx="1234440" cy="239896"/>
           </a:xfrm>
           <a:prstGeom prst="rect">
             <a:avLst/>
@@ -46165,8 +46401,8 @@
         </p:nvSpPr>
         <p:spPr>
           <a:xfrm>
-            <a:off x="658368" y="5506840"/>
-            <a:ext cx="310896" cy="261411"/>
+            <a:off x="658368" y="5205625"/>
+            <a:ext cx="310896" cy="239896"/>
           </a:xfrm>
           <a:prstGeom prst="rect">
             <a:avLst/>
@@ -46204,8 +46440,8 @@
         </p:nvSpPr>
         <p:spPr>
           <a:xfrm>
-            <a:off x="1014984" y="5506840"/>
-            <a:ext cx="1920240" cy="261411"/>
+            <a:off x="1014984" y="5205625"/>
+            <a:ext cx="1920240" cy="239896"/>
           </a:xfrm>
           <a:prstGeom prst="rect">
             <a:avLst/>
@@ -46243,8 +46479,8 @@
         </p:nvSpPr>
         <p:spPr>
           <a:xfrm>
-            <a:off x="3785616" y="5577420"/>
-            <a:ext cx="164983" cy="120249"/>
+            <a:off x="3785616" y="5270397"/>
+            <a:ext cx="164983" cy="110352"/>
           </a:xfrm>
           <a:prstGeom prst="rect">
             <a:avLst/>
@@ -46263,8 +46499,8 @@
         </p:nvSpPr>
         <p:spPr>
           <a:xfrm>
-            <a:off x="4617720" y="5506840"/>
-            <a:ext cx="1234440" cy="261411"/>
+            <a:off x="4617720" y="5205625"/>
+            <a:ext cx="1234440" cy="239896"/>
           </a:xfrm>
           <a:prstGeom prst="rect">
             <a:avLst/>
@@ -46302,8 +46538,8 @@
         </p:nvSpPr>
         <p:spPr>
           <a:xfrm>
-            <a:off x="658368" y="5768250"/>
-            <a:ext cx="310896" cy="261411"/>
+            <a:off x="658368" y="5445521"/>
+            <a:ext cx="310896" cy="239896"/>
           </a:xfrm>
           <a:prstGeom prst="rect">
             <a:avLst/>
@@ -46341,8 +46577,8 @@
         </p:nvSpPr>
         <p:spPr>
           <a:xfrm>
-            <a:off x="1014984" y="5768250"/>
-            <a:ext cx="1920240" cy="261411"/>
+            <a:off x="1014984" y="5445521"/>
+            <a:ext cx="1920240" cy="239896"/>
           </a:xfrm>
           <a:prstGeom prst="rect">
             <a:avLst/>
@@ -46380,8 +46616,8 @@
         </p:nvSpPr>
         <p:spPr>
           <a:xfrm>
-            <a:off x="3785616" y="5838831"/>
-            <a:ext cx="130019" cy="120249"/>
+            <a:off x="3785616" y="5510293"/>
+            <a:ext cx="130019" cy="110352"/>
           </a:xfrm>
           <a:prstGeom prst="rect">
             <a:avLst/>
@@ -46400,8 +46636,8 @@
         </p:nvSpPr>
         <p:spPr>
           <a:xfrm>
-            <a:off x="4617720" y="5768250"/>
-            <a:ext cx="1234440" cy="261411"/>
+            <a:off x="4617720" y="5445521"/>
+            <a:ext cx="1234440" cy="239896"/>
           </a:xfrm>
           <a:prstGeom prst="rect">
             <a:avLst/>
@@ -46439,8 +46675,8 @@
         </p:nvSpPr>
         <p:spPr>
           <a:xfrm>
-            <a:off x="658368" y="6029661"/>
-            <a:ext cx="310896" cy="261411"/>
+            <a:off x="658368" y="5685416"/>
+            <a:ext cx="310896" cy="239896"/>
           </a:xfrm>
           <a:prstGeom prst="rect">
             <a:avLst/>
@@ -46478,8 +46714,8 @@
         </p:nvSpPr>
         <p:spPr>
           <a:xfrm>
-            <a:off x="1014984" y="6029661"/>
-            <a:ext cx="1920240" cy="261411"/>
+            <a:off x="1014984" y="5685416"/>
+            <a:ext cx="1920240" cy="239896"/>
           </a:xfrm>
           <a:prstGeom prst="rect">
             <a:avLst/>
@@ -46517,8 +46753,8 @@
         </p:nvSpPr>
         <p:spPr>
           <a:xfrm>
-            <a:off x="3785616" y="6100242"/>
-            <a:ext cx="129735" cy="120249"/>
+            <a:off x="3785616" y="5750188"/>
+            <a:ext cx="129735" cy="110352"/>
           </a:xfrm>
           <a:prstGeom prst="rect">
             <a:avLst/>
@@ -46537,8 +46773,8 @@
         </p:nvSpPr>
         <p:spPr>
           <a:xfrm>
-            <a:off x="4617720" y="6029661"/>
-            <a:ext cx="1234440" cy="261411"/>
+            <a:off x="4617720" y="5685416"/>
+            <a:ext cx="1234440" cy="239896"/>
           </a:xfrm>
           <a:prstGeom prst="rect">
             <a:avLst/>
@@ -46577,7 +46813,7 @@
         <p:spPr>
           <a:xfrm>
             <a:off x="6208776" y="1847088"/>
-            <a:ext cx="310896" cy="261411"/>
+            <a:ext cx="310896" cy="239896"/>
           </a:xfrm>
           <a:prstGeom prst="rect">
             <a:avLst/>
@@ -46616,7 +46852,7 @@
         <p:spPr>
           <a:xfrm>
             <a:off x="6565392" y="1847088"/>
-            <a:ext cx="1920240" cy="261411"/>
+            <a:ext cx="1920240" cy="239896"/>
           </a:xfrm>
           <a:prstGeom prst="rect">
             <a:avLst/>
@@ -46654,8 +46890,8 @@
         </p:nvSpPr>
         <p:spPr>
           <a:xfrm>
-            <a:off x="9336024" y="1917669"/>
-            <a:ext cx="123986" cy="120249"/>
+            <a:off x="9336024" y="1911860"/>
+            <a:ext cx="123986" cy="110352"/>
           </a:xfrm>
           <a:prstGeom prst="rect">
             <a:avLst/>
@@ -46675,7 +46911,7 @@
         <p:spPr>
           <a:xfrm>
             <a:off x="10168128" y="1847088"/>
-            <a:ext cx="1234440" cy="261411"/>
+            <a:ext cx="1234440" cy="239896"/>
           </a:xfrm>
           <a:prstGeom prst="rect">
             <a:avLst/>
@@ -46713,8 +46949,8 @@
         </p:nvSpPr>
         <p:spPr>
           <a:xfrm>
-            <a:off x="6208776" y="2108499"/>
-            <a:ext cx="310896" cy="261411"/>
+            <a:off x="6208776" y="2086984"/>
+            <a:ext cx="310896" cy="239896"/>
           </a:xfrm>
           <a:prstGeom prst="rect">
             <a:avLst/>
@@ -46752,8 +46988,8 @@
         </p:nvSpPr>
         <p:spPr>
           <a:xfrm>
-            <a:off x="6565392" y="2108499"/>
-            <a:ext cx="1920240" cy="261411"/>
+            <a:off x="6565392" y="2086984"/>
+            <a:ext cx="1920240" cy="239896"/>
           </a:xfrm>
           <a:prstGeom prst="rect">
             <a:avLst/>
@@ -46791,8 +47027,8 @@
         </p:nvSpPr>
         <p:spPr>
           <a:xfrm>
-            <a:off x="9336024" y="2179080"/>
-            <a:ext cx="115500" cy="120249"/>
+            <a:off x="9336024" y="2151755"/>
+            <a:ext cx="115500" cy="110352"/>
           </a:xfrm>
           <a:prstGeom prst="rect">
             <a:avLst/>
@@ -46811,8 +47047,8 @@
         </p:nvSpPr>
         <p:spPr>
           <a:xfrm>
-            <a:off x="10168128" y="2108499"/>
-            <a:ext cx="1234440" cy="261411"/>
+            <a:off x="10168128" y="2086984"/>
+            <a:ext cx="1234440" cy="239896"/>
           </a:xfrm>
           <a:prstGeom prst="rect">
             <a:avLst/>
@@ -46850,8 +47086,8 @@
         </p:nvSpPr>
         <p:spPr>
           <a:xfrm>
-            <a:off x="6208776" y="2369910"/>
-            <a:ext cx="310896" cy="261411"/>
+            <a:off x="6208776" y="2326879"/>
+            <a:ext cx="310896" cy="239896"/>
           </a:xfrm>
           <a:prstGeom prst="rect">
             <a:avLst/>
@@ -46889,8 +47125,8 @@
         </p:nvSpPr>
         <p:spPr>
           <a:xfrm>
-            <a:off x="6565392" y="2369910"/>
-            <a:ext cx="1920240" cy="261411"/>
+            <a:off x="6565392" y="2326879"/>
+            <a:ext cx="1920240" cy="239896"/>
           </a:xfrm>
           <a:prstGeom prst="rect">
             <a:avLst/>
@@ -46928,8 +47164,8 @@
         </p:nvSpPr>
         <p:spPr>
           <a:xfrm>
-            <a:off x="9336024" y="2440491"/>
-            <a:ext cx="93591" cy="120249"/>
+            <a:off x="9336024" y="2391651"/>
+            <a:ext cx="93591" cy="110352"/>
           </a:xfrm>
           <a:prstGeom prst="rect">
             <a:avLst/>
@@ -46948,8 +47184,8 @@
         </p:nvSpPr>
         <p:spPr>
           <a:xfrm>
-            <a:off x="10168128" y="2369910"/>
-            <a:ext cx="1234440" cy="261411"/>
+            <a:off x="10168128" y="2326879"/>
+            <a:ext cx="1234440" cy="239896"/>
           </a:xfrm>
           <a:prstGeom prst="rect">
             <a:avLst/>
@@ -46987,8 +47223,8 @@
         </p:nvSpPr>
         <p:spPr>
           <a:xfrm>
-            <a:off x="6208776" y="2631320"/>
-            <a:ext cx="310896" cy="261411"/>
+            <a:off x="6208776" y="2566775"/>
+            <a:ext cx="310896" cy="239896"/>
           </a:xfrm>
           <a:prstGeom prst="rect">
             <a:avLst/>
@@ -47026,8 +47262,8 @@
         </p:nvSpPr>
         <p:spPr>
           <a:xfrm>
-            <a:off x="6565392" y="2631320"/>
-            <a:ext cx="1920240" cy="261411"/>
+            <a:off x="6565392" y="2566775"/>
+            <a:ext cx="1920240" cy="239896"/>
           </a:xfrm>
           <a:prstGeom prst="rect">
             <a:avLst/>
@@ -47065,8 +47301,8 @@
         </p:nvSpPr>
         <p:spPr>
           <a:xfrm>
-            <a:off x="9336024" y="2701901"/>
-            <a:ext cx="91542" cy="120249"/>
+            <a:off x="9336024" y="2631546"/>
+            <a:ext cx="91542" cy="110352"/>
           </a:xfrm>
           <a:prstGeom prst="rect">
             <a:avLst/>
@@ -47085,8 +47321,8 @@
         </p:nvSpPr>
         <p:spPr>
           <a:xfrm>
-            <a:off x="10168128" y="2631320"/>
-            <a:ext cx="1234440" cy="261411"/>
+            <a:off x="10168128" y="2566775"/>
+            <a:ext cx="1234440" cy="239896"/>
           </a:xfrm>
           <a:prstGeom prst="rect">
             <a:avLst/>
@@ -47124,8 +47360,8 @@
         </p:nvSpPr>
         <p:spPr>
           <a:xfrm>
-            <a:off x="6208776" y="2892731"/>
-            <a:ext cx="310896" cy="261411"/>
+            <a:off x="6208776" y="2806670"/>
+            <a:ext cx="310896" cy="239896"/>
           </a:xfrm>
           <a:prstGeom prst="rect">
             <a:avLst/>
@@ -47163,8 +47399,8 @@
         </p:nvSpPr>
         <p:spPr>
           <a:xfrm>
-            <a:off x="6565392" y="2892731"/>
-            <a:ext cx="1920240" cy="261411"/>
+            <a:off x="6565392" y="2806670"/>
+            <a:ext cx="1920240" cy="239896"/>
           </a:xfrm>
           <a:prstGeom prst="rect">
             <a:avLst/>
@@ -47202,8 +47438,8 @@
         </p:nvSpPr>
         <p:spPr>
           <a:xfrm>
-            <a:off x="9336024" y="2963312"/>
-            <a:ext cx="90857" cy="120249"/>
+            <a:off x="9336024" y="2871442"/>
+            <a:ext cx="90857" cy="110352"/>
           </a:xfrm>
           <a:prstGeom prst="rect">
             <a:avLst/>
@@ -47222,8 +47458,8 @@
         </p:nvSpPr>
         <p:spPr>
           <a:xfrm>
-            <a:off x="10168128" y="2892731"/>
-            <a:ext cx="1234440" cy="261411"/>
+            <a:off x="10168128" y="2806670"/>
+            <a:ext cx="1234440" cy="239896"/>
           </a:xfrm>
           <a:prstGeom prst="rect">
             <a:avLst/>
@@ -47261,8 +47497,8 @@
         </p:nvSpPr>
         <p:spPr>
           <a:xfrm>
-            <a:off x="6208776" y="3154142"/>
-            <a:ext cx="310896" cy="261411"/>
+            <a:off x="6208776" y="3046566"/>
+            <a:ext cx="310896" cy="239896"/>
           </a:xfrm>
           <a:prstGeom prst="rect">
             <a:avLst/>
@@ -47300,8 +47536,8 @@
         </p:nvSpPr>
         <p:spPr>
           <a:xfrm>
-            <a:off x="6565392" y="3154142"/>
-            <a:ext cx="1920240" cy="261411"/>
+            <a:off x="6565392" y="3046566"/>
+            <a:ext cx="1920240" cy="239896"/>
           </a:xfrm>
           <a:prstGeom prst="rect">
             <a:avLst/>
@@ -47339,8 +47575,8 @@
         </p:nvSpPr>
         <p:spPr>
           <a:xfrm>
-            <a:off x="9336024" y="3224723"/>
-            <a:ext cx="83711" cy="120249"/>
+            <a:off x="9336024" y="3111337"/>
+            <a:ext cx="83711" cy="110352"/>
           </a:xfrm>
           <a:prstGeom prst="rect">
             <a:avLst/>
@@ -47359,8 +47595,8 @@
         </p:nvSpPr>
         <p:spPr>
           <a:xfrm>
-            <a:off x="10168128" y="3154142"/>
-            <a:ext cx="1234440" cy="261411"/>
+            <a:off x="10168128" y="3046566"/>
+            <a:ext cx="1234440" cy="239896"/>
           </a:xfrm>
           <a:prstGeom prst="rect">
             <a:avLst/>
@@ -47398,8 +47634,8 @@
         </p:nvSpPr>
         <p:spPr>
           <a:xfrm>
-            <a:off x="6208776" y="3415553"/>
-            <a:ext cx="310896" cy="261411"/>
+            <a:off x="6208776" y="3286461"/>
+            <a:ext cx="310896" cy="239896"/>
           </a:xfrm>
           <a:prstGeom prst="rect">
             <a:avLst/>
@@ -47437,8 +47673,8 @@
         </p:nvSpPr>
         <p:spPr>
           <a:xfrm>
-            <a:off x="6565392" y="3415553"/>
-            <a:ext cx="1920240" cy="261411"/>
+            <a:off x="6565392" y="3286461"/>
+            <a:ext cx="1920240" cy="239896"/>
           </a:xfrm>
           <a:prstGeom prst="rect">
             <a:avLst/>
@@ -47476,8 +47712,8 @@
         </p:nvSpPr>
         <p:spPr>
           <a:xfrm>
-            <a:off x="9336024" y="3486134"/>
-            <a:ext cx="71343" cy="120249"/>
+            <a:off x="9336024" y="3351233"/>
+            <a:ext cx="71343" cy="110352"/>
           </a:xfrm>
           <a:prstGeom prst="rect">
             <a:avLst/>
@@ -47496,8 +47732,8 @@
         </p:nvSpPr>
         <p:spPr>
           <a:xfrm>
-            <a:off x="10168128" y="3415553"/>
-            <a:ext cx="1234440" cy="261411"/>
+            <a:off x="10168128" y="3286461"/>
+            <a:ext cx="1234440" cy="239896"/>
           </a:xfrm>
           <a:prstGeom prst="rect">
             <a:avLst/>
@@ -47535,8 +47771,8 @@
         </p:nvSpPr>
         <p:spPr>
           <a:xfrm>
-            <a:off x="6208776" y="3676964"/>
-            <a:ext cx="310896" cy="261411"/>
+            <a:off x="6208776" y="3526357"/>
+            <a:ext cx="310896" cy="239896"/>
           </a:xfrm>
           <a:prstGeom prst="rect">
             <a:avLst/>
@@ -47574,8 +47810,8 @@
         </p:nvSpPr>
         <p:spPr>
           <a:xfrm>
-            <a:off x="6565392" y="3676964"/>
-            <a:ext cx="1920240" cy="261411"/>
+            <a:off x="6565392" y="3526357"/>
+            <a:ext cx="1920240" cy="239896"/>
           </a:xfrm>
           <a:prstGeom prst="rect">
             <a:avLst/>
@@ -47613,8 +47849,8 @@
         </p:nvSpPr>
         <p:spPr>
           <a:xfrm>
-            <a:off x="9336024" y="3747545"/>
-            <a:ext cx="61183" cy="120249"/>
+            <a:off x="9336024" y="3591128"/>
+            <a:ext cx="61183" cy="110352"/>
           </a:xfrm>
           <a:prstGeom prst="rect">
             <a:avLst/>
@@ -47633,8 +47869,8 @@
         </p:nvSpPr>
         <p:spPr>
           <a:xfrm>
-            <a:off x="10168128" y="3676964"/>
-            <a:ext cx="1234440" cy="261411"/>
+            <a:off x="10168128" y="3526357"/>
+            <a:ext cx="1234440" cy="239896"/>
           </a:xfrm>
           <a:prstGeom prst="rect">
             <a:avLst/>
@@ -47672,8 +47908,8 @@
         </p:nvSpPr>
         <p:spPr>
           <a:xfrm>
-            <a:off x="6208776" y="3938375"/>
-            <a:ext cx="310896" cy="261411"/>
+            <a:off x="6208776" y="3766252"/>
+            <a:ext cx="310896" cy="239896"/>
           </a:xfrm>
           <a:prstGeom prst="rect">
             <a:avLst/>
@@ -47711,8 +47947,8 @@
         </p:nvSpPr>
         <p:spPr>
           <a:xfrm>
-            <a:off x="6565392" y="3938375"/>
-            <a:ext cx="1920240" cy="261411"/>
+            <a:off x="6565392" y="3766252"/>
+            <a:ext cx="1920240" cy="239896"/>
           </a:xfrm>
           <a:prstGeom prst="rect">
             <a:avLst/>
@@ -47750,8 +47986,8 @@
         </p:nvSpPr>
         <p:spPr>
           <a:xfrm>
-            <a:off x="9336024" y="4008956"/>
-            <a:ext cx="57486" cy="120249"/>
+            <a:off x="9336024" y="3831024"/>
+            <a:ext cx="57486" cy="110352"/>
           </a:xfrm>
           <a:prstGeom prst="rect">
             <a:avLst/>
@@ -47770,8 +48006,8 @@
         </p:nvSpPr>
         <p:spPr>
           <a:xfrm>
-            <a:off x="10168128" y="3938375"/>
-            <a:ext cx="1234440" cy="261411"/>
+            <a:off x="10168128" y="3766252"/>
+            <a:ext cx="1234440" cy="239896"/>
           </a:xfrm>
           <a:prstGeom prst="rect">
             <a:avLst/>
@@ -47809,8 +48045,8 @@
         </p:nvSpPr>
         <p:spPr>
           <a:xfrm>
-            <a:off x="6208776" y="4199785"/>
-            <a:ext cx="310896" cy="261411"/>
+            <a:off x="6208776" y="4006148"/>
+            <a:ext cx="310896" cy="239896"/>
           </a:xfrm>
           <a:prstGeom prst="rect">
             <a:avLst/>
@@ -47848,8 +48084,8 @@
         </p:nvSpPr>
         <p:spPr>
           <a:xfrm>
-            <a:off x="6565392" y="4199785"/>
-            <a:ext cx="1920240" cy="261411"/>
+            <a:off x="6565392" y="4006148"/>
+            <a:ext cx="1920240" cy="239896"/>
           </a:xfrm>
           <a:prstGeom prst="rect">
             <a:avLst/>
@@ -47887,8 +48123,8 @@
         </p:nvSpPr>
         <p:spPr>
           <a:xfrm>
-            <a:off x="9336024" y="4270366"/>
-            <a:ext cx="50066" cy="120249"/>
+            <a:off x="9336024" y="4070920"/>
+            <a:ext cx="50066" cy="110352"/>
           </a:xfrm>
           <a:prstGeom prst="rect">
             <a:avLst/>
@@ -47907,8 +48143,8 @@
         </p:nvSpPr>
         <p:spPr>
           <a:xfrm>
-            <a:off x="10168128" y="4199785"/>
-            <a:ext cx="1234440" cy="261411"/>
+            <a:off x="10168128" y="4006148"/>
+            <a:ext cx="1234440" cy="239896"/>
           </a:xfrm>
           <a:prstGeom prst="rect">
             <a:avLst/>
@@ -47946,8 +48182,8 @@
         </p:nvSpPr>
         <p:spPr>
           <a:xfrm>
-            <a:off x="6208776" y="4461196"/>
-            <a:ext cx="310896" cy="261411"/>
+            <a:off x="6208776" y="4246043"/>
+            <a:ext cx="310896" cy="239896"/>
           </a:xfrm>
           <a:prstGeom prst="rect">
             <a:avLst/>
@@ -47985,8 +48221,8 @@
         </p:nvSpPr>
         <p:spPr>
           <a:xfrm>
-            <a:off x="6565392" y="4461196"/>
-            <a:ext cx="1920240" cy="261411"/>
+            <a:off x="6565392" y="4246043"/>
+            <a:ext cx="1920240" cy="239896"/>
           </a:xfrm>
           <a:prstGeom prst="rect">
             <a:avLst/>
@@ -48024,8 +48260,8 @@
         </p:nvSpPr>
         <p:spPr>
           <a:xfrm>
-            <a:off x="9336024" y="4531777"/>
-            <a:ext cx="33186" cy="120249"/>
+            <a:off x="9336024" y="4310815"/>
+            <a:ext cx="33186" cy="110352"/>
           </a:xfrm>
           <a:prstGeom prst="rect">
             <a:avLst/>
@@ -48044,8 +48280,8 @@
         </p:nvSpPr>
         <p:spPr>
           <a:xfrm>
-            <a:off x="10168128" y="4461196"/>
-            <a:ext cx="1234440" cy="261411"/>
+            <a:off x="10168128" y="4246043"/>
+            <a:ext cx="1234440" cy="239896"/>
           </a:xfrm>
           <a:prstGeom prst="rect">
             <a:avLst/>
@@ -48083,8 +48319,8 @@
         </p:nvSpPr>
         <p:spPr>
           <a:xfrm>
-            <a:off x="6208776" y="4722607"/>
-            <a:ext cx="310896" cy="261411"/>
+            <a:off x="6208776" y="4485939"/>
+            <a:ext cx="310896" cy="239896"/>
           </a:xfrm>
           <a:prstGeom prst="rect">
             <a:avLst/>
@@ -48122,8 +48358,8 @@
         </p:nvSpPr>
         <p:spPr>
           <a:xfrm>
-            <a:off x="6565392" y="4722607"/>
-            <a:ext cx="1920240" cy="261411"/>
+            <a:off x="6565392" y="4485939"/>
+            <a:ext cx="1920240" cy="239896"/>
           </a:xfrm>
           <a:prstGeom prst="rect">
             <a:avLst/>
@@ -48161,8 +48397,8 @@
         </p:nvSpPr>
         <p:spPr>
           <a:xfrm>
-            <a:off x="9336024" y="4793188"/>
-            <a:ext cx="13817" cy="120249"/>
+            <a:off x="9336024" y="4550711"/>
+            <a:ext cx="13817" cy="110352"/>
           </a:xfrm>
           <a:prstGeom prst="rect">
             <a:avLst/>
@@ -48181,8 +48417,8 @@
         </p:nvSpPr>
         <p:spPr>
           <a:xfrm>
-            <a:off x="10168128" y="4722607"/>
-            <a:ext cx="1234440" cy="261411"/>
+            <a:off x="10168128" y="4485939"/>
+            <a:ext cx="1234440" cy="239896"/>
           </a:xfrm>
           <a:prstGeom prst="rect">
             <a:avLst/>
@@ -48220,8 +48456,8 @@
         </p:nvSpPr>
         <p:spPr>
           <a:xfrm>
-            <a:off x="6208776" y="4984018"/>
-            <a:ext cx="310896" cy="261411"/>
+            <a:off x="6208776" y="4725834"/>
+            <a:ext cx="310896" cy="239896"/>
           </a:xfrm>
           <a:prstGeom prst="rect">
             <a:avLst/>
@@ -48259,8 +48495,8 @@
         </p:nvSpPr>
         <p:spPr>
           <a:xfrm>
-            <a:off x="6565392" y="4984018"/>
-            <a:ext cx="1920240" cy="261411"/>
+            <a:off x="6565392" y="4725834"/>
+            <a:ext cx="1920240" cy="239896"/>
           </a:xfrm>
           <a:prstGeom prst="rect">
             <a:avLst/>
@@ -48298,8 +48534,8 @@
         </p:nvSpPr>
         <p:spPr>
           <a:xfrm>
-            <a:off x="9336024" y="5054599"/>
-            <a:ext cx="12802" cy="120249"/>
+            <a:off x="9336024" y="4790606"/>
+            <a:ext cx="12802" cy="110352"/>
           </a:xfrm>
           <a:prstGeom prst="rect">
             <a:avLst/>
@@ -48318,8 +48554,8 @@
         </p:nvSpPr>
         <p:spPr>
           <a:xfrm>
-            <a:off x="10168128" y="4984018"/>
-            <a:ext cx="1234440" cy="261411"/>
+            <a:off x="10168128" y="4725834"/>
+            <a:ext cx="1234440" cy="239896"/>
           </a:xfrm>
           <a:prstGeom prst="rect">
             <a:avLst/>
@@ -48357,8 +48593,8 @@
         </p:nvSpPr>
         <p:spPr>
           <a:xfrm>
-            <a:off x="6208776" y="5245429"/>
-            <a:ext cx="310896" cy="261411"/>
+            <a:off x="6208776" y="4965730"/>
+            <a:ext cx="310896" cy="239896"/>
           </a:xfrm>
           <a:prstGeom prst="rect">
             <a:avLst/>
@@ -48396,8 +48632,8 @@
         </p:nvSpPr>
         <p:spPr>
           <a:xfrm>
-            <a:off x="6565392" y="5245429"/>
-            <a:ext cx="1920240" cy="261411"/>
+            <a:off x="6565392" y="4965730"/>
+            <a:ext cx="1920240" cy="239896"/>
           </a:xfrm>
           <a:prstGeom prst="rect">
             <a:avLst/>
@@ -48435,8 +48671,8 @@
         </p:nvSpPr>
         <p:spPr>
           <a:xfrm>
-            <a:off x="9335137" y="5316010"/>
-            <a:ext cx="12802" cy="120249"/>
+            <a:off x="9335137" y="5030502"/>
+            <a:ext cx="12802" cy="110352"/>
           </a:xfrm>
           <a:prstGeom prst="rect">
             <a:avLst/>
@@ -48455,8 +48691,8 @@
         </p:nvSpPr>
         <p:spPr>
           <a:xfrm>
-            <a:off x="10168128" y="5245429"/>
-            <a:ext cx="1234440" cy="261411"/>
+            <a:off x="10168128" y="4965730"/>
+            <a:ext cx="1234440" cy="239896"/>
           </a:xfrm>
           <a:prstGeom prst="rect">
             <a:avLst/>
@@ -48494,8 +48730,8 @@
         </p:nvSpPr>
         <p:spPr>
           <a:xfrm>
-            <a:off x="6208776" y="5506840"/>
-            <a:ext cx="310896" cy="261411"/>
+            <a:off x="6208776" y="5205625"/>
+            <a:ext cx="310896" cy="239896"/>
           </a:xfrm>
           <a:prstGeom prst="rect">
             <a:avLst/>
@@ -48533,8 +48769,8 @@
         </p:nvSpPr>
         <p:spPr>
           <a:xfrm>
-            <a:off x="6565392" y="5506840"/>
-            <a:ext cx="1920240" cy="261411"/>
+            <a:off x="6565392" y="5205625"/>
+            <a:ext cx="1920240" cy="239896"/>
           </a:xfrm>
           <a:prstGeom prst="rect">
             <a:avLst/>
@@ -48572,8 +48808,8 @@
         </p:nvSpPr>
         <p:spPr>
           <a:xfrm>
-            <a:off x="9314711" y="5577420"/>
-            <a:ext cx="21313" cy="120249"/>
+            <a:off x="9314711" y="5270397"/>
+            <a:ext cx="21313" cy="110352"/>
           </a:xfrm>
           <a:prstGeom prst="rect">
             <a:avLst/>
@@ -48592,8 +48828,8 @@
         </p:nvSpPr>
         <p:spPr>
           <a:xfrm>
-            <a:off x="10168128" y="5506840"/>
-            <a:ext cx="1234440" cy="261411"/>
+            <a:off x="10168128" y="5205625"/>
+            <a:ext cx="1234440" cy="239896"/>
           </a:xfrm>
           <a:prstGeom prst="rect">
             <a:avLst/>
@@ -48631,8 +48867,8 @@
         </p:nvSpPr>
         <p:spPr>
           <a:xfrm>
-            <a:off x="6208776" y="5768250"/>
-            <a:ext cx="310896" cy="261411"/>
+            <a:off x="6208776" y="5445521"/>
+            <a:ext cx="310896" cy="239896"/>
           </a:xfrm>
           <a:prstGeom prst="rect">
             <a:avLst/>
@@ -48670,8 +48906,8 @@
         </p:nvSpPr>
         <p:spPr>
           <a:xfrm>
-            <a:off x="6565392" y="5768250"/>
-            <a:ext cx="1920240" cy="261411"/>
+            <a:off x="6565392" y="5445521"/>
+            <a:ext cx="1920240" cy="239896"/>
           </a:xfrm>
           <a:prstGeom prst="rect">
             <a:avLst/>
@@ -48709,8 +48945,8 @@
         </p:nvSpPr>
         <p:spPr>
           <a:xfrm>
-            <a:off x="9171193" y="5838831"/>
-            <a:ext cx="164831" cy="120249"/>
+            <a:off x="9171193" y="5510293"/>
+            <a:ext cx="164831" cy="110352"/>
           </a:xfrm>
           <a:prstGeom prst="rect">
             <a:avLst/>
@@ -48729,8 +48965,8 @@
         </p:nvSpPr>
         <p:spPr>
           <a:xfrm>
-            <a:off x="10168128" y="5768250"/>
-            <a:ext cx="1234440" cy="261411"/>
+            <a:off x="10168128" y="5445521"/>
+            <a:ext cx="1234440" cy="239896"/>
           </a:xfrm>
           <a:prstGeom prst="rect">
             <a:avLst/>
@@ -48769,7 +49005,7 @@
         <p:spPr>
           <a:xfrm>
             <a:off x="3780130" y="1847088"/>
-            <a:ext cx="10973" cy="4443984"/>
+            <a:ext cx="10973" cy="4078224"/>
           </a:xfrm>
           <a:prstGeom prst="rect">
             <a:avLst/>
@@ -48789,7 +49025,7 @@
         <p:spPr>
           <a:xfrm>
             <a:off x="9330538" y="1847088"/>
-            <a:ext cx="10973" cy="4443984"/>
+            <a:ext cx="10973" cy="4078224"/>
           </a:xfrm>
           <a:prstGeom prst="rect">
             <a:avLst/>
@@ -48809,7 +49045,7 @@
         <p:spPr>
           <a:xfrm>
             <a:off x="6085332" y="1847088"/>
-            <a:ext cx="10973" cy="4443984"/>
+            <a:ext cx="10973" cy="4078224"/>
           </a:xfrm>
           <a:prstGeom prst="rect">
             <a:avLst/>
@@ -48819,6 +49055,65 @@
           </a:solidFill>
           <a:ln/>
         </p:spPr>
+      </p:sp>
+      <p:sp>
+        <p:nvSpPr>
+          <p:cNvPr id="147" name="Shape 144"/>
+          <p:cNvSpPr/>
+          <p:nvPr/>
+        </p:nvSpPr>
+        <p:spPr>
+          <a:xfrm>
+            <a:off x="457200" y="6126480"/>
+            <a:ext cx="11274552" cy="371856"/>
+          </a:xfrm>
+          <a:prstGeom prst="rect">
+            <a:avLst/>
+          </a:prstGeom>
+          <a:solidFill>
+            <a:srgbClr val="E6F6EE"/>
+          </a:solidFill>
+          <a:ln/>
+        </p:spPr>
+      </p:sp>
+      <p:sp>
+        <p:nvSpPr>
+          <p:cNvPr id="148" name="Text 145"/>
+          <p:cNvSpPr txBox="1"/>
+          <p:nvPr/>
+        </p:nvSpPr>
+        <p:spPr>
+          <a:xfrm>
+            <a:off x="658368" y="6144768"/>
+            <a:ext cx="10927080" cy="335280"/>
+          </a:xfrm>
+          <a:prstGeom prst="rect">
+            <a:avLst/>
+          </a:prstGeom>
+          <a:noFill/>
+          <a:ln/>
+        </p:spPr>
+        <p:txBody>
+          <a:bodyPr wrap="square" lIns="0" tIns="0" rIns="0" bIns="0" rtlCol="0" anchor="ctr"/>
+          <a:lstStyle/>
+          <a:p>
+            <a:pPr indent="0" marL="0">
+              <a:buNone/>
+            </a:pPr>
+            <a:r>
+              <a:rPr lang="en-US" sz="1600" b="1" dirty="0">
+                <a:solidFill>
+                  <a:srgbClr val="0B7A4A"/>
+                </a:solidFill>
+                <a:latin typeface="Inter" pitchFamily="34" charset="0"/>
+                <a:ea typeface="Inter" pitchFamily="34" charset="-122"/>
+                <a:cs typeface="Inter" pitchFamily="34" charset="-120"/>
+              </a:rPr>
+              <a:t>30 of 33 stores raised warranty ELR. 3 declined.</a:t>
+            </a:r>
+            <a:endParaRPr lang="en-US" sz="1600" dirty="0"/>
+          </a:p>
+        </p:txBody>
       </p:sp>
     </p:spTree>
   </p:cSld>

--- a/day2-deck/decks/Warranty & Internal - House Style.pptx
+++ b/day2-deck/decks/Warranty & Internal - House Style.pptx
@@ -21604,7 +21604,27 @@
       </p:sp>
       <p:sp>
         <p:nvSpPr>
-          <p:cNvPr id="51" name="Text 49"/>
+          <p:cNvPr id="51" name="Shape 49"/>
+          <p:cNvSpPr/>
+          <p:nvPr/>
+        </p:nvSpPr>
+        <p:spPr>
+          <a:xfrm>
+            <a:off x="7775448" y="4625035"/>
+            <a:ext cx="64008" cy="755294"/>
+          </a:xfrm>
+          <a:prstGeom prst="rect">
+            <a:avLst/>
+          </a:prstGeom>
+          <a:solidFill>
+            <a:srgbClr val="2587C5"/>
+          </a:solidFill>
+          <a:ln/>
+        </p:spPr>
+      </p:sp>
+      <p:sp>
+        <p:nvSpPr>
+          <p:cNvPr id="52" name="Text 50"/>
           <p:cNvSpPr txBox="1"/>
           <p:nvPr/>
         </p:nvSpPr>
@@ -21643,7 +21663,7 @@
       </p:sp>
       <p:sp>
         <p:nvSpPr>
-          <p:cNvPr id="52" name="Text 50"/>
+          <p:cNvPr id="53" name="Text 51"/>
           <p:cNvSpPr txBox="1"/>
           <p:nvPr/>
         </p:nvSpPr>
@@ -21722,7 +21742,7 @@
       </p:sp>
       <p:sp>
         <p:nvSpPr>
-          <p:cNvPr id="53" name="Text 51"/>
+          <p:cNvPr id="54" name="Text 52"/>
           <p:cNvSpPr txBox="1"/>
           <p:nvPr/>
         </p:nvSpPr>
@@ -21761,7 +21781,7 @@
       </p:sp>
       <p:sp>
         <p:nvSpPr>
-          <p:cNvPr id="54" name="Text 52"/>
+          <p:cNvPr id="55" name="Text 53"/>
           <p:cNvSpPr txBox="1"/>
           <p:nvPr/>
         </p:nvSpPr>
@@ -21800,7 +21820,7 @@
       </p:sp>
       <p:sp>
         <p:nvSpPr>
-          <p:cNvPr id="55" name="Shape 53"/>
+          <p:cNvPr id="56" name="Shape 54"/>
           <p:cNvSpPr/>
           <p:nvPr/>
         </p:nvSpPr>
@@ -21820,7 +21840,7 @@
       </p:sp>
       <p:sp>
         <p:nvSpPr>
-          <p:cNvPr id="56" name="Text 54"/>
+          <p:cNvPr id="57" name="Text 55"/>
           <p:cNvSpPr txBox="1"/>
           <p:nvPr/>
         </p:nvSpPr>
@@ -21859,7 +21879,7 @@
       </p:sp>
       <p:sp>
         <p:nvSpPr>
-          <p:cNvPr id="57" name="Text 55"/>
+          <p:cNvPr id="58" name="Text 56"/>
           <p:cNvSpPr txBox="1"/>
           <p:nvPr/>
         </p:nvSpPr>
@@ -21938,7 +21958,7 @@
       </p:sp>
       <p:sp>
         <p:nvSpPr>
-          <p:cNvPr id="58" name="Text 56"/>
+          <p:cNvPr id="59" name="Text 57"/>
           <p:cNvSpPr txBox="1"/>
           <p:nvPr/>
         </p:nvSpPr>
@@ -21977,7 +21997,7 @@
       </p:sp>
       <p:sp>
         <p:nvSpPr>
-          <p:cNvPr id="59" name="Text 57"/>
+          <p:cNvPr id="60" name="Text 58"/>
           <p:cNvSpPr txBox="1"/>
           <p:nvPr/>
         </p:nvSpPr>
@@ -22016,7 +22036,7 @@
       </p:sp>
       <p:sp>
         <p:nvSpPr>
-          <p:cNvPr id="60" name="Shape 58"/>
+          <p:cNvPr id="61" name="Shape 59"/>
           <p:cNvSpPr/>
           <p:nvPr/>
         </p:nvSpPr>
@@ -22036,7 +22056,7 @@
       </p:sp>
       <p:sp>
         <p:nvSpPr>
-          <p:cNvPr id="61" name="Text 59"/>
+          <p:cNvPr id="62" name="Text 60"/>
           <p:cNvSpPr txBox="1"/>
           <p:nvPr/>
         </p:nvSpPr>
@@ -22075,7 +22095,7 @@
       </p:sp>
       <p:sp>
         <p:nvSpPr>
-          <p:cNvPr id="62" name="Text 60"/>
+          <p:cNvPr id="63" name="Text 61"/>
           <p:cNvSpPr txBox="1"/>
           <p:nvPr/>
         </p:nvSpPr>
@@ -22114,7 +22134,7 @@
       </p:sp>
       <p:sp>
         <p:nvSpPr>
-          <p:cNvPr id="63" name="Shape 61"/>
+          <p:cNvPr id="64" name="Shape 62"/>
           <p:cNvSpPr/>
           <p:nvPr/>
         </p:nvSpPr>
@@ -22134,7 +22154,27 @@
       </p:sp>
       <p:sp>
         <p:nvSpPr>
-          <p:cNvPr id="64" name="Text 62"/>
+          <p:cNvPr id="65" name="Shape 63"/>
+          <p:cNvSpPr/>
+          <p:nvPr/>
+        </p:nvSpPr>
+        <p:spPr>
+          <a:xfrm>
+            <a:off x="11466576" y="2139696"/>
+            <a:ext cx="64008" cy="755294"/>
+          </a:xfrm>
+          <a:prstGeom prst="rect">
+            <a:avLst/>
+          </a:prstGeom>
+          <a:solidFill>
+            <a:srgbClr val="2587C5"/>
+          </a:solidFill>
+          <a:ln/>
+        </p:spPr>
+      </p:sp>
+      <p:sp>
+        <p:nvSpPr>
+          <p:cNvPr id="66" name="Text 64"/>
           <p:cNvSpPr txBox="1"/>
           <p:nvPr/>
         </p:nvSpPr>
@@ -22173,7 +22213,7 @@
       </p:sp>
       <p:sp>
         <p:nvSpPr>
-          <p:cNvPr id="65" name="Text 63"/>
+          <p:cNvPr id="67" name="Text 65"/>
           <p:cNvSpPr txBox="1"/>
           <p:nvPr/>
         </p:nvSpPr>
@@ -22252,7 +22292,7 @@
       </p:sp>
       <p:sp>
         <p:nvSpPr>
-          <p:cNvPr id="66" name="Text 64"/>
+          <p:cNvPr id="68" name="Text 66"/>
           <p:cNvSpPr txBox="1"/>
           <p:nvPr/>
         </p:nvSpPr>
@@ -22291,7 +22331,7 @@
       </p:sp>
       <p:sp>
         <p:nvSpPr>
-          <p:cNvPr id="67" name="Text 65"/>
+          <p:cNvPr id="69" name="Text 67"/>
           <p:cNvSpPr txBox="1"/>
           <p:nvPr/>
         </p:nvSpPr>
@@ -22330,7 +22370,7 @@
       </p:sp>
       <p:sp>
         <p:nvSpPr>
-          <p:cNvPr id="68" name="Shape 66"/>
+          <p:cNvPr id="70" name="Shape 68"/>
           <p:cNvSpPr/>
           <p:nvPr/>
         </p:nvSpPr>
@@ -22350,7 +22390,7 @@
       </p:sp>
       <p:sp>
         <p:nvSpPr>
-          <p:cNvPr id="69" name="Text 67"/>
+          <p:cNvPr id="71" name="Text 69"/>
           <p:cNvSpPr txBox="1"/>
           <p:nvPr/>
         </p:nvSpPr>
@@ -22389,7 +22429,7 @@
       </p:sp>
       <p:sp>
         <p:nvSpPr>
-          <p:cNvPr id="70" name="Text 68"/>
+          <p:cNvPr id="72" name="Text 70"/>
           <p:cNvSpPr txBox="1"/>
           <p:nvPr/>
         </p:nvSpPr>
@@ -22468,7 +22508,7 @@
       </p:sp>
       <p:sp>
         <p:nvSpPr>
-          <p:cNvPr id="71" name="Text 69"/>
+          <p:cNvPr id="73" name="Text 71"/>
           <p:cNvSpPr txBox="1"/>
           <p:nvPr/>
         </p:nvSpPr>
@@ -22507,7 +22547,7 @@
       </p:sp>
       <p:sp>
         <p:nvSpPr>
-          <p:cNvPr id="72" name="Text 70"/>
+          <p:cNvPr id="74" name="Text 72"/>
           <p:cNvSpPr txBox="1"/>
           <p:nvPr/>
         </p:nvSpPr>
@@ -22546,7 +22586,7 @@
       </p:sp>
       <p:sp>
         <p:nvSpPr>
-          <p:cNvPr id="73" name="Shape 71"/>
+          <p:cNvPr id="75" name="Shape 73"/>
           <p:cNvSpPr/>
           <p:nvPr/>
         </p:nvSpPr>
@@ -22566,7 +22606,7 @@
       </p:sp>
       <p:sp>
         <p:nvSpPr>
-          <p:cNvPr id="74" name="Shape 72"/>
+          <p:cNvPr id="76" name="Shape 74"/>
           <p:cNvSpPr/>
           <p:nvPr/>
         </p:nvSpPr>
@@ -22586,7 +22626,7 @@
       </p:sp>
       <p:sp>
         <p:nvSpPr>
-          <p:cNvPr id="75" name="Text 73"/>
+          <p:cNvPr id="77" name="Text 75"/>
           <p:cNvSpPr txBox="1"/>
           <p:nvPr/>
         </p:nvSpPr>
@@ -22625,7 +22665,7 @@
       </p:sp>
       <p:sp>
         <p:nvSpPr>
-          <p:cNvPr id="76" name="Text 74"/>
+          <p:cNvPr id="78" name="Text 76"/>
           <p:cNvSpPr txBox="1"/>
           <p:nvPr/>
         </p:nvSpPr>
@@ -22704,7 +22744,7 @@
       </p:sp>
       <p:sp>
         <p:nvSpPr>
-          <p:cNvPr id="77" name="Text 75"/>
+          <p:cNvPr id="79" name="Text 77"/>
           <p:cNvSpPr txBox="1"/>
           <p:nvPr/>
         </p:nvSpPr>
@@ -22743,7 +22783,7 @@
       </p:sp>
       <p:sp>
         <p:nvSpPr>
-          <p:cNvPr id="78" name="Text 76"/>
+          <p:cNvPr id="80" name="Text 78"/>
           <p:cNvSpPr txBox="1"/>
           <p:nvPr/>
         </p:nvSpPr>
@@ -22782,7 +22822,7 @@
       </p:sp>
       <p:sp>
         <p:nvSpPr>
-          <p:cNvPr id="79" name="Text 77"/>
+          <p:cNvPr id="81" name="Text 79"/>
           <p:cNvSpPr txBox="1"/>
           <p:nvPr/>
         </p:nvSpPr>
@@ -22821,7 +22861,7 @@
       </p:sp>
       <p:sp>
         <p:nvSpPr>
-          <p:cNvPr id="80" name="Text 78"/>
+          <p:cNvPr id="82" name="Text 80"/>
           <p:cNvSpPr txBox="1"/>
           <p:nvPr/>
         </p:nvSpPr>
@@ -22900,7 +22940,7 @@
       </p:sp>
       <p:sp>
         <p:nvSpPr>
-          <p:cNvPr id="81" name="Text 79"/>
+          <p:cNvPr id="83" name="Text 81"/>
           <p:cNvSpPr txBox="1"/>
           <p:nvPr/>
         </p:nvSpPr>
@@ -22939,7 +22979,7 @@
       </p:sp>
       <p:sp>
         <p:nvSpPr>
-          <p:cNvPr id="82" name="Text 80"/>
+          <p:cNvPr id="84" name="Text 82"/>
           <p:cNvSpPr txBox="1"/>
           <p:nvPr/>
         </p:nvSpPr>
@@ -22978,7 +23018,7 @@
       </p:sp>
       <p:sp>
         <p:nvSpPr>
-          <p:cNvPr id="83" name="Shape 81"/>
+          <p:cNvPr id="85" name="Shape 83"/>
           <p:cNvSpPr/>
           <p:nvPr/>
         </p:nvSpPr>
@@ -22998,7 +23038,7 @@
       </p:sp>
       <p:sp>
         <p:nvSpPr>
-          <p:cNvPr id="84" name="Text 82"/>
+          <p:cNvPr id="86" name="Text 84"/>
           <p:cNvSpPr txBox="1"/>
           <p:nvPr/>
         </p:nvSpPr>
@@ -23037,7 +23077,7 @@
       </p:sp>
       <p:sp>
         <p:nvSpPr>
-          <p:cNvPr id="85" name="Text 83"/>
+          <p:cNvPr id="87" name="Text 85"/>
           <p:cNvSpPr txBox="1"/>
           <p:nvPr/>
         </p:nvSpPr>
@@ -23116,7 +23156,7 @@
       </p:sp>
       <p:sp>
         <p:nvSpPr>
-          <p:cNvPr id="86" name="Text 84"/>
+          <p:cNvPr id="88" name="Text 86"/>
           <p:cNvSpPr txBox="1"/>
           <p:nvPr/>
         </p:nvSpPr>
@@ -23155,7 +23195,7 @@
       </p:sp>
       <p:sp>
         <p:nvSpPr>
-          <p:cNvPr id="87" name="Text 85"/>
+          <p:cNvPr id="89" name="Text 87"/>
           <p:cNvSpPr txBox="1"/>
           <p:nvPr/>
         </p:nvSpPr>
@@ -37108,7 +37148,27 @@
       </p:sp>
       <p:sp>
         <p:nvSpPr>
-          <p:cNvPr id="41" name="Text 39"/>
+          <p:cNvPr id="41" name="Shape 39"/>
+          <p:cNvSpPr/>
+          <p:nvPr/>
+        </p:nvSpPr>
+        <p:spPr>
+          <a:xfrm>
+            <a:off x="7775448" y="4625035"/>
+            <a:ext cx="64008" cy="755294"/>
+          </a:xfrm>
+          <a:prstGeom prst="rect">
+            <a:avLst/>
+          </a:prstGeom>
+          <a:solidFill>
+            <a:srgbClr val="2587C5"/>
+          </a:solidFill>
+          <a:ln/>
+        </p:spPr>
+      </p:sp>
+      <p:sp>
+        <p:nvSpPr>
+          <p:cNvPr id="42" name="Text 40"/>
           <p:cNvSpPr txBox="1"/>
           <p:nvPr/>
         </p:nvSpPr>
@@ -37147,7 +37207,7 @@
       </p:sp>
       <p:sp>
         <p:nvSpPr>
-          <p:cNvPr id="42" name="Text 40"/>
+          <p:cNvPr id="43" name="Text 41"/>
           <p:cNvSpPr txBox="1"/>
           <p:nvPr/>
         </p:nvSpPr>
@@ -37226,7 +37286,7 @@
       </p:sp>
       <p:sp>
         <p:nvSpPr>
-          <p:cNvPr id="43" name="Text 41"/>
+          <p:cNvPr id="44" name="Text 42"/>
           <p:cNvSpPr txBox="1"/>
           <p:nvPr/>
         </p:nvSpPr>
@@ -37265,7 +37325,7 @@
       </p:sp>
       <p:sp>
         <p:nvSpPr>
-          <p:cNvPr id="44" name="Shape 42"/>
+          <p:cNvPr id="45" name="Shape 43"/>
           <p:cNvSpPr/>
           <p:nvPr/>
         </p:nvSpPr>
@@ -37285,7 +37345,7 @@
       </p:sp>
       <p:sp>
         <p:nvSpPr>
-          <p:cNvPr id="45" name="Text 43"/>
+          <p:cNvPr id="46" name="Text 44"/>
           <p:cNvSpPr txBox="1"/>
           <p:nvPr/>
         </p:nvSpPr>
@@ -37324,7 +37384,7 @@
       </p:sp>
       <p:sp>
         <p:nvSpPr>
-          <p:cNvPr id="46" name="Text 44"/>
+          <p:cNvPr id="47" name="Text 45"/>
           <p:cNvSpPr txBox="1"/>
           <p:nvPr/>
         </p:nvSpPr>
@@ -37403,7 +37463,7 @@
       </p:sp>
       <p:sp>
         <p:nvSpPr>
-          <p:cNvPr id="47" name="Text 45"/>
+          <p:cNvPr id="48" name="Text 46"/>
           <p:cNvSpPr txBox="1"/>
           <p:nvPr/>
         </p:nvSpPr>
@@ -37442,7 +37502,7 @@
       </p:sp>
       <p:sp>
         <p:nvSpPr>
-          <p:cNvPr id="48" name="Shape 46"/>
+          <p:cNvPr id="49" name="Shape 47"/>
           <p:cNvSpPr/>
           <p:nvPr/>
         </p:nvSpPr>
@@ -37462,7 +37522,7 @@
       </p:sp>
       <p:sp>
         <p:nvSpPr>
-          <p:cNvPr id="49" name="Text 47"/>
+          <p:cNvPr id="50" name="Text 48"/>
           <p:cNvSpPr txBox="1"/>
           <p:nvPr/>
         </p:nvSpPr>
@@ -37501,7 +37561,7 @@
       </p:sp>
       <p:sp>
         <p:nvSpPr>
-          <p:cNvPr id="50" name="Text 48"/>
+          <p:cNvPr id="51" name="Text 49"/>
           <p:cNvSpPr txBox="1"/>
           <p:nvPr/>
         </p:nvSpPr>
@@ -37540,7 +37600,7 @@
       </p:sp>
       <p:sp>
         <p:nvSpPr>
-          <p:cNvPr id="51" name="Shape 49"/>
+          <p:cNvPr id="52" name="Shape 50"/>
           <p:cNvSpPr/>
           <p:nvPr/>
         </p:nvSpPr>
@@ -37560,7 +37620,27 @@
       </p:sp>
       <p:sp>
         <p:nvSpPr>
-          <p:cNvPr id="52" name="Text 50"/>
+          <p:cNvPr id="53" name="Shape 51"/>
+          <p:cNvSpPr/>
+          <p:nvPr/>
+        </p:nvSpPr>
+        <p:spPr>
+          <a:xfrm>
+            <a:off x="11466576" y="2139696"/>
+            <a:ext cx="64008" cy="755294"/>
+          </a:xfrm>
+          <a:prstGeom prst="rect">
+            <a:avLst/>
+          </a:prstGeom>
+          <a:solidFill>
+            <a:srgbClr val="2587C5"/>
+          </a:solidFill>
+          <a:ln/>
+        </p:spPr>
+      </p:sp>
+      <p:sp>
+        <p:nvSpPr>
+          <p:cNvPr id="54" name="Text 52"/>
           <p:cNvSpPr txBox="1"/>
           <p:nvPr/>
         </p:nvSpPr>
@@ -37599,7 +37679,7 @@
       </p:sp>
       <p:sp>
         <p:nvSpPr>
-          <p:cNvPr id="53" name="Text 51"/>
+          <p:cNvPr id="55" name="Text 53"/>
           <p:cNvSpPr txBox="1"/>
           <p:nvPr/>
         </p:nvSpPr>
@@ -37678,7 +37758,7 @@
       </p:sp>
       <p:sp>
         <p:nvSpPr>
-          <p:cNvPr id="54" name="Text 52"/>
+          <p:cNvPr id="56" name="Text 54"/>
           <p:cNvSpPr txBox="1"/>
           <p:nvPr/>
         </p:nvSpPr>
@@ -37717,7 +37797,7 @@
       </p:sp>
       <p:sp>
         <p:nvSpPr>
-          <p:cNvPr id="55" name="Text 53"/>
+          <p:cNvPr id="57" name="Text 55"/>
           <p:cNvSpPr txBox="1"/>
           <p:nvPr/>
         </p:nvSpPr>
@@ -37756,7 +37836,7 @@
       </p:sp>
       <p:sp>
         <p:nvSpPr>
-          <p:cNvPr id="56" name="Text 54"/>
+          <p:cNvPr id="58" name="Text 56"/>
           <p:cNvSpPr txBox="1"/>
           <p:nvPr/>
         </p:nvSpPr>
@@ -37835,7 +37915,7 @@
       </p:sp>
       <p:sp>
         <p:nvSpPr>
-          <p:cNvPr id="57" name="Text 55"/>
+          <p:cNvPr id="59" name="Text 57"/>
           <p:cNvSpPr txBox="1"/>
           <p:nvPr/>
         </p:nvSpPr>
@@ -37874,7 +37954,7 @@
       </p:sp>
       <p:sp>
         <p:nvSpPr>
-          <p:cNvPr id="58" name="Shape 56"/>
+          <p:cNvPr id="60" name="Shape 58"/>
           <p:cNvSpPr/>
           <p:nvPr/>
         </p:nvSpPr>
@@ -37894,7 +37974,7 @@
       </p:sp>
       <p:sp>
         <p:nvSpPr>
-          <p:cNvPr id="59" name="Text 57"/>
+          <p:cNvPr id="61" name="Text 59"/>
           <p:cNvSpPr txBox="1"/>
           <p:nvPr/>
         </p:nvSpPr>
@@ -37933,7 +38013,7 @@
       </p:sp>
       <p:sp>
         <p:nvSpPr>
-          <p:cNvPr id="60" name="Text 58"/>
+          <p:cNvPr id="62" name="Text 60"/>
           <p:cNvSpPr txBox="1"/>
           <p:nvPr/>
         </p:nvSpPr>
@@ -38012,7 +38092,7 @@
       </p:sp>
       <p:sp>
         <p:nvSpPr>
-          <p:cNvPr id="61" name="Text 59"/>
+          <p:cNvPr id="63" name="Text 61"/>
           <p:cNvSpPr txBox="1"/>
           <p:nvPr/>
         </p:nvSpPr>
@@ -38051,7 +38131,7 @@
       </p:sp>
       <p:sp>
         <p:nvSpPr>
-          <p:cNvPr id="62" name="Text 60"/>
+          <p:cNvPr id="64" name="Text 62"/>
           <p:cNvSpPr txBox="1"/>
           <p:nvPr/>
         </p:nvSpPr>
@@ -38090,7 +38170,7 @@
       </p:sp>
       <p:sp>
         <p:nvSpPr>
-          <p:cNvPr id="63" name="Text 61"/>
+          <p:cNvPr id="65" name="Text 63"/>
           <p:cNvSpPr txBox="1"/>
           <p:nvPr/>
         </p:nvSpPr>
@@ -38169,7 +38249,7 @@
       </p:sp>
       <p:sp>
         <p:nvSpPr>
-          <p:cNvPr id="64" name="Text 62"/>
+          <p:cNvPr id="66" name="Text 64"/>
           <p:cNvSpPr txBox="1"/>
           <p:nvPr/>
         </p:nvSpPr>
@@ -38208,7 +38288,7 @@
       </p:sp>
       <p:sp>
         <p:nvSpPr>
-          <p:cNvPr id="65" name="Shape 63"/>
+          <p:cNvPr id="67" name="Shape 65"/>
           <p:cNvSpPr/>
           <p:nvPr/>
         </p:nvSpPr>
@@ -38228,7 +38308,7 @@
       </p:sp>
       <p:sp>
         <p:nvSpPr>
-          <p:cNvPr id="66" name="Text 64"/>
+          <p:cNvPr id="68" name="Text 66"/>
           <p:cNvSpPr txBox="1"/>
           <p:nvPr/>
         </p:nvSpPr>
@@ -38267,7 +38347,7 @@
       </p:sp>
       <p:sp>
         <p:nvSpPr>
-          <p:cNvPr id="67" name="Text 65"/>
+          <p:cNvPr id="69" name="Text 67"/>
           <p:cNvSpPr txBox="1"/>
           <p:nvPr/>
         </p:nvSpPr>
@@ -38346,7 +38426,7 @@
       </p:sp>
       <p:sp>
         <p:nvSpPr>
-          <p:cNvPr id="68" name="Text 66"/>
+          <p:cNvPr id="70" name="Text 68"/>
           <p:cNvSpPr txBox="1"/>
           <p:nvPr/>
         </p:nvSpPr>
@@ -50368,7 +50448,27 @@
       </p:sp>
       <p:sp>
         <p:nvSpPr>
-          <p:cNvPr id="33" name="Text 31"/>
+          <p:cNvPr id="33" name="Shape 31"/>
+          <p:cNvSpPr/>
+          <p:nvPr/>
+        </p:nvSpPr>
+        <p:spPr>
+          <a:xfrm>
+            <a:off x="7775448" y="2139696"/>
+            <a:ext cx="64008" cy="755294"/>
+          </a:xfrm>
+          <a:prstGeom prst="rect">
+            <a:avLst/>
+          </a:prstGeom>
+          <a:solidFill>
+            <a:srgbClr val="2587C5"/>
+          </a:solidFill>
+          <a:ln/>
+        </p:spPr>
+      </p:sp>
+      <p:sp>
+        <p:nvSpPr>
+          <p:cNvPr id="34" name="Text 32"/>
           <p:cNvSpPr txBox="1"/>
           <p:nvPr/>
         </p:nvSpPr>
@@ -50407,7 +50507,7 @@
       </p:sp>
       <p:sp>
         <p:nvSpPr>
-          <p:cNvPr id="34" name="Text 32"/>
+          <p:cNvPr id="35" name="Text 33"/>
           <p:cNvSpPr txBox="1"/>
           <p:nvPr/>
         </p:nvSpPr>
@@ -50486,7 +50586,7 @@
       </p:sp>
       <p:sp>
         <p:nvSpPr>
-          <p:cNvPr id="35" name="Text 33"/>
+          <p:cNvPr id="36" name="Text 34"/>
           <p:cNvSpPr txBox="1"/>
           <p:nvPr/>
         </p:nvSpPr>
@@ -50525,7 +50625,7 @@
       </p:sp>
       <p:sp>
         <p:nvSpPr>
-          <p:cNvPr id="36" name="Text 34"/>
+          <p:cNvPr id="37" name="Text 35"/>
           <p:cNvSpPr txBox="1"/>
           <p:nvPr/>
         </p:nvSpPr>
@@ -50564,7 +50664,7 @@
       </p:sp>
       <p:sp>
         <p:nvSpPr>
-          <p:cNvPr id="37" name="Text 35"/>
+          <p:cNvPr id="38" name="Text 36"/>
           <p:cNvSpPr txBox="1"/>
           <p:nvPr/>
         </p:nvSpPr>
@@ -50643,7 +50743,7 @@
       </p:sp>
       <p:sp>
         <p:nvSpPr>
-          <p:cNvPr id="38" name="Text 36"/>
+          <p:cNvPr id="39" name="Text 37"/>
           <p:cNvSpPr txBox="1"/>
           <p:nvPr/>
         </p:nvSpPr>
@@ -50682,7 +50782,7 @@
       </p:sp>
       <p:sp>
         <p:nvSpPr>
-          <p:cNvPr id="39" name="Shape 37"/>
+          <p:cNvPr id="40" name="Shape 38"/>
           <p:cNvSpPr/>
           <p:nvPr/>
         </p:nvSpPr>
@@ -50702,7 +50802,7 @@
       </p:sp>
       <p:sp>
         <p:nvSpPr>
-          <p:cNvPr id="40" name="Text 38"/>
+          <p:cNvPr id="41" name="Text 39"/>
           <p:cNvSpPr txBox="1"/>
           <p:nvPr/>
         </p:nvSpPr>
@@ -50741,7 +50841,7 @@
       </p:sp>
       <p:sp>
         <p:nvSpPr>
-          <p:cNvPr id="41" name="Text 39"/>
+          <p:cNvPr id="42" name="Text 40"/>
           <p:cNvSpPr txBox="1"/>
           <p:nvPr/>
         </p:nvSpPr>
@@ -50820,7 +50920,7 @@
       </p:sp>
       <p:sp>
         <p:nvSpPr>
-          <p:cNvPr id="42" name="Text 40"/>
+          <p:cNvPr id="43" name="Text 41"/>
           <p:cNvSpPr txBox="1"/>
           <p:nvPr/>
         </p:nvSpPr>
@@ -50859,7 +50959,7 @@
       </p:sp>
       <p:sp>
         <p:nvSpPr>
-          <p:cNvPr id="43" name="Text 41"/>
+          <p:cNvPr id="44" name="Text 42"/>
           <p:cNvSpPr txBox="1"/>
           <p:nvPr/>
         </p:nvSpPr>
@@ -50898,7 +50998,7 @@
       </p:sp>
       <p:sp>
         <p:nvSpPr>
-          <p:cNvPr id="44" name="Text 42"/>
+          <p:cNvPr id="45" name="Text 43"/>
           <p:cNvSpPr txBox="1"/>
           <p:nvPr/>
         </p:nvSpPr>
@@ -50977,7 +51077,7 @@
       </p:sp>
       <p:sp>
         <p:nvSpPr>
-          <p:cNvPr id="45" name="Text 43"/>
+          <p:cNvPr id="46" name="Text 44"/>
           <p:cNvSpPr txBox="1"/>
           <p:nvPr/>
         </p:nvSpPr>
@@ -51016,7 +51116,7 @@
       </p:sp>
       <p:sp>
         <p:nvSpPr>
-          <p:cNvPr id="46" name="Shape 44"/>
+          <p:cNvPr id="47" name="Shape 45"/>
           <p:cNvSpPr/>
           <p:nvPr/>
         </p:nvSpPr>
@@ -51036,7 +51136,7 @@
       </p:sp>
       <p:sp>
         <p:nvSpPr>
-          <p:cNvPr id="47" name="Text 45"/>
+          <p:cNvPr id="48" name="Text 46"/>
           <p:cNvSpPr txBox="1"/>
           <p:nvPr/>
         </p:nvSpPr>
@@ -51075,7 +51175,7 @@
       </p:sp>
       <p:sp>
         <p:nvSpPr>
-          <p:cNvPr id="48" name="Text 46"/>
+          <p:cNvPr id="49" name="Text 47"/>
           <p:cNvSpPr txBox="1"/>
           <p:nvPr/>
         </p:nvSpPr>
@@ -51154,7 +51254,7 @@
       </p:sp>
       <p:sp>
         <p:nvSpPr>
-          <p:cNvPr id="49" name="Text 47"/>
+          <p:cNvPr id="50" name="Text 48"/>
           <p:cNvSpPr txBox="1"/>
           <p:nvPr/>
         </p:nvSpPr>
@@ -51193,7 +51293,7 @@
       </p:sp>
       <p:sp>
         <p:nvSpPr>
-          <p:cNvPr id="50" name="Shape 48"/>
+          <p:cNvPr id="51" name="Shape 49"/>
           <p:cNvSpPr/>
           <p:nvPr/>
         </p:nvSpPr>
@@ -51213,7 +51313,7 @@
       </p:sp>
       <p:sp>
         <p:nvSpPr>
-          <p:cNvPr id="51" name="Text 49"/>
+          <p:cNvPr id="52" name="Text 50"/>
           <p:cNvSpPr txBox="1"/>
           <p:nvPr/>
         </p:nvSpPr>
@@ -51252,7 +51352,7 @@
       </p:sp>
       <p:sp>
         <p:nvSpPr>
-          <p:cNvPr id="52" name="Text 50"/>
+          <p:cNvPr id="53" name="Text 51"/>
           <p:cNvSpPr txBox="1"/>
           <p:nvPr/>
         </p:nvSpPr>
@@ -51291,7 +51391,7 @@
       </p:sp>
       <p:sp>
         <p:nvSpPr>
-          <p:cNvPr id="53" name="Shape 51"/>
+          <p:cNvPr id="54" name="Shape 52"/>
           <p:cNvSpPr/>
           <p:nvPr/>
         </p:nvSpPr>
@@ -51311,7 +51411,7 @@
       </p:sp>
       <p:sp>
         <p:nvSpPr>
-          <p:cNvPr id="54" name="Shape 52"/>
+          <p:cNvPr id="55" name="Shape 53"/>
           <p:cNvSpPr/>
           <p:nvPr/>
         </p:nvSpPr>
@@ -51331,7 +51431,7 @@
       </p:sp>
       <p:sp>
         <p:nvSpPr>
-          <p:cNvPr id="55" name="Text 53"/>
+          <p:cNvPr id="56" name="Text 54"/>
           <p:cNvSpPr txBox="1"/>
           <p:nvPr/>
         </p:nvSpPr>
@@ -51370,7 +51470,7 @@
       </p:sp>
       <p:sp>
         <p:nvSpPr>
-          <p:cNvPr id="56" name="Text 54"/>
+          <p:cNvPr id="57" name="Text 55"/>
           <p:cNvSpPr txBox="1"/>
           <p:nvPr/>
         </p:nvSpPr>
@@ -51449,7 +51549,7 @@
       </p:sp>
       <p:sp>
         <p:nvSpPr>
-          <p:cNvPr id="57" name="Text 55"/>
+          <p:cNvPr id="58" name="Text 56"/>
           <p:cNvSpPr txBox="1"/>
           <p:nvPr/>
         </p:nvSpPr>
@@ -51488,7 +51588,7 @@
       </p:sp>
       <p:sp>
         <p:nvSpPr>
-          <p:cNvPr id="58" name="Shape 56"/>
+          <p:cNvPr id="59" name="Shape 57"/>
           <p:cNvSpPr/>
           <p:nvPr/>
         </p:nvSpPr>
@@ -51508,7 +51608,7 @@
       </p:sp>
       <p:sp>
         <p:nvSpPr>
-          <p:cNvPr id="59" name="Text 57"/>
+          <p:cNvPr id="60" name="Text 58"/>
           <p:cNvSpPr txBox="1"/>
           <p:nvPr/>
         </p:nvSpPr>
@@ -51547,7 +51647,7 @@
       </p:sp>
       <p:sp>
         <p:nvSpPr>
-          <p:cNvPr id="60" name="Text 58"/>
+          <p:cNvPr id="61" name="Text 59"/>
           <p:cNvSpPr txBox="1"/>
           <p:nvPr/>
         </p:nvSpPr>
@@ -51626,7 +51726,7 @@
       </p:sp>
       <p:sp>
         <p:nvSpPr>
-          <p:cNvPr id="61" name="Text 59"/>
+          <p:cNvPr id="62" name="Text 60"/>
           <p:cNvSpPr txBox="1"/>
           <p:nvPr/>
         </p:nvSpPr>
@@ -51665,7 +51765,7 @@
       </p:sp>
       <p:sp>
         <p:nvSpPr>
-          <p:cNvPr id="62" name="Shape 60"/>
+          <p:cNvPr id="63" name="Shape 61"/>
           <p:cNvSpPr/>
           <p:nvPr/>
         </p:nvSpPr>
@@ -51685,7 +51785,7 @@
       </p:sp>
       <p:sp>
         <p:nvSpPr>
-          <p:cNvPr id="63" name="Text 61"/>
+          <p:cNvPr id="64" name="Text 62"/>
           <p:cNvSpPr txBox="1"/>
           <p:nvPr/>
         </p:nvSpPr>
@@ -51724,7 +51824,7 @@
       </p:sp>
       <p:sp>
         <p:nvSpPr>
-          <p:cNvPr id="64" name="Text 62"/>
+          <p:cNvPr id="65" name="Text 63"/>
           <p:cNvSpPr txBox="1"/>
           <p:nvPr/>
         </p:nvSpPr>
@@ -51803,7 +51903,7 @@
       </p:sp>
       <p:sp>
         <p:nvSpPr>
-          <p:cNvPr id="65" name="Text 63"/>
+          <p:cNvPr id="66" name="Text 64"/>
           <p:cNvSpPr txBox="1"/>
           <p:nvPr/>
         </p:nvSpPr>
@@ -51842,7 +51942,27 @@
       </p:sp>
       <p:sp>
         <p:nvSpPr>
-          <p:cNvPr id="66" name="Text 64"/>
+          <p:cNvPr id="67" name="Shape 65"/>
+          <p:cNvSpPr/>
+          <p:nvPr/>
+        </p:nvSpPr>
+        <p:spPr>
+          <a:xfrm>
+            <a:off x="11466576" y="4625035"/>
+            <a:ext cx="64008" cy="755294"/>
+          </a:xfrm>
+          <a:prstGeom prst="rect">
+            <a:avLst/>
+          </a:prstGeom>
+          <a:solidFill>
+            <a:srgbClr val="2587C5"/>
+          </a:solidFill>
+          <a:ln/>
+        </p:spPr>
+      </p:sp>
+      <p:sp>
+        <p:nvSpPr>
+          <p:cNvPr id="68" name="Text 66"/>
           <p:cNvSpPr txBox="1"/>
           <p:nvPr/>
         </p:nvSpPr>
@@ -51881,7 +52001,7 @@
       </p:sp>
       <p:sp>
         <p:nvSpPr>
-          <p:cNvPr id="67" name="Text 65"/>
+          <p:cNvPr id="69" name="Text 67"/>
           <p:cNvSpPr txBox="1"/>
           <p:nvPr/>
         </p:nvSpPr>
@@ -51960,7 +52080,7 @@
       </p:sp>
       <p:sp>
         <p:nvSpPr>
-          <p:cNvPr id="68" name="Text 66"/>
+          <p:cNvPr id="70" name="Text 68"/>
           <p:cNvSpPr txBox="1"/>
           <p:nvPr/>
         </p:nvSpPr>
@@ -51999,7 +52119,7 @@
       </p:sp>
       <p:sp>
         <p:nvSpPr>
-          <p:cNvPr id="69" name="Shape 67"/>
+          <p:cNvPr id="71" name="Shape 69"/>
           <p:cNvSpPr/>
           <p:nvPr/>
         </p:nvSpPr>
@@ -52019,7 +52139,7 @@
       </p:sp>
       <p:sp>
         <p:nvSpPr>
-          <p:cNvPr id="70" name="Text 68"/>
+          <p:cNvPr id="72" name="Text 70"/>
           <p:cNvSpPr txBox="1"/>
           <p:nvPr/>
         </p:nvSpPr>
@@ -52058,7 +52178,7 @@
       </p:sp>
       <p:sp>
         <p:nvSpPr>
-          <p:cNvPr id="71" name="Text 69"/>
+          <p:cNvPr id="73" name="Text 71"/>
           <p:cNvSpPr txBox="1"/>
           <p:nvPr/>
         </p:nvSpPr>
@@ -52137,7 +52257,7 @@
       </p:sp>
       <p:sp>
         <p:nvSpPr>
-          <p:cNvPr id="72" name="Text 70"/>
+          <p:cNvPr id="74" name="Text 72"/>
           <p:cNvSpPr txBox="1"/>
           <p:nvPr/>
         </p:nvSpPr>

--- a/day2-deck/decks/Warranty & Internal - House Style.pptx
+++ b/day2-deck/decks/Warranty & Internal - House Style.pptx
@@ -22126,7 +22126,7 @@
                 <a:ea typeface="Inter" pitchFamily="34" charset="-122"/>
                 <a:cs typeface="Inter" pitchFamily="34" charset="-120"/>
               </a:rPr>
-              <a:t>Jul–Sep vs Jan–Mar this year</a:t>
+              <a:t>Q3 vs Q1, this year</a:t>
             </a:r>
             <a:endParaRPr lang="en-US" sz="1200" dirty="0"/>
           </a:p>
@@ -37592,7 +37592,7 @@
                 <a:ea typeface="Inter" pitchFamily="34" charset="-122"/>
                 <a:cs typeface="Inter" pitchFamily="34" charset="-120"/>
               </a:rPr>
-              <a:t>Jul–Sep vs Jan–Mar this year</a:t>
+              <a:t>Q3 vs Q1, this year</a:t>
             </a:r>
             <a:endParaRPr lang="en-US" sz="1200" dirty="0"/>
           </a:p>
@@ -51383,7 +51383,7 @@
                 <a:ea typeface="Inter" pitchFamily="34" charset="-122"/>
                 <a:cs typeface="Inter" pitchFamily="34" charset="-120"/>
               </a:rPr>
-              <a:t>Jul–Sep vs Jan–Mar this year</a:t>
+              <a:t>Q3 vs Q1, this year</a:t>
             </a:r>
             <a:endParaRPr lang="en-US" sz="1200" dirty="0"/>
           </a:p>

--- a/day2-deck/decks/Warranty & Internal - House Style.pptx
+++ b/day2-deck/decks/Warranty & Internal - House Style.pptx
@@ -6163,7 +6163,7 @@
           <a:p>
             <a:r>
               <a:rPr lang="en-US" dirty="0"/>
-              <a:t>Takeaway with the store call-outs (off the slide): Ask Hyundai St George, LR Reno and Lincoln what changed. Ask Nissan, Kia LV and Mazda what got in the way. Ask Acura, Hyundai St George and Toyota Henderson what they started this year.Source: Qlik - Closed Repair Orders. Jan-Sep by close month. Same-store, INEOS excluded (opened 2026). GMC Prescott body shop labor types excluded. Internal labor sale / internal sold hours. A higher internal rate adds service gross but is a cost to used cars. Top and bottom five stores by change in Internal ELR, Jan-Sep 2026 vs 2025. Moving now: Jul-Sep 2026 vs Jan-Mar 2026, each store against itself; the group moved +4.1% on the same basis, so part of every store's change is seasonal. Green bar at the right of a row: the store is on both the top five vs last year and the top five moving now.Conversation starter: each top store says one thing they started doing; each bottom store says what got in the way and what they would try. The room trades ideas. Moving now: ask the top three what they started this year.</a:t>
+              <a:t>Takeaway with the store call-outs (off the slide): Ask Hyundai St George, LR Reno and Lincoln what changed. Ask Nissan, Kia LV and Mazda what got in the way. Ask Acura, Hyundai St George and Toyota Henderson what they started this year.Source: Qlik - Closed Repair Orders. Jan-Sep by close month. Same-store, INEOS excluded (opened 2026). GMC Prescott body shop labor types excluded. Internal labor sale / internal sold hours. A higher internal rate adds service gross but is a cost to used cars. Top and bottom five stores by change in Internal ELR, Jan-Sep 2026 vs 2025. Moving now: Jul-Sep 2026 vs Jan-Mar 2026, each store against itself; the group moved +4.1% on the same basis, so part of every store's change is seasonal. Green bar at the right of a row: the store is on both the top five vs last year and the top five moving now. Blue bar: a turnaround, on the bottom five vs last year and the top five moving now.Conversation starter: each top store says one thing they started doing; each bottom store says what got in the way and what they would try. The room trades ideas. Moving now: ask the top three what they started this year.</a:t>
             </a:r>
             <a:endParaRPr lang="en-US" dirty="0"/>
           </a:p>
@@ -6515,7 +6515,7 @@
           <a:p>
             <a:r>
               <a:rPr lang="en-US" dirty="0"/>
-              <a:t>Takeaway with the store call-outs (off the slide): Ask Cadillac, Lexus and Audi Henderson what changed. Ask Acura, Honda Flagstaff and VW Henderson what got in the way. Ask Honda North, LR LV and Nissan what they started this year.Source: Qlik - Profit &amp; Loss, Gross Profit - Fixed Ops Warranty (service + parts warranty gross). Same-store, INEOS excluded (opened 2026); no body shop. Top and bottom five stores by percent change in warranty gross, Jan-Sep 2026 vs 2025. Moving now: Jul-Sep 2026 vs Jan-Mar 2026, each store against itself (monthly averages); the group moved +9.3% on the same basis, so part of every store's change is seasonal. Green bar at the right of a row: the store is on both the top five vs last year and the top five moving now.Conversation starter: each top store says one thing they started doing; each bottom store says what got in the way and what they would try. The room trades ideas. Moving now: ask the top three what they started this year.</a:t>
+              <a:t>Takeaway with the store call-outs (off the slide): Ask Cadillac, Lexus and Audi Henderson what changed. Ask Acura, Honda Flagstaff and VW Henderson what got in the way. Ask Honda North, LR LV and Nissan what they started this year.Source: Qlik - Profit &amp; Loss, Gross Profit - Fixed Ops Warranty (service + parts warranty gross). Same-store, INEOS excluded (opened 2026); no body shop. Top and bottom five stores by percent change in warranty gross, Jan-Sep 2026 vs 2025. Moving now: Jul-Sep 2026 vs Jan-Mar 2026, each store against itself (monthly averages); the group moved +9.3% on the same basis, so part of every store's change is seasonal. Green bar at the right of a row: the store is on both the top five vs last year and the top five moving now. Blue bar: a turnaround, on the bottom five vs last year and the top five moving now.Conversation starter: each top store says one thing they started doing; each bottom store says what got in the way and what they would try. The room trades ideas. Moving now: ask the top three what they started this year.</a:t>
             </a:r>
             <a:endParaRPr lang="en-US" dirty="0"/>
           </a:p>
@@ -6867,7 +6867,7 @@
           <a:p>
             <a:r>
               <a:rPr lang="en-US" dirty="0"/>
-              <a:t>Takeaway with the store call-outs (off the slide): Ask LR LV, Audi Henderson and Volvo what changed. Ask Honda North, LR Reno and Cadillac what got in the way. Ask Nissan, LR Henderson and Honda Flagstaff what they started this year.Source: Qlik - Closed Repair Orders. Jan-Sep by close month. Same-store, INEOS excluded (opened 2026). GMC Prescott body shop labor types excluded. Warranty labor sale / warranty sold hours. Top and bottom five stores by change in Warranty ELR, Jan-Sep 2026 vs 2025. Moving now: Jul-Sep 2026 vs Jan-Mar 2026, each store against itself; the group moved +$1.73 on the same basis, so part of every store's change is seasonal. Green bar at the right of a row: the store is on both the top five vs last year and the top five moving now.Conversation starter: each top store says one thing they started doing; each bottom store says what got in the way and what they would try. The room trades ideas. Moving now: ask the top three what they started this year.</a:t>
+              <a:t>Takeaway with the store call-outs (off the slide): Ask LR LV, Audi Henderson and Volvo what changed. Ask Honda North, LR Reno and Cadillac what got in the way. Ask Nissan, LR Henderson and Honda Flagstaff what they started this year.Source: Qlik - Closed Repair Orders. Jan-Sep by close month. Same-store, INEOS excluded (opened 2026). GMC Prescott body shop labor types excluded. Warranty labor sale / warranty sold hours. Top and bottom five stores by change in Warranty ELR, Jan-Sep 2026 vs 2025. Moving now: Jul-Sep 2026 vs Jan-Mar 2026, each store against itself; the group moved +$1.73 on the same basis, so part of every store's change is seasonal. Green bar at the right of a row: the store is on both the top five vs last year and the top five moving now. Blue bar: a turnaround, on the bottom five vs last year and the top five moving now.Conversation starter: each top store says one thing they started doing; each bottom store says what got in the way and what they would try. The room trades ideas. Moving now: ask the top three what they started this year.</a:t>
             </a:r>
             <a:endParaRPr lang="en-US" dirty="0"/>
           </a:p>
@@ -24080,7 +24080,7 @@
                 <a:ea typeface="Inter" pitchFamily="34" charset="-122"/>
                 <a:cs typeface="Inter" pitchFamily="34" charset="-120"/>
               </a:rPr>
-              <a:t>+$2.29M (+5.1%) of warranty gross year to date; 6 of nine months ahead of 2025, best September at +$877K. This is money the manufacturer owes us: process keeps it.</a:t>
+              <a:t>+$2.29M (+5.1%) of warranty gross year to date; 6 of nine months ahead of 2025, largest gain in September, +$877K. This is money the manufacturer owes us: process keeps it.</a:t>
             </a:r>
             <a:endParaRPr lang="en-US" sz="1600" dirty="0"/>
           </a:p>

--- a/day2-deck/decks/Warranty & Internal - House Style.pptx
+++ b/day2-deck/decks/Warranty & Internal - House Style.pptx
@@ -35838,17 +35838,17 @@
         </p:nvSpPr>
         <p:spPr>
           <a:xfrm>
-            <a:off x="2941320" y="2103120"/>
-            <a:ext cx="1115568" cy="828446"/>
-          </a:xfrm>
-          <a:prstGeom prst="rect">
-            <a:avLst/>
-          </a:prstGeom>
-          <a:noFill/>
-          <a:ln/>
-        </p:spPr>
-        <p:txBody>
-          <a:bodyPr wrap="square" lIns="0" tIns="0" rIns="0" bIns="0" rtlCol="0" anchor="ctr"/>
+            <a:off x="2941320" y="2202534"/>
+            <a:ext cx="1115568" cy="414223"/>
+          </a:xfrm>
+          <a:prstGeom prst="rect">
+            <a:avLst/>
+          </a:prstGeom>
+          <a:noFill/>
+          <a:ln/>
+        </p:spPr>
+        <p:txBody>
+          <a:bodyPr wrap="square" lIns="0" tIns="0" rIns="0" bIns="0" rtlCol="0" anchor="b"/>
           <a:lstStyle/>
           <a:p>
             <a:pPr algn="r" indent="0" marL="0">
@@ -35872,6 +35872,45 @@
       <p:sp>
         <p:nvSpPr>
           <p:cNvPr id="13" name="Text 11"/>
+          <p:cNvSpPr txBox="1"/>
+          <p:nvPr/>
+        </p:nvSpPr>
+        <p:spPr>
+          <a:xfrm>
+            <a:off x="2941320" y="2583619"/>
+            <a:ext cx="1115568" cy="265103"/>
+          </a:xfrm>
+          <a:prstGeom prst="rect">
+            <a:avLst/>
+          </a:prstGeom>
+          <a:noFill/>
+          <a:ln/>
+        </p:spPr>
+        <p:txBody>
+          <a:bodyPr wrap="square" lIns="0" tIns="0" rIns="0" bIns="0" rtlCol="0" anchor="t"/>
+          <a:lstStyle/>
+          <a:p>
+            <a:pPr algn="r" indent="0" marL="0">
+              <a:buNone/>
+            </a:pPr>
+            <a:r>
+              <a:rPr lang="en-US" sz="1300" dirty="0">
+                <a:solidFill>
+                  <a:srgbClr val="595959"/>
+                </a:solidFill>
+                <a:latin typeface="Inter" pitchFamily="34" charset="0"/>
+                <a:ea typeface="Inter" pitchFamily="34" charset="-122"/>
+                <a:cs typeface="Inter" pitchFamily="34" charset="-120"/>
+              </a:rPr>
+              <a:t>+$2.03M</a:t>
+            </a:r>
+            <a:endParaRPr lang="en-US" sz="1300" dirty="0"/>
+          </a:p>
+        </p:txBody>
+      </p:sp>
+      <p:sp>
+        <p:nvSpPr>
+          <p:cNvPr id="14" name="Text 12"/>
           <p:cNvSpPr txBox="1"/>
           <p:nvPr/>
         </p:nvSpPr>
@@ -35910,7 +35949,7 @@
       </p:sp>
       <p:sp>
         <p:nvSpPr>
-          <p:cNvPr id="14" name="Text 12"/>
+          <p:cNvPr id="15" name="Text 13"/>
           <p:cNvSpPr txBox="1"/>
           <p:nvPr/>
         </p:nvSpPr>
@@ -35989,23 +36028,23 @@
       </p:sp>
       <p:sp>
         <p:nvSpPr>
-          <p:cNvPr id="15" name="Text 13"/>
-          <p:cNvSpPr txBox="1"/>
-          <p:nvPr/>
-        </p:nvSpPr>
-        <p:spPr>
-          <a:xfrm>
-            <a:off x="2941320" y="2931566"/>
-            <a:ext cx="1115568" cy="828446"/>
-          </a:xfrm>
-          <a:prstGeom prst="rect">
-            <a:avLst/>
-          </a:prstGeom>
-          <a:noFill/>
-          <a:ln/>
-        </p:spPr>
-        <p:txBody>
-          <a:bodyPr wrap="square" lIns="0" tIns="0" rIns="0" bIns="0" rtlCol="0" anchor="ctr"/>
+          <p:cNvPr id="16" name="Text 14"/>
+          <p:cNvSpPr txBox="1"/>
+          <p:nvPr/>
+        </p:nvSpPr>
+        <p:spPr>
+          <a:xfrm>
+            <a:off x="2941320" y="3030980"/>
+            <a:ext cx="1115568" cy="414223"/>
+          </a:xfrm>
+          <a:prstGeom prst="rect">
+            <a:avLst/>
+          </a:prstGeom>
+          <a:noFill/>
+          <a:ln/>
+        </p:spPr>
+        <p:txBody>
+          <a:bodyPr wrap="square" lIns="0" tIns="0" rIns="0" bIns="0" rtlCol="0" anchor="b"/>
           <a:lstStyle/>
           <a:p>
             <a:pPr algn="r" indent="0" marL="0">
@@ -36028,7 +36067,46 @@
       </p:sp>
       <p:sp>
         <p:nvSpPr>
-          <p:cNvPr id="16" name="Shape 14"/>
+          <p:cNvPr id="17" name="Text 15"/>
+          <p:cNvSpPr txBox="1"/>
+          <p:nvPr/>
+        </p:nvSpPr>
+        <p:spPr>
+          <a:xfrm>
+            <a:off x="2941320" y="3412065"/>
+            <a:ext cx="1115568" cy="265103"/>
+          </a:xfrm>
+          <a:prstGeom prst="rect">
+            <a:avLst/>
+          </a:prstGeom>
+          <a:noFill/>
+          <a:ln/>
+        </p:spPr>
+        <p:txBody>
+          <a:bodyPr wrap="square" lIns="0" tIns="0" rIns="0" bIns="0" rtlCol="0" anchor="t"/>
+          <a:lstStyle/>
+          <a:p>
+            <a:pPr algn="r" indent="0" marL="0">
+              <a:buNone/>
+            </a:pPr>
+            <a:r>
+              <a:rPr lang="en-US" sz="1300" dirty="0">
+                <a:solidFill>
+                  <a:srgbClr val="595959"/>
+                </a:solidFill>
+                <a:latin typeface="Inter" pitchFamily="34" charset="0"/>
+                <a:ea typeface="Inter" pitchFamily="34" charset="-122"/>
+                <a:cs typeface="Inter" pitchFamily="34" charset="-120"/>
+              </a:rPr>
+              <a:t>+$194K</a:t>
+            </a:r>
+            <a:endParaRPr lang="en-US" sz="1300" dirty="0"/>
+          </a:p>
+        </p:txBody>
+      </p:sp>
+      <p:sp>
+        <p:nvSpPr>
+          <p:cNvPr id="18" name="Shape 16"/>
           <p:cNvSpPr/>
           <p:nvPr/>
         </p:nvSpPr>
@@ -36048,7 +36126,7 @@
       </p:sp>
       <p:sp>
         <p:nvSpPr>
-          <p:cNvPr id="17" name="Text 15"/>
+          <p:cNvPr id="19" name="Text 17"/>
           <p:cNvSpPr txBox="1"/>
           <p:nvPr/>
         </p:nvSpPr>
@@ -36087,7 +36165,7 @@
       </p:sp>
       <p:sp>
         <p:nvSpPr>
-          <p:cNvPr id="18" name="Text 16"/>
+          <p:cNvPr id="20" name="Text 18"/>
           <p:cNvSpPr txBox="1"/>
           <p:nvPr/>
         </p:nvSpPr>
@@ -36166,23 +36244,23 @@
       </p:sp>
       <p:sp>
         <p:nvSpPr>
-          <p:cNvPr id="19" name="Text 17"/>
-          <p:cNvSpPr txBox="1"/>
-          <p:nvPr/>
-        </p:nvSpPr>
-        <p:spPr>
-          <a:xfrm>
-            <a:off x="2941320" y="3760013"/>
-            <a:ext cx="1115568" cy="828446"/>
-          </a:xfrm>
-          <a:prstGeom prst="rect">
-            <a:avLst/>
-          </a:prstGeom>
-          <a:noFill/>
-          <a:ln/>
-        </p:spPr>
-        <p:txBody>
-          <a:bodyPr wrap="square" lIns="0" tIns="0" rIns="0" bIns="0" rtlCol="0" anchor="ctr"/>
+          <p:cNvPr id="21" name="Text 19"/>
+          <p:cNvSpPr txBox="1"/>
+          <p:nvPr/>
+        </p:nvSpPr>
+        <p:spPr>
+          <a:xfrm>
+            <a:off x="2941320" y="3859426"/>
+            <a:ext cx="1115568" cy="414223"/>
+          </a:xfrm>
+          <a:prstGeom prst="rect">
+            <a:avLst/>
+          </a:prstGeom>
+          <a:noFill/>
+          <a:ln/>
+        </p:spPr>
+        <p:txBody>
+          <a:bodyPr wrap="square" lIns="0" tIns="0" rIns="0" bIns="0" rtlCol="0" anchor="b"/>
           <a:lstStyle/>
           <a:p>
             <a:pPr algn="r" indent="0" marL="0">
@@ -36205,7 +36283,46 @@
       </p:sp>
       <p:sp>
         <p:nvSpPr>
-          <p:cNvPr id="20" name="Text 18"/>
+          <p:cNvPr id="22" name="Text 20"/>
+          <p:cNvSpPr txBox="1"/>
+          <p:nvPr/>
+        </p:nvSpPr>
+        <p:spPr>
+          <a:xfrm>
+            <a:off x="2941320" y="4240512"/>
+            <a:ext cx="1115568" cy="265103"/>
+          </a:xfrm>
+          <a:prstGeom prst="rect">
+            <a:avLst/>
+          </a:prstGeom>
+          <a:noFill/>
+          <a:ln/>
+        </p:spPr>
+        <p:txBody>
+          <a:bodyPr wrap="square" lIns="0" tIns="0" rIns="0" bIns="0" rtlCol="0" anchor="t"/>
+          <a:lstStyle/>
+          <a:p>
+            <a:pPr algn="r" indent="0" marL="0">
+              <a:buNone/>
+            </a:pPr>
+            <a:r>
+              <a:rPr lang="en-US" sz="1300" dirty="0">
+                <a:solidFill>
+                  <a:srgbClr val="595959"/>
+                </a:solidFill>
+                <a:latin typeface="Inter" pitchFamily="34" charset="0"/>
+                <a:ea typeface="Inter" pitchFamily="34" charset="-122"/>
+                <a:cs typeface="Inter" pitchFamily="34" charset="-120"/>
+              </a:rPr>
+              <a:t>+$985K</a:t>
+            </a:r>
+            <a:endParaRPr lang="en-US" sz="1300" dirty="0"/>
+          </a:p>
+        </p:txBody>
+      </p:sp>
+      <p:sp>
+        <p:nvSpPr>
+          <p:cNvPr id="23" name="Text 21"/>
           <p:cNvSpPr txBox="1"/>
           <p:nvPr/>
         </p:nvSpPr>
@@ -36244,7 +36361,7 @@
       </p:sp>
       <p:sp>
         <p:nvSpPr>
-          <p:cNvPr id="21" name="Text 19"/>
+          <p:cNvPr id="24" name="Text 22"/>
           <p:cNvSpPr txBox="1"/>
           <p:nvPr/>
         </p:nvSpPr>
@@ -36323,23 +36440,23 @@
       </p:sp>
       <p:sp>
         <p:nvSpPr>
-          <p:cNvPr id="22" name="Text 20"/>
-          <p:cNvSpPr txBox="1"/>
-          <p:nvPr/>
-        </p:nvSpPr>
-        <p:spPr>
-          <a:xfrm>
-            <a:off x="2941320" y="4588459"/>
-            <a:ext cx="1115568" cy="828446"/>
-          </a:xfrm>
-          <a:prstGeom prst="rect">
-            <a:avLst/>
-          </a:prstGeom>
-          <a:noFill/>
-          <a:ln/>
-        </p:spPr>
-        <p:txBody>
-          <a:bodyPr wrap="square" lIns="0" tIns="0" rIns="0" bIns="0" rtlCol="0" anchor="ctr"/>
+          <p:cNvPr id="25" name="Text 23"/>
+          <p:cNvSpPr txBox="1"/>
+          <p:nvPr/>
+        </p:nvSpPr>
+        <p:spPr>
+          <a:xfrm>
+            <a:off x="2941320" y="4687873"/>
+            <a:ext cx="1115568" cy="414223"/>
+          </a:xfrm>
+          <a:prstGeom prst="rect">
+            <a:avLst/>
+          </a:prstGeom>
+          <a:noFill/>
+          <a:ln/>
+        </p:spPr>
+        <p:txBody>
+          <a:bodyPr wrap="square" lIns="0" tIns="0" rIns="0" bIns="0" rtlCol="0" anchor="b"/>
           <a:lstStyle/>
           <a:p>
             <a:pPr algn="r" indent="0" marL="0">
@@ -36362,7 +36479,46 @@
       </p:sp>
       <p:sp>
         <p:nvSpPr>
-          <p:cNvPr id="23" name="Shape 21"/>
+          <p:cNvPr id="26" name="Text 24"/>
+          <p:cNvSpPr txBox="1"/>
+          <p:nvPr/>
+        </p:nvSpPr>
+        <p:spPr>
+          <a:xfrm>
+            <a:off x="2941320" y="5068958"/>
+            <a:ext cx="1115568" cy="265103"/>
+          </a:xfrm>
+          <a:prstGeom prst="rect">
+            <a:avLst/>
+          </a:prstGeom>
+          <a:noFill/>
+          <a:ln/>
+        </p:spPr>
+        <p:txBody>
+          <a:bodyPr wrap="square" lIns="0" tIns="0" rIns="0" bIns="0" rtlCol="0" anchor="t"/>
+          <a:lstStyle/>
+          <a:p>
+            <a:pPr algn="r" indent="0" marL="0">
+              <a:buNone/>
+            </a:pPr>
+            <a:r>
+              <a:rPr lang="en-US" sz="1300" dirty="0">
+                <a:solidFill>
+                  <a:srgbClr val="595959"/>
+                </a:solidFill>
+                <a:latin typeface="Inter" pitchFamily="34" charset="0"/>
+                <a:ea typeface="Inter" pitchFamily="34" charset="-122"/>
+                <a:cs typeface="Inter" pitchFamily="34" charset="-120"/>
+              </a:rPr>
+              <a:t>+$129K</a:t>
+            </a:r>
+            <a:endParaRPr lang="en-US" sz="1300" dirty="0"/>
+          </a:p>
+        </p:txBody>
+      </p:sp>
+      <p:sp>
+        <p:nvSpPr>
+          <p:cNvPr id="27" name="Shape 25"/>
           <p:cNvSpPr/>
           <p:nvPr/>
         </p:nvSpPr>
@@ -36382,7 +36538,7 @@
       </p:sp>
       <p:sp>
         <p:nvSpPr>
-          <p:cNvPr id="24" name="Text 22"/>
+          <p:cNvPr id="28" name="Text 26"/>
           <p:cNvSpPr txBox="1"/>
           <p:nvPr/>
         </p:nvSpPr>
@@ -36421,7 +36577,7 @@
       </p:sp>
       <p:sp>
         <p:nvSpPr>
-          <p:cNvPr id="25" name="Text 23"/>
+          <p:cNvPr id="29" name="Text 27"/>
           <p:cNvSpPr txBox="1"/>
           <p:nvPr/>
         </p:nvSpPr>
@@ -36500,23 +36656,23 @@
       </p:sp>
       <p:sp>
         <p:nvSpPr>
-          <p:cNvPr id="26" name="Text 24"/>
-          <p:cNvSpPr txBox="1"/>
-          <p:nvPr/>
-        </p:nvSpPr>
-        <p:spPr>
-          <a:xfrm>
-            <a:off x="2941320" y="5416906"/>
-            <a:ext cx="1115568" cy="828446"/>
-          </a:xfrm>
-          <a:prstGeom prst="rect">
-            <a:avLst/>
-          </a:prstGeom>
-          <a:noFill/>
-          <a:ln/>
-        </p:spPr>
-        <p:txBody>
-          <a:bodyPr wrap="square" lIns="0" tIns="0" rIns="0" bIns="0" rtlCol="0" anchor="ctr"/>
+          <p:cNvPr id="30" name="Text 28"/>
+          <p:cNvSpPr txBox="1"/>
+          <p:nvPr/>
+        </p:nvSpPr>
+        <p:spPr>
+          <a:xfrm>
+            <a:off x="2941320" y="5516319"/>
+            <a:ext cx="1115568" cy="414223"/>
+          </a:xfrm>
+          <a:prstGeom prst="rect">
+            <a:avLst/>
+          </a:prstGeom>
+          <a:noFill/>
+          <a:ln/>
+        </p:spPr>
+        <p:txBody>
+          <a:bodyPr wrap="square" lIns="0" tIns="0" rIns="0" bIns="0" rtlCol="0" anchor="b"/>
           <a:lstStyle/>
           <a:p>
             <a:pPr algn="r" indent="0" marL="0">
@@ -36539,7 +36695,46 @@
       </p:sp>
       <p:sp>
         <p:nvSpPr>
-          <p:cNvPr id="27" name="Shape 25"/>
+          <p:cNvPr id="31" name="Text 29"/>
+          <p:cNvSpPr txBox="1"/>
+          <p:nvPr/>
+        </p:nvSpPr>
+        <p:spPr>
+          <a:xfrm>
+            <a:off x="2941320" y="5897405"/>
+            <a:ext cx="1115568" cy="265103"/>
+          </a:xfrm>
+          <a:prstGeom prst="rect">
+            <a:avLst/>
+          </a:prstGeom>
+          <a:noFill/>
+          <a:ln/>
+        </p:spPr>
+        <p:txBody>
+          <a:bodyPr wrap="square" lIns="0" tIns="0" rIns="0" bIns="0" rtlCol="0" anchor="t"/>
+          <a:lstStyle/>
+          <a:p>
+            <a:pPr algn="r" indent="0" marL="0">
+              <a:buNone/>
+            </a:pPr>
+            <a:r>
+              <a:rPr lang="en-US" sz="1300" dirty="0">
+                <a:solidFill>
+                  <a:srgbClr val="595959"/>
+                </a:solidFill>
+                <a:latin typeface="Inter" pitchFamily="34" charset="0"/>
+                <a:ea typeface="Inter" pitchFamily="34" charset="-122"/>
+                <a:cs typeface="Inter" pitchFamily="34" charset="-120"/>
+              </a:rPr>
+              <a:t>+$170K</a:t>
+            </a:r>
+            <a:endParaRPr lang="en-US" sz="1300" dirty="0"/>
+          </a:p>
+        </p:txBody>
+      </p:sp>
+      <p:sp>
+        <p:nvSpPr>
+          <p:cNvPr id="32" name="Shape 30"/>
           <p:cNvSpPr/>
           <p:nvPr/>
         </p:nvSpPr>
@@ -36559,7 +36754,7 @@
       </p:sp>
       <p:sp>
         <p:nvSpPr>
-          <p:cNvPr id="28" name="Text 26"/>
+          <p:cNvPr id="33" name="Text 31"/>
           <p:cNvSpPr txBox="1"/>
           <p:nvPr/>
         </p:nvSpPr>
@@ -36598,7 +36793,7 @@
       </p:sp>
       <p:sp>
         <p:nvSpPr>
-          <p:cNvPr id="29" name="Text 27"/>
+          <p:cNvPr id="34" name="Text 32"/>
           <p:cNvSpPr txBox="1"/>
           <p:nvPr/>
         </p:nvSpPr>
@@ -36637,7 +36832,7 @@
       </p:sp>
       <p:sp>
         <p:nvSpPr>
-          <p:cNvPr id="30" name="Shape 28"/>
+          <p:cNvPr id="35" name="Shape 33"/>
           <p:cNvSpPr/>
           <p:nvPr/>
         </p:nvSpPr>
@@ -36657,7 +36852,7 @@
       </p:sp>
       <p:sp>
         <p:nvSpPr>
-          <p:cNvPr id="31" name="Text 29"/>
+          <p:cNvPr id="36" name="Text 34"/>
           <p:cNvSpPr txBox="1"/>
           <p:nvPr/>
         </p:nvSpPr>
@@ -36696,7 +36891,7 @@
       </p:sp>
       <p:sp>
         <p:nvSpPr>
-          <p:cNvPr id="32" name="Text 30"/>
+          <p:cNvPr id="37" name="Text 35"/>
           <p:cNvSpPr txBox="1"/>
           <p:nvPr/>
         </p:nvSpPr>
@@ -36775,23 +36970,23 @@
       </p:sp>
       <p:sp>
         <p:nvSpPr>
-          <p:cNvPr id="33" name="Text 31"/>
-          <p:cNvSpPr txBox="1"/>
-          <p:nvPr/>
-        </p:nvSpPr>
-        <p:spPr>
-          <a:xfrm>
-            <a:off x="6632448" y="2103120"/>
-            <a:ext cx="1115568" cy="828446"/>
-          </a:xfrm>
-          <a:prstGeom prst="rect">
-            <a:avLst/>
-          </a:prstGeom>
-          <a:noFill/>
-          <a:ln/>
-        </p:spPr>
-        <p:txBody>
-          <a:bodyPr wrap="square" lIns="0" tIns="0" rIns="0" bIns="0" rtlCol="0" anchor="ctr"/>
+          <p:cNvPr id="38" name="Text 36"/>
+          <p:cNvSpPr txBox="1"/>
+          <p:nvPr/>
+        </p:nvSpPr>
+        <p:spPr>
+          <a:xfrm>
+            <a:off x="6632448" y="2202534"/>
+            <a:ext cx="1115568" cy="414223"/>
+          </a:xfrm>
+          <a:prstGeom prst="rect">
+            <a:avLst/>
+          </a:prstGeom>
+          <a:noFill/>
+          <a:ln/>
+        </p:spPr>
+        <p:txBody>
+          <a:bodyPr wrap="square" lIns="0" tIns="0" rIns="0" bIns="0" rtlCol="0" anchor="b"/>
           <a:lstStyle/>
           <a:p>
             <a:pPr algn="r" indent="0" marL="0">
@@ -36814,7 +37009,46 @@
       </p:sp>
       <p:sp>
         <p:nvSpPr>
-          <p:cNvPr id="34" name="Text 32"/>
+          <p:cNvPr id="39" name="Text 37"/>
+          <p:cNvSpPr txBox="1"/>
+          <p:nvPr/>
+        </p:nvSpPr>
+        <p:spPr>
+          <a:xfrm>
+            <a:off x="6632448" y="2583619"/>
+            <a:ext cx="1115568" cy="265103"/>
+          </a:xfrm>
+          <a:prstGeom prst="rect">
+            <a:avLst/>
+          </a:prstGeom>
+          <a:noFill/>
+          <a:ln/>
+        </p:spPr>
+        <p:txBody>
+          <a:bodyPr wrap="square" lIns="0" tIns="0" rIns="0" bIns="0" rtlCol="0" anchor="t"/>
+          <a:lstStyle/>
+          <a:p>
+            <a:pPr algn="r" indent="0" marL="0">
+              <a:buNone/>
+            </a:pPr>
+            <a:r>
+              <a:rPr lang="en-US" sz="1300" dirty="0">
+                <a:solidFill>
+                  <a:srgbClr val="595959"/>
+                </a:solidFill>
+                <a:latin typeface="Inter" pitchFamily="34" charset="0"/>
+                <a:ea typeface="Inter" pitchFamily="34" charset="-122"/>
+                <a:cs typeface="Inter" pitchFamily="34" charset="-120"/>
+              </a:rPr>
+              <a:t>−$410K</a:t>
+            </a:r>
+            <a:endParaRPr lang="en-US" sz="1300" dirty="0"/>
+          </a:p>
+        </p:txBody>
+      </p:sp>
+      <p:sp>
+        <p:nvSpPr>
+          <p:cNvPr id="40" name="Text 38"/>
           <p:cNvSpPr txBox="1"/>
           <p:nvPr/>
         </p:nvSpPr>
@@ -36853,7 +37087,7 @@
       </p:sp>
       <p:sp>
         <p:nvSpPr>
-          <p:cNvPr id="35" name="Text 33"/>
+          <p:cNvPr id="41" name="Text 39"/>
           <p:cNvSpPr txBox="1"/>
           <p:nvPr/>
         </p:nvSpPr>
@@ -36932,23 +37166,23 @@
       </p:sp>
       <p:sp>
         <p:nvSpPr>
-          <p:cNvPr id="36" name="Text 34"/>
-          <p:cNvSpPr txBox="1"/>
-          <p:nvPr/>
-        </p:nvSpPr>
-        <p:spPr>
-          <a:xfrm>
-            <a:off x="6632448" y="2931566"/>
-            <a:ext cx="1115568" cy="828446"/>
-          </a:xfrm>
-          <a:prstGeom prst="rect">
-            <a:avLst/>
-          </a:prstGeom>
-          <a:noFill/>
-          <a:ln/>
-        </p:spPr>
-        <p:txBody>
-          <a:bodyPr wrap="square" lIns="0" tIns="0" rIns="0" bIns="0" rtlCol="0" anchor="ctr"/>
+          <p:cNvPr id="42" name="Text 40"/>
+          <p:cNvSpPr txBox="1"/>
+          <p:nvPr/>
+        </p:nvSpPr>
+        <p:spPr>
+          <a:xfrm>
+            <a:off x="6632448" y="3030980"/>
+            <a:ext cx="1115568" cy="414223"/>
+          </a:xfrm>
+          <a:prstGeom prst="rect">
+            <a:avLst/>
+          </a:prstGeom>
+          <a:noFill/>
+          <a:ln/>
+        </p:spPr>
+        <p:txBody>
+          <a:bodyPr wrap="square" lIns="0" tIns="0" rIns="0" bIns="0" rtlCol="0" anchor="b"/>
           <a:lstStyle/>
           <a:p>
             <a:pPr algn="r" indent="0" marL="0">
@@ -36971,7 +37205,46 @@
       </p:sp>
       <p:sp>
         <p:nvSpPr>
-          <p:cNvPr id="37" name="Shape 35"/>
+          <p:cNvPr id="43" name="Text 41"/>
+          <p:cNvSpPr txBox="1"/>
+          <p:nvPr/>
+        </p:nvSpPr>
+        <p:spPr>
+          <a:xfrm>
+            <a:off x="6632448" y="3412065"/>
+            <a:ext cx="1115568" cy="265103"/>
+          </a:xfrm>
+          <a:prstGeom prst="rect">
+            <a:avLst/>
+          </a:prstGeom>
+          <a:noFill/>
+          <a:ln/>
+        </p:spPr>
+        <p:txBody>
+          <a:bodyPr wrap="square" lIns="0" tIns="0" rIns="0" bIns="0" rtlCol="0" anchor="t"/>
+          <a:lstStyle/>
+          <a:p>
+            <a:pPr algn="r" indent="0" marL="0">
+              <a:buNone/>
+            </a:pPr>
+            <a:r>
+              <a:rPr lang="en-US" sz="1300" dirty="0">
+                <a:solidFill>
+                  <a:srgbClr val="595959"/>
+                </a:solidFill>
+                <a:latin typeface="Inter" pitchFamily="34" charset="0"/>
+                <a:ea typeface="Inter" pitchFamily="34" charset="-122"/>
+                <a:cs typeface="Inter" pitchFamily="34" charset="-120"/>
+              </a:rPr>
+              <a:t>−$83K</a:t>
+            </a:r>
+            <a:endParaRPr lang="en-US" sz="1300" dirty="0"/>
+          </a:p>
+        </p:txBody>
+      </p:sp>
+      <p:sp>
+        <p:nvSpPr>
+          <p:cNvPr id="44" name="Shape 42"/>
           <p:cNvSpPr/>
           <p:nvPr/>
         </p:nvSpPr>
@@ -36991,7 +37264,7 @@
       </p:sp>
       <p:sp>
         <p:nvSpPr>
-          <p:cNvPr id="38" name="Text 36"/>
+          <p:cNvPr id="45" name="Text 43"/>
           <p:cNvSpPr txBox="1"/>
           <p:nvPr/>
         </p:nvSpPr>
@@ -37030,7 +37303,7 @@
       </p:sp>
       <p:sp>
         <p:nvSpPr>
-          <p:cNvPr id="39" name="Text 37"/>
+          <p:cNvPr id="46" name="Text 44"/>
           <p:cNvSpPr txBox="1"/>
           <p:nvPr/>
         </p:nvSpPr>
@@ -37109,23 +37382,23 @@
       </p:sp>
       <p:sp>
         <p:nvSpPr>
-          <p:cNvPr id="40" name="Text 38"/>
-          <p:cNvSpPr txBox="1"/>
-          <p:nvPr/>
-        </p:nvSpPr>
-        <p:spPr>
-          <a:xfrm>
-            <a:off x="6632448" y="3760013"/>
-            <a:ext cx="1115568" cy="828446"/>
-          </a:xfrm>
-          <a:prstGeom prst="rect">
-            <a:avLst/>
-          </a:prstGeom>
-          <a:noFill/>
-          <a:ln/>
-        </p:spPr>
-        <p:txBody>
-          <a:bodyPr wrap="square" lIns="0" tIns="0" rIns="0" bIns="0" rtlCol="0" anchor="ctr"/>
+          <p:cNvPr id="47" name="Text 45"/>
+          <p:cNvSpPr txBox="1"/>
+          <p:nvPr/>
+        </p:nvSpPr>
+        <p:spPr>
+          <a:xfrm>
+            <a:off x="6632448" y="3859426"/>
+            <a:ext cx="1115568" cy="414223"/>
+          </a:xfrm>
+          <a:prstGeom prst="rect">
+            <a:avLst/>
+          </a:prstGeom>
+          <a:noFill/>
+          <a:ln/>
+        </p:spPr>
+        <p:txBody>
+          <a:bodyPr wrap="square" lIns="0" tIns="0" rIns="0" bIns="0" rtlCol="0" anchor="b"/>
           <a:lstStyle/>
           <a:p>
             <a:pPr algn="r" indent="0" marL="0">
@@ -37148,7 +37421,46 @@
       </p:sp>
       <p:sp>
         <p:nvSpPr>
-          <p:cNvPr id="41" name="Shape 39"/>
+          <p:cNvPr id="48" name="Text 46"/>
+          <p:cNvSpPr txBox="1"/>
+          <p:nvPr/>
+        </p:nvSpPr>
+        <p:spPr>
+          <a:xfrm>
+            <a:off x="6632448" y="4240512"/>
+            <a:ext cx="1115568" cy="265103"/>
+          </a:xfrm>
+          <a:prstGeom prst="rect">
+            <a:avLst/>
+          </a:prstGeom>
+          <a:noFill/>
+          <a:ln/>
+        </p:spPr>
+        <p:txBody>
+          <a:bodyPr wrap="square" lIns="0" tIns="0" rIns="0" bIns="0" rtlCol="0" anchor="t"/>
+          <a:lstStyle/>
+          <a:p>
+            <a:pPr algn="r" indent="0" marL="0">
+              <a:buNone/>
+            </a:pPr>
+            <a:r>
+              <a:rPr lang="en-US" sz="1300" dirty="0">
+                <a:solidFill>
+                  <a:srgbClr val="595959"/>
+                </a:solidFill>
+                <a:latin typeface="Inter" pitchFamily="34" charset="0"/>
+                <a:ea typeface="Inter" pitchFamily="34" charset="-122"/>
+                <a:cs typeface="Inter" pitchFamily="34" charset="-120"/>
+              </a:rPr>
+              <a:t>−$822K</a:t>
+            </a:r>
+            <a:endParaRPr lang="en-US" sz="1300" dirty="0"/>
+          </a:p>
+        </p:txBody>
+      </p:sp>
+      <p:sp>
+        <p:nvSpPr>
+          <p:cNvPr id="49" name="Shape 47"/>
           <p:cNvSpPr/>
           <p:nvPr/>
         </p:nvSpPr>
@@ -37168,7 +37480,7 @@
       </p:sp>
       <p:sp>
         <p:nvSpPr>
-          <p:cNvPr id="42" name="Text 40"/>
+          <p:cNvPr id="50" name="Text 48"/>
           <p:cNvSpPr txBox="1"/>
           <p:nvPr/>
         </p:nvSpPr>
@@ -37207,7 +37519,7 @@
       </p:sp>
       <p:sp>
         <p:nvSpPr>
-          <p:cNvPr id="43" name="Text 41"/>
+          <p:cNvPr id="51" name="Text 49"/>
           <p:cNvSpPr txBox="1"/>
           <p:nvPr/>
         </p:nvSpPr>
@@ -37286,23 +37598,23 @@
       </p:sp>
       <p:sp>
         <p:nvSpPr>
-          <p:cNvPr id="44" name="Text 42"/>
-          <p:cNvSpPr txBox="1"/>
-          <p:nvPr/>
-        </p:nvSpPr>
-        <p:spPr>
-          <a:xfrm>
-            <a:off x="6632448" y="4588459"/>
-            <a:ext cx="1115568" cy="828446"/>
-          </a:xfrm>
-          <a:prstGeom prst="rect">
-            <a:avLst/>
-          </a:prstGeom>
-          <a:noFill/>
-          <a:ln/>
-        </p:spPr>
-        <p:txBody>
-          <a:bodyPr wrap="square" lIns="0" tIns="0" rIns="0" bIns="0" rtlCol="0" anchor="ctr"/>
+          <p:cNvPr id="52" name="Text 50"/>
+          <p:cNvSpPr txBox="1"/>
+          <p:nvPr/>
+        </p:nvSpPr>
+        <p:spPr>
+          <a:xfrm>
+            <a:off x="6632448" y="4687873"/>
+            <a:ext cx="1115568" cy="414223"/>
+          </a:xfrm>
+          <a:prstGeom prst="rect">
+            <a:avLst/>
+          </a:prstGeom>
+          <a:noFill/>
+          <a:ln/>
+        </p:spPr>
+        <p:txBody>
+          <a:bodyPr wrap="square" lIns="0" tIns="0" rIns="0" bIns="0" rtlCol="0" anchor="b"/>
           <a:lstStyle/>
           <a:p>
             <a:pPr algn="r" indent="0" marL="0">
@@ -37325,7 +37637,46 @@
       </p:sp>
       <p:sp>
         <p:nvSpPr>
-          <p:cNvPr id="45" name="Shape 43"/>
+          <p:cNvPr id="53" name="Text 51"/>
+          <p:cNvSpPr txBox="1"/>
+          <p:nvPr/>
+        </p:nvSpPr>
+        <p:spPr>
+          <a:xfrm>
+            <a:off x="6632448" y="5068958"/>
+            <a:ext cx="1115568" cy="265103"/>
+          </a:xfrm>
+          <a:prstGeom prst="rect">
+            <a:avLst/>
+          </a:prstGeom>
+          <a:noFill/>
+          <a:ln/>
+        </p:spPr>
+        <p:txBody>
+          <a:bodyPr wrap="square" lIns="0" tIns="0" rIns="0" bIns="0" rtlCol="0" anchor="t"/>
+          <a:lstStyle/>
+          <a:p>
+            <a:pPr algn="r" indent="0" marL="0">
+              <a:buNone/>
+            </a:pPr>
+            <a:r>
+              <a:rPr lang="en-US" sz="1300" dirty="0">
+                <a:solidFill>
+                  <a:srgbClr val="595959"/>
+                </a:solidFill>
+                <a:latin typeface="Inter" pitchFamily="34" charset="0"/>
+                <a:ea typeface="Inter" pitchFamily="34" charset="-122"/>
+                <a:cs typeface="Inter" pitchFamily="34" charset="-120"/>
+              </a:rPr>
+              <a:t>−$586K</a:t>
+            </a:r>
+            <a:endParaRPr lang="en-US" sz="1300" dirty="0"/>
+          </a:p>
+        </p:txBody>
+      </p:sp>
+      <p:sp>
+        <p:nvSpPr>
+          <p:cNvPr id="54" name="Shape 52"/>
           <p:cNvSpPr/>
           <p:nvPr/>
         </p:nvSpPr>
@@ -37345,7 +37696,7 @@
       </p:sp>
       <p:sp>
         <p:nvSpPr>
-          <p:cNvPr id="46" name="Text 44"/>
+          <p:cNvPr id="55" name="Text 53"/>
           <p:cNvSpPr txBox="1"/>
           <p:nvPr/>
         </p:nvSpPr>
@@ -37384,7 +37735,7 @@
       </p:sp>
       <p:sp>
         <p:nvSpPr>
-          <p:cNvPr id="47" name="Text 45"/>
+          <p:cNvPr id="56" name="Text 54"/>
           <p:cNvSpPr txBox="1"/>
           <p:nvPr/>
         </p:nvSpPr>
@@ -37463,23 +37814,23 @@
       </p:sp>
       <p:sp>
         <p:nvSpPr>
-          <p:cNvPr id="48" name="Text 46"/>
-          <p:cNvSpPr txBox="1"/>
-          <p:nvPr/>
-        </p:nvSpPr>
-        <p:spPr>
-          <a:xfrm>
-            <a:off x="6632448" y="5416906"/>
-            <a:ext cx="1115568" cy="828446"/>
-          </a:xfrm>
-          <a:prstGeom prst="rect">
-            <a:avLst/>
-          </a:prstGeom>
-          <a:noFill/>
-          <a:ln/>
-        </p:spPr>
-        <p:txBody>
-          <a:bodyPr wrap="square" lIns="0" tIns="0" rIns="0" bIns="0" rtlCol="0" anchor="ctr"/>
+          <p:cNvPr id="57" name="Text 55"/>
+          <p:cNvSpPr txBox="1"/>
+          <p:nvPr/>
+        </p:nvSpPr>
+        <p:spPr>
+          <a:xfrm>
+            <a:off x="6632448" y="5516319"/>
+            <a:ext cx="1115568" cy="414223"/>
+          </a:xfrm>
+          <a:prstGeom prst="rect">
+            <a:avLst/>
+          </a:prstGeom>
+          <a:noFill/>
+          <a:ln/>
+        </p:spPr>
+        <p:txBody>
+          <a:bodyPr wrap="square" lIns="0" tIns="0" rIns="0" bIns="0" rtlCol="0" anchor="b"/>
           <a:lstStyle/>
           <a:p>
             <a:pPr algn="r" indent="0" marL="0">
@@ -37502,7 +37853,46 @@
       </p:sp>
       <p:sp>
         <p:nvSpPr>
-          <p:cNvPr id="49" name="Shape 47"/>
+          <p:cNvPr id="58" name="Text 56"/>
+          <p:cNvSpPr txBox="1"/>
+          <p:nvPr/>
+        </p:nvSpPr>
+        <p:spPr>
+          <a:xfrm>
+            <a:off x="6632448" y="5897405"/>
+            <a:ext cx="1115568" cy="265103"/>
+          </a:xfrm>
+          <a:prstGeom prst="rect">
+            <a:avLst/>
+          </a:prstGeom>
+          <a:noFill/>
+          <a:ln/>
+        </p:spPr>
+        <p:txBody>
+          <a:bodyPr wrap="square" lIns="0" tIns="0" rIns="0" bIns="0" rtlCol="0" anchor="t"/>
+          <a:lstStyle/>
+          <a:p>
+            <a:pPr algn="r" indent="0" marL="0">
+              <a:buNone/>
+            </a:pPr>
+            <a:r>
+              <a:rPr lang="en-US" sz="1300" dirty="0">
+                <a:solidFill>
+                  <a:srgbClr val="595959"/>
+                </a:solidFill>
+                <a:latin typeface="Inter" pitchFamily="34" charset="0"/>
+                <a:ea typeface="Inter" pitchFamily="34" charset="-122"/>
+                <a:cs typeface="Inter" pitchFamily="34" charset="-120"/>
+              </a:rPr>
+              <a:t>−$164K</a:t>
+            </a:r>
+            <a:endParaRPr lang="en-US" sz="1300" dirty="0"/>
+          </a:p>
+        </p:txBody>
+      </p:sp>
+      <p:sp>
+        <p:nvSpPr>
+          <p:cNvPr id="59" name="Shape 57"/>
           <p:cNvSpPr/>
           <p:nvPr/>
         </p:nvSpPr>
@@ -37522,7 +37912,7 @@
       </p:sp>
       <p:sp>
         <p:nvSpPr>
-          <p:cNvPr id="50" name="Text 48"/>
+          <p:cNvPr id="60" name="Text 58"/>
           <p:cNvSpPr txBox="1"/>
           <p:nvPr/>
         </p:nvSpPr>
@@ -37561,7 +37951,7 @@
       </p:sp>
       <p:sp>
         <p:nvSpPr>
-          <p:cNvPr id="51" name="Text 49"/>
+          <p:cNvPr id="61" name="Text 59"/>
           <p:cNvSpPr txBox="1"/>
           <p:nvPr/>
         </p:nvSpPr>
@@ -37600,7 +37990,7 @@
       </p:sp>
       <p:sp>
         <p:nvSpPr>
-          <p:cNvPr id="52" name="Shape 50"/>
+          <p:cNvPr id="62" name="Shape 60"/>
           <p:cNvSpPr/>
           <p:nvPr/>
         </p:nvSpPr>
@@ -37620,7 +38010,7 @@
       </p:sp>
       <p:sp>
         <p:nvSpPr>
-          <p:cNvPr id="53" name="Shape 51"/>
+          <p:cNvPr id="63" name="Shape 61"/>
           <p:cNvSpPr/>
           <p:nvPr/>
         </p:nvSpPr>
@@ -37640,7 +38030,7 @@
       </p:sp>
       <p:sp>
         <p:nvSpPr>
-          <p:cNvPr id="54" name="Text 52"/>
+          <p:cNvPr id="64" name="Text 62"/>
           <p:cNvSpPr txBox="1"/>
           <p:nvPr/>
         </p:nvSpPr>
@@ -37679,7 +38069,7 @@
       </p:sp>
       <p:sp>
         <p:nvSpPr>
-          <p:cNvPr id="55" name="Text 53"/>
+          <p:cNvPr id="65" name="Text 63"/>
           <p:cNvSpPr txBox="1"/>
           <p:nvPr/>
         </p:nvSpPr>
@@ -37758,23 +38148,23 @@
       </p:sp>
       <p:sp>
         <p:nvSpPr>
-          <p:cNvPr id="56" name="Text 54"/>
-          <p:cNvSpPr txBox="1"/>
-          <p:nvPr/>
-        </p:nvSpPr>
-        <p:spPr>
-          <a:xfrm>
-            <a:off x="10323576" y="2103120"/>
-            <a:ext cx="1115568" cy="828446"/>
-          </a:xfrm>
-          <a:prstGeom prst="rect">
-            <a:avLst/>
-          </a:prstGeom>
-          <a:noFill/>
-          <a:ln/>
-        </p:spPr>
-        <p:txBody>
-          <a:bodyPr wrap="square" lIns="0" tIns="0" rIns="0" bIns="0" rtlCol="0" anchor="ctr"/>
+          <p:cNvPr id="66" name="Text 64"/>
+          <p:cNvSpPr txBox="1"/>
+          <p:nvPr/>
+        </p:nvSpPr>
+        <p:spPr>
+          <a:xfrm>
+            <a:off x="10323576" y="2202534"/>
+            <a:ext cx="1115568" cy="414223"/>
+          </a:xfrm>
+          <a:prstGeom prst="rect">
+            <a:avLst/>
+          </a:prstGeom>
+          <a:noFill/>
+          <a:ln/>
+        </p:spPr>
+        <p:txBody>
+          <a:bodyPr wrap="square" lIns="0" tIns="0" rIns="0" bIns="0" rtlCol="0" anchor="b"/>
           <a:lstStyle/>
           <a:p>
             <a:pPr algn="r" indent="0" marL="0">
@@ -37797,7 +38187,46 @@
       </p:sp>
       <p:sp>
         <p:nvSpPr>
-          <p:cNvPr id="57" name="Text 55"/>
+          <p:cNvPr id="67" name="Text 65"/>
+          <p:cNvSpPr txBox="1"/>
+          <p:nvPr/>
+        </p:nvSpPr>
+        <p:spPr>
+          <a:xfrm>
+            <a:off x="10323576" y="2583619"/>
+            <a:ext cx="1115568" cy="265103"/>
+          </a:xfrm>
+          <a:prstGeom prst="rect">
+            <a:avLst/>
+          </a:prstGeom>
+          <a:noFill/>
+          <a:ln/>
+        </p:spPr>
+        <p:txBody>
+          <a:bodyPr wrap="square" lIns="0" tIns="0" rIns="0" bIns="0" rtlCol="0" anchor="t"/>
+          <a:lstStyle/>
+          <a:p>
+            <a:pPr algn="r" indent="0" marL="0">
+              <a:buNone/>
+            </a:pPr>
+            <a:r>
+              <a:rPr lang="en-US" sz="1300" dirty="0">
+                <a:solidFill>
+                  <a:srgbClr val="595959"/>
+                </a:solidFill>
+                <a:latin typeface="Inter" pitchFamily="34" charset="0"/>
+                <a:ea typeface="Inter" pitchFamily="34" charset="-122"/>
+                <a:cs typeface="Inter" pitchFamily="34" charset="-120"/>
+              </a:rPr>
+              <a:t>+$57K</a:t>
+            </a:r>
+            <a:endParaRPr lang="en-US" sz="1300" dirty="0"/>
+          </a:p>
+        </p:txBody>
+      </p:sp>
+      <p:sp>
+        <p:nvSpPr>
+          <p:cNvPr id="68" name="Text 66"/>
           <p:cNvSpPr txBox="1"/>
           <p:nvPr/>
         </p:nvSpPr>
@@ -37836,7 +38265,7 @@
       </p:sp>
       <p:sp>
         <p:nvSpPr>
-          <p:cNvPr id="58" name="Text 56"/>
+          <p:cNvPr id="69" name="Text 67"/>
           <p:cNvSpPr txBox="1"/>
           <p:nvPr/>
         </p:nvSpPr>
@@ -37915,23 +38344,23 @@
       </p:sp>
       <p:sp>
         <p:nvSpPr>
-          <p:cNvPr id="59" name="Text 57"/>
-          <p:cNvSpPr txBox="1"/>
-          <p:nvPr/>
-        </p:nvSpPr>
-        <p:spPr>
-          <a:xfrm>
-            <a:off x="10323576" y="2931566"/>
-            <a:ext cx="1115568" cy="828446"/>
-          </a:xfrm>
-          <a:prstGeom prst="rect">
-            <a:avLst/>
-          </a:prstGeom>
-          <a:noFill/>
-          <a:ln/>
-        </p:spPr>
-        <p:txBody>
-          <a:bodyPr wrap="square" lIns="0" tIns="0" rIns="0" bIns="0" rtlCol="0" anchor="ctr"/>
+          <p:cNvPr id="70" name="Text 68"/>
+          <p:cNvSpPr txBox="1"/>
+          <p:nvPr/>
+        </p:nvSpPr>
+        <p:spPr>
+          <a:xfrm>
+            <a:off x="10323576" y="3030980"/>
+            <a:ext cx="1115568" cy="414223"/>
+          </a:xfrm>
+          <a:prstGeom prst="rect">
+            <a:avLst/>
+          </a:prstGeom>
+          <a:noFill/>
+          <a:ln/>
+        </p:spPr>
+        <p:txBody>
+          <a:bodyPr wrap="square" lIns="0" tIns="0" rIns="0" bIns="0" rtlCol="0" anchor="b"/>
           <a:lstStyle/>
           <a:p>
             <a:pPr algn="r" indent="0" marL="0">
@@ -37954,7 +38383,46 @@
       </p:sp>
       <p:sp>
         <p:nvSpPr>
-          <p:cNvPr id="60" name="Shape 58"/>
+          <p:cNvPr id="71" name="Text 69"/>
+          <p:cNvSpPr txBox="1"/>
+          <p:nvPr/>
+        </p:nvSpPr>
+        <p:spPr>
+          <a:xfrm>
+            <a:off x="10323576" y="3412065"/>
+            <a:ext cx="1115568" cy="265103"/>
+          </a:xfrm>
+          <a:prstGeom prst="rect">
+            <a:avLst/>
+          </a:prstGeom>
+          <a:noFill/>
+          <a:ln/>
+        </p:spPr>
+        <p:txBody>
+          <a:bodyPr wrap="square" lIns="0" tIns="0" rIns="0" bIns="0" rtlCol="0" anchor="t"/>
+          <a:lstStyle/>
+          <a:p>
+            <a:pPr algn="r" indent="0" marL="0">
+              <a:buNone/>
+            </a:pPr>
+            <a:r>
+              <a:rPr lang="en-US" sz="1300" dirty="0">
+                <a:solidFill>
+                  <a:srgbClr val="595959"/>
+                </a:solidFill>
+                <a:latin typeface="Inter" pitchFamily="34" charset="0"/>
+                <a:ea typeface="Inter" pitchFamily="34" charset="-122"/>
+                <a:cs typeface="Inter" pitchFamily="34" charset="-120"/>
+              </a:rPr>
+              <a:t>+$81K</a:t>
+            </a:r>
+            <a:endParaRPr lang="en-US" sz="1300" dirty="0"/>
+          </a:p>
+        </p:txBody>
+      </p:sp>
+      <p:sp>
+        <p:nvSpPr>
+          <p:cNvPr id="72" name="Shape 70"/>
           <p:cNvSpPr/>
           <p:nvPr/>
         </p:nvSpPr>
@@ -37974,7 +38442,7 @@
       </p:sp>
       <p:sp>
         <p:nvSpPr>
-          <p:cNvPr id="61" name="Text 59"/>
+          <p:cNvPr id="73" name="Text 71"/>
           <p:cNvSpPr txBox="1"/>
           <p:nvPr/>
         </p:nvSpPr>
@@ -38013,7 +38481,7 @@
       </p:sp>
       <p:sp>
         <p:nvSpPr>
-          <p:cNvPr id="62" name="Text 60"/>
+          <p:cNvPr id="74" name="Text 72"/>
           <p:cNvSpPr txBox="1"/>
           <p:nvPr/>
         </p:nvSpPr>
@@ -38092,23 +38560,23 @@
       </p:sp>
       <p:sp>
         <p:nvSpPr>
-          <p:cNvPr id="63" name="Text 61"/>
-          <p:cNvSpPr txBox="1"/>
-          <p:nvPr/>
-        </p:nvSpPr>
-        <p:spPr>
-          <a:xfrm>
-            <a:off x="10323576" y="3760013"/>
-            <a:ext cx="1115568" cy="828446"/>
-          </a:xfrm>
-          <a:prstGeom prst="rect">
-            <a:avLst/>
-          </a:prstGeom>
-          <a:noFill/>
-          <a:ln/>
-        </p:spPr>
-        <p:txBody>
-          <a:bodyPr wrap="square" lIns="0" tIns="0" rIns="0" bIns="0" rtlCol="0" anchor="ctr"/>
+          <p:cNvPr id="75" name="Text 73"/>
+          <p:cNvSpPr txBox="1"/>
+          <p:nvPr/>
+        </p:nvSpPr>
+        <p:spPr>
+          <a:xfrm>
+            <a:off x="10323576" y="3859426"/>
+            <a:ext cx="1115568" cy="414223"/>
+          </a:xfrm>
+          <a:prstGeom prst="rect">
+            <a:avLst/>
+          </a:prstGeom>
+          <a:noFill/>
+          <a:ln/>
+        </p:spPr>
+        <p:txBody>
+          <a:bodyPr wrap="square" lIns="0" tIns="0" rIns="0" bIns="0" rtlCol="0" anchor="b"/>
           <a:lstStyle/>
           <a:p>
             <a:pPr algn="r" indent="0" marL="0">
@@ -38131,7 +38599,46 @@
       </p:sp>
       <p:sp>
         <p:nvSpPr>
-          <p:cNvPr id="64" name="Text 62"/>
+          <p:cNvPr id="76" name="Text 74"/>
+          <p:cNvSpPr txBox="1"/>
+          <p:nvPr/>
+        </p:nvSpPr>
+        <p:spPr>
+          <a:xfrm>
+            <a:off x="10323576" y="4240512"/>
+            <a:ext cx="1115568" cy="265103"/>
+          </a:xfrm>
+          <a:prstGeom prst="rect">
+            <a:avLst/>
+          </a:prstGeom>
+          <a:noFill/>
+          <a:ln/>
+        </p:spPr>
+        <p:txBody>
+          <a:bodyPr wrap="square" lIns="0" tIns="0" rIns="0" bIns="0" rtlCol="0" anchor="t"/>
+          <a:lstStyle/>
+          <a:p>
+            <a:pPr algn="r" indent="0" marL="0">
+              <a:buNone/>
+            </a:pPr>
+            <a:r>
+              <a:rPr lang="en-US" sz="1300" dirty="0">
+                <a:solidFill>
+                  <a:srgbClr val="595959"/>
+                </a:solidFill>
+                <a:latin typeface="Inter" pitchFamily="34" charset="0"/>
+                <a:ea typeface="Inter" pitchFamily="34" charset="-122"/>
+                <a:cs typeface="Inter" pitchFamily="34" charset="-120"/>
+              </a:rPr>
+              <a:t>+$40K</a:t>
+            </a:r>
+            <a:endParaRPr lang="en-US" sz="1300" dirty="0"/>
+          </a:p>
+        </p:txBody>
+      </p:sp>
+      <p:sp>
+        <p:nvSpPr>
+          <p:cNvPr id="77" name="Text 75"/>
           <p:cNvSpPr txBox="1"/>
           <p:nvPr/>
         </p:nvSpPr>
@@ -38170,7 +38677,7 @@
       </p:sp>
       <p:sp>
         <p:nvSpPr>
-          <p:cNvPr id="65" name="Text 63"/>
+          <p:cNvPr id="78" name="Text 76"/>
           <p:cNvSpPr txBox="1"/>
           <p:nvPr/>
         </p:nvSpPr>
@@ -38249,23 +38756,23 @@
       </p:sp>
       <p:sp>
         <p:nvSpPr>
-          <p:cNvPr id="66" name="Text 64"/>
-          <p:cNvSpPr txBox="1"/>
-          <p:nvPr/>
-        </p:nvSpPr>
-        <p:spPr>
-          <a:xfrm>
-            <a:off x="10323576" y="4588459"/>
-            <a:ext cx="1115568" cy="828446"/>
-          </a:xfrm>
-          <a:prstGeom prst="rect">
-            <a:avLst/>
-          </a:prstGeom>
-          <a:noFill/>
-          <a:ln/>
-        </p:spPr>
-        <p:txBody>
-          <a:bodyPr wrap="square" lIns="0" tIns="0" rIns="0" bIns="0" rtlCol="0" anchor="ctr"/>
+          <p:cNvPr id="79" name="Text 77"/>
+          <p:cNvSpPr txBox="1"/>
+          <p:nvPr/>
+        </p:nvSpPr>
+        <p:spPr>
+          <a:xfrm>
+            <a:off x="10323576" y="4687873"/>
+            <a:ext cx="1115568" cy="414223"/>
+          </a:xfrm>
+          <a:prstGeom prst="rect">
+            <a:avLst/>
+          </a:prstGeom>
+          <a:noFill/>
+          <a:ln/>
+        </p:spPr>
+        <p:txBody>
+          <a:bodyPr wrap="square" lIns="0" tIns="0" rIns="0" bIns="0" rtlCol="0" anchor="b"/>
           <a:lstStyle/>
           <a:p>
             <a:pPr algn="r" indent="0" marL="0">
@@ -38288,7 +38795,46 @@
       </p:sp>
       <p:sp>
         <p:nvSpPr>
-          <p:cNvPr id="67" name="Shape 65"/>
+          <p:cNvPr id="80" name="Text 78"/>
+          <p:cNvSpPr txBox="1"/>
+          <p:nvPr/>
+        </p:nvSpPr>
+        <p:spPr>
+          <a:xfrm>
+            <a:off x="10323576" y="5068958"/>
+            <a:ext cx="1115568" cy="265103"/>
+          </a:xfrm>
+          <a:prstGeom prst="rect">
+            <a:avLst/>
+          </a:prstGeom>
+          <a:noFill/>
+          <a:ln/>
+        </p:spPr>
+        <p:txBody>
+          <a:bodyPr wrap="square" lIns="0" tIns="0" rIns="0" bIns="0" rtlCol="0" anchor="t"/>
+          <a:lstStyle/>
+          <a:p>
+            <a:pPr algn="r" indent="0" marL="0">
+              <a:buNone/>
+            </a:pPr>
+            <a:r>
+              <a:rPr lang="en-US" sz="1300" dirty="0">
+                <a:solidFill>
+                  <a:srgbClr val="595959"/>
+                </a:solidFill>
+                <a:latin typeface="Inter" pitchFamily="34" charset="0"/>
+                <a:ea typeface="Inter" pitchFamily="34" charset="-122"/>
+                <a:cs typeface="Inter" pitchFamily="34" charset="-120"/>
+              </a:rPr>
+              <a:t>+$38K</a:t>
+            </a:r>
+            <a:endParaRPr lang="en-US" sz="1300" dirty="0"/>
+          </a:p>
+        </p:txBody>
+      </p:sp>
+      <p:sp>
+        <p:nvSpPr>
+          <p:cNvPr id="81" name="Shape 79"/>
           <p:cNvSpPr/>
           <p:nvPr/>
         </p:nvSpPr>
@@ -38308,7 +38854,7 @@
       </p:sp>
       <p:sp>
         <p:nvSpPr>
-          <p:cNvPr id="68" name="Text 66"/>
+          <p:cNvPr id="82" name="Text 80"/>
           <p:cNvSpPr txBox="1"/>
           <p:nvPr/>
         </p:nvSpPr>
@@ -38347,7 +38893,7 @@
       </p:sp>
       <p:sp>
         <p:nvSpPr>
-          <p:cNvPr id="69" name="Text 67"/>
+          <p:cNvPr id="83" name="Text 81"/>
           <p:cNvSpPr txBox="1"/>
           <p:nvPr/>
         </p:nvSpPr>
@@ -38426,23 +38972,23 @@
       </p:sp>
       <p:sp>
         <p:nvSpPr>
-          <p:cNvPr id="70" name="Text 68"/>
-          <p:cNvSpPr txBox="1"/>
-          <p:nvPr/>
-        </p:nvSpPr>
-        <p:spPr>
-          <a:xfrm>
-            <a:off x="10323576" y="5416906"/>
-            <a:ext cx="1115568" cy="828446"/>
-          </a:xfrm>
-          <a:prstGeom prst="rect">
-            <a:avLst/>
-          </a:prstGeom>
-          <a:noFill/>
-          <a:ln/>
-        </p:spPr>
-        <p:txBody>
-          <a:bodyPr wrap="square" lIns="0" tIns="0" rIns="0" bIns="0" rtlCol="0" anchor="ctr"/>
+          <p:cNvPr id="84" name="Text 82"/>
+          <p:cNvSpPr txBox="1"/>
+          <p:nvPr/>
+        </p:nvSpPr>
+        <p:spPr>
+          <a:xfrm>
+            <a:off x="10323576" y="5516319"/>
+            <a:ext cx="1115568" cy="414223"/>
+          </a:xfrm>
+          <a:prstGeom prst="rect">
+            <a:avLst/>
+          </a:prstGeom>
+          <a:noFill/>
+          <a:ln/>
+        </p:spPr>
+        <p:txBody>
+          <a:bodyPr wrap="square" lIns="0" tIns="0" rIns="0" bIns="0" rtlCol="0" anchor="b"/>
           <a:lstStyle/>
           <a:p>
             <a:pPr algn="r" indent="0" marL="0">
@@ -38460,6 +39006,45 @@
               <a:t>+32.4%</a:t>
             </a:r>
             <a:endParaRPr lang="en-US" sz="1600" dirty="0"/>
+          </a:p>
+        </p:txBody>
+      </p:sp>
+      <p:sp>
+        <p:nvSpPr>
+          <p:cNvPr id="85" name="Text 83"/>
+          <p:cNvSpPr txBox="1"/>
+          <p:nvPr/>
+        </p:nvSpPr>
+        <p:spPr>
+          <a:xfrm>
+            <a:off x="10323576" y="5897405"/>
+            <a:ext cx="1115568" cy="265103"/>
+          </a:xfrm>
+          <a:prstGeom prst="rect">
+            <a:avLst/>
+          </a:prstGeom>
+          <a:noFill/>
+          <a:ln/>
+        </p:spPr>
+        <p:txBody>
+          <a:bodyPr wrap="square" lIns="0" tIns="0" rIns="0" bIns="0" rtlCol="0" anchor="t"/>
+          <a:lstStyle/>
+          <a:p>
+            <a:pPr algn="r" indent="0" marL="0">
+              <a:buNone/>
+            </a:pPr>
+            <a:r>
+              <a:rPr lang="en-US" sz="1300" dirty="0">
+                <a:solidFill>
+                  <a:srgbClr val="595959"/>
+                </a:solidFill>
+                <a:latin typeface="Inter" pitchFamily="34" charset="0"/>
+                <a:ea typeface="Inter" pitchFamily="34" charset="-122"/>
+                <a:cs typeface="Inter" pitchFamily="34" charset="-120"/>
+              </a:rPr>
+              <a:t>+$31K</a:t>
+            </a:r>
+            <a:endParaRPr lang="en-US" sz="1300" dirty="0"/>
           </a:p>
         </p:txBody>
       </p:sp>
